--- a/cgf-demo/docs/pitch/Adaptive-CGF-Trainer.pptx
+++ b/cgf-demo/docs/pitch/Adaptive-CGF-Trainer.pptx
@@ -5,7 +5,7 @@
     <p:sldMasterId id="2147483648" r:id="rId1"/>
   </p:sldMasterIdLst>
   <p:notesMasterIdLst>
-    <p:notesMasterId r:id="rId18"/>
+    <p:notesMasterId r:id="rId19"/>
   </p:notesMasterIdLst>
   <p:sldIdLst>
     <p:sldId id="256" r:id="rId2"/>
@@ -24,6 +24,7 @@
     <p:sldId id="269" r:id="rId15"/>
     <p:sldId id="270" r:id="rId16"/>
     <p:sldId id="271" r:id="rId17"/>
+    <p:sldId id="272" r:id="rId18"/>
   </p:sldIdLst>
   <p:sldSz cx="12192000" cy="6858000"/>
   <p:notesSz cx="6858000" cy="9144000"/>
@@ -205,7 +206,7 @@
             </a:lvl1pPr>
           </a:lstStyle>
           <a:p>
-            <a:fld id="{A44C9AF2-D2DB-44AB-81B9-2C672D0BB538}" type="datetimeFigureOut">
+            <a:fld id="{470C1C8F-EDB3-498C-993C-2724C9653F75}" type="datetimeFigureOut">
               <a:rPr lang="en-SG" smtClean="0"/>
               <a:t>29/10/2026</a:t>
             </a:fld>
@@ -364,7 +365,7 @@
             </a:lvl1pPr>
           </a:lstStyle>
           <a:p>
-            <a:fld id="{AF99744E-DA93-4C19-A849-0DAE34FCE43D}" type="slidenum">
+            <a:fld id="{619B7646-CA0D-4554-BFDC-9967B7FA3B0E}" type="slidenum">
               <a:rPr lang="en-SG" smtClean="0"/>
               <a:t>‹#›</a:t>
             </a:fld>
@@ -375,7 +376,7 @@
     </p:spTree>
     <p:extLst>
       <p:ext uri="{BB962C8B-B14F-4D97-AF65-F5344CB8AC3E}">
-        <p14:creationId xmlns:p14="http://schemas.microsoft.com/office/powerpoint/2010/main" val="2411115713"/>
+        <p14:creationId xmlns:p14="http://schemas.microsoft.com/office/powerpoint/2010/main" val="2843258590"/>
       </p:ext>
     </p:extLst>
   </p:cSld>
@@ -541,7 +542,7 @@
           <a:bodyPr/>
           <a:lstStyle/>
           <a:p>
-            <a:fld id="{AF99744E-DA93-4C19-A849-0DAE34FCE43D}" type="slidenum">
+            <a:fld id="{619B7646-CA0D-4554-BFDC-9967B7FA3B0E}" type="slidenum">
               <a:rPr lang="en-SG" smtClean="0"/>
               <a:t>1</a:t>
             </a:fld>
@@ -552,7 +553,7 @@
     </p:spTree>
     <p:extLst>
       <p:ext uri="{BB962C8B-B14F-4D97-AF65-F5344CB8AC3E}">
-        <p14:creationId xmlns:p14="http://schemas.microsoft.com/office/powerpoint/2010/main" val="1439828861"/>
+        <p14:creationId xmlns:p14="http://schemas.microsoft.com/office/powerpoint/2010/main" val="1735056219"/>
       </p:ext>
     </p:extLst>
   </p:cSld>
@@ -608,7 +609,7 @@
           <a:p>
             <a:r>
               <a:rPr lang="en-SG"/>
-              <a:t>Code computes every figure in the report; the narrative is a template. The order is fixed: report, then competency update, then the history entry. The screenshot is a seeded session, not a live run.</a:t>
+              <a:t>Answer the standing worry: does adaptation break standardised assessment? Practice runs adapt, fixed mode is for qualification, and the badge differs. The demo runs with the local LLM off; every LLM feature has a template fallback. Steering: type a request, show the parsed directive, then apply.</a:t>
             </a:r>
           </a:p>
         </p:txBody>
@@ -628,7 +629,7 @@
           <a:bodyPr/>
           <a:lstStyle/>
           <a:p>
-            <a:fld id="{AF99744E-DA93-4C19-A849-0DAE34FCE43D}" type="slidenum">
+            <a:fld id="{619B7646-CA0D-4554-BFDC-9967B7FA3B0E}" type="slidenum">
               <a:rPr lang="en-SG" smtClean="0"/>
               <a:t>10</a:t>
             </a:fld>
@@ -639,7 +640,7 @@
     </p:spTree>
     <p:extLst>
       <p:ext uri="{BB962C8B-B14F-4D97-AF65-F5344CB8AC3E}">
-        <p14:creationId xmlns:p14="http://schemas.microsoft.com/office/powerpoint/2010/main" val="396642598"/>
+        <p14:creationId xmlns:p14="http://schemas.microsoft.com/office/powerpoint/2010/main" val="3029741672"/>
       </p:ext>
     </p:extLst>
   </p:cSld>
@@ -695,7 +696,7 @@
           <a:p>
             <a:r>
               <a:rPr lang="en-SG"/>
-              <a:t>The cohort view is for improving the curriculum, never for judging individuals, and its own banner says so. Adaptive runs give different exercises, so these figures are not qualification results.</a:t>
+              <a:t>Code computes every figure in the report; the narrative is a template. The order is fixed: report, then competency update, then the history entry. The screenshot is a seeded session, not a live run.</a:t>
             </a:r>
           </a:p>
         </p:txBody>
@@ -715,7 +716,7 @@
           <a:bodyPr/>
           <a:lstStyle/>
           <a:p>
-            <a:fld id="{AF99744E-DA93-4C19-A849-0DAE34FCE43D}" type="slidenum">
+            <a:fld id="{619B7646-CA0D-4554-BFDC-9967B7FA3B0E}" type="slidenum">
               <a:rPr lang="en-SG" smtClean="0"/>
               <a:t>11</a:t>
             </a:fld>
@@ -726,7 +727,7 @@
     </p:spTree>
     <p:extLst>
       <p:ext uri="{BB962C8B-B14F-4D97-AF65-F5344CB8AC3E}">
-        <p14:creationId xmlns:p14="http://schemas.microsoft.com/office/powerpoint/2010/main" val="3538399009"/>
+        <p14:creationId xmlns:p14="http://schemas.microsoft.com/office/powerpoint/2010/main" val="4131791674"/>
       </p:ext>
     </p:extLst>
   </p:cSld>
@@ -782,7 +783,7 @@
           <a:p>
             <a:r>
               <a:rPr lang="en-SG"/>
-              <a:t>Be precise about which parts are AI. The trainee model is statistical and learned from events. The policy that adjusts the enemy is rule-based today; a bandit version is planned. The language model is optional and local, used for steering and for rephrasing reasons, and every feature has a template fallback so the demo runs with it off. AI partners are played from parameters derived from earlier runs. The model never invents a number.</a:t>
+              <a:t>The cohort view is for improving the curriculum, never for judging individuals, and its own banner says so. Adaptive runs give different exercises, so these figures are not qualification results.</a:t>
             </a:r>
           </a:p>
         </p:txBody>
@@ -802,7 +803,7 @@
           <a:bodyPr/>
           <a:lstStyle/>
           <a:p>
-            <a:fld id="{AF99744E-DA93-4C19-A849-0DAE34FCE43D}" type="slidenum">
+            <a:fld id="{619B7646-CA0D-4554-BFDC-9967B7FA3B0E}" type="slidenum">
               <a:rPr lang="en-SG" smtClean="0"/>
               <a:t>12</a:t>
             </a:fld>
@@ -813,7 +814,7 @@
     </p:spTree>
     <p:extLst>
       <p:ext uri="{BB962C8B-B14F-4D97-AF65-F5344CB8AC3E}">
-        <p14:creationId xmlns:p14="http://schemas.microsoft.com/office/powerpoint/2010/main" val="692257907"/>
+        <p14:creationId xmlns:p14="http://schemas.microsoft.com/office/powerpoint/2010/main" val="1628261061"/>
       </p:ext>
     </p:extLst>
   </p:cSld>
@@ -869,7 +870,7 @@
           <a:p>
             <a:r>
               <a:rPr lang="en-SG"/>
-              <a:t>The novelty is what the enemy adapts to. Most adaptive training raises or lowers overall difficulty from this run's score. Here the target is a specific competency chosen from the trainee's history, and the pressure is set by what they are doing now. The instructor stays in command and can see every reason. Do not claim that nobody else has done this; this is our reading of common practice, not a product survey.</a:t>
+              <a:t>Be precise about which parts are AI. The trainee model is statistical and learned from events. The policy that adjusts the enemy is rule-based today; a bandit version is planned. The language model is optional and local, used for steering and for rephrasing reasons, and every feature has a template fallback so the demo runs with it off. AI partners are played from parameters derived from earlier runs. The model never invents a number.</a:t>
             </a:r>
           </a:p>
         </p:txBody>
@@ -889,7 +890,7 @@
           <a:bodyPr/>
           <a:lstStyle/>
           <a:p>
-            <a:fld id="{AF99744E-DA93-4C19-A849-0DAE34FCE43D}" type="slidenum">
+            <a:fld id="{619B7646-CA0D-4554-BFDC-9967B7FA3B0E}" type="slidenum">
               <a:rPr lang="en-SG" smtClean="0"/>
               <a:t>13</a:t>
             </a:fld>
@@ -900,7 +901,7 @@
     </p:spTree>
     <p:extLst>
       <p:ext uri="{BB962C8B-B14F-4D97-AF65-F5344CB8AC3E}">
-        <p14:creationId xmlns:p14="http://schemas.microsoft.com/office/powerpoint/2010/main" val="736274515"/>
+        <p14:creationId xmlns:p14="http://schemas.microsoft.com/office/powerpoint/2010/main" val="599484426"/>
       </p:ext>
     </p:extLst>
   </p:cSld>
@@ -956,7 +957,7 @@
           <a:p>
             <a:r>
               <a:rPr lang="en-SG"/>
-              <a:t>Beyond the core loop, what else needs to be done? Left column is what runs today and was tested. Right column is the honest list of what is not built: competency signals for air and land, crew-level adaptation, an adapter to a real simulator over HLA or DIS, a trial with real cohorts, approval for a local model on the event laptops, and the division's figures. The engine changes a small explicit set of CGF settings, which is what makes the adapter feasible.</a:t>
+              <a:t>The novelty is what the enemy adapts to. Most adaptive training raises or lowers overall difficulty from this run's score. Here the target is a specific competency chosen from the trainee's history, and the pressure is set by what they are doing now. The instructor stays in command and can see every reason. Do not claim that nobody else has done this; this is our reading of common practice, not a product survey.</a:t>
             </a:r>
           </a:p>
         </p:txBody>
@@ -976,7 +977,7 @@
           <a:bodyPr/>
           <a:lstStyle/>
           <a:p>
-            <a:fld id="{AF99744E-DA93-4C19-A849-0DAE34FCE43D}" type="slidenum">
+            <a:fld id="{619B7646-CA0D-4554-BFDC-9967B7FA3B0E}" type="slidenum">
               <a:rPr lang="en-SG" smtClean="0"/>
               <a:t>14</a:t>
             </a:fld>
@@ -987,7 +988,7 @@
     </p:spTree>
     <p:extLst>
       <p:ext uri="{BB962C8B-B14F-4D97-AF65-F5344CB8AC3E}">
-        <p14:creationId xmlns:p14="http://schemas.microsoft.com/office/powerpoint/2010/main" val="3836789501"/>
+        <p14:creationId xmlns:p14="http://schemas.microsoft.com/office/powerpoint/2010/main" val="1851650042"/>
       </p:ext>
     </p:extLst>
   </p:cSld>
@@ -1043,7 +1044,7 @@
           <a:p>
             <a:r>
               <a:rPr lang="en-SG"/>
-              <a:t>The audience will want the value in Singapore dollars. This is a sensitivity grid built on stated assumptions, not a claim. The pool of 6,000 sessions a year (200 trainees times 30 sessions) and the value of S1,000 to S3,000 per avoided session are placeholders until the division supplies its own numbers; replace them and the grid follows from saving equals sessions times r times value. r, the share of sessions avoided, has never been measured: it is the hypothesis a trial would test. Say that out loud.</a:t>
+              <a:t>Beyond the core loop, what else needs to be done? Left column is what runs today and was tested. Right column is the honest list of what is not built: competency signals for air and land, crew-level adaptation, an adapter to a real simulator over HLA or DIS, a trial with real cohorts, approval for a local model on the event laptops, and the division's figures. The engine changes a small explicit set of CGF settings, which is what makes the adapter feasible.</a:t>
             </a:r>
           </a:p>
         </p:txBody>
@@ -1063,7 +1064,7 @@
           <a:bodyPr/>
           <a:lstStyle/>
           <a:p>
-            <a:fld id="{AF99744E-DA93-4C19-A849-0DAE34FCE43D}" type="slidenum">
+            <a:fld id="{619B7646-CA0D-4554-BFDC-9967B7FA3B0E}" type="slidenum">
               <a:rPr lang="en-SG" smtClean="0"/>
               <a:t>15</a:t>
             </a:fld>
@@ -1074,7 +1075,7 @@
     </p:spTree>
     <p:extLst>
       <p:ext uri="{BB962C8B-B14F-4D97-AF65-F5344CB8AC3E}">
-        <p14:creationId xmlns:p14="http://schemas.microsoft.com/office/powerpoint/2010/main" val="815971770"/>
+        <p14:creationId xmlns:p14="http://schemas.microsoft.com/office/powerpoint/2010/main" val="2982663240"/>
       </p:ext>
     </p:extLst>
   </p:cSld>
@@ -1130,7 +1131,7 @@
           <a:p>
             <a:r>
               <a:rPr lang="en-SG"/>
-              <a:t>One sentence to close. Then questions: practice runs adapt and fixed mode assesses; the AI acts only inside the instructor’s limits; the demo shows the mechanism, and proving training transfer needs a trial with real cohorts.</a:t>
+              <a:t>The audience will want the value in Singapore dollars. This is a sensitivity grid built on stated assumptions, not a claim. The pool of 6,000 sessions a year (200 trainees times 30 sessions) and the value of S1,000 to S3,000 per avoided session are placeholders until the division supplies its own numbers; replace them and the grid follows from saving equals sessions times r times value. r, the share of sessions avoided, has never been measured: it is the hypothesis a trial would test. Say that out loud.</a:t>
             </a:r>
           </a:p>
         </p:txBody>
@@ -1150,7 +1151,7 @@
           <a:bodyPr/>
           <a:lstStyle/>
           <a:p>
-            <a:fld id="{AF99744E-DA93-4C19-A849-0DAE34FCE43D}" type="slidenum">
+            <a:fld id="{619B7646-CA0D-4554-BFDC-9967B7FA3B0E}" type="slidenum">
               <a:rPr lang="en-SG" smtClean="0"/>
               <a:t>16</a:t>
             </a:fld>
@@ -1161,7 +1162,94 @@
     </p:spTree>
     <p:extLst>
       <p:ext uri="{BB962C8B-B14F-4D97-AF65-F5344CB8AC3E}">
-        <p14:creationId xmlns:p14="http://schemas.microsoft.com/office/powerpoint/2010/main" val="519983156"/>
+        <p14:creationId xmlns:p14="http://schemas.microsoft.com/office/powerpoint/2010/main" val="385464878"/>
+      </p:ext>
+    </p:extLst>
+  </p:cSld>
+  <p:clrMapOvr>
+    <a:masterClrMapping/>
+  </p:clrMapOvr>
+</p:notes>
+</file>
+
+<file path=ppt/notesSlides/notesSlide17.xml><?xml version="1.0" encoding="utf-8"?>
+<p:notes xmlns:a="http://schemas.openxmlformats.org/drawingml/2006/main" xmlns:r="http://schemas.openxmlformats.org/officeDocument/2006/relationships" xmlns:p="http://schemas.openxmlformats.org/presentationml/2006/main">
+  <p:cSld>
+    <p:spTree>
+      <p:nvGrpSpPr>
+        <p:cNvPr id="1" name=""/>
+        <p:cNvGrpSpPr/>
+        <p:nvPr/>
+      </p:nvGrpSpPr>
+      <p:grpSpPr>
+        <a:xfrm>
+          <a:off x="0" y="0"/>
+          <a:ext cx="0" cy="0"/>
+          <a:chOff x="0" y="0"/>
+          <a:chExt cx="0" cy="0"/>
+        </a:xfrm>
+      </p:grpSpPr>
+      <p:sp>
+        <p:nvSpPr>
+          <p:cNvPr id="2" name="Slide Image Placeholder 1"/>
+          <p:cNvSpPr>
+            <a:spLocks noGrp="1" noRot="1" noChangeAspect="1"/>
+          </p:cNvSpPr>
+          <p:nvPr>
+            <p:ph type="sldImg"/>
+          </p:nvPr>
+        </p:nvSpPr>
+        <p:spPr/>
+      </p:sp>
+      <p:sp>
+        <p:nvSpPr>
+          <p:cNvPr id="3" name="Notes Placeholder 2"/>
+          <p:cNvSpPr>
+            <a:spLocks noGrp="1"/>
+          </p:cNvSpPr>
+          <p:nvPr>
+            <p:ph type="body" idx="1"/>
+          </p:nvPr>
+        </p:nvSpPr>
+        <p:spPr/>
+        <p:txBody>
+          <a:bodyPr/>
+          <a:lstStyle/>
+          <a:p>
+            <a:r>
+              <a:rPr lang="en-SG"/>
+              <a:t>One sentence to close. Then questions: practice runs adapt and fixed mode assesses; the AI acts only inside the instructor’s limits; the demo shows the mechanism, and proving training transfer needs a trial with real cohorts.</a:t>
+            </a:r>
+          </a:p>
+        </p:txBody>
+      </p:sp>
+      <p:sp>
+        <p:nvSpPr>
+          <p:cNvPr id="4" name="Slide Number Placeholder 3"/>
+          <p:cNvSpPr>
+            <a:spLocks noGrp="1"/>
+          </p:cNvSpPr>
+          <p:nvPr>
+            <p:ph type="sldNum" sz="quarter" idx="5"/>
+          </p:nvPr>
+        </p:nvSpPr>
+        <p:spPr/>
+        <p:txBody>
+          <a:bodyPr/>
+          <a:lstStyle/>
+          <a:p>
+            <a:fld id="{619B7646-CA0D-4554-BFDC-9967B7FA3B0E}" type="slidenum">
+              <a:rPr lang="en-SG" smtClean="0"/>
+              <a:t>17</a:t>
+            </a:fld>
+            <a:endParaRPr lang="en-SG"/>
+          </a:p>
+        </p:txBody>
+      </p:sp>
+    </p:spTree>
+    <p:extLst>
+      <p:ext uri="{BB962C8B-B14F-4D97-AF65-F5344CB8AC3E}">
+        <p14:creationId xmlns:p14="http://schemas.microsoft.com/office/powerpoint/2010/main" val="818199218"/>
       </p:ext>
     </p:extLst>
   </p:cSld>
@@ -1237,7 +1325,7 @@
           <a:bodyPr/>
           <a:lstStyle/>
           <a:p>
-            <a:fld id="{AF99744E-DA93-4C19-A849-0DAE34FCE43D}" type="slidenum">
+            <a:fld id="{619B7646-CA0D-4554-BFDC-9967B7FA3B0E}" type="slidenum">
               <a:rPr lang="en-SG" smtClean="0"/>
               <a:t>2</a:t>
             </a:fld>
@@ -1248,7 +1336,7 @@
     </p:spTree>
     <p:extLst>
       <p:ext uri="{BB962C8B-B14F-4D97-AF65-F5344CB8AC3E}">
-        <p14:creationId xmlns:p14="http://schemas.microsoft.com/office/powerpoint/2010/main" val="2050830137"/>
+        <p14:creationId xmlns:p14="http://schemas.microsoft.com/office/powerpoint/2010/main" val="2154458824"/>
       </p:ext>
     </p:extLst>
   </p:cSld>
@@ -1324,7 +1412,7 @@
           <a:bodyPr/>
           <a:lstStyle/>
           <a:p>
-            <a:fld id="{AF99744E-DA93-4C19-A849-0DAE34FCE43D}" type="slidenum">
+            <a:fld id="{619B7646-CA0D-4554-BFDC-9967B7FA3B0E}" type="slidenum">
               <a:rPr lang="en-SG" smtClean="0"/>
               <a:t>3</a:t>
             </a:fld>
@@ -1335,7 +1423,7 @@
     </p:spTree>
     <p:extLst>
       <p:ext uri="{BB962C8B-B14F-4D97-AF65-F5344CB8AC3E}">
-        <p14:creationId xmlns:p14="http://schemas.microsoft.com/office/powerpoint/2010/main" val="3581387393"/>
+        <p14:creationId xmlns:p14="http://schemas.microsoft.com/office/powerpoint/2010/main" val="2829620990"/>
       </p:ext>
     </p:extLst>
   </p:cSld>
@@ -1411,7 +1499,7 @@
           <a:bodyPr/>
           <a:lstStyle/>
           <a:p>
-            <a:fld id="{AF99744E-DA93-4C19-A849-0DAE34FCE43D}" type="slidenum">
+            <a:fld id="{619B7646-CA0D-4554-BFDC-9967B7FA3B0E}" type="slidenum">
               <a:rPr lang="en-SG" smtClean="0"/>
               <a:t>4</a:t>
             </a:fld>
@@ -1422,7 +1510,7 @@
     </p:spTree>
     <p:extLst>
       <p:ext uri="{BB962C8B-B14F-4D97-AF65-F5344CB8AC3E}">
-        <p14:creationId xmlns:p14="http://schemas.microsoft.com/office/powerpoint/2010/main" val="3943130569"/>
+        <p14:creationId xmlns:p14="http://schemas.microsoft.com/office/powerpoint/2010/main" val="1443280468"/>
       </p:ext>
     </p:extLst>
   </p:cSld>
@@ -1478,7 +1566,7 @@
           <a:p>
             <a:r>
               <a:rPr lang="en-SG"/>
-              <a:t>Four steps, each a page that opens from a file. The report feeds the competency update, which writes the trainee’s history, so the loop closes. Next slides walk through the steps.</a:t>
+              <a:t>This is the loop that makes the trainer improve with use. Allocate shows the likely first target from the profile. The run presses that competency, then follows what the trainee does. The report is computed from the run's events, and the same events update the profile, so the next session starts from what this one learned. Each pass adds evidence, so the picture of each trainee gets sharper and the practice is better aimed. Next slide shows it on real seeded history.</a:t>
             </a:r>
           </a:p>
         </p:txBody>
@@ -1498,7 +1586,7 @@
           <a:bodyPr/>
           <a:lstStyle/>
           <a:p>
-            <a:fld id="{AF99744E-DA93-4C19-A849-0DAE34FCE43D}" type="slidenum">
+            <a:fld id="{619B7646-CA0D-4554-BFDC-9967B7FA3B0E}" type="slidenum">
               <a:rPr lang="en-SG" smtClean="0"/>
               <a:t>5</a:t>
             </a:fld>
@@ -1509,7 +1597,7 @@
     </p:spTree>
     <p:extLst>
       <p:ext uri="{BB962C8B-B14F-4D97-AF65-F5344CB8AC3E}">
-        <p14:creationId xmlns:p14="http://schemas.microsoft.com/office/powerpoint/2010/main" val="2196783625"/>
+        <p14:creationId xmlns:p14="http://schemas.microsoft.com/office/powerpoint/2010/main" val="1140981900"/>
       </p:ext>
     </p:extLst>
   </p:cSld>
@@ -1565,7 +1653,7 @@
           <a:p>
             <a:r>
               <a:rPr lang="en-SG"/>
-              <a:t>Live beat if the demo runs: pick the warship, press Suggest demo crew, point at the competency bars and the likely first target, then the Adaptive practice badge. Fallback: this screenshot. All names are synthetic.</a:t>
+              <a:t>Be exact about what learns. The trainee model learns: every session's events update its estimate, so the picture sharpens as evidence grows. Here is Ben's hail discipline across his seeded history: the estimate stays low, so he stays a focus area, but the range around it narrows from about 0.11 to 0.08 as the events behind it grow from 13 to 30. Targeting improves because a competency only counts with 8 events. AI partners are played from a trainee's own past runs. What does not learn yet is the policy that picks the adjustments: it is rule-based today, and a bandit that learns which adjustments work is planned. Do not claim the trainer learns tactics.</a:t>
             </a:r>
           </a:p>
         </p:txBody>
@@ -1585,7 +1673,7 @@
           <a:bodyPr/>
           <a:lstStyle/>
           <a:p>
-            <a:fld id="{AF99744E-DA93-4C19-A849-0DAE34FCE43D}" type="slidenum">
+            <a:fld id="{619B7646-CA0D-4554-BFDC-9967B7FA3B0E}" type="slidenum">
               <a:rPr lang="en-SG" smtClean="0"/>
               <a:t>6</a:t>
             </a:fld>
@@ -1596,7 +1684,7 @@
     </p:spTree>
     <p:extLst>
       <p:ext uri="{BB962C8B-B14F-4D97-AF65-F5344CB8AC3E}">
-        <p14:creationId xmlns:p14="http://schemas.microsoft.com/office/powerpoint/2010/main" val="3823977209"/>
+        <p14:creationId xmlns:p14="http://schemas.microsoft.com/office/powerpoint/2010/main" val="2823404255"/>
       </p:ext>
     </p:extLst>
   </p:cSld>
@@ -1652,7 +1740,7 @@
           <a:p>
             <a:r>
               <a:rPr lang="en-SG"/>
-              <a:t>Warship crew on the strait transit scenario, the one scenario with a competency signal today. Start the run. The CGFs press hails at the navigation seat because that is the history-based target. Fallback: the recorded clip.</a:t>
+              <a:t>Live beat if the demo runs: pick the warship, press Suggest demo crew, point at the competency bars and the likely first target, then the Adaptive practice badge. Fallback: this screenshot. All names are synthetic.</a:t>
             </a:r>
           </a:p>
         </p:txBody>
@@ -1672,7 +1760,7 @@
           <a:bodyPr/>
           <a:lstStyle/>
           <a:p>
-            <a:fld id="{AF99744E-DA93-4C19-A849-0DAE34FCE43D}" type="slidenum">
+            <a:fld id="{619B7646-CA0D-4554-BFDC-9967B7FA3B0E}" type="slidenum">
               <a:rPr lang="en-SG" smtClean="0"/>
               <a:t>7</a:t>
             </a:fld>
@@ -1683,7 +1771,7 @@
     </p:spTree>
     <p:extLst>
       <p:ext uri="{BB962C8B-B14F-4D97-AF65-F5344CB8AC3E}">
-        <p14:creationId xmlns:p14="http://schemas.microsoft.com/office/powerpoint/2010/main" val="4089860726"/>
+        <p14:creationId xmlns:p14="http://schemas.microsoft.com/office/powerpoint/2010/main" val="3528106714"/>
       </p:ext>
     </p:extLst>
   </p:cSld>
@@ -1739,7 +1827,7 @@
           <a:p>
             <a:r>
               <a:rPr lang="en-SG"/>
-              <a:t>The screenshot is a real entry from the demo run: trainee_b handled 4 of the last 5 hail discipline events, so the weight on ignored warnings went from 2.2 to 2.5 to raise the pressure. Each entry shows direction, setting change, the evidence events and a one-line reason, tagged history, live, team or instructor. The rule on the right: above 70 percent the CGFs get harder, below 40 percent they ease off, never below the instructor's base.</a:t>
+              <a:t>Warship crew on the strait transit scenario, the one scenario with a competency signal today. Start the run. The CGFs press hails at the navigation seat because that is the history-based target. Fallback: the recorded clip.</a:t>
             </a:r>
           </a:p>
         </p:txBody>
@@ -1759,7 +1847,7 @@
           <a:bodyPr/>
           <a:lstStyle/>
           <a:p>
-            <a:fld id="{AF99744E-DA93-4C19-A849-0DAE34FCE43D}" type="slidenum">
+            <a:fld id="{619B7646-CA0D-4554-BFDC-9967B7FA3B0E}" type="slidenum">
               <a:rPr lang="en-SG" smtClean="0"/>
               <a:t>8</a:t>
             </a:fld>
@@ -1770,7 +1858,7 @@
     </p:spTree>
     <p:extLst>
       <p:ext uri="{BB962C8B-B14F-4D97-AF65-F5344CB8AC3E}">
-        <p14:creationId xmlns:p14="http://schemas.microsoft.com/office/powerpoint/2010/main" val="3109872451"/>
+        <p14:creationId xmlns:p14="http://schemas.microsoft.com/office/powerpoint/2010/main" val="3263022646"/>
       </p:ext>
     </p:extLst>
   </p:cSld>
@@ -1826,7 +1914,7 @@
           <a:p>
             <a:r>
               <a:rPr lang="en-SG"/>
-              <a:t>Answer the standing worry: does adaptation break standardised assessment? Practice runs adapt, fixed mode is for qualification, and the badge differs. The demo runs with the local LLM off; every LLM feature has a template fallback. Steering: type a request, show the parsed directive, then apply.</a:t>
+              <a:t>The screenshot is a real entry from the demo run: trainee_b handled 4 of the last 5 hail discipline events, so the weight on ignored warnings went from 2.2 to 2.5 to raise the pressure. Each entry shows direction, setting change, the evidence events and a one-line reason, tagged history, live, team or instructor. The rule on the right: above 70 percent the CGFs get harder, below 40 percent they ease off, never below the instructor's base.</a:t>
             </a:r>
           </a:p>
         </p:txBody>
@@ -1846,7 +1934,7 @@
           <a:bodyPr/>
           <a:lstStyle/>
           <a:p>
-            <a:fld id="{AF99744E-DA93-4C19-A849-0DAE34FCE43D}" type="slidenum">
+            <a:fld id="{619B7646-CA0D-4554-BFDC-9967B7FA3B0E}" type="slidenum">
               <a:rPr lang="en-SG" smtClean="0"/>
               <a:t>9</a:t>
             </a:fld>
@@ -1857,7 +1945,7 @@
     </p:spTree>
     <p:extLst>
       <p:ext uri="{BB962C8B-B14F-4D97-AF65-F5344CB8AC3E}">
-        <p14:creationId xmlns:p14="http://schemas.microsoft.com/office/powerpoint/2010/main" val="3445324574"/>
+        <p14:creationId xmlns:p14="http://schemas.microsoft.com/office/powerpoint/2010/main" val="3406625211"/>
       </p:ext>
     </p:extLst>
   </p:cSld>
@@ -1889,7 +1977,7 @@
           <p:cNvPr id="2" name="Title 1">
             <a:extLst>
               <a:ext uri="{FF2B5EF4-FFF2-40B4-BE49-F238E27FC236}">
-                <a16:creationId xmlns:a16="http://schemas.microsoft.com/office/drawing/2014/main" id="{465ACDE1-397A-C2ED-5B5A-09CDC3814C5A}"/>
+                <a16:creationId xmlns:a16="http://schemas.microsoft.com/office/drawing/2014/main" id="{E0B82D43-0EB7-322B-9459-B87FADBFA255}"/>
               </a:ext>
             </a:extLst>
           </p:cNvPr>
@@ -1927,7 +2015,7 @@
           <p:cNvPr id="3" name="Subtitle 2">
             <a:extLst>
               <a:ext uri="{FF2B5EF4-FFF2-40B4-BE49-F238E27FC236}">
-                <a16:creationId xmlns:a16="http://schemas.microsoft.com/office/drawing/2014/main" id="{9199DF73-23E7-8277-EAC6-A39F124F47E5}"/>
+                <a16:creationId xmlns:a16="http://schemas.microsoft.com/office/drawing/2014/main" id="{1CDF7BB1-63D8-9553-7288-FF7C05DAFB12}"/>
               </a:ext>
             </a:extLst>
           </p:cNvPr>
@@ -1998,7 +2086,7 @@
           <p:cNvPr id="4" name="Date Placeholder 3">
             <a:extLst>
               <a:ext uri="{FF2B5EF4-FFF2-40B4-BE49-F238E27FC236}">
-                <a16:creationId xmlns:a16="http://schemas.microsoft.com/office/drawing/2014/main" id="{74B29CFD-03AE-5826-29C2-FCFC73310943}"/>
+                <a16:creationId xmlns:a16="http://schemas.microsoft.com/office/drawing/2014/main" id="{813186F6-B131-42C6-31E1-7375FA85976E}"/>
               </a:ext>
             </a:extLst>
           </p:cNvPr>
@@ -2014,7 +2102,7 @@
           <a:bodyPr/>
           <a:lstStyle/>
           <a:p>
-            <a:fld id="{C847731D-21F9-46DF-9E5B-DE6BE2C2912D}" type="datetimeFigureOut">
+            <a:fld id="{945DF60E-9C85-43C8-A8C3-1D48C2D6D25E}" type="datetimeFigureOut">
               <a:rPr lang="en-SG" smtClean="0"/>
               <a:t>29/10/2026</a:t>
             </a:fld>
@@ -2027,7 +2115,7 @@
           <p:cNvPr id="5" name="Footer Placeholder 4">
             <a:extLst>
               <a:ext uri="{FF2B5EF4-FFF2-40B4-BE49-F238E27FC236}">
-                <a16:creationId xmlns:a16="http://schemas.microsoft.com/office/drawing/2014/main" id="{EEEE39AD-C583-0341-AE71-B44CE2B9604E}"/>
+                <a16:creationId xmlns:a16="http://schemas.microsoft.com/office/drawing/2014/main" id="{78F4A372-BA27-1677-C6BB-5B8B0AECBDD8}"/>
               </a:ext>
             </a:extLst>
           </p:cNvPr>
@@ -2052,7 +2140,7 @@
           <p:cNvPr id="6" name="Slide Number Placeholder 5">
             <a:extLst>
               <a:ext uri="{FF2B5EF4-FFF2-40B4-BE49-F238E27FC236}">
-                <a16:creationId xmlns:a16="http://schemas.microsoft.com/office/drawing/2014/main" id="{5AE6B542-6E71-AE29-E846-75858496CDB3}"/>
+                <a16:creationId xmlns:a16="http://schemas.microsoft.com/office/drawing/2014/main" id="{4A6DD423-FA1D-90FF-47F7-D55064E1916D}"/>
               </a:ext>
             </a:extLst>
           </p:cNvPr>
@@ -2068,7 +2156,7 @@
           <a:bodyPr/>
           <a:lstStyle/>
           <a:p>
-            <a:fld id="{BB6C54BB-3A77-45B9-985A-EDE813E42F0F}" type="slidenum">
+            <a:fld id="{F6AA237F-47F2-4AF9-A1AC-074287E22A0A}" type="slidenum">
               <a:rPr lang="en-SG" smtClean="0"/>
               <a:t>‹#›</a:t>
             </a:fld>
@@ -2079,7 +2167,7 @@
     </p:spTree>
     <p:extLst>
       <p:ext uri="{BB962C8B-B14F-4D97-AF65-F5344CB8AC3E}">
-        <p14:creationId xmlns:p14="http://schemas.microsoft.com/office/powerpoint/2010/main" val="133164356"/>
+        <p14:creationId xmlns:p14="http://schemas.microsoft.com/office/powerpoint/2010/main" val="616433945"/>
       </p:ext>
     </p:extLst>
   </p:cSld>
@@ -2111,7 +2199,7 @@
           <p:cNvPr id="2" name="Title 1">
             <a:extLst>
               <a:ext uri="{FF2B5EF4-FFF2-40B4-BE49-F238E27FC236}">
-                <a16:creationId xmlns:a16="http://schemas.microsoft.com/office/drawing/2014/main" id="{7E63CAB1-DF7C-7314-52AE-EC3F0FA21C0F}"/>
+                <a16:creationId xmlns:a16="http://schemas.microsoft.com/office/drawing/2014/main" id="{338702B3-8675-0F64-DE21-A73B08C6A241}"/>
               </a:ext>
             </a:extLst>
           </p:cNvPr>
@@ -2140,7 +2228,7 @@
           <p:cNvPr id="3" name="Vertical Text Placeholder 2">
             <a:extLst>
               <a:ext uri="{FF2B5EF4-FFF2-40B4-BE49-F238E27FC236}">
-                <a16:creationId xmlns:a16="http://schemas.microsoft.com/office/drawing/2014/main" id="{88B4280E-CFFE-46B2-EC32-3940504BBF4F}"/>
+                <a16:creationId xmlns:a16="http://schemas.microsoft.com/office/drawing/2014/main" id="{ED5C3562-8C08-0D8B-AAAE-DDDF74E29927}"/>
               </a:ext>
             </a:extLst>
           </p:cNvPr>
@@ -2198,7 +2286,7 @@
           <p:cNvPr id="4" name="Date Placeholder 3">
             <a:extLst>
               <a:ext uri="{FF2B5EF4-FFF2-40B4-BE49-F238E27FC236}">
-                <a16:creationId xmlns:a16="http://schemas.microsoft.com/office/drawing/2014/main" id="{437001B4-F63D-3943-0122-1C0B15637E8B}"/>
+                <a16:creationId xmlns:a16="http://schemas.microsoft.com/office/drawing/2014/main" id="{0DE8D9EA-D1D1-E6F1-41D8-76EAAADE0B8B}"/>
               </a:ext>
             </a:extLst>
           </p:cNvPr>
@@ -2214,7 +2302,7 @@
           <a:bodyPr/>
           <a:lstStyle/>
           <a:p>
-            <a:fld id="{C847731D-21F9-46DF-9E5B-DE6BE2C2912D}" type="datetimeFigureOut">
+            <a:fld id="{945DF60E-9C85-43C8-A8C3-1D48C2D6D25E}" type="datetimeFigureOut">
               <a:rPr lang="en-SG" smtClean="0"/>
               <a:t>29/10/2026</a:t>
             </a:fld>
@@ -2227,7 +2315,7 @@
           <p:cNvPr id="5" name="Footer Placeholder 4">
             <a:extLst>
               <a:ext uri="{FF2B5EF4-FFF2-40B4-BE49-F238E27FC236}">
-                <a16:creationId xmlns:a16="http://schemas.microsoft.com/office/drawing/2014/main" id="{51938765-F44D-A90A-DF11-60BD47DCBF4A}"/>
+                <a16:creationId xmlns:a16="http://schemas.microsoft.com/office/drawing/2014/main" id="{45ACA899-DD05-D825-245A-E71A622FE8A0}"/>
               </a:ext>
             </a:extLst>
           </p:cNvPr>
@@ -2252,7 +2340,7 @@
           <p:cNvPr id="6" name="Slide Number Placeholder 5">
             <a:extLst>
               <a:ext uri="{FF2B5EF4-FFF2-40B4-BE49-F238E27FC236}">
-                <a16:creationId xmlns:a16="http://schemas.microsoft.com/office/drawing/2014/main" id="{1C7C9317-AF46-A5AB-3F39-14980A03081B}"/>
+                <a16:creationId xmlns:a16="http://schemas.microsoft.com/office/drawing/2014/main" id="{023C17F3-A8F1-75A6-93C0-5818FD42AF5B}"/>
               </a:ext>
             </a:extLst>
           </p:cNvPr>
@@ -2268,7 +2356,7 @@
           <a:bodyPr/>
           <a:lstStyle/>
           <a:p>
-            <a:fld id="{BB6C54BB-3A77-45B9-985A-EDE813E42F0F}" type="slidenum">
+            <a:fld id="{F6AA237F-47F2-4AF9-A1AC-074287E22A0A}" type="slidenum">
               <a:rPr lang="en-SG" smtClean="0"/>
               <a:t>‹#›</a:t>
             </a:fld>
@@ -2279,7 +2367,7 @@
     </p:spTree>
     <p:extLst>
       <p:ext uri="{BB962C8B-B14F-4D97-AF65-F5344CB8AC3E}">
-        <p14:creationId xmlns:p14="http://schemas.microsoft.com/office/powerpoint/2010/main" val="2356737658"/>
+        <p14:creationId xmlns:p14="http://schemas.microsoft.com/office/powerpoint/2010/main" val="424840021"/>
       </p:ext>
     </p:extLst>
   </p:cSld>
@@ -2311,7 +2399,7 @@
           <p:cNvPr id="2" name="Vertical Title 1">
             <a:extLst>
               <a:ext uri="{FF2B5EF4-FFF2-40B4-BE49-F238E27FC236}">
-                <a16:creationId xmlns:a16="http://schemas.microsoft.com/office/drawing/2014/main" id="{669300EC-8A24-452A-9DB6-2B33FDA1960A}"/>
+                <a16:creationId xmlns:a16="http://schemas.microsoft.com/office/drawing/2014/main" id="{55D9282B-99EF-9747-F2F3-9F307A2C936E}"/>
               </a:ext>
             </a:extLst>
           </p:cNvPr>
@@ -2345,7 +2433,7 @@
           <p:cNvPr id="3" name="Vertical Text Placeholder 2">
             <a:extLst>
               <a:ext uri="{FF2B5EF4-FFF2-40B4-BE49-F238E27FC236}">
-                <a16:creationId xmlns:a16="http://schemas.microsoft.com/office/drawing/2014/main" id="{EBAECA1F-40D7-6483-4B94-7EDECBF4B578}"/>
+                <a16:creationId xmlns:a16="http://schemas.microsoft.com/office/drawing/2014/main" id="{6C9A07AC-C499-FF37-D995-D9358F9F9F47}"/>
               </a:ext>
             </a:extLst>
           </p:cNvPr>
@@ -2408,7 +2496,7 @@
           <p:cNvPr id="4" name="Date Placeholder 3">
             <a:extLst>
               <a:ext uri="{FF2B5EF4-FFF2-40B4-BE49-F238E27FC236}">
-                <a16:creationId xmlns:a16="http://schemas.microsoft.com/office/drawing/2014/main" id="{C9A6FB2D-09BF-7D55-996F-A4442F3C09EE}"/>
+                <a16:creationId xmlns:a16="http://schemas.microsoft.com/office/drawing/2014/main" id="{7DEB2489-A88C-9C56-41DB-3403E53D6AC7}"/>
               </a:ext>
             </a:extLst>
           </p:cNvPr>
@@ -2424,7 +2512,7 @@
           <a:bodyPr/>
           <a:lstStyle/>
           <a:p>
-            <a:fld id="{C847731D-21F9-46DF-9E5B-DE6BE2C2912D}" type="datetimeFigureOut">
+            <a:fld id="{945DF60E-9C85-43C8-A8C3-1D48C2D6D25E}" type="datetimeFigureOut">
               <a:rPr lang="en-SG" smtClean="0"/>
               <a:t>29/10/2026</a:t>
             </a:fld>
@@ -2437,7 +2525,7 @@
           <p:cNvPr id="5" name="Footer Placeholder 4">
             <a:extLst>
               <a:ext uri="{FF2B5EF4-FFF2-40B4-BE49-F238E27FC236}">
-                <a16:creationId xmlns:a16="http://schemas.microsoft.com/office/drawing/2014/main" id="{AA807DD3-154F-988A-85EA-0D5F299A14C5}"/>
+                <a16:creationId xmlns:a16="http://schemas.microsoft.com/office/drawing/2014/main" id="{4A2EB01C-666B-DA47-6330-2D6082FA686B}"/>
               </a:ext>
             </a:extLst>
           </p:cNvPr>
@@ -2462,7 +2550,7 @@
           <p:cNvPr id="6" name="Slide Number Placeholder 5">
             <a:extLst>
               <a:ext uri="{FF2B5EF4-FFF2-40B4-BE49-F238E27FC236}">
-                <a16:creationId xmlns:a16="http://schemas.microsoft.com/office/drawing/2014/main" id="{45B8D034-9820-18A2-A941-A4E734BB16D6}"/>
+                <a16:creationId xmlns:a16="http://schemas.microsoft.com/office/drawing/2014/main" id="{5FB0DAEF-8B51-1E79-9911-54C97FD8DE22}"/>
               </a:ext>
             </a:extLst>
           </p:cNvPr>
@@ -2478,7 +2566,7 @@
           <a:bodyPr/>
           <a:lstStyle/>
           <a:p>
-            <a:fld id="{BB6C54BB-3A77-45B9-985A-EDE813E42F0F}" type="slidenum">
+            <a:fld id="{F6AA237F-47F2-4AF9-A1AC-074287E22A0A}" type="slidenum">
               <a:rPr lang="en-SG" smtClean="0"/>
               <a:t>‹#›</a:t>
             </a:fld>
@@ -2489,7 +2577,7 @@
     </p:spTree>
     <p:extLst>
       <p:ext uri="{BB962C8B-B14F-4D97-AF65-F5344CB8AC3E}">
-        <p14:creationId xmlns:p14="http://schemas.microsoft.com/office/powerpoint/2010/main" val="1099691312"/>
+        <p14:creationId xmlns:p14="http://schemas.microsoft.com/office/powerpoint/2010/main" val="23882218"/>
       </p:ext>
     </p:extLst>
   </p:cSld>
@@ -2521,7 +2609,7 @@
           <p:cNvPr id="2" name="Title 1">
             <a:extLst>
               <a:ext uri="{FF2B5EF4-FFF2-40B4-BE49-F238E27FC236}">
-                <a16:creationId xmlns:a16="http://schemas.microsoft.com/office/drawing/2014/main" id="{19DC49C4-01F7-F437-6D27-F5920205B562}"/>
+                <a16:creationId xmlns:a16="http://schemas.microsoft.com/office/drawing/2014/main" id="{B57B4CE4-C215-1BD0-AE80-FCD3821CF11C}"/>
               </a:ext>
             </a:extLst>
           </p:cNvPr>
@@ -2550,7 +2638,7 @@
           <p:cNvPr id="3" name="Content Placeholder 2">
             <a:extLst>
               <a:ext uri="{FF2B5EF4-FFF2-40B4-BE49-F238E27FC236}">
-                <a16:creationId xmlns:a16="http://schemas.microsoft.com/office/drawing/2014/main" id="{4964FDC8-8B66-CDC6-A9AB-E240011A3677}"/>
+                <a16:creationId xmlns:a16="http://schemas.microsoft.com/office/drawing/2014/main" id="{3E4BA42E-8326-D367-C745-FED66A602F1E}"/>
               </a:ext>
             </a:extLst>
           </p:cNvPr>
@@ -2608,7 +2696,7 @@
           <p:cNvPr id="4" name="Date Placeholder 3">
             <a:extLst>
               <a:ext uri="{FF2B5EF4-FFF2-40B4-BE49-F238E27FC236}">
-                <a16:creationId xmlns:a16="http://schemas.microsoft.com/office/drawing/2014/main" id="{E68E9DC7-01F3-54E3-4EAB-7447437377F8}"/>
+                <a16:creationId xmlns:a16="http://schemas.microsoft.com/office/drawing/2014/main" id="{8FB03A28-81D3-A76E-1762-6C6DF4E476D4}"/>
               </a:ext>
             </a:extLst>
           </p:cNvPr>
@@ -2624,7 +2712,7 @@
           <a:bodyPr/>
           <a:lstStyle/>
           <a:p>
-            <a:fld id="{C847731D-21F9-46DF-9E5B-DE6BE2C2912D}" type="datetimeFigureOut">
+            <a:fld id="{945DF60E-9C85-43C8-A8C3-1D48C2D6D25E}" type="datetimeFigureOut">
               <a:rPr lang="en-SG" smtClean="0"/>
               <a:t>29/10/2026</a:t>
             </a:fld>
@@ -2637,7 +2725,7 @@
           <p:cNvPr id="5" name="Footer Placeholder 4">
             <a:extLst>
               <a:ext uri="{FF2B5EF4-FFF2-40B4-BE49-F238E27FC236}">
-                <a16:creationId xmlns:a16="http://schemas.microsoft.com/office/drawing/2014/main" id="{BC5CB633-CAE0-33DA-200C-8E5CF73FE33E}"/>
+                <a16:creationId xmlns:a16="http://schemas.microsoft.com/office/drawing/2014/main" id="{FF80D3DB-1418-FC8C-CD0A-69180F3443FC}"/>
               </a:ext>
             </a:extLst>
           </p:cNvPr>
@@ -2662,7 +2750,7 @@
           <p:cNvPr id="6" name="Slide Number Placeholder 5">
             <a:extLst>
               <a:ext uri="{FF2B5EF4-FFF2-40B4-BE49-F238E27FC236}">
-                <a16:creationId xmlns:a16="http://schemas.microsoft.com/office/drawing/2014/main" id="{E43475A3-9F61-67C6-605A-C504E1CFBE07}"/>
+                <a16:creationId xmlns:a16="http://schemas.microsoft.com/office/drawing/2014/main" id="{AC66F50D-54B6-0607-7FFA-52BFD58CBE7D}"/>
               </a:ext>
             </a:extLst>
           </p:cNvPr>
@@ -2678,7 +2766,7 @@
           <a:bodyPr/>
           <a:lstStyle/>
           <a:p>
-            <a:fld id="{BB6C54BB-3A77-45B9-985A-EDE813E42F0F}" type="slidenum">
+            <a:fld id="{F6AA237F-47F2-4AF9-A1AC-074287E22A0A}" type="slidenum">
               <a:rPr lang="en-SG" smtClean="0"/>
               <a:t>‹#›</a:t>
             </a:fld>
@@ -2689,7 +2777,7 @@
     </p:spTree>
     <p:extLst>
       <p:ext uri="{BB962C8B-B14F-4D97-AF65-F5344CB8AC3E}">
-        <p14:creationId xmlns:p14="http://schemas.microsoft.com/office/powerpoint/2010/main" val="3978425273"/>
+        <p14:creationId xmlns:p14="http://schemas.microsoft.com/office/powerpoint/2010/main" val="1101003846"/>
       </p:ext>
     </p:extLst>
   </p:cSld>
@@ -2721,7 +2809,7 @@
           <p:cNvPr id="2" name="Title 1">
             <a:extLst>
               <a:ext uri="{FF2B5EF4-FFF2-40B4-BE49-F238E27FC236}">
-                <a16:creationId xmlns:a16="http://schemas.microsoft.com/office/drawing/2014/main" id="{9781229F-57E0-0546-FA8E-A8A9536BDEA9}"/>
+                <a16:creationId xmlns:a16="http://schemas.microsoft.com/office/drawing/2014/main" id="{EABB5C07-98A7-6317-3D0D-AA6FF1B48105}"/>
               </a:ext>
             </a:extLst>
           </p:cNvPr>
@@ -2759,7 +2847,7 @@
           <p:cNvPr id="3" name="Text Placeholder 2">
             <a:extLst>
               <a:ext uri="{FF2B5EF4-FFF2-40B4-BE49-F238E27FC236}">
-                <a16:creationId xmlns:a16="http://schemas.microsoft.com/office/drawing/2014/main" id="{7D252799-A18E-B482-8824-ABD51C7374D1}"/>
+                <a16:creationId xmlns:a16="http://schemas.microsoft.com/office/drawing/2014/main" id="{0302CEC9-5C64-C3D8-ECAC-C666E927F4B8}"/>
               </a:ext>
             </a:extLst>
           </p:cNvPr>
@@ -2884,7 +2972,7 @@
           <p:cNvPr id="4" name="Date Placeholder 3">
             <a:extLst>
               <a:ext uri="{FF2B5EF4-FFF2-40B4-BE49-F238E27FC236}">
-                <a16:creationId xmlns:a16="http://schemas.microsoft.com/office/drawing/2014/main" id="{8F265FF8-DDDF-1C53-CFDE-9F041F676DD8}"/>
+                <a16:creationId xmlns:a16="http://schemas.microsoft.com/office/drawing/2014/main" id="{E1A95F6C-DBC5-8AF4-0FA3-56BE11F8631E}"/>
               </a:ext>
             </a:extLst>
           </p:cNvPr>
@@ -2900,7 +2988,7 @@
           <a:bodyPr/>
           <a:lstStyle/>
           <a:p>
-            <a:fld id="{C847731D-21F9-46DF-9E5B-DE6BE2C2912D}" type="datetimeFigureOut">
+            <a:fld id="{945DF60E-9C85-43C8-A8C3-1D48C2D6D25E}" type="datetimeFigureOut">
               <a:rPr lang="en-SG" smtClean="0"/>
               <a:t>29/10/2026</a:t>
             </a:fld>
@@ -2913,7 +3001,7 @@
           <p:cNvPr id="5" name="Footer Placeholder 4">
             <a:extLst>
               <a:ext uri="{FF2B5EF4-FFF2-40B4-BE49-F238E27FC236}">
-                <a16:creationId xmlns:a16="http://schemas.microsoft.com/office/drawing/2014/main" id="{4791162A-4D43-7E77-F7E2-ABF5B021C9C6}"/>
+                <a16:creationId xmlns:a16="http://schemas.microsoft.com/office/drawing/2014/main" id="{D0FFC486-8C0C-97D2-70C6-4B88B314B6B6}"/>
               </a:ext>
             </a:extLst>
           </p:cNvPr>
@@ -2938,7 +3026,7 @@
           <p:cNvPr id="6" name="Slide Number Placeholder 5">
             <a:extLst>
               <a:ext uri="{FF2B5EF4-FFF2-40B4-BE49-F238E27FC236}">
-                <a16:creationId xmlns:a16="http://schemas.microsoft.com/office/drawing/2014/main" id="{B498378C-62FD-12E6-A711-304F640F6C8F}"/>
+                <a16:creationId xmlns:a16="http://schemas.microsoft.com/office/drawing/2014/main" id="{B1761EF4-1463-92FD-2DC4-1CB1B054899E}"/>
               </a:ext>
             </a:extLst>
           </p:cNvPr>
@@ -2954,7 +3042,7 @@
           <a:bodyPr/>
           <a:lstStyle/>
           <a:p>
-            <a:fld id="{BB6C54BB-3A77-45B9-985A-EDE813E42F0F}" type="slidenum">
+            <a:fld id="{F6AA237F-47F2-4AF9-A1AC-074287E22A0A}" type="slidenum">
               <a:rPr lang="en-SG" smtClean="0"/>
               <a:t>‹#›</a:t>
             </a:fld>
@@ -2965,7 +3053,7 @@
     </p:spTree>
     <p:extLst>
       <p:ext uri="{BB962C8B-B14F-4D97-AF65-F5344CB8AC3E}">
-        <p14:creationId xmlns:p14="http://schemas.microsoft.com/office/powerpoint/2010/main" val="2915425363"/>
+        <p14:creationId xmlns:p14="http://schemas.microsoft.com/office/powerpoint/2010/main" val="4205937730"/>
       </p:ext>
     </p:extLst>
   </p:cSld>
@@ -2997,7 +3085,7 @@
           <p:cNvPr id="2" name="Title 1">
             <a:extLst>
               <a:ext uri="{FF2B5EF4-FFF2-40B4-BE49-F238E27FC236}">
-                <a16:creationId xmlns:a16="http://schemas.microsoft.com/office/drawing/2014/main" id="{AA6960AB-4B75-F584-8EFB-E667C08045AB}"/>
+                <a16:creationId xmlns:a16="http://schemas.microsoft.com/office/drawing/2014/main" id="{E1E61D0C-56C7-CD13-EF9F-27B5910203D7}"/>
               </a:ext>
             </a:extLst>
           </p:cNvPr>
@@ -3026,7 +3114,7 @@
           <p:cNvPr id="3" name="Content Placeholder 2">
             <a:extLst>
               <a:ext uri="{FF2B5EF4-FFF2-40B4-BE49-F238E27FC236}">
-                <a16:creationId xmlns:a16="http://schemas.microsoft.com/office/drawing/2014/main" id="{F849AA70-DDF5-034D-CCF5-5D623120F054}"/>
+                <a16:creationId xmlns:a16="http://schemas.microsoft.com/office/drawing/2014/main" id="{2D41A2A9-730E-4942-528E-1286FC85647D}"/>
               </a:ext>
             </a:extLst>
           </p:cNvPr>
@@ -3089,7 +3177,7 @@
           <p:cNvPr id="4" name="Content Placeholder 3">
             <a:extLst>
               <a:ext uri="{FF2B5EF4-FFF2-40B4-BE49-F238E27FC236}">
-                <a16:creationId xmlns:a16="http://schemas.microsoft.com/office/drawing/2014/main" id="{89D306FA-5748-FEC2-D053-0A90EDC0AC39}"/>
+                <a16:creationId xmlns:a16="http://schemas.microsoft.com/office/drawing/2014/main" id="{EB909E5A-FBEF-1311-09C0-1498610C021A}"/>
               </a:ext>
             </a:extLst>
           </p:cNvPr>
@@ -3152,7 +3240,7 @@
           <p:cNvPr id="5" name="Date Placeholder 4">
             <a:extLst>
               <a:ext uri="{FF2B5EF4-FFF2-40B4-BE49-F238E27FC236}">
-                <a16:creationId xmlns:a16="http://schemas.microsoft.com/office/drawing/2014/main" id="{E4181EED-55A4-519A-84B5-0077DD7C4346}"/>
+                <a16:creationId xmlns:a16="http://schemas.microsoft.com/office/drawing/2014/main" id="{731F7572-E760-27DE-8E53-7384FBE2C26D}"/>
               </a:ext>
             </a:extLst>
           </p:cNvPr>
@@ -3168,7 +3256,7 @@
           <a:bodyPr/>
           <a:lstStyle/>
           <a:p>
-            <a:fld id="{C847731D-21F9-46DF-9E5B-DE6BE2C2912D}" type="datetimeFigureOut">
+            <a:fld id="{945DF60E-9C85-43C8-A8C3-1D48C2D6D25E}" type="datetimeFigureOut">
               <a:rPr lang="en-SG" smtClean="0"/>
               <a:t>29/10/2026</a:t>
             </a:fld>
@@ -3181,7 +3269,7 @@
           <p:cNvPr id="6" name="Footer Placeholder 5">
             <a:extLst>
               <a:ext uri="{FF2B5EF4-FFF2-40B4-BE49-F238E27FC236}">
-                <a16:creationId xmlns:a16="http://schemas.microsoft.com/office/drawing/2014/main" id="{126E2DF3-0BEC-646C-1939-C5C120B878EB}"/>
+                <a16:creationId xmlns:a16="http://schemas.microsoft.com/office/drawing/2014/main" id="{D65B9422-FEC8-878A-7A29-D8F609B9E6EB}"/>
               </a:ext>
             </a:extLst>
           </p:cNvPr>
@@ -3206,7 +3294,7 @@
           <p:cNvPr id="7" name="Slide Number Placeholder 6">
             <a:extLst>
               <a:ext uri="{FF2B5EF4-FFF2-40B4-BE49-F238E27FC236}">
-                <a16:creationId xmlns:a16="http://schemas.microsoft.com/office/drawing/2014/main" id="{4EAAA6A1-3F3D-585C-3E14-1B6FA75674AB}"/>
+                <a16:creationId xmlns:a16="http://schemas.microsoft.com/office/drawing/2014/main" id="{938E54AD-DEB8-E639-4DD0-304123806B1A}"/>
               </a:ext>
             </a:extLst>
           </p:cNvPr>
@@ -3222,7 +3310,7 @@
           <a:bodyPr/>
           <a:lstStyle/>
           <a:p>
-            <a:fld id="{BB6C54BB-3A77-45B9-985A-EDE813E42F0F}" type="slidenum">
+            <a:fld id="{F6AA237F-47F2-4AF9-A1AC-074287E22A0A}" type="slidenum">
               <a:rPr lang="en-SG" smtClean="0"/>
               <a:t>‹#›</a:t>
             </a:fld>
@@ -3233,7 +3321,7 @@
     </p:spTree>
     <p:extLst>
       <p:ext uri="{BB962C8B-B14F-4D97-AF65-F5344CB8AC3E}">
-        <p14:creationId xmlns:p14="http://schemas.microsoft.com/office/powerpoint/2010/main" val="1364954201"/>
+        <p14:creationId xmlns:p14="http://schemas.microsoft.com/office/powerpoint/2010/main" val="677297205"/>
       </p:ext>
     </p:extLst>
   </p:cSld>
@@ -3265,7 +3353,7 @@
           <p:cNvPr id="2" name="Title 1">
             <a:extLst>
               <a:ext uri="{FF2B5EF4-FFF2-40B4-BE49-F238E27FC236}">
-                <a16:creationId xmlns:a16="http://schemas.microsoft.com/office/drawing/2014/main" id="{6883D0F0-40C8-FC4B-0077-CFF6FE002F11}"/>
+                <a16:creationId xmlns:a16="http://schemas.microsoft.com/office/drawing/2014/main" id="{74291101-ED81-C2E0-90E0-3594C9A400C4}"/>
               </a:ext>
             </a:extLst>
           </p:cNvPr>
@@ -3299,7 +3387,7 @@
           <p:cNvPr id="3" name="Text Placeholder 2">
             <a:extLst>
               <a:ext uri="{FF2B5EF4-FFF2-40B4-BE49-F238E27FC236}">
-                <a16:creationId xmlns:a16="http://schemas.microsoft.com/office/drawing/2014/main" id="{07F23CD9-D7EE-9AB6-797A-6C0876BD1BEF}"/>
+                <a16:creationId xmlns:a16="http://schemas.microsoft.com/office/drawing/2014/main" id="{CD1639AF-5E52-E4E6-9E6C-A15848C20518}"/>
               </a:ext>
             </a:extLst>
           </p:cNvPr>
@@ -3370,7 +3458,7 @@
           <p:cNvPr id="4" name="Content Placeholder 3">
             <a:extLst>
               <a:ext uri="{FF2B5EF4-FFF2-40B4-BE49-F238E27FC236}">
-                <a16:creationId xmlns:a16="http://schemas.microsoft.com/office/drawing/2014/main" id="{2D8399D6-9200-B6B7-8960-4E374DA1C833}"/>
+                <a16:creationId xmlns:a16="http://schemas.microsoft.com/office/drawing/2014/main" id="{C8C32683-CA58-FE4B-F975-906EBEAB08F2}"/>
               </a:ext>
             </a:extLst>
           </p:cNvPr>
@@ -3433,7 +3521,7 @@
           <p:cNvPr id="5" name="Text Placeholder 4">
             <a:extLst>
               <a:ext uri="{FF2B5EF4-FFF2-40B4-BE49-F238E27FC236}">
-                <a16:creationId xmlns:a16="http://schemas.microsoft.com/office/drawing/2014/main" id="{703621E9-7135-B41B-2542-49BB4B77723E}"/>
+                <a16:creationId xmlns:a16="http://schemas.microsoft.com/office/drawing/2014/main" id="{7EE138EB-3CE7-0369-5F21-22F2E60F3E71}"/>
               </a:ext>
             </a:extLst>
           </p:cNvPr>
@@ -3504,7 +3592,7 @@
           <p:cNvPr id="6" name="Content Placeholder 5">
             <a:extLst>
               <a:ext uri="{FF2B5EF4-FFF2-40B4-BE49-F238E27FC236}">
-                <a16:creationId xmlns:a16="http://schemas.microsoft.com/office/drawing/2014/main" id="{FE52D2D6-5AD3-4AC6-D7BA-652D67BEA42F}"/>
+                <a16:creationId xmlns:a16="http://schemas.microsoft.com/office/drawing/2014/main" id="{8ECC3FE5-7B79-36D2-5C0E-D4FBBF210E21}"/>
               </a:ext>
             </a:extLst>
           </p:cNvPr>
@@ -3567,7 +3655,7 @@
           <p:cNvPr id="7" name="Date Placeholder 6">
             <a:extLst>
               <a:ext uri="{FF2B5EF4-FFF2-40B4-BE49-F238E27FC236}">
-                <a16:creationId xmlns:a16="http://schemas.microsoft.com/office/drawing/2014/main" id="{42EB1E6B-1E39-046C-A089-FEB917B8B15A}"/>
+                <a16:creationId xmlns:a16="http://schemas.microsoft.com/office/drawing/2014/main" id="{0741BB56-AE49-A611-DA52-408749518AFF}"/>
               </a:ext>
             </a:extLst>
           </p:cNvPr>
@@ -3583,7 +3671,7 @@
           <a:bodyPr/>
           <a:lstStyle/>
           <a:p>
-            <a:fld id="{C847731D-21F9-46DF-9E5B-DE6BE2C2912D}" type="datetimeFigureOut">
+            <a:fld id="{945DF60E-9C85-43C8-A8C3-1D48C2D6D25E}" type="datetimeFigureOut">
               <a:rPr lang="en-SG" smtClean="0"/>
               <a:t>29/10/2026</a:t>
             </a:fld>
@@ -3596,7 +3684,7 @@
           <p:cNvPr id="8" name="Footer Placeholder 7">
             <a:extLst>
               <a:ext uri="{FF2B5EF4-FFF2-40B4-BE49-F238E27FC236}">
-                <a16:creationId xmlns:a16="http://schemas.microsoft.com/office/drawing/2014/main" id="{54CEFC8F-5145-FCE6-8077-4F8E7FB749AC}"/>
+                <a16:creationId xmlns:a16="http://schemas.microsoft.com/office/drawing/2014/main" id="{4A2BAE82-66FF-87DC-189B-29DD0C5A6E72}"/>
               </a:ext>
             </a:extLst>
           </p:cNvPr>
@@ -3621,7 +3709,7 @@
           <p:cNvPr id="9" name="Slide Number Placeholder 8">
             <a:extLst>
               <a:ext uri="{FF2B5EF4-FFF2-40B4-BE49-F238E27FC236}">
-                <a16:creationId xmlns:a16="http://schemas.microsoft.com/office/drawing/2014/main" id="{4D59DB23-3780-C00E-A2A1-90516C2CA43F}"/>
+                <a16:creationId xmlns:a16="http://schemas.microsoft.com/office/drawing/2014/main" id="{69AD2643-EEE0-EF10-3A65-BE98DBF6A84A}"/>
               </a:ext>
             </a:extLst>
           </p:cNvPr>
@@ -3637,7 +3725,7 @@
           <a:bodyPr/>
           <a:lstStyle/>
           <a:p>
-            <a:fld id="{BB6C54BB-3A77-45B9-985A-EDE813E42F0F}" type="slidenum">
+            <a:fld id="{F6AA237F-47F2-4AF9-A1AC-074287E22A0A}" type="slidenum">
               <a:rPr lang="en-SG" smtClean="0"/>
               <a:t>‹#›</a:t>
             </a:fld>
@@ -3648,7 +3736,7 @@
     </p:spTree>
     <p:extLst>
       <p:ext uri="{BB962C8B-B14F-4D97-AF65-F5344CB8AC3E}">
-        <p14:creationId xmlns:p14="http://schemas.microsoft.com/office/powerpoint/2010/main" val="4272826507"/>
+        <p14:creationId xmlns:p14="http://schemas.microsoft.com/office/powerpoint/2010/main" val="309858547"/>
       </p:ext>
     </p:extLst>
   </p:cSld>
@@ -3680,7 +3768,7 @@
           <p:cNvPr id="2" name="Title 1">
             <a:extLst>
               <a:ext uri="{FF2B5EF4-FFF2-40B4-BE49-F238E27FC236}">
-                <a16:creationId xmlns:a16="http://schemas.microsoft.com/office/drawing/2014/main" id="{0B311595-6753-AEE4-471E-3B7740875581}"/>
+                <a16:creationId xmlns:a16="http://schemas.microsoft.com/office/drawing/2014/main" id="{B7B1F618-AE25-12F5-5E59-D697CC872A5C}"/>
               </a:ext>
             </a:extLst>
           </p:cNvPr>
@@ -3709,7 +3797,7 @@
           <p:cNvPr id="3" name="Date Placeholder 2">
             <a:extLst>
               <a:ext uri="{FF2B5EF4-FFF2-40B4-BE49-F238E27FC236}">
-                <a16:creationId xmlns:a16="http://schemas.microsoft.com/office/drawing/2014/main" id="{1A1EC87D-4CCA-B264-1EEB-4180B34DE236}"/>
+                <a16:creationId xmlns:a16="http://schemas.microsoft.com/office/drawing/2014/main" id="{D6E661DF-0430-A686-D887-6541798D822B}"/>
               </a:ext>
             </a:extLst>
           </p:cNvPr>
@@ -3725,7 +3813,7 @@
           <a:bodyPr/>
           <a:lstStyle/>
           <a:p>
-            <a:fld id="{C847731D-21F9-46DF-9E5B-DE6BE2C2912D}" type="datetimeFigureOut">
+            <a:fld id="{945DF60E-9C85-43C8-A8C3-1D48C2D6D25E}" type="datetimeFigureOut">
               <a:rPr lang="en-SG" smtClean="0"/>
               <a:t>29/10/2026</a:t>
             </a:fld>
@@ -3738,7 +3826,7 @@
           <p:cNvPr id="4" name="Footer Placeholder 3">
             <a:extLst>
               <a:ext uri="{FF2B5EF4-FFF2-40B4-BE49-F238E27FC236}">
-                <a16:creationId xmlns:a16="http://schemas.microsoft.com/office/drawing/2014/main" id="{B1C0C323-9B25-047B-69B8-BCFB1D5C3F04}"/>
+                <a16:creationId xmlns:a16="http://schemas.microsoft.com/office/drawing/2014/main" id="{20E29B1B-3BD2-FB79-2765-7E5803F34BD8}"/>
               </a:ext>
             </a:extLst>
           </p:cNvPr>
@@ -3763,7 +3851,7 @@
           <p:cNvPr id="5" name="Slide Number Placeholder 4">
             <a:extLst>
               <a:ext uri="{FF2B5EF4-FFF2-40B4-BE49-F238E27FC236}">
-                <a16:creationId xmlns:a16="http://schemas.microsoft.com/office/drawing/2014/main" id="{3A300D5F-384C-321A-054B-4C4611F9DBDA}"/>
+                <a16:creationId xmlns:a16="http://schemas.microsoft.com/office/drawing/2014/main" id="{A0FCC9DC-2F0B-14C6-D917-80F4EB695554}"/>
               </a:ext>
             </a:extLst>
           </p:cNvPr>
@@ -3779,7 +3867,7 @@
           <a:bodyPr/>
           <a:lstStyle/>
           <a:p>
-            <a:fld id="{BB6C54BB-3A77-45B9-985A-EDE813E42F0F}" type="slidenum">
+            <a:fld id="{F6AA237F-47F2-4AF9-A1AC-074287E22A0A}" type="slidenum">
               <a:rPr lang="en-SG" smtClean="0"/>
               <a:t>‹#›</a:t>
             </a:fld>
@@ -3790,7 +3878,7 @@
     </p:spTree>
     <p:extLst>
       <p:ext uri="{BB962C8B-B14F-4D97-AF65-F5344CB8AC3E}">
-        <p14:creationId xmlns:p14="http://schemas.microsoft.com/office/powerpoint/2010/main" val="3922562744"/>
+        <p14:creationId xmlns:p14="http://schemas.microsoft.com/office/powerpoint/2010/main" val="877075545"/>
       </p:ext>
     </p:extLst>
   </p:cSld>
@@ -3822,7 +3910,7 @@
           <p:cNvPr id="2" name="Date Placeholder 1">
             <a:extLst>
               <a:ext uri="{FF2B5EF4-FFF2-40B4-BE49-F238E27FC236}">
-                <a16:creationId xmlns:a16="http://schemas.microsoft.com/office/drawing/2014/main" id="{A1E4669B-F301-68F1-CB99-EE17E3CEA094}"/>
+                <a16:creationId xmlns:a16="http://schemas.microsoft.com/office/drawing/2014/main" id="{7F7AE62D-7751-499F-0DFC-78C267E6F65F}"/>
               </a:ext>
             </a:extLst>
           </p:cNvPr>
@@ -3838,7 +3926,7 @@
           <a:bodyPr/>
           <a:lstStyle/>
           <a:p>
-            <a:fld id="{C847731D-21F9-46DF-9E5B-DE6BE2C2912D}" type="datetimeFigureOut">
+            <a:fld id="{945DF60E-9C85-43C8-A8C3-1D48C2D6D25E}" type="datetimeFigureOut">
               <a:rPr lang="en-SG" smtClean="0"/>
               <a:t>29/10/2026</a:t>
             </a:fld>
@@ -3851,7 +3939,7 @@
           <p:cNvPr id="3" name="Footer Placeholder 2">
             <a:extLst>
               <a:ext uri="{FF2B5EF4-FFF2-40B4-BE49-F238E27FC236}">
-                <a16:creationId xmlns:a16="http://schemas.microsoft.com/office/drawing/2014/main" id="{DFD49278-F9DF-D948-8D0B-4F5CF2350E92}"/>
+                <a16:creationId xmlns:a16="http://schemas.microsoft.com/office/drawing/2014/main" id="{B6ADA2C8-5C98-69F3-57BD-99DEFC385068}"/>
               </a:ext>
             </a:extLst>
           </p:cNvPr>
@@ -3876,7 +3964,7 @@
           <p:cNvPr id="4" name="Slide Number Placeholder 3">
             <a:extLst>
               <a:ext uri="{FF2B5EF4-FFF2-40B4-BE49-F238E27FC236}">
-                <a16:creationId xmlns:a16="http://schemas.microsoft.com/office/drawing/2014/main" id="{E1FDBD05-0550-4EA8-1073-3BE764316119}"/>
+                <a16:creationId xmlns:a16="http://schemas.microsoft.com/office/drawing/2014/main" id="{49E845CF-2F98-5D02-D8E4-3476DAF0436E}"/>
               </a:ext>
             </a:extLst>
           </p:cNvPr>
@@ -3892,7 +3980,7 @@
           <a:bodyPr/>
           <a:lstStyle/>
           <a:p>
-            <a:fld id="{BB6C54BB-3A77-45B9-985A-EDE813E42F0F}" type="slidenum">
+            <a:fld id="{F6AA237F-47F2-4AF9-A1AC-074287E22A0A}" type="slidenum">
               <a:rPr lang="en-SG" smtClean="0"/>
               <a:t>‹#›</a:t>
             </a:fld>
@@ -3903,7 +3991,7 @@
     </p:spTree>
     <p:extLst>
       <p:ext uri="{BB962C8B-B14F-4D97-AF65-F5344CB8AC3E}">
-        <p14:creationId xmlns:p14="http://schemas.microsoft.com/office/powerpoint/2010/main" val="2233178738"/>
+        <p14:creationId xmlns:p14="http://schemas.microsoft.com/office/powerpoint/2010/main" val="235001555"/>
       </p:ext>
     </p:extLst>
   </p:cSld>
@@ -3935,7 +4023,7 @@
           <p:cNvPr id="2" name="Title 1">
             <a:extLst>
               <a:ext uri="{FF2B5EF4-FFF2-40B4-BE49-F238E27FC236}">
-                <a16:creationId xmlns:a16="http://schemas.microsoft.com/office/drawing/2014/main" id="{10E2B127-9CD1-AEFB-34BB-5F6224B2510D}"/>
+                <a16:creationId xmlns:a16="http://schemas.microsoft.com/office/drawing/2014/main" id="{5ABCD1E4-49F7-8AE9-39A2-2672DD2BB5EC}"/>
               </a:ext>
             </a:extLst>
           </p:cNvPr>
@@ -3973,7 +4061,7 @@
           <p:cNvPr id="3" name="Content Placeholder 2">
             <a:extLst>
               <a:ext uri="{FF2B5EF4-FFF2-40B4-BE49-F238E27FC236}">
-                <a16:creationId xmlns:a16="http://schemas.microsoft.com/office/drawing/2014/main" id="{58994B84-486A-8653-AD8A-EDC8E8F925FA}"/>
+                <a16:creationId xmlns:a16="http://schemas.microsoft.com/office/drawing/2014/main" id="{3A2580B8-18A2-AC89-C0F3-1CB1D56438C7}"/>
               </a:ext>
             </a:extLst>
           </p:cNvPr>
@@ -4064,7 +4152,7 @@
           <p:cNvPr id="4" name="Text Placeholder 3">
             <a:extLst>
               <a:ext uri="{FF2B5EF4-FFF2-40B4-BE49-F238E27FC236}">
-                <a16:creationId xmlns:a16="http://schemas.microsoft.com/office/drawing/2014/main" id="{B273EA22-21EA-8960-CFC9-306A7B40607D}"/>
+                <a16:creationId xmlns:a16="http://schemas.microsoft.com/office/drawing/2014/main" id="{03D281E6-889A-6E95-C239-281780DB926E}"/>
               </a:ext>
             </a:extLst>
           </p:cNvPr>
@@ -4135,7 +4223,7 @@
           <p:cNvPr id="5" name="Date Placeholder 4">
             <a:extLst>
               <a:ext uri="{FF2B5EF4-FFF2-40B4-BE49-F238E27FC236}">
-                <a16:creationId xmlns:a16="http://schemas.microsoft.com/office/drawing/2014/main" id="{6696DF74-C8F0-8FB6-F0DC-3A5721D58A3B}"/>
+                <a16:creationId xmlns:a16="http://schemas.microsoft.com/office/drawing/2014/main" id="{F0BB4DC1-349B-D7E4-2E45-412003AB1FCB}"/>
               </a:ext>
             </a:extLst>
           </p:cNvPr>
@@ -4151,7 +4239,7 @@
           <a:bodyPr/>
           <a:lstStyle/>
           <a:p>
-            <a:fld id="{C847731D-21F9-46DF-9E5B-DE6BE2C2912D}" type="datetimeFigureOut">
+            <a:fld id="{945DF60E-9C85-43C8-A8C3-1D48C2D6D25E}" type="datetimeFigureOut">
               <a:rPr lang="en-SG" smtClean="0"/>
               <a:t>29/10/2026</a:t>
             </a:fld>
@@ -4164,7 +4252,7 @@
           <p:cNvPr id="6" name="Footer Placeholder 5">
             <a:extLst>
               <a:ext uri="{FF2B5EF4-FFF2-40B4-BE49-F238E27FC236}">
-                <a16:creationId xmlns:a16="http://schemas.microsoft.com/office/drawing/2014/main" id="{A6A640F7-1D5E-3364-BA58-E4C61846D37A}"/>
+                <a16:creationId xmlns:a16="http://schemas.microsoft.com/office/drawing/2014/main" id="{CD73BD58-E406-A2A7-3528-161F8AF52F04}"/>
               </a:ext>
             </a:extLst>
           </p:cNvPr>
@@ -4189,7 +4277,7 @@
           <p:cNvPr id="7" name="Slide Number Placeholder 6">
             <a:extLst>
               <a:ext uri="{FF2B5EF4-FFF2-40B4-BE49-F238E27FC236}">
-                <a16:creationId xmlns:a16="http://schemas.microsoft.com/office/drawing/2014/main" id="{2456539A-3FA6-C727-F85C-76F53550C7FA}"/>
+                <a16:creationId xmlns:a16="http://schemas.microsoft.com/office/drawing/2014/main" id="{8772046C-F876-8D26-819D-9A3EDBA41BAF}"/>
               </a:ext>
             </a:extLst>
           </p:cNvPr>
@@ -4205,7 +4293,7 @@
           <a:bodyPr/>
           <a:lstStyle/>
           <a:p>
-            <a:fld id="{BB6C54BB-3A77-45B9-985A-EDE813E42F0F}" type="slidenum">
+            <a:fld id="{F6AA237F-47F2-4AF9-A1AC-074287E22A0A}" type="slidenum">
               <a:rPr lang="en-SG" smtClean="0"/>
               <a:t>‹#›</a:t>
             </a:fld>
@@ -4216,7 +4304,7 @@
     </p:spTree>
     <p:extLst>
       <p:ext uri="{BB962C8B-B14F-4D97-AF65-F5344CB8AC3E}">
-        <p14:creationId xmlns:p14="http://schemas.microsoft.com/office/powerpoint/2010/main" val="3530052547"/>
+        <p14:creationId xmlns:p14="http://schemas.microsoft.com/office/powerpoint/2010/main" val="3308803367"/>
       </p:ext>
     </p:extLst>
   </p:cSld>
@@ -4248,7 +4336,7 @@
           <p:cNvPr id="2" name="Title 1">
             <a:extLst>
               <a:ext uri="{FF2B5EF4-FFF2-40B4-BE49-F238E27FC236}">
-                <a16:creationId xmlns:a16="http://schemas.microsoft.com/office/drawing/2014/main" id="{B50BFC46-CD57-BE02-88D6-74376C190BEE}"/>
+                <a16:creationId xmlns:a16="http://schemas.microsoft.com/office/drawing/2014/main" id="{B64D156D-6778-AE21-3014-13B70288B5CD}"/>
               </a:ext>
             </a:extLst>
           </p:cNvPr>
@@ -4286,7 +4374,7 @@
           <p:cNvPr id="3" name="Picture Placeholder 2">
             <a:extLst>
               <a:ext uri="{FF2B5EF4-FFF2-40B4-BE49-F238E27FC236}">
-                <a16:creationId xmlns:a16="http://schemas.microsoft.com/office/drawing/2014/main" id="{A3BE28DD-7B58-CB37-53C4-C9DE83D4DBB8}"/>
+                <a16:creationId xmlns:a16="http://schemas.microsoft.com/office/drawing/2014/main" id="{777D1C68-5B1E-C6B0-062D-491500B225CC}"/>
               </a:ext>
             </a:extLst>
           </p:cNvPr>
@@ -4353,7 +4441,7 @@
           <p:cNvPr id="4" name="Text Placeholder 3">
             <a:extLst>
               <a:ext uri="{FF2B5EF4-FFF2-40B4-BE49-F238E27FC236}">
-                <a16:creationId xmlns:a16="http://schemas.microsoft.com/office/drawing/2014/main" id="{B7C55B2B-DC25-7E5A-5B13-62CD4B0A4E0E}"/>
+                <a16:creationId xmlns:a16="http://schemas.microsoft.com/office/drawing/2014/main" id="{99C8614E-BA8C-F974-9C54-63364A486366}"/>
               </a:ext>
             </a:extLst>
           </p:cNvPr>
@@ -4424,7 +4512,7 @@
           <p:cNvPr id="5" name="Date Placeholder 4">
             <a:extLst>
               <a:ext uri="{FF2B5EF4-FFF2-40B4-BE49-F238E27FC236}">
-                <a16:creationId xmlns:a16="http://schemas.microsoft.com/office/drawing/2014/main" id="{8ED329CA-CA00-2E0D-F8D7-22C93392515A}"/>
+                <a16:creationId xmlns:a16="http://schemas.microsoft.com/office/drawing/2014/main" id="{28C7734F-A4A5-7770-4B59-A558C6254C12}"/>
               </a:ext>
             </a:extLst>
           </p:cNvPr>
@@ -4440,7 +4528,7 @@
           <a:bodyPr/>
           <a:lstStyle/>
           <a:p>
-            <a:fld id="{C847731D-21F9-46DF-9E5B-DE6BE2C2912D}" type="datetimeFigureOut">
+            <a:fld id="{945DF60E-9C85-43C8-A8C3-1D48C2D6D25E}" type="datetimeFigureOut">
               <a:rPr lang="en-SG" smtClean="0"/>
               <a:t>29/10/2026</a:t>
             </a:fld>
@@ -4453,7 +4541,7 @@
           <p:cNvPr id="6" name="Footer Placeholder 5">
             <a:extLst>
               <a:ext uri="{FF2B5EF4-FFF2-40B4-BE49-F238E27FC236}">
-                <a16:creationId xmlns:a16="http://schemas.microsoft.com/office/drawing/2014/main" id="{205DEB4A-D0D7-4DE4-EB42-78558A188D64}"/>
+                <a16:creationId xmlns:a16="http://schemas.microsoft.com/office/drawing/2014/main" id="{E309B0F1-13C8-F036-4125-8A9BD22692C7}"/>
               </a:ext>
             </a:extLst>
           </p:cNvPr>
@@ -4478,7 +4566,7 @@
           <p:cNvPr id="7" name="Slide Number Placeholder 6">
             <a:extLst>
               <a:ext uri="{FF2B5EF4-FFF2-40B4-BE49-F238E27FC236}">
-                <a16:creationId xmlns:a16="http://schemas.microsoft.com/office/drawing/2014/main" id="{1A65E424-2A1D-43FD-59BF-001F8A992863}"/>
+                <a16:creationId xmlns:a16="http://schemas.microsoft.com/office/drawing/2014/main" id="{39A1D12E-0D12-C9E6-65A3-440C28641C70}"/>
               </a:ext>
             </a:extLst>
           </p:cNvPr>
@@ -4494,7 +4582,7 @@
           <a:bodyPr/>
           <a:lstStyle/>
           <a:p>
-            <a:fld id="{BB6C54BB-3A77-45B9-985A-EDE813E42F0F}" type="slidenum">
+            <a:fld id="{F6AA237F-47F2-4AF9-A1AC-074287E22A0A}" type="slidenum">
               <a:rPr lang="en-SG" smtClean="0"/>
               <a:t>‹#›</a:t>
             </a:fld>
@@ -4505,7 +4593,7 @@
     </p:spTree>
     <p:extLst>
       <p:ext uri="{BB962C8B-B14F-4D97-AF65-F5344CB8AC3E}">
-        <p14:creationId xmlns:p14="http://schemas.microsoft.com/office/powerpoint/2010/main" val="948389259"/>
+        <p14:creationId xmlns:p14="http://schemas.microsoft.com/office/powerpoint/2010/main" val="148333632"/>
       </p:ext>
     </p:extLst>
   </p:cSld>
@@ -4545,7 +4633,7 @@
           <p:cNvPr id="2" name="Title Placeholder 1">
             <a:extLst>
               <a:ext uri="{FF2B5EF4-FFF2-40B4-BE49-F238E27FC236}">
-                <a16:creationId xmlns:a16="http://schemas.microsoft.com/office/drawing/2014/main" id="{220BD751-BF0E-AE13-5A30-90907647044E}"/>
+                <a16:creationId xmlns:a16="http://schemas.microsoft.com/office/drawing/2014/main" id="{3FCEB458-BB34-2C3B-D32E-0F052848A4DD}"/>
               </a:ext>
             </a:extLst>
           </p:cNvPr>
@@ -4584,7 +4672,7 @@
           <p:cNvPr id="3" name="Text Placeholder 2">
             <a:extLst>
               <a:ext uri="{FF2B5EF4-FFF2-40B4-BE49-F238E27FC236}">
-                <a16:creationId xmlns:a16="http://schemas.microsoft.com/office/drawing/2014/main" id="{65FA72CB-CA2F-A840-7C33-C8DCB095F252}"/>
+                <a16:creationId xmlns:a16="http://schemas.microsoft.com/office/drawing/2014/main" id="{228C991F-26CB-AA32-7C6A-E24BB71228B9}"/>
               </a:ext>
             </a:extLst>
           </p:cNvPr>
@@ -4652,7 +4740,7 @@
           <p:cNvPr id="4" name="Date Placeholder 3">
             <a:extLst>
               <a:ext uri="{FF2B5EF4-FFF2-40B4-BE49-F238E27FC236}">
-                <a16:creationId xmlns:a16="http://schemas.microsoft.com/office/drawing/2014/main" id="{E46A0CA4-23AB-9CEA-7C67-645CADEECC2C}"/>
+                <a16:creationId xmlns:a16="http://schemas.microsoft.com/office/drawing/2014/main" id="{168665C3-EC1E-78F8-9348-44E560837BEA}"/>
               </a:ext>
             </a:extLst>
           </p:cNvPr>
@@ -4686,7 +4774,7 @@
             </a:lvl1pPr>
           </a:lstStyle>
           <a:p>
-            <a:fld id="{C847731D-21F9-46DF-9E5B-DE6BE2C2912D}" type="datetimeFigureOut">
+            <a:fld id="{945DF60E-9C85-43C8-A8C3-1D48C2D6D25E}" type="datetimeFigureOut">
               <a:rPr lang="en-SG" smtClean="0"/>
               <a:t>29/10/2026</a:t>
             </a:fld>
@@ -4699,7 +4787,7 @@
           <p:cNvPr id="5" name="Footer Placeholder 4">
             <a:extLst>
               <a:ext uri="{FF2B5EF4-FFF2-40B4-BE49-F238E27FC236}">
-                <a16:creationId xmlns:a16="http://schemas.microsoft.com/office/drawing/2014/main" id="{8FB28EC2-FED0-5813-46F0-F3E1D72CC139}"/>
+                <a16:creationId xmlns:a16="http://schemas.microsoft.com/office/drawing/2014/main" id="{645E8106-BF16-CC49-B272-23E160CD07F2}"/>
               </a:ext>
             </a:extLst>
           </p:cNvPr>
@@ -4742,7 +4830,7 @@
           <p:cNvPr id="6" name="Slide Number Placeholder 5">
             <a:extLst>
               <a:ext uri="{FF2B5EF4-FFF2-40B4-BE49-F238E27FC236}">
-                <a16:creationId xmlns:a16="http://schemas.microsoft.com/office/drawing/2014/main" id="{571C0B97-EE79-9AFD-9A65-C3AB9C94BBAF}"/>
+                <a16:creationId xmlns:a16="http://schemas.microsoft.com/office/drawing/2014/main" id="{F4DB143B-AA7C-C8A9-5CCC-25B645A480C5}"/>
               </a:ext>
             </a:extLst>
           </p:cNvPr>
@@ -4776,7 +4864,7 @@
             </a:lvl1pPr>
           </a:lstStyle>
           <a:p>
-            <a:fld id="{BB6C54BB-3A77-45B9-985A-EDE813E42F0F}" type="slidenum">
+            <a:fld id="{F6AA237F-47F2-4AF9-A1AC-074287E22A0A}" type="slidenum">
               <a:rPr lang="en-SG" smtClean="0"/>
               <a:t>‹#›</a:t>
             </a:fld>
@@ -4787,7 +4875,7 @@
     </p:spTree>
     <p:extLst>
       <p:ext uri="{BB962C8B-B14F-4D97-AF65-F5344CB8AC3E}">
-        <p14:creationId xmlns:p14="http://schemas.microsoft.com/office/powerpoint/2010/main" val="4215701717"/>
+        <p14:creationId xmlns:p14="http://schemas.microsoft.com/office/powerpoint/2010/main" val="400868940"/>
       </p:ext>
     </p:extLst>
   </p:cSld>
@@ -5118,7 +5206,7 @@
           <p:cNvPr id="8" name="Straight Connector 7">
             <a:extLst>
               <a:ext uri="{FF2B5EF4-FFF2-40B4-BE49-F238E27FC236}">
-                <a16:creationId xmlns:a16="http://schemas.microsoft.com/office/drawing/2014/main" id="{A0C887C1-C4B4-DAD7-5425-1BBE1BB2B9E0}"/>
+                <a16:creationId xmlns:a16="http://schemas.microsoft.com/office/drawing/2014/main" id="{105AFB74-70E5-F75F-1D90-46318F85DB9B}"/>
               </a:ext>
             </a:extLst>
           </p:cNvPr>
@@ -5159,7 +5247,7 @@
           <p:cNvPr id="7" name="Straight Connector 6">
             <a:extLst>
               <a:ext uri="{FF2B5EF4-FFF2-40B4-BE49-F238E27FC236}">
-                <a16:creationId xmlns:a16="http://schemas.microsoft.com/office/drawing/2014/main" id="{2B25F953-AC36-77BC-2EF6-7688FB0D6CF4}"/>
+                <a16:creationId xmlns:a16="http://schemas.microsoft.com/office/drawing/2014/main" id="{D0B9DC79-1134-ED5D-EDF8-BF4B4361E9ED}"/>
               </a:ext>
             </a:extLst>
           </p:cNvPr>
@@ -5200,7 +5288,7 @@
           <p:cNvPr id="6" name="Oval 5">
             <a:extLst>
               <a:ext uri="{FF2B5EF4-FFF2-40B4-BE49-F238E27FC236}">
-                <a16:creationId xmlns:a16="http://schemas.microsoft.com/office/drawing/2014/main" id="{1163A71E-892C-8D1B-2F9A-0042212E4F4E}"/>
+                <a16:creationId xmlns:a16="http://schemas.microsoft.com/office/drawing/2014/main" id="{7DDD8F5A-C425-F28D-6026-A93FC60A6E1A}"/>
               </a:ext>
             </a:extLst>
           </p:cNvPr>
@@ -5264,7 +5352,7 @@
           <p:cNvPr id="5" name="Oval 4">
             <a:extLst>
               <a:ext uri="{FF2B5EF4-FFF2-40B4-BE49-F238E27FC236}">
-                <a16:creationId xmlns:a16="http://schemas.microsoft.com/office/drawing/2014/main" id="{7FF09B38-D952-7174-6ECB-4FA9D729E3B6}"/>
+                <a16:creationId xmlns:a16="http://schemas.microsoft.com/office/drawing/2014/main" id="{A28A1128-B4AE-2EC7-FD3E-CFFA4855DC30}"/>
               </a:ext>
             </a:extLst>
           </p:cNvPr>
@@ -5328,7 +5416,7 @@
           <p:cNvPr id="4" name="Oval 3">
             <a:extLst>
               <a:ext uri="{FF2B5EF4-FFF2-40B4-BE49-F238E27FC236}">
-                <a16:creationId xmlns:a16="http://schemas.microsoft.com/office/drawing/2014/main" id="{F6630690-46D0-9805-2B1E-0DFBD28F0E4B}"/>
+                <a16:creationId xmlns:a16="http://schemas.microsoft.com/office/drawing/2014/main" id="{84E23BA4-3E2E-42D7-820C-8EC3D29C5B7D}"/>
               </a:ext>
             </a:extLst>
           </p:cNvPr>
@@ -5392,7 +5480,7 @@
           <p:cNvPr id="3" name="Oval 2">
             <a:extLst>
               <a:ext uri="{FF2B5EF4-FFF2-40B4-BE49-F238E27FC236}">
-                <a16:creationId xmlns:a16="http://schemas.microsoft.com/office/drawing/2014/main" id="{77D2E203-40EB-9A8B-68B4-939C629B7DEF}"/>
+                <a16:creationId xmlns:a16="http://schemas.microsoft.com/office/drawing/2014/main" id="{3EF5EC6C-9A93-647E-08D6-B967390B784C}"/>
               </a:ext>
             </a:extLst>
           </p:cNvPr>
@@ -5456,7 +5544,7 @@
           <p:cNvPr id="2" name="Title 1" descr="Adaptive CGF Trainer">
             <a:extLst>
               <a:ext uri="{FF2B5EF4-FFF2-40B4-BE49-F238E27FC236}">
-                <a16:creationId xmlns:a16="http://schemas.microsoft.com/office/drawing/2014/main" id="{3F5A1BAE-74E5-1C81-3B7F-EA6BD8F551C9}"/>
+                <a16:creationId xmlns:a16="http://schemas.microsoft.com/office/drawing/2014/main" id="{A960B65C-F15C-1CA7-DBF2-9F0BBA0BC407}"/>
               </a:ext>
             </a:extLst>
           </p:cNvPr>
@@ -5496,7 +5584,7 @@
           <p:cNvPr id="9" name="Straight Connector 8">
             <a:extLst>
               <a:ext uri="{FF2B5EF4-FFF2-40B4-BE49-F238E27FC236}">
-                <a16:creationId xmlns:a16="http://schemas.microsoft.com/office/drawing/2014/main" id="{C43F1A28-963C-D61F-FD8D-9E7BB169D610}"/>
+                <a16:creationId xmlns:a16="http://schemas.microsoft.com/office/drawing/2014/main" id="{CB4D361F-30F9-2FCF-4111-EAD38F8DAC3E}"/>
               </a:ext>
             </a:extLst>
           </p:cNvPr>
@@ -5537,7 +5625,7 @@
           <p:cNvPr id="10" name="Oval 9">
             <a:extLst>
               <a:ext uri="{FF2B5EF4-FFF2-40B4-BE49-F238E27FC236}">
-                <a16:creationId xmlns:a16="http://schemas.microsoft.com/office/drawing/2014/main" id="{A63CFCFF-D3B8-6F92-E271-06C82BE76041}"/>
+                <a16:creationId xmlns:a16="http://schemas.microsoft.com/office/drawing/2014/main" id="{EAEC9C6E-79BD-1361-44EB-CE6D276158DD}"/>
               </a:ext>
             </a:extLst>
           </p:cNvPr>
@@ -5605,7 +5693,7 @@
           <p:cNvPr id="11" name="Oval 10">
             <a:extLst>
               <a:ext uri="{FF2B5EF4-FFF2-40B4-BE49-F238E27FC236}">
-                <a16:creationId xmlns:a16="http://schemas.microsoft.com/office/drawing/2014/main" id="{7EA36947-2240-0F2E-9D57-A8106E27216D}"/>
+                <a16:creationId xmlns:a16="http://schemas.microsoft.com/office/drawing/2014/main" id="{5125E52A-B1F7-6626-2050-E7A6EB0377FD}"/>
               </a:ext>
             </a:extLst>
           </p:cNvPr>
@@ -5669,7 +5757,7 @@
           <p:cNvPr id="12" name="Diamond 11">
             <a:extLst>
               <a:ext uri="{FF2B5EF4-FFF2-40B4-BE49-F238E27FC236}">
-                <a16:creationId xmlns:a16="http://schemas.microsoft.com/office/drawing/2014/main" id="{DEEA177A-53F4-E0FC-4AD5-84454A915D20}"/>
+                <a16:creationId xmlns:a16="http://schemas.microsoft.com/office/drawing/2014/main" id="{8DBCA74E-1BF9-D471-ACA5-42FB769A5D2B}"/>
               </a:ext>
             </a:extLst>
           </p:cNvPr>
@@ -5733,7 +5821,7 @@
           <p:cNvPr id="13" name="Diamond 12">
             <a:extLst>
               <a:ext uri="{FF2B5EF4-FFF2-40B4-BE49-F238E27FC236}">
-                <a16:creationId xmlns:a16="http://schemas.microsoft.com/office/drawing/2014/main" id="{D1652C9A-EDD0-AC1F-CB65-408A6732AA81}"/>
+                <a16:creationId xmlns:a16="http://schemas.microsoft.com/office/drawing/2014/main" id="{FD1239A6-8E24-B158-A3E5-38F023D52C42}"/>
               </a:ext>
             </a:extLst>
           </p:cNvPr>
@@ -5797,7 +5885,7 @@
           <p:cNvPr id="14" name="Diamond 13">
             <a:extLst>
               <a:ext uri="{FF2B5EF4-FFF2-40B4-BE49-F238E27FC236}">
-                <a16:creationId xmlns:a16="http://schemas.microsoft.com/office/drawing/2014/main" id="{7DCC808D-0BDD-D3C3-CB62-41C421F9044B}"/>
+                <a16:creationId xmlns:a16="http://schemas.microsoft.com/office/drawing/2014/main" id="{ED1F9173-EAA5-7DF7-733F-36B967F7E049}"/>
               </a:ext>
             </a:extLst>
           </p:cNvPr>
@@ -5861,7 +5949,7 @@
           <p:cNvPr id="15" name="Rectangle 14">
             <a:extLst>
               <a:ext uri="{FF2B5EF4-FFF2-40B4-BE49-F238E27FC236}">
-                <a16:creationId xmlns:a16="http://schemas.microsoft.com/office/drawing/2014/main" id="{4F9412E6-FBA1-8069-232C-05B29B72A8D6}"/>
+                <a16:creationId xmlns:a16="http://schemas.microsoft.com/office/drawing/2014/main" id="{B98CE2ED-F088-0CD4-D9A7-95FA28BFE309}"/>
               </a:ext>
             </a:extLst>
           </p:cNvPr>
@@ -5925,7 +6013,7 @@
           <p:cNvPr id="16" name="TextBox 15">
             <a:extLst>
               <a:ext uri="{FF2B5EF4-FFF2-40B4-BE49-F238E27FC236}">
-                <a16:creationId xmlns:a16="http://schemas.microsoft.com/office/drawing/2014/main" id="{753CA64E-B84C-E6E1-2C25-64F3B58338CC}"/>
+                <a16:creationId xmlns:a16="http://schemas.microsoft.com/office/drawing/2014/main" id="{FB8D0339-A47A-B7DD-39DB-A2E650FE3054}"/>
               </a:ext>
             </a:extLst>
           </p:cNvPr>
@@ -5965,7 +6053,7 @@
           <p:cNvPr id="17" name="TextBox 16">
             <a:extLst>
               <a:ext uri="{FF2B5EF4-FFF2-40B4-BE49-F238E27FC236}">
-                <a16:creationId xmlns:a16="http://schemas.microsoft.com/office/drawing/2014/main" id="{9FE60B62-85C6-85B2-1503-102D8F7B5E9F}"/>
+                <a16:creationId xmlns:a16="http://schemas.microsoft.com/office/drawing/2014/main" id="{4D1A90DC-AF47-0697-2DA7-4ACF2E5117E2}"/>
               </a:ext>
             </a:extLst>
           </p:cNvPr>
@@ -6005,7 +6093,7 @@
           <p:cNvPr id="18" name="TextBox 17">
             <a:extLst>
               <a:ext uri="{FF2B5EF4-FFF2-40B4-BE49-F238E27FC236}">
-                <a16:creationId xmlns:a16="http://schemas.microsoft.com/office/drawing/2014/main" id="{70BC804C-538E-C084-3A39-5497FDD247B8}"/>
+                <a16:creationId xmlns:a16="http://schemas.microsoft.com/office/drawing/2014/main" id="{73680087-E904-7CC4-037D-3A0DAB2CD867}"/>
               </a:ext>
             </a:extLst>
           </p:cNvPr>
@@ -6043,7 +6131,7 @@
     </p:spTree>
     <p:extLst>
       <p:ext uri="{BB962C8B-B14F-4D97-AF65-F5344CB8AC3E}">
-        <p14:creationId xmlns:p14="http://schemas.microsoft.com/office/powerpoint/2010/main" val="3863240936"/>
+        <p14:creationId xmlns:p14="http://schemas.microsoft.com/office/powerpoint/2010/main" val="3476675247"/>
       </p:ext>
     </p:extLst>
   </p:cSld>
@@ -6054,6 +6142,997 @@
 </file>
 
 <file path=ppt/slides/slide10.xml><?xml version="1.0" encoding="utf-8"?>
+<p:sld xmlns:a="http://schemas.openxmlformats.org/drawingml/2006/main" xmlns:r="http://schemas.openxmlformats.org/officeDocument/2006/relationships" xmlns:p="http://schemas.openxmlformats.org/presentationml/2006/main">
+  <p:cSld>
+    <p:bg>
+      <p:bgPr>
+        <a:solidFill>
+          <a:srgbClr val="081421"/>
+        </a:solidFill>
+        <a:effectLst/>
+      </p:bgPr>
+    </p:bg>
+    <p:spTree>
+      <p:nvGrpSpPr>
+        <p:cNvPr id="1" name=""/>
+        <p:cNvGrpSpPr/>
+        <p:nvPr/>
+      </p:nvGrpSpPr>
+      <p:grpSpPr>
+        <a:xfrm>
+          <a:off x="0" y="0"/>
+          <a:ext cx="0" cy="0"/>
+          <a:chOff x="0" y="0"/>
+          <a:chExt cx="0" cy="0"/>
+        </a:xfrm>
+      </p:grpSpPr>
+      <p:sp>
+        <p:nvSpPr>
+          <p:cNvPr id="2" name="Title 1">
+            <a:extLst>
+              <a:ext uri="{FF2B5EF4-FFF2-40B4-BE49-F238E27FC236}">
+                <a16:creationId xmlns:a16="http://schemas.microsoft.com/office/drawing/2014/main" id="{AD0EC629-577A-5B9E-9D62-7DEF37A14EDB}"/>
+              </a:ext>
+            </a:extLst>
+          </p:cNvPr>
+          <p:cNvSpPr>
+            <a:spLocks noGrp="1"/>
+          </p:cNvSpPr>
+          <p:nvPr>
+            <p:ph type="title"/>
+          </p:nvPr>
+        </p:nvSpPr>
+        <p:spPr>
+          <a:xfrm>
+            <a:off x="609600" y="787400"/>
+            <a:ext cx="10972800" cy="762000"/>
+          </a:xfrm>
+        </p:spPr>
+        <p:txBody>
+          <a:bodyPr wrap="square" lIns="0" tIns="0" rIns="0" bIns="0" anchor="t">
+            <a:noAutofit/>
+          </a:bodyPr>
+          <a:lstStyle/>
+          <a:p>
+            <a:r>
+              <a:rPr lang="en-SG" sz="4000" b="1">
+                <a:solidFill>
+                  <a:srgbClr val="F7FAFD"/>
+                </a:solidFill>
+                <a:latin typeface="Segoe UI" panose="020B0502040204020203" pitchFamily="34" charset="0"/>
+              </a:rPr>
+              <a:t>The instructor stays in command</a:t>
+            </a:r>
+          </a:p>
+        </p:txBody>
+      </p:sp>
+      <p:sp>
+        <p:nvSpPr>
+          <p:cNvPr id="3" name="TextBox 2">
+            <a:extLst>
+              <a:ext uri="{FF2B5EF4-FFF2-40B4-BE49-F238E27FC236}">
+                <a16:creationId xmlns:a16="http://schemas.microsoft.com/office/drawing/2014/main" id="{506F5C6F-8707-9F34-D1DB-C0A62E53A4CC}"/>
+              </a:ext>
+            </a:extLst>
+          </p:cNvPr>
+          <p:cNvSpPr txBox="1"/>
+          <p:nvPr/>
+        </p:nvSpPr>
+        <p:spPr>
+          <a:xfrm>
+            <a:off x="609600" y="457200"/>
+            <a:ext cx="5969000" cy="254000"/>
+          </a:xfrm>
+          <a:prstGeom prst="rect">
+            <a:avLst/>
+          </a:prstGeom>
+          <a:noFill/>
+        </p:spPr>
+        <p:txBody>
+          <a:bodyPr vert="horz" wrap="square" lIns="0" tIns="0" rIns="0" bIns="0" rtlCol="0">
+            <a:noAutofit/>
+          </a:bodyPr>
+          <a:lstStyle/>
+          <a:p>
+            <a:r>
+              <a:rPr lang="en-SG" sz="1400">
+                <a:solidFill>
+                  <a:srgbClr val="2F9DFF"/>
+                </a:solidFill>
+                <a:latin typeface="Consolas" panose="020B0609020204030204" pitchFamily="49" charset="0"/>
+              </a:rPr>
+              <a:t>CONTROL</a:t>
+            </a:r>
+          </a:p>
+        </p:txBody>
+      </p:sp>
+      <p:sp>
+        <p:nvSpPr>
+          <p:cNvPr id="4" name="Rectangle: Rounded Corners 3">
+            <a:extLst>
+              <a:ext uri="{FF2B5EF4-FFF2-40B4-BE49-F238E27FC236}">
+                <a16:creationId xmlns:a16="http://schemas.microsoft.com/office/drawing/2014/main" id="{C1B2CE52-A96D-0674-707A-D709D510481A}"/>
+              </a:ext>
+            </a:extLst>
+          </p:cNvPr>
+          <p:cNvSpPr/>
+          <p:nvPr/>
+        </p:nvSpPr>
+        <p:spPr>
+          <a:xfrm>
+            <a:off x="609600" y="1905000"/>
+            <a:ext cx="5334000" cy="1955800"/>
+          </a:xfrm>
+          <a:prstGeom prst="roundRect">
+            <a:avLst>
+              <a:gd name="adj" fmla="val 6000"/>
+            </a:avLst>
+          </a:prstGeom>
+          <a:solidFill>
+            <a:srgbClr val="12243C"/>
+          </a:solidFill>
+          <a:ln w="9525">
+            <a:solidFill>
+              <a:srgbClr val="1E3653"/>
+            </a:solidFill>
+          </a:ln>
+        </p:spPr>
+        <p:style>
+          <a:lnRef idx="2">
+            <a:schemeClr val="accent1">
+              <a:shade val="15000"/>
+            </a:schemeClr>
+          </a:lnRef>
+          <a:fillRef idx="1">
+            <a:schemeClr val="accent1"/>
+          </a:fillRef>
+          <a:effectRef idx="0">
+            <a:schemeClr val="accent1"/>
+          </a:effectRef>
+          <a:fontRef idx="minor">
+            <a:schemeClr val="lt1"/>
+          </a:fontRef>
+        </p:style>
+        <p:txBody>
+          <a:bodyPr rtlCol="0" anchor="ctr"/>
+          <a:lstStyle/>
+          <a:p>
+            <a:pPr algn="ctr"/>
+            <a:endParaRPr lang="en-SG"/>
+          </a:p>
+        </p:txBody>
+      </p:sp>
+      <p:sp>
+        <p:nvSpPr>
+          <p:cNvPr id="5" name="Oval 4">
+            <a:extLst>
+              <a:ext uri="{FF2B5EF4-FFF2-40B4-BE49-F238E27FC236}">
+                <a16:creationId xmlns:a16="http://schemas.microsoft.com/office/drawing/2014/main" id="{EA571545-EB65-2D89-9546-D84F4B23C7C9}"/>
+              </a:ext>
+            </a:extLst>
+          </p:cNvPr>
+          <p:cNvSpPr/>
+          <p:nvPr/>
+        </p:nvSpPr>
+        <p:spPr>
+          <a:xfrm>
+            <a:off x="889000" y="2184400"/>
+            <a:ext cx="508000" cy="508000"/>
+          </a:xfrm>
+          <a:prstGeom prst="ellipse">
+            <a:avLst/>
+          </a:prstGeom>
+          <a:solidFill>
+            <a:srgbClr val="1A2D47"/>
+          </a:solidFill>
+          <a:ln w="9525">
+            <a:solidFill>
+              <a:srgbClr val="4A78A8"/>
+            </a:solidFill>
+          </a:ln>
+        </p:spPr>
+        <p:style>
+          <a:lnRef idx="2">
+            <a:schemeClr val="accent1">
+              <a:shade val="15000"/>
+            </a:schemeClr>
+          </a:lnRef>
+          <a:fillRef idx="1">
+            <a:schemeClr val="accent1"/>
+          </a:fillRef>
+          <a:effectRef idx="0">
+            <a:schemeClr val="accent1"/>
+          </a:effectRef>
+          <a:fontRef idx="minor">
+            <a:schemeClr val="lt1"/>
+          </a:fontRef>
+        </p:style>
+        <p:txBody>
+          <a:bodyPr lIns="0" tIns="0" rIns="0" bIns="0" rtlCol="0" anchor="ctr"/>
+          <a:lstStyle/>
+          <a:p>
+            <a:pPr algn="ctr"/>
+            <a:r>
+              <a:rPr lang="en-SG" b="1">
+                <a:solidFill>
+                  <a:srgbClr val="F7FAFD"/>
+                </a:solidFill>
+                <a:latin typeface="Consolas" panose="020B0609020204030204" pitchFamily="49" charset="0"/>
+              </a:rPr>
+              <a:t>1</a:t>
+            </a:r>
+          </a:p>
+        </p:txBody>
+      </p:sp>
+      <p:sp>
+        <p:nvSpPr>
+          <p:cNvPr id="6" name="TextBox 5">
+            <a:extLst>
+              <a:ext uri="{FF2B5EF4-FFF2-40B4-BE49-F238E27FC236}">
+                <a16:creationId xmlns:a16="http://schemas.microsoft.com/office/drawing/2014/main" id="{27BDCFD5-FA12-BC56-683F-7BA9771B4D1E}"/>
+              </a:ext>
+            </a:extLst>
+          </p:cNvPr>
+          <p:cNvSpPr txBox="1"/>
+          <p:nvPr/>
+        </p:nvSpPr>
+        <p:spPr>
+          <a:xfrm>
+            <a:off x="1600200" y="2235200"/>
+            <a:ext cx="4140200" cy="406400"/>
+          </a:xfrm>
+          <a:prstGeom prst="rect">
+            <a:avLst/>
+          </a:prstGeom>
+          <a:noFill/>
+        </p:spPr>
+        <p:txBody>
+          <a:bodyPr vert="horz" wrap="square" lIns="0" tIns="0" rIns="0" bIns="0" rtlCol="0">
+            <a:noAutofit/>
+          </a:bodyPr>
+          <a:lstStyle/>
+          <a:p>
+            <a:r>
+              <a:rPr lang="en-SG" sz="2000" b="1">
+                <a:solidFill>
+                  <a:srgbClr val="F7FAFD"/>
+                </a:solidFill>
+                <a:latin typeface="Segoe UI" panose="020B0502040204020203" pitchFamily="34" charset="0"/>
+              </a:rPr>
+              <a:t>Limits the AI cannot leave</a:t>
+            </a:r>
+          </a:p>
+        </p:txBody>
+      </p:sp>
+      <p:sp>
+        <p:nvSpPr>
+          <p:cNvPr id="7" name="TextBox 6">
+            <a:extLst>
+              <a:ext uri="{FF2B5EF4-FFF2-40B4-BE49-F238E27FC236}">
+                <a16:creationId xmlns:a16="http://schemas.microsoft.com/office/drawing/2014/main" id="{EC43300E-8A58-1632-1E85-42B017827687}"/>
+              </a:ext>
+            </a:extLst>
+          </p:cNvPr>
+          <p:cNvSpPr txBox="1"/>
+          <p:nvPr/>
+        </p:nvSpPr>
+        <p:spPr>
+          <a:xfrm>
+            <a:off x="889000" y="2895600"/>
+            <a:ext cx="4775200" cy="838200"/>
+          </a:xfrm>
+          <a:prstGeom prst="rect">
+            <a:avLst/>
+          </a:prstGeom>
+          <a:noFill/>
+        </p:spPr>
+        <p:txBody>
+          <a:bodyPr vert="horz" wrap="square" lIns="0" tIns="0" rIns="0" bIns="0" rtlCol="0">
+            <a:noAutofit/>
+          </a:bodyPr>
+          <a:lstStyle/>
+          <a:p>
+            <a:r>
+              <a:rPr lang="en-SG" sz="1600">
+                <a:solidFill>
+                  <a:srgbClr val="E1EAF4"/>
+                </a:solidFill>
+                <a:latin typeface="Segoe UI" panose="020B0502040204020203" pitchFamily="34" charset="0"/>
+              </a:rPr>
+              <a:t>Min, base and max for each setting. A clamped value is marked.</a:t>
+            </a:r>
+          </a:p>
+        </p:txBody>
+      </p:sp>
+      <p:sp>
+        <p:nvSpPr>
+          <p:cNvPr id="8" name="Rectangle: Rounded Corners 7">
+            <a:extLst>
+              <a:ext uri="{FF2B5EF4-FFF2-40B4-BE49-F238E27FC236}">
+                <a16:creationId xmlns:a16="http://schemas.microsoft.com/office/drawing/2014/main" id="{36412B60-1828-5402-6C01-69CE5A183D3B}"/>
+              </a:ext>
+            </a:extLst>
+          </p:cNvPr>
+          <p:cNvSpPr/>
+          <p:nvPr/>
+        </p:nvSpPr>
+        <p:spPr>
+          <a:xfrm>
+            <a:off x="6248400" y="1905000"/>
+            <a:ext cx="5334000" cy="1955800"/>
+          </a:xfrm>
+          <a:prstGeom prst="roundRect">
+            <a:avLst>
+              <a:gd name="adj" fmla="val 6000"/>
+            </a:avLst>
+          </a:prstGeom>
+          <a:solidFill>
+            <a:srgbClr val="12243C"/>
+          </a:solidFill>
+          <a:ln w="9525">
+            <a:solidFill>
+              <a:srgbClr val="1E3653"/>
+            </a:solidFill>
+          </a:ln>
+        </p:spPr>
+        <p:style>
+          <a:lnRef idx="2">
+            <a:schemeClr val="accent1">
+              <a:shade val="15000"/>
+            </a:schemeClr>
+          </a:lnRef>
+          <a:fillRef idx="1">
+            <a:schemeClr val="accent1"/>
+          </a:fillRef>
+          <a:effectRef idx="0">
+            <a:schemeClr val="accent1"/>
+          </a:effectRef>
+          <a:fontRef idx="minor">
+            <a:schemeClr val="lt1"/>
+          </a:fontRef>
+        </p:style>
+        <p:txBody>
+          <a:bodyPr rtlCol="0" anchor="ctr"/>
+          <a:lstStyle/>
+          <a:p>
+            <a:pPr algn="ctr"/>
+            <a:endParaRPr lang="en-SG"/>
+          </a:p>
+        </p:txBody>
+      </p:sp>
+      <p:sp>
+        <p:nvSpPr>
+          <p:cNvPr id="9" name="Oval 8">
+            <a:extLst>
+              <a:ext uri="{FF2B5EF4-FFF2-40B4-BE49-F238E27FC236}">
+                <a16:creationId xmlns:a16="http://schemas.microsoft.com/office/drawing/2014/main" id="{AB9E8F9B-087E-9F1A-07F5-3595142CEE66}"/>
+              </a:ext>
+            </a:extLst>
+          </p:cNvPr>
+          <p:cNvSpPr/>
+          <p:nvPr/>
+        </p:nvSpPr>
+        <p:spPr>
+          <a:xfrm>
+            <a:off x="6527800" y="2184400"/>
+            <a:ext cx="508000" cy="508000"/>
+          </a:xfrm>
+          <a:prstGeom prst="ellipse">
+            <a:avLst/>
+          </a:prstGeom>
+          <a:solidFill>
+            <a:srgbClr val="1A2D47"/>
+          </a:solidFill>
+          <a:ln w="9525">
+            <a:solidFill>
+              <a:srgbClr val="4A78A8"/>
+            </a:solidFill>
+          </a:ln>
+        </p:spPr>
+        <p:style>
+          <a:lnRef idx="2">
+            <a:schemeClr val="accent1">
+              <a:shade val="15000"/>
+            </a:schemeClr>
+          </a:lnRef>
+          <a:fillRef idx="1">
+            <a:schemeClr val="accent1"/>
+          </a:fillRef>
+          <a:effectRef idx="0">
+            <a:schemeClr val="accent1"/>
+          </a:effectRef>
+          <a:fontRef idx="minor">
+            <a:schemeClr val="lt1"/>
+          </a:fontRef>
+        </p:style>
+        <p:txBody>
+          <a:bodyPr lIns="0" tIns="0" rIns="0" bIns="0" rtlCol="0" anchor="ctr"/>
+          <a:lstStyle/>
+          <a:p>
+            <a:pPr algn="ctr"/>
+            <a:r>
+              <a:rPr lang="en-SG" b="1">
+                <a:solidFill>
+                  <a:srgbClr val="F7FAFD"/>
+                </a:solidFill>
+                <a:latin typeface="Consolas" panose="020B0609020204030204" pitchFamily="49" charset="0"/>
+              </a:rPr>
+              <a:t>2</a:t>
+            </a:r>
+          </a:p>
+        </p:txBody>
+      </p:sp>
+      <p:sp>
+        <p:nvSpPr>
+          <p:cNvPr id="10" name="TextBox 9">
+            <a:extLst>
+              <a:ext uri="{FF2B5EF4-FFF2-40B4-BE49-F238E27FC236}">
+                <a16:creationId xmlns:a16="http://schemas.microsoft.com/office/drawing/2014/main" id="{E6CB46DF-1D26-A8DD-7DCF-B1FC478E62FD}"/>
+              </a:ext>
+            </a:extLst>
+          </p:cNvPr>
+          <p:cNvSpPr txBox="1"/>
+          <p:nvPr/>
+        </p:nvSpPr>
+        <p:spPr>
+          <a:xfrm>
+            <a:off x="7239000" y="2235200"/>
+            <a:ext cx="4140200" cy="406400"/>
+          </a:xfrm>
+          <a:prstGeom prst="rect">
+            <a:avLst/>
+          </a:prstGeom>
+          <a:noFill/>
+        </p:spPr>
+        <p:txBody>
+          <a:bodyPr vert="horz" wrap="square" lIns="0" tIns="0" rIns="0" bIns="0" rtlCol="0">
+            <a:noAutofit/>
+          </a:bodyPr>
+          <a:lstStyle/>
+          <a:p>
+            <a:r>
+              <a:rPr lang="en-SG" sz="2000" b="1">
+                <a:solidFill>
+                  <a:srgbClr val="F7FAFD"/>
+                </a:solidFill>
+                <a:latin typeface="Segoe UI" panose="020B0502040204020203" pitchFamily="34" charset="0"/>
+              </a:rPr>
+              <a:t>Fixed mode for assessment</a:t>
+            </a:r>
+          </a:p>
+        </p:txBody>
+      </p:sp>
+      <p:sp>
+        <p:nvSpPr>
+          <p:cNvPr id="11" name="TextBox 10">
+            <a:extLst>
+              <a:ext uri="{FF2B5EF4-FFF2-40B4-BE49-F238E27FC236}">
+                <a16:creationId xmlns:a16="http://schemas.microsoft.com/office/drawing/2014/main" id="{F5848593-3061-00A1-F210-0F2B60C0EB4C}"/>
+              </a:ext>
+            </a:extLst>
+          </p:cNvPr>
+          <p:cNvSpPr txBox="1"/>
+          <p:nvPr/>
+        </p:nvSpPr>
+        <p:spPr>
+          <a:xfrm>
+            <a:off x="6527800" y="2895600"/>
+            <a:ext cx="4775200" cy="838200"/>
+          </a:xfrm>
+          <a:prstGeom prst="rect">
+            <a:avLst/>
+          </a:prstGeom>
+          <a:noFill/>
+        </p:spPr>
+        <p:txBody>
+          <a:bodyPr vert="horz" wrap="square" lIns="0" tIns="0" rIns="0" bIns="0" rtlCol="0">
+            <a:noAutofit/>
+          </a:bodyPr>
+          <a:lstStyle/>
+          <a:p>
+            <a:r>
+              <a:rPr lang="en-SG" sz="1600">
+                <a:solidFill>
+                  <a:srgbClr val="E1EAF4"/>
+                </a:solidFill>
+                <a:latin typeface="Segoe UI" panose="020B0502040204020203" pitchFamily="34" charset="0"/>
+              </a:rPr>
+              <a:t>Zero adjustments, a different badge. Practice and assessment stay apart.</a:t>
+            </a:r>
+          </a:p>
+        </p:txBody>
+      </p:sp>
+      <p:sp>
+        <p:nvSpPr>
+          <p:cNvPr id="12" name="Rectangle: Rounded Corners 11">
+            <a:extLst>
+              <a:ext uri="{FF2B5EF4-FFF2-40B4-BE49-F238E27FC236}">
+                <a16:creationId xmlns:a16="http://schemas.microsoft.com/office/drawing/2014/main" id="{9E5F3CC5-959D-E086-0F4E-1F4FB477530B}"/>
+              </a:ext>
+            </a:extLst>
+          </p:cNvPr>
+          <p:cNvSpPr/>
+          <p:nvPr/>
+        </p:nvSpPr>
+        <p:spPr>
+          <a:xfrm>
+            <a:off x="609600" y="4064000"/>
+            <a:ext cx="5334000" cy="1955800"/>
+          </a:xfrm>
+          <a:prstGeom prst="roundRect">
+            <a:avLst>
+              <a:gd name="adj" fmla="val 6000"/>
+            </a:avLst>
+          </a:prstGeom>
+          <a:solidFill>
+            <a:srgbClr val="12243C"/>
+          </a:solidFill>
+          <a:ln w="9525">
+            <a:solidFill>
+              <a:srgbClr val="1E3653"/>
+            </a:solidFill>
+          </a:ln>
+        </p:spPr>
+        <p:style>
+          <a:lnRef idx="2">
+            <a:schemeClr val="accent1">
+              <a:shade val="15000"/>
+            </a:schemeClr>
+          </a:lnRef>
+          <a:fillRef idx="1">
+            <a:schemeClr val="accent1"/>
+          </a:fillRef>
+          <a:effectRef idx="0">
+            <a:schemeClr val="accent1"/>
+          </a:effectRef>
+          <a:fontRef idx="minor">
+            <a:schemeClr val="lt1"/>
+          </a:fontRef>
+        </p:style>
+        <p:txBody>
+          <a:bodyPr rtlCol="0" anchor="ctr"/>
+          <a:lstStyle/>
+          <a:p>
+            <a:pPr algn="ctr"/>
+            <a:endParaRPr lang="en-SG"/>
+          </a:p>
+        </p:txBody>
+      </p:sp>
+      <p:sp>
+        <p:nvSpPr>
+          <p:cNvPr id="13" name="Oval 12">
+            <a:extLst>
+              <a:ext uri="{FF2B5EF4-FFF2-40B4-BE49-F238E27FC236}">
+                <a16:creationId xmlns:a16="http://schemas.microsoft.com/office/drawing/2014/main" id="{BF5D5381-488F-FC45-6BD8-78862AB1DDE9}"/>
+              </a:ext>
+            </a:extLst>
+          </p:cNvPr>
+          <p:cNvSpPr/>
+          <p:nvPr/>
+        </p:nvSpPr>
+        <p:spPr>
+          <a:xfrm>
+            <a:off x="889000" y="4343400"/>
+            <a:ext cx="508000" cy="508000"/>
+          </a:xfrm>
+          <a:prstGeom prst="ellipse">
+            <a:avLst/>
+          </a:prstGeom>
+          <a:solidFill>
+            <a:srgbClr val="24183F"/>
+          </a:solidFill>
+          <a:ln w="9525">
+            <a:solidFill>
+              <a:srgbClr val="B98FFF"/>
+            </a:solidFill>
+          </a:ln>
+        </p:spPr>
+        <p:style>
+          <a:lnRef idx="2">
+            <a:schemeClr val="accent1">
+              <a:shade val="15000"/>
+            </a:schemeClr>
+          </a:lnRef>
+          <a:fillRef idx="1">
+            <a:schemeClr val="accent1"/>
+          </a:fillRef>
+          <a:effectRef idx="0">
+            <a:schemeClr val="accent1"/>
+          </a:effectRef>
+          <a:fontRef idx="minor">
+            <a:schemeClr val="lt1"/>
+          </a:fontRef>
+        </p:style>
+        <p:txBody>
+          <a:bodyPr lIns="0" tIns="0" rIns="0" bIns="0" rtlCol="0" anchor="ctr"/>
+          <a:lstStyle/>
+          <a:p>
+            <a:pPr algn="ctr"/>
+            <a:r>
+              <a:rPr lang="en-SG" b="1">
+                <a:solidFill>
+                  <a:srgbClr val="EBDFFF"/>
+                </a:solidFill>
+                <a:latin typeface="Consolas" panose="020B0609020204030204" pitchFamily="49" charset="0"/>
+              </a:rPr>
+              <a:t>3</a:t>
+            </a:r>
+          </a:p>
+        </p:txBody>
+      </p:sp>
+      <p:sp>
+        <p:nvSpPr>
+          <p:cNvPr id="14" name="TextBox 13">
+            <a:extLst>
+              <a:ext uri="{FF2B5EF4-FFF2-40B4-BE49-F238E27FC236}">
+                <a16:creationId xmlns:a16="http://schemas.microsoft.com/office/drawing/2014/main" id="{ACC8E423-0189-8B14-6FE6-55B0E0EE2031}"/>
+              </a:ext>
+            </a:extLst>
+          </p:cNvPr>
+          <p:cNvSpPr txBox="1"/>
+          <p:nvPr/>
+        </p:nvSpPr>
+        <p:spPr>
+          <a:xfrm>
+            <a:off x="1600200" y="4394200"/>
+            <a:ext cx="4140200" cy="406400"/>
+          </a:xfrm>
+          <a:prstGeom prst="rect">
+            <a:avLst/>
+          </a:prstGeom>
+          <a:noFill/>
+        </p:spPr>
+        <p:txBody>
+          <a:bodyPr vert="horz" wrap="square" lIns="0" tIns="0" rIns="0" bIns="0" rtlCol="0">
+            <a:noAutofit/>
+          </a:bodyPr>
+          <a:lstStyle/>
+          <a:p>
+            <a:r>
+              <a:rPr lang="en-SG" sz="2000" b="1">
+                <a:solidFill>
+                  <a:srgbClr val="F7FAFD"/>
+                </a:solidFill>
+                <a:latin typeface="Segoe UI" panose="020B0502040204020203" pitchFamily="34" charset="0"/>
+              </a:rPr>
+              <a:t>Steer in plain language</a:t>
+            </a:r>
+          </a:p>
+        </p:txBody>
+      </p:sp>
+      <p:sp>
+        <p:nvSpPr>
+          <p:cNvPr id="15" name="TextBox 14">
+            <a:extLst>
+              <a:ext uri="{FF2B5EF4-FFF2-40B4-BE49-F238E27FC236}">
+                <a16:creationId xmlns:a16="http://schemas.microsoft.com/office/drawing/2014/main" id="{B8F11710-544F-0EB9-8593-C9724AB56A03}"/>
+              </a:ext>
+            </a:extLst>
+          </p:cNvPr>
+          <p:cNvSpPr txBox="1"/>
+          <p:nvPr/>
+        </p:nvSpPr>
+        <p:spPr>
+          <a:xfrm>
+            <a:off x="889000" y="5054600"/>
+            <a:ext cx="4775200" cy="838200"/>
+          </a:xfrm>
+          <a:prstGeom prst="rect">
+            <a:avLst/>
+          </a:prstGeom>
+          <a:noFill/>
+        </p:spPr>
+        <p:txBody>
+          <a:bodyPr vert="horz" wrap="square" lIns="0" tIns="0" rIns="0" bIns="0" rtlCol="0">
+            <a:noAutofit/>
+          </a:bodyPr>
+          <a:lstStyle/>
+          <a:p>
+            <a:r>
+              <a:rPr lang="en-SG" sz="1600">
+                <a:solidFill>
+                  <a:srgbClr val="E1EAF4"/>
+                </a:solidFill>
+                <a:latin typeface="Segoe UI" panose="020B0502040204020203" pitchFamily="34" charset="0"/>
+              </a:rPr>
+              <a:t>The typed request becomes a directive, shown before it applies.</a:t>
+            </a:r>
+          </a:p>
+        </p:txBody>
+      </p:sp>
+      <p:sp>
+        <p:nvSpPr>
+          <p:cNvPr id="16" name="Rectangle: Rounded Corners 15">
+            <a:extLst>
+              <a:ext uri="{FF2B5EF4-FFF2-40B4-BE49-F238E27FC236}">
+                <a16:creationId xmlns:a16="http://schemas.microsoft.com/office/drawing/2014/main" id="{01DE2915-CC9E-3648-1645-E33388F5E2AE}"/>
+              </a:ext>
+            </a:extLst>
+          </p:cNvPr>
+          <p:cNvSpPr/>
+          <p:nvPr/>
+        </p:nvSpPr>
+        <p:spPr>
+          <a:xfrm>
+            <a:off x="6248400" y="4064000"/>
+            <a:ext cx="5334000" cy="1955800"/>
+          </a:xfrm>
+          <a:prstGeom prst="roundRect">
+            <a:avLst>
+              <a:gd name="adj" fmla="val 6000"/>
+            </a:avLst>
+          </a:prstGeom>
+          <a:solidFill>
+            <a:srgbClr val="12243C"/>
+          </a:solidFill>
+          <a:ln w="9525">
+            <a:solidFill>
+              <a:srgbClr val="1E3653"/>
+            </a:solidFill>
+          </a:ln>
+        </p:spPr>
+        <p:style>
+          <a:lnRef idx="2">
+            <a:schemeClr val="accent1">
+              <a:shade val="15000"/>
+            </a:schemeClr>
+          </a:lnRef>
+          <a:fillRef idx="1">
+            <a:schemeClr val="accent1"/>
+          </a:fillRef>
+          <a:effectRef idx="0">
+            <a:schemeClr val="accent1"/>
+          </a:effectRef>
+          <a:fontRef idx="minor">
+            <a:schemeClr val="lt1"/>
+          </a:fontRef>
+        </p:style>
+        <p:txBody>
+          <a:bodyPr rtlCol="0" anchor="ctr"/>
+          <a:lstStyle/>
+          <a:p>
+            <a:pPr algn="ctr"/>
+            <a:endParaRPr lang="en-SG"/>
+          </a:p>
+        </p:txBody>
+      </p:sp>
+      <p:sp>
+        <p:nvSpPr>
+          <p:cNvPr id="17" name="Oval 16">
+            <a:extLst>
+              <a:ext uri="{FF2B5EF4-FFF2-40B4-BE49-F238E27FC236}">
+                <a16:creationId xmlns:a16="http://schemas.microsoft.com/office/drawing/2014/main" id="{80AC23CC-5375-63A0-3888-AA2A3BF531EF}"/>
+              </a:ext>
+            </a:extLst>
+          </p:cNvPr>
+          <p:cNvSpPr/>
+          <p:nvPr/>
+        </p:nvSpPr>
+        <p:spPr>
+          <a:xfrm>
+            <a:off x="6527800" y="4343400"/>
+            <a:ext cx="508000" cy="508000"/>
+          </a:xfrm>
+          <a:prstGeom prst="ellipse">
+            <a:avLst/>
+          </a:prstGeom>
+          <a:solidFill>
+            <a:srgbClr val="24183F"/>
+          </a:solidFill>
+          <a:ln w="9525">
+            <a:solidFill>
+              <a:srgbClr val="B98FFF"/>
+            </a:solidFill>
+          </a:ln>
+        </p:spPr>
+        <p:style>
+          <a:lnRef idx="2">
+            <a:schemeClr val="accent1">
+              <a:shade val="15000"/>
+            </a:schemeClr>
+          </a:lnRef>
+          <a:fillRef idx="1">
+            <a:schemeClr val="accent1"/>
+          </a:fillRef>
+          <a:effectRef idx="0">
+            <a:schemeClr val="accent1"/>
+          </a:effectRef>
+          <a:fontRef idx="minor">
+            <a:schemeClr val="lt1"/>
+          </a:fontRef>
+        </p:style>
+        <p:txBody>
+          <a:bodyPr lIns="0" tIns="0" rIns="0" bIns="0" rtlCol="0" anchor="ctr"/>
+          <a:lstStyle/>
+          <a:p>
+            <a:pPr algn="ctr"/>
+            <a:r>
+              <a:rPr lang="en-SG" b="1">
+                <a:solidFill>
+                  <a:srgbClr val="EBDFFF"/>
+                </a:solidFill>
+                <a:latin typeface="Consolas" panose="020B0609020204030204" pitchFamily="49" charset="0"/>
+              </a:rPr>
+              <a:t>4</a:t>
+            </a:r>
+          </a:p>
+        </p:txBody>
+      </p:sp>
+      <p:sp>
+        <p:nvSpPr>
+          <p:cNvPr id="18" name="TextBox 17">
+            <a:extLst>
+              <a:ext uri="{FF2B5EF4-FFF2-40B4-BE49-F238E27FC236}">
+                <a16:creationId xmlns:a16="http://schemas.microsoft.com/office/drawing/2014/main" id="{937EC7BB-B99F-D1AF-5572-C5740E13CDA8}"/>
+              </a:ext>
+            </a:extLst>
+          </p:cNvPr>
+          <p:cNvSpPr txBox="1"/>
+          <p:nvPr/>
+        </p:nvSpPr>
+        <p:spPr>
+          <a:xfrm>
+            <a:off x="7239000" y="4394200"/>
+            <a:ext cx="4140200" cy="406400"/>
+          </a:xfrm>
+          <a:prstGeom prst="rect">
+            <a:avLst/>
+          </a:prstGeom>
+          <a:noFill/>
+        </p:spPr>
+        <p:txBody>
+          <a:bodyPr vert="horz" wrap="square" lIns="0" tIns="0" rIns="0" bIns="0" rtlCol="0">
+            <a:noAutofit/>
+          </a:bodyPr>
+          <a:lstStyle/>
+          <a:p>
+            <a:r>
+              <a:rPr lang="en-SG" sz="2000" b="1">
+                <a:solidFill>
+                  <a:srgbClr val="F7FAFD"/>
+                </a:solidFill>
+                <a:latin typeface="Segoe UI" panose="020B0502040204020203" pitchFamily="34" charset="0"/>
+              </a:rPr>
+              <a:t>Figures come from code</a:t>
+            </a:r>
+          </a:p>
+        </p:txBody>
+      </p:sp>
+      <p:sp>
+        <p:nvSpPr>
+          <p:cNvPr id="19" name="TextBox 18">
+            <a:extLst>
+              <a:ext uri="{FF2B5EF4-FFF2-40B4-BE49-F238E27FC236}">
+                <a16:creationId xmlns:a16="http://schemas.microsoft.com/office/drawing/2014/main" id="{7228E1A3-51CB-F521-E840-2A41DB66DF8C}"/>
+              </a:ext>
+            </a:extLst>
+          </p:cNvPr>
+          <p:cNvSpPr txBox="1"/>
+          <p:nvPr/>
+        </p:nvSpPr>
+        <p:spPr>
+          <a:xfrm>
+            <a:off x="6527800" y="5054600"/>
+            <a:ext cx="4775200" cy="838200"/>
+          </a:xfrm>
+          <a:prstGeom prst="rect">
+            <a:avLst/>
+          </a:prstGeom>
+          <a:noFill/>
+        </p:spPr>
+        <p:txBody>
+          <a:bodyPr vert="horz" wrap="square" lIns="0" tIns="0" rIns="0" bIns="0" rtlCol="0">
+            <a:noAutofit/>
+          </a:bodyPr>
+          <a:lstStyle/>
+          <a:p>
+            <a:r>
+              <a:rPr lang="en-SG" sz="1600">
+                <a:solidFill>
+                  <a:srgbClr val="E1EAF4"/>
+                </a:solidFill>
+                <a:latin typeface="Segoe UI" panose="020B0502040204020203" pitchFamily="34" charset="0"/>
+              </a:rPr>
+              <a:t>The optional local LLM only rephrases. It never adds a number.</a:t>
+            </a:r>
+          </a:p>
+        </p:txBody>
+      </p:sp>
+      <p:sp>
+        <p:nvSpPr>
+          <p:cNvPr id="20" name="TextBox 19">
+            <a:extLst>
+              <a:ext uri="{FF2B5EF4-FFF2-40B4-BE49-F238E27FC236}">
+                <a16:creationId xmlns:a16="http://schemas.microsoft.com/office/drawing/2014/main" id="{9E2EFC28-BF0B-E2D6-54DC-45A63ED8D833}"/>
+              </a:ext>
+            </a:extLst>
+          </p:cNvPr>
+          <p:cNvSpPr txBox="1"/>
+          <p:nvPr/>
+        </p:nvSpPr>
+        <p:spPr>
+          <a:xfrm>
+            <a:off x="609600" y="6400800"/>
+            <a:ext cx="8890000" cy="228600"/>
+          </a:xfrm>
+          <a:prstGeom prst="rect">
+            <a:avLst/>
+          </a:prstGeom>
+          <a:noFill/>
+        </p:spPr>
+        <p:txBody>
+          <a:bodyPr vert="horz" wrap="square" lIns="0" tIns="0" rIns="0" bIns="0" rtlCol="0">
+            <a:noAutofit/>
+          </a:bodyPr>
+          <a:lstStyle/>
+          <a:p>
+            <a:r>
+              <a:rPr lang="en-SG" sz="1200">
+                <a:solidFill>
+                  <a:srgbClr val="93ABC6"/>
+                </a:solidFill>
+                <a:latin typeface="Consolas" panose="020B0609020204030204" pitchFamily="49" charset="0"/>
+              </a:rPr>
+              <a:t>ADAPTIVE CGF TRAINER</a:t>
+            </a:r>
+          </a:p>
+        </p:txBody>
+      </p:sp>
+      <p:sp>
+        <p:nvSpPr>
+          <p:cNvPr id="21" name="TextBox 20">
+            <a:extLst>
+              <a:ext uri="{FF2B5EF4-FFF2-40B4-BE49-F238E27FC236}">
+                <a16:creationId xmlns:a16="http://schemas.microsoft.com/office/drawing/2014/main" id="{F6A80CCB-2FBD-2314-C5F1-853DD4D7D3CA}"/>
+              </a:ext>
+            </a:extLst>
+          </p:cNvPr>
+          <p:cNvSpPr txBox="1"/>
+          <p:nvPr/>
+        </p:nvSpPr>
+        <p:spPr>
+          <a:xfrm>
+            <a:off x="10312400" y="6400800"/>
+            <a:ext cx="1270000" cy="228600"/>
+          </a:xfrm>
+          <a:prstGeom prst="rect">
+            <a:avLst/>
+          </a:prstGeom>
+          <a:noFill/>
+        </p:spPr>
+        <p:txBody>
+          <a:bodyPr vert="horz" wrap="square" lIns="0" tIns="0" rIns="0" bIns="0" rtlCol="0">
+            <a:noAutofit/>
+          </a:bodyPr>
+          <a:lstStyle/>
+          <a:p>
+            <a:pPr algn="r"/>
+            <a:r>
+              <a:rPr lang="en-SG" sz="1200">
+                <a:solidFill>
+                  <a:srgbClr val="93ABC6"/>
+                </a:solidFill>
+                <a:latin typeface="Consolas" panose="020B0609020204030204" pitchFamily="49" charset="0"/>
+              </a:rPr>
+              <a:t>10</a:t>
+            </a:r>
+          </a:p>
+        </p:txBody>
+      </p:sp>
+    </p:spTree>
+    <p:extLst>
+      <p:ext uri="{BB962C8B-B14F-4D97-AF65-F5344CB8AC3E}">
+        <p14:creationId xmlns:p14="http://schemas.microsoft.com/office/powerpoint/2010/main" val="3979770561"/>
+      </p:ext>
+    </p:extLst>
+  </p:cSld>
+  <p:clrMapOvr>
+    <a:masterClrMapping/>
+  </p:clrMapOvr>
+</p:sld>
+</file>
+
+<file path=ppt/slides/slide11.xml><?xml version="1.0" encoding="utf-8"?>
 <p:sld xmlns:a="http://schemas.openxmlformats.org/drawingml/2006/main" xmlns:r="http://schemas.openxmlformats.org/officeDocument/2006/relationships" xmlns:p="http://schemas.openxmlformats.org/presentationml/2006/main">
   <p:cSld>
     <p:bg>
@@ -6083,7 +7162,7 @@
           <p:cNvPr id="2" name="Title 1">
             <a:extLst>
               <a:ext uri="{FF2B5EF4-FFF2-40B4-BE49-F238E27FC236}">
-                <a16:creationId xmlns:a16="http://schemas.microsoft.com/office/drawing/2014/main" id="{1077A25D-1241-0B92-7D3E-EA990C537219}"/>
+                <a16:creationId xmlns:a16="http://schemas.microsoft.com/office/drawing/2014/main" id="{EC09686F-CD99-89BE-5AF1-8BE6B2A539D3}"/>
               </a:ext>
             </a:extLst>
           </p:cNvPr>
@@ -6123,7 +7202,7 @@
           <p:cNvPr id="3" name="TextBox 2">
             <a:extLst>
               <a:ext uri="{FF2B5EF4-FFF2-40B4-BE49-F238E27FC236}">
-                <a16:creationId xmlns:a16="http://schemas.microsoft.com/office/drawing/2014/main" id="{CF2C02D9-5E5C-0784-82D1-5CAC108DB24D}"/>
+                <a16:creationId xmlns:a16="http://schemas.microsoft.com/office/drawing/2014/main" id="{F9FCB682-3231-5341-3793-4778EA717CAF}"/>
               </a:ext>
             </a:extLst>
           </p:cNvPr>
@@ -6163,7 +7242,7 @@
           <p:cNvPr id="4" name="TextBox 3">
             <a:extLst>
               <a:ext uri="{FF2B5EF4-FFF2-40B4-BE49-F238E27FC236}">
-                <a16:creationId xmlns:a16="http://schemas.microsoft.com/office/drawing/2014/main" id="{279D2AFE-0ADD-9BA2-16D6-0940C33C9810}"/>
+                <a16:creationId xmlns:a16="http://schemas.microsoft.com/office/drawing/2014/main" id="{ADE8ACF8-D277-4E55-6A98-FA51272ABF16}"/>
               </a:ext>
             </a:extLst>
           </p:cNvPr>
@@ -6203,7 +7282,7 @@
           <p:cNvPr id="5" name="TextBox 4">
             <a:extLst>
               <a:ext uri="{FF2B5EF4-FFF2-40B4-BE49-F238E27FC236}">
-                <a16:creationId xmlns:a16="http://schemas.microsoft.com/office/drawing/2014/main" id="{22576DF3-6068-08E4-6C65-6C6DD393CD90}"/>
+                <a16:creationId xmlns:a16="http://schemas.microsoft.com/office/drawing/2014/main" id="{74424968-B7C1-DCE5-ECA4-5A1C13E2CF12}"/>
               </a:ext>
             </a:extLst>
           </p:cNvPr>
@@ -6243,7 +7322,7 @@
           <p:cNvPr id="6" name="TextBox 5">
             <a:extLst>
               <a:ext uri="{FF2B5EF4-FFF2-40B4-BE49-F238E27FC236}">
-                <a16:creationId xmlns:a16="http://schemas.microsoft.com/office/drawing/2014/main" id="{01CBF03D-BF95-B5B2-4DC9-A37E6B9669CD}"/>
+                <a16:creationId xmlns:a16="http://schemas.microsoft.com/office/drawing/2014/main" id="{000CDA1A-E19E-AA1E-40E2-2C3367E0B0F6}"/>
               </a:ext>
             </a:extLst>
           </p:cNvPr>
@@ -6283,7 +7362,7 @@
           <p:cNvPr id="7" name="TextBox 6">
             <a:extLst>
               <a:ext uri="{FF2B5EF4-FFF2-40B4-BE49-F238E27FC236}">
-                <a16:creationId xmlns:a16="http://schemas.microsoft.com/office/drawing/2014/main" id="{BC2F31A8-0835-D5C1-67EC-22584D4E1E3E}"/>
+                <a16:creationId xmlns:a16="http://schemas.microsoft.com/office/drawing/2014/main" id="{8F6687A3-741D-D46C-3E96-8AF4263B752C}"/>
               </a:ext>
             </a:extLst>
           </p:cNvPr>
@@ -6323,7 +7402,7 @@
           <p:cNvPr id="8" name="TextBox 7">
             <a:extLst>
               <a:ext uri="{FF2B5EF4-FFF2-40B4-BE49-F238E27FC236}">
-                <a16:creationId xmlns:a16="http://schemas.microsoft.com/office/drawing/2014/main" id="{2696B5A7-DBC4-C4DF-E53F-3E378072CDFB}"/>
+                <a16:creationId xmlns:a16="http://schemas.microsoft.com/office/drawing/2014/main" id="{12AB773D-102F-D9E5-64F0-6312924E0D76}"/>
               </a:ext>
             </a:extLst>
           </p:cNvPr>
@@ -6363,7 +7442,7 @@
           <p:cNvPr id="9" name="TextBox 8">
             <a:extLst>
               <a:ext uri="{FF2B5EF4-FFF2-40B4-BE49-F238E27FC236}">
-                <a16:creationId xmlns:a16="http://schemas.microsoft.com/office/drawing/2014/main" id="{9DB4326A-C943-7C40-129D-2F8B1FCA2017}"/>
+                <a16:creationId xmlns:a16="http://schemas.microsoft.com/office/drawing/2014/main" id="{0D8ED939-19B0-BF24-2864-69EDA4BF2C8D}"/>
               </a:ext>
             </a:extLst>
           </p:cNvPr>
@@ -6403,7 +7482,7 @@
           <p:cNvPr id="11" name="Picture 10" descr="The end-of-training report: a table of trainees, a debrief with focus area, and a chart of CGF pressure">
             <a:extLst>
               <a:ext uri="{FF2B5EF4-FFF2-40B4-BE49-F238E27FC236}">
-                <a16:creationId xmlns:a16="http://schemas.microsoft.com/office/drawing/2014/main" id="{477BE414-3F3B-67A3-315F-F52C252736B5}"/>
+                <a16:creationId xmlns:a16="http://schemas.microsoft.com/office/drawing/2014/main" id="{B592FC8E-9168-49CC-B075-6538D412A7B6}"/>
               </a:ext>
             </a:extLst>
           </p:cNvPr>
@@ -6444,7 +7523,7 @@
           <p:cNvPr id="12" name="TextBox 11">
             <a:extLst>
               <a:ext uri="{FF2B5EF4-FFF2-40B4-BE49-F238E27FC236}">
-                <a16:creationId xmlns:a16="http://schemas.microsoft.com/office/drawing/2014/main" id="{A3761C2D-C378-FC57-78BB-2281A8494FCB}"/>
+                <a16:creationId xmlns:a16="http://schemas.microsoft.com/office/drawing/2014/main" id="{6506C5B7-DC85-14F5-B74C-22B71CCDA854}"/>
               </a:ext>
             </a:extLst>
           </p:cNvPr>
@@ -6474,7 +7553,7 @@
                 </a:solidFill>
                 <a:latin typeface="Consolas" panose="020B0609020204030204" pitchFamily="49" charset="0"/>
               </a:rPr>
-              <a:t>ADAPTIVE CGF TRAINER  ·  SEEDED SESSION</a:t>
+              <a:t>ADAPTIVE CGF TRAINER  System.__ComObject  SEEDED SESSION</a:t>
             </a:r>
           </a:p>
         </p:txBody>
@@ -6484,7 +7563,7 @@
           <p:cNvPr id="13" name="TextBox 12">
             <a:extLst>
               <a:ext uri="{FF2B5EF4-FFF2-40B4-BE49-F238E27FC236}">
-                <a16:creationId xmlns:a16="http://schemas.microsoft.com/office/drawing/2014/main" id="{7474DE21-EB36-4839-7E14-94D2DC843D95}"/>
+                <a16:creationId xmlns:a16="http://schemas.microsoft.com/office/drawing/2014/main" id="{9570993A-BAF7-E0F1-7626-57CA06B93DB7}"/>
               </a:ext>
             </a:extLst>
           </p:cNvPr>
@@ -6515,7 +7594,7 @@
                 </a:solidFill>
                 <a:latin typeface="Consolas" panose="020B0609020204030204" pitchFamily="49" charset="0"/>
               </a:rPr>
-              <a:t>10</a:t>
+              <a:t>11</a:t>
             </a:r>
           </a:p>
         </p:txBody>
@@ -6523,487 +7602,7 @@
     </p:spTree>
     <p:extLst>
       <p:ext uri="{BB962C8B-B14F-4D97-AF65-F5344CB8AC3E}">
-        <p14:creationId xmlns:p14="http://schemas.microsoft.com/office/powerpoint/2010/main" val="2674717734"/>
-      </p:ext>
-    </p:extLst>
-  </p:cSld>
-  <p:clrMapOvr>
-    <a:masterClrMapping/>
-  </p:clrMapOvr>
-</p:sld>
-</file>
-
-<file path=ppt/slides/slide11.xml><?xml version="1.0" encoding="utf-8"?>
-<p:sld xmlns:a="http://schemas.openxmlformats.org/drawingml/2006/main" xmlns:r="http://schemas.openxmlformats.org/officeDocument/2006/relationships" xmlns:p="http://schemas.openxmlformats.org/presentationml/2006/main">
-  <p:cSld>
-    <p:bg>
-      <p:bgPr>
-        <a:solidFill>
-          <a:srgbClr val="081421"/>
-        </a:solidFill>
-        <a:effectLst/>
-      </p:bgPr>
-    </p:bg>
-    <p:spTree>
-      <p:nvGrpSpPr>
-        <p:cNvPr id="1" name=""/>
-        <p:cNvGrpSpPr/>
-        <p:nvPr/>
-      </p:nvGrpSpPr>
-      <p:grpSpPr>
-        <a:xfrm>
-          <a:off x="0" y="0"/>
-          <a:ext cx="0" cy="0"/>
-          <a:chOff x="0" y="0"/>
-          <a:chExt cx="0" cy="0"/>
-        </a:xfrm>
-      </p:grpSpPr>
-      <p:sp>
-        <p:nvSpPr>
-          <p:cNvPr id="2" name="Title 1">
-            <a:extLst>
-              <a:ext uri="{FF2B5EF4-FFF2-40B4-BE49-F238E27FC236}">
-                <a16:creationId xmlns:a16="http://schemas.microsoft.com/office/drawing/2014/main" id="{E3A03379-9F8E-A94A-7170-1716D5DCCDA5}"/>
-              </a:ext>
-            </a:extLst>
-          </p:cNvPr>
-          <p:cNvSpPr>
-            <a:spLocks noGrp="1"/>
-          </p:cNvSpPr>
-          <p:nvPr>
-            <p:ph type="title"/>
-          </p:nvPr>
-        </p:nvSpPr>
-        <p:spPr>
-          <a:xfrm>
-            <a:off x="609600" y="787400"/>
-            <a:ext cx="10972800" cy="1270000"/>
-          </a:xfrm>
-        </p:spPr>
-        <p:txBody>
-          <a:bodyPr wrap="square" lIns="0" tIns="0" rIns="0" bIns="0" anchor="t">
-            <a:noAutofit/>
-          </a:bodyPr>
-          <a:lstStyle/>
-          <a:p>
-            <a:r>
-              <a:rPr lang="en-SG" sz="3600" b="1">
-                <a:solidFill>
-                  <a:srgbClr val="F7FAFD"/>
-                </a:solidFill>
-                <a:latin typeface="Segoe UI" panose="020B0502040204020203" pitchFamily="34" charset="0"/>
-              </a:rPr>
-              <a:t>Where the whole intake is developing</a:t>
-            </a:r>
-          </a:p>
-        </p:txBody>
-      </p:sp>
-      <p:sp>
-        <p:nvSpPr>
-          <p:cNvPr id="3" name="TextBox 2">
-            <a:extLst>
-              <a:ext uri="{FF2B5EF4-FFF2-40B4-BE49-F238E27FC236}">
-                <a16:creationId xmlns:a16="http://schemas.microsoft.com/office/drawing/2014/main" id="{E5A8E976-778D-0098-6433-53B18CCA462F}"/>
-              </a:ext>
-            </a:extLst>
-          </p:cNvPr>
-          <p:cNvSpPr txBox="1"/>
-          <p:nvPr/>
-        </p:nvSpPr>
-        <p:spPr>
-          <a:xfrm>
-            <a:off x="609600" y="457200"/>
-            <a:ext cx="5969000" cy="254000"/>
-          </a:xfrm>
-          <a:prstGeom prst="rect">
-            <a:avLst/>
-          </a:prstGeom>
-          <a:noFill/>
-        </p:spPr>
-        <p:txBody>
-          <a:bodyPr vert="horz" wrap="square" lIns="0" tIns="0" rIns="0" bIns="0" rtlCol="0">
-            <a:noAutofit/>
-          </a:bodyPr>
-          <a:lstStyle/>
-          <a:p>
-            <a:r>
-              <a:rPr lang="en-SG" sz="1400">
-                <a:solidFill>
-                  <a:srgbClr val="2F9DFF"/>
-                </a:solidFill>
-                <a:latin typeface="Consolas" panose="020B0609020204030204" pitchFamily="49" charset="0"/>
-              </a:rPr>
-              <a:t>COHORT</a:t>
-            </a:r>
-          </a:p>
-        </p:txBody>
-      </p:sp>
-      <p:pic>
-        <p:nvPicPr>
-          <p:cNvPr id="5" name="Picture 4" descr="The cohort overview: competency means across 22 trainees and a heatmap by trainee">
-            <a:extLst>
-              <a:ext uri="{FF2B5EF4-FFF2-40B4-BE49-F238E27FC236}">
-                <a16:creationId xmlns:a16="http://schemas.microsoft.com/office/drawing/2014/main" id="{FEB04D9E-B658-37BF-886C-58F66825BBFE}"/>
-              </a:ext>
-            </a:extLst>
-          </p:cNvPr>
-          <p:cNvPicPr>
-            <a:picLocks/>
-          </p:cNvPicPr>
-          <p:nvPr/>
-        </p:nvPicPr>
-        <p:blipFill>
-          <a:blip r:embed="rId3">
-            <a:extLst>
-              <a:ext uri="{28A0092B-C50C-407E-A947-70E740481C1C}">
-                <a14:useLocalDpi xmlns:a14="http://schemas.microsoft.com/office/drawing/2010/main" val="0"/>
-              </a:ext>
-            </a:extLst>
-          </a:blip>
-          <a:stretch>
-            <a:fillRect/>
-          </a:stretch>
-        </p:blipFill>
-        <p:spPr>
-          <a:xfrm>
-            <a:off x="609600" y="2235200"/>
-            <a:ext cx="7493000" cy="3841589"/>
-          </a:xfrm>
-          <a:prstGeom prst="rect">
-            <a:avLst/>
-          </a:prstGeom>
-          <a:ln w="9525">
-            <a:solidFill>
-              <a:srgbClr val="4A78A8"/>
-            </a:solidFill>
-          </a:ln>
-        </p:spPr>
-      </p:pic>
-      <p:sp>
-        <p:nvSpPr>
-          <p:cNvPr id="6" name="TextBox 5">
-            <a:extLst>
-              <a:ext uri="{FF2B5EF4-FFF2-40B4-BE49-F238E27FC236}">
-                <a16:creationId xmlns:a16="http://schemas.microsoft.com/office/drawing/2014/main" id="{276A35DC-A385-8D12-6EE5-031FF6CFCB94}"/>
-              </a:ext>
-            </a:extLst>
-          </p:cNvPr>
-          <p:cNvSpPr txBox="1"/>
-          <p:nvPr/>
-        </p:nvSpPr>
-        <p:spPr>
-          <a:xfrm>
-            <a:off x="8407400" y="2235200"/>
-            <a:ext cx="3175000" cy="330200"/>
-          </a:xfrm>
-          <a:prstGeom prst="rect">
-            <a:avLst/>
-          </a:prstGeom>
-          <a:noFill/>
-        </p:spPr>
-        <p:txBody>
-          <a:bodyPr vert="horz" wrap="square" lIns="0" tIns="0" rIns="0" bIns="0" rtlCol="0">
-            <a:noAutofit/>
-          </a:bodyPr>
-          <a:lstStyle/>
-          <a:p>
-            <a:r>
-              <a:rPr lang="en-SG" b="1">
-                <a:solidFill>
-                  <a:srgbClr val="F7FAFD"/>
-                </a:solidFill>
-                <a:latin typeface="Segoe UI" panose="020B0502040204020203" pitchFamily="34" charset="0"/>
-              </a:rPr>
-              <a:t>22 synthetic trainees</a:t>
-            </a:r>
-          </a:p>
-        </p:txBody>
-      </p:sp>
-      <p:sp>
-        <p:nvSpPr>
-          <p:cNvPr id="7" name="TextBox 6">
-            <a:extLst>
-              <a:ext uri="{FF2B5EF4-FFF2-40B4-BE49-F238E27FC236}">
-                <a16:creationId xmlns:a16="http://schemas.microsoft.com/office/drawing/2014/main" id="{5D3DF68D-C9C0-5FF9-5A67-33CFBBE99C4D}"/>
-              </a:ext>
-            </a:extLst>
-          </p:cNvPr>
-          <p:cNvSpPr txBox="1"/>
-          <p:nvPr/>
-        </p:nvSpPr>
-        <p:spPr>
-          <a:xfrm>
-            <a:off x="8407400" y="2590800"/>
-            <a:ext cx="3175000" cy="812800"/>
-          </a:xfrm>
-          <a:prstGeom prst="rect">
-            <a:avLst/>
-          </a:prstGeom>
-          <a:noFill/>
-        </p:spPr>
-        <p:txBody>
-          <a:bodyPr vert="horz" wrap="square" lIns="0" tIns="0" rIns="0" bIns="0" rtlCol="0">
-            <a:noAutofit/>
-          </a:bodyPr>
-          <a:lstStyle/>
-          <a:p>
-            <a:r>
-              <a:rPr lang="en-SG" sz="1400">
-                <a:solidFill>
-                  <a:srgbClr val="E1EAF4"/>
-                </a:solidFill>
-                <a:latin typeface="Segoe UI" panose="020B0502040204020203" pitchFamily="34" charset="0"/>
-              </a:rPr>
-              <a:t>A heatmap of competencies, with the evidence behind each cell.</a:t>
-            </a:r>
-          </a:p>
-        </p:txBody>
-      </p:sp>
-      <p:sp>
-        <p:nvSpPr>
-          <p:cNvPr id="8" name="TextBox 7">
-            <a:extLst>
-              <a:ext uri="{FF2B5EF4-FFF2-40B4-BE49-F238E27FC236}">
-                <a16:creationId xmlns:a16="http://schemas.microsoft.com/office/drawing/2014/main" id="{4E7432A0-B4D7-ED14-AFCC-5D11F5634A95}"/>
-              </a:ext>
-            </a:extLst>
-          </p:cNvPr>
-          <p:cNvSpPr txBox="1"/>
-          <p:nvPr/>
-        </p:nvSpPr>
-        <p:spPr>
-          <a:xfrm>
-            <a:off x="8407400" y="3581400"/>
-            <a:ext cx="3175000" cy="330200"/>
-          </a:xfrm>
-          <a:prstGeom prst="rect">
-            <a:avLst/>
-          </a:prstGeom>
-          <a:noFill/>
-        </p:spPr>
-        <p:txBody>
-          <a:bodyPr vert="horz" wrap="square" lIns="0" tIns="0" rIns="0" bIns="0" rtlCol="0">
-            <a:noAutofit/>
-          </a:bodyPr>
-          <a:lstStyle/>
-          <a:p>
-            <a:r>
-              <a:rPr lang="en-SG" b="1">
-                <a:solidFill>
-                  <a:srgbClr val="F7FAFD"/>
-                </a:solidFill>
-                <a:latin typeface="Segoe UI" panose="020B0502040204020203" pitchFamily="34" charset="0"/>
-              </a:rPr>
-              <a:t>5 of 9 measured</a:t>
-            </a:r>
-          </a:p>
-        </p:txBody>
-      </p:sp>
-      <p:sp>
-        <p:nvSpPr>
-          <p:cNvPr id="9" name="TextBox 8">
-            <a:extLst>
-              <a:ext uri="{FF2B5EF4-FFF2-40B4-BE49-F238E27FC236}">
-                <a16:creationId xmlns:a16="http://schemas.microsoft.com/office/drawing/2014/main" id="{D8954B56-F5B0-DA13-EF40-D66F1D1B9AED}"/>
-              </a:ext>
-            </a:extLst>
-          </p:cNvPr>
-          <p:cNvSpPr txBox="1"/>
-          <p:nvPr/>
-        </p:nvSpPr>
-        <p:spPr>
-          <a:xfrm>
-            <a:off x="8407400" y="3937000"/>
-            <a:ext cx="3175000" cy="812800"/>
-          </a:xfrm>
-          <a:prstGeom prst="rect">
-            <a:avLst/>
-          </a:prstGeom>
-          <a:noFill/>
-        </p:spPr>
-        <p:txBody>
-          <a:bodyPr vert="horz" wrap="square" lIns="0" tIns="0" rIns="0" bIns="0" rtlCol="0">
-            <a:noAutofit/>
-          </a:bodyPr>
-          <a:lstStyle/>
-          <a:p>
-            <a:r>
-              <a:rPr lang="en-SG" sz="1400">
-                <a:solidFill>
-                  <a:srgbClr val="E1EAF4"/>
-                </a:solidFill>
-                <a:latin typeface="Segoe UI" panose="020B0502040204020203" pitchFamily="34" charset="0"/>
-              </a:rPr>
-              <a:t>The other four read “no evidence” until the simulator emits events for them.</a:t>
-            </a:r>
-          </a:p>
-        </p:txBody>
-      </p:sp>
-      <p:sp>
-        <p:nvSpPr>
-          <p:cNvPr id="10" name="TextBox 9">
-            <a:extLst>
-              <a:ext uri="{FF2B5EF4-FFF2-40B4-BE49-F238E27FC236}">
-                <a16:creationId xmlns:a16="http://schemas.microsoft.com/office/drawing/2014/main" id="{6DBC6553-AE60-BB88-A1A2-78B2D314B95A}"/>
-              </a:ext>
-            </a:extLst>
-          </p:cNvPr>
-          <p:cNvSpPr txBox="1"/>
-          <p:nvPr/>
-        </p:nvSpPr>
-        <p:spPr>
-          <a:xfrm>
-            <a:off x="8407400" y="4927600"/>
-            <a:ext cx="3175000" cy="330200"/>
-          </a:xfrm>
-          <a:prstGeom prst="rect">
-            <a:avLst/>
-          </a:prstGeom>
-          <a:noFill/>
-        </p:spPr>
-        <p:txBody>
-          <a:bodyPr vert="horz" wrap="square" lIns="0" tIns="0" rIns="0" bIns="0" rtlCol="0">
-            <a:noAutofit/>
-          </a:bodyPr>
-          <a:lstStyle/>
-          <a:p>
-            <a:r>
-              <a:rPr lang="en-SG" b="1">
-                <a:solidFill>
-                  <a:srgbClr val="F7FAFD"/>
-                </a:solidFill>
-                <a:latin typeface="Segoe UI" panose="020B0502040204020203" pitchFamily="34" charset="0"/>
-              </a:rPr>
-              <a:t>For the curriculum</a:t>
-            </a:r>
-          </a:p>
-        </p:txBody>
-      </p:sp>
-      <p:sp>
-        <p:nvSpPr>
-          <p:cNvPr id="11" name="TextBox 10">
-            <a:extLst>
-              <a:ext uri="{FF2B5EF4-FFF2-40B4-BE49-F238E27FC236}">
-                <a16:creationId xmlns:a16="http://schemas.microsoft.com/office/drawing/2014/main" id="{6D436949-5ED7-E8FD-3FD6-70F05FA108DD}"/>
-              </a:ext>
-            </a:extLst>
-          </p:cNvPr>
-          <p:cNvSpPr txBox="1"/>
-          <p:nvPr/>
-        </p:nvSpPr>
-        <p:spPr>
-          <a:xfrm>
-            <a:off x="8407400" y="5283200"/>
-            <a:ext cx="3175000" cy="812800"/>
-          </a:xfrm>
-          <a:prstGeom prst="rect">
-            <a:avLst/>
-          </a:prstGeom>
-          <a:noFill/>
-        </p:spPr>
-        <p:txBody>
-          <a:bodyPr vert="horz" wrap="square" lIns="0" tIns="0" rIns="0" bIns="0" rtlCol="0">
-            <a:noAutofit/>
-          </a:bodyPr>
-          <a:lstStyle/>
-          <a:p>
-            <a:r>
-              <a:rPr lang="en-SG" sz="1400">
-                <a:solidFill>
-                  <a:srgbClr val="E1EAF4"/>
-                </a:solidFill>
-                <a:latin typeface="Segoe UI" panose="020B0502040204020203" pitchFamily="34" charset="0"/>
-              </a:rPr>
-              <a:t>Not for ranking people.</a:t>
-            </a:r>
-          </a:p>
-        </p:txBody>
-      </p:sp>
-      <p:sp>
-        <p:nvSpPr>
-          <p:cNvPr id="12" name="TextBox 11">
-            <a:extLst>
-              <a:ext uri="{FF2B5EF4-FFF2-40B4-BE49-F238E27FC236}">
-                <a16:creationId xmlns:a16="http://schemas.microsoft.com/office/drawing/2014/main" id="{F01CAEC4-6199-2F94-9516-19E386377C38}"/>
-              </a:ext>
-            </a:extLst>
-          </p:cNvPr>
-          <p:cNvSpPr txBox="1"/>
-          <p:nvPr/>
-        </p:nvSpPr>
-        <p:spPr>
-          <a:xfrm>
-            <a:off x="609600" y="6400800"/>
-            <a:ext cx="8890000" cy="228600"/>
-          </a:xfrm>
-          <a:prstGeom prst="rect">
-            <a:avLst/>
-          </a:prstGeom>
-          <a:noFill/>
-        </p:spPr>
-        <p:txBody>
-          <a:bodyPr vert="horz" wrap="square" lIns="0" tIns="0" rIns="0" bIns="0" rtlCol="0">
-            <a:noAutofit/>
-          </a:bodyPr>
-          <a:lstStyle/>
-          <a:p>
-            <a:r>
-              <a:rPr lang="en-SG" sz="1200">
-                <a:solidFill>
-                  <a:srgbClr val="93ABC6"/>
-                </a:solidFill>
-                <a:latin typeface="Consolas" panose="020B0609020204030204" pitchFamily="49" charset="0"/>
-              </a:rPr>
-              <a:t>ADAPTIVE CGF TRAINER  ·  SYNTHETIC COHORT</a:t>
-            </a:r>
-          </a:p>
-        </p:txBody>
-      </p:sp>
-      <p:sp>
-        <p:nvSpPr>
-          <p:cNvPr id="13" name="TextBox 12">
-            <a:extLst>
-              <a:ext uri="{FF2B5EF4-FFF2-40B4-BE49-F238E27FC236}">
-                <a16:creationId xmlns:a16="http://schemas.microsoft.com/office/drawing/2014/main" id="{171EF8AF-EBC7-0BFD-75CE-59E807E674A3}"/>
-              </a:ext>
-            </a:extLst>
-          </p:cNvPr>
-          <p:cNvSpPr txBox="1"/>
-          <p:nvPr/>
-        </p:nvSpPr>
-        <p:spPr>
-          <a:xfrm>
-            <a:off x="10312400" y="6400800"/>
-            <a:ext cx="1270000" cy="228600"/>
-          </a:xfrm>
-          <a:prstGeom prst="rect">
-            <a:avLst/>
-          </a:prstGeom>
-          <a:noFill/>
-        </p:spPr>
-        <p:txBody>
-          <a:bodyPr vert="horz" wrap="square" lIns="0" tIns="0" rIns="0" bIns="0" rtlCol="0">
-            <a:noAutofit/>
-          </a:bodyPr>
-          <a:lstStyle/>
-          <a:p>
-            <a:pPr algn="r"/>
-            <a:r>
-              <a:rPr lang="en-SG" sz="1200">
-                <a:solidFill>
-                  <a:srgbClr val="93ABC6"/>
-                </a:solidFill>
-                <a:latin typeface="Consolas" panose="020B0609020204030204" pitchFamily="49" charset="0"/>
-              </a:rPr>
-              <a:t>11</a:t>
-            </a:r>
-          </a:p>
-        </p:txBody>
-      </p:sp>
-    </p:spTree>
-    <p:extLst>
-      <p:ext uri="{BB962C8B-B14F-4D97-AF65-F5344CB8AC3E}">
-        <p14:creationId xmlns:p14="http://schemas.microsoft.com/office/powerpoint/2010/main" val="2959091946"/>
+        <p14:creationId xmlns:p14="http://schemas.microsoft.com/office/powerpoint/2010/main" val="3814251000"/>
       </p:ext>
     </p:extLst>
   </p:cSld>
@@ -7043,7 +7642,7 @@
           <p:cNvPr id="2" name="Title 1">
             <a:extLst>
               <a:ext uri="{FF2B5EF4-FFF2-40B4-BE49-F238E27FC236}">
-                <a16:creationId xmlns:a16="http://schemas.microsoft.com/office/drawing/2014/main" id="{9D8A56B5-4FE1-83F0-96B8-B205279E023C}"/>
+                <a16:creationId xmlns:a16="http://schemas.microsoft.com/office/drawing/2014/main" id="{3C841F62-16BE-15D4-434B-FF5232E8733C}"/>
               </a:ext>
             </a:extLst>
           </p:cNvPr>
@@ -7057,7 +7656,7 @@
         <p:spPr>
           <a:xfrm>
             <a:off x="609600" y="787400"/>
-            <a:ext cx="10972800" cy="762000"/>
+            <a:ext cx="10972800" cy="1270000"/>
           </a:xfrm>
         </p:spPr>
         <p:txBody>
@@ -7067,13 +7666,13 @@
           <a:lstStyle/>
           <a:p>
             <a:r>
-              <a:rPr lang="en-SG" sz="4000" b="1">
+              <a:rPr lang="en-SG" sz="3600" b="1">
                 <a:solidFill>
                   <a:srgbClr val="F7FAFD"/>
                 </a:solidFill>
                 <a:latin typeface="Segoe UI" panose="020B0502040204020203" pitchFamily="34" charset="0"/>
               </a:rPr>
-              <a:t>Where AI is used, and where it is not</a:t>
+              <a:t>Where the whole intake is developing</a:t>
             </a:r>
           </a:p>
         </p:txBody>
@@ -7083,7 +7682,7 @@
           <p:cNvPr id="3" name="TextBox 2">
             <a:extLst>
               <a:ext uri="{FF2B5EF4-FFF2-40B4-BE49-F238E27FC236}">
-                <a16:creationId xmlns:a16="http://schemas.microsoft.com/office/drawing/2014/main" id="{99F409C8-930F-F542-4A4D-FA401C5B071A}"/>
+                <a16:creationId xmlns:a16="http://schemas.microsoft.com/office/drawing/2014/main" id="{B68FF87D-CFE7-CDB4-1A0E-EECDB420F73E}"/>
               </a:ext>
             </a:extLst>
           </p:cNvPr>
@@ -7113,6 +7712,486 @@
                 </a:solidFill>
                 <a:latin typeface="Consolas" panose="020B0609020204030204" pitchFamily="49" charset="0"/>
               </a:rPr>
+              <a:t>COHORT</a:t>
+            </a:r>
+          </a:p>
+        </p:txBody>
+      </p:sp>
+      <p:pic>
+        <p:nvPicPr>
+          <p:cNvPr id="5" name="Picture 4" descr="The cohort overview: competency means across 22 trainees and a heatmap by trainee">
+            <a:extLst>
+              <a:ext uri="{FF2B5EF4-FFF2-40B4-BE49-F238E27FC236}">
+                <a16:creationId xmlns:a16="http://schemas.microsoft.com/office/drawing/2014/main" id="{1145F0FB-F56A-A7B7-F381-622727E5F3B6}"/>
+              </a:ext>
+            </a:extLst>
+          </p:cNvPr>
+          <p:cNvPicPr>
+            <a:picLocks/>
+          </p:cNvPicPr>
+          <p:nvPr/>
+        </p:nvPicPr>
+        <p:blipFill>
+          <a:blip r:embed="rId3">
+            <a:extLst>
+              <a:ext uri="{28A0092B-C50C-407E-A947-70E740481C1C}">
+                <a14:useLocalDpi xmlns:a14="http://schemas.microsoft.com/office/drawing/2010/main" val="0"/>
+              </a:ext>
+            </a:extLst>
+          </a:blip>
+          <a:stretch>
+            <a:fillRect/>
+          </a:stretch>
+        </p:blipFill>
+        <p:spPr>
+          <a:xfrm>
+            <a:off x="609600" y="2235200"/>
+            <a:ext cx="7493000" cy="3841589"/>
+          </a:xfrm>
+          <a:prstGeom prst="rect">
+            <a:avLst/>
+          </a:prstGeom>
+          <a:ln w="9525">
+            <a:solidFill>
+              <a:srgbClr val="4A78A8"/>
+            </a:solidFill>
+          </a:ln>
+        </p:spPr>
+      </p:pic>
+      <p:sp>
+        <p:nvSpPr>
+          <p:cNvPr id="6" name="TextBox 5">
+            <a:extLst>
+              <a:ext uri="{FF2B5EF4-FFF2-40B4-BE49-F238E27FC236}">
+                <a16:creationId xmlns:a16="http://schemas.microsoft.com/office/drawing/2014/main" id="{DEADC1A0-1B02-AC78-3CB8-B39E6A226B03}"/>
+              </a:ext>
+            </a:extLst>
+          </p:cNvPr>
+          <p:cNvSpPr txBox="1"/>
+          <p:nvPr/>
+        </p:nvSpPr>
+        <p:spPr>
+          <a:xfrm>
+            <a:off x="8407400" y="2235200"/>
+            <a:ext cx="3175000" cy="330200"/>
+          </a:xfrm>
+          <a:prstGeom prst="rect">
+            <a:avLst/>
+          </a:prstGeom>
+          <a:noFill/>
+        </p:spPr>
+        <p:txBody>
+          <a:bodyPr vert="horz" wrap="square" lIns="0" tIns="0" rIns="0" bIns="0" rtlCol="0">
+            <a:noAutofit/>
+          </a:bodyPr>
+          <a:lstStyle/>
+          <a:p>
+            <a:r>
+              <a:rPr lang="en-SG" b="1">
+                <a:solidFill>
+                  <a:srgbClr val="F7FAFD"/>
+                </a:solidFill>
+                <a:latin typeface="Segoe UI" panose="020B0502040204020203" pitchFamily="34" charset="0"/>
+              </a:rPr>
+              <a:t>22 synthetic trainees</a:t>
+            </a:r>
+          </a:p>
+        </p:txBody>
+      </p:sp>
+      <p:sp>
+        <p:nvSpPr>
+          <p:cNvPr id="7" name="TextBox 6">
+            <a:extLst>
+              <a:ext uri="{FF2B5EF4-FFF2-40B4-BE49-F238E27FC236}">
+                <a16:creationId xmlns:a16="http://schemas.microsoft.com/office/drawing/2014/main" id="{C1ECA62A-FA54-61F9-6160-345BAD998878}"/>
+              </a:ext>
+            </a:extLst>
+          </p:cNvPr>
+          <p:cNvSpPr txBox="1"/>
+          <p:nvPr/>
+        </p:nvSpPr>
+        <p:spPr>
+          <a:xfrm>
+            <a:off x="8407400" y="2590800"/>
+            <a:ext cx="3175000" cy="812800"/>
+          </a:xfrm>
+          <a:prstGeom prst="rect">
+            <a:avLst/>
+          </a:prstGeom>
+          <a:noFill/>
+        </p:spPr>
+        <p:txBody>
+          <a:bodyPr vert="horz" wrap="square" lIns="0" tIns="0" rIns="0" bIns="0" rtlCol="0">
+            <a:noAutofit/>
+          </a:bodyPr>
+          <a:lstStyle/>
+          <a:p>
+            <a:r>
+              <a:rPr lang="en-SG" sz="1400">
+                <a:solidFill>
+                  <a:srgbClr val="E1EAF4"/>
+                </a:solidFill>
+                <a:latin typeface="Segoe UI" panose="020B0502040204020203" pitchFamily="34" charset="0"/>
+              </a:rPr>
+              <a:t>A heatmap of competencies, with the evidence behind each cell.</a:t>
+            </a:r>
+          </a:p>
+        </p:txBody>
+      </p:sp>
+      <p:sp>
+        <p:nvSpPr>
+          <p:cNvPr id="8" name="TextBox 7">
+            <a:extLst>
+              <a:ext uri="{FF2B5EF4-FFF2-40B4-BE49-F238E27FC236}">
+                <a16:creationId xmlns:a16="http://schemas.microsoft.com/office/drawing/2014/main" id="{08C20EC0-9B4E-F3E8-02F8-D23005FB4F67}"/>
+              </a:ext>
+            </a:extLst>
+          </p:cNvPr>
+          <p:cNvSpPr txBox="1"/>
+          <p:nvPr/>
+        </p:nvSpPr>
+        <p:spPr>
+          <a:xfrm>
+            <a:off x="8407400" y="3581400"/>
+            <a:ext cx="3175000" cy="330200"/>
+          </a:xfrm>
+          <a:prstGeom prst="rect">
+            <a:avLst/>
+          </a:prstGeom>
+          <a:noFill/>
+        </p:spPr>
+        <p:txBody>
+          <a:bodyPr vert="horz" wrap="square" lIns="0" tIns="0" rIns="0" bIns="0" rtlCol="0">
+            <a:noAutofit/>
+          </a:bodyPr>
+          <a:lstStyle/>
+          <a:p>
+            <a:r>
+              <a:rPr lang="en-SG" b="1">
+                <a:solidFill>
+                  <a:srgbClr val="F7FAFD"/>
+                </a:solidFill>
+                <a:latin typeface="Segoe UI" panose="020B0502040204020203" pitchFamily="34" charset="0"/>
+              </a:rPr>
+              <a:t>5 of 9 measured</a:t>
+            </a:r>
+          </a:p>
+        </p:txBody>
+      </p:sp>
+      <p:sp>
+        <p:nvSpPr>
+          <p:cNvPr id="9" name="TextBox 8">
+            <a:extLst>
+              <a:ext uri="{FF2B5EF4-FFF2-40B4-BE49-F238E27FC236}">
+                <a16:creationId xmlns:a16="http://schemas.microsoft.com/office/drawing/2014/main" id="{28FD5762-7EF7-127F-1ACD-0B71164C9D96}"/>
+              </a:ext>
+            </a:extLst>
+          </p:cNvPr>
+          <p:cNvSpPr txBox="1"/>
+          <p:nvPr/>
+        </p:nvSpPr>
+        <p:spPr>
+          <a:xfrm>
+            <a:off x="8407400" y="3937000"/>
+            <a:ext cx="3175000" cy="812800"/>
+          </a:xfrm>
+          <a:prstGeom prst="rect">
+            <a:avLst/>
+          </a:prstGeom>
+          <a:noFill/>
+        </p:spPr>
+        <p:txBody>
+          <a:bodyPr vert="horz" wrap="square" lIns="0" tIns="0" rIns="0" bIns="0" rtlCol="0">
+            <a:noAutofit/>
+          </a:bodyPr>
+          <a:lstStyle/>
+          <a:p>
+            <a:r>
+              <a:rPr lang="en-SG" sz="1400">
+                <a:solidFill>
+                  <a:srgbClr val="E1EAF4"/>
+                </a:solidFill>
+                <a:latin typeface="Segoe UI" panose="020B0502040204020203" pitchFamily="34" charset="0"/>
+              </a:rPr>
+              <a:t>The other four read “no evidence” until the simulator emits events for them.</a:t>
+            </a:r>
+          </a:p>
+        </p:txBody>
+      </p:sp>
+      <p:sp>
+        <p:nvSpPr>
+          <p:cNvPr id="10" name="TextBox 9">
+            <a:extLst>
+              <a:ext uri="{FF2B5EF4-FFF2-40B4-BE49-F238E27FC236}">
+                <a16:creationId xmlns:a16="http://schemas.microsoft.com/office/drawing/2014/main" id="{88C062E9-81DD-C385-193F-EA859CF4781B}"/>
+              </a:ext>
+            </a:extLst>
+          </p:cNvPr>
+          <p:cNvSpPr txBox="1"/>
+          <p:nvPr/>
+        </p:nvSpPr>
+        <p:spPr>
+          <a:xfrm>
+            <a:off x="8407400" y="4927600"/>
+            <a:ext cx="3175000" cy="330200"/>
+          </a:xfrm>
+          <a:prstGeom prst="rect">
+            <a:avLst/>
+          </a:prstGeom>
+          <a:noFill/>
+        </p:spPr>
+        <p:txBody>
+          <a:bodyPr vert="horz" wrap="square" lIns="0" tIns="0" rIns="0" bIns="0" rtlCol="0">
+            <a:noAutofit/>
+          </a:bodyPr>
+          <a:lstStyle/>
+          <a:p>
+            <a:r>
+              <a:rPr lang="en-SG" b="1">
+                <a:solidFill>
+                  <a:srgbClr val="F7FAFD"/>
+                </a:solidFill>
+                <a:latin typeface="Segoe UI" panose="020B0502040204020203" pitchFamily="34" charset="0"/>
+              </a:rPr>
+              <a:t>For the curriculum</a:t>
+            </a:r>
+          </a:p>
+        </p:txBody>
+      </p:sp>
+      <p:sp>
+        <p:nvSpPr>
+          <p:cNvPr id="11" name="TextBox 10">
+            <a:extLst>
+              <a:ext uri="{FF2B5EF4-FFF2-40B4-BE49-F238E27FC236}">
+                <a16:creationId xmlns:a16="http://schemas.microsoft.com/office/drawing/2014/main" id="{0408A326-6BB1-DA16-3A22-5D8AF08C1901}"/>
+              </a:ext>
+            </a:extLst>
+          </p:cNvPr>
+          <p:cNvSpPr txBox="1"/>
+          <p:nvPr/>
+        </p:nvSpPr>
+        <p:spPr>
+          <a:xfrm>
+            <a:off x="8407400" y="5283200"/>
+            <a:ext cx="3175000" cy="812800"/>
+          </a:xfrm>
+          <a:prstGeom prst="rect">
+            <a:avLst/>
+          </a:prstGeom>
+          <a:noFill/>
+        </p:spPr>
+        <p:txBody>
+          <a:bodyPr vert="horz" wrap="square" lIns="0" tIns="0" rIns="0" bIns="0" rtlCol="0">
+            <a:noAutofit/>
+          </a:bodyPr>
+          <a:lstStyle/>
+          <a:p>
+            <a:r>
+              <a:rPr lang="en-SG" sz="1400">
+                <a:solidFill>
+                  <a:srgbClr val="E1EAF4"/>
+                </a:solidFill>
+                <a:latin typeface="Segoe UI" panose="020B0502040204020203" pitchFamily="34" charset="0"/>
+              </a:rPr>
+              <a:t>Not for ranking people.</a:t>
+            </a:r>
+          </a:p>
+        </p:txBody>
+      </p:sp>
+      <p:sp>
+        <p:nvSpPr>
+          <p:cNvPr id="12" name="TextBox 11">
+            <a:extLst>
+              <a:ext uri="{FF2B5EF4-FFF2-40B4-BE49-F238E27FC236}">
+                <a16:creationId xmlns:a16="http://schemas.microsoft.com/office/drawing/2014/main" id="{1A801B01-8C8E-58FC-48E5-784BB809DF28}"/>
+              </a:ext>
+            </a:extLst>
+          </p:cNvPr>
+          <p:cNvSpPr txBox="1"/>
+          <p:nvPr/>
+        </p:nvSpPr>
+        <p:spPr>
+          <a:xfrm>
+            <a:off x="609600" y="6400800"/>
+            <a:ext cx="8890000" cy="228600"/>
+          </a:xfrm>
+          <a:prstGeom prst="rect">
+            <a:avLst/>
+          </a:prstGeom>
+          <a:noFill/>
+        </p:spPr>
+        <p:txBody>
+          <a:bodyPr vert="horz" wrap="square" lIns="0" tIns="0" rIns="0" bIns="0" rtlCol="0">
+            <a:noAutofit/>
+          </a:bodyPr>
+          <a:lstStyle/>
+          <a:p>
+            <a:r>
+              <a:rPr lang="en-SG" sz="1200">
+                <a:solidFill>
+                  <a:srgbClr val="93ABC6"/>
+                </a:solidFill>
+                <a:latin typeface="Consolas" panose="020B0609020204030204" pitchFamily="49" charset="0"/>
+              </a:rPr>
+              <a:t>ADAPTIVE CGF TRAINER  System.__ComObject  SYNTHETIC COHORT</a:t>
+            </a:r>
+          </a:p>
+        </p:txBody>
+      </p:sp>
+      <p:sp>
+        <p:nvSpPr>
+          <p:cNvPr id="13" name="TextBox 12">
+            <a:extLst>
+              <a:ext uri="{FF2B5EF4-FFF2-40B4-BE49-F238E27FC236}">
+                <a16:creationId xmlns:a16="http://schemas.microsoft.com/office/drawing/2014/main" id="{7D165533-4220-96CE-57E7-A84E47E23422}"/>
+              </a:ext>
+            </a:extLst>
+          </p:cNvPr>
+          <p:cNvSpPr txBox="1"/>
+          <p:nvPr/>
+        </p:nvSpPr>
+        <p:spPr>
+          <a:xfrm>
+            <a:off x="10312400" y="6400800"/>
+            <a:ext cx="1270000" cy="228600"/>
+          </a:xfrm>
+          <a:prstGeom prst="rect">
+            <a:avLst/>
+          </a:prstGeom>
+          <a:noFill/>
+        </p:spPr>
+        <p:txBody>
+          <a:bodyPr vert="horz" wrap="square" lIns="0" tIns="0" rIns="0" bIns="0" rtlCol="0">
+            <a:noAutofit/>
+          </a:bodyPr>
+          <a:lstStyle/>
+          <a:p>
+            <a:pPr algn="r"/>
+            <a:r>
+              <a:rPr lang="en-SG" sz="1200">
+                <a:solidFill>
+                  <a:srgbClr val="93ABC6"/>
+                </a:solidFill>
+                <a:latin typeface="Consolas" panose="020B0609020204030204" pitchFamily="49" charset="0"/>
+              </a:rPr>
+              <a:t>12</a:t>
+            </a:r>
+          </a:p>
+        </p:txBody>
+      </p:sp>
+    </p:spTree>
+    <p:extLst>
+      <p:ext uri="{BB962C8B-B14F-4D97-AF65-F5344CB8AC3E}">
+        <p14:creationId xmlns:p14="http://schemas.microsoft.com/office/powerpoint/2010/main" val="364363018"/>
+      </p:ext>
+    </p:extLst>
+  </p:cSld>
+  <p:clrMapOvr>
+    <a:masterClrMapping/>
+  </p:clrMapOvr>
+</p:sld>
+</file>
+
+<file path=ppt/slides/slide13.xml><?xml version="1.0" encoding="utf-8"?>
+<p:sld xmlns:a="http://schemas.openxmlformats.org/drawingml/2006/main" xmlns:r="http://schemas.openxmlformats.org/officeDocument/2006/relationships" xmlns:p="http://schemas.openxmlformats.org/presentationml/2006/main">
+  <p:cSld>
+    <p:bg>
+      <p:bgPr>
+        <a:solidFill>
+          <a:srgbClr val="081421"/>
+        </a:solidFill>
+        <a:effectLst/>
+      </p:bgPr>
+    </p:bg>
+    <p:spTree>
+      <p:nvGrpSpPr>
+        <p:cNvPr id="1" name=""/>
+        <p:cNvGrpSpPr/>
+        <p:nvPr/>
+      </p:nvGrpSpPr>
+      <p:grpSpPr>
+        <a:xfrm>
+          <a:off x="0" y="0"/>
+          <a:ext cx="0" cy="0"/>
+          <a:chOff x="0" y="0"/>
+          <a:chExt cx="0" cy="0"/>
+        </a:xfrm>
+      </p:grpSpPr>
+      <p:sp>
+        <p:nvSpPr>
+          <p:cNvPr id="2" name="Title 1">
+            <a:extLst>
+              <a:ext uri="{FF2B5EF4-FFF2-40B4-BE49-F238E27FC236}">
+                <a16:creationId xmlns:a16="http://schemas.microsoft.com/office/drawing/2014/main" id="{49360EE9-CA8D-6D1A-72BF-C926555E960C}"/>
+              </a:ext>
+            </a:extLst>
+          </p:cNvPr>
+          <p:cNvSpPr>
+            <a:spLocks noGrp="1"/>
+          </p:cNvSpPr>
+          <p:nvPr>
+            <p:ph type="title"/>
+          </p:nvPr>
+        </p:nvSpPr>
+        <p:spPr>
+          <a:xfrm>
+            <a:off x="609600" y="787400"/>
+            <a:ext cx="10972800" cy="762000"/>
+          </a:xfrm>
+        </p:spPr>
+        <p:txBody>
+          <a:bodyPr wrap="square" lIns="0" tIns="0" rIns="0" bIns="0" anchor="t">
+            <a:noAutofit/>
+          </a:bodyPr>
+          <a:lstStyle/>
+          <a:p>
+            <a:r>
+              <a:rPr lang="en-SG" sz="4000" b="1">
+                <a:solidFill>
+                  <a:srgbClr val="F7FAFD"/>
+                </a:solidFill>
+                <a:latin typeface="Segoe UI" panose="020B0502040204020203" pitchFamily="34" charset="0"/>
+              </a:rPr>
+              <a:t>Where AI is used, and where it is not</a:t>
+            </a:r>
+          </a:p>
+        </p:txBody>
+      </p:sp>
+      <p:sp>
+        <p:nvSpPr>
+          <p:cNvPr id="3" name="TextBox 2">
+            <a:extLst>
+              <a:ext uri="{FF2B5EF4-FFF2-40B4-BE49-F238E27FC236}">
+                <a16:creationId xmlns:a16="http://schemas.microsoft.com/office/drawing/2014/main" id="{1D0DF1CE-696F-9051-27B7-B220E853335B}"/>
+              </a:ext>
+            </a:extLst>
+          </p:cNvPr>
+          <p:cNvSpPr txBox="1"/>
+          <p:nvPr/>
+        </p:nvSpPr>
+        <p:spPr>
+          <a:xfrm>
+            <a:off x="609600" y="457200"/>
+            <a:ext cx="5969000" cy="254000"/>
+          </a:xfrm>
+          <a:prstGeom prst="rect">
+            <a:avLst/>
+          </a:prstGeom>
+          <a:noFill/>
+        </p:spPr>
+        <p:txBody>
+          <a:bodyPr vert="horz" wrap="square" lIns="0" tIns="0" rIns="0" bIns="0" rtlCol="0">
+            <a:noAutofit/>
+          </a:bodyPr>
+          <a:lstStyle/>
+          <a:p>
+            <a:r>
+              <a:rPr lang="en-SG" sz="1400">
+                <a:solidFill>
+                  <a:srgbClr val="2F9DFF"/>
+                </a:solidFill>
+                <a:latin typeface="Consolas" panose="020B0609020204030204" pitchFamily="49" charset="0"/>
+              </a:rPr>
               <a:t>AI IN THE SOLUTION</a:t>
             </a:r>
           </a:p>
@@ -7123,7 +8202,7 @@
           <p:cNvPr id="4" name="Rectangle: Rounded Corners 3">
             <a:extLst>
               <a:ext uri="{FF2B5EF4-FFF2-40B4-BE49-F238E27FC236}">
-                <a16:creationId xmlns:a16="http://schemas.microsoft.com/office/drawing/2014/main" id="{AE51DC9C-8DA4-A34C-3F98-4887508B2E71}"/>
+                <a16:creationId xmlns:a16="http://schemas.microsoft.com/office/drawing/2014/main" id="{6E749371-4C49-F8C9-099C-0FEC0A6E6A85}"/>
               </a:ext>
             </a:extLst>
           </p:cNvPr>
@@ -7179,7 +8258,7 @@
           <p:cNvPr id="5" name="Oval 4">
             <a:extLst>
               <a:ext uri="{FF2B5EF4-FFF2-40B4-BE49-F238E27FC236}">
-                <a16:creationId xmlns:a16="http://schemas.microsoft.com/office/drawing/2014/main" id="{8A2E9CFD-F6A6-85F3-8957-3D70B491C21D}"/>
+                <a16:creationId xmlns:a16="http://schemas.microsoft.com/office/drawing/2014/main" id="{222BA9EC-8CC1-58FC-E1E8-1F681607F63B}"/>
               </a:ext>
             </a:extLst>
           </p:cNvPr>
@@ -7241,7 +8320,7 @@
           <p:cNvPr id="6" name="TextBox 5">
             <a:extLst>
               <a:ext uri="{FF2B5EF4-FFF2-40B4-BE49-F238E27FC236}">
-                <a16:creationId xmlns:a16="http://schemas.microsoft.com/office/drawing/2014/main" id="{441B6234-9F28-CEC9-52B6-E01C43F4497F}"/>
+                <a16:creationId xmlns:a16="http://schemas.microsoft.com/office/drawing/2014/main" id="{6A494604-FCD7-B435-1C85-52A224008211}"/>
               </a:ext>
             </a:extLst>
           </p:cNvPr>
@@ -7281,7 +8360,7 @@
           <p:cNvPr id="7" name="TextBox 6">
             <a:extLst>
               <a:ext uri="{FF2B5EF4-FFF2-40B4-BE49-F238E27FC236}">
-                <a16:creationId xmlns:a16="http://schemas.microsoft.com/office/drawing/2014/main" id="{30B9DCEA-9E37-FB21-4739-C4FE8953F7E6}"/>
+                <a16:creationId xmlns:a16="http://schemas.microsoft.com/office/drawing/2014/main" id="{DAF10384-EFCE-C987-DB5D-9CD74F8B3540}"/>
               </a:ext>
             </a:extLst>
           </p:cNvPr>
@@ -7321,7 +8400,7 @@
           <p:cNvPr id="8" name="Rectangle: Rounded Corners 7">
             <a:extLst>
               <a:ext uri="{FF2B5EF4-FFF2-40B4-BE49-F238E27FC236}">
-                <a16:creationId xmlns:a16="http://schemas.microsoft.com/office/drawing/2014/main" id="{8AAE2E92-42D8-C006-B87E-FA2D0D36808F}"/>
+                <a16:creationId xmlns:a16="http://schemas.microsoft.com/office/drawing/2014/main" id="{97140E85-EC54-EAA2-6C73-643E897A5E78}"/>
               </a:ext>
             </a:extLst>
           </p:cNvPr>
@@ -7377,7 +8456,7 @@
           <p:cNvPr id="9" name="Oval 8">
             <a:extLst>
               <a:ext uri="{FF2B5EF4-FFF2-40B4-BE49-F238E27FC236}">
-                <a16:creationId xmlns:a16="http://schemas.microsoft.com/office/drawing/2014/main" id="{2976BC3A-EAF5-F81D-AB5C-343056277A82}"/>
+                <a16:creationId xmlns:a16="http://schemas.microsoft.com/office/drawing/2014/main" id="{3E9FB52D-833A-A9EE-E2C7-2F263308D1F8}"/>
               </a:ext>
             </a:extLst>
           </p:cNvPr>
@@ -7439,7 +8518,7 @@
           <p:cNvPr id="10" name="TextBox 9">
             <a:extLst>
               <a:ext uri="{FF2B5EF4-FFF2-40B4-BE49-F238E27FC236}">
-                <a16:creationId xmlns:a16="http://schemas.microsoft.com/office/drawing/2014/main" id="{62DCAF76-810A-1B28-CED6-7B9C46BF2C37}"/>
+                <a16:creationId xmlns:a16="http://schemas.microsoft.com/office/drawing/2014/main" id="{1FE9D4AA-BB50-9DD5-914A-C0513E3D4B2B}"/>
               </a:ext>
             </a:extLst>
           </p:cNvPr>
@@ -7479,7 +8558,7 @@
           <p:cNvPr id="11" name="TextBox 10">
             <a:extLst>
               <a:ext uri="{FF2B5EF4-FFF2-40B4-BE49-F238E27FC236}">
-                <a16:creationId xmlns:a16="http://schemas.microsoft.com/office/drawing/2014/main" id="{557DDA7B-DEA7-4424-5405-FD78B60F8111}"/>
+                <a16:creationId xmlns:a16="http://schemas.microsoft.com/office/drawing/2014/main" id="{A0A00DEE-595A-4D5A-03E2-20739CAB01FE}"/>
               </a:ext>
             </a:extLst>
           </p:cNvPr>
@@ -7519,7 +8598,7 @@
           <p:cNvPr id="12" name="Rectangle: Rounded Corners 11">
             <a:extLst>
               <a:ext uri="{FF2B5EF4-FFF2-40B4-BE49-F238E27FC236}">
-                <a16:creationId xmlns:a16="http://schemas.microsoft.com/office/drawing/2014/main" id="{A877AD4A-F7C6-5EE1-6BEF-3E2FA850A930}"/>
+                <a16:creationId xmlns:a16="http://schemas.microsoft.com/office/drawing/2014/main" id="{E2AA6BBA-7487-9D82-5DF6-E054EFD9CFE0}"/>
               </a:ext>
             </a:extLst>
           </p:cNvPr>
@@ -7575,7 +8654,7 @@
           <p:cNvPr id="13" name="Oval 12">
             <a:extLst>
               <a:ext uri="{FF2B5EF4-FFF2-40B4-BE49-F238E27FC236}">
-                <a16:creationId xmlns:a16="http://schemas.microsoft.com/office/drawing/2014/main" id="{79168738-051A-8EF5-8A7E-BF81F9B1E06E}"/>
+                <a16:creationId xmlns:a16="http://schemas.microsoft.com/office/drawing/2014/main" id="{72F90B52-08E2-393E-3FB5-1F8F2B1B3AA3}"/>
               </a:ext>
             </a:extLst>
           </p:cNvPr>
@@ -7637,7 +8716,7 @@
           <p:cNvPr id="14" name="TextBox 13">
             <a:extLst>
               <a:ext uri="{FF2B5EF4-FFF2-40B4-BE49-F238E27FC236}">
-                <a16:creationId xmlns:a16="http://schemas.microsoft.com/office/drawing/2014/main" id="{0EF33695-A038-E819-5892-E7C37326037D}"/>
+                <a16:creationId xmlns:a16="http://schemas.microsoft.com/office/drawing/2014/main" id="{AFA87026-E67F-377E-CFA4-1FF68AD32A60}"/>
               </a:ext>
             </a:extLst>
           </p:cNvPr>
@@ -7677,7 +8756,7 @@
           <p:cNvPr id="15" name="TextBox 14">
             <a:extLst>
               <a:ext uri="{FF2B5EF4-FFF2-40B4-BE49-F238E27FC236}">
-                <a16:creationId xmlns:a16="http://schemas.microsoft.com/office/drawing/2014/main" id="{6B8A0487-8D41-77B0-8FED-0E5B124B17C9}"/>
+                <a16:creationId xmlns:a16="http://schemas.microsoft.com/office/drawing/2014/main" id="{DC0C55D7-A557-D3E1-B129-5A050FD8D382}"/>
               </a:ext>
             </a:extLst>
           </p:cNvPr>
@@ -7717,7 +8796,7 @@
           <p:cNvPr id="16" name="Rectangle: Rounded Corners 15">
             <a:extLst>
               <a:ext uri="{FF2B5EF4-FFF2-40B4-BE49-F238E27FC236}">
-                <a16:creationId xmlns:a16="http://schemas.microsoft.com/office/drawing/2014/main" id="{A7DC8B76-3455-0C19-3537-2CEE6D512494}"/>
+                <a16:creationId xmlns:a16="http://schemas.microsoft.com/office/drawing/2014/main" id="{1093BE3C-C349-021B-443F-CBCC7A3C17EC}"/>
               </a:ext>
             </a:extLst>
           </p:cNvPr>
@@ -7773,7 +8852,7 @@
           <p:cNvPr id="17" name="Oval 16">
             <a:extLst>
               <a:ext uri="{FF2B5EF4-FFF2-40B4-BE49-F238E27FC236}">
-                <a16:creationId xmlns:a16="http://schemas.microsoft.com/office/drawing/2014/main" id="{DBC1F06E-C6B8-AAFD-F329-91C172D7DE41}"/>
+                <a16:creationId xmlns:a16="http://schemas.microsoft.com/office/drawing/2014/main" id="{77048DD3-4755-E987-8626-739271986A78}"/>
               </a:ext>
             </a:extLst>
           </p:cNvPr>
@@ -7835,7 +8914,7 @@
           <p:cNvPr id="18" name="TextBox 17">
             <a:extLst>
               <a:ext uri="{FF2B5EF4-FFF2-40B4-BE49-F238E27FC236}">
-                <a16:creationId xmlns:a16="http://schemas.microsoft.com/office/drawing/2014/main" id="{5EC4C17B-FC0D-4D2F-C755-4EA144B360F0}"/>
+                <a16:creationId xmlns:a16="http://schemas.microsoft.com/office/drawing/2014/main" id="{2E800B07-F168-8D11-42FA-9D2C5FDA3953}"/>
               </a:ext>
             </a:extLst>
           </p:cNvPr>
@@ -7875,7 +8954,7 @@
           <p:cNvPr id="19" name="TextBox 18">
             <a:extLst>
               <a:ext uri="{FF2B5EF4-FFF2-40B4-BE49-F238E27FC236}">
-                <a16:creationId xmlns:a16="http://schemas.microsoft.com/office/drawing/2014/main" id="{C2C64679-C79B-DA82-3AD7-F82198487380}"/>
+                <a16:creationId xmlns:a16="http://schemas.microsoft.com/office/drawing/2014/main" id="{2951470D-9645-F958-B70F-504070051B80}"/>
               </a:ext>
             </a:extLst>
           </p:cNvPr>
@@ -7915,7 +8994,7 @@
           <p:cNvPr id="20" name="TextBox 19">
             <a:extLst>
               <a:ext uri="{FF2B5EF4-FFF2-40B4-BE49-F238E27FC236}">
-                <a16:creationId xmlns:a16="http://schemas.microsoft.com/office/drawing/2014/main" id="{7CC66EBF-E28D-737A-C238-9F92263F833D}"/>
+                <a16:creationId xmlns:a16="http://schemas.microsoft.com/office/drawing/2014/main" id="{ECD0E8EB-30CB-9F8F-0B76-9873E899985E}"/>
               </a:ext>
             </a:extLst>
           </p:cNvPr>
@@ -7955,7 +9034,7 @@
           <p:cNvPr id="21" name="TextBox 20">
             <a:extLst>
               <a:ext uri="{FF2B5EF4-FFF2-40B4-BE49-F238E27FC236}">
-                <a16:creationId xmlns:a16="http://schemas.microsoft.com/office/drawing/2014/main" id="{5C321F67-4BF3-1699-769D-E78A751E7049}"/>
+                <a16:creationId xmlns:a16="http://schemas.microsoft.com/office/drawing/2014/main" id="{E551658C-D072-EA93-EAF9-A25DC2B83829}"/>
               </a:ext>
             </a:extLst>
           </p:cNvPr>
@@ -7995,7 +9074,7 @@
           <p:cNvPr id="22" name="TextBox 21">
             <a:extLst>
               <a:ext uri="{FF2B5EF4-FFF2-40B4-BE49-F238E27FC236}">
-                <a16:creationId xmlns:a16="http://schemas.microsoft.com/office/drawing/2014/main" id="{4258C9AA-DA82-FD85-870F-D954D97DFB3C}"/>
+                <a16:creationId xmlns:a16="http://schemas.microsoft.com/office/drawing/2014/main" id="{9BB333D5-E95D-C738-F958-F95CE068BD4E}"/>
               </a:ext>
             </a:extLst>
           </p:cNvPr>
@@ -8026,7 +9105,7 @@
                 </a:solidFill>
                 <a:latin typeface="Consolas" panose="020B0609020204030204" pitchFamily="49" charset="0"/>
               </a:rPr>
-              <a:t>12</a:t>
+              <a:t>13</a:t>
             </a:r>
           </a:p>
         </p:txBody>
@@ -8034,7 +9113,7 @@
     </p:spTree>
     <p:extLst>
       <p:ext uri="{BB962C8B-B14F-4D97-AF65-F5344CB8AC3E}">
-        <p14:creationId xmlns:p14="http://schemas.microsoft.com/office/powerpoint/2010/main" val="1136261626"/>
+        <p14:creationId xmlns:p14="http://schemas.microsoft.com/office/powerpoint/2010/main" val="408412253"/>
       </p:ext>
     </p:extLst>
   </p:cSld>
@@ -8044,7 +9123,7 @@
 </p:sld>
 </file>
 
-<file path=ppt/slides/slide13.xml><?xml version="1.0" encoding="utf-8"?>
+<file path=ppt/slides/slide14.xml><?xml version="1.0" encoding="utf-8"?>
 <p:sld xmlns:a="http://schemas.openxmlformats.org/drawingml/2006/main" xmlns:r="http://schemas.openxmlformats.org/officeDocument/2006/relationships" xmlns:p="http://schemas.openxmlformats.org/presentationml/2006/main">
   <p:cSld>
     <p:bg>
@@ -8074,7 +9153,7 @@
           <p:cNvPr id="2" name="Title 1">
             <a:extLst>
               <a:ext uri="{FF2B5EF4-FFF2-40B4-BE49-F238E27FC236}">
-                <a16:creationId xmlns:a16="http://schemas.microsoft.com/office/drawing/2014/main" id="{FFACEFAF-2AA9-1D50-FA77-E24B0D11F322}"/>
+                <a16:creationId xmlns:a16="http://schemas.microsoft.com/office/drawing/2014/main" id="{A69A9183-0714-236A-4528-FF7F550E79A9}"/>
               </a:ext>
             </a:extLst>
           </p:cNvPr>
@@ -8114,7 +9193,7 @@
           <p:cNvPr id="3" name="TextBox 2">
             <a:extLst>
               <a:ext uri="{FF2B5EF4-FFF2-40B4-BE49-F238E27FC236}">
-                <a16:creationId xmlns:a16="http://schemas.microsoft.com/office/drawing/2014/main" id="{ABE578AE-6A6D-50B1-6806-C97A72C14F58}"/>
+                <a16:creationId xmlns:a16="http://schemas.microsoft.com/office/drawing/2014/main" id="{AE7265BA-5F18-98D7-5283-6843C0909686}"/>
               </a:ext>
             </a:extLst>
           </p:cNvPr>
@@ -8154,7 +9233,7 @@
           <p:cNvPr id="4" name="Comparison table" descr="Comparison of a typical training simulator with this trainer">
             <a:extLst>
               <a:ext uri="{FF2B5EF4-FFF2-40B4-BE49-F238E27FC236}">
-                <a16:creationId xmlns:a16="http://schemas.microsoft.com/office/drawing/2014/main" id="{746B3158-EB6F-2EDE-5837-70AD065A2B49}"/>
+                <a16:creationId xmlns:a16="http://schemas.microsoft.com/office/drawing/2014/main" id="{681EBEF2-FE81-CC0E-D4EE-BA2992793FED}"/>
               </a:ext>
             </a:extLst>
           </p:cNvPr>
@@ -8164,7 +9243,7 @@
           <p:nvPr>
             <p:extLst>
               <p:ext uri="{D42A27DB-BD31-4B8C-83A1-F6EECF244321}">
-                <p14:modId xmlns:p14="http://schemas.microsoft.com/office/powerpoint/2010/main" val="673684939"/>
+                <p14:modId xmlns:p14="http://schemas.microsoft.com/office/powerpoint/2010/main" val="1506703945"/>
               </p:ext>
             </p:extLst>
           </p:nvPr>
@@ -8183,21 +9262,21 @@
                 <a:gridCol w="2286000">
                   <a:extLst>
                     <a:ext uri="{9D8B030D-6E8A-4147-A177-3AD203B41FA5}">
-                      <a16:colId xmlns:a16="http://schemas.microsoft.com/office/drawing/2014/main" val="3266433847"/>
+                      <a16:colId xmlns:a16="http://schemas.microsoft.com/office/drawing/2014/main" val="4226497344"/>
                     </a:ext>
                   </a:extLst>
                 </a:gridCol>
                 <a:gridCol w="3810000">
                   <a:extLst>
                     <a:ext uri="{9D8B030D-6E8A-4147-A177-3AD203B41FA5}">
-                      <a16:colId xmlns:a16="http://schemas.microsoft.com/office/drawing/2014/main" val="2218515481"/>
+                      <a16:colId xmlns:a16="http://schemas.microsoft.com/office/drawing/2014/main" val="3923370583"/>
                     </a:ext>
                   </a:extLst>
                 </a:gridCol>
                 <a:gridCol w="4876800">
                   <a:extLst>
                     <a:ext uri="{9D8B030D-6E8A-4147-A177-3AD203B41FA5}">
-                      <a16:colId xmlns:a16="http://schemas.microsoft.com/office/drawing/2014/main" val="602240390"/>
+                      <a16:colId xmlns:a16="http://schemas.microsoft.com/office/drawing/2014/main" val="626170969"/>
                     </a:ext>
                   </a:extLst>
                 </a:gridCol>
@@ -8268,7 +9347,7 @@
                 </a:tc>
                 <a:extLst>
                   <a:ext uri="{0D108BD9-81ED-4DB2-BD59-A6C34878D82A}">
-                    <a16:rowId xmlns:a16="http://schemas.microsoft.com/office/drawing/2014/main" val="1691778856"/>
+                    <a16:rowId xmlns:a16="http://schemas.microsoft.com/office/drawing/2014/main" val="2250928536"/>
                   </a:ext>
                 </a:extLst>
               </a:tr>
@@ -8341,7 +9420,7 @@
                 </a:tc>
                 <a:extLst>
                   <a:ext uri="{0D108BD9-81ED-4DB2-BD59-A6C34878D82A}">
-                    <a16:rowId xmlns:a16="http://schemas.microsoft.com/office/drawing/2014/main" val="4225246133"/>
+                    <a16:rowId xmlns:a16="http://schemas.microsoft.com/office/drawing/2014/main" val="3823979470"/>
                   </a:ext>
                 </a:extLst>
               </a:tr>
@@ -8414,7 +9493,7 @@
                 </a:tc>
                 <a:extLst>
                   <a:ext uri="{0D108BD9-81ED-4DB2-BD59-A6C34878D82A}">
-                    <a16:rowId xmlns:a16="http://schemas.microsoft.com/office/drawing/2014/main" val="274894486"/>
+                    <a16:rowId xmlns:a16="http://schemas.microsoft.com/office/drawing/2014/main" val="3639275817"/>
                   </a:ext>
                 </a:extLst>
               </a:tr>
@@ -8487,7 +9566,7 @@
                 </a:tc>
                 <a:extLst>
                   <a:ext uri="{0D108BD9-81ED-4DB2-BD59-A6C34878D82A}">
-                    <a16:rowId xmlns:a16="http://schemas.microsoft.com/office/drawing/2014/main" val="3996569043"/>
+                    <a16:rowId xmlns:a16="http://schemas.microsoft.com/office/drawing/2014/main" val="3867726275"/>
                   </a:ext>
                 </a:extLst>
               </a:tr>
@@ -8560,7 +9639,7 @@
                 </a:tc>
                 <a:extLst>
                   <a:ext uri="{0D108BD9-81ED-4DB2-BD59-A6C34878D82A}">
-                    <a16:rowId xmlns:a16="http://schemas.microsoft.com/office/drawing/2014/main" val="3823743546"/>
+                    <a16:rowId xmlns:a16="http://schemas.microsoft.com/office/drawing/2014/main" val="2746681180"/>
                   </a:ext>
                 </a:extLst>
               </a:tr>
@@ -8573,7 +9652,7 @@
           <p:cNvPr id="5" name="TextBox 4">
             <a:extLst>
               <a:ext uri="{FF2B5EF4-FFF2-40B4-BE49-F238E27FC236}">
-                <a16:creationId xmlns:a16="http://schemas.microsoft.com/office/drawing/2014/main" id="{104A116C-3355-7623-47C9-65EE5BFA5779}"/>
+                <a16:creationId xmlns:a16="http://schemas.microsoft.com/office/drawing/2014/main" id="{F8194C5B-EBB3-22A9-39D2-917CE1618173}"/>
               </a:ext>
             </a:extLst>
           </p:cNvPr>
@@ -8603,7 +9682,7 @@
                 </a:solidFill>
                 <a:latin typeface="Consolas" panose="020B0609020204030204" pitchFamily="49" charset="0"/>
               </a:rPr>
-              <a:t>OUR READING OF COMMON PRACTICE  ·  NOT A SURVEY OF PRODUCTS</a:t>
+              <a:t>OUR READING OF COMMON PRACTICE  System.__ComObject  NOT A SURVEY OF PRODUCTS</a:t>
             </a:r>
           </a:p>
         </p:txBody>
@@ -8613,7 +9692,7 @@
           <p:cNvPr id="6" name="TextBox 5">
             <a:extLst>
               <a:ext uri="{FF2B5EF4-FFF2-40B4-BE49-F238E27FC236}">
-                <a16:creationId xmlns:a16="http://schemas.microsoft.com/office/drawing/2014/main" id="{2F4D0677-7134-8AF9-06C2-32EFB3958805}"/>
+                <a16:creationId xmlns:a16="http://schemas.microsoft.com/office/drawing/2014/main" id="{C7426AD9-64A1-7C97-21A5-1B20EE875709}"/>
               </a:ext>
             </a:extLst>
           </p:cNvPr>
@@ -8644,7 +9723,7 @@
                 </a:solidFill>
                 <a:latin typeface="Consolas" panose="020B0609020204030204" pitchFamily="49" charset="0"/>
               </a:rPr>
-              <a:t>13</a:t>
+              <a:t>14</a:t>
             </a:r>
           </a:p>
         </p:txBody>
@@ -8652,7 +9731,7 @@
     </p:spTree>
     <p:extLst>
       <p:ext uri="{BB962C8B-B14F-4D97-AF65-F5344CB8AC3E}">
-        <p14:creationId xmlns:p14="http://schemas.microsoft.com/office/powerpoint/2010/main" val="1261280501"/>
+        <p14:creationId xmlns:p14="http://schemas.microsoft.com/office/powerpoint/2010/main" val="2482187101"/>
       </p:ext>
     </p:extLst>
   </p:cSld>
@@ -8662,7 +9741,7 @@
 </p:sld>
 </file>
 
-<file path=ppt/slides/slide14.xml><?xml version="1.0" encoding="utf-8"?>
+<file path=ppt/slides/slide15.xml><?xml version="1.0" encoding="utf-8"?>
 <p:sld xmlns:a="http://schemas.openxmlformats.org/drawingml/2006/main" xmlns:r="http://schemas.openxmlformats.org/officeDocument/2006/relationships" xmlns:p="http://schemas.openxmlformats.org/presentationml/2006/main">
   <p:cSld>
     <p:bg>
@@ -8692,7 +9771,7 @@
           <p:cNvPr id="2" name="Title 1">
             <a:extLst>
               <a:ext uri="{FF2B5EF4-FFF2-40B4-BE49-F238E27FC236}">
-                <a16:creationId xmlns:a16="http://schemas.microsoft.com/office/drawing/2014/main" id="{A5A21AC8-D9B4-28BE-F0AF-504858698101}"/>
+                <a16:creationId xmlns:a16="http://schemas.microsoft.com/office/drawing/2014/main" id="{FCF7FFF2-EDFC-705A-174D-8552C17C7906}"/>
               </a:ext>
             </a:extLst>
           </p:cNvPr>
@@ -8732,7 +9811,7 @@
           <p:cNvPr id="3" name="TextBox 2">
             <a:extLst>
               <a:ext uri="{FF2B5EF4-FFF2-40B4-BE49-F238E27FC236}">
-                <a16:creationId xmlns:a16="http://schemas.microsoft.com/office/drawing/2014/main" id="{7022895B-EA08-5D6E-9900-6F7A3ED38614}"/>
+                <a16:creationId xmlns:a16="http://schemas.microsoft.com/office/drawing/2014/main" id="{FC0B89C4-D607-A15C-E875-6E721935B3CD}"/>
               </a:ext>
             </a:extLst>
           </p:cNvPr>
@@ -8772,7 +9851,7 @@
           <p:cNvPr id="4" name="Rectangle: Rounded Corners 3">
             <a:extLst>
               <a:ext uri="{FF2B5EF4-FFF2-40B4-BE49-F238E27FC236}">
-                <a16:creationId xmlns:a16="http://schemas.microsoft.com/office/drawing/2014/main" id="{369EBCE6-90EF-EBBC-A7A5-0342405ABBB3}"/>
+                <a16:creationId xmlns:a16="http://schemas.microsoft.com/office/drawing/2014/main" id="{CF0677F3-4327-5D90-C50D-6A0ADFB37090}"/>
               </a:ext>
             </a:extLst>
           </p:cNvPr>
@@ -8828,7 +9907,7 @@
           <p:cNvPr id="5" name="TextBox 4">
             <a:extLst>
               <a:ext uri="{FF2B5EF4-FFF2-40B4-BE49-F238E27FC236}">
-                <a16:creationId xmlns:a16="http://schemas.microsoft.com/office/drawing/2014/main" id="{10900738-2FAC-7F26-9FCD-956D956C8756}"/>
+                <a16:creationId xmlns:a16="http://schemas.microsoft.com/office/drawing/2014/main" id="{BBA97009-653F-79CE-D526-B352EECB4C83}"/>
               </a:ext>
             </a:extLst>
           </p:cNvPr>
@@ -8868,7 +9947,7 @@
           <p:cNvPr id="6" name="TextBox 5">
             <a:extLst>
               <a:ext uri="{FF2B5EF4-FFF2-40B4-BE49-F238E27FC236}">
-                <a16:creationId xmlns:a16="http://schemas.microsoft.com/office/drawing/2014/main" id="{FB383026-C8F8-B5CE-EA9A-62EF2F69ABD6}"/>
+                <a16:creationId xmlns:a16="http://schemas.microsoft.com/office/drawing/2014/main" id="{7C09FD73-BE1D-9D96-8448-F511F1790343}"/>
               </a:ext>
             </a:extLst>
           </p:cNvPr>
@@ -9005,7 +10084,7 @@
           <p:cNvPr id="7" name="Rectangle: Rounded Corners 6">
             <a:extLst>
               <a:ext uri="{FF2B5EF4-FFF2-40B4-BE49-F238E27FC236}">
-                <a16:creationId xmlns:a16="http://schemas.microsoft.com/office/drawing/2014/main" id="{868F9B8D-7A64-8866-64F0-59658037EE0B}"/>
+                <a16:creationId xmlns:a16="http://schemas.microsoft.com/office/drawing/2014/main" id="{14B88F2E-588C-25BC-644E-2C033690FE16}"/>
               </a:ext>
             </a:extLst>
           </p:cNvPr>
@@ -9061,7 +10140,7 @@
           <p:cNvPr id="8" name="TextBox 7">
             <a:extLst>
               <a:ext uri="{FF2B5EF4-FFF2-40B4-BE49-F238E27FC236}">
-                <a16:creationId xmlns:a16="http://schemas.microsoft.com/office/drawing/2014/main" id="{ED1C949F-5CAA-74CB-7909-03E3901E69A0}"/>
+                <a16:creationId xmlns:a16="http://schemas.microsoft.com/office/drawing/2014/main" id="{2D9AC555-4A61-A14A-7902-38E5B73C6B6C}"/>
               </a:ext>
             </a:extLst>
           </p:cNvPr>
@@ -9091,7 +10170,7 @@
                 </a:solidFill>
                 <a:latin typeface="Consolas" panose="020B0609020204030204" pitchFamily="49" charset="0"/>
               </a:rPr>
-              <a:t>STILL TO DO  ·  NOT BUILT</a:t>
+              <a:t>STILL TO DO  System.__ComObject  NOT BUILT</a:t>
             </a:r>
           </a:p>
         </p:txBody>
@@ -9101,7 +10180,7 @@
           <p:cNvPr id="9" name="TextBox 8">
             <a:extLst>
               <a:ext uri="{FF2B5EF4-FFF2-40B4-BE49-F238E27FC236}">
-                <a16:creationId xmlns:a16="http://schemas.microsoft.com/office/drawing/2014/main" id="{C3EE5F9A-99C1-F8F3-A252-9BE15AC9A098}"/>
+                <a16:creationId xmlns:a16="http://schemas.microsoft.com/office/drawing/2014/main" id="{28461643-B8D4-4CAA-E818-43330A54A39D}"/>
               </a:ext>
             </a:extLst>
           </p:cNvPr>
@@ -9238,7 +10317,7 @@
           <p:cNvPr id="10" name="TextBox 9">
             <a:extLst>
               <a:ext uri="{FF2B5EF4-FFF2-40B4-BE49-F238E27FC236}">
-                <a16:creationId xmlns:a16="http://schemas.microsoft.com/office/drawing/2014/main" id="{AB5530BB-8F91-B24B-49BD-0D7FED0FE294}"/>
+                <a16:creationId xmlns:a16="http://schemas.microsoft.com/office/drawing/2014/main" id="{4E57B3BF-0FCD-9352-B96F-6C51CD0DBAD5}"/>
               </a:ext>
             </a:extLst>
           </p:cNvPr>
@@ -9278,7 +10357,7 @@
           <p:cNvPr id="11" name="TextBox 10">
             <a:extLst>
               <a:ext uri="{FF2B5EF4-FFF2-40B4-BE49-F238E27FC236}">
-                <a16:creationId xmlns:a16="http://schemas.microsoft.com/office/drawing/2014/main" id="{99274AD5-66A8-F2D4-5A7A-0DBA51265B97}"/>
+                <a16:creationId xmlns:a16="http://schemas.microsoft.com/office/drawing/2014/main" id="{50BB7C73-9A35-C0D9-DA68-DF6E48B42A73}"/>
               </a:ext>
             </a:extLst>
           </p:cNvPr>
@@ -9309,7 +10388,7 @@
                 </a:solidFill>
                 <a:latin typeface="Consolas" panose="020B0609020204030204" pitchFamily="49" charset="0"/>
               </a:rPr>
-              <a:t>14</a:t>
+              <a:t>15</a:t>
             </a:r>
           </a:p>
         </p:txBody>
@@ -9317,7 +10396,7 @@
     </p:spTree>
     <p:extLst>
       <p:ext uri="{BB962C8B-B14F-4D97-AF65-F5344CB8AC3E}">
-        <p14:creationId xmlns:p14="http://schemas.microsoft.com/office/powerpoint/2010/main" val="3958838089"/>
+        <p14:creationId xmlns:p14="http://schemas.microsoft.com/office/powerpoint/2010/main" val="880126046"/>
       </p:ext>
     </p:extLst>
   </p:cSld>
@@ -9327,7 +10406,7 @@
 </p:sld>
 </file>
 
-<file path=ppt/slides/slide15.xml><?xml version="1.0" encoding="utf-8"?>
+<file path=ppt/slides/slide16.xml><?xml version="1.0" encoding="utf-8"?>
 <p:sld xmlns:a="http://schemas.openxmlformats.org/drawingml/2006/main" xmlns:r="http://schemas.openxmlformats.org/officeDocument/2006/relationships" xmlns:p="http://schemas.openxmlformats.org/presentationml/2006/main">
   <p:cSld>
     <p:bg>
@@ -9357,7 +10436,7 @@
           <p:cNvPr id="2" name="Title 1">
             <a:extLst>
               <a:ext uri="{FF2B5EF4-FFF2-40B4-BE49-F238E27FC236}">
-                <a16:creationId xmlns:a16="http://schemas.microsoft.com/office/drawing/2014/main" id="{95C10771-2B3A-5257-D779-803E2FC0B780}"/>
+                <a16:creationId xmlns:a16="http://schemas.microsoft.com/office/drawing/2014/main" id="{94C0EEC6-1A48-3846-A41C-6CCE0C80AFBA}"/>
               </a:ext>
             </a:extLst>
           </p:cNvPr>
@@ -9397,7 +10476,7 @@
           <p:cNvPr id="3" name="TextBox 2">
             <a:extLst>
               <a:ext uri="{FF2B5EF4-FFF2-40B4-BE49-F238E27FC236}">
-                <a16:creationId xmlns:a16="http://schemas.microsoft.com/office/drawing/2014/main" id="{677B48FF-585D-7055-4EA8-13390C56F06B}"/>
+                <a16:creationId xmlns:a16="http://schemas.microsoft.com/office/drawing/2014/main" id="{EA0887B2-34E0-665D-7232-2CEDE1D3DBAB}"/>
               </a:ext>
             </a:extLst>
           </p:cNvPr>
@@ -9437,7 +10516,7 @@
           <p:cNvPr id="4" name="Rectangle: Rounded Corners 3">
             <a:extLst>
               <a:ext uri="{FF2B5EF4-FFF2-40B4-BE49-F238E27FC236}">
-                <a16:creationId xmlns:a16="http://schemas.microsoft.com/office/drawing/2014/main" id="{A143EE49-D89A-5C8C-3836-68E355F3CCC8}"/>
+                <a16:creationId xmlns:a16="http://schemas.microsoft.com/office/drawing/2014/main" id="{41B85A4F-AF51-2249-04EA-1176E9D53752}"/>
               </a:ext>
             </a:extLst>
           </p:cNvPr>
@@ -9493,7 +10572,7 @@
           <p:cNvPr id="5" name="TextBox 4">
             <a:extLst>
               <a:ext uri="{FF2B5EF4-FFF2-40B4-BE49-F238E27FC236}">
-                <a16:creationId xmlns:a16="http://schemas.microsoft.com/office/drawing/2014/main" id="{A8954628-A6FE-EFF7-C943-A63B8ECB25C2}"/>
+                <a16:creationId xmlns:a16="http://schemas.microsoft.com/office/drawing/2014/main" id="{9B473216-5798-095E-5603-08DCF03382C6}"/>
               </a:ext>
             </a:extLst>
           </p:cNvPr>
@@ -9523,7 +10602,7 @@
                 </a:solidFill>
                 <a:latin typeface="Consolas" panose="020B0609020204030204" pitchFamily="49" charset="0"/>
               </a:rPr>
-              <a:t>ASSUMED · REPLACE WITH DIVISION FIGURES</a:t>
+              <a:t>ASSUMED System.__ComObject REPLACE WITH DIVISION FIGURES</a:t>
             </a:r>
           </a:p>
         </p:txBody>
@@ -9533,7 +10612,7 @@
           <p:cNvPr id="6" name="TextBox 5">
             <a:extLst>
               <a:ext uri="{FF2B5EF4-FFF2-40B4-BE49-F238E27FC236}">
-                <a16:creationId xmlns:a16="http://schemas.microsoft.com/office/drawing/2014/main" id="{17FF1BE1-6CB4-E7D6-5376-1F882A028AE0}"/>
+                <a16:creationId xmlns:a16="http://schemas.microsoft.com/office/drawing/2014/main" id="{87CA8C2D-EC01-4394-F40C-CF8D3360B6ED}"/>
               </a:ext>
             </a:extLst>
           </p:cNvPr>
@@ -9668,7 +10747,7 @@
           <p:cNvPr id="7" name="Savings sensitivity table" descr="Annual saving in Singapore dollars for three avoided-session shares and three session values">
             <a:extLst>
               <a:ext uri="{FF2B5EF4-FFF2-40B4-BE49-F238E27FC236}">
-                <a16:creationId xmlns:a16="http://schemas.microsoft.com/office/drawing/2014/main" id="{E5EACF56-796F-890C-4C83-C569C9352A62}"/>
+                <a16:creationId xmlns:a16="http://schemas.microsoft.com/office/drawing/2014/main" id="{3915CFA7-C6B1-ABA7-81D0-FC5DFC559F1D}"/>
               </a:ext>
             </a:extLst>
           </p:cNvPr>
@@ -9678,7 +10757,7 @@
           <p:nvPr>
             <p:extLst>
               <p:ext uri="{D42A27DB-BD31-4B8C-83A1-F6EECF244321}">
-                <p14:modId xmlns:p14="http://schemas.microsoft.com/office/powerpoint/2010/main" val="3899074551"/>
+                <p14:modId xmlns:p14="http://schemas.microsoft.com/office/powerpoint/2010/main" val="2105265500"/>
               </p:ext>
             </p:extLst>
           </p:nvPr>
@@ -9697,28 +10776,28 @@
                 <a:gridCol w="2133600">
                   <a:extLst>
                     <a:ext uri="{9D8B030D-6E8A-4147-A177-3AD203B41FA5}">
-                      <a16:colId xmlns:a16="http://schemas.microsoft.com/office/drawing/2014/main" val="2055635292"/>
+                      <a16:colId xmlns:a16="http://schemas.microsoft.com/office/drawing/2014/main" val="2025934597"/>
                     </a:ext>
                   </a:extLst>
                 </a:gridCol>
                 <a:gridCol w="1447800">
                   <a:extLst>
                     <a:ext uri="{9D8B030D-6E8A-4147-A177-3AD203B41FA5}">
-                      <a16:colId xmlns:a16="http://schemas.microsoft.com/office/drawing/2014/main" val="1582816003"/>
+                      <a16:colId xmlns:a16="http://schemas.microsoft.com/office/drawing/2014/main" val="3447733064"/>
                     </a:ext>
                   </a:extLst>
                 </a:gridCol>
                 <a:gridCol w="1447800">
                   <a:extLst>
                     <a:ext uri="{9D8B030D-6E8A-4147-A177-3AD203B41FA5}">
-                      <a16:colId xmlns:a16="http://schemas.microsoft.com/office/drawing/2014/main" val="831962907"/>
+                      <a16:colId xmlns:a16="http://schemas.microsoft.com/office/drawing/2014/main" val="2989590639"/>
                     </a:ext>
                   </a:extLst>
                 </a:gridCol>
                 <a:gridCol w="1447800">
                   <a:extLst>
                     <a:ext uri="{9D8B030D-6E8A-4147-A177-3AD203B41FA5}">
-                      <a16:colId xmlns:a16="http://schemas.microsoft.com/office/drawing/2014/main" val="2520871679"/>
+                      <a16:colId xmlns:a16="http://schemas.microsoft.com/office/drawing/2014/main" val="911462886"/>
                     </a:ext>
                   </a:extLst>
                 </a:gridCol>
@@ -9814,7 +10893,7 @@
                 </a:tc>
                 <a:extLst>
                   <a:ext uri="{0D108BD9-81ED-4DB2-BD59-A6C34878D82A}">
-                    <a16:rowId xmlns:a16="http://schemas.microsoft.com/office/drawing/2014/main" val="3892766137"/>
+                    <a16:rowId xmlns:a16="http://schemas.microsoft.com/office/drawing/2014/main" val="2031802943"/>
                   </a:ext>
                 </a:extLst>
               </a:tr>
@@ -9909,7 +10988,7 @@
                 </a:tc>
                 <a:extLst>
                   <a:ext uri="{0D108BD9-81ED-4DB2-BD59-A6C34878D82A}">
-                    <a16:rowId xmlns:a16="http://schemas.microsoft.com/office/drawing/2014/main" val="283943177"/>
+                    <a16:rowId xmlns:a16="http://schemas.microsoft.com/office/drawing/2014/main" val="2646835934"/>
                   </a:ext>
                 </a:extLst>
               </a:tr>
@@ -10004,7 +11083,7 @@
                 </a:tc>
                 <a:extLst>
                   <a:ext uri="{0D108BD9-81ED-4DB2-BD59-A6C34878D82A}">
-                    <a16:rowId xmlns:a16="http://schemas.microsoft.com/office/drawing/2014/main" val="4006498945"/>
+                    <a16:rowId xmlns:a16="http://schemas.microsoft.com/office/drawing/2014/main" val="3329346680"/>
                   </a:ext>
                 </a:extLst>
               </a:tr>
@@ -10099,7 +11178,7 @@
                 </a:tc>
                 <a:extLst>
                   <a:ext uri="{0D108BD9-81ED-4DB2-BD59-A6C34878D82A}">
-                    <a16:rowId xmlns:a16="http://schemas.microsoft.com/office/drawing/2014/main" val="3432317708"/>
+                    <a16:rowId xmlns:a16="http://schemas.microsoft.com/office/drawing/2014/main" val="430456887"/>
                   </a:ext>
                 </a:extLst>
               </a:tr>
@@ -10112,7 +11191,7 @@
           <p:cNvPr id="8" name="TextBox 7">
             <a:extLst>
               <a:ext uri="{FF2B5EF4-FFF2-40B4-BE49-F238E27FC236}">
-                <a16:creationId xmlns:a16="http://schemas.microsoft.com/office/drawing/2014/main" id="{79B40AF0-F96E-62A2-F86F-3CF09E54231D}"/>
+                <a16:creationId xmlns:a16="http://schemas.microsoft.com/office/drawing/2014/main" id="{7DEA0E35-E4D9-DAD2-586B-931BAF077903}"/>
               </a:ext>
             </a:extLst>
           </p:cNvPr>
@@ -10152,7 +11231,7 @@
           <p:cNvPr id="9" name="TextBox 8">
             <a:extLst>
               <a:ext uri="{FF2B5EF4-FFF2-40B4-BE49-F238E27FC236}">
-                <a16:creationId xmlns:a16="http://schemas.microsoft.com/office/drawing/2014/main" id="{47FBB51A-DE72-4854-1B78-CA305CAC7359}"/>
+                <a16:creationId xmlns:a16="http://schemas.microsoft.com/office/drawing/2014/main" id="{130E88D7-8825-1971-B4AB-E99193CA975E}"/>
               </a:ext>
             </a:extLst>
           </p:cNvPr>
@@ -10182,7 +11261,7 @@
                 </a:solidFill>
                 <a:latin typeface="Consolas" panose="020B0609020204030204" pitchFamily="49" charset="0"/>
               </a:rPr>
-              <a:t>ILLUSTRATIVE ESTIMATE  ·  r IS A HYPOTHESIS, NOT A RESULT</a:t>
+              <a:t>ILLUSTRATIVE ESTIMATE  System.__ComObject  r IS A HYPOTHESIS, NOT A RESULT</a:t>
             </a:r>
           </a:p>
         </p:txBody>
@@ -10192,7 +11271,7 @@
           <p:cNvPr id="10" name="TextBox 9">
             <a:extLst>
               <a:ext uri="{FF2B5EF4-FFF2-40B4-BE49-F238E27FC236}">
-                <a16:creationId xmlns:a16="http://schemas.microsoft.com/office/drawing/2014/main" id="{2D57AEE2-5913-8EC9-600C-E1C027015B2D}"/>
+                <a16:creationId xmlns:a16="http://schemas.microsoft.com/office/drawing/2014/main" id="{77001268-4C01-C1D6-B693-0921E6F22A9D}"/>
               </a:ext>
             </a:extLst>
           </p:cNvPr>
@@ -10223,7 +11302,7 @@
                 </a:solidFill>
                 <a:latin typeface="Consolas" panose="020B0609020204030204" pitchFamily="49" charset="0"/>
               </a:rPr>
-              <a:t>15</a:t>
+              <a:t>16</a:t>
             </a:r>
           </a:p>
         </p:txBody>
@@ -10231,7 +11310,7 @@
     </p:spTree>
     <p:extLst>
       <p:ext uri="{BB962C8B-B14F-4D97-AF65-F5344CB8AC3E}">
-        <p14:creationId xmlns:p14="http://schemas.microsoft.com/office/powerpoint/2010/main" val="1916684233"/>
+        <p14:creationId xmlns:p14="http://schemas.microsoft.com/office/powerpoint/2010/main" val="1984066846"/>
       </p:ext>
     </p:extLst>
   </p:cSld>
@@ -10241,7 +11320,7 @@
 </p:sld>
 </file>
 
-<file path=ppt/slides/slide16.xml><?xml version="1.0" encoding="utf-8"?>
+<file path=ppt/slides/slide17.xml><?xml version="1.0" encoding="utf-8"?>
 <p:sld xmlns:a="http://schemas.openxmlformats.org/drawingml/2006/main" xmlns:r="http://schemas.openxmlformats.org/officeDocument/2006/relationships" xmlns:p="http://schemas.openxmlformats.org/presentationml/2006/main">
   <p:cSld>
     <p:bg>
@@ -10271,7 +11350,7 @@
           <p:cNvPr id="2" name="Title 1">
             <a:extLst>
               <a:ext uri="{FF2B5EF4-FFF2-40B4-BE49-F238E27FC236}">
-                <a16:creationId xmlns:a16="http://schemas.microsoft.com/office/drawing/2014/main" id="{9E645333-6923-9E43-9C5A-034DEFA5B103}"/>
+                <a16:creationId xmlns:a16="http://schemas.microsoft.com/office/drawing/2014/main" id="{591F786F-AC80-C77C-AD1D-3B537C348075}"/>
               </a:ext>
             </a:extLst>
           </p:cNvPr>
@@ -10311,7 +11390,7 @@
           <p:cNvPr id="3" name="TextBox 2">
             <a:extLst>
               <a:ext uri="{FF2B5EF4-FFF2-40B4-BE49-F238E27FC236}">
-                <a16:creationId xmlns:a16="http://schemas.microsoft.com/office/drawing/2014/main" id="{93AB0436-C389-313A-4FCC-9225539B717A}"/>
+                <a16:creationId xmlns:a16="http://schemas.microsoft.com/office/drawing/2014/main" id="{26232A37-33FE-B201-8BB9-68BA1B7382D4}"/>
               </a:ext>
             </a:extLst>
           </p:cNvPr>
@@ -10351,7 +11430,7 @@
           <p:cNvPr id="4" name="TextBox 3">
             <a:extLst>
               <a:ext uri="{FF2B5EF4-FFF2-40B4-BE49-F238E27FC236}">
-                <a16:creationId xmlns:a16="http://schemas.microsoft.com/office/drawing/2014/main" id="{B902C48C-3F67-0C85-2FDE-6353C5DDFDBE}"/>
+                <a16:creationId xmlns:a16="http://schemas.microsoft.com/office/drawing/2014/main" id="{E25A79D3-D685-E31B-42F7-7D6DE072939D}"/>
               </a:ext>
             </a:extLst>
           </p:cNvPr>
@@ -10389,7 +11468,7 @@
     </p:spTree>
     <p:extLst>
       <p:ext uri="{BB962C8B-B14F-4D97-AF65-F5344CB8AC3E}">
-        <p14:creationId xmlns:p14="http://schemas.microsoft.com/office/powerpoint/2010/main" val="2798810266"/>
+        <p14:creationId xmlns:p14="http://schemas.microsoft.com/office/powerpoint/2010/main" val="3774863418"/>
       </p:ext>
     </p:extLst>
   </p:cSld>
@@ -10429,7 +11508,7 @@
           <p:cNvPr id="2" name="Title 1">
             <a:extLst>
               <a:ext uri="{FF2B5EF4-FFF2-40B4-BE49-F238E27FC236}">
-                <a16:creationId xmlns:a16="http://schemas.microsoft.com/office/drawing/2014/main" id="{2D483C54-4946-C373-BA2E-5D0714A5338D}"/>
+                <a16:creationId xmlns:a16="http://schemas.microsoft.com/office/drawing/2014/main" id="{017A5D0C-BCBA-62DF-6073-FCBC8C8301CE}"/>
               </a:ext>
             </a:extLst>
           </p:cNvPr>
@@ -10469,7 +11548,7 @@
           <p:cNvPr id="3" name="TextBox 2">
             <a:extLst>
               <a:ext uri="{FF2B5EF4-FFF2-40B4-BE49-F238E27FC236}">
-                <a16:creationId xmlns:a16="http://schemas.microsoft.com/office/drawing/2014/main" id="{7C796A78-E73C-EF9B-78AB-0CD76501279A}"/>
+                <a16:creationId xmlns:a16="http://schemas.microsoft.com/office/drawing/2014/main" id="{C0007FA1-436A-E76F-4807-5148D2DDF505}"/>
               </a:ext>
             </a:extLst>
           </p:cNvPr>
@@ -10509,7 +11588,7 @@
           <p:cNvPr id="4" name="Rectangle: Rounded Corners 3">
             <a:extLst>
               <a:ext uri="{FF2B5EF4-FFF2-40B4-BE49-F238E27FC236}">
-                <a16:creationId xmlns:a16="http://schemas.microsoft.com/office/drawing/2014/main" id="{1C2DC043-16D7-96F7-741E-112FA6E3BB2C}"/>
+                <a16:creationId xmlns:a16="http://schemas.microsoft.com/office/drawing/2014/main" id="{6DA695A0-DEB0-EAFA-C767-EAE0881B28F2}"/>
               </a:ext>
             </a:extLst>
           </p:cNvPr>
@@ -10565,7 +11644,7 @@
           <p:cNvPr id="5" name="TextBox 4">
             <a:extLst>
               <a:ext uri="{FF2B5EF4-FFF2-40B4-BE49-F238E27FC236}">
-                <a16:creationId xmlns:a16="http://schemas.microsoft.com/office/drawing/2014/main" id="{51C14A27-EB2F-D395-C685-A48086234869}"/>
+                <a16:creationId xmlns:a16="http://schemas.microsoft.com/office/drawing/2014/main" id="{100FA246-A8A4-FDC0-A073-D0D95EB878DA}"/>
               </a:ext>
             </a:extLst>
           </p:cNvPr>
@@ -10605,7 +11684,7 @@
           <p:cNvPr id="6" name="TextBox 5">
             <a:extLst>
               <a:ext uri="{FF2B5EF4-FFF2-40B4-BE49-F238E27FC236}">
-                <a16:creationId xmlns:a16="http://schemas.microsoft.com/office/drawing/2014/main" id="{7015378F-BE25-C5C5-8ECA-BA6860BB18CE}"/>
+                <a16:creationId xmlns:a16="http://schemas.microsoft.com/office/drawing/2014/main" id="{E7B18B18-5AF9-E7E5-0C81-F6FE3CE7ED00}"/>
               </a:ext>
             </a:extLst>
           </p:cNvPr>
@@ -10645,7 +11724,7 @@
           <p:cNvPr id="7" name="TextBox 6">
             <a:extLst>
               <a:ext uri="{FF2B5EF4-FFF2-40B4-BE49-F238E27FC236}">
-                <a16:creationId xmlns:a16="http://schemas.microsoft.com/office/drawing/2014/main" id="{6C86F5E9-7258-6704-B792-CA8B5227E22E}"/>
+                <a16:creationId xmlns:a16="http://schemas.microsoft.com/office/drawing/2014/main" id="{AD66A581-7F49-A8C1-8B5F-8A5E078EA8D8}"/>
               </a:ext>
             </a:extLst>
           </p:cNvPr>
@@ -10685,7 +11764,7 @@
           <p:cNvPr id="8" name="Rectangle: Rounded Corners 7">
             <a:extLst>
               <a:ext uri="{FF2B5EF4-FFF2-40B4-BE49-F238E27FC236}">
-                <a16:creationId xmlns:a16="http://schemas.microsoft.com/office/drawing/2014/main" id="{EA552C1C-9D63-02A6-6B34-4D8B2AA92381}"/>
+                <a16:creationId xmlns:a16="http://schemas.microsoft.com/office/drawing/2014/main" id="{76002211-F07A-20FA-037D-149640809462}"/>
               </a:ext>
             </a:extLst>
           </p:cNvPr>
@@ -10741,7 +11820,7 @@
           <p:cNvPr id="9" name="TextBox 8">
             <a:extLst>
               <a:ext uri="{FF2B5EF4-FFF2-40B4-BE49-F238E27FC236}">
-                <a16:creationId xmlns:a16="http://schemas.microsoft.com/office/drawing/2014/main" id="{6D130BDD-26A9-9149-C1C1-791BB28A872A}"/>
+                <a16:creationId xmlns:a16="http://schemas.microsoft.com/office/drawing/2014/main" id="{2A3E3B30-1547-4617-C7A0-C3DA28286C1E}"/>
               </a:ext>
             </a:extLst>
           </p:cNvPr>
@@ -10781,7 +11860,7 @@
           <p:cNvPr id="10" name="TextBox 9">
             <a:extLst>
               <a:ext uri="{FF2B5EF4-FFF2-40B4-BE49-F238E27FC236}">
-                <a16:creationId xmlns:a16="http://schemas.microsoft.com/office/drawing/2014/main" id="{050CB7BE-2F71-594C-7AD8-15C535AD4A4A}"/>
+                <a16:creationId xmlns:a16="http://schemas.microsoft.com/office/drawing/2014/main" id="{FDEE3D2E-FA05-2E00-3B9E-EDBAD6931757}"/>
               </a:ext>
             </a:extLst>
           </p:cNvPr>
@@ -10821,7 +11900,7 @@
           <p:cNvPr id="11" name="TextBox 10">
             <a:extLst>
               <a:ext uri="{FF2B5EF4-FFF2-40B4-BE49-F238E27FC236}">
-                <a16:creationId xmlns:a16="http://schemas.microsoft.com/office/drawing/2014/main" id="{4FB14D3B-7E19-6609-55FA-AF842C324E30}"/>
+                <a16:creationId xmlns:a16="http://schemas.microsoft.com/office/drawing/2014/main" id="{4DEBA159-1A76-EEF1-4979-6F8346C058A8}"/>
               </a:ext>
             </a:extLst>
           </p:cNvPr>
@@ -10861,7 +11940,7 @@
           <p:cNvPr id="12" name="Rectangle: Rounded Corners 11">
             <a:extLst>
               <a:ext uri="{FF2B5EF4-FFF2-40B4-BE49-F238E27FC236}">
-                <a16:creationId xmlns:a16="http://schemas.microsoft.com/office/drawing/2014/main" id="{273581CD-72C7-F560-604E-7D8E483A53D2}"/>
+                <a16:creationId xmlns:a16="http://schemas.microsoft.com/office/drawing/2014/main" id="{F53C7A53-3308-8C8D-5927-72A707128C65}"/>
               </a:ext>
             </a:extLst>
           </p:cNvPr>
@@ -10917,7 +11996,7 @@
           <p:cNvPr id="13" name="TextBox 12">
             <a:extLst>
               <a:ext uri="{FF2B5EF4-FFF2-40B4-BE49-F238E27FC236}">
-                <a16:creationId xmlns:a16="http://schemas.microsoft.com/office/drawing/2014/main" id="{E2836CDE-A7D9-023B-A94D-7FE49832FE58}"/>
+                <a16:creationId xmlns:a16="http://schemas.microsoft.com/office/drawing/2014/main" id="{5F9F56B0-4EC0-E5FD-47C9-C8AA0450012D}"/>
               </a:ext>
             </a:extLst>
           </p:cNvPr>
@@ -10957,7 +12036,7 @@
           <p:cNvPr id="14" name="TextBox 13">
             <a:extLst>
               <a:ext uri="{FF2B5EF4-FFF2-40B4-BE49-F238E27FC236}">
-                <a16:creationId xmlns:a16="http://schemas.microsoft.com/office/drawing/2014/main" id="{F5985C43-A792-6D14-E901-E38D0D444217}"/>
+                <a16:creationId xmlns:a16="http://schemas.microsoft.com/office/drawing/2014/main" id="{55C8FAA2-8B48-1B74-99F5-E8ADF92D2DF2}"/>
               </a:ext>
             </a:extLst>
           </p:cNvPr>
@@ -10997,7 +12076,7 @@
           <p:cNvPr id="15" name="TextBox 14">
             <a:extLst>
               <a:ext uri="{FF2B5EF4-FFF2-40B4-BE49-F238E27FC236}">
-                <a16:creationId xmlns:a16="http://schemas.microsoft.com/office/drawing/2014/main" id="{16D9C818-64CB-12E7-012C-567D1EE18672}"/>
+                <a16:creationId xmlns:a16="http://schemas.microsoft.com/office/drawing/2014/main" id="{D36CEE99-1854-B87C-83B8-5A6AF2E473BF}"/>
               </a:ext>
             </a:extLst>
           </p:cNvPr>
@@ -11037,7 +12116,7 @@
           <p:cNvPr id="16" name="TextBox 15">
             <a:extLst>
               <a:ext uri="{FF2B5EF4-FFF2-40B4-BE49-F238E27FC236}">
-                <a16:creationId xmlns:a16="http://schemas.microsoft.com/office/drawing/2014/main" id="{3054B27E-6989-4906-281C-C4C30C2B01CF}"/>
+                <a16:creationId xmlns:a16="http://schemas.microsoft.com/office/drawing/2014/main" id="{65D488BC-7654-C9CF-306C-7D36508D9791}"/>
               </a:ext>
             </a:extLst>
           </p:cNvPr>
@@ -11077,7 +12156,7 @@
           <p:cNvPr id="17" name="TextBox 16">
             <a:extLst>
               <a:ext uri="{FF2B5EF4-FFF2-40B4-BE49-F238E27FC236}">
-                <a16:creationId xmlns:a16="http://schemas.microsoft.com/office/drawing/2014/main" id="{0137181D-A7DA-102B-CE6A-78FE2467A14C}"/>
+                <a16:creationId xmlns:a16="http://schemas.microsoft.com/office/drawing/2014/main" id="{A557A484-5A56-A6F9-1DE9-918B6E6F20C8}"/>
               </a:ext>
             </a:extLst>
           </p:cNvPr>
@@ -11116,7 +12195,7 @@
     </p:spTree>
     <p:extLst>
       <p:ext uri="{BB962C8B-B14F-4D97-AF65-F5344CB8AC3E}">
-        <p14:creationId xmlns:p14="http://schemas.microsoft.com/office/powerpoint/2010/main" val="2102982701"/>
+        <p14:creationId xmlns:p14="http://schemas.microsoft.com/office/powerpoint/2010/main" val="3245636840"/>
       </p:ext>
     </p:extLst>
   </p:cSld>
@@ -11156,7 +12235,7 @@
           <p:cNvPr id="2" name="Title 1">
             <a:extLst>
               <a:ext uri="{FF2B5EF4-FFF2-40B4-BE49-F238E27FC236}">
-                <a16:creationId xmlns:a16="http://schemas.microsoft.com/office/drawing/2014/main" id="{9D68A7D7-09E6-1659-A5D7-2F444424E812}"/>
+                <a16:creationId xmlns:a16="http://schemas.microsoft.com/office/drawing/2014/main" id="{D5CB2E46-941A-8427-633A-3E1A7BC181A7}"/>
               </a:ext>
             </a:extLst>
           </p:cNvPr>
@@ -11196,7 +12275,7 @@
           <p:cNvPr id="3" name="TextBox 2">
             <a:extLst>
               <a:ext uri="{FF2B5EF4-FFF2-40B4-BE49-F238E27FC236}">
-                <a16:creationId xmlns:a16="http://schemas.microsoft.com/office/drawing/2014/main" id="{ADA3AEA7-24A9-288C-3249-BBA0DCA71E26}"/>
+                <a16:creationId xmlns:a16="http://schemas.microsoft.com/office/drawing/2014/main" id="{0CB686DF-3087-7AF5-435B-4601DE42DCFB}"/>
               </a:ext>
             </a:extLst>
           </p:cNvPr>
@@ -11236,7 +12315,7 @@
           <p:cNvPr id="4" name="Rectangle: Rounded Corners 3">
             <a:extLst>
               <a:ext uri="{FF2B5EF4-FFF2-40B4-BE49-F238E27FC236}">
-                <a16:creationId xmlns:a16="http://schemas.microsoft.com/office/drawing/2014/main" id="{A8B2BA17-EB80-0668-17E1-114229F00786}"/>
+                <a16:creationId xmlns:a16="http://schemas.microsoft.com/office/drawing/2014/main" id="{E623169B-53AD-F1DE-BFA5-761E10E7AE4F}"/>
               </a:ext>
             </a:extLst>
           </p:cNvPr>
@@ -11292,7 +12371,7 @@
           <p:cNvPr id="5" name="TextBox 4">
             <a:extLst>
               <a:ext uri="{FF2B5EF4-FFF2-40B4-BE49-F238E27FC236}">
-                <a16:creationId xmlns:a16="http://schemas.microsoft.com/office/drawing/2014/main" id="{C00E2C12-99C5-713D-C06B-2FBC28CB0369}"/>
+                <a16:creationId xmlns:a16="http://schemas.microsoft.com/office/drawing/2014/main" id="{CFD5143D-DD85-90AF-A06F-7436F940E1A3}"/>
               </a:ext>
             </a:extLst>
           </p:cNvPr>
@@ -11332,7 +12411,7 @@
           <p:cNvPr id="6" name="TextBox 5">
             <a:extLst>
               <a:ext uri="{FF2B5EF4-FFF2-40B4-BE49-F238E27FC236}">
-                <a16:creationId xmlns:a16="http://schemas.microsoft.com/office/drawing/2014/main" id="{CBF2F537-11BF-02BF-2148-D310652AC3F3}"/>
+                <a16:creationId xmlns:a16="http://schemas.microsoft.com/office/drawing/2014/main" id="{EAFF3B1C-1A5A-5E0B-A448-F973D99DCCE6}"/>
               </a:ext>
             </a:extLst>
           </p:cNvPr>
@@ -11372,7 +12451,7 @@
           <p:cNvPr id="7" name="Rectangle: Rounded Corners 6">
             <a:extLst>
               <a:ext uri="{FF2B5EF4-FFF2-40B4-BE49-F238E27FC236}">
-                <a16:creationId xmlns:a16="http://schemas.microsoft.com/office/drawing/2014/main" id="{91F57A47-4D1A-31B6-5C91-DC68DD4531C5}"/>
+                <a16:creationId xmlns:a16="http://schemas.microsoft.com/office/drawing/2014/main" id="{F0849FB6-BC2E-93D1-B516-2DF4F33EA507}"/>
               </a:ext>
             </a:extLst>
           </p:cNvPr>
@@ -11428,7 +12507,7 @@
           <p:cNvPr id="8" name="TextBox 7">
             <a:extLst>
               <a:ext uri="{FF2B5EF4-FFF2-40B4-BE49-F238E27FC236}">
-                <a16:creationId xmlns:a16="http://schemas.microsoft.com/office/drawing/2014/main" id="{BBA59CBF-9873-E7CF-EF7E-7019FBDBC6A4}"/>
+                <a16:creationId xmlns:a16="http://schemas.microsoft.com/office/drawing/2014/main" id="{C8249763-E752-1D56-91A3-148B510510DF}"/>
               </a:ext>
             </a:extLst>
           </p:cNvPr>
@@ -11468,7 +12547,7 @@
           <p:cNvPr id="9" name="TextBox 8">
             <a:extLst>
               <a:ext uri="{FF2B5EF4-FFF2-40B4-BE49-F238E27FC236}">
-                <a16:creationId xmlns:a16="http://schemas.microsoft.com/office/drawing/2014/main" id="{CA23536B-9A20-2274-CEE5-AF3A86DEA198}"/>
+                <a16:creationId xmlns:a16="http://schemas.microsoft.com/office/drawing/2014/main" id="{1C6E0858-89BD-6241-687A-CBEC04E28B29}"/>
               </a:ext>
             </a:extLst>
           </p:cNvPr>
@@ -11508,7 +12587,7 @@
           <p:cNvPr id="10" name="Rectangle: Rounded Corners 9">
             <a:extLst>
               <a:ext uri="{FF2B5EF4-FFF2-40B4-BE49-F238E27FC236}">
-                <a16:creationId xmlns:a16="http://schemas.microsoft.com/office/drawing/2014/main" id="{1855930B-32A4-96A4-B6BB-23279DA23C60}"/>
+                <a16:creationId xmlns:a16="http://schemas.microsoft.com/office/drawing/2014/main" id="{18A2D553-9CA9-BC24-7BD4-731A11E495FC}"/>
               </a:ext>
             </a:extLst>
           </p:cNvPr>
@@ -11564,7 +12643,7 @@
           <p:cNvPr id="11" name="TextBox 10">
             <a:extLst>
               <a:ext uri="{FF2B5EF4-FFF2-40B4-BE49-F238E27FC236}">
-                <a16:creationId xmlns:a16="http://schemas.microsoft.com/office/drawing/2014/main" id="{D80BFA8B-EBCE-565B-9E75-0328F3917CEB}"/>
+                <a16:creationId xmlns:a16="http://schemas.microsoft.com/office/drawing/2014/main" id="{3E26FD7D-AFAB-0FF6-BDBE-B468B9521362}"/>
               </a:ext>
             </a:extLst>
           </p:cNvPr>
@@ -11604,7 +12683,7 @@
           <p:cNvPr id="12" name="TextBox 11">
             <a:extLst>
               <a:ext uri="{FF2B5EF4-FFF2-40B4-BE49-F238E27FC236}">
-                <a16:creationId xmlns:a16="http://schemas.microsoft.com/office/drawing/2014/main" id="{F0BC9DB5-DD73-E542-6247-6AC82E9C9E2E}"/>
+                <a16:creationId xmlns:a16="http://schemas.microsoft.com/office/drawing/2014/main" id="{1ACC72AC-7987-D0C4-B2C1-0655A82E995C}"/>
               </a:ext>
             </a:extLst>
           </p:cNvPr>
@@ -11705,7 +12784,7 @@
           <p:cNvPr id="13" name="TextBox 12">
             <a:extLst>
               <a:ext uri="{FF2B5EF4-FFF2-40B4-BE49-F238E27FC236}">
-                <a16:creationId xmlns:a16="http://schemas.microsoft.com/office/drawing/2014/main" id="{2EDB47DE-7454-F971-FB80-BC232EEC0085}"/>
+                <a16:creationId xmlns:a16="http://schemas.microsoft.com/office/drawing/2014/main" id="{2AA9A366-B6C4-C7C9-4474-FE4B594619A9}"/>
               </a:ext>
             </a:extLst>
           </p:cNvPr>
@@ -11745,7 +12824,7 @@
           <p:cNvPr id="14" name="TextBox 13">
             <a:extLst>
               <a:ext uri="{FF2B5EF4-FFF2-40B4-BE49-F238E27FC236}">
-                <a16:creationId xmlns:a16="http://schemas.microsoft.com/office/drawing/2014/main" id="{5FF2F4DC-8B06-CAEF-E480-7CE871F370D8}"/>
+                <a16:creationId xmlns:a16="http://schemas.microsoft.com/office/drawing/2014/main" id="{F3CF7F8F-37D4-3F3B-8E5F-DC3173A76DDD}"/>
               </a:ext>
             </a:extLst>
           </p:cNvPr>
@@ -11784,7 +12863,7 @@
     </p:spTree>
     <p:extLst>
       <p:ext uri="{BB962C8B-B14F-4D97-AF65-F5344CB8AC3E}">
-        <p14:creationId xmlns:p14="http://schemas.microsoft.com/office/powerpoint/2010/main" val="2909816946"/>
+        <p14:creationId xmlns:p14="http://schemas.microsoft.com/office/powerpoint/2010/main" val="2513266624"/>
       </p:ext>
     </p:extLst>
   </p:cSld>
@@ -11824,7 +12903,7 @@
           <p:cNvPr id="2" name="Title 1">
             <a:extLst>
               <a:ext uri="{FF2B5EF4-FFF2-40B4-BE49-F238E27FC236}">
-                <a16:creationId xmlns:a16="http://schemas.microsoft.com/office/drawing/2014/main" id="{03CF52C1-7F2C-E4F8-617A-5CA9DA7626FC}"/>
+                <a16:creationId xmlns:a16="http://schemas.microsoft.com/office/drawing/2014/main" id="{5D5C2CAF-FB57-24A6-E43F-57CD62E62998}"/>
               </a:ext>
             </a:extLst>
           </p:cNvPr>
@@ -11864,7 +12943,7 @@
           <p:cNvPr id="3" name="TextBox 2">
             <a:extLst>
               <a:ext uri="{FF2B5EF4-FFF2-40B4-BE49-F238E27FC236}">
-                <a16:creationId xmlns:a16="http://schemas.microsoft.com/office/drawing/2014/main" id="{6D3BEE38-BE53-8591-EFD7-0E5928A9C4E0}"/>
+                <a16:creationId xmlns:a16="http://schemas.microsoft.com/office/drawing/2014/main" id="{16BAF52C-9298-2B6D-BF30-8C025C3D1CD7}"/>
               </a:ext>
             </a:extLst>
           </p:cNvPr>
@@ -11904,7 +12983,7 @@
           <p:cNvPr id="4" name="Rectangle: Rounded Corners 3">
             <a:extLst>
               <a:ext uri="{FF2B5EF4-FFF2-40B4-BE49-F238E27FC236}">
-                <a16:creationId xmlns:a16="http://schemas.microsoft.com/office/drawing/2014/main" id="{227EAFFA-9BC3-7D39-25C9-607161113904}"/>
+                <a16:creationId xmlns:a16="http://schemas.microsoft.com/office/drawing/2014/main" id="{3B975D57-DF46-A456-FD1A-2DADF89FCA3B}"/>
               </a:ext>
             </a:extLst>
           </p:cNvPr>
@@ -11960,7 +13039,7 @@
           <p:cNvPr id="5" name="TextBox 4">
             <a:extLst>
               <a:ext uri="{FF2B5EF4-FFF2-40B4-BE49-F238E27FC236}">
-                <a16:creationId xmlns:a16="http://schemas.microsoft.com/office/drawing/2014/main" id="{05D93849-9F35-D042-B7A2-2D2B22386718}"/>
+                <a16:creationId xmlns:a16="http://schemas.microsoft.com/office/drawing/2014/main" id="{E6A6DA1F-8451-1BD1-6F92-9205F7B8CED6}"/>
               </a:ext>
             </a:extLst>
           </p:cNvPr>
@@ -12000,7 +13079,7 @@
           <p:cNvPr id="6" name="TextBox 5">
             <a:extLst>
               <a:ext uri="{FF2B5EF4-FFF2-40B4-BE49-F238E27FC236}">
-                <a16:creationId xmlns:a16="http://schemas.microsoft.com/office/drawing/2014/main" id="{B2E0A24F-EF85-79CF-7745-60EE3B882910}"/>
+                <a16:creationId xmlns:a16="http://schemas.microsoft.com/office/drawing/2014/main" id="{059C073E-A6E8-1825-7F6F-7F076A464860}"/>
               </a:ext>
             </a:extLst>
           </p:cNvPr>
@@ -12040,7 +13119,7 @@
           <p:cNvPr id="7" name="TextBox 6">
             <a:extLst>
               <a:ext uri="{FF2B5EF4-FFF2-40B4-BE49-F238E27FC236}">
-                <a16:creationId xmlns:a16="http://schemas.microsoft.com/office/drawing/2014/main" id="{FECC1055-771F-D573-86EE-904DBC48FEE0}"/>
+                <a16:creationId xmlns:a16="http://schemas.microsoft.com/office/drawing/2014/main" id="{2AF70CC1-4DB1-8FEF-FAC8-910303741AEF}"/>
               </a:ext>
             </a:extLst>
           </p:cNvPr>
@@ -12080,7 +13159,7 @@
           <p:cNvPr id="8" name="Rectangle: Rounded Corners 7">
             <a:extLst>
               <a:ext uri="{FF2B5EF4-FFF2-40B4-BE49-F238E27FC236}">
-                <a16:creationId xmlns:a16="http://schemas.microsoft.com/office/drawing/2014/main" id="{4A8B1D65-1006-CF7B-A34F-CE3592E8BEB0}"/>
+                <a16:creationId xmlns:a16="http://schemas.microsoft.com/office/drawing/2014/main" id="{01B010AA-DE7B-AFAF-A40A-D00E1A0E9F2E}"/>
               </a:ext>
             </a:extLst>
           </p:cNvPr>
@@ -12136,7 +13215,7 @@
           <p:cNvPr id="9" name="TextBox 8">
             <a:extLst>
               <a:ext uri="{FF2B5EF4-FFF2-40B4-BE49-F238E27FC236}">
-                <a16:creationId xmlns:a16="http://schemas.microsoft.com/office/drawing/2014/main" id="{3D0E04E7-D15B-71C1-20F8-ADC77E4CCDE8}"/>
+                <a16:creationId xmlns:a16="http://schemas.microsoft.com/office/drawing/2014/main" id="{7E448A20-D544-3643-1685-C7B4EAB4C58A}"/>
               </a:ext>
             </a:extLst>
           </p:cNvPr>
@@ -12176,7 +13255,7 @@
           <p:cNvPr id="10" name="TextBox 9">
             <a:extLst>
               <a:ext uri="{FF2B5EF4-FFF2-40B4-BE49-F238E27FC236}">
-                <a16:creationId xmlns:a16="http://schemas.microsoft.com/office/drawing/2014/main" id="{93B3A58D-9E3E-D2C3-3433-DB27231A3DDE}"/>
+                <a16:creationId xmlns:a16="http://schemas.microsoft.com/office/drawing/2014/main" id="{436E0BEB-13FE-DED6-7493-DE60C13F03C3}"/>
               </a:ext>
             </a:extLst>
           </p:cNvPr>
@@ -12216,7 +13295,7 @@
           <p:cNvPr id="11" name="TextBox 10">
             <a:extLst>
               <a:ext uri="{FF2B5EF4-FFF2-40B4-BE49-F238E27FC236}">
-                <a16:creationId xmlns:a16="http://schemas.microsoft.com/office/drawing/2014/main" id="{3B51996F-1E34-8DF6-D737-8AAAD04812FE}"/>
+                <a16:creationId xmlns:a16="http://schemas.microsoft.com/office/drawing/2014/main" id="{B93F565C-0D30-E103-05B8-E7DDDF7D44F4}"/>
               </a:ext>
             </a:extLst>
           </p:cNvPr>
@@ -12256,7 +13335,7 @@
           <p:cNvPr id="12" name="TextBox 11">
             <a:extLst>
               <a:ext uri="{FF2B5EF4-FFF2-40B4-BE49-F238E27FC236}">
-                <a16:creationId xmlns:a16="http://schemas.microsoft.com/office/drawing/2014/main" id="{6AD390CA-874B-A00F-5CFC-0FA770E85735}"/>
+                <a16:creationId xmlns:a16="http://schemas.microsoft.com/office/drawing/2014/main" id="{10F49B4D-73A5-7FFA-7B00-D3D84291116C}"/>
               </a:ext>
             </a:extLst>
           </p:cNvPr>
@@ -12296,7 +13375,7 @@
           <p:cNvPr id="13" name="TextBox 12">
             <a:extLst>
               <a:ext uri="{FF2B5EF4-FFF2-40B4-BE49-F238E27FC236}">
-                <a16:creationId xmlns:a16="http://schemas.microsoft.com/office/drawing/2014/main" id="{FBAC8D42-6926-A408-D47D-72DD44CBB89F}"/>
+                <a16:creationId xmlns:a16="http://schemas.microsoft.com/office/drawing/2014/main" id="{14FB665B-023E-94BA-250E-E9E60843DAE6}"/>
               </a:ext>
             </a:extLst>
           </p:cNvPr>
@@ -12336,7 +13415,7 @@
           <p:cNvPr id="14" name="TextBox 13">
             <a:extLst>
               <a:ext uri="{FF2B5EF4-FFF2-40B4-BE49-F238E27FC236}">
-                <a16:creationId xmlns:a16="http://schemas.microsoft.com/office/drawing/2014/main" id="{602BECFA-0F96-CDD2-6DD1-A6AF2E02AE24}"/>
+                <a16:creationId xmlns:a16="http://schemas.microsoft.com/office/drawing/2014/main" id="{FC22D942-0BD0-A536-6242-392175FC49C1}"/>
               </a:ext>
             </a:extLst>
           </p:cNvPr>
@@ -12375,7 +13454,7 @@
     </p:spTree>
     <p:extLst>
       <p:ext uri="{BB962C8B-B14F-4D97-AF65-F5344CB8AC3E}">
-        <p14:creationId xmlns:p14="http://schemas.microsoft.com/office/powerpoint/2010/main" val="1979337282"/>
+        <p14:creationId xmlns:p14="http://schemas.microsoft.com/office/powerpoint/2010/main" val="1187237358"/>
       </p:ext>
     </p:extLst>
   </p:cSld>
@@ -12415,7 +13494,7 @@
           <p:cNvPr id="2" name="Title 1">
             <a:extLst>
               <a:ext uri="{FF2B5EF4-FFF2-40B4-BE49-F238E27FC236}">
-                <a16:creationId xmlns:a16="http://schemas.microsoft.com/office/drawing/2014/main" id="{4840AB6F-7F7A-F301-39D4-3BD9CBFDA4E9}"/>
+                <a16:creationId xmlns:a16="http://schemas.microsoft.com/office/drawing/2014/main" id="{77E6D193-5B9D-B123-7D47-B12D8594649C}"/>
               </a:ext>
             </a:extLst>
           </p:cNvPr>
@@ -12429,7 +13508,7 @@
         <p:spPr>
           <a:xfrm>
             <a:off x="609600" y="787400"/>
-            <a:ext cx="10972800" cy="762000"/>
+            <a:ext cx="10972800" cy="1270000"/>
           </a:xfrm>
         </p:spPr>
         <p:txBody>
@@ -12439,13 +13518,13 @@
           <a:lstStyle/>
           <a:p>
             <a:r>
-              <a:rPr lang="en-SG" sz="4000" b="1">
+              <a:rPr lang="en-SG" sz="3600" b="1">
                 <a:solidFill>
                   <a:srgbClr val="F7FAFD"/>
                 </a:solidFill>
                 <a:latin typeface="Segoe UI" panose="020B0502040204020203" pitchFamily="34" charset="0"/>
               </a:rPr>
-              <a:t>Allocate, run, report, update</a:t>
+              <a:t>Each session makes the next one better aimed</a:t>
             </a:r>
           </a:p>
         </p:txBody>
@@ -12455,7 +13534,7 @@
           <p:cNvPr id="3" name="TextBox 2">
             <a:extLst>
               <a:ext uri="{FF2B5EF4-FFF2-40B4-BE49-F238E27FC236}">
-                <a16:creationId xmlns:a16="http://schemas.microsoft.com/office/drawing/2014/main" id="{14809EDD-BED4-4289-C740-6305A6EAF713}"/>
+                <a16:creationId xmlns:a16="http://schemas.microsoft.com/office/drawing/2014/main" id="{9C557613-AF52-070E-AD4E-E2EC8680D6E3}"/>
               </a:ext>
             </a:extLst>
           </p:cNvPr>
@@ -12495,7 +13574,7 @@
           <p:cNvPr id="4" name="Rectangle: Rounded Corners 3">
             <a:extLst>
               <a:ext uri="{FF2B5EF4-FFF2-40B4-BE49-F238E27FC236}">
-                <a16:creationId xmlns:a16="http://schemas.microsoft.com/office/drawing/2014/main" id="{F7EBF5E2-60B8-A356-C95E-49F0B1F53C48}"/>
+                <a16:creationId xmlns:a16="http://schemas.microsoft.com/office/drawing/2014/main" id="{B283FAE8-8356-A4AB-D34A-D720387678F4}"/>
               </a:ext>
             </a:extLst>
           </p:cNvPr>
@@ -12504,8 +13583,8 @@
         </p:nvSpPr>
         <p:spPr>
           <a:xfrm>
-            <a:off x="609600" y="2413000"/>
-            <a:ext cx="2362200" cy="2413000"/>
+            <a:off x="609600" y="1905000"/>
+            <a:ext cx="2362200" cy="2159000"/>
           </a:xfrm>
           <a:prstGeom prst="roundRect">
             <a:avLst>
@@ -12551,7 +13630,7 @@
           <p:cNvPr id="5" name="TextBox 4">
             <a:extLst>
               <a:ext uri="{FF2B5EF4-FFF2-40B4-BE49-F238E27FC236}">
-                <a16:creationId xmlns:a16="http://schemas.microsoft.com/office/drawing/2014/main" id="{2C456C26-B579-890A-D136-3F6721200849}"/>
+                <a16:creationId xmlns:a16="http://schemas.microsoft.com/office/drawing/2014/main" id="{828CFB08-0DE7-4B3C-2BE4-4A773453018B}"/>
               </a:ext>
             </a:extLst>
           </p:cNvPr>
@@ -12560,7 +13639,7 @@
         </p:nvSpPr>
         <p:spPr>
           <a:xfrm>
-            <a:off x="812800" y="2641600"/>
+            <a:off x="812800" y="2108200"/>
             <a:ext cx="1955800" cy="254000"/>
           </a:xfrm>
           <a:prstGeom prst="rect">
@@ -12591,7 +13670,7 @@
           <p:cNvPr id="6" name="TextBox 5">
             <a:extLst>
               <a:ext uri="{FF2B5EF4-FFF2-40B4-BE49-F238E27FC236}">
-                <a16:creationId xmlns:a16="http://schemas.microsoft.com/office/drawing/2014/main" id="{F40C76D2-19B6-9B26-C7F4-CEFF7469DE55}"/>
+                <a16:creationId xmlns:a16="http://schemas.microsoft.com/office/drawing/2014/main" id="{4CAFC2E7-2868-019F-FC75-4102ABF52B43}"/>
               </a:ext>
             </a:extLst>
           </p:cNvPr>
@@ -12600,7 +13679,7 @@
         </p:nvSpPr>
         <p:spPr>
           <a:xfrm>
-            <a:off x="812800" y="3022600"/>
+            <a:off x="812800" y="2438400"/>
             <a:ext cx="1955800" cy="431800"/>
           </a:xfrm>
           <a:prstGeom prst="rect">
@@ -12631,7 +13710,7 @@
           <p:cNvPr id="7" name="TextBox 6">
             <a:extLst>
               <a:ext uri="{FF2B5EF4-FFF2-40B4-BE49-F238E27FC236}">
-                <a16:creationId xmlns:a16="http://schemas.microsoft.com/office/drawing/2014/main" id="{4CD285DD-F402-29C8-7B0E-1EE2B4108A4C}"/>
+                <a16:creationId xmlns:a16="http://schemas.microsoft.com/office/drawing/2014/main" id="{49D6B49E-CC0B-FEB1-EC39-BD0521575E76}"/>
               </a:ext>
             </a:extLst>
           </p:cNvPr>
@@ -12640,7 +13719,7 @@
         </p:nvSpPr>
         <p:spPr>
           <a:xfrm>
-            <a:off x="812800" y="3606800"/>
+            <a:off x="812800" y="2971800"/>
             <a:ext cx="1955800" cy="1016000"/>
           </a:xfrm>
           <a:prstGeom prst="rect">
@@ -12655,13 +13734,13 @@
           <a:lstStyle/>
           <a:p>
             <a:r>
-              <a:rPr lang="en-SG" sz="1600">
+              <a:rPr lang="en-SG" sz="1400">
                 <a:solidFill>
                   <a:srgbClr val="E1EAF4"/>
                 </a:solidFill>
                 <a:latin typeface="Segoe UI" panose="020B0502040204020203" pitchFamily="34" charset="0"/>
               </a:rPr>
-              <a:t>Platform, crew, limits.</a:t>
+              <a:t>Starts from each trainee’s profile and shows the likely first target.</a:t>
             </a:r>
           </a:p>
         </p:txBody>
@@ -12671,7 +13750,7 @@
           <p:cNvPr id="8" name="Arrow: Right 7">
             <a:extLst>
               <a:ext uri="{FF2B5EF4-FFF2-40B4-BE49-F238E27FC236}">
-                <a16:creationId xmlns:a16="http://schemas.microsoft.com/office/drawing/2014/main" id="{05CB8ACE-D815-7EF3-EDBF-A35465190F3D}"/>
+                <a16:creationId xmlns:a16="http://schemas.microsoft.com/office/drawing/2014/main" id="{693B486E-50D3-2132-D84C-158C2F20B1D6}"/>
               </a:ext>
             </a:extLst>
           </p:cNvPr>
@@ -12680,7 +13759,7 @@
         </p:nvSpPr>
         <p:spPr>
           <a:xfrm>
-            <a:off x="3073400" y="3517900"/>
+            <a:off x="3073400" y="2882900"/>
             <a:ext cx="304800" cy="203200"/>
           </a:xfrm>
           <a:prstGeom prst="rightArrow">
@@ -12739,7 +13818,7 @@
           <p:cNvPr id="9" name="Rectangle: Rounded Corners 8">
             <a:extLst>
               <a:ext uri="{FF2B5EF4-FFF2-40B4-BE49-F238E27FC236}">
-                <a16:creationId xmlns:a16="http://schemas.microsoft.com/office/drawing/2014/main" id="{879BEA69-6BE4-E84A-ECCC-09C967171692}"/>
+                <a16:creationId xmlns:a16="http://schemas.microsoft.com/office/drawing/2014/main" id="{7047841C-E29E-0A65-F06D-E7194077303C}"/>
               </a:ext>
             </a:extLst>
           </p:cNvPr>
@@ -12748,8 +13827,8 @@
         </p:nvSpPr>
         <p:spPr>
           <a:xfrm>
-            <a:off x="3479800" y="2413000"/>
-            <a:ext cx="2362200" cy="2413000"/>
+            <a:off x="3479800" y="1905000"/>
+            <a:ext cx="2362200" cy="2159000"/>
           </a:xfrm>
           <a:prstGeom prst="roundRect">
             <a:avLst>
@@ -12795,7 +13874,7 @@
           <p:cNvPr id="10" name="TextBox 9">
             <a:extLst>
               <a:ext uri="{FF2B5EF4-FFF2-40B4-BE49-F238E27FC236}">
-                <a16:creationId xmlns:a16="http://schemas.microsoft.com/office/drawing/2014/main" id="{1A485130-0857-B8BF-106F-63756C293CC2}"/>
+                <a16:creationId xmlns:a16="http://schemas.microsoft.com/office/drawing/2014/main" id="{D073F37C-5FDD-3DAA-728C-5823C30967A5}"/>
               </a:ext>
             </a:extLst>
           </p:cNvPr>
@@ -12804,7 +13883,7 @@
         </p:nvSpPr>
         <p:spPr>
           <a:xfrm>
-            <a:off x="3683000" y="2641600"/>
+            <a:off x="3683000" y="2108200"/>
             <a:ext cx="1955800" cy="254000"/>
           </a:xfrm>
           <a:prstGeom prst="rect">
@@ -12835,7 +13914,7 @@
           <p:cNvPr id="11" name="TextBox 10">
             <a:extLst>
               <a:ext uri="{FF2B5EF4-FFF2-40B4-BE49-F238E27FC236}">
-                <a16:creationId xmlns:a16="http://schemas.microsoft.com/office/drawing/2014/main" id="{73E80DBE-C87D-AD2A-688D-57F95F053948}"/>
+                <a16:creationId xmlns:a16="http://schemas.microsoft.com/office/drawing/2014/main" id="{EFB4425A-D460-2110-DD47-451C24B72317}"/>
               </a:ext>
             </a:extLst>
           </p:cNvPr>
@@ -12844,7 +13923,7 @@
         </p:nvSpPr>
         <p:spPr>
           <a:xfrm>
-            <a:off x="3683000" y="3022600"/>
+            <a:off x="3683000" y="2438400"/>
             <a:ext cx="1955800" cy="431800"/>
           </a:xfrm>
           <a:prstGeom prst="rect">
@@ -12875,7 +13954,7 @@
           <p:cNvPr id="12" name="TextBox 11">
             <a:extLst>
               <a:ext uri="{FF2B5EF4-FFF2-40B4-BE49-F238E27FC236}">
-                <a16:creationId xmlns:a16="http://schemas.microsoft.com/office/drawing/2014/main" id="{05C66EFF-DE04-7F9F-6818-B6C55F1EDB36}"/>
+                <a16:creationId xmlns:a16="http://schemas.microsoft.com/office/drawing/2014/main" id="{5A34E7B5-A4AB-7227-62D2-98D7E98B82AA}"/>
               </a:ext>
             </a:extLst>
           </p:cNvPr>
@@ -12884,7 +13963,7 @@
         </p:nvSpPr>
         <p:spPr>
           <a:xfrm>
-            <a:off x="3683000" y="3606800"/>
+            <a:off x="3683000" y="2971800"/>
             <a:ext cx="1955800" cy="1016000"/>
           </a:xfrm>
           <a:prstGeom prst="rect">
@@ -12899,13 +13978,13 @@
           <a:lstStyle/>
           <a:p>
             <a:r>
-              <a:rPr lang="en-SG" sz="1600">
+              <a:rPr lang="en-SG" sz="1400">
                 <a:solidFill>
                   <a:srgbClr val="E1EAF4"/>
                 </a:solidFill>
                 <a:latin typeface="Segoe UI" panose="020B0502040204020203" pitchFamily="34" charset="0"/>
               </a:rPr>
-              <a:t>The CGFs adapt and say why.</a:t>
+              <a:t>Pressure follows the profile first, then what the trainee does.</a:t>
             </a:r>
           </a:p>
         </p:txBody>
@@ -12915,7 +13994,7 @@
           <p:cNvPr id="13" name="Arrow: Right 12">
             <a:extLst>
               <a:ext uri="{FF2B5EF4-FFF2-40B4-BE49-F238E27FC236}">
-                <a16:creationId xmlns:a16="http://schemas.microsoft.com/office/drawing/2014/main" id="{5FD75457-3FAD-251A-0E3E-1FDFD0D8DCE5}"/>
+                <a16:creationId xmlns:a16="http://schemas.microsoft.com/office/drawing/2014/main" id="{298E800A-CD3C-1F7B-F9E6-8A5855FA0458}"/>
               </a:ext>
             </a:extLst>
           </p:cNvPr>
@@ -12924,7 +14003,7 @@
         </p:nvSpPr>
         <p:spPr>
           <a:xfrm>
-            <a:off x="5943600" y="3517900"/>
+            <a:off x="5943600" y="2882900"/>
             <a:ext cx="304800" cy="203200"/>
           </a:xfrm>
           <a:prstGeom prst="rightArrow">
@@ -12983,7 +14062,7 @@
           <p:cNvPr id="14" name="Rectangle: Rounded Corners 13">
             <a:extLst>
               <a:ext uri="{FF2B5EF4-FFF2-40B4-BE49-F238E27FC236}">
-                <a16:creationId xmlns:a16="http://schemas.microsoft.com/office/drawing/2014/main" id="{BF817913-0310-DB73-BDAE-451882A2F3DE}"/>
+                <a16:creationId xmlns:a16="http://schemas.microsoft.com/office/drawing/2014/main" id="{D487B79A-35AE-E39E-0832-9AD0CF100F56}"/>
               </a:ext>
             </a:extLst>
           </p:cNvPr>
@@ -12992,8 +14071,8 @@
         </p:nvSpPr>
         <p:spPr>
           <a:xfrm>
-            <a:off x="6350000" y="2413000"/>
-            <a:ext cx="2362200" cy="2413000"/>
+            <a:off x="6350000" y="1905000"/>
+            <a:ext cx="2362200" cy="2159000"/>
           </a:xfrm>
           <a:prstGeom prst="roundRect">
             <a:avLst>
@@ -13039,7 +14118,7 @@
           <p:cNvPr id="15" name="TextBox 14">
             <a:extLst>
               <a:ext uri="{FF2B5EF4-FFF2-40B4-BE49-F238E27FC236}">
-                <a16:creationId xmlns:a16="http://schemas.microsoft.com/office/drawing/2014/main" id="{BE201128-AF31-C734-4E1E-763D275F2D36}"/>
+                <a16:creationId xmlns:a16="http://schemas.microsoft.com/office/drawing/2014/main" id="{ACCF3532-D884-808A-6B41-6FB9B4A83D8E}"/>
               </a:ext>
             </a:extLst>
           </p:cNvPr>
@@ -13048,7 +14127,7 @@
         </p:nvSpPr>
         <p:spPr>
           <a:xfrm>
-            <a:off x="6553200" y="2641600"/>
+            <a:off x="6553200" y="2108200"/>
             <a:ext cx="1955800" cy="254000"/>
           </a:xfrm>
           <a:prstGeom prst="rect">
@@ -13079,7 +14158,7 @@
           <p:cNvPr id="16" name="TextBox 15">
             <a:extLst>
               <a:ext uri="{FF2B5EF4-FFF2-40B4-BE49-F238E27FC236}">
-                <a16:creationId xmlns:a16="http://schemas.microsoft.com/office/drawing/2014/main" id="{773A7844-4B87-13F0-E2B3-08662A7A95A1}"/>
+                <a16:creationId xmlns:a16="http://schemas.microsoft.com/office/drawing/2014/main" id="{13888E85-E15B-5E71-51FD-CB5697D846B4}"/>
               </a:ext>
             </a:extLst>
           </p:cNvPr>
@@ -13088,7 +14167,7 @@
         </p:nvSpPr>
         <p:spPr>
           <a:xfrm>
-            <a:off x="6553200" y="3022600"/>
+            <a:off x="6553200" y="2438400"/>
             <a:ext cx="1955800" cy="431800"/>
           </a:xfrm>
           <a:prstGeom prst="rect">
@@ -13119,7 +14198,7 @@
           <p:cNvPr id="17" name="TextBox 16">
             <a:extLst>
               <a:ext uri="{FF2B5EF4-FFF2-40B4-BE49-F238E27FC236}">
-                <a16:creationId xmlns:a16="http://schemas.microsoft.com/office/drawing/2014/main" id="{F75B661C-0AC2-1B60-6C8C-2DEDFFACC01C}"/>
+                <a16:creationId xmlns:a16="http://schemas.microsoft.com/office/drawing/2014/main" id="{9EC76761-45C6-17D5-AB6D-F4068B65547B}"/>
               </a:ext>
             </a:extLst>
           </p:cNvPr>
@@ -13128,7 +14207,7 @@
         </p:nvSpPr>
         <p:spPr>
           <a:xfrm>
-            <a:off x="6553200" y="3606800"/>
+            <a:off x="6553200" y="2971800"/>
             <a:ext cx="1955800" cy="1016000"/>
           </a:xfrm>
           <a:prstGeom prst="rect">
@@ -13143,13 +14222,13 @@
           <a:lstStyle/>
           <a:p>
             <a:r>
-              <a:rPr lang="en-SG" sz="1600">
+              <a:rPr lang="en-SG" sz="1400">
                 <a:solidFill>
                   <a:srgbClr val="E1EAF4"/>
                 </a:solidFill>
                 <a:latin typeface="Segoe UI" panose="020B0502040204020203" pitchFamily="34" charset="0"/>
               </a:rPr>
-              <a:t>A debrief for each trainee.</a:t>
+              <a:t>Facts computed from this run’s events, one debrief per trainee.</a:t>
             </a:r>
           </a:p>
         </p:txBody>
@@ -13159,7 +14238,7 @@
           <p:cNvPr id="18" name="Arrow: Right 17">
             <a:extLst>
               <a:ext uri="{FF2B5EF4-FFF2-40B4-BE49-F238E27FC236}">
-                <a16:creationId xmlns:a16="http://schemas.microsoft.com/office/drawing/2014/main" id="{B1AF551C-33C4-69E9-35DA-C9EFA818F1C2}"/>
+                <a16:creationId xmlns:a16="http://schemas.microsoft.com/office/drawing/2014/main" id="{2D8469D4-A5E4-C24E-3A83-8311B9CC1C0C}"/>
               </a:ext>
             </a:extLst>
           </p:cNvPr>
@@ -13168,7 +14247,7 @@
         </p:nvSpPr>
         <p:spPr>
           <a:xfrm>
-            <a:off x="8813800" y="3517900"/>
+            <a:off x="8813800" y="2882900"/>
             <a:ext cx="304800" cy="203200"/>
           </a:xfrm>
           <a:prstGeom prst="rightArrow">
@@ -13227,7 +14306,7 @@
           <p:cNvPr id="19" name="Rectangle: Rounded Corners 18">
             <a:extLst>
               <a:ext uri="{FF2B5EF4-FFF2-40B4-BE49-F238E27FC236}">
-                <a16:creationId xmlns:a16="http://schemas.microsoft.com/office/drawing/2014/main" id="{97822A96-5161-313D-FA24-26EE0DD8C181}"/>
+                <a16:creationId xmlns:a16="http://schemas.microsoft.com/office/drawing/2014/main" id="{84923AD5-746C-AC7A-9CED-637E3D720A31}"/>
               </a:ext>
             </a:extLst>
           </p:cNvPr>
@@ -13236,8 +14315,8 @@
         </p:nvSpPr>
         <p:spPr>
           <a:xfrm>
-            <a:off x="9220200" y="2413000"/>
-            <a:ext cx="2362200" cy="2413000"/>
+            <a:off x="9220200" y="1905000"/>
+            <a:ext cx="2362200" cy="2159000"/>
           </a:xfrm>
           <a:prstGeom prst="roundRect">
             <a:avLst>
@@ -13283,7 +14362,7 @@
           <p:cNvPr id="20" name="TextBox 19">
             <a:extLst>
               <a:ext uri="{FF2B5EF4-FFF2-40B4-BE49-F238E27FC236}">
-                <a16:creationId xmlns:a16="http://schemas.microsoft.com/office/drawing/2014/main" id="{0FC22B5C-1D70-230A-7C51-81AC02B67346}"/>
+                <a16:creationId xmlns:a16="http://schemas.microsoft.com/office/drawing/2014/main" id="{625DD4BD-D42F-8C3C-BF42-79570E42428B}"/>
               </a:ext>
             </a:extLst>
           </p:cNvPr>
@@ -13292,7 +14371,7 @@
         </p:nvSpPr>
         <p:spPr>
           <a:xfrm>
-            <a:off x="9423400" y="2641600"/>
+            <a:off x="9423400" y="2108200"/>
             <a:ext cx="1955800" cy="254000"/>
           </a:xfrm>
           <a:prstGeom prst="rect">
@@ -13323,7 +14402,7 @@
           <p:cNvPr id="21" name="TextBox 20">
             <a:extLst>
               <a:ext uri="{FF2B5EF4-FFF2-40B4-BE49-F238E27FC236}">
-                <a16:creationId xmlns:a16="http://schemas.microsoft.com/office/drawing/2014/main" id="{FE233E9A-AD61-C468-3006-BEBFC310A392}"/>
+                <a16:creationId xmlns:a16="http://schemas.microsoft.com/office/drawing/2014/main" id="{914D7AAA-5220-120B-F71B-D98B7F6A5CE0}"/>
               </a:ext>
             </a:extLst>
           </p:cNvPr>
@@ -13332,7 +14411,7 @@
         </p:nvSpPr>
         <p:spPr>
           <a:xfrm>
-            <a:off x="9423400" y="3022600"/>
+            <a:off x="9423400" y="2438400"/>
             <a:ext cx="1955800" cy="431800"/>
           </a:xfrm>
           <a:prstGeom prst="rect">
@@ -13353,7 +14432,7 @@
                 </a:solidFill>
                 <a:latin typeface="Segoe UI" panose="020B0502040204020203" pitchFamily="34" charset="0"/>
               </a:rPr>
-              <a:t>Update</a:t>
+              <a:t>Learn</a:t>
             </a:r>
           </a:p>
         </p:txBody>
@@ -13363,7 +14442,7 @@
           <p:cNvPr id="22" name="TextBox 21">
             <a:extLst>
               <a:ext uri="{FF2B5EF4-FFF2-40B4-BE49-F238E27FC236}">
-                <a16:creationId xmlns:a16="http://schemas.microsoft.com/office/drawing/2014/main" id="{041F8F5E-0245-19F6-64AD-8B2879E4E986}"/>
+                <a16:creationId xmlns:a16="http://schemas.microsoft.com/office/drawing/2014/main" id="{BD11F757-322B-C8A4-5E82-69585434A5F4}"/>
               </a:ext>
             </a:extLst>
           </p:cNvPr>
@@ -13372,7 +14451,7 @@
         </p:nvSpPr>
         <p:spPr>
           <a:xfrm>
-            <a:off x="9423400" y="3606800"/>
+            <a:off x="9423400" y="2971800"/>
             <a:ext cx="1955800" cy="1016000"/>
           </a:xfrm>
           <a:prstGeom prst="rect">
@@ -13387,23 +14466,147 @@
           <a:lstStyle/>
           <a:p>
             <a:r>
-              <a:rPr lang="en-SG" sz="1600">
+              <a:rPr lang="en-SG" sz="1400">
                 <a:solidFill>
                   <a:srgbClr val="EBDFFF"/>
                 </a:solidFill>
                 <a:latin typeface="Segoe UI" panose="020B0502040204020203" pitchFamily="34" charset="0"/>
               </a:rPr>
-              <a:t>The next session starts from it.</a:t>
-            </a:r>
-          </a:p>
-        </p:txBody>
-      </p:sp>
-      <p:sp>
-        <p:nvSpPr>
-          <p:cNvPr id="23" name="TextBox 22">
-            <a:extLst>
-              <a:ext uri="{FF2B5EF4-FFF2-40B4-BE49-F238E27FC236}">
-                <a16:creationId xmlns:a16="http://schemas.microsoft.com/office/drawing/2014/main" id="{C8146B9D-B23A-FD38-9C43-1D3F06A3654E}"/>
+              <a:t>Every event adds to the estimate. The history is saved.</a:t>
+            </a:r>
+          </a:p>
+        </p:txBody>
+      </p:sp>
+      <p:cxnSp>
+        <p:nvCxnSpPr>
+          <p:cNvPr id="23" name="Straight Connector 22">
+            <a:extLst>
+              <a:ext uri="{FF2B5EF4-FFF2-40B4-BE49-F238E27FC236}">
+                <a16:creationId xmlns:a16="http://schemas.microsoft.com/office/drawing/2014/main" id="{2B491EAF-29FC-D948-6803-74B2DC2B97E1}"/>
+              </a:ext>
+            </a:extLst>
+          </p:cNvPr>
+          <p:cNvCxnSpPr/>
+          <p:nvPr/>
+        </p:nvCxnSpPr>
+        <p:spPr>
+          <a:xfrm>
+            <a:off x="10401300" y="4064000"/>
+            <a:ext cx="0" cy="431800"/>
+          </a:xfrm>
+          <a:prstGeom prst="line">
+            <a:avLst/>
+          </a:prstGeom>
+          <a:ln w="28575">
+            <a:solidFill>
+              <a:srgbClr val="B98FFF"/>
+            </a:solidFill>
+          </a:ln>
+        </p:spPr>
+        <p:style>
+          <a:lnRef idx="2">
+            <a:schemeClr val="accent1"/>
+          </a:lnRef>
+          <a:fillRef idx="0">
+            <a:schemeClr val="accent1"/>
+          </a:fillRef>
+          <a:effectRef idx="1">
+            <a:schemeClr val="accent1"/>
+          </a:effectRef>
+          <a:fontRef idx="minor">
+            <a:schemeClr val="tx1"/>
+          </a:fontRef>
+        </p:style>
+      </p:cxnSp>
+      <p:cxnSp>
+        <p:nvCxnSpPr>
+          <p:cNvPr id="24" name="Straight Connector 23">
+            <a:extLst>
+              <a:ext uri="{FF2B5EF4-FFF2-40B4-BE49-F238E27FC236}">
+                <a16:creationId xmlns:a16="http://schemas.microsoft.com/office/drawing/2014/main" id="{EF06059E-8697-88C4-342A-84F918DFCA98}"/>
+              </a:ext>
+            </a:extLst>
+          </p:cNvPr>
+          <p:cNvCxnSpPr/>
+          <p:nvPr/>
+        </p:nvCxnSpPr>
+        <p:spPr>
+          <a:xfrm flipH="1">
+            <a:off x="1790700" y="4495800"/>
+            <a:ext cx="8610600" cy="0"/>
+          </a:xfrm>
+          <a:prstGeom prst="line">
+            <a:avLst/>
+          </a:prstGeom>
+          <a:ln w="28575">
+            <a:solidFill>
+              <a:srgbClr val="B98FFF"/>
+            </a:solidFill>
+          </a:ln>
+        </p:spPr>
+        <p:style>
+          <a:lnRef idx="2">
+            <a:schemeClr val="accent1"/>
+          </a:lnRef>
+          <a:fillRef idx="0">
+            <a:schemeClr val="accent1"/>
+          </a:fillRef>
+          <a:effectRef idx="1">
+            <a:schemeClr val="accent1"/>
+          </a:effectRef>
+          <a:fontRef idx="minor">
+            <a:schemeClr val="tx1"/>
+          </a:fontRef>
+        </p:style>
+      </p:cxnSp>
+      <p:cxnSp>
+        <p:nvCxnSpPr>
+          <p:cNvPr id="25" name="Straight Connector 24">
+            <a:extLst>
+              <a:ext uri="{FF2B5EF4-FFF2-40B4-BE49-F238E27FC236}">
+                <a16:creationId xmlns:a16="http://schemas.microsoft.com/office/drawing/2014/main" id="{B939F406-C6FC-E639-BE66-C9EF81757A15}"/>
+              </a:ext>
+            </a:extLst>
+          </p:cNvPr>
+          <p:cNvCxnSpPr/>
+          <p:nvPr/>
+        </p:nvCxnSpPr>
+        <p:spPr>
+          <a:xfrm flipV="1">
+            <a:off x="1790700" y="4089400"/>
+            <a:ext cx="0" cy="406400"/>
+          </a:xfrm>
+          <a:prstGeom prst="line">
+            <a:avLst/>
+          </a:prstGeom>
+          <a:ln w="28575">
+            <a:solidFill>
+              <a:srgbClr val="B98FFF"/>
+            </a:solidFill>
+            <a:tailEnd type="triangle"/>
+          </a:ln>
+        </p:spPr>
+        <p:style>
+          <a:lnRef idx="2">
+            <a:schemeClr val="accent1"/>
+          </a:lnRef>
+          <a:fillRef idx="0">
+            <a:schemeClr val="accent1"/>
+          </a:fillRef>
+          <a:effectRef idx="1">
+            <a:schemeClr val="accent1"/>
+          </a:effectRef>
+          <a:fontRef idx="minor">
+            <a:schemeClr val="tx1"/>
+          </a:fontRef>
+        </p:style>
+      </p:cxnSp>
+      <p:sp>
+        <p:nvSpPr>
+          <p:cNvPr id="26" name="TextBox 25">
+            <a:extLst>
+              <a:ext uri="{FF2B5EF4-FFF2-40B4-BE49-F238E27FC236}">
+                <a16:creationId xmlns:a16="http://schemas.microsoft.com/office/drawing/2014/main" id="{23E0D8E5-9D23-5D43-DEFF-4B54CBAB4470}"/>
               </a:ext>
             </a:extLst>
           </p:cNvPr>
@@ -13412,8 +14615,8 @@
         </p:nvSpPr>
         <p:spPr>
           <a:xfrm>
-            <a:off x="609600" y="5334000"/>
-            <a:ext cx="10972800" cy="381000"/>
+            <a:off x="3175000" y="4597400"/>
+            <a:ext cx="5842000" cy="304800"/>
           </a:xfrm>
           <a:prstGeom prst="rect">
             <a:avLst/>
@@ -13426,24 +14629,81 @@
           </a:bodyPr>
           <a:lstStyle/>
           <a:p>
-            <a:r>
-              <a:rPr lang="en-SG">
-                <a:solidFill>
-                  <a:srgbClr val="93ABC6"/>
+            <a:pPr algn="ctr"/>
+            <a:r>
+              <a:rPr lang="en-SG" sz="1600" b="1">
+                <a:solidFill>
+                  <a:srgbClr val="EBDFFF"/>
                 </a:solidFill>
                 <a:latin typeface="Segoe UI" panose="020B0502040204020203" pitchFamily="34" charset="0"/>
               </a:rPr>
-              <a:t>Every page opens from a file. No server, no install.</a:t>
-            </a:r>
-          </a:p>
-        </p:txBody>
-      </p:sp>
-      <p:sp>
-        <p:nvSpPr>
-          <p:cNvPr id="24" name="TextBox 23">
-            <a:extLst>
-              <a:ext uri="{FF2B5EF4-FFF2-40B4-BE49-F238E27FC236}">
-                <a16:creationId xmlns:a16="http://schemas.microsoft.com/office/drawing/2014/main" id="{86BB8EEB-03B2-8230-4A42-ED9706955527}"/>
+              <a:t>What was learned is where the next session starts</a:t>
+            </a:r>
+          </a:p>
+        </p:txBody>
+      </p:sp>
+      <p:sp>
+        <p:nvSpPr>
+          <p:cNvPr id="27" name="Rectangle: Rounded Corners 26">
+            <a:extLst>
+              <a:ext uri="{FF2B5EF4-FFF2-40B4-BE49-F238E27FC236}">
+                <a16:creationId xmlns:a16="http://schemas.microsoft.com/office/drawing/2014/main" id="{8FD1AB46-A7C7-413F-5F66-C20F4742B7C2}"/>
+              </a:ext>
+            </a:extLst>
+          </p:cNvPr>
+          <p:cNvSpPr/>
+          <p:nvPr/>
+        </p:nvSpPr>
+        <p:spPr>
+          <a:xfrm>
+            <a:off x="609600" y="5181600"/>
+            <a:ext cx="10972800" cy="889000"/>
+          </a:xfrm>
+          <a:prstGeom prst="roundRect">
+            <a:avLst>
+              <a:gd name="adj" fmla="val 6000"/>
+            </a:avLst>
+          </a:prstGeom>
+          <a:solidFill>
+            <a:srgbClr val="160F2B"/>
+          </a:solidFill>
+          <a:ln w="9525">
+            <a:solidFill>
+              <a:srgbClr val="6B4FB5"/>
+            </a:solidFill>
+          </a:ln>
+        </p:spPr>
+        <p:style>
+          <a:lnRef idx="2">
+            <a:schemeClr val="accent1">
+              <a:shade val="15000"/>
+            </a:schemeClr>
+          </a:lnRef>
+          <a:fillRef idx="1">
+            <a:schemeClr val="accent1"/>
+          </a:fillRef>
+          <a:effectRef idx="0">
+            <a:schemeClr val="accent1"/>
+          </a:effectRef>
+          <a:fontRef idx="minor">
+            <a:schemeClr val="lt1"/>
+          </a:fontRef>
+        </p:style>
+        <p:txBody>
+          <a:bodyPr rtlCol="0" anchor="ctr"/>
+          <a:lstStyle/>
+          <a:p>
+            <a:pPr algn="ctr"/>
+            <a:endParaRPr lang="en-SG"/>
+          </a:p>
+        </p:txBody>
+      </p:sp>
+      <p:sp>
+        <p:nvSpPr>
+          <p:cNvPr id="28" name="TextBox 27">
+            <a:extLst>
+              <a:ext uri="{FF2B5EF4-FFF2-40B4-BE49-F238E27FC236}">
+                <a16:creationId xmlns:a16="http://schemas.microsoft.com/office/drawing/2014/main" id="{1060900B-716E-B6F3-B652-25CF99098B01}"/>
               </a:ext>
             </a:extLst>
           </p:cNvPr>
@@ -13452,8 +14712,8 @@
         </p:nvSpPr>
         <p:spPr>
           <a:xfrm>
-            <a:off x="609600" y="6400800"/>
-            <a:ext cx="8890000" cy="228600"/>
+            <a:off x="863600" y="5486400"/>
+            <a:ext cx="10464800" cy="381000"/>
           </a:xfrm>
           <a:prstGeom prst="rect">
             <a:avLst/>
@@ -13466,24 +14726,25 @@
           </a:bodyPr>
           <a:lstStyle/>
           <a:p>
-            <a:r>
-              <a:rPr lang="en-SG" sz="1200">
-                <a:solidFill>
-                  <a:srgbClr val="93ABC6"/>
-                </a:solidFill>
-                <a:latin typeface="Consolas" panose="020B0609020204030204" pitchFamily="49" charset="0"/>
-              </a:rPr>
-              <a:t>ADAPTIVE CGF TRAINER</a:t>
-            </a:r>
-          </a:p>
-        </p:txBody>
-      </p:sp>
-      <p:sp>
-        <p:nvSpPr>
-          <p:cNvPr id="25" name="TextBox 24">
-            <a:extLst>
-              <a:ext uri="{FF2B5EF4-FFF2-40B4-BE49-F238E27FC236}">
-                <a16:creationId xmlns:a16="http://schemas.microsoft.com/office/drawing/2014/main" id="{EA3D34BC-7348-C545-63B9-2F1C764657B0}"/>
+            <a:pPr algn="ctr"/>
+            <a:r>
+              <a:rPr lang="en-SG" b="1">
+                <a:solidFill>
+                  <a:srgbClr val="F3ECFF"/>
+                </a:solidFill>
+                <a:latin typeface="Segoe UI" panose="020B0502040204020203" pitchFamily="34" charset="0"/>
+              </a:rPr>
+              <a:t>More sessions  →  more evidence  →  a sharper picture of each trainee  →  better-aimed practice</a:t>
+            </a:r>
+          </a:p>
+        </p:txBody>
+      </p:sp>
+      <p:sp>
+        <p:nvSpPr>
+          <p:cNvPr id="29" name="TextBox 28">
+            <a:extLst>
+              <a:ext uri="{FF2B5EF4-FFF2-40B4-BE49-F238E27FC236}">
+                <a16:creationId xmlns:a16="http://schemas.microsoft.com/office/drawing/2014/main" id="{1E2CCE47-26C2-FEEF-D8F0-ECF037E6D6CA}"/>
               </a:ext>
             </a:extLst>
           </p:cNvPr>
@@ -13492,8 +14753,8 @@
         </p:nvSpPr>
         <p:spPr>
           <a:xfrm>
-            <a:off x="10312400" y="6400800"/>
-            <a:ext cx="1270000" cy="228600"/>
+            <a:off x="609600" y="6400800"/>
+            <a:ext cx="8890000" cy="228600"/>
           </a:xfrm>
           <a:prstGeom prst="rect">
             <a:avLst/>
@@ -13506,6 +14767,46 @@
           </a:bodyPr>
           <a:lstStyle/>
           <a:p>
+            <a:r>
+              <a:rPr lang="en-SG" sz="1200">
+                <a:solidFill>
+                  <a:srgbClr val="93ABC6"/>
+                </a:solidFill>
+                <a:latin typeface="Consolas" panose="020B0609020204030204" pitchFamily="49" charset="0"/>
+              </a:rPr>
+              <a:t>ADAPTIVE CGF TRAINER</a:t>
+            </a:r>
+          </a:p>
+        </p:txBody>
+      </p:sp>
+      <p:sp>
+        <p:nvSpPr>
+          <p:cNvPr id="30" name="TextBox 29">
+            <a:extLst>
+              <a:ext uri="{FF2B5EF4-FFF2-40B4-BE49-F238E27FC236}">
+                <a16:creationId xmlns:a16="http://schemas.microsoft.com/office/drawing/2014/main" id="{315C10A2-849E-7837-9E45-D6F98B7EC72D}"/>
+              </a:ext>
+            </a:extLst>
+          </p:cNvPr>
+          <p:cNvSpPr txBox="1"/>
+          <p:nvPr/>
+        </p:nvSpPr>
+        <p:spPr>
+          <a:xfrm>
+            <a:off x="10312400" y="6400800"/>
+            <a:ext cx="1270000" cy="228600"/>
+          </a:xfrm>
+          <a:prstGeom prst="rect">
+            <a:avLst/>
+          </a:prstGeom>
+          <a:noFill/>
+        </p:spPr>
+        <p:txBody>
+          <a:bodyPr vert="horz" wrap="square" lIns="0" tIns="0" rIns="0" bIns="0" rtlCol="0">
+            <a:noAutofit/>
+          </a:bodyPr>
+          <a:lstStyle/>
+          <a:p>
             <a:pPr algn="r"/>
             <a:r>
               <a:rPr lang="en-SG" sz="1200">
@@ -13522,7 +14823,7 @@
     </p:spTree>
     <p:extLst>
       <p:ext uri="{BB962C8B-B14F-4D97-AF65-F5344CB8AC3E}">
-        <p14:creationId xmlns:p14="http://schemas.microsoft.com/office/powerpoint/2010/main" val="306693038"/>
+        <p14:creationId xmlns:p14="http://schemas.microsoft.com/office/powerpoint/2010/main" val="3116812084"/>
       </p:ext>
     </p:extLst>
   </p:cSld>
@@ -13562,7 +14863,7 @@
           <p:cNvPr id="2" name="Title 1">
             <a:extLst>
               <a:ext uri="{FF2B5EF4-FFF2-40B4-BE49-F238E27FC236}">
-                <a16:creationId xmlns:a16="http://schemas.microsoft.com/office/drawing/2014/main" id="{2C27DB29-0FE9-6839-74BA-3F113134BEED}"/>
+                <a16:creationId xmlns:a16="http://schemas.microsoft.com/office/drawing/2014/main" id="{198938C0-94A5-236C-6EC2-B6E030538258}"/>
               </a:ext>
             </a:extLst>
           </p:cNvPr>
@@ -13592,7 +14893,7 @@
                 </a:solidFill>
                 <a:latin typeface="Segoe UI" panose="020B0502040204020203" pitchFamily="34" charset="0"/>
               </a:rPr>
-              <a:t>Choose the platform, seat the crew, set the limits</a:t>
+              <a:t>The more it is used, the better it knows each trainee</a:t>
             </a:r>
           </a:p>
         </p:txBody>
@@ -13602,7 +14903,7 @@
           <p:cNvPr id="3" name="TextBox 2">
             <a:extLst>
               <a:ext uri="{FF2B5EF4-FFF2-40B4-BE49-F238E27FC236}">
-                <a16:creationId xmlns:a16="http://schemas.microsoft.com/office/drawing/2014/main" id="{59EE4D39-29B8-B7DE-F13F-FEA2DFC180C0}"/>
+                <a16:creationId xmlns:a16="http://schemas.microsoft.com/office/drawing/2014/main" id="{5836C788-3FBB-8B3A-7310-3D16E2B267AF}"/>
               </a:ext>
             </a:extLst>
           </p:cNvPr>
@@ -13632,7 +14933,7 @@
                 </a:solidFill>
                 <a:latin typeface="Consolas" panose="020B0609020204030204" pitchFamily="49" charset="0"/>
               </a:rPr>
-              <a:t>ALLOCATE</a:t>
+              <a:t>LEARNING OVER TIME</a:t>
             </a:r>
           </a:p>
         </p:txBody>
@@ -13642,7 +14943,7 @@
           <p:cNvPr id="4" name="TextBox 3">
             <a:extLst>
               <a:ext uri="{FF2B5EF4-FFF2-40B4-BE49-F238E27FC236}">
-                <a16:creationId xmlns:a16="http://schemas.microsoft.com/office/drawing/2014/main" id="{DA9B0956-3979-8325-EEB5-ECC019E892A5}"/>
+                <a16:creationId xmlns:a16="http://schemas.microsoft.com/office/drawing/2014/main" id="{733C1F1C-B965-C704-6D3E-516862040C70}"/>
               </a:ext>
             </a:extLst>
           </p:cNvPr>
@@ -13651,8 +14952,8 @@
         </p:nvSpPr>
         <p:spPr>
           <a:xfrm>
-            <a:off x="609600" y="2235200"/>
-            <a:ext cx="3175000" cy="330200"/>
+            <a:off x="609600" y="2133600"/>
+            <a:ext cx="6096000" cy="279400"/>
           </a:xfrm>
           <a:prstGeom prst="rect">
             <a:avLst/>
@@ -13666,23 +14967,64 @@
           <a:lstStyle/>
           <a:p>
             <a:r>
-              <a:rPr lang="en-SG" b="1">
+              <a:rPr lang="en-SG" sz="1400" b="1">
                 <a:solidFill>
                   <a:srgbClr val="F7FAFD"/>
                 </a:solidFill>
                 <a:latin typeface="Segoe UI" panose="020B0502040204020203" pitchFamily="34" charset="0"/>
               </a:rPr>
-              <a:t>Six platforms</a:t>
-            </a:r>
-          </a:p>
-        </p:txBody>
-      </p:sp>
-      <p:sp>
-        <p:nvSpPr>
-          <p:cNvPr id="5" name="TextBox 4">
-            <a:extLst>
-              <a:ext uri="{FF2B5EF4-FFF2-40B4-BE49-F238E27FC236}">
-                <a16:creationId xmlns:a16="http://schemas.microsoft.com/office/drawing/2014/main" id="{3D8A9F2D-3896-895D-22A4-8FAC29F92DAB}"/>
+              <a:t>Ben Ong: estimated hail discipline, with a ±1 SD range</a:t>
+            </a:r>
+          </a:p>
+        </p:txBody>
+      </p:sp>
+      <p:cxnSp>
+        <p:nvCxnSpPr>
+          <p:cNvPr id="5" name="Straight Connector 4">
+            <a:extLst>
+              <a:ext uri="{FF2B5EF4-FFF2-40B4-BE49-F238E27FC236}">
+                <a16:creationId xmlns:a16="http://schemas.microsoft.com/office/drawing/2014/main" id="{46F9B4F8-4E9A-AC0D-1BAB-53D3475D7E9E}"/>
+              </a:ext>
+            </a:extLst>
+          </p:cNvPr>
+          <p:cNvCxnSpPr/>
+          <p:nvPr/>
+        </p:nvCxnSpPr>
+        <p:spPr>
+          <a:xfrm>
+            <a:off x="1219200" y="5029200"/>
+            <a:ext cx="5283200" cy="0"/>
+          </a:xfrm>
+          <a:prstGeom prst="line">
+            <a:avLst/>
+          </a:prstGeom>
+          <a:ln w="9525">
+            <a:solidFill>
+              <a:srgbClr val="1E3653"/>
+            </a:solidFill>
+          </a:ln>
+        </p:spPr>
+        <p:style>
+          <a:lnRef idx="2">
+            <a:schemeClr val="accent1"/>
+          </a:lnRef>
+          <a:fillRef idx="0">
+            <a:schemeClr val="accent1"/>
+          </a:fillRef>
+          <a:effectRef idx="1">
+            <a:schemeClr val="accent1"/>
+          </a:effectRef>
+          <a:fontRef idx="minor">
+            <a:schemeClr val="tx1"/>
+          </a:fontRef>
+        </p:style>
+      </p:cxnSp>
+      <p:sp>
+        <p:nvSpPr>
+          <p:cNvPr id="6" name="TextBox 5">
+            <a:extLst>
+              <a:ext uri="{FF2B5EF4-FFF2-40B4-BE49-F238E27FC236}">
+                <a16:creationId xmlns:a16="http://schemas.microsoft.com/office/drawing/2014/main" id="{848E6BD1-C17F-D942-0D79-7EF8F33A9638}"/>
               </a:ext>
             </a:extLst>
           </p:cNvPr>
@@ -13691,8 +15033,8 @@
         </p:nvSpPr>
         <p:spPr>
           <a:xfrm>
-            <a:off x="609600" y="2590800"/>
-            <a:ext cx="3175000" cy="812800"/>
+            <a:off x="660400" y="4927600"/>
+            <a:ext cx="482600" cy="203200"/>
           </a:xfrm>
           <a:prstGeom prst="rect">
             <a:avLst/>
@@ -13705,24 +15047,66 @@
           </a:bodyPr>
           <a:lstStyle/>
           <a:p>
-            <a:r>
-              <a:rPr lang="en-SG" sz="1400">
-                <a:solidFill>
-                  <a:srgbClr val="E1EAF4"/>
+            <a:pPr algn="r"/>
+            <a:r>
+              <a:rPr lang="en-SG" sz="1200">
+                <a:solidFill>
+                  <a:srgbClr val="93ABC6"/>
                 </a:solidFill>
                 <a:latin typeface="Segoe UI" panose="020B0502040204020203" pitchFamily="34" charset="0"/>
               </a:rPr>
-              <a:t>Fighter, warship and tank, two models each, with their own seats.</a:t>
-            </a:r>
-          </a:p>
-        </p:txBody>
-      </p:sp>
-      <p:sp>
-        <p:nvSpPr>
-          <p:cNvPr id="6" name="TextBox 5">
-            <a:extLst>
-              <a:ext uri="{FF2B5EF4-FFF2-40B4-BE49-F238E27FC236}">
-                <a16:creationId xmlns:a16="http://schemas.microsoft.com/office/drawing/2014/main" id="{27EE3846-3185-65E7-DF1F-413FC25DD375}"/>
+              <a:t>0.0</a:t>
+            </a:r>
+          </a:p>
+        </p:txBody>
+      </p:sp>
+      <p:cxnSp>
+        <p:nvCxnSpPr>
+          <p:cNvPr id="7" name="Straight Connector 6">
+            <a:extLst>
+              <a:ext uri="{FF2B5EF4-FFF2-40B4-BE49-F238E27FC236}">
+                <a16:creationId xmlns:a16="http://schemas.microsoft.com/office/drawing/2014/main" id="{90DC6046-269C-5BBC-6548-39F72F75E06D}"/>
+              </a:ext>
+            </a:extLst>
+          </p:cNvPr>
+          <p:cNvCxnSpPr/>
+          <p:nvPr/>
+        </p:nvCxnSpPr>
+        <p:spPr>
+          <a:xfrm>
+            <a:off x="1219200" y="4541520"/>
+            <a:ext cx="5283200" cy="0"/>
+          </a:xfrm>
+          <a:prstGeom prst="line">
+            <a:avLst/>
+          </a:prstGeom>
+          <a:ln w="9525">
+            <a:solidFill>
+              <a:srgbClr val="1E3653"/>
+            </a:solidFill>
+          </a:ln>
+        </p:spPr>
+        <p:style>
+          <a:lnRef idx="2">
+            <a:schemeClr val="accent1"/>
+          </a:lnRef>
+          <a:fillRef idx="0">
+            <a:schemeClr val="accent1"/>
+          </a:fillRef>
+          <a:effectRef idx="1">
+            <a:schemeClr val="accent1"/>
+          </a:effectRef>
+          <a:fontRef idx="minor">
+            <a:schemeClr val="tx1"/>
+          </a:fontRef>
+        </p:style>
+      </p:cxnSp>
+      <p:sp>
+        <p:nvSpPr>
+          <p:cNvPr id="8" name="TextBox 7">
+            <a:extLst>
+              <a:ext uri="{FF2B5EF4-FFF2-40B4-BE49-F238E27FC236}">
+                <a16:creationId xmlns:a16="http://schemas.microsoft.com/office/drawing/2014/main" id="{335155BF-D311-69AE-6AC1-17A4B5584185}"/>
               </a:ext>
             </a:extLst>
           </p:cNvPr>
@@ -13731,8 +15115,8 @@
         </p:nvSpPr>
         <p:spPr>
           <a:xfrm>
-            <a:off x="609600" y="3581400"/>
-            <a:ext cx="3175000" cy="330200"/>
+            <a:off x="660400" y="4439920"/>
+            <a:ext cx="482600" cy="203200"/>
           </a:xfrm>
           <a:prstGeom prst="rect">
             <a:avLst/>
@@ -13745,24 +15129,66 @@
           </a:bodyPr>
           <a:lstStyle/>
           <a:p>
-            <a:r>
-              <a:rPr lang="en-SG" b="1">
-                <a:solidFill>
-                  <a:srgbClr val="F7FAFD"/>
+            <a:pPr algn="r"/>
+            <a:r>
+              <a:rPr lang="en-SG" sz="1200">
+                <a:solidFill>
+                  <a:srgbClr val="93ABC6"/>
                 </a:solidFill>
                 <a:latin typeface="Segoe UI" panose="020B0502040204020203" pitchFamily="34" charset="0"/>
               </a:rPr>
-              <a:t>Know the trainee</a:t>
-            </a:r>
-          </a:p>
-        </p:txBody>
-      </p:sp>
-      <p:sp>
-        <p:nvSpPr>
-          <p:cNvPr id="7" name="TextBox 6">
-            <a:extLst>
-              <a:ext uri="{FF2B5EF4-FFF2-40B4-BE49-F238E27FC236}">
-                <a16:creationId xmlns:a16="http://schemas.microsoft.com/office/drawing/2014/main" id="{6607AEB1-4741-FB7F-9A8D-95EAF72F1493}"/>
+              <a:t>0.1</a:t>
+            </a:r>
+          </a:p>
+        </p:txBody>
+      </p:sp>
+      <p:cxnSp>
+        <p:nvCxnSpPr>
+          <p:cNvPr id="9" name="Straight Connector 8">
+            <a:extLst>
+              <a:ext uri="{FF2B5EF4-FFF2-40B4-BE49-F238E27FC236}">
+                <a16:creationId xmlns:a16="http://schemas.microsoft.com/office/drawing/2014/main" id="{3A5092C2-26C4-4464-FA08-28AC017F0D2F}"/>
+              </a:ext>
+            </a:extLst>
+          </p:cNvPr>
+          <p:cNvCxnSpPr/>
+          <p:nvPr/>
+        </p:nvCxnSpPr>
+        <p:spPr>
+          <a:xfrm>
+            <a:off x="1219200" y="4053840"/>
+            <a:ext cx="5283200" cy="0"/>
+          </a:xfrm>
+          <a:prstGeom prst="line">
+            <a:avLst/>
+          </a:prstGeom>
+          <a:ln w="9525">
+            <a:solidFill>
+              <a:srgbClr val="1E3653"/>
+            </a:solidFill>
+          </a:ln>
+        </p:spPr>
+        <p:style>
+          <a:lnRef idx="2">
+            <a:schemeClr val="accent1"/>
+          </a:lnRef>
+          <a:fillRef idx="0">
+            <a:schemeClr val="accent1"/>
+          </a:fillRef>
+          <a:effectRef idx="1">
+            <a:schemeClr val="accent1"/>
+          </a:effectRef>
+          <a:fontRef idx="minor">
+            <a:schemeClr val="tx1"/>
+          </a:fontRef>
+        </p:style>
+      </p:cxnSp>
+      <p:sp>
+        <p:nvSpPr>
+          <p:cNvPr id="10" name="TextBox 9">
+            <a:extLst>
+              <a:ext uri="{FF2B5EF4-FFF2-40B4-BE49-F238E27FC236}">
+                <a16:creationId xmlns:a16="http://schemas.microsoft.com/office/drawing/2014/main" id="{81A01DEE-C4BA-BD8B-F4F3-234472A2ECCA}"/>
               </a:ext>
             </a:extLst>
           </p:cNvPr>
@@ -13771,8 +15197,8 @@
         </p:nvSpPr>
         <p:spPr>
           <a:xfrm>
-            <a:off x="609600" y="3937000"/>
-            <a:ext cx="3175000" cy="812800"/>
+            <a:off x="660400" y="3952240"/>
+            <a:ext cx="482600" cy="203200"/>
           </a:xfrm>
           <a:prstGeom prst="rect">
             <a:avLst/>
@@ -13785,24 +15211,66 @@
           </a:bodyPr>
           <a:lstStyle/>
           <a:p>
-            <a:r>
-              <a:rPr lang="en-SG" sz="1400">
-                <a:solidFill>
-                  <a:srgbClr val="E1EAF4"/>
+            <a:pPr algn="r"/>
+            <a:r>
+              <a:rPr lang="en-SG" sz="1200">
+                <a:solidFill>
+                  <a:srgbClr val="93ABC6"/>
                 </a:solidFill>
                 <a:latin typeface="Segoe UI" panose="020B0502040204020203" pitchFamily="34" charset="0"/>
               </a:rPr>
-              <a:t>Competency bars and focus areas per seat, plus a private note.</a:t>
-            </a:r>
-          </a:p>
-        </p:txBody>
-      </p:sp>
-      <p:sp>
-        <p:nvSpPr>
-          <p:cNvPr id="8" name="TextBox 7">
-            <a:extLst>
-              <a:ext uri="{FF2B5EF4-FFF2-40B4-BE49-F238E27FC236}">
-                <a16:creationId xmlns:a16="http://schemas.microsoft.com/office/drawing/2014/main" id="{576AC535-297D-71CD-D1CF-CF589EDBD85C}"/>
+              <a:t>0.2</a:t>
+            </a:r>
+          </a:p>
+        </p:txBody>
+      </p:sp>
+      <p:cxnSp>
+        <p:nvCxnSpPr>
+          <p:cNvPr id="11" name="Straight Connector 10">
+            <a:extLst>
+              <a:ext uri="{FF2B5EF4-FFF2-40B4-BE49-F238E27FC236}">
+                <a16:creationId xmlns:a16="http://schemas.microsoft.com/office/drawing/2014/main" id="{A81C72C1-7186-1D1F-1307-2463A0BD7EEC}"/>
+              </a:ext>
+            </a:extLst>
+          </p:cNvPr>
+          <p:cNvCxnSpPr/>
+          <p:nvPr/>
+        </p:nvCxnSpPr>
+        <p:spPr>
+          <a:xfrm>
+            <a:off x="1219200" y="3566160"/>
+            <a:ext cx="5283200" cy="0"/>
+          </a:xfrm>
+          <a:prstGeom prst="line">
+            <a:avLst/>
+          </a:prstGeom>
+          <a:ln w="9525">
+            <a:solidFill>
+              <a:srgbClr val="1E3653"/>
+            </a:solidFill>
+          </a:ln>
+        </p:spPr>
+        <p:style>
+          <a:lnRef idx="2">
+            <a:schemeClr val="accent1"/>
+          </a:lnRef>
+          <a:fillRef idx="0">
+            <a:schemeClr val="accent1"/>
+          </a:fillRef>
+          <a:effectRef idx="1">
+            <a:schemeClr val="accent1"/>
+          </a:effectRef>
+          <a:fontRef idx="minor">
+            <a:schemeClr val="tx1"/>
+          </a:fontRef>
+        </p:style>
+      </p:cxnSp>
+      <p:sp>
+        <p:nvSpPr>
+          <p:cNvPr id="12" name="TextBox 11">
+            <a:extLst>
+              <a:ext uri="{FF2B5EF4-FFF2-40B4-BE49-F238E27FC236}">
+                <a16:creationId xmlns:a16="http://schemas.microsoft.com/office/drawing/2014/main" id="{CEF24875-72E3-6C57-4324-05FAB176C2C5}"/>
               </a:ext>
             </a:extLst>
           </p:cNvPr>
@@ -13811,8 +15279,8 @@
         </p:nvSpPr>
         <p:spPr>
           <a:xfrm>
-            <a:off x="609600" y="4927600"/>
-            <a:ext cx="3175000" cy="330200"/>
+            <a:off x="660400" y="3464560"/>
+            <a:ext cx="482600" cy="203200"/>
           </a:xfrm>
           <a:prstGeom prst="rect">
             <a:avLst/>
@@ -13825,24 +15293,66 @@
           </a:bodyPr>
           <a:lstStyle/>
           <a:p>
-            <a:r>
-              <a:rPr lang="en-SG" b="1">
-                <a:solidFill>
-                  <a:srgbClr val="F7FAFD"/>
+            <a:pPr algn="r"/>
+            <a:r>
+              <a:rPr lang="en-SG" sz="1200">
+                <a:solidFill>
+                  <a:srgbClr val="93ABC6"/>
                 </a:solidFill>
                 <a:latin typeface="Segoe UI" panose="020B0502040204020203" pitchFamily="34" charset="0"/>
               </a:rPr>
-              <a:t>Practice or assess</a:t>
-            </a:r>
-          </a:p>
-        </p:txBody>
-      </p:sp>
-      <p:sp>
-        <p:nvSpPr>
-          <p:cNvPr id="9" name="TextBox 8">
-            <a:extLst>
-              <a:ext uri="{FF2B5EF4-FFF2-40B4-BE49-F238E27FC236}">
-                <a16:creationId xmlns:a16="http://schemas.microsoft.com/office/drawing/2014/main" id="{E01AD8E1-68A4-1CD3-4B36-ECBA159F66C2}"/>
+              <a:t>0.3</a:t>
+            </a:r>
+          </a:p>
+        </p:txBody>
+      </p:sp>
+      <p:cxnSp>
+        <p:nvCxnSpPr>
+          <p:cNvPr id="13" name="Straight Connector 12">
+            <a:extLst>
+              <a:ext uri="{FF2B5EF4-FFF2-40B4-BE49-F238E27FC236}">
+                <a16:creationId xmlns:a16="http://schemas.microsoft.com/office/drawing/2014/main" id="{2B1A1D95-9CDF-43DB-AB71-748DFAF9779F}"/>
+              </a:ext>
+            </a:extLst>
+          </p:cNvPr>
+          <p:cNvCxnSpPr/>
+          <p:nvPr/>
+        </p:nvCxnSpPr>
+        <p:spPr>
+          <a:xfrm>
+            <a:off x="1219200" y="3078480"/>
+            <a:ext cx="5283200" cy="0"/>
+          </a:xfrm>
+          <a:prstGeom prst="line">
+            <a:avLst/>
+          </a:prstGeom>
+          <a:ln w="9525">
+            <a:solidFill>
+              <a:srgbClr val="1E3653"/>
+            </a:solidFill>
+          </a:ln>
+        </p:spPr>
+        <p:style>
+          <a:lnRef idx="2">
+            <a:schemeClr val="accent1"/>
+          </a:lnRef>
+          <a:fillRef idx="0">
+            <a:schemeClr val="accent1"/>
+          </a:fillRef>
+          <a:effectRef idx="1">
+            <a:schemeClr val="accent1"/>
+          </a:effectRef>
+          <a:fontRef idx="minor">
+            <a:schemeClr val="tx1"/>
+          </a:fontRef>
+        </p:style>
+      </p:cxnSp>
+      <p:sp>
+        <p:nvSpPr>
+          <p:cNvPr id="14" name="TextBox 13">
+            <a:extLst>
+              <a:ext uri="{FF2B5EF4-FFF2-40B4-BE49-F238E27FC236}">
+                <a16:creationId xmlns:a16="http://schemas.microsoft.com/office/drawing/2014/main" id="{189B58FB-3598-0FB6-A588-975EE33B5B9D}"/>
               </a:ext>
             </a:extLst>
           </p:cNvPr>
@@ -13851,8 +15361,8 @@
         </p:nvSpPr>
         <p:spPr>
           <a:xfrm>
-            <a:off x="609600" y="5283200"/>
-            <a:ext cx="3175000" cy="812800"/>
+            <a:off x="660400" y="2976880"/>
+            <a:ext cx="482600" cy="203200"/>
           </a:xfrm>
           <a:prstGeom prst="rect">
             <a:avLst/>
@@ -13865,65 +15375,66 @@
           </a:bodyPr>
           <a:lstStyle/>
           <a:p>
-            <a:r>
-              <a:rPr lang="en-SG" sz="1400">
-                <a:solidFill>
-                  <a:srgbClr val="E1EAF4"/>
+            <a:pPr algn="r"/>
+            <a:r>
+              <a:rPr lang="en-SG" sz="1200">
+                <a:solidFill>
+                  <a:srgbClr val="93ABC6"/>
                 </a:solidFill>
                 <a:latin typeface="Segoe UI" panose="020B0502040204020203" pitchFamily="34" charset="0"/>
               </a:rPr>
-              <a:t>The mode badge, run length and the envelope are set before start.</a:t>
-            </a:r>
-          </a:p>
-        </p:txBody>
-      </p:sp>
-      <p:pic>
-        <p:nvPicPr>
-          <p:cNvPr id="11" name="Picture 10" descr="The trainee allocation page: warship crew seats on the left, trainee pool with competency bars on the right">
-            <a:extLst>
-              <a:ext uri="{FF2B5EF4-FFF2-40B4-BE49-F238E27FC236}">
-                <a16:creationId xmlns:a16="http://schemas.microsoft.com/office/drawing/2014/main" id="{67F78E68-DB63-9589-A97A-D33684764E1E}"/>
-              </a:ext>
-            </a:extLst>
-          </p:cNvPr>
-          <p:cNvPicPr>
-            <a:picLocks/>
-          </p:cNvPicPr>
-          <p:nvPr/>
-        </p:nvPicPr>
-        <p:blipFill>
-          <a:blip r:embed="rId3">
-            <a:extLst>
-              <a:ext uri="{28A0092B-C50C-407E-A947-70E740481C1C}">
-                <a14:useLocalDpi xmlns:a14="http://schemas.microsoft.com/office/drawing/2010/main" val="0"/>
-              </a:ext>
-            </a:extLst>
-          </a:blip>
-          <a:stretch>
-            <a:fillRect/>
-          </a:stretch>
-        </p:blipFill>
-        <p:spPr>
-          <a:xfrm>
-            <a:off x="4089400" y="2235200"/>
-            <a:ext cx="7493000" cy="3841589"/>
-          </a:xfrm>
-          <a:prstGeom prst="rect">
+              <a:t>0.4</a:t>
+            </a:r>
+          </a:p>
+        </p:txBody>
+      </p:sp>
+      <p:cxnSp>
+        <p:nvCxnSpPr>
+          <p:cNvPr id="15" name="Straight Connector 14">
+            <a:extLst>
+              <a:ext uri="{FF2B5EF4-FFF2-40B4-BE49-F238E27FC236}">
+                <a16:creationId xmlns:a16="http://schemas.microsoft.com/office/drawing/2014/main" id="{5C3BBF21-4906-7295-C294-A0D682020EBF}"/>
+              </a:ext>
+            </a:extLst>
+          </p:cNvPr>
+          <p:cNvCxnSpPr/>
+          <p:nvPr/>
+        </p:nvCxnSpPr>
+        <p:spPr>
+          <a:xfrm>
+            <a:off x="1219200" y="2590800"/>
+            <a:ext cx="5283200" cy="0"/>
+          </a:xfrm>
+          <a:prstGeom prst="line">
             <a:avLst/>
           </a:prstGeom>
           <a:ln w="9525">
             <a:solidFill>
-              <a:srgbClr val="4A78A8"/>
+              <a:srgbClr val="1E3653"/>
             </a:solidFill>
           </a:ln>
         </p:spPr>
-      </p:pic>
-      <p:sp>
-        <p:nvSpPr>
-          <p:cNvPr id="12" name="TextBox 11">
-            <a:extLst>
-              <a:ext uri="{FF2B5EF4-FFF2-40B4-BE49-F238E27FC236}">
-                <a16:creationId xmlns:a16="http://schemas.microsoft.com/office/drawing/2014/main" id="{CEB37774-B480-DFBC-E013-DEAC0ED900A5}"/>
+        <p:style>
+          <a:lnRef idx="2">
+            <a:schemeClr val="accent1"/>
+          </a:lnRef>
+          <a:fillRef idx="0">
+            <a:schemeClr val="accent1"/>
+          </a:fillRef>
+          <a:effectRef idx="1">
+            <a:schemeClr val="accent1"/>
+          </a:effectRef>
+          <a:fontRef idx="minor">
+            <a:schemeClr val="tx1"/>
+          </a:fontRef>
+        </p:style>
+      </p:cxnSp>
+      <p:sp>
+        <p:nvSpPr>
+          <p:cNvPr id="16" name="TextBox 15">
+            <a:extLst>
+              <a:ext uri="{FF2B5EF4-FFF2-40B4-BE49-F238E27FC236}">
+                <a16:creationId xmlns:a16="http://schemas.microsoft.com/office/drawing/2014/main" id="{B7F24244-441E-F3AD-0327-C27F28048C6B}"/>
               </a:ext>
             </a:extLst>
           </p:cNvPr>
@@ -13932,8 +15443,8 @@
         </p:nvSpPr>
         <p:spPr>
           <a:xfrm>
-            <a:off x="609600" y="6400800"/>
-            <a:ext cx="8890000" cy="228600"/>
+            <a:off x="660400" y="2489200"/>
+            <a:ext cx="482600" cy="203200"/>
           </a:xfrm>
           <a:prstGeom prst="rect">
             <a:avLst/>
@@ -13946,24 +15457,568 @@
           </a:bodyPr>
           <a:lstStyle/>
           <a:p>
+            <a:pPr algn="r"/>
             <a:r>
               <a:rPr lang="en-SG" sz="1200">
                 <a:solidFill>
                   <a:srgbClr val="93ABC6"/>
                 </a:solidFill>
-                <a:latin typeface="Consolas" panose="020B0609020204030204" pitchFamily="49" charset="0"/>
-              </a:rPr>
-              <a:t>ADAPTIVE CGF TRAINER  ·  SYNTHETIC TRAINEES</a:t>
-            </a:r>
-          </a:p>
-        </p:txBody>
-      </p:sp>
-      <p:sp>
-        <p:nvSpPr>
-          <p:cNvPr id="13" name="TextBox 12">
-            <a:extLst>
-              <a:ext uri="{FF2B5EF4-FFF2-40B4-BE49-F238E27FC236}">
-                <a16:creationId xmlns:a16="http://schemas.microsoft.com/office/drawing/2014/main" id="{C4793D72-691F-608C-CB09-5B2AF9F28F0E}"/>
+                <a:latin typeface="Segoe UI" panose="020B0502040204020203" pitchFamily="34" charset="0"/>
+              </a:rPr>
+              <a:t>0.5</a:t>
+            </a:r>
+          </a:p>
+        </p:txBody>
+      </p:sp>
+      <p:sp>
+        <p:nvSpPr>
+          <p:cNvPr id="17" name="Range band" descr="Range of one standard deviation around Ben Ong's hail discipline estimate; it narrows over five points">
+            <a:extLst>
+              <a:ext uri="{FF2B5EF4-FFF2-40B4-BE49-F238E27FC236}">
+                <a16:creationId xmlns:a16="http://schemas.microsoft.com/office/drawing/2014/main" id="{AFB575D9-EB09-E322-9F65-3ADFEE1D365C}"/>
+              </a:ext>
+            </a:extLst>
+          </p:cNvPr>
+          <p:cNvSpPr/>
+          <p:nvPr/>
+        </p:nvSpPr>
+        <p:spPr>
+          <a:xfrm>
+            <a:off x="1574800" y="3164773"/>
+            <a:ext cx="4572001" cy="1376748"/>
+          </a:xfrm>
+          <a:custGeom>
+            <a:avLst/>
+            <a:gdLst/>
+            <a:ahLst/>
+            <a:cxnLst/>
+            <a:rect l="0" t="0" r="0" b="0"/>
+            <a:pathLst>
+              <a:path w="4572001" h="1376748">
+                <a:moveTo>
+                  <a:pt x="0" y="189865"/>
+                </a:moveTo>
+                <a:lnTo>
+                  <a:pt x="1143000" y="401387"/>
+                </a:lnTo>
+                <a:lnTo>
+                  <a:pt x="2286000" y="229359"/>
+                </a:lnTo>
+                <a:lnTo>
+                  <a:pt x="3429000" y="100866"/>
+                </a:lnTo>
+                <a:lnTo>
+                  <a:pt x="4572000" y="0"/>
+                </a:lnTo>
+                <a:lnTo>
+                  <a:pt x="4572000" y="802774"/>
+                </a:lnTo>
+                <a:lnTo>
+                  <a:pt x="3429000" y="1061251"/>
+                </a:lnTo>
+                <a:lnTo>
+                  <a:pt x="2286000" y="1204531"/>
+                </a:lnTo>
+                <a:lnTo>
+                  <a:pt x="1143000" y="1376747"/>
+                </a:lnTo>
+                <a:lnTo>
+                  <a:pt x="0" y="1288158"/>
+                </a:lnTo>
+                <a:close/>
+              </a:path>
+            </a:pathLst>
+          </a:custGeom>
+          <a:solidFill>
+            <a:srgbClr val="3A2A6B">
+              <a:alpha val="75000"/>
+            </a:srgbClr>
+          </a:solidFill>
+          <a:ln w="19050" cap="flat" cmpd="sng" algn="ctr">
+            <a:noFill/>
+            <a:prstDash val="solid"/>
+            <a:miter lim="800000"/>
+          </a:ln>
+          <a:effectLst/>
+          <a:extLst>
+            <a:ext uri="{91240B29-F687-4F45-9708-019B960494DF}">
+              <a14:hiddenLine xmlns:a14="http://schemas.microsoft.com/office/drawing/2010/main" w="19050" cap="flat" cmpd="sng" algn="ctr">
+                <a:solidFill>
+                  <a:schemeClr val="accent1">
+                    <a:shade val="15000"/>
+                  </a:schemeClr>
+                </a:solidFill>
+                <a:prstDash val="solid"/>
+                <a:miter lim="800000"/>
+              </a14:hiddenLine>
+            </a:ext>
+          </a:extLst>
+        </p:spPr>
+        <p:style>
+          <a:lnRef idx="2">
+            <a:schemeClr val="accent1">
+              <a:shade val="15000"/>
+            </a:schemeClr>
+          </a:lnRef>
+          <a:fillRef idx="1">
+            <a:schemeClr val="accent1"/>
+          </a:fillRef>
+          <a:effectRef idx="0">
+            <a:schemeClr val="accent1"/>
+          </a:effectRef>
+          <a:fontRef idx="minor">
+            <a:schemeClr val="lt1"/>
+          </a:fontRef>
+        </p:style>
+        <p:txBody>
+          <a:bodyPr rtlCol="0" anchor="ctr"/>
+          <a:lstStyle/>
+          <a:p>
+            <a:pPr algn="ctr"/>
+            <a:endParaRPr lang="en-SG"/>
+          </a:p>
+        </p:txBody>
+      </p:sp>
+      <p:cxnSp>
+        <p:nvCxnSpPr>
+          <p:cNvPr id="18" name="Straight Connector 17">
+            <a:extLst>
+              <a:ext uri="{FF2B5EF4-FFF2-40B4-BE49-F238E27FC236}">
+                <a16:creationId xmlns:a16="http://schemas.microsoft.com/office/drawing/2014/main" id="{325DC4C4-DA7B-101A-1168-3270BE6DD8A6}"/>
+              </a:ext>
+            </a:extLst>
+          </p:cNvPr>
+          <p:cNvCxnSpPr/>
+          <p:nvPr/>
+        </p:nvCxnSpPr>
+        <p:spPr>
+          <a:xfrm>
+            <a:off x="1574800" y="3903785"/>
+            <a:ext cx="1143000" cy="150055"/>
+          </a:xfrm>
+          <a:prstGeom prst="line">
+            <a:avLst/>
+          </a:prstGeom>
+          <a:ln w="44450">
+            <a:solidFill>
+              <a:srgbClr val="B98FFF"/>
+            </a:solidFill>
+          </a:ln>
+        </p:spPr>
+        <p:style>
+          <a:lnRef idx="2">
+            <a:schemeClr val="accent1"/>
+          </a:lnRef>
+          <a:fillRef idx="0">
+            <a:schemeClr val="accent1"/>
+          </a:fillRef>
+          <a:effectRef idx="1">
+            <a:schemeClr val="accent1"/>
+          </a:effectRef>
+          <a:fontRef idx="minor">
+            <a:schemeClr val="tx1"/>
+          </a:fontRef>
+        </p:style>
+      </p:cxnSp>
+      <p:cxnSp>
+        <p:nvCxnSpPr>
+          <p:cNvPr id="19" name="Straight Connector 18">
+            <a:extLst>
+              <a:ext uri="{FF2B5EF4-FFF2-40B4-BE49-F238E27FC236}">
+                <a16:creationId xmlns:a16="http://schemas.microsoft.com/office/drawing/2014/main" id="{ECD15F81-07E6-821A-5A5B-09E6C8BD2715}"/>
+              </a:ext>
+            </a:extLst>
+          </p:cNvPr>
+          <p:cNvCxnSpPr/>
+          <p:nvPr/>
+        </p:nvCxnSpPr>
+        <p:spPr>
+          <a:xfrm flipV="1">
+            <a:off x="2717800" y="3881718"/>
+            <a:ext cx="1143000" cy="172122"/>
+          </a:xfrm>
+          <a:prstGeom prst="line">
+            <a:avLst/>
+          </a:prstGeom>
+          <a:ln w="44450">
+            <a:solidFill>
+              <a:srgbClr val="B98FFF"/>
+            </a:solidFill>
+          </a:ln>
+        </p:spPr>
+        <p:style>
+          <a:lnRef idx="2">
+            <a:schemeClr val="accent1"/>
+          </a:lnRef>
+          <a:fillRef idx="0">
+            <a:schemeClr val="accent1"/>
+          </a:fillRef>
+          <a:effectRef idx="1">
+            <a:schemeClr val="accent1"/>
+          </a:effectRef>
+          <a:fontRef idx="minor">
+            <a:schemeClr val="tx1"/>
+          </a:fontRef>
+        </p:style>
+      </p:cxnSp>
+      <p:cxnSp>
+        <p:nvCxnSpPr>
+          <p:cNvPr id="20" name="Straight Connector 19">
+            <a:extLst>
+              <a:ext uri="{FF2B5EF4-FFF2-40B4-BE49-F238E27FC236}">
+                <a16:creationId xmlns:a16="http://schemas.microsoft.com/office/drawing/2014/main" id="{C560B698-CAA1-9EFE-024A-E96DAADE215D}"/>
+              </a:ext>
+            </a:extLst>
+          </p:cNvPr>
+          <p:cNvCxnSpPr/>
+          <p:nvPr/>
+        </p:nvCxnSpPr>
+        <p:spPr>
+          <a:xfrm flipV="1">
+            <a:off x="3860800" y="3745831"/>
+            <a:ext cx="1143000" cy="135887"/>
+          </a:xfrm>
+          <a:prstGeom prst="line">
+            <a:avLst/>
+          </a:prstGeom>
+          <a:ln w="44450">
+            <a:solidFill>
+              <a:srgbClr val="B98FFF"/>
+            </a:solidFill>
+          </a:ln>
+        </p:spPr>
+        <p:style>
+          <a:lnRef idx="2">
+            <a:schemeClr val="accent1"/>
+          </a:lnRef>
+          <a:fillRef idx="0">
+            <a:schemeClr val="accent1"/>
+          </a:fillRef>
+          <a:effectRef idx="1">
+            <a:schemeClr val="accent1"/>
+          </a:effectRef>
+          <a:fontRef idx="minor">
+            <a:schemeClr val="tx1"/>
+          </a:fontRef>
+        </p:style>
+      </p:cxnSp>
+      <p:cxnSp>
+        <p:nvCxnSpPr>
+          <p:cNvPr id="21" name="Straight Connector 20">
+            <a:extLst>
+              <a:ext uri="{FF2B5EF4-FFF2-40B4-BE49-F238E27FC236}">
+                <a16:creationId xmlns:a16="http://schemas.microsoft.com/office/drawing/2014/main" id="{E8DA4B6A-ADF5-900E-A092-A3A6AC03F6C5}"/>
+              </a:ext>
+            </a:extLst>
+          </p:cNvPr>
+          <p:cNvCxnSpPr/>
+          <p:nvPr/>
+        </p:nvCxnSpPr>
+        <p:spPr>
+          <a:xfrm flipV="1">
+            <a:off x="5003800" y="3566160"/>
+            <a:ext cx="1143000" cy="179671"/>
+          </a:xfrm>
+          <a:prstGeom prst="line">
+            <a:avLst/>
+          </a:prstGeom>
+          <a:ln w="44450">
+            <a:solidFill>
+              <a:srgbClr val="B98FFF"/>
+            </a:solidFill>
+          </a:ln>
+        </p:spPr>
+        <p:style>
+          <a:lnRef idx="2">
+            <a:schemeClr val="accent1"/>
+          </a:lnRef>
+          <a:fillRef idx="0">
+            <a:schemeClr val="accent1"/>
+          </a:fillRef>
+          <a:effectRef idx="1">
+            <a:schemeClr val="accent1"/>
+          </a:effectRef>
+          <a:fontRef idx="minor">
+            <a:schemeClr val="tx1"/>
+          </a:fontRef>
+        </p:style>
+      </p:cxnSp>
+      <p:sp>
+        <p:nvSpPr>
+          <p:cNvPr id="22" name="Oval 21">
+            <a:extLst>
+              <a:ext uri="{FF2B5EF4-FFF2-40B4-BE49-F238E27FC236}">
+                <a16:creationId xmlns:a16="http://schemas.microsoft.com/office/drawing/2014/main" id="{CFA0138F-FA41-7BD6-5C65-1CB37F82B8ED}"/>
+              </a:ext>
+            </a:extLst>
+          </p:cNvPr>
+          <p:cNvSpPr/>
+          <p:nvPr/>
+        </p:nvSpPr>
+        <p:spPr>
+          <a:xfrm>
+            <a:off x="1498600" y="3827585"/>
+            <a:ext cx="152400" cy="152400"/>
+          </a:xfrm>
+          <a:prstGeom prst="ellipse">
+            <a:avLst/>
+          </a:prstGeom>
+          <a:solidFill>
+            <a:srgbClr val="B98FFF"/>
+          </a:solidFill>
+          <a:ln w="19050">
+            <a:solidFill>
+              <a:srgbClr val="0D1C30"/>
+            </a:solidFill>
+          </a:ln>
+        </p:spPr>
+        <p:style>
+          <a:lnRef idx="2">
+            <a:schemeClr val="accent1">
+              <a:shade val="15000"/>
+            </a:schemeClr>
+          </a:lnRef>
+          <a:fillRef idx="1">
+            <a:schemeClr val="accent1"/>
+          </a:fillRef>
+          <a:effectRef idx="0">
+            <a:schemeClr val="accent1"/>
+          </a:effectRef>
+          <a:fontRef idx="minor">
+            <a:schemeClr val="lt1"/>
+          </a:fontRef>
+        </p:style>
+        <p:txBody>
+          <a:bodyPr rtlCol="0" anchor="ctr"/>
+          <a:lstStyle/>
+          <a:p>
+            <a:pPr algn="ctr"/>
+            <a:endParaRPr lang="en-SG"/>
+          </a:p>
+        </p:txBody>
+      </p:sp>
+      <p:sp>
+        <p:nvSpPr>
+          <p:cNvPr id="23" name="Oval 22">
+            <a:extLst>
+              <a:ext uri="{FF2B5EF4-FFF2-40B4-BE49-F238E27FC236}">
+                <a16:creationId xmlns:a16="http://schemas.microsoft.com/office/drawing/2014/main" id="{932B62BA-CB2D-3FC9-F398-4927AD6A61E6}"/>
+              </a:ext>
+            </a:extLst>
+          </p:cNvPr>
+          <p:cNvSpPr/>
+          <p:nvPr/>
+        </p:nvSpPr>
+        <p:spPr>
+          <a:xfrm>
+            <a:off x="2641600" y="3977640"/>
+            <a:ext cx="152400" cy="152400"/>
+          </a:xfrm>
+          <a:prstGeom prst="ellipse">
+            <a:avLst/>
+          </a:prstGeom>
+          <a:solidFill>
+            <a:srgbClr val="B98FFF"/>
+          </a:solidFill>
+          <a:ln w="19050">
+            <a:solidFill>
+              <a:srgbClr val="0D1C30"/>
+            </a:solidFill>
+          </a:ln>
+        </p:spPr>
+        <p:style>
+          <a:lnRef idx="2">
+            <a:schemeClr val="accent1">
+              <a:shade val="15000"/>
+            </a:schemeClr>
+          </a:lnRef>
+          <a:fillRef idx="1">
+            <a:schemeClr val="accent1"/>
+          </a:fillRef>
+          <a:effectRef idx="0">
+            <a:schemeClr val="accent1"/>
+          </a:effectRef>
+          <a:fontRef idx="minor">
+            <a:schemeClr val="lt1"/>
+          </a:fontRef>
+        </p:style>
+        <p:txBody>
+          <a:bodyPr rtlCol="0" anchor="ctr"/>
+          <a:lstStyle/>
+          <a:p>
+            <a:pPr algn="ctr"/>
+            <a:endParaRPr lang="en-SG"/>
+          </a:p>
+        </p:txBody>
+      </p:sp>
+      <p:sp>
+        <p:nvSpPr>
+          <p:cNvPr id="24" name="Oval 23">
+            <a:extLst>
+              <a:ext uri="{FF2B5EF4-FFF2-40B4-BE49-F238E27FC236}">
+                <a16:creationId xmlns:a16="http://schemas.microsoft.com/office/drawing/2014/main" id="{275C6045-C15E-65D9-1DF5-A16BEF6F7F5C}"/>
+              </a:ext>
+            </a:extLst>
+          </p:cNvPr>
+          <p:cNvSpPr/>
+          <p:nvPr/>
+        </p:nvSpPr>
+        <p:spPr>
+          <a:xfrm>
+            <a:off x="3784600" y="3805518"/>
+            <a:ext cx="152400" cy="152400"/>
+          </a:xfrm>
+          <a:prstGeom prst="ellipse">
+            <a:avLst/>
+          </a:prstGeom>
+          <a:solidFill>
+            <a:srgbClr val="B98FFF"/>
+          </a:solidFill>
+          <a:ln w="19050">
+            <a:solidFill>
+              <a:srgbClr val="0D1C30"/>
+            </a:solidFill>
+          </a:ln>
+        </p:spPr>
+        <p:style>
+          <a:lnRef idx="2">
+            <a:schemeClr val="accent1">
+              <a:shade val="15000"/>
+            </a:schemeClr>
+          </a:lnRef>
+          <a:fillRef idx="1">
+            <a:schemeClr val="accent1"/>
+          </a:fillRef>
+          <a:effectRef idx="0">
+            <a:schemeClr val="accent1"/>
+          </a:effectRef>
+          <a:fontRef idx="minor">
+            <a:schemeClr val="lt1"/>
+          </a:fontRef>
+        </p:style>
+        <p:txBody>
+          <a:bodyPr rtlCol="0" anchor="ctr"/>
+          <a:lstStyle/>
+          <a:p>
+            <a:pPr algn="ctr"/>
+            <a:endParaRPr lang="en-SG"/>
+          </a:p>
+        </p:txBody>
+      </p:sp>
+      <p:sp>
+        <p:nvSpPr>
+          <p:cNvPr id="25" name="Oval 24">
+            <a:extLst>
+              <a:ext uri="{FF2B5EF4-FFF2-40B4-BE49-F238E27FC236}">
+                <a16:creationId xmlns:a16="http://schemas.microsoft.com/office/drawing/2014/main" id="{AEC34E8E-9EF5-9CB0-5D88-A798738D1EA7}"/>
+              </a:ext>
+            </a:extLst>
+          </p:cNvPr>
+          <p:cNvSpPr/>
+          <p:nvPr/>
+        </p:nvSpPr>
+        <p:spPr>
+          <a:xfrm>
+            <a:off x="4927600" y="3669631"/>
+            <a:ext cx="152400" cy="152400"/>
+          </a:xfrm>
+          <a:prstGeom prst="ellipse">
+            <a:avLst/>
+          </a:prstGeom>
+          <a:solidFill>
+            <a:srgbClr val="B98FFF"/>
+          </a:solidFill>
+          <a:ln w="19050">
+            <a:solidFill>
+              <a:srgbClr val="0D1C30"/>
+            </a:solidFill>
+          </a:ln>
+        </p:spPr>
+        <p:style>
+          <a:lnRef idx="2">
+            <a:schemeClr val="accent1">
+              <a:shade val="15000"/>
+            </a:schemeClr>
+          </a:lnRef>
+          <a:fillRef idx="1">
+            <a:schemeClr val="accent1"/>
+          </a:fillRef>
+          <a:effectRef idx="0">
+            <a:schemeClr val="accent1"/>
+          </a:effectRef>
+          <a:fontRef idx="minor">
+            <a:schemeClr val="lt1"/>
+          </a:fontRef>
+        </p:style>
+        <p:txBody>
+          <a:bodyPr rtlCol="0" anchor="ctr"/>
+          <a:lstStyle/>
+          <a:p>
+            <a:pPr algn="ctr"/>
+            <a:endParaRPr lang="en-SG"/>
+          </a:p>
+        </p:txBody>
+      </p:sp>
+      <p:sp>
+        <p:nvSpPr>
+          <p:cNvPr id="26" name="Oval 25">
+            <a:extLst>
+              <a:ext uri="{FF2B5EF4-FFF2-40B4-BE49-F238E27FC236}">
+                <a16:creationId xmlns:a16="http://schemas.microsoft.com/office/drawing/2014/main" id="{3CD8B31B-627B-0EA6-81E0-7739AF14BEAF}"/>
+              </a:ext>
+            </a:extLst>
+          </p:cNvPr>
+          <p:cNvSpPr/>
+          <p:nvPr/>
+        </p:nvSpPr>
+        <p:spPr>
+          <a:xfrm>
+            <a:off x="6070600" y="3489960"/>
+            <a:ext cx="152400" cy="152400"/>
+          </a:xfrm>
+          <a:prstGeom prst="ellipse">
+            <a:avLst/>
+          </a:prstGeom>
+          <a:solidFill>
+            <a:srgbClr val="B98FFF"/>
+          </a:solidFill>
+          <a:ln w="19050">
+            <a:solidFill>
+              <a:srgbClr val="0D1C30"/>
+            </a:solidFill>
+          </a:ln>
+        </p:spPr>
+        <p:style>
+          <a:lnRef idx="2">
+            <a:schemeClr val="accent1">
+              <a:shade val="15000"/>
+            </a:schemeClr>
+          </a:lnRef>
+          <a:fillRef idx="1">
+            <a:schemeClr val="accent1"/>
+          </a:fillRef>
+          <a:effectRef idx="0">
+            <a:schemeClr val="accent1"/>
+          </a:effectRef>
+          <a:fontRef idx="minor">
+            <a:schemeClr val="lt1"/>
+          </a:fontRef>
+        </p:style>
+        <p:txBody>
+          <a:bodyPr rtlCol="0" anchor="ctr"/>
+          <a:lstStyle/>
+          <a:p>
+            <a:pPr algn="ctr"/>
+            <a:endParaRPr lang="en-SG"/>
+          </a:p>
+        </p:txBody>
+      </p:sp>
+      <p:sp>
+        <p:nvSpPr>
+          <p:cNvPr id="27" name="TextBox 26">
+            <a:extLst>
+              <a:ext uri="{FF2B5EF4-FFF2-40B4-BE49-F238E27FC236}">
+                <a16:creationId xmlns:a16="http://schemas.microsoft.com/office/drawing/2014/main" id="{D4AD9DB0-5657-877A-1BD4-6490499969BC}"/>
               </a:ext>
             </a:extLst>
           </p:cNvPr>
@@ -13972,8 +16027,8 @@
         </p:nvSpPr>
         <p:spPr>
           <a:xfrm>
-            <a:off x="10312400" y="6400800"/>
-            <a:ext cx="1270000" cy="228600"/>
+            <a:off x="1016000" y="5105400"/>
+            <a:ext cx="1117600" cy="203200"/>
           </a:xfrm>
           <a:prstGeom prst="rect">
             <a:avLst/>
@@ -13986,6 +16041,925 @@
           </a:bodyPr>
           <a:lstStyle/>
           <a:p>
+            <a:pPr algn="ctr"/>
+            <a:r>
+              <a:rPr lang="en-SG" sz="1200">
+                <a:solidFill>
+                  <a:srgbClr val="93ABC6"/>
+                </a:solidFill>
+                <a:latin typeface="Segoe UI" panose="020B0502040204020203" pitchFamily="34" charset="0"/>
+              </a:rPr>
+              <a:t>Start</a:t>
+            </a:r>
+          </a:p>
+        </p:txBody>
+      </p:sp>
+      <p:sp>
+        <p:nvSpPr>
+          <p:cNvPr id="28" name="TextBox 27">
+            <a:extLst>
+              <a:ext uri="{FF2B5EF4-FFF2-40B4-BE49-F238E27FC236}">
+                <a16:creationId xmlns:a16="http://schemas.microsoft.com/office/drawing/2014/main" id="{37B77BC5-2863-C39D-05AD-58450DCE9C84}"/>
+              </a:ext>
+            </a:extLst>
+          </p:cNvPr>
+          <p:cNvSpPr txBox="1"/>
+          <p:nvPr/>
+        </p:nvSpPr>
+        <p:spPr>
+          <a:xfrm>
+            <a:off x="1016000" y="5334000"/>
+            <a:ext cx="1117600" cy="203200"/>
+          </a:xfrm>
+          <a:prstGeom prst="rect">
+            <a:avLst/>
+          </a:prstGeom>
+          <a:noFill/>
+        </p:spPr>
+        <p:txBody>
+          <a:bodyPr vert="horz" wrap="square" lIns="0" tIns="0" rIns="0" bIns="0" rtlCol="0">
+            <a:noAutofit/>
+          </a:bodyPr>
+          <a:lstStyle/>
+          <a:p>
+            <a:pPr algn="ctr"/>
+            <a:r>
+              <a:rPr lang="en-SG" sz="1200">
+                <a:solidFill>
+                  <a:srgbClr val="F7FAFD"/>
+                </a:solidFill>
+                <a:latin typeface="Segoe UI" panose="020B0502040204020203" pitchFamily="34" charset="0"/>
+              </a:rPr>
+              <a:t>13 events</a:t>
+            </a:r>
+          </a:p>
+        </p:txBody>
+      </p:sp>
+      <p:sp>
+        <p:nvSpPr>
+          <p:cNvPr id="29" name="TextBox 28">
+            <a:extLst>
+              <a:ext uri="{FF2B5EF4-FFF2-40B4-BE49-F238E27FC236}">
+                <a16:creationId xmlns:a16="http://schemas.microsoft.com/office/drawing/2014/main" id="{7B2E41F9-C779-93B6-29CB-AF8F5945A3E8}"/>
+              </a:ext>
+            </a:extLst>
+          </p:cNvPr>
+          <p:cNvSpPr txBox="1"/>
+          <p:nvPr/>
+        </p:nvSpPr>
+        <p:spPr>
+          <a:xfrm>
+            <a:off x="2159000" y="5105400"/>
+            <a:ext cx="1117600" cy="203200"/>
+          </a:xfrm>
+          <a:prstGeom prst="rect">
+            <a:avLst/>
+          </a:prstGeom>
+          <a:noFill/>
+        </p:spPr>
+        <p:txBody>
+          <a:bodyPr vert="horz" wrap="square" lIns="0" tIns="0" rIns="0" bIns="0" rtlCol="0">
+            <a:noAutofit/>
+          </a:bodyPr>
+          <a:lstStyle/>
+          <a:p>
+            <a:pPr algn="ctr"/>
+            <a:r>
+              <a:rPr lang="en-SG" sz="1200">
+                <a:solidFill>
+                  <a:srgbClr val="93ABC6"/>
+                </a:solidFill>
+                <a:latin typeface="Segoe UI" panose="020B0502040204020203" pitchFamily="34" charset="0"/>
+              </a:rPr>
+              <a:t>After run 1</a:t>
+            </a:r>
+          </a:p>
+        </p:txBody>
+      </p:sp>
+      <p:sp>
+        <p:nvSpPr>
+          <p:cNvPr id="30" name="TextBox 29">
+            <a:extLst>
+              <a:ext uri="{FF2B5EF4-FFF2-40B4-BE49-F238E27FC236}">
+                <a16:creationId xmlns:a16="http://schemas.microsoft.com/office/drawing/2014/main" id="{5A6B116B-FD93-9E84-2994-5384AF2B8B49}"/>
+              </a:ext>
+            </a:extLst>
+          </p:cNvPr>
+          <p:cNvSpPr txBox="1"/>
+          <p:nvPr/>
+        </p:nvSpPr>
+        <p:spPr>
+          <a:xfrm>
+            <a:off x="2159000" y="5334000"/>
+            <a:ext cx="1117600" cy="203200"/>
+          </a:xfrm>
+          <a:prstGeom prst="rect">
+            <a:avLst/>
+          </a:prstGeom>
+          <a:noFill/>
+        </p:spPr>
+        <p:txBody>
+          <a:bodyPr vert="horz" wrap="square" lIns="0" tIns="0" rIns="0" bIns="0" rtlCol="0">
+            <a:noAutofit/>
+          </a:bodyPr>
+          <a:lstStyle/>
+          <a:p>
+            <a:pPr algn="ctr"/>
+            <a:r>
+              <a:rPr lang="en-SG" sz="1200">
+                <a:solidFill>
+                  <a:srgbClr val="F7FAFD"/>
+                </a:solidFill>
+                <a:latin typeface="Segoe UI" panose="020B0502040204020203" pitchFamily="34" charset="0"/>
+              </a:rPr>
+              <a:t>15 events</a:t>
+            </a:r>
+          </a:p>
+        </p:txBody>
+      </p:sp>
+      <p:sp>
+        <p:nvSpPr>
+          <p:cNvPr id="31" name="TextBox 30">
+            <a:extLst>
+              <a:ext uri="{FF2B5EF4-FFF2-40B4-BE49-F238E27FC236}">
+                <a16:creationId xmlns:a16="http://schemas.microsoft.com/office/drawing/2014/main" id="{72B38BEC-DFB7-906B-EA45-554B787F9C6F}"/>
+              </a:ext>
+            </a:extLst>
+          </p:cNvPr>
+          <p:cNvSpPr txBox="1"/>
+          <p:nvPr/>
+        </p:nvSpPr>
+        <p:spPr>
+          <a:xfrm>
+            <a:off x="3302000" y="5105400"/>
+            <a:ext cx="1117600" cy="203200"/>
+          </a:xfrm>
+          <a:prstGeom prst="rect">
+            <a:avLst/>
+          </a:prstGeom>
+          <a:noFill/>
+        </p:spPr>
+        <p:txBody>
+          <a:bodyPr vert="horz" wrap="square" lIns="0" tIns="0" rIns="0" bIns="0" rtlCol="0">
+            <a:noAutofit/>
+          </a:bodyPr>
+          <a:lstStyle/>
+          <a:p>
+            <a:pPr algn="ctr"/>
+            <a:r>
+              <a:rPr lang="en-SG" sz="1200">
+                <a:solidFill>
+                  <a:srgbClr val="93ABC6"/>
+                </a:solidFill>
+                <a:latin typeface="Segoe UI" panose="020B0502040204020203" pitchFamily="34" charset="0"/>
+              </a:rPr>
+              <a:t>After run 2</a:t>
+            </a:r>
+          </a:p>
+        </p:txBody>
+      </p:sp>
+      <p:sp>
+        <p:nvSpPr>
+          <p:cNvPr id="32" name="TextBox 31">
+            <a:extLst>
+              <a:ext uri="{FF2B5EF4-FFF2-40B4-BE49-F238E27FC236}">
+                <a16:creationId xmlns:a16="http://schemas.microsoft.com/office/drawing/2014/main" id="{7E855DF7-A303-EB91-BAE2-C70541969FFA}"/>
+              </a:ext>
+            </a:extLst>
+          </p:cNvPr>
+          <p:cNvSpPr txBox="1"/>
+          <p:nvPr/>
+        </p:nvSpPr>
+        <p:spPr>
+          <a:xfrm>
+            <a:off x="3302000" y="5334000"/>
+            <a:ext cx="1117600" cy="203200"/>
+          </a:xfrm>
+          <a:prstGeom prst="rect">
+            <a:avLst/>
+          </a:prstGeom>
+          <a:noFill/>
+        </p:spPr>
+        <p:txBody>
+          <a:bodyPr vert="horz" wrap="square" lIns="0" tIns="0" rIns="0" bIns="0" rtlCol="0">
+            <a:noAutofit/>
+          </a:bodyPr>
+          <a:lstStyle/>
+          <a:p>
+            <a:pPr algn="ctr"/>
+            <a:r>
+              <a:rPr lang="en-SG" sz="1200">
+                <a:solidFill>
+                  <a:srgbClr val="F7FAFD"/>
+                </a:solidFill>
+                <a:latin typeface="Segoe UI" panose="020B0502040204020203" pitchFamily="34" charset="0"/>
+              </a:rPr>
+              <a:t>17 events</a:t>
+            </a:r>
+          </a:p>
+        </p:txBody>
+      </p:sp>
+      <p:sp>
+        <p:nvSpPr>
+          <p:cNvPr id="33" name="TextBox 32">
+            <a:extLst>
+              <a:ext uri="{FF2B5EF4-FFF2-40B4-BE49-F238E27FC236}">
+                <a16:creationId xmlns:a16="http://schemas.microsoft.com/office/drawing/2014/main" id="{576E58B0-1EA3-53AD-9C8C-32EEA0B8D2A4}"/>
+              </a:ext>
+            </a:extLst>
+          </p:cNvPr>
+          <p:cNvSpPr txBox="1"/>
+          <p:nvPr/>
+        </p:nvSpPr>
+        <p:spPr>
+          <a:xfrm>
+            <a:off x="4445000" y="5105400"/>
+            <a:ext cx="1117600" cy="203200"/>
+          </a:xfrm>
+          <a:prstGeom prst="rect">
+            <a:avLst/>
+          </a:prstGeom>
+          <a:noFill/>
+        </p:spPr>
+        <p:txBody>
+          <a:bodyPr vert="horz" wrap="square" lIns="0" tIns="0" rIns="0" bIns="0" rtlCol="0">
+            <a:noAutofit/>
+          </a:bodyPr>
+          <a:lstStyle/>
+          <a:p>
+            <a:pPr algn="ctr"/>
+            <a:r>
+              <a:rPr lang="en-SG" sz="1200">
+                <a:solidFill>
+                  <a:srgbClr val="93ABC6"/>
+                </a:solidFill>
+                <a:latin typeface="Segoe UI" panose="020B0502040204020203" pitchFamily="34" charset="0"/>
+              </a:rPr>
+              <a:t>After run 3</a:t>
+            </a:r>
+          </a:p>
+        </p:txBody>
+      </p:sp>
+      <p:sp>
+        <p:nvSpPr>
+          <p:cNvPr id="34" name="TextBox 33">
+            <a:extLst>
+              <a:ext uri="{FF2B5EF4-FFF2-40B4-BE49-F238E27FC236}">
+                <a16:creationId xmlns:a16="http://schemas.microsoft.com/office/drawing/2014/main" id="{F4719E3A-2032-C4E5-64E8-82D894128FEE}"/>
+              </a:ext>
+            </a:extLst>
+          </p:cNvPr>
+          <p:cNvSpPr txBox="1"/>
+          <p:nvPr/>
+        </p:nvSpPr>
+        <p:spPr>
+          <a:xfrm>
+            <a:off x="4445000" y="5334000"/>
+            <a:ext cx="1117600" cy="203200"/>
+          </a:xfrm>
+          <a:prstGeom prst="rect">
+            <a:avLst/>
+          </a:prstGeom>
+          <a:noFill/>
+        </p:spPr>
+        <p:txBody>
+          <a:bodyPr vert="horz" wrap="square" lIns="0" tIns="0" rIns="0" bIns="0" rtlCol="0">
+            <a:noAutofit/>
+          </a:bodyPr>
+          <a:lstStyle/>
+          <a:p>
+            <a:pPr algn="ctr"/>
+            <a:r>
+              <a:rPr lang="en-SG" sz="1200">
+                <a:solidFill>
+                  <a:srgbClr val="F7FAFD"/>
+                </a:solidFill>
+                <a:latin typeface="Segoe UI" panose="020B0502040204020203" pitchFamily="34" charset="0"/>
+              </a:rPr>
+              <a:t>19 events</a:t>
+            </a:r>
+          </a:p>
+        </p:txBody>
+      </p:sp>
+      <p:sp>
+        <p:nvSpPr>
+          <p:cNvPr id="35" name="TextBox 34">
+            <a:extLst>
+              <a:ext uri="{FF2B5EF4-FFF2-40B4-BE49-F238E27FC236}">
+                <a16:creationId xmlns:a16="http://schemas.microsoft.com/office/drawing/2014/main" id="{8ED777E8-7EB2-F7AA-77E1-46F13CCD222B}"/>
+              </a:ext>
+            </a:extLst>
+          </p:cNvPr>
+          <p:cNvSpPr txBox="1"/>
+          <p:nvPr/>
+        </p:nvSpPr>
+        <p:spPr>
+          <a:xfrm>
+            <a:off x="5588000" y="5105400"/>
+            <a:ext cx="1117600" cy="203200"/>
+          </a:xfrm>
+          <a:prstGeom prst="rect">
+            <a:avLst/>
+          </a:prstGeom>
+          <a:noFill/>
+        </p:spPr>
+        <p:txBody>
+          <a:bodyPr vert="horz" wrap="square" lIns="0" tIns="0" rIns="0" bIns="0" rtlCol="0">
+            <a:noAutofit/>
+          </a:bodyPr>
+          <a:lstStyle/>
+          <a:p>
+            <a:pPr algn="ctr"/>
+            <a:r>
+              <a:rPr lang="en-SG" sz="1200">
+                <a:solidFill>
+                  <a:srgbClr val="93ABC6"/>
+                </a:solidFill>
+                <a:latin typeface="Segoe UI" panose="020B0502040204020203" pitchFamily="34" charset="0"/>
+              </a:rPr>
+              <a:t>After run 4</a:t>
+            </a:r>
+          </a:p>
+        </p:txBody>
+      </p:sp>
+      <p:sp>
+        <p:nvSpPr>
+          <p:cNvPr id="36" name="TextBox 35">
+            <a:extLst>
+              <a:ext uri="{FF2B5EF4-FFF2-40B4-BE49-F238E27FC236}">
+                <a16:creationId xmlns:a16="http://schemas.microsoft.com/office/drawing/2014/main" id="{FF43755C-FB6A-19A7-5BAF-BC41BE46D241}"/>
+              </a:ext>
+            </a:extLst>
+          </p:cNvPr>
+          <p:cNvSpPr txBox="1"/>
+          <p:nvPr/>
+        </p:nvSpPr>
+        <p:spPr>
+          <a:xfrm>
+            <a:off x="5588000" y="5334000"/>
+            <a:ext cx="1117600" cy="203200"/>
+          </a:xfrm>
+          <a:prstGeom prst="rect">
+            <a:avLst/>
+          </a:prstGeom>
+          <a:noFill/>
+        </p:spPr>
+        <p:txBody>
+          <a:bodyPr vert="horz" wrap="square" lIns="0" tIns="0" rIns="0" bIns="0" rtlCol="0">
+            <a:noAutofit/>
+          </a:bodyPr>
+          <a:lstStyle/>
+          <a:p>
+            <a:pPr algn="ctr"/>
+            <a:r>
+              <a:rPr lang="en-SG" sz="1200">
+                <a:solidFill>
+                  <a:srgbClr val="F7FAFD"/>
+                </a:solidFill>
+                <a:latin typeface="Segoe UI" panose="020B0502040204020203" pitchFamily="34" charset="0"/>
+              </a:rPr>
+              <a:t>30 events</a:t>
+            </a:r>
+          </a:p>
+        </p:txBody>
+      </p:sp>
+      <p:cxnSp>
+        <p:nvCxnSpPr>
+          <p:cNvPr id="37" name="Straight Connector 36">
+            <a:extLst>
+              <a:ext uri="{FF2B5EF4-FFF2-40B4-BE49-F238E27FC236}">
+                <a16:creationId xmlns:a16="http://schemas.microsoft.com/office/drawing/2014/main" id="{F0EA40E5-711F-DE64-C200-164C70997094}"/>
+              </a:ext>
+            </a:extLst>
+          </p:cNvPr>
+          <p:cNvCxnSpPr/>
+          <p:nvPr/>
+        </p:nvCxnSpPr>
+        <p:spPr>
+          <a:xfrm>
+            <a:off x="762000" y="5765800"/>
+            <a:ext cx="304800" cy="0"/>
+          </a:xfrm>
+          <a:prstGeom prst="line">
+            <a:avLst/>
+          </a:prstGeom>
+          <a:ln w="44450">
+            <a:solidFill>
+              <a:srgbClr val="B98FFF"/>
+            </a:solidFill>
+          </a:ln>
+        </p:spPr>
+        <p:style>
+          <a:lnRef idx="2">
+            <a:schemeClr val="accent1"/>
+          </a:lnRef>
+          <a:fillRef idx="0">
+            <a:schemeClr val="accent1"/>
+          </a:fillRef>
+          <a:effectRef idx="1">
+            <a:schemeClr val="accent1"/>
+          </a:effectRef>
+          <a:fontRef idx="minor">
+            <a:schemeClr val="tx1"/>
+          </a:fontRef>
+        </p:style>
+      </p:cxnSp>
+      <p:sp>
+        <p:nvSpPr>
+          <p:cNvPr id="38" name="TextBox 37">
+            <a:extLst>
+              <a:ext uri="{FF2B5EF4-FFF2-40B4-BE49-F238E27FC236}">
+                <a16:creationId xmlns:a16="http://schemas.microsoft.com/office/drawing/2014/main" id="{D3806B23-EFBD-99E5-B567-98A013458A11}"/>
+              </a:ext>
+            </a:extLst>
+          </p:cNvPr>
+          <p:cNvSpPr txBox="1"/>
+          <p:nvPr/>
+        </p:nvSpPr>
+        <p:spPr>
+          <a:xfrm>
+            <a:off x="1168400" y="5664200"/>
+            <a:ext cx="1143000" cy="203200"/>
+          </a:xfrm>
+          <a:prstGeom prst="rect">
+            <a:avLst/>
+          </a:prstGeom>
+          <a:noFill/>
+        </p:spPr>
+        <p:txBody>
+          <a:bodyPr vert="horz" wrap="square" lIns="0" tIns="0" rIns="0" bIns="0" rtlCol="0">
+            <a:noAutofit/>
+          </a:bodyPr>
+          <a:lstStyle/>
+          <a:p>
+            <a:r>
+              <a:rPr lang="en-SG" sz="1200">
+                <a:solidFill>
+                  <a:srgbClr val="E1EAF4"/>
+                </a:solidFill>
+                <a:latin typeface="Segoe UI" panose="020B0502040204020203" pitchFamily="34" charset="0"/>
+              </a:rPr>
+              <a:t>Estimate</a:t>
+            </a:r>
+          </a:p>
+        </p:txBody>
+      </p:sp>
+      <p:sp>
+        <p:nvSpPr>
+          <p:cNvPr id="39" name="Rectangle 38">
+            <a:extLst>
+              <a:ext uri="{FF2B5EF4-FFF2-40B4-BE49-F238E27FC236}">
+                <a16:creationId xmlns:a16="http://schemas.microsoft.com/office/drawing/2014/main" id="{8D57915F-3D32-5011-314F-6958EE54EE5B}"/>
+              </a:ext>
+            </a:extLst>
+          </p:cNvPr>
+          <p:cNvSpPr/>
+          <p:nvPr/>
+        </p:nvSpPr>
+        <p:spPr>
+          <a:xfrm>
+            <a:off x="2413000" y="5676900"/>
+            <a:ext cx="304800" cy="177800"/>
+          </a:xfrm>
+          <a:prstGeom prst="rect">
+            <a:avLst/>
+          </a:prstGeom>
+          <a:solidFill>
+            <a:srgbClr val="3A2A6B"/>
+          </a:solidFill>
+          <a:ln w="19050" cap="flat" cmpd="sng" algn="ctr">
+            <a:noFill/>
+            <a:prstDash val="solid"/>
+            <a:miter lim="800000"/>
+          </a:ln>
+          <a:effectLst/>
+          <a:extLst>
+            <a:ext uri="{91240B29-F687-4F45-9708-019B960494DF}">
+              <a14:hiddenLine xmlns:a14="http://schemas.microsoft.com/office/drawing/2010/main" w="19050" cap="flat" cmpd="sng" algn="ctr">
+                <a:solidFill>
+                  <a:schemeClr val="accent1">
+                    <a:shade val="15000"/>
+                  </a:schemeClr>
+                </a:solidFill>
+                <a:prstDash val="solid"/>
+                <a:miter lim="800000"/>
+              </a14:hiddenLine>
+            </a:ext>
+          </a:extLst>
+        </p:spPr>
+        <p:style>
+          <a:lnRef idx="2">
+            <a:schemeClr val="accent1">
+              <a:shade val="15000"/>
+            </a:schemeClr>
+          </a:lnRef>
+          <a:fillRef idx="1">
+            <a:schemeClr val="accent1"/>
+          </a:fillRef>
+          <a:effectRef idx="0">
+            <a:schemeClr val="accent1"/>
+          </a:effectRef>
+          <a:fontRef idx="minor">
+            <a:schemeClr val="lt1"/>
+          </a:fontRef>
+        </p:style>
+        <p:txBody>
+          <a:bodyPr rtlCol="0" anchor="ctr"/>
+          <a:lstStyle/>
+          <a:p>
+            <a:pPr algn="ctr"/>
+            <a:endParaRPr lang="en-SG"/>
+          </a:p>
+        </p:txBody>
+      </p:sp>
+      <p:sp>
+        <p:nvSpPr>
+          <p:cNvPr id="40" name="TextBox 39">
+            <a:extLst>
+              <a:ext uri="{FF2B5EF4-FFF2-40B4-BE49-F238E27FC236}">
+                <a16:creationId xmlns:a16="http://schemas.microsoft.com/office/drawing/2014/main" id="{2BCFFEB0-9F58-10C1-5A70-E1CC0904457A}"/>
+              </a:ext>
+            </a:extLst>
+          </p:cNvPr>
+          <p:cNvSpPr txBox="1"/>
+          <p:nvPr/>
+        </p:nvSpPr>
+        <p:spPr>
+          <a:xfrm>
+            <a:off x="2819400" y="5664200"/>
+            <a:ext cx="3810000" cy="203200"/>
+          </a:xfrm>
+          <a:prstGeom prst="rect">
+            <a:avLst/>
+          </a:prstGeom>
+          <a:noFill/>
+        </p:spPr>
+        <p:txBody>
+          <a:bodyPr vert="horz" wrap="square" lIns="0" tIns="0" rIns="0" bIns="0" rtlCol="0">
+            <a:noAutofit/>
+          </a:bodyPr>
+          <a:lstStyle/>
+          <a:p>
+            <a:r>
+              <a:rPr lang="en-SG" sz="1200">
+                <a:solidFill>
+                  <a:srgbClr val="E1EAF4"/>
+                </a:solidFill>
+                <a:latin typeface="Segoe UI" panose="020B0502040204020203" pitchFamily="34" charset="0"/>
+              </a:rPr>
+              <a:t>Range of one standard deviation</a:t>
+            </a:r>
+          </a:p>
+        </p:txBody>
+      </p:sp>
+      <p:sp>
+        <p:nvSpPr>
+          <p:cNvPr id="41" name="TextBox 40">
+            <a:extLst>
+              <a:ext uri="{FF2B5EF4-FFF2-40B4-BE49-F238E27FC236}">
+                <a16:creationId xmlns:a16="http://schemas.microsoft.com/office/drawing/2014/main" id="{1C7FC6B9-B192-7A60-3884-4435661ABF59}"/>
+              </a:ext>
+            </a:extLst>
+          </p:cNvPr>
+          <p:cNvSpPr txBox="1"/>
+          <p:nvPr/>
+        </p:nvSpPr>
+        <p:spPr>
+          <a:xfrm>
+            <a:off x="7112000" y="2133600"/>
+            <a:ext cx="4470400" cy="330200"/>
+          </a:xfrm>
+          <a:prstGeom prst="rect">
+            <a:avLst/>
+          </a:prstGeom>
+          <a:noFill/>
+        </p:spPr>
+        <p:txBody>
+          <a:bodyPr vert="horz" wrap="square" lIns="0" tIns="0" rIns="0" bIns="0" rtlCol="0">
+            <a:noAutofit/>
+          </a:bodyPr>
+          <a:lstStyle/>
+          <a:p>
+            <a:r>
+              <a:rPr lang="en-SG" b="1">
+                <a:solidFill>
+                  <a:srgbClr val="F7FAFD"/>
+                </a:solidFill>
+                <a:latin typeface="Segoe UI" panose="020B0502040204020203" pitchFamily="34" charset="0"/>
+              </a:rPr>
+              <a:t>A sharper picture</a:t>
+            </a:r>
+          </a:p>
+        </p:txBody>
+      </p:sp>
+      <p:sp>
+        <p:nvSpPr>
+          <p:cNvPr id="42" name="TextBox 41">
+            <a:extLst>
+              <a:ext uri="{FF2B5EF4-FFF2-40B4-BE49-F238E27FC236}">
+                <a16:creationId xmlns:a16="http://schemas.microsoft.com/office/drawing/2014/main" id="{120F2C0F-9675-4D01-C09D-1E117913A873}"/>
+              </a:ext>
+            </a:extLst>
+          </p:cNvPr>
+          <p:cNvSpPr txBox="1"/>
+          <p:nvPr/>
+        </p:nvSpPr>
+        <p:spPr>
+          <a:xfrm>
+            <a:off x="7112000" y="2489200"/>
+            <a:ext cx="4470400" cy="812800"/>
+          </a:xfrm>
+          <a:prstGeom prst="rect">
+            <a:avLst/>
+          </a:prstGeom>
+          <a:noFill/>
+        </p:spPr>
+        <p:txBody>
+          <a:bodyPr vert="horz" wrap="square" lIns="0" tIns="0" rIns="0" bIns="0" rtlCol="0">
+            <a:noAutofit/>
+          </a:bodyPr>
+          <a:lstStyle/>
+          <a:p>
+            <a:r>
+              <a:rPr lang="en-SG" sz="1400">
+                <a:solidFill>
+                  <a:srgbClr val="E1EAF4"/>
+                </a:solidFill>
+                <a:latin typeface="Segoe UI" panose="020B0502040204020203" pitchFamily="34" charset="0"/>
+              </a:rPr>
+              <a:t>Each event adds to the estimate. The range around Ben’s hail discipline narrows from ±0.11 to ±0.08 as the evidence grows.</a:t>
+            </a:r>
+          </a:p>
+        </p:txBody>
+      </p:sp>
+      <p:sp>
+        <p:nvSpPr>
+          <p:cNvPr id="43" name="TextBox 42">
+            <a:extLst>
+              <a:ext uri="{FF2B5EF4-FFF2-40B4-BE49-F238E27FC236}">
+                <a16:creationId xmlns:a16="http://schemas.microsoft.com/office/drawing/2014/main" id="{CA3F7C8F-FB31-382C-F413-902E8E394839}"/>
+              </a:ext>
+            </a:extLst>
+          </p:cNvPr>
+          <p:cNvSpPr txBox="1"/>
+          <p:nvPr/>
+        </p:nvSpPr>
+        <p:spPr>
+          <a:xfrm>
+            <a:off x="7112000" y="3352800"/>
+            <a:ext cx="4470400" cy="330200"/>
+          </a:xfrm>
+          <a:prstGeom prst="rect">
+            <a:avLst/>
+          </a:prstGeom>
+          <a:noFill/>
+        </p:spPr>
+        <p:txBody>
+          <a:bodyPr vert="horz" wrap="square" lIns="0" tIns="0" rIns="0" bIns="0" rtlCol="0">
+            <a:noAutofit/>
+          </a:bodyPr>
+          <a:lstStyle/>
+          <a:p>
+            <a:r>
+              <a:rPr lang="en-SG" b="1">
+                <a:solidFill>
+                  <a:srgbClr val="F7FAFD"/>
+                </a:solidFill>
+                <a:latin typeface="Segoe UI" panose="020B0502040204020203" pitchFamily="34" charset="0"/>
+              </a:rPr>
+              <a:t>Targets that hold up</a:t>
+            </a:r>
+          </a:p>
+        </p:txBody>
+      </p:sp>
+      <p:sp>
+        <p:nvSpPr>
+          <p:cNvPr id="44" name="TextBox 43">
+            <a:extLst>
+              <a:ext uri="{FF2B5EF4-FFF2-40B4-BE49-F238E27FC236}">
+                <a16:creationId xmlns:a16="http://schemas.microsoft.com/office/drawing/2014/main" id="{E968D6C9-6B24-21D9-66F9-791CA9451F35}"/>
+              </a:ext>
+            </a:extLst>
+          </p:cNvPr>
+          <p:cNvSpPr txBox="1"/>
+          <p:nvPr/>
+        </p:nvSpPr>
+        <p:spPr>
+          <a:xfrm>
+            <a:off x="7112000" y="3708400"/>
+            <a:ext cx="4470400" cy="812800"/>
+          </a:xfrm>
+          <a:prstGeom prst="rect">
+            <a:avLst/>
+          </a:prstGeom>
+          <a:noFill/>
+        </p:spPr>
+        <p:txBody>
+          <a:bodyPr vert="horz" wrap="square" lIns="0" tIns="0" rIns="0" bIns="0" rtlCol="0">
+            <a:noAutofit/>
+          </a:bodyPr>
+          <a:lstStyle/>
+          <a:p>
+            <a:r>
+              <a:rPr lang="en-SG" sz="1400">
+                <a:solidFill>
+                  <a:srgbClr val="E1EAF4"/>
+                </a:solidFill>
+                <a:latin typeface="Segoe UI" panose="020B0502040204020203" pitchFamily="34" charset="0"/>
+              </a:rPr>
+              <a:t>A competency counts only with at least 8 events. More sessions turn “no evidence yet” into a real target.</a:t>
+            </a:r>
+          </a:p>
+        </p:txBody>
+      </p:sp>
+      <p:sp>
+        <p:nvSpPr>
+          <p:cNvPr id="45" name="TextBox 44">
+            <a:extLst>
+              <a:ext uri="{FF2B5EF4-FFF2-40B4-BE49-F238E27FC236}">
+                <a16:creationId xmlns:a16="http://schemas.microsoft.com/office/drawing/2014/main" id="{D6B100CA-E5F2-D8B5-8B7C-A95DD67FD50D}"/>
+              </a:ext>
+            </a:extLst>
+          </p:cNvPr>
+          <p:cNvSpPr txBox="1"/>
+          <p:nvPr/>
+        </p:nvSpPr>
+        <p:spPr>
+          <a:xfrm>
+            <a:off x="7112000" y="4572000"/>
+            <a:ext cx="4470400" cy="330200"/>
+          </a:xfrm>
+          <a:prstGeom prst="rect">
+            <a:avLst/>
+          </a:prstGeom>
+          <a:noFill/>
+        </p:spPr>
+        <p:txBody>
+          <a:bodyPr vert="horz" wrap="square" lIns="0" tIns="0" rIns="0" bIns="0" rtlCol="0">
+            <a:noAutofit/>
+          </a:bodyPr>
+          <a:lstStyle/>
+          <a:p>
+            <a:r>
+              <a:rPr lang="en-SG" b="1">
+                <a:solidFill>
+                  <a:srgbClr val="F7FAFD"/>
+                </a:solidFill>
+                <a:latin typeface="Segoe UI" panose="020B0502040204020203" pitchFamily="34" charset="0"/>
+              </a:rPr>
+              <a:t>Truer AI partners</a:t>
+            </a:r>
+          </a:p>
+        </p:txBody>
+      </p:sp>
+      <p:sp>
+        <p:nvSpPr>
+          <p:cNvPr id="46" name="TextBox 45">
+            <a:extLst>
+              <a:ext uri="{FF2B5EF4-FFF2-40B4-BE49-F238E27FC236}">
+                <a16:creationId xmlns:a16="http://schemas.microsoft.com/office/drawing/2014/main" id="{3B8AD1BB-059F-3BE2-8213-0A34B070D960}"/>
+              </a:ext>
+            </a:extLst>
+          </p:cNvPr>
+          <p:cNvSpPr txBox="1"/>
+          <p:nvPr/>
+        </p:nvSpPr>
+        <p:spPr>
+          <a:xfrm>
+            <a:off x="7112000" y="4927600"/>
+            <a:ext cx="4470400" cy="812800"/>
+          </a:xfrm>
+          <a:prstGeom prst="rect">
+            <a:avLst/>
+          </a:prstGeom>
+          <a:noFill/>
+        </p:spPr>
+        <p:txBody>
+          <a:bodyPr vert="horz" wrap="square" lIns="0" tIns="0" rIns="0" bIns="0" rtlCol="0">
+            <a:noAutofit/>
+          </a:bodyPr>
+          <a:lstStyle/>
+          <a:p>
+            <a:r>
+              <a:rPr lang="en-SG" sz="1400">
+                <a:solidFill>
+                  <a:srgbClr val="E1EAF4"/>
+                </a:solidFill>
+                <a:latin typeface="Segoe UI" panose="020B0502040204020203" pitchFamily="34" charset="0"/>
+              </a:rPr>
+              <a:t>A partner seat is played from a trainee’s own past runs, so it gets more lifelike as runs accumulate.</a:t>
+            </a:r>
+          </a:p>
+        </p:txBody>
+      </p:sp>
+      <p:sp>
+        <p:nvSpPr>
+          <p:cNvPr id="47" name="TextBox 46">
+            <a:extLst>
+              <a:ext uri="{FF2B5EF4-FFF2-40B4-BE49-F238E27FC236}">
+                <a16:creationId xmlns:a16="http://schemas.microsoft.com/office/drawing/2014/main" id="{B126AFE6-EE70-0E5E-9CBC-CC78CDFDC5A9}"/>
+              </a:ext>
+            </a:extLst>
+          </p:cNvPr>
+          <p:cNvSpPr txBox="1"/>
+          <p:nvPr/>
+        </p:nvSpPr>
+        <p:spPr>
+          <a:xfrm>
+            <a:off x="7112000" y="5816600"/>
+            <a:ext cx="4470400" cy="431800"/>
+          </a:xfrm>
+          <a:prstGeom prst="rect">
+            <a:avLst/>
+          </a:prstGeom>
+          <a:noFill/>
+        </p:spPr>
+        <p:txBody>
+          <a:bodyPr vert="horz" wrap="square" lIns="0" tIns="0" rIns="0" bIns="0" rtlCol="0">
+            <a:noAutofit/>
+          </a:bodyPr>
+          <a:lstStyle/>
+          <a:p>
+            <a:r>
+              <a:rPr lang="en-SG" sz="1400">
+                <a:solidFill>
+                  <a:srgbClr val="FFE4C7"/>
+                </a:solidFill>
+                <a:latin typeface="Segoe UI" panose="020B0502040204020203" pitchFamily="34" charset="0"/>
+              </a:rPr>
+              <a:t>Planned, not built: the policy learns which adjustments work.</a:t>
+            </a:r>
+          </a:p>
+        </p:txBody>
+      </p:sp>
+      <p:sp>
+        <p:nvSpPr>
+          <p:cNvPr id="48" name="TextBox 47">
+            <a:extLst>
+              <a:ext uri="{FF2B5EF4-FFF2-40B4-BE49-F238E27FC236}">
+                <a16:creationId xmlns:a16="http://schemas.microsoft.com/office/drawing/2014/main" id="{741068C6-727E-7B57-833B-021530A76C52}"/>
+              </a:ext>
+            </a:extLst>
+          </p:cNvPr>
+          <p:cNvSpPr txBox="1"/>
+          <p:nvPr/>
+        </p:nvSpPr>
+        <p:spPr>
+          <a:xfrm>
+            <a:off x="609600" y="6400800"/>
+            <a:ext cx="8890000" cy="228600"/>
+          </a:xfrm>
+          <a:prstGeom prst="rect">
+            <a:avLst/>
+          </a:prstGeom>
+          <a:noFill/>
+        </p:spPr>
+        <p:txBody>
+          <a:bodyPr vert="horz" wrap="square" lIns="0" tIns="0" rIns="0" bIns="0" rtlCol="0">
+            <a:noAutofit/>
+          </a:bodyPr>
+          <a:lstStyle/>
+          <a:p>
+            <a:r>
+              <a:rPr lang="en-SG" sz="1200">
+                <a:solidFill>
+                  <a:srgbClr val="93ABC6"/>
+                </a:solidFill>
+                <a:latin typeface="Consolas" panose="020B0609020204030204" pitchFamily="49" charset="0"/>
+              </a:rPr>
+              <a:t>SEEDED HISTORY FOR ONE SYNTHETIC TRAINEE</a:t>
+            </a:r>
+          </a:p>
+        </p:txBody>
+      </p:sp>
+      <p:sp>
+        <p:nvSpPr>
+          <p:cNvPr id="49" name="TextBox 48">
+            <a:extLst>
+              <a:ext uri="{FF2B5EF4-FFF2-40B4-BE49-F238E27FC236}">
+                <a16:creationId xmlns:a16="http://schemas.microsoft.com/office/drawing/2014/main" id="{D0D8E76C-7862-5220-F5E6-E46D6B737079}"/>
+              </a:ext>
+            </a:extLst>
+          </p:cNvPr>
+          <p:cNvSpPr txBox="1"/>
+          <p:nvPr/>
+        </p:nvSpPr>
+        <p:spPr>
+          <a:xfrm>
+            <a:off x="10312400" y="6400800"/>
+            <a:ext cx="1270000" cy="228600"/>
+          </a:xfrm>
+          <a:prstGeom prst="rect">
+            <a:avLst/>
+          </a:prstGeom>
+          <a:noFill/>
+        </p:spPr>
+        <p:txBody>
+          <a:bodyPr vert="horz" wrap="square" lIns="0" tIns="0" rIns="0" bIns="0" rtlCol="0">
+            <a:noAutofit/>
+          </a:bodyPr>
+          <a:lstStyle/>
+          <a:p>
             <a:pPr algn="r"/>
             <a:r>
               <a:rPr lang="en-SG" sz="1200">
@@ -14002,7 +16976,7 @@
     </p:spTree>
     <p:extLst>
       <p:ext uri="{BB962C8B-B14F-4D97-AF65-F5344CB8AC3E}">
-        <p14:creationId xmlns:p14="http://schemas.microsoft.com/office/powerpoint/2010/main" val="1773350045"/>
+        <p14:creationId xmlns:p14="http://schemas.microsoft.com/office/powerpoint/2010/main" val="3385916892"/>
       </p:ext>
     </p:extLst>
   </p:cSld>
@@ -14013,6 +16987,486 @@
 </file>
 
 <file path=ppt/slides/slide7.xml><?xml version="1.0" encoding="utf-8"?>
+<p:sld xmlns:a="http://schemas.openxmlformats.org/drawingml/2006/main" xmlns:r="http://schemas.openxmlformats.org/officeDocument/2006/relationships" xmlns:p="http://schemas.openxmlformats.org/presentationml/2006/main">
+  <p:cSld>
+    <p:bg>
+      <p:bgPr>
+        <a:solidFill>
+          <a:srgbClr val="0D1C30"/>
+        </a:solidFill>
+        <a:effectLst/>
+      </p:bgPr>
+    </p:bg>
+    <p:spTree>
+      <p:nvGrpSpPr>
+        <p:cNvPr id="1" name=""/>
+        <p:cNvGrpSpPr/>
+        <p:nvPr/>
+      </p:nvGrpSpPr>
+      <p:grpSpPr>
+        <a:xfrm>
+          <a:off x="0" y="0"/>
+          <a:ext cx="0" cy="0"/>
+          <a:chOff x="0" y="0"/>
+          <a:chExt cx="0" cy="0"/>
+        </a:xfrm>
+      </p:grpSpPr>
+      <p:sp>
+        <p:nvSpPr>
+          <p:cNvPr id="2" name="Title 1">
+            <a:extLst>
+              <a:ext uri="{FF2B5EF4-FFF2-40B4-BE49-F238E27FC236}">
+                <a16:creationId xmlns:a16="http://schemas.microsoft.com/office/drawing/2014/main" id="{A8E38D5A-7B7D-04D4-BD42-8B03B45CF451}"/>
+              </a:ext>
+            </a:extLst>
+          </p:cNvPr>
+          <p:cNvSpPr>
+            <a:spLocks noGrp="1"/>
+          </p:cNvSpPr>
+          <p:nvPr>
+            <p:ph type="title"/>
+          </p:nvPr>
+        </p:nvSpPr>
+        <p:spPr>
+          <a:xfrm>
+            <a:off x="609600" y="787400"/>
+            <a:ext cx="10972800" cy="1270000"/>
+          </a:xfrm>
+        </p:spPr>
+        <p:txBody>
+          <a:bodyPr wrap="square" lIns="0" tIns="0" rIns="0" bIns="0" anchor="t">
+            <a:noAutofit/>
+          </a:bodyPr>
+          <a:lstStyle/>
+          <a:p>
+            <a:r>
+              <a:rPr lang="en-SG" sz="3600" b="1">
+                <a:solidFill>
+                  <a:srgbClr val="F7FAFD"/>
+                </a:solidFill>
+                <a:latin typeface="Segoe UI" panose="020B0502040204020203" pitchFamily="34" charset="0"/>
+              </a:rPr>
+              <a:t>Choose the platform, seat the crew, set the limits</a:t>
+            </a:r>
+          </a:p>
+        </p:txBody>
+      </p:sp>
+      <p:sp>
+        <p:nvSpPr>
+          <p:cNvPr id="3" name="TextBox 2">
+            <a:extLst>
+              <a:ext uri="{FF2B5EF4-FFF2-40B4-BE49-F238E27FC236}">
+                <a16:creationId xmlns:a16="http://schemas.microsoft.com/office/drawing/2014/main" id="{AAB0FA5D-F96A-66F7-D00F-F5FD54074035}"/>
+              </a:ext>
+            </a:extLst>
+          </p:cNvPr>
+          <p:cNvSpPr txBox="1"/>
+          <p:nvPr/>
+        </p:nvSpPr>
+        <p:spPr>
+          <a:xfrm>
+            <a:off x="609600" y="457200"/>
+            <a:ext cx="5969000" cy="254000"/>
+          </a:xfrm>
+          <a:prstGeom prst="rect">
+            <a:avLst/>
+          </a:prstGeom>
+          <a:noFill/>
+        </p:spPr>
+        <p:txBody>
+          <a:bodyPr vert="horz" wrap="square" lIns="0" tIns="0" rIns="0" bIns="0" rtlCol="0">
+            <a:noAutofit/>
+          </a:bodyPr>
+          <a:lstStyle/>
+          <a:p>
+            <a:r>
+              <a:rPr lang="en-SG" sz="1400">
+                <a:solidFill>
+                  <a:srgbClr val="2F9DFF"/>
+                </a:solidFill>
+                <a:latin typeface="Consolas" panose="020B0609020204030204" pitchFamily="49" charset="0"/>
+              </a:rPr>
+              <a:t>ALLOCATE</a:t>
+            </a:r>
+          </a:p>
+        </p:txBody>
+      </p:sp>
+      <p:sp>
+        <p:nvSpPr>
+          <p:cNvPr id="4" name="TextBox 3">
+            <a:extLst>
+              <a:ext uri="{FF2B5EF4-FFF2-40B4-BE49-F238E27FC236}">
+                <a16:creationId xmlns:a16="http://schemas.microsoft.com/office/drawing/2014/main" id="{D8CB509C-33E7-04D3-48ED-72E60AF7BA5D}"/>
+              </a:ext>
+            </a:extLst>
+          </p:cNvPr>
+          <p:cNvSpPr txBox="1"/>
+          <p:nvPr/>
+        </p:nvSpPr>
+        <p:spPr>
+          <a:xfrm>
+            <a:off x="609600" y="2235200"/>
+            <a:ext cx="3175000" cy="330200"/>
+          </a:xfrm>
+          <a:prstGeom prst="rect">
+            <a:avLst/>
+          </a:prstGeom>
+          <a:noFill/>
+        </p:spPr>
+        <p:txBody>
+          <a:bodyPr vert="horz" wrap="square" lIns="0" tIns="0" rIns="0" bIns="0" rtlCol="0">
+            <a:noAutofit/>
+          </a:bodyPr>
+          <a:lstStyle/>
+          <a:p>
+            <a:r>
+              <a:rPr lang="en-SG" b="1">
+                <a:solidFill>
+                  <a:srgbClr val="F7FAFD"/>
+                </a:solidFill>
+                <a:latin typeface="Segoe UI" panose="020B0502040204020203" pitchFamily="34" charset="0"/>
+              </a:rPr>
+              <a:t>Six platforms</a:t>
+            </a:r>
+          </a:p>
+        </p:txBody>
+      </p:sp>
+      <p:sp>
+        <p:nvSpPr>
+          <p:cNvPr id="5" name="TextBox 4">
+            <a:extLst>
+              <a:ext uri="{FF2B5EF4-FFF2-40B4-BE49-F238E27FC236}">
+                <a16:creationId xmlns:a16="http://schemas.microsoft.com/office/drawing/2014/main" id="{12F29104-E007-8504-AA3D-CC94BA4BF219}"/>
+              </a:ext>
+            </a:extLst>
+          </p:cNvPr>
+          <p:cNvSpPr txBox="1"/>
+          <p:nvPr/>
+        </p:nvSpPr>
+        <p:spPr>
+          <a:xfrm>
+            <a:off x="609600" y="2590800"/>
+            <a:ext cx="3175000" cy="812800"/>
+          </a:xfrm>
+          <a:prstGeom prst="rect">
+            <a:avLst/>
+          </a:prstGeom>
+          <a:noFill/>
+        </p:spPr>
+        <p:txBody>
+          <a:bodyPr vert="horz" wrap="square" lIns="0" tIns="0" rIns="0" bIns="0" rtlCol="0">
+            <a:noAutofit/>
+          </a:bodyPr>
+          <a:lstStyle/>
+          <a:p>
+            <a:r>
+              <a:rPr lang="en-SG" sz="1400">
+                <a:solidFill>
+                  <a:srgbClr val="E1EAF4"/>
+                </a:solidFill>
+                <a:latin typeface="Segoe UI" panose="020B0502040204020203" pitchFamily="34" charset="0"/>
+              </a:rPr>
+              <a:t>Fighter, warship and tank, two models each, with their own seats.</a:t>
+            </a:r>
+          </a:p>
+        </p:txBody>
+      </p:sp>
+      <p:sp>
+        <p:nvSpPr>
+          <p:cNvPr id="6" name="TextBox 5">
+            <a:extLst>
+              <a:ext uri="{FF2B5EF4-FFF2-40B4-BE49-F238E27FC236}">
+                <a16:creationId xmlns:a16="http://schemas.microsoft.com/office/drawing/2014/main" id="{EC6E40C1-2898-7A04-6F4F-39197BA87EC9}"/>
+              </a:ext>
+            </a:extLst>
+          </p:cNvPr>
+          <p:cNvSpPr txBox="1"/>
+          <p:nvPr/>
+        </p:nvSpPr>
+        <p:spPr>
+          <a:xfrm>
+            <a:off x="609600" y="3581400"/>
+            <a:ext cx="3175000" cy="330200"/>
+          </a:xfrm>
+          <a:prstGeom prst="rect">
+            <a:avLst/>
+          </a:prstGeom>
+          <a:noFill/>
+        </p:spPr>
+        <p:txBody>
+          <a:bodyPr vert="horz" wrap="square" lIns="0" tIns="0" rIns="0" bIns="0" rtlCol="0">
+            <a:noAutofit/>
+          </a:bodyPr>
+          <a:lstStyle/>
+          <a:p>
+            <a:r>
+              <a:rPr lang="en-SG" b="1">
+                <a:solidFill>
+                  <a:srgbClr val="F7FAFD"/>
+                </a:solidFill>
+                <a:latin typeface="Segoe UI" panose="020B0502040204020203" pitchFamily="34" charset="0"/>
+              </a:rPr>
+              <a:t>Know the trainee</a:t>
+            </a:r>
+          </a:p>
+        </p:txBody>
+      </p:sp>
+      <p:sp>
+        <p:nvSpPr>
+          <p:cNvPr id="7" name="TextBox 6">
+            <a:extLst>
+              <a:ext uri="{FF2B5EF4-FFF2-40B4-BE49-F238E27FC236}">
+                <a16:creationId xmlns:a16="http://schemas.microsoft.com/office/drawing/2014/main" id="{CF41CE0F-D1F5-F69C-BA26-13E76DCB7B84}"/>
+              </a:ext>
+            </a:extLst>
+          </p:cNvPr>
+          <p:cNvSpPr txBox="1"/>
+          <p:nvPr/>
+        </p:nvSpPr>
+        <p:spPr>
+          <a:xfrm>
+            <a:off x="609600" y="3937000"/>
+            <a:ext cx="3175000" cy="812800"/>
+          </a:xfrm>
+          <a:prstGeom prst="rect">
+            <a:avLst/>
+          </a:prstGeom>
+          <a:noFill/>
+        </p:spPr>
+        <p:txBody>
+          <a:bodyPr vert="horz" wrap="square" lIns="0" tIns="0" rIns="0" bIns="0" rtlCol="0">
+            <a:noAutofit/>
+          </a:bodyPr>
+          <a:lstStyle/>
+          <a:p>
+            <a:r>
+              <a:rPr lang="en-SG" sz="1400">
+                <a:solidFill>
+                  <a:srgbClr val="E1EAF4"/>
+                </a:solidFill>
+                <a:latin typeface="Segoe UI" panose="020B0502040204020203" pitchFamily="34" charset="0"/>
+              </a:rPr>
+              <a:t>Competency bars and focus areas per seat, plus a private note.</a:t>
+            </a:r>
+          </a:p>
+        </p:txBody>
+      </p:sp>
+      <p:sp>
+        <p:nvSpPr>
+          <p:cNvPr id="8" name="TextBox 7">
+            <a:extLst>
+              <a:ext uri="{FF2B5EF4-FFF2-40B4-BE49-F238E27FC236}">
+                <a16:creationId xmlns:a16="http://schemas.microsoft.com/office/drawing/2014/main" id="{F3AF10E9-A7FF-21C0-CB0F-656B6D057B21}"/>
+              </a:ext>
+            </a:extLst>
+          </p:cNvPr>
+          <p:cNvSpPr txBox="1"/>
+          <p:nvPr/>
+        </p:nvSpPr>
+        <p:spPr>
+          <a:xfrm>
+            <a:off x="609600" y="4927600"/>
+            <a:ext cx="3175000" cy="330200"/>
+          </a:xfrm>
+          <a:prstGeom prst="rect">
+            <a:avLst/>
+          </a:prstGeom>
+          <a:noFill/>
+        </p:spPr>
+        <p:txBody>
+          <a:bodyPr vert="horz" wrap="square" lIns="0" tIns="0" rIns="0" bIns="0" rtlCol="0">
+            <a:noAutofit/>
+          </a:bodyPr>
+          <a:lstStyle/>
+          <a:p>
+            <a:r>
+              <a:rPr lang="en-SG" b="1">
+                <a:solidFill>
+                  <a:srgbClr val="F7FAFD"/>
+                </a:solidFill>
+                <a:latin typeface="Segoe UI" panose="020B0502040204020203" pitchFamily="34" charset="0"/>
+              </a:rPr>
+              <a:t>Practice or assess</a:t>
+            </a:r>
+          </a:p>
+        </p:txBody>
+      </p:sp>
+      <p:sp>
+        <p:nvSpPr>
+          <p:cNvPr id="9" name="TextBox 8">
+            <a:extLst>
+              <a:ext uri="{FF2B5EF4-FFF2-40B4-BE49-F238E27FC236}">
+                <a16:creationId xmlns:a16="http://schemas.microsoft.com/office/drawing/2014/main" id="{9C5C061F-D0D3-2105-3D7F-0C08BF3DDCE3}"/>
+              </a:ext>
+            </a:extLst>
+          </p:cNvPr>
+          <p:cNvSpPr txBox="1"/>
+          <p:nvPr/>
+        </p:nvSpPr>
+        <p:spPr>
+          <a:xfrm>
+            <a:off x="609600" y="5283200"/>
+            <a:ext cx="3175000" cy="812800"/>
+          </a:xfrm>
+          <a:prstGeom prst="rect">
+            <a:avLst/>
+          </a:prstGeom>
+          <a:noFill/>
+        </p:spPr>
+        <p:txBody>
+          <a:bodyPr vert="horz" wrap="square" lIns="0" tIns="0" rIns="0" bIns="0" rtlCol="0">
+            <a:noAutofit/>
+          </a:bodyPr>
+          <a:lstStyle/>
+          <a:p>
+            <a:r>
+              <a:rPr lang="en-SG" sz="1400">
+                <a:solidFill>
+                  <a:srgbClr val="E1EAF4"/>
+                </a:solidFill>
+                <a:latin typeface="Segoe UI" panose="020B0502040204020203" pitchFamily="34" charset="0"/>
+              </a:rPr>
+              <a:t>The mode badge, run length and the envelope are set before start.</a:t>
+            </a:r>
+          </a:p>
+        </p:txBody>
+      </p:sp>
+      <p:pic>
+        <p:nvPicPr>
+          <p:cNvPr id="11" name="Picture 10" descr="The trainee allocation page: warship crew seats on the left, trainee pool with competency bars on the right">
+            <a:extLst>
+              <a:ext uri="{FF2B5EF4-FFF2-40B4-BE49-F238E27FC236}">
+                <a16:creationId xmlns:a16="http://schemas.microsoft.com/office/drawing/2014/main" id="{46FE89EB-22FD-3511-52A4-569888CADBA0}"/>
+              </a:ext>
+            </a:extLst>
+          </p:cNvPr>
+          <p:cNvPicPr>
+            <a:picLocks/>
+          </p:cNvPicPr>
+          <p:nvPr/>
+        </p:nvPicPr>
+        <p:blipFill>
+          <a:blip r:embed="rId3">
+            <a:extLst>
+              <a:ext uri="{28A0092B-C50C-407E-A947-70E740481C1C}">
+                <a14:useLocalDpi xmlns:a14="http://schemas.microsoft.com/office/drawing/2010/main" val="0"/>
+              </a:ext>
+            </a:extLst>
+          </a:blip>
+          <a:stretch>
+            <a:fillRect/>
+          </a:stretch>
+        </p:blipFill>
+        <p:spPr>
+          <a:xfrm>
+            <a:off x="4089400" y="2235200"/>
+            <a:ext cx="7493000" cy="3841589"/>
+          </a:xfrm>
+          <a:prstGeom prst="rect">
+            <a:avLst/>
+          </a:prstGeom>
+          <a:ln w="9525">
+            <a:solidFill>
+              <a:srgbClr val="4A78A8"/>
+            </a:solidFill>
+          </a:ln>
+        </p:spPr>
+      </p:pic>
+      <p:sp>
+        <p:nvSpPr>
+          <p:cNvPr id="12" name="TextBox 11">
+            <a:extLst>
+              <a:ext uri="{FF2B5EF4-FFF2-40B4-BE49-F238E27FC236}">
+                <a16:creationId xmlns:a16="http://schemas.microsoft.com/office/drawing/2014/main" id="{2A40DEE6-46F1-03AA-5644-77652D63639D}"/>
+              </a:ext>
+            </a:extLst>
+          </p:cNvPr>
+          <p:cNvSpPr txBox="1"/>
+          <p:nvPr/>
+        </p:nvSpPr>
+        <p:spPr>
+          <a:xfrm>
+            <a:off x="609600" y="6400800"/>
+            <a:ext cx="8890000" cy="228600"/>
+          </a:xfrm>
+          <a:prstGeom prst="rect">
+            <a:avLst/>
+          </a:prstGeom>
+          <a:noFill/>
+        </p:spPr>
+        <p:txBody>
+          <a:bodyPr vert="horz" wrap="square" lIns="0" tIns="0" rIns="0" bIns="0" rtlCol="0">
+            <a:noAutofit/>
+          </a:bodyPr>
+          <a:lstStyle/>
+          <a:p>
+            <a:r>
+              <a:rPr lang="en-SG" sz="1200">
+                <a:solidFill>
+                  <a:srgbClr val="93ABC6"/>
+                </a:solidFill>
+                <a:latin typeface="Consolas" panose="020B0609020204030204" pitchFamily="49" charset="0"/>
+              </a:rPr>
+              <a:t>ADAPTIVE CGF TRAINER  System.__ComObject  SYNTHETIC TRAINEES</a:t>
+            </a:r>
+          </a:p>
+        </p:txBody>
+      </p:sp>
+      <p:sp>
+        <p:nvSpPr>
+          <p:cNvPr id="13" name="TextBox 12">
+            <a:extLst>
+              <a:ext uri="{FF2B5EF4-FFF2-40B4-BE49-F238E27FC236}">
+                <a16:creationId xmlns:a16="http://schemas.microsoft.com/office/drawing/2014/main" id="{3225E686-C9C5-9B7B-C248-0675C05FC675}"/>
+              </a:ext>
+            </a:extLst>
+          </p:cNvPr>
+          <p:cNvSpPr txBox="1"/>
+          <p:nvPr/>
+        </p:nvSpPr>
+        <p:spPr>
+          <a:xfrm>
+            <a:off x="10312400" y="6400800"/>
+            <a:ext cx="1270000" cy="228600"/>
+          </a:xfrm>
+          <a:prstGeom prst="rect">
+            <a:avLst/>
+          </a:prstGeom>
+          <a:noFill/>
+        </p:spPr>
+        <p:txBody>
+          <a:bodyPr vert="horz" wrap="square" lIns="0" tIns="0" rIns="0" bIns="0" rtlCol="0">
+            <a:noAutofit/>
+          </a:bodyPr>
+          <a:lstStyle/>
+          <a:p>
+            <a:pPr algn="r"/>
+            <a:r>
+              <a:rPr lang="en-SG" sz="1200">
+                <a:solidFill>
+                  <a:srgbClr val="93ABC6"/>
+                </a:solidFill>
+                <a:latin typeface="Consolas" panose="020B0609020204030204" pitchFamily="49" charset="0"/>
+              </a:rPr>
+              <a:t>07</a:t>
+            </a:r>
+          </a:p>
+        </p:txBody>
+      </p:sp>
+    </p:spTree>
+    <p:extLst>
+      <p:ext uri="{BB962C8B-B14F-4D97-AF65-F5344CB8AC3E}">
+        <p14:creationId xmlns:p14="http://schemas.microsoft.com/office/powerpoint/2010/main" val="3300804720"/>
+      </p:ext>
+    </p:extLst>
+  </p:cSld>
+  <p:clrMapOvr>
+    <a:masterClrMapping/>
+  </p:clrMapOvr>
+</p:sld>
+</file>
+
+<file path=ppt/slides/slide8.xml><?xml version="1.0" encoding="utf-8"?>
 <p:sld xmlns:a="http://schemas.openxmlformats.org/drawingml/2006/main" xmlns:r="http://schemas.openxmlformats.org/officeDocument/2006/relationships" xmlns:p="http://schemas.openxmlformats.org/presentationml/2006/main">
   <p:cSld>
     <p:bg>
@@ -14042,7 +17496,7 @@
           <p:cNvPr id="2" name="Title 1">
             <a:extLst>
               <a:ext uri="{FF2B5EF4-FFF2-40B4-BE49-F238E27FC236}">
-                <a16:creationId xmlns:a16="http://schemas.microsoft.com/office/drawing/2014/main" id="{AD197174-E026-D138-23E2-4CD5234FC2EA}"/>
+                <a16:creationId xmlns:a16="http://schemas.microsoft.com/office/drawing/2014/main" id="{7118DAAB-9747-BDDA-FF00-A60502A7B8A5}"/>
               </a:ext>
             </a:extLst>
           </p:cNvPr>
@@ -14082,7 +17536,7 @@
           <p:cNvPr id="3" name="TextBox 2">
             <a:extLst>
               <a:ext uri="{FF2B5EF4-FFF2-40B4-BE49-F238E27FC236}">
-                <a16:creationId xmlns:a16="http://schemas.microsoft.com/office/drawing/2014/main" id="{3544599F-DFBE-078F-5B3E-B7FD974DEA15}"/>
+                <a16:creationId xmlns:a16="http://schemas.microsoft.com/office/drawing/2014/main" id="{FCACC1A4-7156-1837-550B-F33C3D4ABABB}"/>
               </a:ext>
             </a:extLst>
           </p:cNvPr>
@@ -14122,7 +17576,7 @@
           <p:cNvPr id="5" name="Picture 4" descr="The runtime: a strait transit map with red, black, pirate and neutral contacts, and the contact list beside it">
             <a:extLst>
               <a:ext uri="{FF2B5EF4-FFF2-40B4-BE49-F238E27FC236}">
-                <a16:creationId xmlns:a16="http://schemas.microsoft.com/office/drawing/2014/main" id="{DD2AD0EA-1663-B0ED-FC69-B9403FF4A193}"/>
+                <a16:creationId xmlns:a16="http://schemas.microsoft.com/office/drawing/2014/main" id="{9A56ED90-2A6E-CEE9-0393-684E0F920F3D}"/>
               </a:ext>
             </a:extLst>
           </p:cNvPr>
@@ -14163,7 +17617,7 @@
           <p:cNvPr id="6" name="TextBox 5">
             <a:extLst>
               <a:ext uri="{FF2B5EF4-FFF2-40B4-BE49-F238E27FC236}">
-                <a16:creationId xmlns:a16="http://schemas.microsoft.com/office/drawing/2014/main" id="{BBA5DBAB-FF82-8893-603C-D4665210CD6C}"/>
+                <a16:creationId xmlns:a16="http://schemas.microsoft.com/office/drawing/2014/main" id="{3F6DCA43-2057-8A17-3C67-BD1358E2FD5E}"/>
               </a:ext>
             </a:extLst>
           </p:cNvPr>
@@ -14203,7 +17657,7 @@
           <p:cNvPr id="7" name="TextBox 6">
             <a:extLst>
               <a:ext uri="{FF2B5EF4-FFF2-40B4-BE49-F238E27FC236}">
-                <a16:creationId xmlns:a16="http://schemas.microsoft.com/office/drawing/2014/main" id="{A4A18EA5-9669-FD3B-18D3-C952809761EC}"/>
+                <a16:creationId xmlns:a16="http://schemas.microsoft.com/office/drawing/2014/main" id="{4C0DD05B-A895-58B5-623F-C67D5B252575}"/>
               </a:ext>
             </a:extLst>
           </p:cNvPr>
@@ -14243,7 +17697,7 @@
           <p:cNvPr id="8" name="TextBox 7">
             <a:extLst>
               <a:ext uri="{FF2B5EF4-FFF2-40B4-BE49-F238E27FC236}">
-                <a16:creationId xmlns:a16="http://schemas.microsoft.com/office/drawing/2014/main" id="{EBA116EA-395D-876C-960D-94F72E6FEFC1}"/>
+                <a16:creationId xmlns:a16="http://schemas.microsoft.com/office/drawing/2014/main" id="{E070DD24-1951-3CBC-7078-DDB320CEDAD2}"/>
               </a:ext>
             </a:extLst>
           </p:cNvPr>
@@ -14283,7 +17737,7 @@
           <p:cNvPr id="9" name="TextBox 8">
             <a:extLst>
               <a:ext uri="{FF2B5EF4-FFF2-40B4-BE49-F238E27FC236}">
-                <a16:creationId xmlns:a16="http://schemas.microsoft.com/office/drawing/2014/main" id="{26B38BC0-E680-0A93-399D-EA65E5229EDB}"/>
+                <a16:creationId xmlns:a16="http://schemas.microsoft.com/office/drawing/2014/main" id="{0E3E9DB0-83D4-100D-2CA5-BBF110796071}"/>
               </a:ext>
             </a:extLst>
           </p:cNvPr>
@@ -14323,7 +17777,7 @@
           <p:cNvPr id="10" name="TextBox 9">
             <a:extLst>
               <a:ext uri="{FF2B5EF4-FFF2-40B4-BE49-F238E27FC236}">
-                <a16:creationId xmlns:a16="http://schemas.microsoft.com/office/drawing/2014/main" id="{DBCA4152-5CAC-ACC5-513E-9EC679713337}"/>
+                <a16:creationId xmlns:a16="http://schemas.microsoft.com/office/drawing/2014/main" id="{55A3E8F0-F241-5CFD-744C-51361D3AE02E}"/>
               </a:ext>
             </a:extLst>
           </p:cNvPr>
@@ -14363,7 +17817,7 @@
           <p:cNvPr id="11" name="TextBox 10">
             <a:extLst>
               <a:ext uri="{FF2B5EF4-FFF2-40B4-BE49-F238E27FC236}">
-                <a16:creationId xmlns:a16="http://schemas.microsoft.com/office/drawing/2014/main" id="{217D6D90-A948-2ED8-182B-8EE2F54A53C2}"/>
+                <a16:creationId xmlns:a16="http://schemas.microsoft.com/office/drawing/2014/main" id="{B2D1A342-0C2D-905E-9F82-6741D48A2F02}"/>
               </a:ext>
             </a:extLst>
           </p:cNvPr>
@@ -14403,7 +17857,7 @@
           <p:cNvPr id="12" name="TextBox 11">
             <a:extLst>
               <a:ext uri="{FF2B5EF4-FFF2-40B4-BE49-F238E27FC236}">
-                <a16:creationId xmlns:a16="http://schemas.microsoft.com/office/drawing/2014/main" id="{DB12074D-12AC-5E02-4BDC-4FCEB2B3A237}"/>
+                <a16:creationId xmlns:a16="http://schemas.microsoft.com/office/drawing/2014/main" id="{80C704B2-B332-52F5-E22C-08125CBFFA1D}"/>
               </a:ext>
             </a:extLst>
           </p:cNvPr>
@@ -14427,20 +17881,14 @@
           <a:lstStyle/>
           <a:p>
             <a:r>
-              <a:rPr lang="fr-FR" sz="1200">
+              <a:rPr lang="en-SG" sz="1200">
                 <a:solidFill>
                   <a:srgbClr val="93ABC6"/>
                 </a:solidFill>
                 <a:latin typeface="Consolas" panose="020B0609020204030204" pitchFamily="49" charset="0"/>
               </a:rPr>
-              <a:t>ADAPTIVE CGF TRAINER  ·  STRAIT TRANSIT SCENARIO</a:t>
-            </a:r>
-            <a:endParaRPr lang="en-SG" sz="1200">
-              <a:solidFill>
-                <a:srgbClr val="93ABC6"/>
-              </a:solidFill>
-              <a:latin typeface="Consolas" panose="020B0609020204030204" pitchFamily="49" charset="0"/>
-            </a:endParaRPr>
+              <a:t>ADAPTIVE CGF TRAINER  System.__ComObject  STRAIT TRANSIT SCENARIO</a:t>
+            </a:r>
           </a:p>
         </p:txBody>
       </p:sp>
@@ -14449,7 +17897,7 @@
           <p:cNvPr id="13" name="TextBox 12">
             <a:extLst>
               <a:ext uri="{FF2B5EF4-FFF2-40B4-BE49-F238E27FC236}">
-                <a16:creationId xmlns:a16="http://schemas.microsoft.com/office/drawing/2014/main" id="{4EA5AEFB-30F1-6D8B-EDE6-5CDD67F4D24B}"/>
+                <a16:creationId xmlns:a16="http://schemas.microsoft.com/office/drawing/2014/main" id="{5BF695D6-DC65-0B8F-BBE0-4FF48D4335D6}"/>
               </a:ext>
             </a:extLst>
           </p:cNvPr>
@@ -14480,7 +17928,7 @@
                 </a:solidFill>
                 <a:latin typeface="Consolas" panose="020B0609020204030204" pitchFamily="49" charset="0"/>
               </a:rPr>
-              <a:t>07</a:t>
+              <a:t>08</a:t>
             </a:r>
           </a:p>
         </p:txBody>
@@ -14488,7 +17936,7 @@
     </p:spTree>
     <p:extLst>
       <p:ext uri="{BB962C8B-B14F-4D97-AF65-F5344CB8AC3E}">
-        <p14:creationId xmlns:p14="http://schemas.microsoft.com/office/powerpoint/2010/main" val="391303920"/>
+        <p14:creationId xmlns:p14="http://schemas.microsoft.com/office/powerpoint/2010/main" val="2704193734"/>
       </p:ext>
     </p:extLst>
   </p:cSld>
@@ -14498,7 +17946,7 @@
 </p:sld>
 </file>
 
-<file path=ppt/slides/slide8.xml><?xml version="1.0" encoding="utf-8"?>
+<file path=ppt/slides/slide9.xml><?xml version="1.0" encoding="utf-8"?>
 <p:sld xmlns:a="http://schemas.openxmlformats.org/drawingml/2006/main" xmlns:r="http://schemas.openxmlformats.org/officeDocument/2006/relationships" xmlns:p="http://schemas.openxmlformats.org/presentationml/2006/main">
   <p:cSld>
     <p:bg>
@@ -14528,7 +17976,7 @@
           <p:cNvPr id="2" name="Title 1">
             <a:extLst>
               <a:ext uri="{FF2B5EF4-FFF2-40B4-BE49-F238E27FC236}">
-                <a16:creationId xmlns:a16="http://schemas.microsoft.com/office/drawing/2014/main" id="{C90ABC52-69C6-CD7B-2893-21B92DE0BB9F}"/>
+                <a16:creationId xmlns:a16="http://schemas.microsoft.com/office/drawing/2014/main" id="{4C6781F0-1591-6913-9763-1CAE0C6BBB70}"/>
               </a:ext>
             </a:extLst>
           </p:cNvPr>
@@ -14568,7 +18016,7 @@
           <p:cNvPr id="3" name="TextBox 2">
             <a:extLst>
               <a:ext uri="{FF2B5EF4-FFF2-40B4-BE49-F238E27FC236}">
-                <a16:creationId xmlns:a16="http://schemas.microsoft.com/office/drawing/2014/main" id="{3B552156-5966-1DC5-5FE0-83F352563270}"/>
+                <a16:creationId xmlns:a16="http://schemas.microsoft.com/office/drawing/2014/main" id="{87B79E2E-0D6D-EF06-496D-C57342965C49}"/>
               </a:ext>
             </a:extLst>
           </p:cNvPr>
@@ -14608,7 +18056,7 @@
           <p:cNvPr id="5" name="Picture 4" descr="The reasoning panel during a run: a live raise of the ignored-warning weight from 2.2 to 2.5, with the evidence events and the reason">
             <a:extLst>
               <a:ext uri="{FF2B5EF4-FFF2-40B4-BE49-F238E27FC236}">
-                <a16:creationId xmlns:a16="http://schemas.microsoft.com/office/drawing/2014/main" id="{66BCC885-2B01-3FE7-642E-B19F63D6AC55}"/>
+                <a16:creationId xmlns:a16="http://schemas.microsoft.com/office/drawing/2014/main" id="{8B7393A8-D92A-FE95-E327-41A54BFADD65}"/>
               </a:ext>
             </a:extLst>
           </p:cNvPr>
@@ -14649,7 +18097,7 @@
           <p:cNvPr id="6" name="TextBox 5">
             <a:extLst>
               <a:ext uri="{FF2B5EF4-FFF2-40B4-BE49-F238E27FC236}">
-                <a16:creationId xmlns:a16="http://schemas.microsoft.com/office/drawing/2014/main" id="{390C34EE-9C6E-0A30-E447-99572EC4CE27}"/>
+                <a16:creationId xmlns:a16="http://schemas.microsoft.com/office/drawing/2014/main" id="{9129C602-4C61-2774-C178-8812FA8181AD}"/>
               </a:ext>
             </a:extLst>
           </p:cNvPr>
@@ -14689,7 +18137,7 @@
           <p:cNvPr id="7" name="Rectangle: Rounded Corners 6">
             <a:extLst>
               <a:ext uri="{FF2B5EF4-FFF2-40B4-BE49-F238E27FC236}">
-                <a16:creationId xmlns:a16="http://schemas.microsoft.com/office/drawing/2014/main" id="{380AA4C3-9CBA-6DC4-D090-7C6B189D8574}"/>
+                <a16:creationId xmlns:a16="http://schemas.microsoft.com/office/drawing/2014/main" id="{C897BC90-81F0-9093-EC7B-013B9A690B10}"/>
               </a:ext>
             </a:extLst>
           </p:cNvPr>
@@ -14745,7 +18193,7 @@
           <p:cNvPr id="8" name="TextBox 7">
             <a:extLst>
               <a:ext uri="{FF2B5EF4-FFF2-40B4-BE49-F238E27FC236}">
-                <a16:creationId xmlns:a16="http://schemas.microsoft.com/office/drawing/2014/main" id="{E6C38973-EDA8-3389-9EEC-A64951CCF241}"/>
+                <a16:creationId xmlns:a16="http://schemas.microsoft.com/office/drawing/2014/main" id="{A37A86B1-C122-CEB1-0F8E-D77D92437AF7}"/>
               </a:ext>
             </a:extLst>
           </p:cNvPr>
@@ -14785,7 +18233,7 @@
           <p:cNvPr id="9" name="TextBox 8">
             <a:extLst>
               <a:ext uri="{FF2B5EF4-FFF2-40B4-BE49-F238E27FC236}">
-                <a16:creationId xmlns:a16="http://schemas.microsoft.com/office/drawing/2014/main" id="{B11DAE52-2BF2-2744-D32D-0CF7E849C2D2}"/>
+                <a16:creationId xmlns:a16="http://schemas.microsoft.com/office/drawing/2014/main" id="{C88B44E4-01A5-B833-1B71-450045008609}"/>
               </a:ext>
             </a:extLst>
           </p:cNvPr>
@@ -14825,7 +18273,7 @@
           <p:cNvPr id="10" name="Rectangle: Rounded Corners 9">
             <a:extLst>
               <a:ext uri="{FF2B5EF4-FFF2-40B4-BE49-F238E27FC236}">
-                <a16:creationId xmlns:a16="http://schemas.microsoft.com/office/drawing/2014/main" id="{6AF83CD6-DE3E-4A9B-F3FF-C5E2D0659443}"/>
+                <a16:creationId xmlns:a16="http://schemas.microsoft.com/office/drawing/2014/main" id="{63125051-96E8-F35D-6F8C-3CE9913F56E6}"/>
               </a:ext>
             </a:extLst>
           </p:cNvPr>
@@ -14881,7 +18329,7 @@
           <p:cNvPr id="11" name="TextBox 10">
             <a:extLst>
               <a:ext uri="{FF2B5EF4-FFF2-40B4-BE49-F238E27FC236}">
-                <a16:creationId xmlns:a16="http://schemas.microsoft.com/office/drawing/2014/main" id="{C3069B86-7114-3188-FAE9-1ADE67837607}"/>
+                <a16:creationId xmlns:a16="http://schemas.microsoft.com/office/drawing/2014/main" id="{E6F35DB0-B882-F887-C655-2ADF24157CA4}"/>
               </a:ext>
             </a:extLst>
           </p:cNvPr>
@@ -14921,7 +18369,7 @@
           <p:cNvPr id="12" name="TextBox 11">
             <a:extLst>
               <a:ext uri="{FF2B5EF4-FFF2-40B4-BE49-F238E27FC236}">
-                <a16:creationId xmlns:a16="http://schemas.microsoft.com/office/drawing/2014/main" id="{EFE08711-3DF8-6F3A-D5F2-5A164623D0B8}"/>
+                <a16:creationId xmlns:a16="http://schemas.microsoft.com/office/drawing/2014/main" id="{EC623D41-03FF-5366-CE12-99E6C395302A}"/>
               </a:ext>
             </a:extLst>
           </p:cNvPr>
@@ -14961,7 +18409,7 @@
           <p:cNvPr id="13" name="Rectangle: Rounded Corners 12">
             <a:extLst>
               <a:ext uri="{FF2B5EF4-FFF2-40B4-BE49-F238E27FC236}">
-                <a16:creationId xmlns:a16="http://schemas.microsoft.com/office/drawing/2014/main" id="{89700891-0F6A-0F71-BFFB-BB4D9AD0C9A5}"/>
+                <a16:creationId xmlns:a16="http://schemas.microsoft.com/office/drawing/2014/main" id="{1EB8D6C8-E833-A3D2-1C78-65F81CDE36A7}"/>
               </a:ext>
             </a:extLst>
           </p:cNvPr>
@@ -15017,7 +18465,7 @@
           <p:cNvPr id="14" name="TextBox 13">
             <a:extLst>
               <a:ext uri="{FF2B5EF4-FFF2-40B4-BE49-F238E27FC236}">
-                <a16:creationId xmlns:a16="http://schemas.microsoft.com/office/drawing/2014/main" id="{971538B0-452C-E5AB-D885-501CC4222552}"/>
+                <a16:creationId xmlns:a16="http://schemas.microsoft.com/office/drawing/2014/main" id="{2D10843D-DD96-3133-B9DD-5B002C7CAB5B}"/>
               </a:ext>
             </a:extLst>
           </p:cNvPr>
@@ -15057,7 +18505,7 @@
           <p:cNvPr id="15" name="TextBox 14">
             <a:extLst>
               <a:ext uri="{FF2B5EF4-FFF2-40B4-BE49-F238E27FC236}">
-                <a16:creationId xmlns:a16="http://schemas.microsoft.com/office/drawing/2014/main" id="{007C89E6-4EB7-7882-64AD-A9E8B40F97F5}"/>
+                <a16:creationId xmlns:a16="http://schemas.microsoft.com/office/drawing/2014/main" id="{35D6C599-A532-3490-889F-86292385AE97}"/>
               </a:ext>
             </a:extLst>
           </p:cNvPr>
@@ -15097,7 +18545,7 @@
           <p:cNvPr id="16" name="TextBox 15">
             <a:extLst>
               <a:ext uri="{FF2B5EF4-FFF2-40B4-BE49-F238E27FC236}">
-                <a16:creationId xmlns:a16="http://schemas.microsoft.com/office/drawing/2014/main" id="{2CA77B9B-F01C-6BFB-2926-1976C37D1C10}"/>
+                <a16:creationId xmlns:a16="http://schemas.microsoft.com/office/drawing/2014/main" id="{4392888C-8695-F9CB-3948-08A5B7265164}"/>
               </a:ext>
             </a:extLst>
           </p:cNvPr>
@@ -15198,7 +18646,7 @@
           <p:cNvPr id="17" name="TextBox 16">
             <a:extLst>
               <a:ext uri="{FF2B5EF4-FFF2-40B4-BE49-F238E27FC236}">
-                <a16:creationId xmlns:a16="http://schemas.microsoft.com/office/drawing/2014/main" id="{A1F87BA4-12B6-CFD9-6F6B-74313B22E3DD}"/>
+                <a16:creationId xmlns:a16="http://schemas.microsoft.com/office/drawing/2014/main" id="{29721858-4819-1D96-DB62-F9307DAE8602}"/>
               </a:ext>
             </a:extLst>
           </p:cNvPr>
@@ -15228,7 +18676,7 @@
                 </a:solidFill>
                 <a:latin typeface="Consolas" panose="020B0609020204030204" pitchFamily="49" charset="0"/>
               </a:rPr>
-              <a:t>REAL ENTRY FROM THE DEMO RUN  ·  REASONING TAB</a:t>
+              <a:t>REAL ENTRY FROM THE DEMO RUN  System.__ComObject  REASONING TAB</a:t>
             </a:r>
           </a:p>
         </p:txBody>
@@ -15238,7 +18686,7 @@
           <p:cNvPr id="18" name="TextBox 17">
             <a:extLst>
               <a:ext uri="{FF2B5EF4-FFF2-40B4-BE49-F238E27FC236}">
-                <a16:creationId xmlns:a16="http://schemas.microsoft.com/office/drawing/2014/main" id="{CAC1E2E5-ECB5-C547-E1CA-495899EF1FB9}"/>
+                <a16:creationId xmlns:a16="http://schemas.microsoft.com/office/drawing/2014/main" id="{B2DB2F56-AB33-32B5-816E-24F2F3921152}"/>
               </a:ext>
             </a:extLst>
           </p:cNvPr>
@@ -15269,7 +18717,7 @@
                 </a:solidFill>
                 <a:latin typeface="Consolas" panose="020B0609020204030204" pitchFamily="49" charset="0"/>
               </a:rPr>
-              <a:t>08</a:t>
+              <a:t>09</a:t>
             </a:r>
           </a:p>
         </p:txBody>
@@ -15277,998 +18725,7 @@
     </p:spTree>
     <p:extLst>
       <p:ext uri="{BB962C8B-B14F-4D97-AF65-F5344CB8AC3E}">
-        <p14:creationId xmlns:p14="http://schemas.microsoft.com/office/powerpoint/2010/main" val="3690337145"/>
-      </p:ext>
-    </p:extLst>
-  </p:cSld>
-  <p:clrMapOvr>
-    <a:masterClrMapping/>
-  </p:clrMapOvr>
-</p:sld>
-</file>
-
-<file path=ppt/slides/slide9.xml><?xml version="1.0" encoding="utf-8"?>
-<p:sld xmlns:a="http://schemas.openxmlformats.org/drawingml/2006/main" xmlns:r="http://schemas.openxmlformats.org/officeDocument/2006/relationships" xmlns:p="http://schemas.openxmlformats.org/presentationml/2006/main">
-  <p:cSld>
-    <p:bg>
-      <p:bgPr>
-        <a:solidFill>
-          <a:srgbClr val="081421"/>
-        </a:solidFill>
-        <a:effectLst/>
-      </p:bgPr>
-    </p:bg>
-    <p:spTree>
-      <p:nvGrpSpPr>
-        <p:cNvPr id="1" name=""/>
-        <p:cNvGrpSpPr/>
-        <p:nvPr/>
-      </p:nvGrpSpPr>
-      <p:grpSpPr>
-        <a:xfrm>
-          <a:off x="0" y="0"/>
-          <a:ext cx="0" cy="0"/>
-          <a:chOff x="0" y="0"/>
-          <a:chExt cx="0" cy="0"/>
-        </a:xfrm>
-      </p:grpSpPr>
-      <p:sp>
-        <p:nvSpPr>
-          <p:cNvPr id="2" name="Title 1">
-            <a:extLst>
-              <a:ext uri="{FF2B5EF4-FFF2-40B4-BE49-F238E27FC236}">
-                <a16:creationId xmlns:a16="http://schemas.microsoft.com/office/drawing/2014/main" id="{1F70341E-3A07-3D67-9379-BB7B897320FA}"/>
-              </a:ext>
-            </a:extLst>
-          </p:cNvPr>
-          <p:cNvSpPr>
-            <a:spLocks noGrp="1"/>
-          </p:cNvSpPr>
-          <p:nvPr>
-            <p:ph type="title"/>
-          </p:nvPr>
-        </p:nvSpPr>
-        <p:spPr>
-          <a:xfrm>
-            <a:off x="609600" y="787400"/>
-            <a:ext cx="10972800" cy="762000"/>
-          </a:xfrm>
-        </p:spPr>
-        <p:txBody>
-          <a:bodyPr wrap="square" lIns="0" tIns="0" rIns="0" bIns="0" anchor="t">
-            <a:noAutofit/>
-          </a:bodyPr>
-          <a:lstStyle/>
-          <a:p>
-            <a:r>
-              <a:rPr lang="en-SG" sz="4000" b="1">
-                <a:solidFill>
-                  <a:srgbClr val="F7FAFD"/>
-                </a:solidFill>
-                <a:latin typeface="Segoe UI" panose="020B0502040204020203" pitchFamily="34" charset="0"/>
-              </a:rPr>
-              <a:t>The instructor stays in command</a:t>
-            </a:r>
-          </a:p>
-        </p:txBody>
-      </p:sp>
-      <p:sp>
-        <p:nvSpPr>
-          <p:cNvPr id="3" name="TextBox 2">
-            <a:extLst>
-              <a:ext uri="{FF2B5EF4-FFF2-40B4-BE49-F238E27FC236}">
-                <a16:creationId xmlns:a16="http://schemas.microsoft.com/office/drawing/2014/main" id="{762A29C6-E727-7F00-0617-EF0D769C547D}"/>
-              </a:ext>
-            </a:extLst>
-          </p:cNvPr>
-          <p:cNvSpPr txBox="1"/>
-          <p:nvPr/>
-        </p:nvSpPr>
-        <p:spPr>
-          <a:xfrm>
-            <a:off x="609600" y="457200"/>
-            <a:ext cx="5969000" cy="254000"/>
-          </a:xfrm>
-          <a:prstGeom prst="rect">
-            <a:avLst/>
-          </a:prstGeom>
-          <a:noFill/>
-        </p:spPr>
-        <p:txBody>
-          <a:bodyPr vert="horz" wrap="square" lIns="0" tIns="0" rIns="0" bIns="0" rtlCol="0">
-            <a:noAutofit/>
-          </a:bodyPr>
-          <a:lstStyle/>
-          <a:p>
-            <a:r>
-              <a:rPr lang="en-SG" sz="1400">
-                <a:solidFill>
-                  <a:srgbClr val="2F9DFF"/>
-                </a:solidFill>
-                <a:latin typeface="Consolas" panose="020B0609020204030204" pitchFamily="49" charset="0"/>
-              </a:rPr>
-              <a:t>CONTROL</a:t>
-            </a:r>
-          </a:p>
-        </p:txBody>
-      </p:sp>
-      <p:sp>
-        <p:nvSpPr>
-          <p:cNvPr id="4" name="Rectangle: Rounded Corners 3">
-            <a:extLst>
-              <a:ext uri="{FF2B5EF4-FFF2-40B4-BE49-F238E27FC236}">
-                <a16:creationId xmlns:a16="http://schemas.microsoft.com/office/drawing/2014/main" id="{39958F39-BDEB-21D3-04E2-CBA9F01E577A}"/>
-              </a:ext>
-            </a:extLst>
-          </p:cNvPr>
-          <p:cNvSpPr/>
-          <p:nvPr/>
-        </p:nvSpPr>
-        <p:spPr>
-          <a:xfrm>
-            <a:off x="609600" y="1905000"/>
-            <a:ext cx="5334000" cy="1955800"/>
-          </a:xfrm>
-          <a:prstGeom prst="roundRect">
-            <a:avLst>
-              <a:gd name="adj" fmla="val 6000"/>
-            </a:avLst>
-          </a:prstGeom>
-          <a:solidFill>
-            <a:srgbClr val="12243C"/>
-          </a:solidFill>
-          <a:ln w="9525">
-            <a:solidFill>
-              <a:srgbClr val="1E3653"/>
-            </a:solidFill>
-          </a:ln>
-        </p:spPr>
-        <p:style>
-          <a:lnRef idx="2">
-            <a:schemeClr val="accent1">
-              <a:shade val="15000"/>
-            </a:schemeClr>
-          </a:lnRef>
-          <a:fillRef idx="1">
-            <a:schemeClr val="accent1"/>
-          </a:fillRef>
-          <a:effectRef idx="0">
-            <a:schemeClr val="accent1"/>
-          </a:effectRef>
-          <a:fontRef idx="minor">
-            <a:schemeClr val="lt1"/>
-          </a:fontRef>
-        </p:style>
-        <p:txBody>
-          <a:bodyPr rtlCol="0" anchor="ctr"/>
-          <a:lstStyle/>
-          <a:p>
-            <a:pPr algn="ctr"/>
-            <a:endParaRPr lang="en-SG"/>
-          </a:p>
-        </p:txBody>
-      </p:sp>
-      <p:sp>
-        <p:nvSpPr>
-          <p:cNvPr id="5" name="Oval 4">
-            <a:extLst>
-              <a:ext uri="{FF2B5EF4-FFF2-40B4-BE49-F238E27FC236}">
-                <a16:creationId xmlns:a16="http://schemas.microsoft.com/office/drawing/2014/main" id="{8EDB9ADD-FAD8-BF8A-F9F3-C20C5DF4AB4B}"/>
-              </a:ext>
-            </a:extLst>
-          </p:cNvPr>
-          <p:cNvSpPr/>
-          <p:nvPr/>
-        </p:nvSpPr>
-        <p:spPr>
-          <a:xfrm>
-            <a:off x="889000" y="2184400"/>
-            <a:ext cx="508000" cy="508000"/>
-          </a:xfrm>
-          <a:prstGeom prst="ellipse">
-            <a:avLst/>
-          </a:prstGeom>
-          <a:solidFill>
-            <a:srgbClr val="1A2D47"/>
-          </a:solidFill>
-          <a:ln w="9525">
-            <a:solidFill>
-              <a:srgbClr val="4A78A8"/>
-            </a:solidFill>
-          </a:ln>
-        </p:spPr>
-        <p:style>
-          <a:lnRef idx="2">
-            <a:schemeClr val="accent1">
-              <a:shade val="15000"/>
-            </a:schemeClr>
-          </a:lnRef>
-          <a:fillRef idx="1">
-            <a:schemeClr val="accent1"/>
-          </a:fillRef>
-          <a:effectRef idx="0">
-            <a:schemeClr val="accent1"/>
-          </a:effectRef>
-          <a:fontRef idx="minor">
-            <a:schemeClr val="lt1"/>
-          </a:fontRef>
-        </p:style>
-        <p:txBody>
-          <a:bodyPr lIns="0" tIns="0" rIns="0" bIns="0" rtlCol="0" anchor="ctr"/>
-          <a:lstStyle/>
-          <a:p>
-            <a:pPr algn="ctr"/>
-            <a:r>
-              <a:rPr lang="en-SG" b="1">
-                <a:solidFill>
-                  <a:srgbClr val="F7FAFD"/>
-                </a:solidFill>
-                <a:latin typeface="Consolas" panose="020B0609020204030204" pitchFamily="49" charset="0"/>
-              </a:rPr>
-              <a:t>1</a:t>
-            </a:r>
-          </a:p>
-        </p:txBody>
-      </p:sp>
-      <p:sp>
-        <p:nvSpPr>
-          <p:cNvPr id="6" name="TextBox 5">
-            <a:extLst>
-              <a:ext uri="{FF2B5EF4-FFF2-40B4-BE49-F238E27FC236}">
-                <a16:creationId xmlns:a16="http://schemas.microsoft.com/office/drawing/2014/main" id="{153A47D3-ADFA-6844-815F-AB185788F131}"/>
-              </a:ext>
-            </a:extLst>
-          </p:cNvPr>
-          <p:cNvSpPr txBox="1"/>
-          <p:nvPr/>
-        </p:nvSpPr>
-        <p:spPr>
-          <a:xfrm>
-            <a:off x="1600200" y="2235200"/>
-            <a:ext cx="4140200" cy="406400"/>
-          </a:xfrm>
-          <a:prstGeom prst="rect">
-            <a:avLst/>
-          </a:prstGeom>
-          <a:noFill/>
-        </p:spPr>
-        <p:txBody>
-          <a:bodyPr vert="horz" wrap="square" lIns="0" tIns="0" rIns="0" bIns="0" rtlCol="0">
-            <a:noAutofit/>
-          </a:bodyPr>
-          <a:lstStyle/>
-          <a:p>
-            <a:r>
-              <a:rPr lang="en-SG" sz="2000" b="1">
-                <a:solidFill>
-                  <a:srgbClr val="F7FAFD"/>
-                </a:solidFill>
-                <a:latin typeface="Segoe UI" panose="020B0502040204020203" pitchFamily="34" charset="0"/>
-              </a:rPr>
-              <a:t>Limits the AI cannot leave</a:t>
-            </a:r>
-          </a:p>
-        </p:txBody>
-      </p:sp>
-      <p:sp>
-        <p:nvSpPr>
-          <p:cNvPr id="7" name="TextBox 6">
-            <a:extLst>
-              <a:ext uri="{FF2B5EF4-FFF2-40B4-BE49-F238E27FC236}">
-                <a16:creationId xmlns:a16="http://schemas.microsoft.com/office/drawing/2014/main" id="{5F019803-BD42-1518-7372-ABA92A82EFC1}"/>
-              </a:ext>
-            </a:extLst>
-          </p:cNvPr>
-          <p:cNvSpPr txBox="1"/>
-          <p:nvPr/>
-        </p:nvSpPr>
-        <p:spPr>
-          <a:xfrm>
-            <a:off x="889000" y="2895600"/>
-            <a:ext cx="4775200" cy="838200"/>
-          </a:xfrm>
-          <a:prstGeom prst="rect">
-            <a:avLst/>
-          </a:prstGeom>
-          <a:noFill/>
-        </p:spPr>
-        <p:txBody>
-          <a:bodyPr vert="horz" wrap="square" lIns="0" tIns="0" rIns="0" bIns="0" rtlCol="0">
-            <a:noAutofit/>
-          </a:bodyPr>
-          <a:lstStyle/>
-          <a:p>
-            <a:r>
-              <a:rPr lang="en-SG" sz="1600">
-                <a:solidFill>
-                  <a:srgbClr val="E1EAF4"/>
-                </a:solidFill>
-                <a:latin typeface="Segoe UI" panose="020B0502040204020203" pitchFamily="34" charset="0"/>
-              </a:rPr>
-              <a:t>Min, base and max for each setting. A clamped value is marked.</a:t>
-            </a:r>
-          </a:p>
-        </p:txBody>
-      </p:sp>
-      <p:sp>
-        <p:nvSpPr>
-          <p:cNvPr id="8" name="Rectangle: Rounded Corners 7">
-            <a:extLst>
-              <a:ext uri="{FF2B5EF4-FFF2-40B4-BE49-F238E27FC236}">
-                <a16:creationId xmlns:a16="http://schemas.microsoft.com/office/drawing/2014/main" id="{501523CD-5CE4-6ED2-E2A4-36DF2024DF45}"/>
-              </a:ext>
-            </a:extLst>
-          </p:cNvPr>
-          <p:cNvSpPr/>
-          <p:nvPr/>
-        </p:nvSpPr>
-        <p:spPr>
-          <a:xfrm>
-            <a:off x="6248400" y="1905000"/>
-            <a:ext cx="5334000" cy="1955800"/>
-          </a:xfrm>
-          <a:prstGeom prst="roundRect">
-            <a:avLst>
-              <a:gd name="adj" fmla="val 6000"/>
-            </a:avLst>
-          </a:prstGeom>
-          <a:solidFill>
-            <a:srgbClr val="12243C"/>
-          </a:solidFill>
-          <a:ln w="9525">
-            <a:solidFill>
-              <a:srgbClr val="1E3653"/>
-            </a:solidFill>
-          </a:ln>
-        </p:spPr>
-        <p:style>
-          <a:lnRef idx="2">
-            <a:schemeClr val="accent1">
-              <a:shade val="15000"/>
-            </a:schemeClr>
-          </a:lnRef>
-          <a:fillRef idx="1">
-            <a:schemeClr val="accent1"/>
-          </a:fillRef>
-          <a:effectRef idx="0">
-            <a:schemeClr val="accent1"/>
-          </a:effectRef>
-          <a:fontRef idx="minor">
-            <a:schemeClr val="lt1"/>
-          </a:fontRef>
-        </p:style>
-        <p:txBody>
-          <a:bodyPr rtlCol="0" anchor="ctr"/>
-          <a:lstStyle/>
-          <a:p>
-            <a:pPr algn="ctr"/>
-            <a:endParaRPr lang="en-SG"/>
-          </a:p>
-        </p:txBody>
-      </p:sp>
-      <p:sp>
-        <p:nvSpPr>
-          <p:cNvPr id="9" name="Oval 8">
-            <a:extLst>
-              <a:ext uri="{FF2B5EF4-FFF2-40B4-BE49-F238E27FC236}">
-                <a16:creationId xmlns:a16="http://schemas.microsoft.com/office/drawing/2014/main" id="{9D0B75B9-088B-08B5-EF96-6209638F1FA2}"/>
-              </a:ext>
-            </a:extLst>
-          </p:cNvPr>
-          <p:cNvSpPr/>
-          <p:nvPr/>
-        </p:nvSpPr>
-        <p:spPr>
-          <a:xfrm>
-            <a:off x="6527800" y="2184400"/>
-            <a:ext cx="508000" cy="508000"/>
-          </a:xfrm>
-          <a:prstGeom prst="ellipse">
-            <a:avLst/>
-          </a:prstGeom>
-          <a:solidFill>
-            <a:srgbClr val="1A2D47"/>
-          </a:solidFill>
-          <a:ln w="9525">
-            <a:solidFill>
-              <a:srgbClr val="4A78A8"/>
-            </a:solidFill>
-          </a:ln>
-        </p:spPr>
-        <p:style>
-          <a:lnRef idx="2">
-            <a:schemeClr val="accent1">
-              <a:shade val="15000"/>
-            </a:schemeClr>
-          </a:lnRef>
-          <a:fillRef idx="1">
-            <a:schemeClr val="accent1"/>
-          </a:fillRef>
-          <a:effectRef idx="0">
-            <a:schemeClr val="accent1"/>
-          </a:effectRef>
-          <a:fontRef idx="minor">
-            <a:schemeClr val="lt1"/>
-          </a:fontRef>
-        </p:style>
-        <p:txBody>
-          <a:bodyPr lIns="0" tIns="0" rIns="0" bIns="0" rtlCol="0" anchor="ctr"/>
-          <a:lstStyle/>
-          <a:p>
-            <a:pPr algn="ctr"/>
-            <a:r>
-              <a:rPr lang="en-SG" b="1">
-                <a:solidFill>
-                  <a:srgbClr val="F7FAFD"/>
-                </a:solidFill>
-                <a:latin typeface="Consolas" panose="020B0609020204030204" pitchFamily="49" charset="0"/>
-              </a:rPr>
-              <a:t>2</a:t>
-            </a:r>
-          </a:p>
-        </p:txBody>
-      </p:sp>
-      <p:sp>
-        <p:nvSpPr>
-          <p:cNvPr id="10" name="TextBox 9">
-            <a:extLst>
-              <a:ext uri="{FF2B5EF4-FFF2-40B4-BE49-F238E27FC236}">
-                <a16:creationId xmlns:a16="http://schemas.microsoft.com/office/drawing/2014/main" id="{E08245A5-EE12-8CC2-2231-90EBD20568D5}"/>
-              </a:ext>
-            </a:extLst>
-          </p:cNvPr>
-          <p:cNvSpPr txBox="1"/>
-          <p:nvPr/>
-        </p:nvSpPr>
-        <p:spPr>
-          <a:xfrm>
-            <a:off x="7239000" y="2235200"/>
-            <a:ext cx="4140200" cy="406400"/>
-          </a:xfrm>
-          <a:prstGeom prst="rect">
-            <a:avLst/>
-          </a:prstGeom>
-          <a:noFill/>
-        </p:spPr>
-        <p:txBody>
-          <a:bodyPr vert="horz" wrap="square" lIns="0" tIns="0" rIns="0" bIns="0" rtlCol="0">
-            <a:noAutofit/>
-          </a:bodyPr>
-          <a:lstStyle/>
-          <a:p>
-            <a:r>
-              <a:rPr lang="en-SG" sz="2000" b="1">
-                <a:solidFill>
-                  <a:srgbClr val="F7FAFD"/>
-                </a:solidFill>
-                <a:latin typeface="Segoe UI" panose="020B0502040204020203" pitchFamily="34" charset="0"/>
-              </a:rPr>
-              <a:t>Fixed mode for assessment</a:t>
-            </a:r>
-          </a:p>
-        </p:txBody>
-      </p:sp>
-      <p:sp>
-        <p:nvSpPr>
-          <p:cNvPr id="11" name="TextBox 10">
-            <a:extLst>
-              <a:ext uri="{FF2B5EF4-FFF2-40B4-BE49-F238E27FC236}">
-                <a16:creationId xmlns:a16="http://schemas.microsoft.com/office/drawing/2014/main" id="{8640169F-7AA5-F627-E45D-B059925D3D27}"/>
-              </a:ext>
-            </a:extLst>
-          </p:cNvPr>
-          <p:cNvSpPr txBox="1"/>
-          <p:nvPr/>
-        </p:nvSpPr>
-        <p:spPr>
-          <a:xfrm>
-            <a:off x="6527800" y="2895600"/>
-            <a:ext cx="4775200" cy="838200"/>
-          </a:xfrm>
-          <a:prstGeom prst="rect">
-            <a:avLst/>
-          </a:prstGeom>
-          <a:noFill/>
-        </p:spPr>
-        <p:txBody>
-          <a:bodyPr vert="horz" wrap="square" lIns="0" tIns="0" rIns="0" bIns="0" rtlCol="0">
-            <a:noAutofit/>
-          </a:bodyPr>
-          <a:lstStyle/>
-          <a:p>
-            <a:r>
-              <a:rPr lang="en-SG" sz="1600">
-                <a:solidFill>
-                  <a:srgbClr val="E1EAF4"/>
-                </a:solidFill>
-                <a:latin typeface="Segoe UI" panose="020B0502040204020203" pitchFamily="34" charset="0"/>
-              </a:rPr>
-              <a:t>Zero adjustments, a different badge. Practice and assessment stay apart.</a:t>
-            </a:r>
-          </a:p>
-        </p:txBody>
-      </p:sp>
-      <p:sp>
-        <p:nvSpPr>
-          <p:cNvPr id="12" name="Rectangle: Rounded Corners 11">
-            <a:extLst>
-              <a:ext uri="{FF2B5EF4-FFF2-40B4-BE49-F238E27FC236}">
-                <a16:creationId xmlns:a16="http://schemas.microsoft.com/office/drawing/2014/main" id="{D2B5EF23-5595-73FF-EC13-E2D0BC185EAE}"/>
-              </a:ext>
-            </a:extLst>
-          </p:cNvPr>
-          <p:cNvSpPr/>
-          <p:nvPr/>
-        </p:nvSpPr>
-        <p:spPr>
-          <a:xfrm>
-            <a:off x="609600" y="4064000"/>
-            <a:ext cx="5334000" cy="1955800"/>
-          </a:xfrm>
-          <a:prstGeom prst="roundRect">
-            <a:avLst>
-              <a:gd name="adj" fmla="val 6000"/>
-            </a:avLst>
-          </a:prstGeom>
-          <a:solidFill>
-            <a:srgbClr val="12243C"/>
-          </a:solidFill>
-          <a:ln w="9525">
-            <a:solidFill>
-              <a:srgbClr val="1E3653"/>
-            </a:solidFill>
-          </a:ln>
-        </p:spPr>
-        <p:style>
-          <a:lnRef idx="2">
-            <a:schemeClr val="accent1">
-              <a:shade val="15000"/>
-            </a:schemeClr>
-          </a:lnRef>
-          <a:fillRef idx="1">
-            <a:schemeClr val="accent1"/>
-          </a:fillRef>
-          <a:effectRef idx="0">
-            <a:schemeClr val="accent1"/>
-          </a:effectRef>
-          <a:fontRef idx="minor">
-            <a:schemeClr val="lt1"/>
-          </a:fontRef>
-        </p:style>
-        <p:txBody>
-          <a:bodyPr rtlCol="0" anchor="ctr"/>
-          <a:lstStyle/>
-          <a:p>
-            <a:pPr algn="ctr"/>
-            <a:endParaRPr lang="en-SG"/>
-          </a:p>
-        </p:txBody>
-      </p:sp>
-      <p:sp>
-        <p:nvSpPr>
-          <p:cNvPr id="13" name="Oval 12">
-            <a:extLst>
-              <a:ext uri="{FF2B5EF4-FFF2-40B4-BE49-F238E27FC236}">
-                <a16:creationId xmlns:a16="http://schemas.microsoft.com/office/drawing/2014/main" id="{49E520A6-1A74-C275-C0FC-34E29322E211}"/>
-              </a:ext>
-            </a:extLst>
-          </p:cNvPr>
-          <p:cNvSpPr/>
-          <p:nvPr/>
-        </p:nvSpPr>
-        <p:spPr>
-          <a:xfrm>
-            <a:off x="889000" y="4343400"/>
-            <a:ext cx="508000" cy="508000"/>
-          </a:xfrm>
-          <a:prstGeom prst="ellipse">
-            <a:avLst/>
-          </a:prstGeom>
-          <a:solidFill>
-            <a:srgbClr val="24183F"/>
-          </a:solidFill>
-          <a:ln w="9525">
-            <a:solidFill>
-              <a:srgbClr val="B98FFF"/>
-            </a:solidFill>
-          </a:ln>
-        </p:spPr>
-        <p:style>
-          <a:lnRef idx="2">
-            <a:schemeClr val="accent1">
-              <a:shade val="15000"/>
-            </a:schemeClr>
-          </a:lnRef>
-          <a:fillRef idx="1">
-            <a:schemeClr val="accent1"/>
-          </a:fillRef>
-          <a:effectRef idx="0">
-            <a:schemeClr val="accent1"/>
-          </a:effectRef>
-          <a:fontRef idx="minor">
-            <a:schemeClr val="lt1"/>
-          </a:fontRef>
-        </p:style>
-        <p:txBody>
-          <a:bodyPr lIns="0" tIns="0" rIns="0" bIns="0" rtlCol="0" anchor="ctr"/>
-          <a:lstStyle/>
-          <a:p>
-            <a:pPr algn="ctr"/>
-            <a:r>
-              <a:rPr lang="en-SG" b="1">
-                <a:solidFill>
-                  <a:srgbClr val="EBDFFF"/>
-                </a:solidFill>
-                <a:latin typeface="Consolas" panose="020B0609020204030204" pitchFamily="49" charset="0"/>
-              </a:rPr>
-              <a:t>3</a:t>
-            </a:r>
-          </a:p>
-        </p:txBody>
-      </p:sp>
-      <p:sp>
-        <p:nvSpPr>
-          <p:cNvPr id="14" name="TextBox 13">
-            <a:extLst>
-              <a:ext uri="{FF2B5EF4-FFF2-40B4-BE49-F238E27FC236}">
-                <a16:creationId xmlns:a16="http://schemas.microsoft.com/office/drawing/2014/main" id="{3FAF8422-0235-27F9-056A-67355BD98068}"/>
-              </a:ext>
-            </a:extLst>
-          </p:cNvPr>
-          <p:cNvSpPr txBox="1"/>
-          <p:nvPr/>
-        </p:nvSpPr>
-        <p:spPr>
-          <a:xfrm>
-            <a:off x="1600200" y="4394200"/>
-            <a:ext cx="4140200" cy="406400"/>
-          </a:xfrm>
-          <a:prstGeom prst="rect">
-            <a:avLst/>
-          </a:prstGeom>
-          <a:noFill/>
-        </p:spPr>
-        <p:txBody>
-          <a:bodyPr vert="horz" wrap="square" lIns="0" tIns="0" rIns="0" bIns="0" rtlCol="0">
-            <a:noAutofit/>
-          </a:bodyPr>
-          <a:lstStyle/>
-          <a:p>
-            <a:r>
-              <a:rPr lang="en-SG" sz="2000" b="1">
-                <a:solidFill>
-                  <a:srgbClr val="F7FAFD"/>
-                </a:solidFill>
-                <a:latin typeface="Segoe UI" panose="020B0502040204020203" pitchFamily="34" charset="0"/>
-              </a:rPr>
-              <a:t>Steer in plain language</a:t>
-            </a:r>
-          </a:p>
-        </p:txBody>
-      </p:sp>
-      <p:sp>
-        <p:nvSpPr>
-          <p:cNvPr id="15" name="TextBox 14">
-            <a:extLst>
-              <a:ext uri="{FF2B5EF4-FFF2-40B4-BE49-F238E27FC236}">
-                <a16:creationId xmlns:a16="http://schemas.microsoft.com/office/drawing/2014/main" id="{69ECB924-5ABD-711C-3CC3-F70064EDA5C3}"/>
-              </a:ext>
-            </a:extLst>
-          </p:cNvPr>
-          <p:cNvSpPr txBox="1"/>
-          <p:nvPr/>
-        </p:nvSpPr>
-        <p:spPr>
-          <a:xfrm>
-            <a:off x="889000" y="5054600"/>
-            <a:ext cx="4775200" cy="838200"/>
-          </a:xfrm>
-          <a:prstGeom prst="rect">
-            <a:avLst/>
-          </a:prstGeom>
-          <a:noFill/>
-        </p:spPr>
-        <p:txBody>
-          <a:bodyPr vert="horz" wrap="square" lIns="0" tIns="0" rIns="0" bIns="0" rtlCol="0">
-            <a:noAutofit/>
-          </a:bodyPr>
-          <a:lstStyle/>
-          <a:p>
-            <a:r>
-              <a:rPr lang="en-SG" sz="1600">
-                <a:solidFill>
-                  <a:srgbClr val="E1EAF4"/>
-                </a:solidFill>
-                <a:latin typeface="Segoe UI" panose="020B0502040204020203" pitchFamily="34" charset="0"/>
-              </a:rPr>
-              <a:t>The typed request becomes a directive, shown before it applies.</a:t>
-            </a:r>
-          </a:p>
-        </p:txBody>
-      </p:sp>
-      <p:sp>
-        <p:nvSpPr>
-          <p:cNvPr id="16" name="Rectangle: Rounded Corners 15">
-            <a:extLst>
-              <a:ext uri="{FF2B5EF4-FFF2-40B4-BE49-F238E27FC236}">
-                <a16:creationId xmlns:a16="http://schemas.microsoft.com/office/drawing/2014/main" id="{748DF49C-4E1B-3401-5BFF-5D92B58C0CA4}"/>
-              </a:ext>
-            </a:extLst>
-          </p:cNvPr>
-          <p:cNvSpPr/>
-          <p:nvPr/>
-        </p:nvSpPr>
-        <p:spPr>
-          <a:xfrm>
-            <a:off x="6248400" y="4064000"/>
-            <a:ext cx="5334000" cy="1955800"/>
-          </a:xfrm>
-          <a:prstGeom prst="roundRect">
-            <a:avLst>
-              <a:gd name="adj" fmla="val 6000"/>
-            </a:avLst>
-          </a:prstGeom>
-          <a:solidFill>
-            <a:srgbClr val="12243C"/>
-          </a:solidFill>
-          <a:ln w="9525">
-            <a:solidFill>
-              <a:srgbClr val="1E3653"/>
-            </a:solidFill>
-          </a:ln>
-        </p:spPr>
-        <p:style>
-          <a:lnRef idx="2">
-            <a:schemeClr val="accent1">
-              <a:shade val="15000"/>
-            </a:schemeClr>
-          </a:lnRef>
-          <a:fillRef idx="1">
-            <a:schemeClr val="accent1"/>
-          </a:fillRef>
-          <a:effectRef idx="0">
-            <a:schemeClr val="accent1"/>
-          </a:effectRef>
-          <a:fontRef idx="minor">
-            <a:schemeClr val="lt1"/>
-          </a:fontRef>
-        </p:style>
-        <p:txBody>
-          <a:bodyPr rtlCol="0" anchor="ctr"/>
-          <a:lstStyle/>
-          <a:p>
-            <a:pPr algn="ctr"/>
-            <a:endParaRPr lang="en-SG"/>
-          </a:p>
-        </p:txBody>
-      </p:sp>
-      <p:sp>
-        <p:nvSpPr>
-          <p:cNvPr id="17" name="Oval 16">
-            <a:extLst>
-              <a:ext uri="{FF2B5EF4-FFF2-40B4-BE49-F238E27FC236}">
-                <a16:creationId xmlns:a16="http://schemas.microsoft.com/office/drawing/2014/main" id="{7129EF57-4ECE-F87E-A7F4-6F87E6923A46}"/>
-              </a:ext>
-            </a:extLst>
-          </p:cNvPr>
-          <p:cNvSpPr/>
-          <p:nvPr/>
-        </p:nvSpPr>
-        <p:spPr>
-          <a:xfrm>
-            <a:off x="6527800" y="4343400"/>
-            <a:ext cx="508000" cy="508000"/>
-          </a:xfrm>
-          <a:prstGeom prst="ellipse">
-            <a:avLst/>
-          </a:prstGeom>
-          <a:solidFill>
-            <a:srgbClr val="24183F"/>
-          </a:solidFill>
-          <a:ln w="9525">
-            <a:solidFill>
-              <a:srgbClr val="B98FFF"/>
-            </a:solidFill>
-          </a:ln>
-        </p:spPr>
-        <p:style>
-          <a:lnRef idx="2">
-            <a:schemeClr val="accent1">
-              <a:shade val="15000"/>
-            </a:schemeClr>
-          </a:lnRef>
-          <a:fillRef idx="1">
-            <a:schemeClr val="accent1"/>
-          </a:fillRef>
-          <a:effectRef idx="0">
-            <a:schemeClr val="accent1"/>
-          </a:effectRef>
-          <a:fontRef idx="minor">
-            <a:schemeClr val="lt1"/>
-          </a:fontRef>
-        </p:style>
-        <p:txBody>
-          <a:bodyPr lIns="0" tIns="0" rIns="0" bIns="0" rtlCol="0" anchor="ctr"/>
-          <a:lstStyle/>
-          <a:p>
-            <a:pPr algn="ctr"/>
-            <a:r>
-              <a:rPr lang="en-SG" b="1">
-                <a:solidFill>
-                  <a:srgbClr val="EBDFFF"/>
-                </a:solidFill>
-                <a:latin typeface="Consolas" panose="020B0609020204030204" pitchFamily="49" charset="0"/>
-              </a:rPr>
-              <a:t>4</a:t>
-            </a:r>
-          </a:p>
-        </p:txBody>
-      </p:sp>
-      <p:sp>
-        <p:nvSpPr>
-          <p:cNvPr id="18" name="TextBox 17">
-            <a:extLst>
-              <a:ext uri="{FF2B5EF4-FFF2-40B4-BE49-F238E27FC236}">
-                <a16:creationId xmlns:a16="http://schemas.microsoft.com/office/drawing/2014/main" id="{EF4F43E2-6DE1-2F9B-FC44-1603DEFB2354}"/>
-              </a:ext>
-            </a:extLst>
-          </p:cNvPr>
-          <p:cNvSpPr txBox="1"/>
-          <p:nvPr/>
-        </p:nvSpPr>
-        <p:spPr>
-          <a:xfrm>
-            <a:off x="7239000" y="4394200"/>
-            <a:ext cx="4140200" cy="406400"/>
-          </a:xfrm>
-          <a:prstGeom prst="rect">
-            <a:avLst/>
-          </a:prstGeom>
-          <a:noFill/>
-        </p:spPr>
-        <p:txBody>
-          <a:bodyPr vert="horz" wrap="square" lIns="0" tIns="0" rIns="0" bIns="0" rtlCol="0">
-            <a:noAutofit/>
-          </a:bodyPr>
-          <a:lstStyle/>
-          <a:p>
-            <a:r>
-              <a:rPr lang="en-SG" sz="2000" b="1">
-                <a:solidFill>
-                  <a:srgbClr val="F7FAFD"/>
-                </a:solidFill>
-                <a:latin typeface="Segoe UI" panose="020B0502040204020203" pitchFamily="34" charset="0"/>
-              </a:rPr>
-              <a:t>Figures come from code</a:t>
-            </a:r>
-          </a:p>
-        </p:txBody>
-      </p:sp>
-      <p:sp>
-        <p:nvSpPr>
-          <p:cNvPr id="19" name="TextBox 18">
-            <a:extLst>
-              <a:ext uri="{FF2B5EF4-FFF2-40B4-BE49-F238E27FC236}">
-                <a16:creationId xmlns:a16="http://schemas.microsoft.com/office/drawing/2014/main" id="{8CCD9C55-DE2C-A560-6973-481FC2AE29B1}"/>
-              </a:ext>
-            </a:extLst>
-          </p:cNvPr>
-          <p:cNvSpPr txBox="1"/>
-          <p:nvPr/>
-        </p:nvSpPr>
-        <p:spPr>
-          <a:xfrm>
-            <a:off x="6527800" y="5054600"/>
-            <a:ext cx="4775200" cy="838200"/>
-          </a:xfrm>
-          <a:prstGeom prst="rect">
-            <a:avLst/>
-          </a:prstGeom>
-          <a:noFill/>
-        </p:spPr>
-        <p:txBody>
-          <a:bodyPr vert="horz" wrap="square" lIns="0" tIns="0" rIns="0" bIns="0" rtlCol="0">
-            <a:noAutofit/>
-          </a:bodyPr>
-          <a:lstStyle/>
-          <a:p>
-            <a:r>
-              <a:rPr lang="en-SG" sz="1600">
-                <a:solidFill>
-                  <a:srgbClr val="E1EAF4"/>
-                </a:solidFill>
-                <a:latin typeface="Segoe UI" panose="020B0502040204020203" pitchFamily="34" charset="0"/>
-              </a:rPr>
-              <a:t>The optional local LLM only rephrases. It never adds a number.</a:t>
-            </a:r>
-          </a:p>
-        </p:txBody>
-      </p:sp>
-      <p:sp>
-        <p:nvSpPr>
-          <p:cNvPr id="20" name="TextBox 19">
-            <a:extLst>
-              <a:ext uri="{FF2B5EF4-FFF2-40B4-BE49-F238E27FC236}">
-                <a16:creationId xmlns:a16="http://schemas.microsoft.com/office/drawing/2014/main" id="{3BDD1699-46AA-0BCE-9254-97361503425B}"/>
-              </a:ext>
-            </a:extLst>
-          </p:cNvPr>
-          <p:cNvSpPr txBox="1"/>
-          <p:nvPr/>
-        </p:nvSpPr>
-        <p:spPr>
-          <a:xfrm>
-            <a:off x="609600" y="6400800"/>
-            <a:ext cx="8890000" cy="228600"/>
-          </a:xfrm>
-          <a:prstGeom prst="rect">
-            <a:avLst/>
-          </a:prstGeom>
-          <a:noFill/>
-        </p:spPr>
-        <p:txBody>
-          <a:bodyPr vert="horz" wrap="square" lIns="0" tIns="0" rIns="0" bIns="0" rtlCol="0">
-            <a:noAutofit/>
-          </a:bodyPr>
-          <a:lstStyle/>
-          <a:p>
-            <a:r>
-              <a:rPr lang="en-SG" sz="1200">
-                <a:solidFill>
-                  <a:srgbClr val="93ABC6"/>
-                </a:solidFill>
-                <a:latin typeface="Consolas" panose="020B0609020204030204" pitchFamily="49" charset="0"/>
-              </a:rPr>
-              <a:t>ADAPTIVE CGF TRAINER</a:t>
-            </a:r>
-          </a:p>
-        </p:txBody>
-      </p:sp>
-      <p:sp>
-        <p:nvSpPr>
-          <p:cNvPr id="21" name="TextBox 20">
-            <a:extLst>
-              <a:ext uri="{FF2B5EF4-FFF2-40B4-BE49-F238E27FC236}">
-                <a16:creationId xmlns:a16="http://schemas.microsoft.com/office/drawing/2014/main" id="{F172679D-74EA-65A7-F8DA-8CE1A2EAA576}"/>
-              </a:ext>
-            </a:extLst>
-          </p:cNvPr>
-          <p:cNvSpPr txBox="1"/>
-          <p:nvPr/>
-        </p:nvSpPr>
-        <p:spPr>
-          <a:xfrm>
-            <a:off x="10312400" y="6400800"/>
-            <a:ext cx="1270000" cy="228600"/>
-          </a:xfrm>
-          <a:prstGeom prst="rect">
-            <a:avLst/>
-          </a:prstGeom>
-          <a:noFill/>
-        </p:spPr>
-        <p:txBody>
-          <a:bodyPr vert="horz" wrap="square" lIns="0" tIns="0" rIns="0" bIns="0" rtlCol="0">
-            <a:noAutofit/>
-          </a:bodyPr>
-          <a:lstStyle/>
-          <a:p>
-            <a:pPr algn="r"/>
-            <a:r>
-              <a:rPr lang="en-SG" sz="1200">
-                <a:solidFill>
-                  <a:srgbClr val="93ABC6"/>
-                </a:solidFill>
-                <a:latin typeface="Consolas" panose="020B0609020204030204" pitchFamily="49" charset="0"/>
-              </a:rPr>
-              <a:t>09</a:t>
-            </a:r>
-          </a:p>
-        </p:txBody>
-      </p:sp>
-    </p:spTree>
-    <p:extLst>
-      <p:ext uri="{BB962C8B-B14F-4D97-AF65-F5344CB8AC3E}">
-        <p14:creationId xmlns:p14="http://schemas.microsoft.com/office/powerpoint/2010/main" val="2770566383"/>
+        <p14:creationId xmlns:p14="http://schemas.microsoft.com/office/powerpoint/2010/main" val="2656982467"/>
       </p:ext>
     </p:extLst>
   </p:cSld>

--- a/cgf-demo/docs/pitch/Adaptive-CGF-Trainer.pptx
+++ b/cgf-demo/docs/pitch/Adaptive-CGF-Trainer.pptx
@@ -5,7 +5,7 @@
     <p:sldMasterId id="2147483648" r:id="rId1"/>
   </p:sldMasterIdLst>
   <p:notesMasterIdLst>
-    <p:notesMasterId r:id="rId19"/>
+    <p:notesMasterId r:id="rId20"/>
   </p:notesMasterIdLst>
   <p:sldIdLst>
     <p:sldId id="256" r:id="rId2"/>
@@ -25,6 +25,7 @@
     <p:sldId id="270" r:id="rId16"/>
     <p:sldId id="271" r:id="rId17"/>
     <p:sldId id="272" r:id="rId18"/>
+    <p:sldId id="273" r:id="rId19"/>
   </p:sldIdLst>
   <p:sldSz cx="12192000" cy="6858000"/>
   <p:notesSz cx="6858000" cy="9144000"/>
@@ -206,7 +207,7 @@
             </a:lvl1pPr>
           </a:lstStyle>
           <a:p>
-            <a:fld id="{470C1C8F-EDB3-498C-993C-2724C9653F75}" type="datetimeFigureOut">
+            <a:fld id="{7B3E1C1E-B5DB-43BB-9F4D-82AAD0404FB9}" type="datetimeFigureOut">
               <a:rPr lang="en-SG" smtClean="0"/>
               <a:t>29/10/2026</a:t>
             </a:fld>
@@ -365,7 +366,7 @@
             </a:lvl1pPr>
           </a:lstStyle>
           <a:p>
-            <a:fld id="{619B7646-CA0D-4554-BFDC-9967B7FA3B0E}" type="slidenum">
+            <a:fld id="{C3483346-7758-4A39-B83D-17A0C475FBD4}" type="slidenum">
               <a:rPr lang="en-SG" smtClean="0"/>
               <a:t>‹#›</a:t>
             </a:fld>
@@ -376,7 +377,7 @@
     </p:spTree>
     <p:extLst>
       <p:ext uri="{BB962C8B-B14F-4D97-AF65-F5344CB8AC3E}">
-        <p14:creationId xmlns:p14="http://schemas.microsoft.com/office/powerpoint/2010/main" val="2843258590"/>
+        <p14:creationId xmlns:p14="http://schemas.microsoft.com/office/powerpoint/2010/main" val="3617810074"/>
       </p:ext>
     </p:extLst>
   </p:cSld>
@@ -542,7 +543,7 @@
           <a:bodyPr/>
           <a:lstStyle/>
           <a:p>
-            <a:fld id="{619B7646-CA0D-4554-BFDC-9967B7FA3B0E}" type="slidenum">
+            <a:fld id="{C3483346-7758-4A39-B83D-17A0C475FBD4}" type="slidenum">
               <a:rPr lang="en-SG" smtClean="0"/>
               <a:t>1</a:t>
             </a:fld>
@@ -553,7 +554,7 @@
     </p:spTree>
     <p:extLst>
       <p:ext uri="{BB962C8B-B14F-4D97-AF65-F5344CB8AC3E}">
-        <p14:creationId xmlns:p14="http://schemas.microsoft.com/office/powerpoint/2010/main" val="1735056219"/>
+        <p14:creationId xmlns:p14="http://schemas.microsoft.com/office/powerpoint/2010/main" val="1984272610"/>
       </p:ext>
     </p:extLst>
   </p:cSld>
@@ -629,7 +630,7 @@
           <a:bodyPr/>
           <a:lstStyle/>
           <a:p>
-            <a:fld id="{619B7646-CA0D-4554-BFDC-9967B7FA3B0E}" type="slidenum">
+            <a:fld id="{C3483346-7758-4A39-B83D-17A0C475FBD4}" type="slidenum">
               <a:rPr lang="en-SG" smtClean="0"/>
               <a:t>10</a:t>
             </a:fld>
@@ -640,7 +641,7 @@
     </p:spTree>
     <p:extLst>
       <p:ext uri="{BB962C8B-B14F-4D97-AF65-F5344CB8AC3E}">
-        <p14:creationId xmlns:p14="http://schemas.microsoft.com/office/powerpoint/2010/main" val="3029741672"/>
+        <p14:creationId xmlns:p14="http://schemas.microsoft.com/office/powerpoint/2010/main" val="2592284299"/>
       </p:ext>
     </p:extLst>
   </p:cSld>
@@ -716,7 +717,7 @@
           <a:bodyPr/>
           <a:lstStyle/>
           <a:p>
-            <a:fld id="{619B7646-CA0D-4554-BFDC-9967B7FA3B0E}" type="slidenum">
+            <a:fld id="{C3483346-7758-4A39-B83D-17A0C475FBD4}" type="slidenum">
               <a:rPr lang="en-SG" smtClean="0"/>
               <a:t>11</a:t>
             </a:fld>
@@ -727,7 +728,7 @@
     </p:spTree>
     <p:extLst>
       <p:ext uri="{BB962C8B-B14F-4D97-AF65-F5344CB8AC3E}">
-        <p14:creationId xmlns:p14="http://schemas.microsoft.com/office/powerpoint/2010/main" val="4131791674"/>
+        <p14:creationId xmlns:p14="http://schemas.microsoft.com/office/powerpoint/2010/main" val="3784638867"/>
       </p:ext>
     </p:extLst>
   </p:cSld>
@@ -803,7 +804,7 @@
           <a:bodyPr/>
           <a:lstStyle/>
           <a:p>
-            <a:fld id="{619B7646-CA0D-4554-BFDC-9967B7FA3B0E}" type="slidenum">
+            <a:fld id="{C3483346-7758-4A39-B83D-17A0C475FBD4}" type="slidenum">
               <a:rPr lang="en-SG" smtClean="0"/>
               <a:t>12</a:t>
             </a:fld>
@@ -814,7 +815,7 @@
     </p:spTree>
     <p:extLst>
       <p:ext uri="{BB962C8B-B14F-4D97-AF65-F5344CB8AC3E}">
-        <p14:creationId xmlns:p14="http://schemas.microsoft.com/office/powerpoint/2010/main" val="1628261061"/>
+        <p14:creationId xmlns:p14="http://schemas.microsoft.com/office/powerpoint/2010/main" val="2472337165"/>
       </p:ext>
     </p:extLst>
   </p:cSld>
@@ -890,7 +891,7 @@
           <a:bodyPr/>
           <a:lstStyle/>
           <a:p>
-            <a:fld id="{619B7646-CA0D-4554-BFDC-9967B7FA3B0E}" type="slidenum">
+            <a:fld id="{C3483346-7758-4A39-B83D-17A0C475FBD4}" type="slidenum">
               <a:rPr lang="en-SG" smtClean="0"/>
               <a:t>13</a:t>
             </a:fld>
@@ -901,7 +902,7 @@
     </p:spTree>
     <p:extLst>
       <p:ext uri="{BB962C8B-B14F-4D97-AF65-F5344CB8AC3E}">
-        <p14:creationId xmlns:p14="http://schemas.microsoft.com/office/powerpoint/2010/main" val="599484426"/>
+        <p14:creationId xmlns:p14="http://schemas.microsoft.com/office/powerpoint/2010/main" val="3456136307"/>
       </p:ext>
     </p:extLst>
   </p:cSld>
@@ -977,7 +978,7 @@
           <a:bodyPr/>
           <a:lstStyle/>
           <a:p>
-            <a:fld id="{619B7646-CA0D-4554-BFDC-9967B7FA3B0E}" type="slidenum">
+            <a:fld id="{C3483346-7758-4A39-B83D-17A0C475FBD4}" type="slidenum">
               <a:rPr lang="en-SG" smtClean="0"/>
               <a:t>14</a:t>
             </a:fld>
@@ -988,7 +989,7 @@
     </p:spTree>
     <p:extLst>
       <p:ext uri="{BB962C8B-B14F-4D97-AF65-F5344CB8AC3E}">
-        <p14:creationId xmlns:p14="http://schemas.microsoft.com/office/powerpoint/2010/main" val="1851650042"/>
+        <p14:creationId xmlns:p14="http://schemas.microsoft.com/office/powerpoint/2010/main" val="1815464789"/>
       </p:ext>
     </p:extLst>
   </p:cSld>
@@ -1064,7 +1065,7 @@
           <a:bodyPr/>
           <a:lstStyle/>
           <a:p>
-            <a:fld id="{619B7646-CA0D-4554-BFDC-9967B7FA3B0E}" type="slidenum">
+            <a:fld id="{C3483346-7758-4A39-B83D-17A0C475FBD4}" type="slidenum">
               <a:rPr lang="en-SG" smtClean="0"/>
               <a:t>15</a:t>
             </a:fld>
@@ -1075,7 +1076,7 @@
     </p:spTree>
     <p:extLst>
       <p:ext uri="{BB962C8B-B14F-4D97-AF65-F5344CB8AC3E}">
-        <p14:creationId xmlns:p14="http://schemas.microsoft.com/office/powerpoint/2010/main" val="2982663240"/>
+        <p14:creationId xmlns:p14="http://schemas.microsoft.com/office/powerpoint/2010/main" val="3956265887"/>
       </p:ext>
     </p:extLst>
   </p:cSld>
@@ -1131,7 +1132,7 @@
           <a:p>
             <a:r>
               <a:rPr lang="en-SG"/>
-              <a:t>The audience will want the value in Singapore dollars. This is a sensitivity grid built on stated assumptions, not a claim. The pool of 6,000 sessions a year (200 trainees times 30 sessions) and the value of S1,000 to S3,000 per avoided session are placeholders until the division supplies its own numbers; replace them and the grid follows from saving equals sessions times r times value. r, the share of sessions avoided, has never been measured: it is the hypothesis a trial would test. Say that out loud.</a:t>
+              <a:t>Value in Singapore dollars, as a sensitivity grid on stated assumptions, not a claim. Every input on the left is a placeholder until the division supplies its own: 200 trainees a year, 30 sessions to proficiency, S1,500 per simulator session, 2 instructor hours per session at S250 an hour. That makes an avoided session worth S2,000; the grid also shows S1,000 and S3,000. r, the share of sessions avoided by targeted practice, has never been measured; it is the hypothesis a trial would test. Say that out loud. Formula: annual saving equals trainees times sessions to proficiency times r times value per session. Detail is in pitch/savings-model.md.</a:t>
             </a:r>
           </a:p>
         </p:txBody>
@@ -1151,7 +1152,7 @@
           <a:bodyPr/>
           <a:lstStyle/>
           <a:p>
-            <a:fld id="{619B7646-CA0D-4554-BFDC-9967B7FA3B0E}" type="slidenum">
+            <a:fld id="{C3483346-7758-4A39-B83D-17A0C475FBD4}" type="slidenum">
               <a:rPr lang="en-SG" smtClean="0"/>
               <a:t>16</a:t>
             </a:fld>
@@ -1162,7 +1163,7 @@
     </p:spTree>
     <p:extLst>
       <p:ext uri="{BB962C8B-B14F-4D97-AF65-F5344CB8AC3E}">
-        <p14:creationId xmlns:p14="http://schemas.microsoft.com/office/powerpoint/2010/main" val="385464878"/>
+        <p14:creationId xmlns:p14="http://schemas.microsoft.com/office/powerpoint/2010/main" val="2764746830"/>
       </p:ext>
     </p:extLst>
   </p:cSld>
@@ -1218,7 +1219,7 @@
           <a:p>
             <a:r>
               <a:rPr lang="en-SG"/>
-              <a:t>One sentence to close. Then questions: practice runs adapt and fixed mode assesses; the AI acts only inside the instructor’s limits; the demo shows the mechanism, and proving training transfer needs a trial with real cohorts.</a:t>
+              <a:t>How much effort did this take, and how fast could it pay back? Measured from the repository: 123 commits by four contributors, JL, Devin, Eevee and Glenda, inside one working day, about six hours from first to last commit. Person-days: at most 4, which is one day times four people, and about 2.1 if each person is counted only from their first to their last commit. It was AI-assisted and built on a hackathon timeline, so do not read it as a normal productivity rate. The right-hand card is an assumption: what the same code might cost if built conventionally at 20 to 50 lines per person-day and S800 a day. Both are placeholders. The table divides that cost by the illustrative saving from the previous slide. Be clear that the prototype is not a deployable system: the simulator adapter, a trial with real cohorts and approvals are not counted, and savings start only after a trial shows that r is real.</a:t>
             </a:r>
           </a:p>
         </p:txBody>
@@ -1238,7 +1239,7 @@
           <a:bodyPr/>
           <a:lstStyle/>
           <a:p>
-            <a:fld id="{619B7646-CA0D-4554-BFDC-9967B7FA3B0E}" type="slidenum">
+            <a:fld id="{C3483346-7758-4A39-B83D-17A0C475FBD4}" type="slidenum">
               <a:rPr lang="en-SG" smtClean="0"/>
               <a:t>17</a:t>
             </a:fld>
@@ -1249,7 +1250,94 @@
     </p:spTree>
     <p:extLst>
       <p:ext uri="{BB962C8B-B14F-4D97-AF65-F5344CB8AC3E}">
-        <p14:creationId xmlns:p14="http://schemas.microsoft.com/office/powerpoint/2010/main" val="818199218"/>
+        <p14:creationId xmlns:p14="http://schemas.microsoft.com/office/powerpoint/2010/main" val="2571464674"/>
+      </p:ext>
+    </p:extLst>
+  </p:cSld>
+  <p:clrMapOvr>
+    <a:masterClrMapping/>
+  </p:clrMapOvr>
+</p:notes>
+</file>
+
+<file path=ppt/notesSlides/notesSlide18.xml><?xml version="1.0" encoding="utf-8"?>
+<p:notes xmlns:a="http://schemas.openxmlformats.org/drawingml/2006/main" xmlns:r="http://schemas.openxmlformats.org/officeDocument/2006/relationships" xmlns:p="http://schemas.openxmlformats.org/presentationml/2006/main">
+  <p:cSld>
+    <p:spTree>
+      <p:nvGrpSpPr>
+        <p:cNvPr id="1" name=""/>
+        <p:cNvGrpSpPr/>
+        <p:nvPr/>
+      </p:nvGrpSpPr>
+      <p:grpSpPr>
+        <a:xfrm>
+          <a:off x="0" y="0"/>
+          <a:ext cx="0" cy="0"/>
+          <a:chOff x="0" y="0"/>
+          <a:chExt cx="0" cy="0"/>
+        </a:xfrm>
+      </p:grpSpPr>
+      <p:sp>
+        <p:nvSpPr>
+          <p:cNvPr id="2" name="Slide Image Placeholder 1"/>
+          <p:cNvSpPr>
+            <a:spLocks noGrp="1" noRot="1" noChangeAspect="1"/>
+          </p:cNvSpPr>
+          <p:nvPr>
+            <p:ph type="sldImg"/>
+          </p:nvPr>
+        </p:nvSpPr>
+        <p:spPr/>
+      </p:sp>
+      <p:sp>
+        <p:nvSpPr>
+          <p:cNvPr id="3" name="Notes Placeholder 2"/>
+          <p:cNvSpPr>
+            <a:spLocks noGrp="1"/>
+          </p:cNvSpPr>
+          <p:nvPr>
+            <p:ph type="body" idx="1"/>
+          </p:nvPr>
+        </p:nvSpPr>
+        <p:spPr/>
+        <p:txBody>
+          <a:bodyPr/>
+          <a:lstStyle/>
+          <a:p>
+            <a:r>
+              <a:rPr lang="en-SG"/>
+              <a:t>One sentence to close. Then questions: practice runs adapt and fixed mode assesses; the AI acts only inside the instructor’s limits; the demo shows the mechanism, and proving training transfer needs a trial with real cohorts.</a:t>
+            </a:r>
+          </a:p>
+        </p:txBody>
+      </p:sp>
+      <p:sp>
+        <p:nvSpPr>
+          <p:cNvPr id="4" name="Slide Number Placeholder 3"/>
+          <p:cNvSpPr>
+            <a:spLocks noGrp="1"/>
+          </p:cNvSpPr>
+          <p:nvPr>
+            <p:ph type="sldNum" sz="quarter" idx="5"/>
+          </p:nvPr>
+        </p:nvSpPr>
+        <p:spPr/>
+        <p:txBody>
+          <a:bodyPr/>
+          <a:lstStyle/>
+          <a:p>
+            <a:fld id="{C3483346-7758-4A39-B83D-17A0C475FBD4}" type="slidenum">
+              <a:rPr lang="en-SG" smtClean="0"/>
+              <a:t>18</a:t>
+            </a:fld>
+            <a:endParaRPr lang="en-SG"/>
+          </a:p>
+        </p:txBody>
+      </p:sp>
+    </p:spTree>
+    <p:extLst>
+      <p:ext uri="{BB962C8B-B14F-4D97-AF65-F5344CB8AC3E}">
+        <p14:creationId xmlns:p14="http://schemas.microsoft.com/office/powerpoint/2010/main" val="743685118"/>
       </p:ext>
     </p:extLst>
   </p:cSld>
@@ -1325,7 +1413,7 @@
           <a:bodyPr/>
           <a:lstStyle/>
           <a:p>
-            <a:fld id="{619B7646-CA0D-4554-BFDC-9967B7FA3B0E}" type="slidenum">
+            <a:fld id="{C3483346-7758-4A39-B83D-17A0C475FBD4}" type="slidenum">
               <a:rPr lang="en-SG" smtClean="0"/>
               <a:t>2</a:t>
             </a:fld>
@@ -1336,7 +1424,7 @@
     </p:spTree>
     <p:extLst>
       <p:ext uri="{BB962C8B-B14F-4D97-AF65-F5344CB8AC3E}">
-        <p14:creationId xmlns:p14="http://schemas.microsoft.com/office/powerpoint/2010/main" val="2154458824"/>
+        <p14:creationId xmlns:p14="http://schemas.microsoft.com/office/powerpoint/2010/main" val="3714125914"/>
       </p:ext>
     </p:extLst>
   </p:cSld>
@@ -1412,7 +1500,7 @@
           <a:bodyPr/>
           <a:lstStyle/>
           <a:p>
-            <a:fld id="{619B7646-CA0D-4554-BFDC-9967B7FA3B0E}" type="slidenum">
+            <a:fld id="{C3483346-7758-4A39-B83D-17A0C475FBD4}" type="slidenum">
               <a:rPr lang="en-SG" smtClean="0"/>
               <a:t>3</a:t>
             </a:fld>
@@ -1423,7 +1511,7 @@
     </p:spTree>
     <p:extLst>
       <p:ext uri="{BB962C8B-B14F-4D97-AF65-F5344CB8AC3E}">
-        <p14:creationId xmlns:p14="http://schemas.microsoft.com/office/powerpoint/2010/main" val="2829620990"/>
+        <p14:creationId xmlns:p14="http://schemas.microsoft.com/office/powerpoint/2010/main" val="3876877331"/>
       </p:ext>
     </p:extLst>
   </p:cSld>
@@ -1499,7 +1587,7 @@
           <a:bodyPr/>
           <a:lstStyle/>
           <a:p>
-            <a:fld id="{619B7646-CA0D-4554-BFDC-9967B7FA3B0E}" type="slidenum">
+            <a:fld id="{C3483346-7758-4A39-B83D-17A0C475FBD4}" type="slidenum">
               <a:rPr lang="en-SG" smtClean="0"/>
               <a:t>4</a:t>
             </a:fld>
@@ -1510,7 +1598,7 @@
     </p:spTree>
     <p:extLst>
       <p:ext uri="{BB962C8B-B14F-4D97-AF65-F5344CB8AC3E}">
-        <p14:creationId xmlns:p14="http://schemas.microsoft.com/office/powerpoint/2010/main" val="1443280468"/>
+        <p14:creationId xmlns:p14="http://schemas.microsoft.com/office/powerpoint/2010/main" val="2662622776"/>
       </p:ext>
     </p:extLst>
   </p:cSld>
@@ -1586,7 +1674,7 @@
           <a:bodyPr/>
           <a:lstStyle/>
           <a:p>
-            <a:fld id="{619B7646-CA0D-4554-BFDC-9967B7FA3B0E}" type="slidenum">
+            <a:fld id="{C3483346-7758-4A39-B83D-17A0C475FBD4}" type="slidenum">
               <a:rPr lang="en-SG" smtClean="0"/>
               <a:t>5</a:t>
             </a:fld>
@@ -1597,7 +1685,7 @@
     </p:spTree>
     <p:extLst>
       <p:ext uri="{BB962C8B-B14F-4D97-AF65-F5344CB8AC3E}">
-        <p14:creationId xmlns:p14="http://schemas.microsoft.com/office/powerpoint/2010/main" val="1140981900"/>
+        <p14:creationId xmlns:p14="http://schemas.microsoft.com/office/powerpoint/2010/main" val="689168654"/>
       </p:ext>
     </p:extLst>
   </p:cSld>
@@ -1673,7 +1761,7 @@
           <a:bodyPr/>
           <a:lstStyle/>
           <a:p>
-            <a:fld id="{619B7646-CA0D-4554-BFDC-9967B7FA3B0E}" type="slidenum">
+            <a:fld id="{C3483346-7758-4A39-B83D-17A0C475FBD4}" type="slidenum">
               <a:rPr lang="en-SG" smtClean="0"/>
               <a:t>6</a:t>
             </a:fld>
@@ -1684,7 +1772,7 @@
     </p:spTree>
     <p:extLst>
       <p:ext uri="{BB962C8B-B14F-4D97-AF65-F5344CB8AC3E}">
-        <p14:creationId xmlns:p14="http://schemas.microsoft.com/office/powerpoint/2010/main" val="2823404255"/>
+        <p14:creationId xmlns:p14="http://schemas.microsoft.com/office/powerpoint/2010/main" val="1303466812"/>
       </p:ext>
     </p:extLst>
   </p:cSld>
@@ -1760,7 +1848,7 @@
           <a:bodyPr/>
           <a:lstStyle/>
           <a:p>
-            <a:fld id="{619B7646-CA0D-4554-BFDC-9967B7FA3B0E}" type="slidenum">
+            <a:fld id="{C3483346-7758-4A39-B83D-17A0C475FBD4}" type="slidenum">
               <a:rPr lang="en-SG" smtClean="0"/>
               <a:t>7</a:t>
             </a:fld>
@@ -1771,7 +1859,7 @@
     </p:spTree>
     <p:extLst>
       <p:ext uri="{BB962C8B-B14F-4D97-AF65-F5344CB8AC3E}">
-        <p14:creationId xmlns:p14="http://schemas.microsoft.com/office/powerpoint/2010/main" val="3528106714"/>
+        <p14:creationId xmlns:p14="http://schemas.microsoft.com/office/powerpoint/2010/main" val="1589739621"/>
       </p:ext>
     </p:extLst>
   </p:cSld>
@@ -1847,7 +1935,7 @@
           <a:bodyPr/>
           <a:lstStyle/>
           <a:p>
-            <a:fld id="{619B7646-CA0D-4554-BFDC-9967B7FA3B0E}" type="slidenum">
+            <a:fld id="{C3483346-7758-4A39-B83D-17A0C475FBD4}" type="slidenum">
               <a:rPr lang="en-SG" smtClean="0"/>
               <a:t>8</a:t>
             </a:fld>
@@ -1858,7 +1946,7 @@
     </p:spTree>
     <p:extLst>
       <p:ext uri="{BB962C8B-B14F-4D97-AF65-F5344CB8AC3E}">
-        <p14:creationId xmlns:p14="http://schemas.microsoft.com/office/powerpoint/2010/main" val="3263022646"/>
+        <p14:creationId xmlns:p14="http://schemas.microsoft.com/office/powerpoint/2010/main" val="3854422386"/>
       </p:ext>
     </p:extLst>
   </p:cSld>
@@ -1934,7 +2022,7 @@
           <a:bodyPr/>
           <a:lstStyle/>
           <a:p>
-            <a:fld id="{619B7646-CA0D-4554-BFDC-9967B7FA3B0E}" type="slidenum">
+            <a:fld id="{C3483346-7758-4A39-B83D-17A0C475FBD4}" type="slidenum">
               <a:rPr lang="en-SG" smtClean="0"/>
               <a:t>9</a:t>
             </a:fld>
@@ -1945,7 +2033,7 @@
     </p:spTree>
     <p:extLst>
       <p:ext uri="{BB962C8B-B14F-4D97-AF65-F5344CB8AC3E}">
-        <p14:creationId xmlns:p14="http://schemas.microsoft.com/office/powerpoint/2010/main" val="3406625211"/>
+        <p14:creationId xmlns:p14="http://schemas.microsoft.com/office/powerpoint/2010/main" val="1591035007"/>
       </p:ext>
     </p:extLst>
   </p:cSld>
@@ -1977,7 +2065,7 @@
           <p:cNvPr id="2" name="Title 1">
             <a:extLst>
               <a:ext uri="{FF2B5EF4-FFF2-40B4-BE49-F238E27FC236}">
-                <a16:creationId xmlns:a16="http://schemas.microsoft.com/office/drawing/2014/main" id="{E0B82D43-0EB7-322B-9459-B87FADBFA255}"/>
+                <a16:creationId xmlns:a16="http://schemas.microsoft.com/office/drawing/2014/main" id="{92A7BBBE-BE44-0537-EBEC-16401A300AD5}"/>
               </a:ext>
             </a:extLst>
           </p:cNvPr>
@@ -2015,7 +2103,7 @@
           <p:cNvPr id="3" name="Subtitle 2">
             <a:extLst>
               <a:ext uri="{FF2B5EF4-FFF2-40B4-BE49-F238E27FC236}">
-                <a16:creationId xmlns:a16="http://schemas.microsoft.com/office/drawing/2014/main" id="{1CDF7BB1-63D8-9553-7288-FF7C05DAFB12}"/>
+                <a16:creationId xmlns:a16="http://schemas.microsoft.com/office/drawing/2014/main" id="{FFE0C9F1-4E04-B7E3-9589-2A97146B16C7}"/>
               </a:ext>
             </a:extLst>
           </p:cNvPr>
@@ -2086,7 +2174,7 @@
           <p:cNvPr id="4" name="Date Placeholder 3">
             <a:extLst>
               <a:ext uri="{FF2B5EF4-FFF2-40B4-BE49-F238E27FC236}">
-                <a16:creationId xmlns:a16="http://schemas.microsoft.com/office/drawing/2014/main" id="{813186F6-B131-42C6-31E1-7375FA85976E}"/>
+                <a16:creationId xmlns:a16="http://schemas.microsoft.com/office/drawing/2014/main" id="{430E30AF-B166-E279-BC78-EB04A73B6BA5}"/>
               </a:ext>
             </a:extLst>
           </p:cNvPr>
@@ -2102,7 +2190,7 @@
           <a:bodyPr/>
           <a:lstStyle/>
           <a:p>
-            <a:fld id="{945DF60E-9C85-43C8-A8C3-1D48C2D6D25E}" type="datetimeFigureOut">
+            <a:fld id="{C8FE3722-FB59-4CF6-A710-A829BA839290}" type="datetimeFigureOut">
               <a:rPr lang="en-SG" smtClean="0"/>
               <a:t>29/10/2026</a:t>
             </a:fld>
@@ -2115,7 +2203,7 @@
           <p:cNvPr id="5" name="Footer Placeholder 4">
             <a:extLst>
               <a:ext uri="{FF2B5EF4-FFF2-40B4-BE49-F238E27FC236}">
-                <a16:creationId xmlns:a16="http://schemas.microsoft.com/office/drawing/2014/main" id="{78F4A372-BA27-1677-C6BB-5B8B0AECBDD8}"/>
+                <a16:creationId xmlns:a16="http://schemas.microsoft.com/office/drawing/2014/main" id="{11813D49-D802-9B7D-D391-6D84A00AF0D7}"/>
               </a:ext>
             </a:extLst>
           </p:cNvPr>
@@ -2140,7 +2228,7 @@
           <p:cNvPr id="6" name="Slide Number Placeholder 5">
             <a:extLst>
               <a:ext uri="{FF2B5EF4-FFF2-40B4-BE49-F238E27FC236}">
-                <a16:creationId xmlns:a16="http://schemas.microsoft.com/office/drawing/2014/main" id="{4A6DD423-FA1D-90FF-47F7-D55064E1916D}"/>
+                <a16:creationId xmlns:a16="http://schemas.microsoft.com/office/drawing/2014/main" id="{ABCDC984-6F86-D9DA-86DA-A6EBBE264468}"/>
               </a:ext>
             </a:extLst>
           </p:cNvPr>
@@ -2156,7 +2244,7 @@
           <a:bodyPr/>
           <a:lstStyle/>
           <a:p>
-            <a:fld id="{F6AA237F-47F2-4AF9-A1AC-074287E22A0A}" type="slidenum">
+            <a:fld id="{E8F52024-4D36-4133-8FA6-58380FCEE047}" type="slidenum">
               <a:rPr lang="en-SG" smtClean="0"/>
               <a:t>‹#›</a:t>
             </a:fld>
@@ -2167,7 +2255,7 @@
     </p:spTree>
     <p:extLst>
       <p:ext uri="{BB962C8B-B14F-4D97-AF65-F5344CB8AC3E}">
-        <p14:creationId xmlns:p14="http://schemas.microsoft.com/office/powerpoint/2010/main" val="616433945"/>
+        <p14:creationId xmlns:p14="http://schemas.microsoft.com/office/powerpoint/2010/main" val="488100165"/>
       </p:ext>
     </p:extLst>
   </p:cSld>
@@ -2199,7 +2287,7 @@
           <p:cNvPr id="2" name="Title 1">
             <a:extLst>
               <a:ext uri="{FF2B5EF4-FFF2-40B4-BE49-F238E27FC236}">
-                <a16:creationId xmlns:a16="http://schemas.microsoft.com/office/drawing/2014/main" id="{338702B3-8675-0F64-DE21-A73B08C6A241}"/>
+                <a16:creationId xmlns:a16="http://schemas.microsoft.com/office/drawing/2014/main" id="{8046AB06-60F0-8B02-0F0F-D90691B298C7}"/>
               </a:ext>
             </a:extLst>
           </p:cNvPr>
@@ -2228,7 +2316,7 @@
           <p:cNvPr id="3" name="Vertical Text Placeholder 2">
             <a:extLst>
               <a:ext uri="{FF2B5EF4-FFF2-40B4-BE49-F238E27FC236}">
-                <a16:creationId xmlns:a16="http://schemas.microsoft.com/office/drawing/2014/main" id="{ED5C3562-8C08-0D8B-AAAE-DDDF74E29927}"/>
+                <a16:creationId xmlns:a16="http://schemas.microsoft.com/office/drawing/2014/main" id="{D6CD0700-A020-9764-96D0-89DEB6415682}"/>
               </a:ext>
             </a:extLst>
           </p:cNvPr>
@@ -2286,7 +2374,7 @@
           <p:cNvPr id="4" name="Date Placeholder 3">
             <a:extLst>
               <a:ext uri="{FF2B5EF4-FFF2-40B4-BE49-F238E27FC236}">
-                <a16:creationId xmlns:a16="http://schemas.microsoft.com/office/drawing/2014/main" id="{0DE8D9EA-D1D1-E6F1-41D8-76EAAADE0B8B}"/>
+                <a16:creationId xmlns:a16="http://schemas.microsoft.com/office/drawing/2014/main" id="{108E41FE-0D6C-1B85-DBCB-253F4A2F3408}"/>
               </a:ext>
             </a:extLst>
           </p:cNvPr>
@@ -2302,7 +2390,7 @@
           <a:bodyPr/>
           <a:lstStyle/>
           <a:p>
-            <a:fld id="{945DF60E-9C85-43C8-A8C3-1D48C2D6D25E}" type="datetimeFigureOut">
+            <a:fld id="{C8FE3722-FB59-4CF6-A710-A829BA839290}" type="datetimeFigureOut">
               <a:rPr lang="en-SG" smtClean="0"/>
               <a:t>29/10/2026</a:t>
             </a:fld>
@@ -2315,7 +2403,7 @@
           <p:cNvPr id="5" name="Footer Placeholder 4">
             <a:extLst>
               <a:ext uri="{FF2B5EF4-FFF2-40B4-BE49-F238E27FC236}">
-                <a16:creationId xmlns:a16="http://schemas.microsoft.com/office/drawing/2014/main" id="{45ACA899-DD05-D825-245A-E71A622FE8A0}"/>
+                <a16:creationId xmlns:a16="http://schemas.microsoft.com/office/drawing/2014/main" id="{13B50C4A-3EBA-9933-AE5A-E8EA741AB675}"/>
               </a:ext>
             </a:extLst>
           </p:cNvPr>
@@ -2340,7 +2428,7 @@
           <p:cNvPr id="6" name="Slide Number Placeholder 5">
             <a:extLst>
               <a:ext uri="{FF2B5EF4-FFF2-40B4-BE49-F238E27FC236}">
-                <a16:creationId xmlns:a16="http://schemas.microsoft.com/office/drawing/2014/main" id="{023C17F3-A8F1-75A6-93C0-5818FD42AF5B}"/>
+                <a16:creationId xmlns:a16="http://schemas.microsoft.com/office/drawing/2014/main" id="{010B826A-4C20-C24F-4667-F0A74B51B60E}"/>
               </a:ext>
             </a:extLst>
           </p:cNvPr>
@@ -2356,7 +2444,7 @@
           <a:bodyPr/>
           <a:lstStyle/>
           <a:p>
-            <a:fld id="{F6AA237F-47F2-4AF9-A1AC-074287E22A0A}" type="slidenum">
+            <a:fld id="{E8F52024-4D36-4133-8FA6-58380FCEE047}" type="slidenum">
               <a:rPr lang="en-SG" smtClean="0"/>
               <a:t>‹#›</a:t>
             </a:fld>
@@ -2367,7 +2455,7 @@
     </p:spTree>
     <p:extLst>
       <p:ext uri="{BB962C8B-B14F-4D97-AF65-F5344CB8AC3E}">
-        <p14:creationId xmlns:p14="http://schemas.microsoft.com/office/powerpoint/2010/main" val="424840021"/>
+        <p14:creationId xmlns:p14="http://schemas.microsoft.com/office/powerpoint/2010/main" val="1864696673"/>
       </p:ext>
     </p:extLst>
   </p:cSld>
@@ -2399,7 +2487,7 @@
           <p:cNvPr id="2" name="Vertical Title 1">
             <a:extLst>
               <a:ext uri="{FF2B5EF4-FFF2-40B4-BE49-F238E27FC236}">
-                <a16:creationId xmlns:a16="http://schemas.microsoft.com/office/drawing/2014/main" id="{55D9282B-99EF-9747-F2F3-9F307A2C936E}"/>
+                <a16:creationId xmlns:a16="http://schemas.microsoft.com/office/drawing/2014/main" id="{3FBB5B47-FE7F-D4EC-DAF1-18B40224AB97}"/>
               </a:ext>
             </a:extLst>
           </p:cNvPr>
@@ -2433,7 +2521,7 @@
           <p:cNvPr id="3" name="Vertical Text Placeholder 2">
             <a:extLst>
               <a:ext uri="{FF2B5EF4-FFF2-40B4-BE49-F238E27FC236}">
-                <a16:creationId xmlns:a16="http://schemas.microsoft.com/office/drawing/2014/main" id="{6C9A07AC-C499-FF37-D995-D9358F9F9F47}"/>
+                <a16:creationId xmlns:a16="http://schemas.microsoft.com/office/drawing/2014/main" id="{925331C8-9EB9-BE34-2F3C-C9DBC609673B}"/>
               </a:ext>
             </a:extLst>
           </p:cNvPr>
@@ -2496,7 +2584,7 @@
           <p:cNvPr id="4" name="Date Placeholder 3">
             <a:extLst>
               <a:ext uri="{FF2B5EF4-FFF2-40B4-BE49-F238E27FC236}">
-                <a16:creationId xmlns:a16="http://schemas.microsoft.com/office/drawing/2014/main" id="{7DEB2489-A88C-9C56-41DB-3403E53D6AC7}"/>
+                <a16:creationId xmlns:a16="http://schemas.microsoft.com/office/drawing/2014/main" id="{D2DA5D34-3220-E6E5-8F74-B7A837D3001C}"/>
               </a:ext>
             </a:extLst>
           </p:cNvPr>
@@ -2512,7 +2600,7 @@
           <a:bodyPr/>
           <a:lstStyle/>
           <a:p>
-            <a:fld id="{945DF60E-9C85-43C8-A8C3-1D48C2D6D25E}" type="datetimeFigureOut">
+            <a:fld id="{C8FE3722-FB59-4CF6-A710-A829BA839290}" type="datetimeFigureOut">
               <a:rPr lang="en-SG" smtClean="0"/>
               <a:t>29/10/2026</a:t>
             </a:fld>
@@ -2525,7 +2613,7 @@
           <p:cNvPr id="5" name="Footer Placeholder 4">
             <a:extLst>
               <a:ext uri="{FF2B5EF4-FFF2-40B4-BE49-F238E27FC236}">
-                <a16:creationId xmlns:a16="http://schemas.microsoft.com/office/drawing/2014/main" id="{4A2EB01C-666B-DA47-6330-2D6082FA686B}"/>
+                <a16:creationId xmlns:a16="http://schemas.microsoft.com/office/drawing/2014/main" id="{1E3EB845-C434-8A1D-71F8-52B2130DE5F7}"/>
               </a:ext>
             </a:extLst>
           </p:cNvPr>
@@ -2550,7 +2638,7 @@
           <p:cNvPr id="6" name="Slide Number Placeholder 5">
             <a:extLst>
               <a:ext uri="{FF2B5EF4-FFF2-40B4-BE49-F238E27FC236}">
-                <a16:creationId xmlns:a16="http://schemas.microsoft.com/office/drawing/2014/main" id="{5FB0DAEF-8B51-1E79-9911-54C97FD8DE22}"/>
+                <a16:creationId xmlns:a16="http://schemas.microsoft.com/office/drawing/2014/main" id="{BA798469-4E6F-C7B1-BB01-F6466E89BE65}"/>
               </a:ext>
             </a:extLst>
           </p:cNvPr>
@@ -2566,7 +2654,7 @@
           <a:bodyPr/>
           <a:lstStyle/>
           <a:p>
-            <a:fld id="{F6AA237F-47F2-4AF9-A1AC-074287E22A0A}" type="slidenum">
+            <a:fld id="{E8F52024-4D36-4133-8FA6-58380FCEE047}" type="slidenum">
               <a:rPr lang="en-SG" smtClean="0"/>
               <a:t>‹#›</a:t>
             </a:fld>
@@ -2577,7 +2665,7 @@
     </p:spTree>
     <p:extLst>
       <p:ext uri="{BB962C8B-B14F-4D97-AF65-F5344CB8AC3E}">
-        <p14:creationId xmlns:p14="http://schemas.microsoft.com/office/powerpoint/2010/main" val="23882218"/>
+        <p14:creationId xmlns:p14="http://schemas.microsoft.com/office/powerpoint/2010/main" val="1450341744"/>
       </p:ext>
     </p:extLst>
   </p:cSld>
@@ -2609,7 +2697,7 @@
           <p:cNvPr id="2" name="Title 1">
             <a:extLst>
               <a:ext uri="{FF2B5EF4-FFF2-40B4-BE49-F238E27FC236}">
-                <a16:creationId xmlns:a16="http://schemas.microsoft.com/office/drawing/2014/main" id="{B57B4CE4-C215-1BD0-AE80-FCD3821CF11C}"/>
+                <a16:creationId xmlns:a16="http://schemas.microsoft.com/office/drawing/2014/main" id="{30B2D0AB-A719-60FC-150F-D3B79954B434}"/>
               </a:ext>
             </a:extLst>
           </p:cNvPr>
@@ -2638,7 +2726,7 @@
           <p:cNvPr id="3" name="Content Placeholder 2">
             <a:extLst>
               <a:ext uri="{FF2B5EF4-FFF2-40B4-BE49-F238E27FC236}">
-                <a16:creationId xmlns:a16="http://schemas.microsoft.com/office/drawing/2014/main" id="{3E4BA42E-8326-D367-C745-FED66A602F1E}"/>
+                <a16:creationId xmlns:a16="http://schemas.microsoft.com/office/drawing/2014/main" id="{3140190D-A6E3-60E1-78E0-80A3C1B55F98}"/>
               </a:ext>
             </a:extLst>
           </p:cNvPr>
@@ -2696,7 +2784,7 @@
           <p:cNvPr id="4" name="Date Placeholder 3">
             <a:extLst>
               <a:ext uri="{FF2B5EF4-FFF2-40B4-BE49-F238E27FC236}">
-                <a16:creationId xmlns:a16="http://schemas.microsoft.com/office/drawing/2014/main" id="{8FB03A28-81D3-A76E-1762-6C6DF4E476D4}"/>
+                <a16:creationId xmlns:a16="http://schemas.microsoft.com/office/drawing/2014/main" id="{4A77BC9A-E0D5-5544-1859-8374DF07DEC9}"/>
               </a:ext>
             </a:extLst>
           </p:cNvPr>
@@ -2712,7 +2800,7 @@
           <a:bodyPr/>
           <a:lstStyle/>
           <a:p>
-            <a:fld id="{945DF60E-9C85-43C8-A8C3-1D48C2D6D25E}" type="datetimeFigureOut">
+            <a:fld id="{C8FE3722-FB59-4CF6-A710-A829BA839290}" type="datetimeFigureOut">
               <a:rPr lang="en-SG" smtClean="0"/>
               <a:t>29/10/2026</a:t>
             </a:fld>
@@ -2725,7 +2813,7 @@
           <p:cNvPr id="5" name="Footer Placeholder 4">
             <a:extLst>
               <a:ext uri="{FF2B5EF4-FFF2-40B4-BE49-F238E27FC236}">
-                <a16:creationId xmlns:a16="http://schemas.microsoft.com/office/drawing/2014/main" id="{FF80D3DB-1418-FC8C-CD0A-69180F3443FC}"/>
+                <a16:creationId xmlns:a16="http://schemas.microsoft.com/office/drawing/2014/main" id="{1DD229F8-592E-DC41-319A-1E44A906B581}"/>
               </a:ext>
             </a:extLst>
           </p:cNvPr>
@@ -2750,7 +2838,7 @@
           <p:cNvPr id="6" name="Slide Number Placeholder 5">
             <a:extLst>
               <a:ext uri="{FF2B5EF4-FFF2-40B4-BE49-F238E27FC236}">
-                <a16:creationId xmlns:a16="http://schemas.microsoft.com/office/drawing/2014/main" id="{AC66F50D-54B6-0607-7FFA-52BFD58CBE7D}"/>
+                <a16:creationId xmlns:a16="http://schemas.microsoft.com/office/drawing/2014/main" id="{0DE230A5-E211-963B-DA51-CCD951EF15AE}"/>
               </a:ext>
             </a:extLst>
           </p:cNvPr>
@@ -2766,7 +2854,7 @@
           <a:bodyPr/>
           <a:lstStyle/>
           <a:p>
-            <a:fld id="{F6AA237F-47F2-4AF9-A1AC-074287E22A0A}" type="slidenum">
+            <a:fld id="{E8F52024-4D36-4133-8FA6-58380FCEE047}" type="slidenum">
               <a:rPr lang="en-SG" smtClean="0"/>
               <a:t>‹#›</a:t>
             </a:fld>
@@ -2777,7 +2865,7 @@
     </p:spTree>
     <p:extLst>
       <p:ext uri="{BB962C8B-B14F-4D97-AF65-F5344CB8AC3E}">
-        <p14:creationId xmlns:p14="http://schemas.microsoft.com/office/powerpoint/2010/main" val="1101003846"/>
+        <p14:creationId xmlns:p14="http://schemas.microsoft.com/office/powerpoint/2010/main" val="3013325813"/>
       </p:ext>
     </p:extLst>
   </p:cSld>
@@ -2809,7 +2897,7 @@
           <p:cNvPr id="2" name="Title 1">
             <a:extLst>
               <a:ext uri="{FF2B5EF4-FFF2-40B4-BE49-F238E27FC236}">
-                <a16:creationId xmlns:a16="http://schemas.microsoft.com/office/drawing/2014/main" id="{EABB5C07-98A7-6317-3D0D-AA6FF1B48105}"/>
+                <a16:creationId xmlns:a16="http://schemas.microsoft.com/office/drawing/2014/main" id="{A93540CF-CBDE-3404-5431-26413EEB2D3E}"/>
               </a:ext>
             </a:extLst>
           </p:cNvPr>
@@ -2847,7 +2935,7 @@
           <p:cNvPr id="3" name="Text Placeholder 2">
             <a:extLst>
               <a:ext uri="{FF2B5EF4-FFF2-40B4-BE49-F238E27FC236}">
-                <a16:creationId xmlns:a16="http://schemas.microsoft.com/office/drawing/2014/main" id="{0302CEC9-5C64-C3D8-ECAC-C666E927F4B8}"/>
+                <a16:creationId xmlns:a16="http://schemas.microsoft.com/office/drawing/2014/main" id="{1D6C0A44-F7F3-6F5D-51B9-AB17A15452CA}"/>
               </a:ext>
             </a:extLst>
           </p:cNvPr>
@@ -2972,7 +3060,7 @@
           <p:cNvPr id="4" name="Date Placeholder 3">
             <a:extLst>
               <a:ext uri="{FF2B5EF4-FFF2-40B4-BE49-F238E27FC236}">
-                <a16:creationId xmlns:a16="http://schemas.microsoft.com/office/drawing/2014/main" id="{E1A95F6C-DBC5-8AF4-0FA3-56BE11F8631E}"/>
+                <a16:creationId xmlns:a16="http://schemas.microsoft.com/office/drawing/2014/main" id="{06858591-AF3B-FF31-A7EA-37B18EA588B4}"/>
               </a:ext>
             </a:extLst>
           </p:cNvPr>
@@ -2988,7 +3076,7 @@
           <a:bodyPr/>
           <a:lstStyle/>
           <a:p>
-            <a:fld id="{945DF60E-9C85-43C8-A8C3-1D48C2D6D25E}" type="datetimeFigureOut">
+            <a:fld id="{C8FE3722-FB59-4CF6-A710-A829BA839290}" type="datetimeFigureOut">
               <a:rPr lang="en-SG" smtClean="0"/>
               <a:t>29/10/2026</a:t>
             </a:fld>
@@ -3001,7 +3089,7 @@
           <p:cNvPr id="5" name="Footer Placeholder 4">
             <a:extLst>
               <a:ext uri="{FF2B5EF4-FFF2-40B4-BE49-F238E27FC236}">
-                <a16:creationId xmlns:a16="http://schemas.microsoft.com/office/drawing/2014/main" id="{D0FFC486-8C0C-97D2-70C6-4B88B314B6B6}"/>
+                <a16:creationId xmlns:a16="http://schemas.microsoft.com/office/drawing/2014/main" id="{60EEC292-6182-1E86-17F8-F06691948E77}"/>
               </a:ext>
             </a:extLst>
           </p:cNvPr>
@@ -3026,7 +3114,7 @@
           <p:cNvPr id="6" name="Slide Number Placeholder 5">
             <a:extLst>
               <a:ext uri="{FF2B5EF4-FFF2-40B4-BE49-F238E27FC236}">
-                <a16:creationId xmlns:a16="http://schemas.microsoft.com/office/drawing/2014/main" id="{B1761EF4-1463-92FD-2DC4-1CB1B054899E}"/>
+                <a16:creationId xmlns:a16="http://schemas.microsoft.com/office/drawing/2014/main" id="{15204ED6-2849-B795-EADE-2A54A4DE011C}"/>
               </a:ext>
             </a:extLst>
           </p:cNvPr>
@@ -3042,7 +3130,7 @@
           <a:bodyPr/>
           <a:lstStyle/>
           <a:p>
-            <a:fld id="{F6AA237F-47F2-4AF9-A1AC-074287E22A0A}" type="slidenum">
+            <a:fld id="{E8F52024-4D36-4133-8FA6-58380FCEE047}" type="slidenum">
               <a:rPr lang="en-SG" smtClean="0"/>
               <a:t>‹#›</a:t>
             </a:fld>
@@ -3053,7 +3141,7 @@
     </p:spTree>
     <p:extLst>
       <p:ext uri="{BB962C8B-B14F-4D97-AF65-F5344CB8AC3E}">
-        <p14:creationId xmlns:p14="http://schemas.microsoft.com/office/powerpoint/2010/main" val="4205937730"/>
+        <p14:creationId xmlns:p14="http://schemas.microsoft.com/office/powerpoint/2010/main" val="403893512"/>
       </p:ext>
     </p:extLst>
   </p:cSld>
@@ -3085,7 +3173,7 @@
           <p:cNvPr id="2" name="Title 1">
             <a:extLst>
               <a:ext uri="{FF2B5EF4-FFF2-40B4-BE49-F238E27FC236}">
-                <a16:creationId xmlns:a16="http://schemas.microsoft.com/office/drawing/2014/main" id="{E1E61D0C-56C7-CD13-EF9F-27B5910203D7}"/>
+                <a16:creationId xmlns:a16="http://schemas.microsoft.com/office/drawing/2014/main" id="{FCC2703F-6197-A063-737B-0D4F42B320A7}"/>
               </a:ext>
             </a:extLst>
           </p:cNvPr>
@@ -3114,7 +3202,7 @@
           <p:cNvPr id="3" name="Content Placeholder 2">
             <a:extLst>
               <a:ext uri="{FF2B5EF4-FFF2-40B4-BE49-F238E27FC236}">
-                <a16:creationId xmlns:a16="http://schemas.microsoft.com/office/drawing/2014/main" id="{2D41A2A9-730E-4942-528E-1286FC85647D}"/>
+                <a16:creationId xmlns:a16="http://schemas.microsoft.com/office/drawing/2014/main" id="{57CF9A02-BF5D-B425-60A2-4D685D69845E}"/>
               </a:ext>
             </a:extLst>
           </p:cNvPr>
@@ -3177,7 +3265,7 @@
           <p:cNvPr id="4" name="Content Placeholder 3">
             <a:extLst>
               <a:ext uri="{FF2B5EF4-FFF2-40B4-BE49-F238E27FC236}">
-                <a16:creationId xmlns:a16="http://schemas.microsoft.com/office/drawing/2014/main" id="{EB909E5A-FBEF-1311-09C0-1498610C021A}"/>
+                <a16:creationId xmlns:a16="http://schemas.microsoft.com/office/drawing/2014/main" id="{AB729E4E-5189-C4B5-CBC2-FEEDAEF27CE2}"/>
               </a:ext>
             </a:extLst>
           </p:cNvPr>
@@ -3240,7 +3328,7 @@
           <p:cNvPr id="5" name="Date Placeholder 4">
             <a:extLst>
               <a:ext uri="{FF2B5EF4-FFF2-40B4-BE49-F238E27FC236}">
-                <a16:creationId xmlns:a16="http://schemas.microsoft.com/office/drawing/2014/main" id="{731F7572-E760-27DE-8E53-7384FBE2C26D}"/>
+                <a16:creationId xmlns:a16="http://schemas.microsoft.com/office/drawing/2014/main" id="{EAE6B3A6-C643-1448-F784-AC065D84236C}"/>
               </a:ext>
             </a:extLst>
           </p:cNvPr>
@@ -3256,7 +3344,7 @@
           <a:bodyPr/>
           <a:lstStyle/>
           <a:p>
-            <a:fld id="{945DF60E-9C85-43C8-A8C3-1D48C2D6D25E}" type="datetimeFigureOut">
+            <a:fld id="{C8FE3722-FB59-4CF6-A710-A829BA839290}" type="datetimeFigureOut">
               <a:rPr lang="en-SG" smtClean="0"/>
               <a:t>29/10/2026</a:t>
             </a:fld>
@@ -3269,7 +3357,7 @@
           <p:cNvPr id="6" name="Footer Placeholder 5">
             <a:extLst>
               <a:ext uri="{FF2B5EF4-FFF2-40B4-BE49-F238E27FC236}">
-                <a16:creationId xmlns:a16="http://schemas.microsoft.com/office/drawing/2014/main" id="{D65B9422-FEC8-878A-7A29-D8F609B9E6EB}"/>
+                <a16:creationId xmlns:a16="http://schemas.microsoft.com/office/drawing/2014/main" id="{97F3CDB0-505B-6E59-ABFF-5C9FFEB822E0}"/>
               </a:ext>
             </a:extLst>
           </p:cNvPr>
@@ -3294,7 +3382,7 @@
           <p:cNvPr id="7" name="Slide Number Placeholder 6">
             <a:extLst>
               <a:ext uri="{FF2B5EF4-FFF2-40B4-BE49-F238E27FC236}">
-                <a16:creationId xmlns:a16="http://schemas.microsoft.com/office/drawing/2014/main" id="{938E54AD-DEB8-E639-4DD0-304123806B1A}"/>
+                <a16:creationId xmlns:a16="http://schemas.microsoft.com/office/drawing/2014/main" id="{7A940265-7246-E0D1-9728-811483D47A3E}"/>
               </a:ext>
             </a:extLst>
           </p:cNvPr>
@@ -3310,7 +3398,7 @@
           <a:bodyPr/>
           <a:lstStyle/>
           <a:p>
-            <a:fld id="{F6AA237F-47F2-4AF9-A1AC-074287E22A0A}" type="slidenum">
+            <a:fld id="{E8F52024-4D36-4133-8FA6-58380FCEE047}" type="slidenum">
               <a:rPr lang="en-SG" smtClean="0"/>
               <a:t>‹#›</a:t>
             </a:fld>
@@ -3321,7 +3409,7 @@
     </p:spTree>
     <p:extLst>
       <p:ext uri="{BB962C8B-B14F-4D97-AF65-F5344CB8AC3E}">
-        <p14:creationId xmlns:p14="http://schemas.microsoft.com/office/powerpoint/2010/main" val="677297205"/>
+        <p14:creationId xmlns:p14="http://schemas.microsoft.com/office/powerpoint/2010/main" val="375714850"/>
       </p:ext>
     </p:extLst>
   </p:cSld>
@@ -3353,7 +3441,7 @@
           <p:cNvPr id="2" name="Title 1">
             <a:extLst>
               <a:ext uri="{FF2B5EF4-FFF2-40B4-BE49-F238E27FC236}">
-                <a16:creationId xmlns:a16="http://schemas.microsoft.com/office/drawing/2014/main" id="{74291101-ED81-C2E0-90E0-3594C9A400C4}"/>
+                <a16:creationId xmlns:a16="http://schemas.microsoft.com/office/drawing/2014/main" id="{DCA31C59-3DD6-C14C-B3CF-4BD1B135C227}"/>
               </a:ext>
             </a:extLst>
           </p:cNvPr>
@@ -3387,7 +3475,7 @@
           <p:cNvPr id="3" name="Text Placeholder 2">
             <a:extLst>
               <a:ext uri="{FF2B5EF4-FFF2-40B4-BE49-F238E27FC236}">
-                <a16:creationId xmlns:a16="http://schemas.microsoft.com/office/drawing/2014/main" id="{CD1639AF-5E52-E4E6-9E6C-A15848C20518}"/>
+                <a16:creationId xmlns:a16="http://schemas.microsoft.com/office/drawing/2014/main" id="{E0142D67-E792-F58E-0804-7C7C8B5D28FA}"/>
               </a:ext>
             </a:extLst>
           </p:cNvPr>
@@ -3458,7 +3546,7 @@
           <p:cNvPr id="4" name="Content Placeholder 3">
             <a:extLst>
               <a:ext uri="{FF2B5EF4-FFF2-40B4-BE49-F238E27FC236}">
-                <a16:creationId xmlns:a16="http://schemas.microsoft.com/office/drawing/2014/main" id="{C8C32683-CA58-FE4B-F975-906EBEAB08F2}"/>
+                <a16:creationId xmlns:a16="http://schemas.microsoft.com/office/drawing/2014/main" id="{2B006FC9-D9BE-8E3D-8E75-1FF3F9BE0125}"/>
               </a:ext>
             </a:extLst>
           </p:cNvPr>
@@ -3521,7 +3609,7 @@
           <p:cNvPr id="5" name="Text Placeholder 4">
             <a:extLst>
               <a:ext uri="{FF2B5EF4-FFF2-40B4-BE49-F238E27FC236}">
-                <a16:creationId xmlns:a16="http://schemas.microsoft.com/office/drawing/2014/main" id="{7EE138EB-3CE7-0369-5F21-22F2E60F3E71}"/>
+                <a16:creationId xmlns:a16="http://schemas.microsoft.com/office/drawing/2014/main" id="{714E6104-ADC8-8804-4FC9-2FB3BE76888B}"/>
               </a:ext>
             </a:extLst>
           </p:cNvPr>
@@ -3592,7 +3680,7 @@
           <p:cNvPr id="6" name="Content Placeholder 5">
             <a:extLst>
               <a:ext uri="{FF2B5EF4-FFF2-40B4-BE49-F238E27FC236}">
-                <a16:creationId xmlns:a16="http://schemas.microsoft.com/office/drawing/2014/main" id="{8ECC3FE5-7B79-36D2-5C0E-D4FBBF210E21}"/>
+                <a16:creationId xmlns:a16="http://schemas.microsoft.com/office/drawing/2014/main" id="{4AD8AFD8-A46F-DF2C-AE51-A275D8769008}"/>
               </a:ext>
             </a:extLst>
           </p:cNvPr>
@@ -3655,7 +3743,7 @@
           <p:cNvPr id="7" name="Date Placeholder 6">
             <a:extLst>
               <a:ext uri="{FF2B5EF4-FFF2-40B4-BE49-F238E27FC236}">
-                <a16:creationId xmlns:a16="http://schemas.microsoft.com/office/drawing/2014/main" id="{0741BB56-AE49-A611-DA52-408749518AFF}"/>
+                <a16:creationId xmlns:a16="http://schemas.microsoft.com/office/drawing/2014/main" id="{CC19E7C7-180A-7EFA-C20F-1D668678922E}"/>
               </a:ext>
             </a:extLst>
           </p:cNvPr>
@@ -3671,7 +3759,7 @@
           <a:bodyPr/>
           <a:lstStyle/>
           <a:p>
-            <a:fld id="{945DF60E-9C85-43C8-A8C3-1D48C2D6D25E}" type="datetimeFigureOut">
+            <a:fld id="{C8FE3722-FB59-4CF6-A710-A829BA839290}" type="datetimeFigureOut">
               <a:rPr lang="en-SG" smtClean="0"/>
               <a:t>29/10/2026</a:t>
             </a:fld>
@@ -3684,7 +3772,7 @@
           <p:cNvPr id="8" name="Footer Placeholder 7">
             <a:extLst>
               <a:ext uri="{FF2B5EF4-FFF2-40B4-BE49-F238E27FC236}">
-                <a16:creationId xmlns:a16="http://schemas.microsoft.com/office/drawing/2014/main" id="{4A2BAE82-66FF-87DC-189B-29DD0C5A6E72}"/>
+                <a16:creationId xmlns:a16="http://schemas.microsoft.com/office/drawing/2014/main" id="{86F34E06-446B-629B-D07B-7FBC4429FC0C}"/>
               </a:ext>
             </a:extLst>
           </p:cNvPr>
@@ -3709,7 +3797,7 @@
           <p:cNvPr id="9" name="Slide Number Placeholder 8">
             <a:extLst>
               <a:ext uri="{FF2B5EF4-FFF2-40B4-BE49-F238E27FC236}">
-                <a16:creationId xmlns:a16="http://schemas.microsoft.com/office/drawing/2014/main" id="{69AD2643-EEE0-EF10-3A65-BE98DBF6A84A}"/>
+                <a16:creationId xmlns:a16="http://schemas.microsoft.com/office/drawing/2014/main" id="{E19AF70C-3B80-DCDA-B6F7-D789DF7FD3CB}"/>
               </a:ext>
             </a:extLst>
           </p:cNvPr>
@@ -3725,7 +3813,7 @@
           <a:bodyPr/>
           <a:lstStyle/>
           <a:p>
-            <a:fld id="{F6AA237F-47F2-4AF9-A1AC-074287E22A0A}" type="slidenum">
+            <a:fld id="{E8F52024-4D36-4133-8FA6-58380FCEE047}" type="slidenum">
               <a:rPr lang="en-SG" smtClean="0"/>
               <a:t>‹#›</a:t>
             </a:fld>
@@ -3736,7 +3824,7 @@
     </p:spTree>
     <p:extLst>
       <p:ext uri="{BB962C8B-B14F-4D97-AF65-F5344CB8AC3E}">
-        <p14:creationId xmlns:p14="http://schemas.microsoft.com/office/powerpoint/2010/main" val="309858547"/>
+        <p14:creationId xmlns:p14="http://schemas.microsoft.com/office/powerpoint/2010/main" val="2505347637"/>
       </p:ext>
     </p:extLst>
   </p:cSld>
@@ -3768,7 +3856,7 @@
           <p:cNvPr id="2" name="Title 1">
             <a:extLst>
               <a:ext uri="{FF2B5EF4-FFF2-40B4-BE49-F238E27FC236}">
-                <a16:creationId xmlns:a16="http://schemas.microsoft.com/office/drawing/2014/main" id="{B7B1F618-AE25-12F5-5E59-D697CC872A5C}"/>
+                <a16:creationId xmlns:a16="http://schemas.microsoft.com/office/drawing/2014/main" id="{3A4A44F4-FA51-7AE8-EF9A-CF66BB44F652}"/>
               </a:ext>
             </a:extLst>
           </p:cNvPr>
@@ -3797,7 +3885,7 @@
           <p:cNvPr id="3" name="Date Placeholder 2">
             <a:extLst>
               <a:ext uri="{FF2B5EF4-FFF2-40B4-BE49-F238E27FC236}">
-                <a16:creationId xmlns:a16="http://schemas.microsoft.com/office/drawing/2014/main" id="{D6E661DF-0430-A686-D887-6541798D822B}"/>
+                <a16:creationId xmlns:a16="http://schemas.microsoft.com/office/drawing/2014/main" id="{9E22F3C9-FBFD-524A-55A7-FD5C3A764DAB}"/>
               </a:ext>
             </a:extLst>
           </p:cNvPr>
@@ -3813,7 +3901,7 @@
           <a:bodyPr/>
           <a:lstStyle/>
           <a:p>
-            <a:fld id="{945DF60E-9C85-43C8-A8C3-1D48C2D6D25E}" type="datetimeFigureOut">
+            <a:fld id="{C8FE3722-FB59-4CF6-A710-A829BA839290}" type="datetimeFigureOut">
               <a:rPr lang="en-SG" smtClean="0"/>
               <a:t>29/10/2026</a:t>
             </a:fld>
@@ -3826,7 +3914,7 @@
           <p:cNvPr id="4" name="Footer Placeholder 3">
             <a:extLst>
               <a:ext uri="{FF2B5EF4-FFF2-40B4-BE49-F238E27FC236}">
-                <a16:creationId xmlns:a16="http://schemas.microsoft.com/office/drawing/2014/main" id="{20E29B1B-3BD2-FB79-2765-7E5803F34BD8}"/>
+                <a16:creationId xmlns:a16="http://schemas.microsoft.com/office/drawing/2014/main" id="{436472F7-CC6C-AC2E-4AAA-F2008FB66E9C}"/>
               </a:ext>
             </a:extLst>
           </p:cNvPr>
@@ -3851,7 +3939,7 @@
           <p:cNvPr id="5" name="Slide Number Placeholder 4">
             <a:extLst>
               <a:ext uri="{FF2B5EF4-FFF2-40B4-BE49-F238E27FC236}">
-                <a16:creationId xmlns:a16="http://schemas.microsoft.com/office/drawing/2014/main" id="{A0FCC9DC-2F0B-14C6-D917-80F4EB695554}"/>
+                <a16:creationId xmlns:a16="http://schemas.microsoft.com/office/drawing/2014/main" id="{D55A51B5-F3E1-F379-2B58-DBBDDD154038}"/>
               </a:ext>
             </a:extLst>
           </p:cNvPr>
@@ -3867,7 +3955,7 @@
           <a:bodyPr/>
           <a:lstStyle/>
           <a:p>
-            <a:fld id="{F6AA237F-47F2-4AF9-A1AC-074287E22A0A}" type="slidenum">
+            <a:fld id="{E8F52024-4D36-4133-8FA6-58380FCEE047}" type="slidenum">
               <a:rPr lang="en-SG" smtClean="0"/>
               <a:t>‹#›</a:t>
             </a:fld>
@@ -3878,7 +3966,7 @@
     </p:spTree>
     <p:extLst>
       <p:ext uri="{BB962C8B-B14F-4D97-AF65-F5344CB8AC3E}">
-        <p14:creationId xmlns:p14="http://schemas.microsoft.com/office/powerpoint/2010/main" val="877075545"/>
+        <p14:creationId xmlns:p14="http://schemas.microsoft.com/office/powerpoint/2010/main" val="3891371704"/>
       </p:ext>
     </p:extLst>
   </p:cSld>
@@ -3910,7 +3998,7 @@
           <p:cNvPr id="2" name="Date Placeholder 1">
             <a:extLst>
               <a:ext uri="{FF2B5EF4-FFF2-40B4-BE49-F238E27FC236}">
-                <a16:creationId xmlns:a16="http://schemas.microsoft.com/office/drawing/2014/main" id="{7F7AE62D-7751-499F-0DFC-78C267E6F65F}"/>
+                <a16:creationId xmlns:a16="http://schemas.microsoft.com/office/drawing/2014/main" id="{9F2FD2E2-2688-29BC-5863-8226AD8EAE3E}"/>
               </a:ext>
             </a:extLst>
           </p:cNvPr>
@@ -3926,7 +4014,7 @@
           <a:bodyPr/>
           <a:lstStyle/>
           <a:p>
-            <a:fld id="{945DF60E-9C85-43C8-A8C3-1D48C2D6D25E}" type="datetimeFigureOut">
+            <a:fld id="{C8FE3722-FB59-4CF6-A710-A829BA839290}" type="datetimeFigureOut">
               <a:rPr lang="en-SG" smtClean="0"/>
               <a:t>29/10/2026</a:t>
             </a:fld>
@@ -3939,7 +4027,7 @@
           <p:cNvPr id="3" name="Footer Placeholder 2">
             <a:extLst>
               <a:ext uri="{FF2B5EF4-FFF2-40B4-BE49-F238E27FC236}">
-                <a16:creationId xmlns:a16="http://schemas.microsoft.com/office/drawing/2014/main" id="{B6ADA2C8-5C98-69F3-57BD-99DEFC385068}"/>
+                <a16:creationId xmlns:a16="http://schemas.microsoft.com/office/drawing/2014/main" id="{9D8EDB71-768B-9400-D534-1D0BDF213018}"/>
               </a:ext>
             </a:extLst>
           </p:cNvPr>
@@ -3964,7 +4052,7 @@
           <p:cNvPr id="4" name="Slide Number Placeholder 3">
             <a:extLst>
               <a:ext uri="{FF2B5EF4-FFF2-40B4-BE49-F238E27FC236}">
-                <a16:creationId xmlns:a16="http://schemas.microsoft.com/office/drawing/2014/main" id="{49E845CF-2F98-5D02-D8E4-3476DAF0436E}"/>
+                <a16:creationId xmlns:a16="http://schemas.microsoft.com/office/drawing/2014/main" id="{B75E0828-97C0-34EB-66DE-2A8B2A2BED0C}"/>
               </a:ext>
             </a:extLst>
           </p:cNvPr>
@@ -3980,7 +4068,7 @@
           <a:bodyPr/>
           <a:lstStyle/>
           <a:p>
-            <a:fld id="{F6AA237F-47F2-4AF9-A1AC-074287E22A0A}" type="slidenum">
+            <a:fld id="{E8F52024-4D36-4133-8FA6-58380FCEE047}" type="slidenum">
               <a:rPr lang="en-SG" smtClean="0"/>
               <a:t>‹#›</a:t>
             </a:fld>
@@ -3991,7 +4079,7 @@
     </p:spTree>
     <p:extLst>
       <p:ext uri="{BB962C8B-B14F-4D97-AF65-F5344CB8AC3E}">
-        <p14:creationId xmlns:p14="http://schemas.microsoft.com/office/powerpoint/2010/main" val="235001555"/>
+        <p14:creationId xmlns:p14="http://schemas.microsoft.com/office/powerpoint/2010/main" val="75101500"/>
       </p:ext>
     </p:extLst>
   </p:cSld>
@@ -4023,7 +4111,7 @@
           <p:cNvPr id="2" name="Title 1">
             <a:extLst>
               <a:ext uri="{FF2B5EF4-FFF2-40B4-BE49-F238E27FC236}">
-                <a16:creationId xmlns:a16="http://schemas.microsoft.com/office/drawing/2014/main" id="{5ABCD1E4-49F7-8AE9-39A2-2672DD2BB5EC}"/>
+                <a16:creationId xmlns:a16="http://schemas.microsoft.com/office/drawing/2014/main" id="{D95C51A9-4F2C-35CA-4648-43F424836694}"/>
               </a:ext>
             </a:extLst>
           </p:cNvPr>
@@ -4061,7 +4149,7 @@
           <p:cNvPr id="3" name="Content Placeholder 2">
             <a:extLst>
               <a:ext uri="{FF2B5EF4-FFF2-40B4-BE49-F238E27FC236}">
-                <a16:creationId xmlns:a16="http://schemas.microsoft.com/office/drawing/2014/main" id="{3A2580B8-18A2-AC89-C0F3-1CB1D56438C7}"/>
+                <a16:creationId xmlns:a16="http://schemas.microsoft.com/office/drawing/2014/main" id="{34DF0DFB-097C-0E72-66AD-38712540FB72}"/>
               </a:ext>
             </a:extLst>
           </p:cNvPr>
@@ -4152,7 +4240,7 @@
           <p:cNvPr id="4" name="Text Placeholder 3">
             <a:extLst>
               <a:ext uri="{FF2B5EF4-FFF2-40B4-BE49-F238E27FC236}">
-                <a16:creationId xmlns:a16="http://schemas.microsoft.com/office/drawing/2014/main" id="{03D281E6-889A-6E95-C239-281780DB926E}"/>
+                <a16:creationId xmlns:a16="http://schemas.microsoft.com/office/drawing/2014/main" id="{459DE231-5925-B31A-6BC4-77E76EC71E85}"/>
               </a:ext>
             </a:extLst>
           </p:cNvPr>
@@ -4223,7 +4311,7 @@
           <p:cNvPr id="5" name="Date Placeholder 4">
             <a:extLst>
               <a:ext uri="{FF2B5EF4-FFF2-40B4-BE49-F238E27FC236}">
-                <a16:creationId xmlns:a16="http://schemas.microsoft.com/office/drawing/2014/main" id="{F0BB4DC1-349B-D7E4-2E45-412003AB1FCB}"/>
+                <a16:creationId xmlns:a16="http://schemas.microsoft.com/office/drawing/2014/main" id="{8CF84B37-1A75-F5F8-9237-84690D34DE6F}"/>
               </a:ext>
             </a:extLst>
           </p:cNvPr>
@@ -4239,7 +4327,7 @@
           <a:bodyPr/>
           <a:lstStyle/>
           <a:p>
-            <a:fld id="{945DF60E-9C85-43C8-A8C3-1D48C2D6D25E}" type="datetimeFigureOut">
+            <a:fld id="{C8FE3722-FB59-4CF6-A710-A829BA839290}" type="datetimeFigureOut">
               <a:rPr lang="en-SG" smtClean="0"/>
               <a:t>29/10/2026</a:t>
             </a:fld>
@@ -4252,7 +4340,7 @@
           <p:cNvPr id="6" name="Footer Placeholder 5">
             <a:extLst>
               <a:ext uri="{FF2B5EF4-FFF2-40B4-BE49-F238E27FC236}">
-                <a16:creationId xmlns:a16="http://schemas.microsoft.com/office/drawing/2014/main" id="{CD73BD58-E406-A2A7-3528-161F8AF52F04}"/>
+                <a16:creationId xmlns:a16="http://schemas.microsoft.com/office/drawing/2014/main" id="{024CF43F-1C0A-03DE-7F59-7130D15C2367}"/>
               </a:ext>
             </a:extLst>
           </p:cNvPr>
@@ -4277,7 +4365,7 @@
           <p:cNvPr id="7" name="Slide Number Placeholder 6">
             <a:extLst>
               <a:ext uri="{FF2B5EF4-FFF2-40B4-BE49-F238E27FC236}">
-                <a16:creationId xmlns:a16="http://schemas.microsoft.com/office/drawing/2014/main" id="{8772046C-F876-8D26-819D-9A3EDBA41BAF}"/>
+                <a16:creationId xmlns:a16="http://schemas.microsoft.com/office/drawing/2014/main" id="{0E5F1340-758A-0297-5883-47B01337F6F2}"/>
               </a:ext>
             </a:extLst>
           </p:cNvPr>
@@ -4293,7 +4381,7 @@
           <a:bodyPr/>
           <a:lstStyle/>
           <a:p>
-            <a:fld id="{F6AA237F-47F2-4AF9-A1AC-074287E22A0A}" type="slidenum">
+            <a:fld id="{E8F52024-4D36-4133-8FA6-58380FCEE047}" type="slidenum">
               <a:rPr lang="en-SG" smtClean="0"/>
               <a:t>‹#›</a:t>
             </a:fld>
@@ -4304,7 +4392,7 @@
     </p:spTree>
     <p:extLst>
       <p:ext uri="{BB962C8B-B14F-4D97-AF65-F5344CB8AC3E}">
-        <p14:creationId xmlns:p14="http://schemas.microsoft.com/office/powerpoint/2010/main" val="3308803367"/>
+        <p14:creationId xmlns:p14="http://schemas.microsoft.com/office/powerpoint/2010/main" val="3044987643"/>
       </p:ext>
     </p:extLst>
   </p:cSld>
@@ -4336,7 +4424,7 @@
           <p:cNvPr id="2" name="Title 1">
             <a:extLst>
               <a:ext uri="{FF2B5EF4-FFF2-40B4-BE49-F238E27FC236}">
-                <a16:creationId xmlns:a16="http://schemas.microsoft.com/office/drawing/2014/main" id="{B64D156D-6778-AE21-3014-13B70288B5CD}"/>
+                <a16:creationId xmlns:a16="http://schemas.microsoft.com/office/drawing/2014/main" id="{A4AFC591-DBBE-8DB7-3261-689C34340EA1}"/>
               </a:ext>
             </a:extLst>
           </p:cNvPr>
@@ -4374,7 +4462,7 @@
           <p:cNvPr id="3" name="Picture Placeholder 2">
             <a:extLst>
               <a:ext uri="{FF2B5EF4-FFF2-40B4-BE49-F238E27FC236}">
-                <a16:creationId xmlns:a16="http://schemas.microsoft.com/office/drawing/2014/main" id="{777D1C68-5B1E-C6B0-062D-491500B225CC}"/>
+                <a16:creationId xmlns:a16="http://schemas.microsoft.com/office/drawing/2014/main" id="{7F54A1C2-72E3-3358-0F37-EFB922CCB594}"/>
               </a:ext>
             </a:extLst>
           </p:cNvPr>
@@ -4441,7 +4529,7 @@
           <p:cNvPr id="4" name="Text Placeholder 3">
             <a:extLst>
               <a:ext uri="{FF2B5EF4-FFF2-40B4-BE49-F238E27FC236}">
-                <a16:creationId xmlns:a16="http://schemas.microsoft.com/office/drawing/2014/main" id="{99C8614E-BA8C-F974-9C54-63364A486366}"/>
+                <a16:creationId xmlns:a16="http://schemas.microsoft.com/office/drawing/2014/main" id="{4B841228-6A3A-0F35-F23C-204F42664B3A}"/>
               </a:ext>
             </a:extLst>
           </p:cNvPr>
@@ -4512,7 +4600,7 @@
           <p:cNvPr id="5" name="Date Placeholder 4">
             <a:extLst>
               <a:ext uri="{FF2B5EF4-FFF2-40B4-BE49-F238E27FC236}">
-                <a16:creationId xmlns:a16="http://schemas.microsoft.com/office/drawing/2014/main" id="{28C7734F-A4A5-7770-4B59-A558C6254C12}"/>
+                <a16:creationId xmlns:a16="http://schemas.microsoft.com/office/drawing/2014/main" id="{7095F388-404B-3618-C3A9-70F499C5DCAB}"/>
               </a:ext>
             </a:extLst>
           </p:cNvPr>
@@ -4528,7 +4616,7 @@
           <a:bodyPr/>
           <a:lstStyle/>
           <a:p>
-            <a:fld id="{945DF60E-9C85-43C8-A8C3-1D48C2D6D25E}" type="datetimeFigureOut">
+            <a:fld id="{C8FE3722-FB59-4CF6-A710-A829BA839290}" type="datetimeFigureOut">
               <a:rPr lang="en-SG" smtClean="0"/>
               <a:t>29/10/2026</a:t>
             </a:fld>
@@ -4541,7 +4629,7 @@
           <p:cNvPr id="6" name="Footer Placeholder 5">
             <a:extLst>
               <a:ext uri="{FF2B5EF4-FFF2-40B4-BE49-F238E27FC236}">
-                <a16:creationId xmlns:a16="http://schemas.microsoft.com/office/drawing/2014/main" id="{E309B0F1-13C8-F036-4125-8A9BD22692C7}"/>
+                <a16:creationId xmlns:a16="http://schemas.microsoft.com/office/drawing/2014/main" id="{C06049FB-126D-91CC-9511-333F669A9511}"/>
               </a:ext>
             </a:extLst>
           </p:cNvPr>
@@ -4566,7 +4654,7 @@
           <p:cNvPr id="7" name="Slide Number Placeholder 6">
             <a:extLst>
               <a:ext uri="{FF2B5EF4-FFF2-40B4-BE49-F238E27FC236}">
-                <a16:creationId xmlns:a16="http://schemas.microsoft.com/office/drawing/2014/main" id="{39A1D12E-0D12-C9E6-65A3-440C28641C70}"/>
+                <a16:creationId xmlns:a16="http://schemas.microsoft.com/office/drawing/2014/main" id="{BE041E66-AC02-750C-8F3C-88B2069DE32A}"/>
               </a:ext>
             </a:extLst>
           </p:cNvPr>
@@ -4582,7 +4670,7 @@
           <a:bodyPr/>
           <a:lstStyle/>
           <a:p>
-            <a:fld id="{F6AA237F-47F2-4AF9-A1AC-074287E22A0A}" type="slidenum">
+            <a:fld id="{E8F52024-4D36-4133-8FA6-58380FCEE047}" type="slidenum">
               <a:rPr lang="en-SG" smtClean="0"/>
               <a:t>‹#›</a:t>
             </a:fld>
@@ -4593,7 +4681,7 @@
     </p:spTree>
     <p:extLst>
       <p:ext uri="{BB962C8B-B14F-4D97-AF65-F5344CB8AC3E}">
-        <p14:creationId xmlns:p14="http://schemas.microsoft.com/office/powerpoint/2010/main" val="148333632"/>
+        <p14:creationId xmlns:p14="http://schemas.microsoft.com/office/powerpoint/2010/main" val="1645461495"/>
       </p:ext>
     </p:extLst>
   </p:cSld>
@@ -4633,7 +4721,7 @@
           <p:cNvPr id="2" name="Title Placeholder 1">
             <a:extLst>
               <a:ext uri="{FF2B5EF4-FFF2-40B4-BE49-F238E27FC236}">
-                <a16:creationId xmlns:a16="http://schemas.microsoft.com/office/drawing/2014/main" id="{3FCEB458-BB34-2C3B-D32E-0F052848A4DD}"/>
+                <a16:creationId xmlns:a16="http://schemas.microsoft.com/office/drawing/2014/main" id="{2B3EE76F-8705-0468-03D8-178D995807B2}"/>
               </a:ext>
             </a:extLst>
           </p:cNvPr>
@@ -4672,7 +4760,7 @@
           <p:cNvPr id="3" name="Text Placeholder 2">
             <a:extLst>
               <a:ext uri="{FF2B5EF4-FFF2-40B4-BE49-F238E27FC236}">
-                <a16:creationId xmlns:a16="http://schemas.microsoft.com/office/drawing/2014/main" id="{228C991F-26CB-AA32-7C6A-E24BB71228B9}"/>
+                <a16:creationId xmlns:a16="http://schemas.microsoft.com/office/drawing/2014/main" id="{4F62707B-FBA2-636C-2551-7A5BC924FA2A}"/>
               </a:ext>
             </a:extLst>
           </p:cNvPr>
@@ -4740,7 +4828,7 @@
           <p:cNvPr id="4" name="Date Placeholder 3">
             <a:extLst>
               <a:ext uri="{FF2B5EF4-FFF2-40B4-BE49-F238E27FC236}">
-                <a16:creationId xmlns:a16="http://schemas.microsoft.com/office/drawing/2014/main" id="{168665C3-EC1E-78F8-9348-44E560837BEA}"/>
+                <a16:creationId xmlns:a16="http://schemas.microsoft.com/office/drawing/2014/main" id="{9817F010-C14C-16C9-D5B0-E2CA15E1DAAC}"/>
               </a:ext>
             </a:extLst>
           </p:cNvPr>
@@ -4774,7 +4862,7 @@
             </a:lvl1pPr>
           </a:lstStyle>
           <a:p>
-            <a:fld id="{945DF60E-9C85-43C8-A8C3-1D48C2D6D25E}" type="datetimeFigureOut">
+            <a:fld id="{C8FE3722-FB59-4CF6-A710-A829BA839290}" type="datetimeFigureOut">
               <a:rPr lang="en-SG" smtClean="0"/>
               <a:t>29/10/2026</a:t>
             </a:fld>
@@ -4787,7 +4875,7 @@
           <p:cNvPr id="5" name="Footer Placeholder 4">
             <a:extLst>
               <a:ext uri="{FF2B5EF4-FFF2-40B4-BE49-F238E27FC236}">
-                <a16:creationId xmlns:a16="http://schemas.microsoft.com/office/drawing/2014/main" id="{645E8106-BF16-CC49-B272-23E160CD07F2}"/>
+                <a16:creationId xmlns:a16="http://schemas.microsoft.com/office/drawing/2014/main" id="{F45F8D22-F99A-3070-922C-E071219F7D31}"/>
               </a:ext>
             </a:extLst>
           </p:cNvPr>
@@ -4830,7 +4918,7 @@
           <p:cNvPr id="6" name="Slide Number Placeholder 5">
             <a:extLst>
               <a:ext uri="{FF2B5EF4-FFF2-40B4-BE49-F238E27FC236}">
-                <a16:creationId xmlns:a16="http://schemas.microsoft.com/office/drawing/2014/main" id="{F4DB143B-AA7C-C8A9-5CCC-25B645A480C5}"/>
+                <a16:creationId xmlns:a16="http://schemas.microsoft.com/office/drawing/2014/main" id="{8F4397E5-C251-9849-8B55-4102E37296A6}"/>
               </a:ext>
             </a:extLst>
           </p:cNvPr>
@@ -4864,7 +4952,7 @@
             </a:lvl1pPr>
           </a:lstStyle>
           <a:p>
-            <a:fld id="{F6AA237F-47F2-4AF9-A1AC-074287E22A0A}" type="slidenum">
+            <a:fld id="{E8F52024-4D36-4133-8FA6-58380FCEE047}" type="slidenum">
               <a:rPr lang="en-SG" smtClean="0"/>
               <a:t>‹#›</a:t>
             </a:fld>
@@ -4875,7 +4963,7 @@
     </p:spTree>
     <p:extLst>
       <p:ext uri="{BB962C8B-B14F-4D97-AF65-F5344CB8AC3E}">
-        <p14:creationId xmlns:p14="http://schemas.microsoft.com/office/powerpoint/2010/main" val="400868940"/>
+        <p14:creationId xmlns:p14="http://schemas.microsoft.com/office/powerpoint/2010/main" val="4075332753"/>
       </p:ext>
     </p:extLst>
   </p:cSld>
@@ -5206,7 +5294,7 @@
           <p:cNvPr id="8" name="Straight Connector 7">
             <a:extLst>
               <a:ext uri="{FF2B5EF4-FFF2-40B4-BE49-F238E27FC236}">
-                <a16:creationId xmlns:a16="http://schemas.microsoft.com/office/drawing/2014/main" id="{105AFB74-70E5-F75F-1D90-46318F85DB9B}"/>
+                <a16:creationId xmlns:a16="http://schemas.microsoft.com/office/drawing/2014/main" id="{7328D84D-0553-85A9-3F0C-D18122FC660C}"/>
               </a:ext>
             </a:extLst>
           </p:cNvPr>
@@ -5247,7 +5335,7 @@
           <p:cNvPr id="7" name="Straight Connector 6">
             <a:extLst>
               <a:ext uri="{FF2B5EF4-FFF2-40B4-BE49-F238E27FC236}">
-                <a16:creationId xmlns:a16="http://schemas.microsoft.com/office/drawing/2014/main" id="{D0B9DC79-1134-ED5D-EDF8-BF4B4361E9ED}"/>
+                <a16:creationId xmlns:a16="http://schemas.microsoft.com/office/drawing/2014/main" id="{49D4E586-50C2-D5FE-6148-9FE642D358CC}"/>
               </a:ext>
             </a:extLst>
           </p:cNvPr>
@@ -5288,7 +5376,7 @@
           <p:cNvPr id="6" name="Oval 5">
             <a:extLst>
               <a:ext uri="{FF2B5EF4-FFF2-40B4-BE49-F238E27FC236}">
-                <a16:creationId xmlns:a16="http://schemas.microsoft.com/office/drawing/2014/main" id="{7DDD8F5A-C425-F28D-6026-A93FC60A6E1A}"/>
+                <a16:creationId xmlns:a16="http://schemas.microsoft.com/office/drawing/2014/main" id="{8237F5B3-C49A-3898-9726-FF805A3A8D4A}"/>
               </a:ext>
             </a:extLst>
           </p:cNvPr>
@@ -5352,7 +5440,7 @@
           <p:cNvPr id="5" name="Oval 4">
             <a:extLst>
               <a:ext uri="{FF2B5EF4-FFF2-40B4-BE49-F238E27FC236}">
-                <a16:creationId xmlns:a16="http://schemas.microsoft.com/office/drawing/2014/main" id="{A28A1128-B4AE-2EC7-FD3E-CFFA4855DC30}"/>
+                <a16:creationId xmlns:a16="http://schemas.microsoft.com/office/drawing/2014/main" id="{19D6F797-598A-37C2-EF28-DF544DDC1C00}"/>
               </a:ext>
             </a:extLst>
           </p:cNvPr>
@@ -5416,7 +5504,7 @@
           <p:cNvPr id="4" name="Oval 3">
             <a:extLst>
               <a:ext uri="{FF2B5EF4-FFF2-40B4-BE49-F238E27FC236}">
-                <a16:creationId xmlns:a16="http://schemas.microsoft.com/office/drawing/2014/main" id="{84E23BA4-3E2E-42D7-820C-8EC3D29C5B7D}"/>
+                <a16:creationId xmlns:a16="http://schemas.microsoft.com/office/drawing/2014/main" id="{E6D02847-09EF-B832-469C-6589F73362D8}"/>
               </a:ext>
             </a:extLst>
           </p:cNvPr>
@@ -5480,7 +5568,7 @@
           <p:cNvPr id="3" name="Oval 2">
             <a:extLst>
               <a:ext uri="{FF2B5EF4-FFF2-40B4-BE49-F238E27FC236}">
-                <a16:creationId xmlns:a16="http://schemas.microsoft.com/office/drawing/2014/main" id="{3EF5EC6C-9A93-647E-08D6-B967390B784C}"/>
+                <a16:creationId xmlns:a16="http://schemas.microsoft.com/office/drawing/2014/main" id="{20DAB4AA-06A9-B7CA-7162-9B0C99F988B5}"/>
               </a:ext>
             </a:extLst>
           </p:cNvPr>
@@ -5544,7 +5632,7 @@
           <p:cNvPr id="2" name="Title 1" descr="Adaptive CGF Trainer">
             <a:extLst>
               <a:ext uri="{FF2B5EF4-FFF2-40B4-BE49-F238E27FC236}">
-                <a16:creationId xmlns:a16="http://schemas.microsoft.com/office/drawing/2014/main" id="{A960B65C-F15C-1CA7-DBF2-9F0BBA0BC407}"/>
+                <a16:creationId xmlns:a16="http://schemas.microsoft.com/office/drawing/2014/main" id="{A7F9B775-D742-BAA9-26AF-5F89CF3CA4EA}"/>
               </a:ext>
             </a:extLst>
           </p:cNvPr>
@@ -5584,7 +5672,7 @@
           <p:cNvPr id="9" name="Straight Connector 8">
             <a:extLst>
               <a:ext uri="{FF2B5EF4-FFF2-40B4-BE49-F238E27FC236}">
-                <a16:creationId xmlns:a16="http://schemas.microsoft.com/office/drawing/2014/main" id="{CB4D361F-30F9-2FCF-4111-EAD38F8DAC3E}"/>
+                <a16:creationId xmlns:a16="http://schemas.microsoft.com/office/drawing/2014/main" id="{D2557C39-0654-FE90-8442-6C17FCFFBC0E}"/>
               </a:ext>
             </a:extLst>
           </p:cNvPr>
@@ -5625,7 +5713,7 @@
           <p:cNvPr id="10" name="Oval 9">
             <a:extLst>
               <a:ext uri="{FF2B5EF4-FFF2-40B4-BE49-F238E27FC236}">
-                <a16:creationId xmlns:a16="http://schemas.microsoft.com/office/drawing/2014/main" id="{EAEC9C6E-79BD-1361-44EB-CE6D276158DD}"/>
+                <a16:creationId xmlns:a16="http://schemas.microsoft.com/office/drawing/2014/main" id="{401A20D1-5C01-86C9-C173-BC47F7A60C27}"/>
               </a:ext>
             </a:extLst>
           </p:cNvPr>
@@ -5693,7 +5781,7 @@
           <p:cNvPr id="11" name="Oval 10">
             <a:extLst>
               <a:ext uri="{FF2B5EF4-FFF2-40B4-BE49-F238E27FC236}">
-                <a16:creationId xmlns:a16="http://schemas.microsoft.com/office/drawing/2014/main" id="{5125E52A-B1F7-6626-2050-E7A6EB0377FD}"/>
+                <a16:creationId xmlns:a16="http://schemas.microsoft.com/office/drawing/2014/main" id="{D6656ED1-FD72-DAD0-571D-BCF1AB2A8AC8}"/>
               </a:ext>
             </a:extLst>
           </p:cNvPr>
@@ -5757,7 +5845,7 @@
           <p:cNvPr id="12" name="Diamond 11">
             <a:extLst>
               <a:ext uri="{FF2B5EF4-FFF2-40B4-BE49-F238E27FC236}">
-                <a16:creationId xmlns:a16="http://schemas.microsoft.com/office/drawing/2014/main" id="{8DBCA74E-1BF9-D471-ACA5-42FB769A5D2B}"/>
+                <a16:creationId xmlns:a16="http://schemas.microsoft.com/office/drawing/2014/main" id="{73272FFE-9D81-CE73-F676-1BCE83779CA8}"/>
               </a:ext>
             </a:extLst>
           </p:cNvPr>
@@ -5821,7 +5909,7 @@
           <p:cNvPr id="13" name="Diamond 12">
             <a:extLst>
               <a:ext uri="{FF2B5EF4-FFF2-40B4-BE49-F238E27FC236}">
-                <a16:creationId xmlns:a16="http://schemas.microsoft.com/office/drawing/2014/main" id="{FD1239A6-8E24-B158-A3E5-38F023D52C42}"/>
+                <a16:creationId xmlns:a16="http://schemas.microsoft.com/office/drawing/2014/main" id="{3D34AB18-BAD4-609B-8017-A905CB8FECBD}"/>
               </a:ext>
             </a:extLst>
           </p:cNvPr>
@@ -5885,7 +5973,7 @@
           <p:cNvPr id="14" name="Diamond 13">
             <a:extLst>
               <a:ext uri="{FF2B5EF4-FFF2-40B4-BE49-F238E27FC236}">
-                <a16:creationId xmlns:a16="http://schemas.microsoft.com/office/drawing/2014/main" id="{ED1F9173-EAA5-7DF7-733F-36B967F7E049}"/>
+                <a16:creationId xmlns:a16="http://schemas.microsoft.com/office/drawing/2014/main" id="{587462D3-93E0-933B-AFEE-67819F00F465}"/>
               </a:ext>
             </a:extLst>
           </p:cNvPr>
@@ -5949,7 +6037,7 @@
           <p:cNvPr id="15" name="Rectangle 14">
             <a:extLst>
               <a:ext uri="{FF2B5EF4-FFF2-40B4-BE49-F238E27FC236}">
-                <a16:creationId xmlns:a16="http://schemas.microsoft.com/office/drawing/2014/main" id="{B98CE2ED-F088-0CD4-D9A7-95FA28BFE309}"/>
+                <a16:creationId xmlns:a16="http://schemas.microsoft.com/office/drawing/2014/main" id="{FE5D97D5-3B60-E4F3-2532-9A98AD5DEB24}"/>
               </a:ext>
             </a:extLst>
           </p:cNvPr>
@@ -6013,7 +6101,7 @@
           <p:cNvPr id="16" name="TextBox 15">
             <a:extLst>
               <a:ext uri="{FF2B5EF4-FFF2-40B4-BE49-F238E27FC236}">
-                <a16:creationId xmlns:a16="http://schemas.microsoft.com/office/drawing/2014/main" id="{FB8D0339-A47A-B7DD-39DB-A2E650FE3054}"/>
+                <a16:creationId xmlns:a16="http://schemas.microsoft.com/office/drawing/2014/main" id="{66B648DA-648D-2FF4-E060-5FBC905AB1B5}"/>
               </a:ext>
             </a:extLst>
           </p:cNvPr>
@@ -6053,7 +6141,7 @@
           <p:cNvPr id="17" name="TextBox 16">
             <a:extLst>
               <a:ext uri="{FF2B5EF4-FFF2-40B4-BE49-F238E27FC236}">
-                <a16:creationId xmlns:a16="http://schemas.microsoft.com/office/drawing/2014/main" id="{4D1A90DC-AF47-0697-2DA7-4ACF2E5117E2}"/>
+                <a16:creationId xmlns:a16="http://schemas.microsoft.com/office/drawing/2014/main" id="{14F43526-B6BC-EC2D-89C8-DFE4A734594C}"/>
               </a:ext>
             </a:extLst>
           </p:cNvPr>
@@ -6093,7 +6181,7 @@
           <p:cNvPr id="18" name="TextBox 17">
             <a:extLst>
               <a:ext uri="{FF2B5EF4-FFF2-40B4-BE49-F238E27FC236}">
-                <a16:creationId xmlns:a16="http://schemas.microsoft.com/office/drawing/2014/main" id="{73680087-E904-7CC4-037D-3A0DAB2CD867}"/>
+                <a16:creationId xmlns:a16="http://schemas.microsoft.com/office/drawing/2014/main" id="{F21C79F0-43B3-9CBF-CE83-A509D79FF088}"/>
               </a:ext>
             </a:extLst>
           </p:cNvPr>
@@ -6131,7 +6219,7 @@
     </p:spTree>
     <p:extLst>
       <p:ext uri="{BB962C8B-B14F-4D97-AF65-F5344CB8AC3E}">
-        <p14:creationId xmlns:p14="http://schemas.microsoft.com/office/powerpoint/2010/main" val="3476675247"/>
+        <p14:creationId xmlns:p14="http://schemas.microsoft.com/office/powerpoint/2010/main" val="2292420106"/>
       </p:ext>
     </p:extLst>
   </p:cSld>
@@ -6171,7 +6259,7 @@
           <p:cNvPr id="2" name="Title 1">
             <a:extLst>
               <a:ext uri="{FF2B5EF4-FFF2-40B4-BE49-F238E27FC236}">
-                <a16:creationId xmlns:a16="http://schemas.microsoft.com/office/drawing/2014/main" id="{AD0EC629-577A-5B9E-9D62-7DEF37A14EDB}"/>
+                <a16:creationId xmlns:a16="http://schemas.microsoft.com/office/drawing/2014/main" id="{48CF1268-9E38-4ABE-47C9-30934CB3BF39}"/>
               </a:ext>
             </a:extLst>
           </p:cNvPr>
@@ -6211,7 +6299,7 @@
           <p:cNvPr id="3" name="TextBox 2">
             <a:extLst>
               <a:ext uri="{FF2B5EF4-FFF2-40B4-BE49-F238E27FC236}">
-                <a16:creationId xmlns:a16="http://schemas.microsoft.com/office/drawing/2014/main" id="{506F5C6F-8707-9F34-D1DB-C0A62E53A4CC}"/>
+                <a16:creationId xmlns:a16="http://schemas.microsoft.com/office/drawing/2014/main" id="{D9709D35-28A2-2281-C2D1-74E7648E7643}"/>
               </a:ext>
             </a:extLst>
           </p:cNvPr>
@@ -6251,7 +6339,7 @@
           <p:cNvPr id="4" name="Rectangle: Rounded Corners 3">
             <a:extLst>
               <a:ext uri="{FF2B5EF4-FFF2-40B4-BE49-F238E27FC236}">
-                <a16:creationId xmlns:a16="http://schemas.microsoft.com/office/drawing/2014/main" id="{C1B2CE52-A96D-0674-707A-D709D510481A}"/>
+                <a16:creationId xmlns:a16="http://schemas.microsoft.com/office/drawing/2014/main" id="{5A6F84BF-0767-13A8-D9CB-8EDA7E7ABE2F}"/>
               </a:ext>
             </a:extLst>
           </p:cNvPr>
@@ -6307,7 +6395,7 @@
           <p:cNvPr id="5" name="Oval 4">
             <a:extLst>
               <a:ext uri="{FF2B5EF4-FFF2-40B4-BE49-F238E27FC236}">
-                <a16:creationId xmlns:a16="http://schemas.microsoft.com/office/drawing/2014/main" id="{EA571545-EB65-2D89-9546-D84F4B23C7C9}"/>
+                <a16:creationId xmlns:a16="http://schemas.microsoft.com/office/drawing/2014/main" id="{9D3BA95C-67A5-52B3-3725-22D260A6DDD2}"/>
               </a:ext>
             </a:extLst>
           </p:cNvPr>
@@ -6369,7 +6457,7 @@
           <p:cNvPr id="6" name="TextBox 5">
             <a:extLst>
               <a:ext uri="{FF2B5EF4-FFF2-40B4-BE49-F238E27FC236}">
-                <a16:creationId xmlns:a16="http://schemas.microsoft.com/office/drawing/2014/main" id="{27BDCFD5-FA12-BC56-683F-7BA9771B4D1E}"/>
+                <a16:creationId xmlns:a16="http://schemas.microsoft.com/office/drawing/2014/main" id="{4C51ADC5-85C7-295D-A7A1-6EB11CC14D41}"/>
               </a:ext>
             </a:extLst>
           </p:cNvPr>
@@ -6409,7 +6497,7 @@
           <p:cNvPr id="7" name="TextBox 6">
             <a:extLst>
               <a:ext uri="{FF2B5EF4-FFF2-40B4-BE49-F238E27FC236}">
-                <a16:creationId xmlns:a16="http://schemas.microsoft.com/office/drawing/2014/main" id="{EC43300E-8A58-1632-1E85-42B017827687}"/>
+                <a16:creationId xmlns:a16="http://schemas.microsoft.com/office/drawing/2014/main" id="{F4939EAC-C245-791F-81F5-CCC86E845ED9}"/>
               </a:ext>
             </a:extLst>
           </p:cNvPr>
@@ -6449,7 +6537,7 @@
           <p:cNvPr id="8" name="Rectangle: Rounded Corners 7">
             <a:extLst>
               <a:ext uri="{FF2B5EF4-FFF2-40B4-BE49-F238E27FC236}">
-                <a16:creationId xmlns:a16="http://schemas.microsoft.com/office/drawing/2014/main" id="{36412B60-1828-5402-6C01-69CE5A183D3B}"/>
+                <a16:creationId xmlns:a16="http://schemas.microsoft.com/office/drawing/2014/main" id="{B30921F5-420A-3707-FEC5-D69ECD7E40ED}"/>
               </a:ext>
             </a:extLst>
           </p:cNvPr>
@@ -6505,7 +6593,7 @@
           <p:cNvPr id="9" name="Oval 8">
             <a:extLst>
               <a:ext uri="{FF2B5EF4-FFF2-40B4-BE49-F238E27FC236}">
-                <a16:creationId xmlns:a16="http://schemas.microsoft.com/office/drawing/2014/main" id="{AB9E8F9B-087E-9F1A-07F5-3595142CEE66}"/>
+                <a16:creationId xmlns:a16="http://schemas.microsoft.com/office/drawing/2014/main" id="{862B4105-D901-3AA4-0178-FE1B150AB5CB}"/>
               </a:ext>
             </a:extLst>
           </p:cNvPr>
@@ -6567,7 +6655,7 @@
           <p:cNvPr id="10" name="TextBox 9">
             <a:extLst>
               <a:ext uri="{FF2B5EF4-FFF2-40B4-BE49-F238E27FC236}">
-                <a16:creationId xmlns:a16="http://schemas.microsoft.com/office/drawing/2014/main" id="{E6CB46DF-1D26-A8DD-7DCF-B1FC478E62FD}"/>
+                <a16:creationId xmlns:a16="http://schemas.microsoft.com/office/drawing/2014/main" id="{BF2B206E-7698-FC9B-0ADE-AC17F9F7E369}"/>
               </a:ext>
             </a:extLst>
           </p:cNvPr>
@@ -6607,7 +6695,7 @@
           <p:cNvPr id="11" name="TextBox 10">
             <a:extLst>
               <a:ext uri="{FF2B5EF4-FFF2-40B4-BE49-F238E27FC236}">
-                <a16:creationId xmlns:a16="http://schemas.microsoft.com/office/drawing/2014/main" id="{F5848593-3061-00A1-F210-0F2B60C0EB4C}"/>
+                <a16:creationId xmlns:a16="http://schemas.microsoft.com/office/drawing/2014/main" id="{30CB503A-74F2-1396-3C44-4993BB0276FF}"/>
               </a:ext>
             </a:extLst>
           </p:cNvPr>
@@ -6647,7 +6735,7 @@
           <p:cNvPr id="12" name="Rectangle: Rounded Corners 11">
             <a:extLst>
               <a:ext uri="{FF2B5EF4-FFF2-40B4-BE49-F238E27FC236}">
-                <a16:creationId xmlns:a16="http://schemas.microsoft.com/office/drawing/2014/main" id="{9E5F3CC5-959D-E086-0F4E-1F4FB477530B}"/>
+                <a16:creationId xmlns:a16="http://schemas.microsoft.com/office/drawing/2014/main" id="{09AE70B6-A9E6-8E65-79C0-FA06E49B9AF4}"/>
               </a:ext>
             </a:extLst>
           </p:cNvPr>
@@ -6703,7 +6791,7 @@
           <p:cNvPr id="13" name="Oval 12">
             <a:extLst>
               <a:ext uri="{FF2B5EF4-FFF2-40B4-BE49-F238E27FC236}">
-                <a16:creationId xmlns:a16="http://schemas.microsoft.com/office/drawing/2014/main" id="{BF5D5381-488F-FC45-6BD8-78862AB1DDE9}"/>
+                <a16:creationId xmlns:a16="http://schemas.microsoft.com/office/drawing/2014/main" id="{DC40C7C7-81CE-3512-09CC-926654029FB7}"/>
               </a:ext>
             </a:extLst>
           </p:cNvPr>
@@ -6765,7 +6853,7 @@
           <p:cNvPr id="14" name="TextBox 13">
             <a:extLst>
               <a:ext uri="{FF2B5EF4-FFF2-40B4-BE49-F238E27FC236}">
-                <a16:creationId xmlns:a16="http://schemas.microsoft.com/office/drawing/2014/main" id="{ACC8E423-0189-8B14-6FE6-55B0E0EE2031}"/>
+                <a16:creationId xmlns:a16="http://schemas.microsoft.com/office/drawing/2014/main" id="{896B7D02-F792-AA61-FD4E-6FEBEC4334F9}"/>
               </a:ext>
             </a:extLst>
           </p:cNvPr>
@@ -6805,7 +6893,7 @@
           <p:cNvPr id="15" name="TextBox 14">
             <a:extLst>
               <a:ext uri="{FF2B5EF4-FFF2-40B4-BE49-F238E27FC236}">
-                <a16:creationId xmlns:a16="http://schemas.microsoft.com/office/drawing/2014/main" id="{B8F11710-544F-0EB9-8593-C9724AB56A03}"/>
+                <a16:creationId xmlns:a16="http://schemas.microsoft.com/office/drawing/2014/main" id="{F89696DC-7965-95B9-BE84-80E695A8ED58}"/>
               </a:ext>
             </a:extLst>
           </p:cNvPr>
@@ -6845,7 +6933,7 @@
           <p:cNvPr id="16" name="Rectangle: Rounded Corners 15">
             <a:extLst>
               <a:ext uri="{FF2B5EF4-FFF2-40B4-BE49-F238E27FC236}">
-                <a16:creationId xmlns:a16="http://schemas.microsoft.com/office/drawing/2014/main" id="{01DE2915-CC9E-3648-1645-E33388F5E2AE}"/>
+                <a16:creationId xmlns:a16="http://schemas.microsoft.com/office/drawing/2014/main" id="{EFB37778-912B-C893-0D3C-EB1A9698BABF}"/>
               </a:ext>
             </a:extLst>
           </p:cNvPr>
@@ -6901,7 +6989,7 @@
           <p:cNvPr id="17" name="Oval 16">
             <a:extLst>
               <a:ext uri="{FF2B5EF4-FFF2-40B4-BE49-F238E27FC236}">
-                <a16:creationId xmlns:a16="http://schemas.microsoft.com/office/drawing/2014/main" id="{80AC23CC-5375-63A0-3888-AA2A3BF531EF}"/>
+                <a16:creationId xmlns:a16="http://schemas.microsoft.com/office/drawing/2014/main" id="{D1BAF96F-8B30-D492-ED98-9AE4C5A59DB9}"/>
               </a:ext>
             </a:extLst>
           </p:cNvPr>
@@ -6963,7 +7051,7 @@
           <p:cNvPr id="18" name="TextBox 17">
             <a:extLst>
               <a:ext uri="{FF2B5EF4-FFF2-40B4-BE49-F238E27FC236}">
-                <a16:creationId xmlns:a16="http://schemas.microsoft.com/office/drawing/2014/main" id="{937EC7BB-B99F-D1AF-5572-C5740E13CDA8}"/>
+                <a16:creationId xmlns:a16="http://schemas.microsoft.com/office/drawing/2014/main" id="{2C43FCB7-9097-E4D4-068E-E50051C552E6}"/>
               </a:ext>
             </a:extLst>
           </p:cNvPr>
@@ -7003,7 +7091,7 @@
           <p:cNvPr id="19" name="TextBox 18">
             <a:extLst>
               <a:ext uri="{FF2B5EF4-FFF2-40B4-BE49-F238E27FC236}">
-                <a16:creationId xmlns:a16="http://schemas.microsoft.com/office/drawing/2014/main" id="{7228E1A3-51CB-F521-E840-2A41DB66DF8C}"/>
+                <a16:creationId xmlns:a16="http://schemas.microsoft.com/office/drawing/2014/main" id="{F8F7BF26-86EA-8D0F-3106-B2719D9BA73A}"/>
               </a:ext>
             </a:extLst>
           </p:cNvPr>
@@ -7043,7 +7131,7 @@
           <p:cNvPr id="20" name="TextBox 19">
             <a:extLst>
               <a:ext uri="{FF2B5EF4-FFF2-40B4-BE49-F238E27FC236}">
-                <a16:creationId xmlns:a16="http://schemas.microsoft.com/office/drawing/2014/main" id="{9E2EFC28-BF0B-E2D6-54DC-45A63ED8D833}"/>
+                <a16:creationId xmlns:a16="http://schemas.microsoft.com/office/drawing/2014/main" id="{3428F454-8A42-F1D2-93BF-2A5DE308C64A}"/>
               </a:ext>
             </a:extLst>
           </p:cNvPr>
@@ -7083,7 +7171,7 @@
           <p:cNvPr id="21" name="TextBox 20">
             <a:extLst>
               <a:ext uri="{FF2B5EF4-FFF2-40B4-BE49-F238E27FC236}">
-                <a16:creationId xmlns:a16="http://schemas.microsoft.com/office/drawing/2014/main" id="{F6A80CCB-2FBD-2314-C5F1-853DD4D7D3CA}"/>
+                <a16:creationId xmlns:a16="http://schemas.microsoft.com/office/drawing/2014/main" id="{015DFC92-3314-97E1-FCFD-2A2B9B84FD80}"/>
               </a:ext>
             </a:extLst>
           </p:cNvPr>
@@ -7122,7 +7210,7 @@
     </p:spTree>
     <p:extLst>
       <p:ext uri="{BB962C8B-B14F-4D97-AF65-F5344CB8AC3E}">
-        <p14:creationId xmlns:p14="http://schemas.microsoft.com/office/powerpoint/2010/main" val="3979770561"/>
+        <p14:creationId xmlns:p14="http://schemas.microsoft.com/office/powerpoint/2010/main" val="2873683099"/>
       </p:ext>
     </p:extLst>
   </p:cSld>
@@ -7162,7 +7250,7 @@
           <p:cNvPr id="2" name="Title 1">
             <a:extLst>
               <a:ext uri="{FF2B5EF4-FFF2-40B4-BE49-F238E27FC236}">
-                <a16:creationId xmlns:a16="http://schemas.microsoft.com/office/drawing/2014/main" id="{EC09686F-CD99-89BE-5AF1-8BE6B2A539D3}"/>
+                <a16:creationId xmlns:a16="http://schemas.microsoft.com/office/drawing/2014/main" id="{C18F805E-4868-FD0E-8647-513DEBF9CA60}"/>
               </a:ext>
             </a:extLst>
           </p:cNvPr>
@@ -7202,7 +7290,7 @@
           <p:cNvPr id="3" name="TextBox 2">
             <a:extLst>
               <a:ext uri="{FF2B5EF4-FFF2-40B4-BE49-F238E27FC236}">
-                <a16:creationId xmlns:a16="http://schemas.microsoft.com/office/drawing/2014/main" id="{F9FCB682-3231-5341-3793-4778EA717CAF}"/>
+                <a16:creationId xmlns:a16="http://schemas.microsoft.com/office/drawing/2014/main" id="{CC60F6FA-798B-C6DF-E445-DC636C63BD8A}"/>
               </a:ext>
             </a:extLst>
           </p:cNvPr>
@@ -7242,7 +7330,7 @@
           <p:cNvPr id="4" name="TextBox 3">
             <a:extLst>
               <a:ext uri="{FF2B5EF4-FFF2-40B4-BE49-F238E27FC236}">
-                <a16:creationId xmlns:a16="http://schemas.microsoft.com/office/drawing/2014/main" id="{ADE8ACF8-D277-4E55-6A98-FA51272ABF16}"/>
+                <a16:creationId xmlns:a16="http://schemas.microsoft.com/office/drawing/2014/main" id="{A84AF083-33F5-0981-1851-3FF46979B525}"/>
               </a:ext>
             </a:extLst>
           </p:cNvPr>
@@ -7282,7 +7370,7 @@
           <p:cNvPr id="5" name="TextBox 4">
             <a:extLst>
               <a:ext uri="{FF2B5EF4-FFF2-40B4-BE49-F238E27FC236}">
-                <a16:creationId xmlns:a16="http://schemas.microsoft.com/office/drawing/2014/main" id="{74424968-B7C1-DCE5-ECA4-5A1C13E2CF12}"/>
+                <a16:creationId xmlns:a16="http://schemas.microsoft.com/office/drawing/2014/main" id="{E53CAF21-01D9-B55E-C8BF-D7E609D2A9D6}"/>
               </a:ext>
             </a:extLst>
           </p:cNvPr>
@@ -7322,7 +7410,7 @@
           <p:cNvPr id="6" name="TextBox 5">
             <a:extLst>
               <a:ext uri="{FF2B5EF4-FFF2-40B4-BE49-F238E27FC236}">
-                <a16:creationId xmlns:a16="http://schemas.microsoft.com/office/drawing/2014/main" id="{000CDA1A-E19E-AA1E-40E2-2C3367E0B0F6}"/>
+                <a16:creationId xmlns:a16="http://schemas.microsoft.com/office/drawing/2014/main" id="{BFDC47B2-FD92-7236-4C2A-33FC07A776FE}"/>
               </a:ext>
             </a:extLst>
           </p:cNvPr>
@@ -7362,7 +7450,7 @@
           <p:cNvPr id="7" name="TextBox 6">
             <a:extLst>
               <a:ext uri="{FF2B5EF4-FFF2-40B4-BE49-F238E27FC236}">
-                <a16:creationId xmlns:a16="http://schemas.microsoft.com/office/drawing/2014/main" id="{8F6687A3-741D-D46C-3E96-8AF4263B752C}"/>
+                <a16:creationId xmlns:a16="http://schemas.microsoft.com/office/drawing/2014/main" id="{A47BE060-8E03-E046-56F7-5B1EEA91283E}"/>
               </a:ext>
             </a:extLst>
           </p:cNvPr>
@@ -7402,7 +7490,7 @@
           <p:cNvPr id="8" name="TextBox 7">
             <a:extLst>
               <a:ext uri="{FF2B5EF4-FFF2-40B4-BE49-F238E27FC236}">
-                <a16:creationId xmlns:a16="http://schemas.microsoft.com/office/drawing/2014/main" id="{12AB773D-102F-D9E5-64F0-6312924E0D76}"/>
+                <a16:creationId xmlns:a16="http://schemas.microsoft.com/office/drawing/2014/main" id="{C104EAE4-673A-7011-BA15-09F1C497CA26}"/>
               </a:ext>
             </a:extLst>
           </p:cNvPr>
@@ -7442,7 +7530,7 @@
           <p:cNvPr id="9" name="TextBox 8">
             <a:extLst>
               <a:ext uri="{FF2B5EF4-FFF2-40B4-BE49-F238E27FC236}">
-                <a16:creationId xmlns:a16="http://schemas.microsoft.com/office/drawing/2014/main" id="{0D8ED939-19B0-BF24-2864-69EDA4BF2C8D}"/>
+                <a16:creationId xmlns:a16="http://schemas.microsoft.com/office/drawing/2014/main" id="{53593FCA-5C41-8147-E514-EA4FDD1C66B0}"/>
               </a:ext>
             </a:extLst>
           </p:cNvPr>
@@ -7482,7 +7570,7 @@
           <p:cNvPr id="11" name="Picture 10" descr="The end-of-training report: a table of trainees, a debrief with focus area, and a chart of CGF pressure">
             <a:extLst>
               <a:ext uri="{FF2B5EF4-FFF2-40B4-BE49-F238E27FC236}">
-                <a16:creationId xmlns:a16="http://schemas.microsoft.com/office/drawing/2014/main" id="{B592FC8E-9168-49CC-B075-6538D412A7B6}"/>
+                <a16:creationId xmlns:a16="http://schemas.microsoft.com/office/drawing/2014/main" id="{258E8CB9-AD73-1415-F9F8-D1A747E3DD17}"/>
               </a:ext>
             </a:extLst>
           </p:cNvPr>
@@ -7523,7 +7611,7 @@
           <p:cNvPr id="12" name="TextBox 11">
             <a:extLst>
               <a:ext uri="{FF2B5EF4-FFF2-40B4-BE49-F238E27FC236}">
-                <a16:creationId xmlns:a16="http://schemas.microsoft.com/office/drawing/2014/main" id="{6506C5B7-DC85-14F5-B74C-22B71CCDA854}"/>
+                <a16:creationId xmlns:a16="http://schemas.microsoft.com/office/drawing/2014/main" id="{51755F2F-EA50-941C-2415-617C4870E8B8}"/>
               </a:ext>
             </a:extLst>
           </p:cNvPr>
@@ -7563,7 +7651,7 @@
           <p:cNvPr id="13" name="TextBox 12">
             <a:extLst>
               <a:ext uri="{FF2B5EF4-FFF2-40B4-BE49-F238E27FC236}">
-                <a16:creationId xmlns:a16="http://schemas.microsoft.com/office/drawing/2014/main" id="{9570993A-BAF7-E0F1-7626-57CA06B93DB7}"/>
+                <a16:creationId xmlns:a16="http://schemas.microsoft.com/office/drawing/2014/main" id="{15C5E464-4C61-C78F-E237-3AB63486A934}"/>
               </a:ext>
             </a:extLst>
           </p:cNvPr>
@@ -7602,7 +7690,7 @@
     </p:spTree>
     <p:extLst>
       <p:ext uri="{BB962C8B-B14F-4D97-AF65-F5344CB8AC3E}">
-        <p14:creationId xmlns:p14="http://schemas.microsoft.com/office/powerpoint/2010/main" val="3814251000"/>
+        <p14:creationId xmlns:p14="http://schemas.microsoft.com/office/powerpoint/2010/main" val="840997570"/>
       </p:ext>
     </p:extLst>
   </p:cSld>
@@ -7642,7 +7730,7 @@
           <p:cNvPr id="2" name="Title 1">
             <a:extLst>
               <a:ext uri="{FF2B5EF4-FFF2-40B4-BE49-F238E27FC236}">
-                <a16:creationId xmlns:a16="http://schemas.microsoft.com/office/drawing/2014/main" id="{3C841F62-16BE-15D4-434B-FF5232E8733C}"/>
+                <a16:creationId xmlns:a16="http://schemas.microsoft.com/office/drawing/2014/main" id="{5B8898FB-35BE-53BA-6C52-14C37FD29B54}"/>
               </a:ext>
             </a:extLst>
           </p:cNvPr>
@@ -7682,7 +7770,7 @@
           <p:cNvPr id="3" name="TextBox 2">
             <a:extLst>
               <a:ext uri="{FF2B5EF4-FFF2-40B4-BE49-F238E27FC236}">
-                <a16:creationId xmlns:a16="http://schemas.microsoft.com/office/drawing/2014/main" id="{B68FF87D-CFE7-CDB4-1A0E-EECDB420F73E}"/>
+                <a16:creationId xmlns:a16="http://schemas.microsoft.com/office/drawing/2014/main" id="{9F2E77DA-E526-926A-9A75-D08D58BD3100}"/>
               </a:ext>
             </a:extLst>
           </p:cNvPr>
@@ -7722,7 +7810,7 @@
           <p:cNvPr id="5" name="Picture 4" descr="The cohort overview: competency means across 22 trainees and a heatmap by trainee">
             <a:extLst>
               <a:ext uri="{FF2B5EF4-FFF2-40B4-BE49-F238E27FC236}">
-                <a16:creationId xmlns:a16="http://schemas.microsoft.com/office/drawing/2014/main" id="{1145F0FB-F56A-A7B7-F381-622727E5F3B6}"/>
+                <a16:creationId xmlns:a16="http://schemas.microsoft.com/office/drawing/2014/main" id="{21AA4877-39D1-4992-AC17-C3449DCB0B6F}"/>
               </a:ext>
             </a:extLst>
           </p:cNvPr>
@@ -7763,7 +7851,7 @@
           <p:cNvPr id="6" name="TextBox 5">
             <a:extLst>
               <a:ext uri="{FF2B5EF4-FFF2-40B4-BE49-F238E27FC236}">
-                <a16:creationId xmlns:a16="http://schemas.microsoft.com/office/drawing/2014/main" id="{DEADC1A0-1B02-AC78-3CB8-B39E6A226B03}"/>
+                <a16:creationId xmlns:a16="http://schemas.microsoft.com/office/drawing/2014/main" id="{7F89BCA9-0B3A-6382-6004-33BE4DF71DEC}"/>
               </a:ext>
             </a:extLst>
           </p:cNvPr>
@@ -7803,7 +7891,7 @@
           <p:cNvPr id="7" name="TextBox 6">
             <a:extLst>
               <a:ext uri="{FF2B5EF4-FFF2-40B4-BE49-F238E27FC236}">
-                <a16:creationId xmlns:a16="http://schemas.microsoft.com/office/drawing/2014/main" id="{C1ECA62A-FA54-61F9-6160-345BAD998878}"/>
+                <a16:creationId xmlns:a16="http://schemas.microsoft.com/office/drawing/2014/main" id="{A786C913-E0C8-1680-0E04-5C9E758617A7}"/>
               </a:ext>
             </a:extLst>
           </p:cNvPr>
@@ -7843,7 +7931,7 @@
           <p:cNvPr id="8" name="TextBox 7">
             <a:extLst>
               <a:ext uri="{FF2B5EF4-FFF2-40B4-BE49-F238E27FC236}">
-                <a16:creationId xmlns:a16="http://schemas.microsoft.com/office/drawing/2014/main" id="{08C20EC0-9B4E-F3E8-02F8-D23005FB4F67}"/>
+                <a16:creationId xmlns:a16="http://schemas.microsoft.com/office/drawing/2014/main" id="{AE97137D-1E35-3789-4977-3D71597CBAA2}"/>
               </a:ext>
             </a:extLst>
           </p:cNvPr>
@@ -7883,7 +7971,7 @@
           <p:cNvPr id="9" name="TextBox 8">
             <a:extLst>
               <a:ext uri="{FF2B5EF4-FFF2-40B4-BE49-F238E27FC236}">
-                <a16:creationId xmlns:a16="http://schemas.microsoft.com/office/drawing/2014/main" id="{28FD5762-7EF7-127F-1ACD-0B71164C9D96}"/>
+                <a16:creationId xmlns:a16="http://schemas.microsoft.com/office/drawing/2014/main" id="{A00E315B-46B5-7B75-6C97-3564691478E3}"/>
               </a:ext>
             </a:extLst>
           </p:cNvPr>
@@ -7923,7 +8011,7 @@
           <p:cNvPr id="10" name="TextBox 9">
             <a:extLst>
               <a:ext uri="{FF2B5EF4-FFF2-40B4-BE49-F238E27FC236}">
-                <a16:creationId xmlns:a16="http://schemas.microsoft.com/office/drawing/2014/main" id="{88C062E9-81DD-C385-193F-EA859CF4781B}"/>
+                <a16:creationId xmlns:a16="http://schemas.microsoft.com/office/drawing/2014/main" id="{4A558B4C-12BE-86CD-FCC3-8C19910DE2E2}"/>
               </a:ext>
             </a:extLst>
           </p:cNvPr>
@@ -7963,7 +8051,7 @@
           <p:cNvPr id="11" name="TextBox 10">
             <a:extLst>
               <a:ext uri="{FF2B5EF4-FFF2-40B4-BE49-F238E27FC236}">
-                <a16:creationId xmlns:a16="http://schemas.microsoft.com/office/drawing/2014/main" id="{0408A326-6BB1-DA16-3A22-5D8AF08C1901}"/>
+                <a16:creationId xmlns:a16="http://schemas.microsoft.com/office/drawing/2014/main" id="{E4FD31E2-6E5D-22BA-B998-10C0F53D56D9}"/>
               </a:ext>
             </a:extLst>
           </p:cNvPr>
@@ -8003,7 +8091,7 @@
           <p:cNvPr id="12" name="TextBox 11">
             <a:extLst>
               <a:ext uri="{FF2B5EF4-FFF2-40B4-BE49-F238E27FC236}">
-                <a16:creationId xmlns:a16="http://schemas.microsoft.com/office/drawing/2014/main" id="{1A801B01-8C8E-58FC-48E5-784BB809DF28}"/>
+                <a16:creationId xmlns:a16="http://schemas.microsoft.com/office/drawing/2014/main" id="{ADD2068D-1C95-EC24-FD30-269643ABE7F8}"/>
               </a:ext>
             </a:extLst>
           </p:cNvPr>
@@ -8043,7 +8131,7 @@
           <p:cNvPr id="13" name="TextBox 12">
             <a:extLst>
               <a:ext uri="{FF2B5EF4-FFF2-40B4-BE49-F238E27FC236}">
-                <a16:creationId xmlns:a16="http://schemas.microsoft.com/office/drawing/2014/main" id="{7D165533-4220-96CE-57E7-A84E47E23422}"/>
+                <a16:creationId xmlns:a16="http://schemas.microsoft.com/office/drawing/2014/main" id="{B58D183F-0851-CB1A-B54F-134B1592FC16}"/>
               </a:ext>
             </a:extLst>
           </p:cNvPr>
@@ -8082,7 +8170,7 @@
     </p:spTree>
     <p:extLst>
       <p:ext uri="{BB962C8B-B14F-4D97-AF65-F5344CB8AC3E}">
-        <p14:creationId xmlns:p14="http://schemas.microsoft.com/office/powerpoint/2010/main" val="364363018"/>
+        <p14:creationId xmlns:p14="http://schemas.microsoft.com/office/powerpoint/2010/main" val="2526475331"/>
       </p:ext>
     </p:extLst>
   </p:cSld>
@@ -8122,7 +8210,7 @@
           <p:cNvPr id="2" name="Title 1">
             <a:extLst>
               <a:ext uri="{FF2B5EF4-FFF2-40B4-BE49-F238E27FC236}">
-                <a16:creationId xmlns:a16="http://schemas.microsoft.com/office/drawing/2014/main" id="{49360EE9-CA8D-6D1A-72BF-C926555E960C}"/>
+                <a16:creationId xmlns:a16="http://schemas.microsoft.com/office/drawing/2014/main" id="{78B4025F-FB71-8A03-F75F-38270ED8975E}"/>
               </a:ext>
             </a:extLst>
           </p:cNvPr>
@@ -8162,7 +8250,7 @@
           <p:cNvPr id="3" name="TextBox 2">
             <a:extLst>
               <a:ext uri="{FF2B5EF4-FFF2-40B4-BE49-F238E27FC236}">
-                <a16:creationId xmlns:a16="http://schemas.microsoft.com/office/drawing/2014/main" id="{1D0DF1CE-696F-9051-27B7-B220E853335B}"/>
+                <a16:creationId xmlns:a16="http://schemas.microsoft.com/office/drawing/2014/main" id="{DD3E5D56-EF94-D26C-8BC9-6EE8D9D34EC2}"/>
               </a:ext>
             </a:extLst>
           </p:cNvPr>
@@ -8202,7 +8290,7 @@
           <p:cNvPr id="4" name="Rectangle: Rounded Corners 3">
             <a:extLst>
               <a:ext uri="{FF2B5EF4-FFF2-40B4-BE49-F238E27FC236}">
-                <a16:creationId xmlns:a16="http://schemas.microsoft.com/office/drawing/2014/main" id="{6E749371-4C49-F8C9-099C-0FEC0A6E6A85}"/>
+                <a16:creationId xmlns:a16="http://schemas.microsoft.com/office/drawing/2014/main" id="{12632203-3BCC-524D-875D-C345E69CF97D}"/>
               </a:ext>
             </a:extLst>
           </p:cNvPr>
@@ -8258,7 +8346,7 @@
           <p:cNvPr id="5" name="Oval 4">
             <a:extLst>
               <a:ext uri="{FF2B5EF4-FFF2-40B4-BE49-F238E27FC236}">
-                <a16:creationId xmlns:a16="http://schemas.microsoft.com/office/drawing/2014/main" id="{222BA9EC-8CC1-58FC-E1E8-1F681607F63B}"/>
+                <a16:creationId xmlns:a16="http://schemas.microsoft.com/office/drawing/2014/main" id="{742C7C85-D9F5-50A0-9526-AFCFA2FECE50}"/>
               </a:ext>
             </a:extLst>
           </p:cNvPr>
@@ -8320,7 +8408,7 @@
           <p:cNvPr id="6" name="TextBox 5">
             <a:extLst>
               <a:ext uri="{FF2B5EF4-FFF2-40B4-BE49-F238E27FC236}">
-                <a16:creationId xmlns:a16="http://schemas.microsoft.com/office/drawing/2014/main" id="{6A494604-FCD7-B435-1C85-52A224008211}"/>
+                <a16:creationId xmlns:a16="http://schemas.microsoft.com/office/drawing/2014/main" id="{A9D97B80-DCFE-8B7B-7DF9-27D692DB96B5}"/>
               </a:ext>
             </a:extLst>
           </p:cNvPr>
@@ -8360,7 +8448,7 @@
           <p:cNvPr id="7" name="TextBox 6">
             <a:extLst>
               <a:ext uri="{FF2B5EF4-FFF2-40B4-BE49-F238E27FC236}">
-                <a16:creationId xmlns:a16="http://schemas.microsoft.com/office/drawing/2014/main" id="{DAF10384-EFCE-C987-DB5D-9CD74F8B3540}"/>
+                <a16:creationId xmlns:a16="http://schemas.microsoft.com/office/drawing/2014/main" id="{0ED7783B-68CE-60CD-8E45-1613509375C1}"/>
               </a:ext>
             </a:extLst>
           </p:cNvPr>
@@ -8400,7 +8488,7 @@
           <p:cNvPr id="8" name="Rectangle: Rounded Corners 7">
             <a:extLst>
               <a:ext uri="{FF2B5EF4-FFF2-40B4-BE49-F238E27FC236}">
-                <a16:creationId xmlns:a16="http://schemas.microsoft.com/office/drawing/2014/main" id="{97140E85-EC54-EAA2-6C73-643E897A5E78}"/>
+                <a16:creationId xmlns:a16="http://schemas.microsoft.com/office/drawing/2014/main" id="{A7D9E2E5-FF8C-6DDD-A30A-B001694E26ED}"/>
               </a:ext>
             </a:extLst>
           </p:cNvPr>
@@ -8456,7 +8544,7 @@
           <p:cNvPr id="9" name="Oval 8">
             <a:extLst>
               <a:ext uri="{FF2B5EF4-FFF2-40B4-BE49-F238E27FC236}">
-                <a16:creationId xmlns:a16="http://schemas.microsoft.com/office/drawing/2014/main" id="{3E9FB52D-833A-A9EE-E2C7-2F263308D1F8}"/>
+                <a16:creationId xmlns:a16="http://schemas.microsoft.com/office/drawing/2014/main" id="{E669E7C7-C70A-F43C-0563-84836800F1DB}"/>
               </a:ext>
             </a:extLst>
           </p:cNvPr>
@@ -8518,7 +8606,7 @@
           <p:cNvPr id="10" name="TextBox 9">
             <a:extLst>
               <a:ext uri="{FF2B5EF4-FFF2-40B4-BE49-F238E27FC236}">
-                <a16:creationId xmlns:a16="http://schemas.microsoft.com/office/drawing/2014/main" id="{1FE9D4AA-BB50-9DD5-914A-C0513E3D4B2B}"/>
+                <a16:creationId xmlns:a16="http://schemas.microsoft.com/office/drawing/2014/main" id="{F3102CFE-00C6-63A5-5879-E562C0270264}"/>
               </a:ext>
             </a:extLst>
           </p:cNvPr>
@@ -8558,7 +8646,7 @@
           <p:cNvPr id="11" name="TextBox 10">
             <a:extLst>
               <a:ext uri="{FF2B5EF4-FFF2-40B4-BE49-F238E27FC236}">
-                <a16:creationId xmlns:a16="http://schemas.microsoft.com/office/drawing/2014/main" id="{A0A00DEE-595A-4D5A-03E2-20739CAB01FE}"/>
+                <a16:creationId xmlns:a16="http://schemas.microsoft.com/office/drawing/2014/main" id="{3385DC80-F2A2-E57B-D194-74EE722D66C4}"/>
               </a:ext>
             </a:extLst>
           </p:cNvPr>
@@ -8598,7 +8686,7 @@
           <p:cNvPr id="12" name="Rectangle: Rounded Corners 11">
             <a:extLst>
               <a:ext uri="{FF2B5EF4-FFF2-40B4-BE49-F238E27FC236}">
-                <a16:creationId xmlns:a16="http://schemas.microsoft.com/office/drawing/2014/main" id="{E2AA6BBA-7487-9D82-5DF6-E054EFD9CFE0}"/>
+                <a16:creationId xmlns:a16="http://schemas.microsoft.com/office/drawing/2014/main" id="{9E5AB4D7-9DB9-422E-DAC6-E16A767DD2AC}"/>
               </a:ext>
             </a:extLst>
           </p:cNvPr>
@@ -8654,7 +8742,7 @@
           <p:cNvPr id="13" name="Oval 12">
             <a:extLst>
               <a:ext uri="{FF2B5EF4-FFF2-40B4-BE49-F238E27FC236}">
-                <a16:creationId xmlns:a16="http://schemas.microsoft.com/office/drawing/2014/main" id="{72F90B52-08E2-393E-3FB5-1F8F2B1B3AA3}"/>
+                <a16:creationId xmlns:a16="http://schemas.microsoft.com/office/drawing/2014/main" id="{18BEA04C-7B89-7787-D383-804374B83C7E}"/>
               </a:ext>
             </a:extLst>
           </p:cNvPr>
@@ -8716,7 +8804,7 @@
           <p:cNvPr id="14" name="TextBox 13">
             <a:extLst>
               <a:ext uri="{FF2B5EF4-FFF2-40B4-BE49-F238E27FC236}">
-                <a16:creationId xmlns:a16="http://schemas.microsoft.com/office/drawing/2014/main" id="{AFA87026-E67F-377E-CFA4-1FF68AD32A60}"/>
+                <a16:creationId xmlns:a16="http://schemas.microsoft.com/office/drawing/2014/main" id="{3BC75132-5DC2-93A9-2A72-620919E3972B}"/>
               </a:ext>
             </a:extLst>
           </p:cNvPr>
@@ -8756,7 +8844,7 @@
           <p:cNvPr id="15" name="TextBox 14">
             <a:extLst>
               <a:ext uri="{FF2B5EF4-FFF2-40B4-BE49-F238E27FC236}">
-                <a16:creationId xmlns:a16="http://schemas.microsoft.com/office/drawing/2014/main" id="{DC0C55D7-A557-D3E1-B129-5A050FD8D382}"/>
+                <a16:creationId xmlns:a16="http://schemas.microsoft.com/office/drawing/2014/main" id="{4B44B11A-F92B-43F7-CE7A-11A53B7631F1}"/>
               </a:ext>
             </a:extLst>
           </p:cNvPr>
@@ -8796,7 +8884,7 @@
           <p:cNvPr id="16" name="Rectangle: Rounded Corners 15">
             <a:extLst>
               <a:ext uri="{FF2B5EF4-FFF2-40B4-BE49-F238E27FC236}">
-                <a16:creationId xmlns:a16="http://schemas.microsoft.com/office/drawing/2014/main" id="{1093BE3C-C349-021B-443F-CBCC7A3C17EC}"/>
+                <a16:creationId xmlns:a16="http://schemas.microsoft.com/office/drawing/2014/main" id="{543B3EE3-106A-3594-90DA-9B273A8B509C}"/>
               </a:ext>
             </a:extLst>
           </p:cNvPr>
@@ -8852,7 +8940,7 @@
           <p:cNvPr id="17" name="Oval 16">
             <a:extLst>
               <a:ext uri="{FF2B5EF4-FFF2-40B4-BE49-F238E27FC236}">
-                <a16:creationId xmlns:a16="http://schemas.microsoft.com/office/drawing/2014/main" id="{77048DD3-4755-E987-8626-739271986A78}"/>
+                <a16:creationId xmlns:a16="http://schemas.microsoft.com/office/drawing/2014/main" id="{08FDA2E6-D2E3-D827-B6A5-E838F917F8A6}"/>
               </a:ext>
             </a:extLst>
           </p:cNvPr>
@@ -8914,7 +9002,7 @@
           <p:cNvPr id="18" name="TextBox 17">
             <a:extLst>
               <a:ext uri="{FF2B5EF4-FFF2-40B4-BE49-F238E27FC236}">
-                <a16:creationId xmlns:a16="http://schemas.microsoft.com/office/drawing/2014/main" id="{2E800B07-F168-8D11-42FA-9D2C5FDA3953}"/>
+                <a16:creationId xmlns:a16="http://schemas.microsoft.com/office/drawing/2014/main" id="{2B56A53D-200E-0CEB-D770-DB0652CF4766}"/>
               </a:ext>
             </a:extLst>
           </p:cNvPr>
@@ -8954,7 +9042,7 @@
           <p:cNvPr id="19" name="TextBox 18">
             <a:extLst>
               <a:ext uri="{FF2B5EF4-FFF2-40B4-BE49-F238E27FC236}">
-                <a16:creationId xmlns:a16="http://schemas.microsoft.com/office/drawing/2014/main" id="{2951470D-9645-F958-B70F-504070051B80}"/>
+                <a16:creationId xmlns:a16="http://schemas.microsoft.com/office/drawing/2014/main" id="{BF759F18-F38F-34A2-BE12-369F803B6B3E}"/>
               </a:ext>
             </a:extLst>
           </p:cNvPr>
@@ -8994,7 +9082,7 @@
           <p:cNvPr id="20" name="TextBox 19">
             <a:extLst>
               <a:ext uri="{FF2B5EF4-FFF2-40B4-BE49-F238E27FC236}">
-                <a16:creationId xmlns:a16="http://schemas.microsoft.com/office/drawing/2014/main" id="{ECD0E8EB-30CB-9F8F-0B76-9873E899985E}"/>
+                <a16:creationId xmlns:a16="http://schemas.microsoft.com/office/drawing/2014/main" id="{8EF86706-2B1D-09D2-07B3-86B53D3566AA}"/>
               </a:ext>
             </a:extLst>
           </p:cNvPr>
@@ -9034,7 +9122,7 @@
           <p:cNvPr id="21" name="TextBox 20">
             <a:extLst>
               <a:ext uri="{FF2B5EF4-FFF2-40B4-BE49-F238E27FC236}">
-                <a16:creationId xmlns:a16="http://schemas.microsoft.com/office/drawing/2014/main" id="{E551658C-D072-EA93-EAF9-A25DC2B83829}"/>
+                <a16:creationId xmlns:a16="http://schemas.microsoft.com/office/drawing/2014/main" id="{317973AF-E3BD-815E-491B-52FB9C2B5242}"/>
               </a:ext>
             </a:extLst>
           </p:cNvPr>
@@ -9074,7 +9162,7 @@
           <p:cNvPr id="22" name="TextBox 21">
             <a:extLst>
               <a:ext uri="{FF2B5EF4-FFF2-40B4-BE49-F238E27FC236}">
-                <a16:creationId xmlns:a16="http://schemas.microsoft.com/office/drawing/2014/main" id="{9BB333D5-E95D-C738-F958-F95CE068BD4E}"/>
+                <a16:creationId xmlns:a16="http://schemas.microsoft.com/office/drawing/2014/main" id="{E37100EA-BA22-07A3-E88A-D97D666D9D40}"/>
               </a:ext>
             </a:extLst>
           </p:cNvPr>
@@ -9113,7 +9201,7 @@
     </p:spTree>
     <p:extLst>
       <p:ext uri="{BB962C8B-B14F-4D97-AF65-F5344CB8AC3E}">
-        <p14:creationId xmlns:p14="http://schemas.microsoft.com/office/powerpoint/2010/main" val="408412253"/>
+        <p14:creationId xmlns:p14="http://schemas.microsoft.com/office/powerpoint/2010/main" val="1662396506"/>
       </p:ext>
     </p:extLst>
   </p:cSld>
@@ -9153,7 +9241,7 @@
           <p:cNvPr id="2" name="Title 1">
             <a:extLst>
               <a:ext uri="{FF2B5EF4-FFF2-40B4-BE49-F238E27FC236}">
-                <a16:creationId xmlns:a16="http://schemas.microsoft.com/office/drawing/2014/main" id="{A69A9183-0714-236A-4528-FF7F550E79A9}"/>
+                <a16:creationId xmlns:a16="http://schemas.microsoft.com/office/drawing/2014/main" id="{FC8EC935-A5A3-62B5-7AE9-653548171E5F}"/>
               </a:ext>
             </a:extLst>
           </p:cNvPr>
@@ -9193,7 +9281,7 @@
           <p:cNvPr id="3" name="TextBox 2">
             <a:extLst>
               <a:ext uri="{FF2B5EF4-FFF2-40B4-BE49-F238E27FC236}">
-                <a16:creationId xmlns:a16="http://schemas.microsoft.com/office/drawing/2014/main" id="{AE7265BA-5F18-98D7-5283-6843C0909686}"/>
+                <a16:creationId xmlns:a16="http://schemas.microsoft.com/office/drawing/2014/main" id="{5D9A3F9E-9BE1-9B46-BAAA-00E8CF77B062}"/>
               </a:ext>
             </a:extLst>
           </p:cNvPr>
@@ -9233,7 +9321,7 @@
           <p:cNvPr id="4" name="Comparison table" descr="Comparison of a typical training simulator with this trainer">
             <a:extLst>
               <a:ext uri="{FF2B5EF4-FFF2-40B4-BE49-F238E27FC236}">
-                <a16:creationId xmlns:a16="http://schemas.microsoft.com/office/drawing/2014/main" id="{681EBEF2-FE81-CC0E-D4EE-BA2992793FED}"/>
+                <a16:creationId xmlns:a16="http://schemas.microsoft.com/office/drawing/2014/main" id="{8A4810AD-6BB9-3478-E5CC-C70DE3A3AFF1}"/>
               </a:ext>
             </a:extLst>
           </p:cNvPr>
@@ -9243,7 +9331,7 @@
           <p:nvPr>
             <p:extLst>
               <p:ext uri="{D42A27DB-BD31-4B8C-83A1-F6EECF244321}">
-                <p14:modId xmlns:p14="http://schemas.microsoft.com/office/powerpoint/2010/main" val="1506703945"/>
+                <p14:modId xmlns:p14="http://schemas.microsoft.com/office/powerpoint/2010/main" val="2690491014"/>
               </p:ext>
             </p:extLst>
           </p:nvPr>
@@ -9262,21 +9350,21 @@
                 <a:gridCol w="2286000">
                   <a:extLst>
                     <a:ext uri="{9D8B030D-6E8A-4147-A177-3AD203B41FA5}">
-                      <a16:colId xmlns:a16="http://schemas.microsoft.com/office/drawing/2014/main" val="4226497344"/>
+                      <a16:colId xmlns:a16="http://schemas.microsoft.com/office/drawing/2014/main" val="1217459381"/>
                     </a:ext>
                   </a:extLst>
                 </a:gridCol>
                 <a:gridCol w="3810000">
                   <a:extLst>
                     <a:ext uri="{9D8B030D-6E8A-4147-A177-3AD203B41FA5}">
-                      <a16:colId xmlns:a16="http://schemas.microsoft.com/office/drawing/2014/main" val="3923370583"/>
+                      <a16:colId xmlns:a16="http://schemas.microsoft.com/office/drawing/2014/main" val="17294429"/>
                     </a:ext>
                   </a:extLst>
                 </a:gridCol>
                 <a:gridCol w="4876800">
                   <a:extLst>
                     <a:ext uri="{9D8B030D-6E8A-4147-A177-3AD203B41FA5}">
-                      <a16:colId xmlns:a16="http://schemas.microsoft.com/office/drawing/2014/main" val="626170969"/>
+                      <a16:colId xmlns:a16="http://schemas.microsoft.com/office/drawing/2014/main" val="1331989039"/>
                     </a:ext>
                   </a:extLst>
                 </a:gridCol>
@@ -9347,7 +9435,7 @@
                 </a:tc>
                 <a:extLst>
                   <a:ext uri="{0D108BD9-81ED-4DB2-BD59-A6C34878D82A}">
-                    <a16:rowId xmlns:a16="http://schemas.microsoft.com/office/drawing/2014/main" val="2250928536"/>
+                    <a16:rowId xmlns:a16="http://schemas.microsoft.com/office/drawing/2014/main" val="2385532133"/>
                   </a:ext>
                 </a:extLst>
               </a:tr>
@@ -9420,7 +9508,7 @@
                 </a:tc>
                 <a:extLst>
                   <a:ext uri="{0D108BD9-81ED-4DB2-BD59-A6C34878D82A}">
-                    <a16:rowId xmlns:a16="http://schemas.microsoft.com/office/drawing/2014/main" val="3823979470"/>
+                    <a16:rowId xmlns:a16="http://schemas.microsoft.com/office/drawing/2014/main" val="1531822430"/>
                   </a:ext>
                 </a:extLst>
               </a:tr>
@@ -9493,7 +9581,7 @@
                 </a:tc>
                 <a:extLst>
                   <a:ext uri="{0D108BD9-81ED-4DB2-BD59-A6C34878D82A}">
-                    <a16:rowId xmlns:a16="http://schemas.microsoft.com/office/drawing/2014/main" val="3639275817"/>
+                    <a16:rowId xmlns:a16="http://schemas.microsoft.com/office/drawing/2014/main" val="3725080990"/>
                   </a:ext>
                 </a:extLst>
               </a:tr>
@@ -9566,7 +9654,7 @@
                 </a:tc>
                 <a:extLst>
                   <a:ext uri="{0D108BD9-81ED-4DB2-BD59-A6C34878D82A}">
-                    <a16:rowId xmlns:a16="http://schemas.microsoft.com/office/drawing/2014/main" val="3867726275"/>
+                    <a16:rowId xmlns:a16="http://schemas.microsoft.com/office/drawing/2014/main" val="3040938841"/>
                   </a:ext>
                 </a:extLst>
               </a:tr>
@@ -9639,7 +9727,7 @@
                 </a:tc>
                 <a:extLst>
                   <a:ext uri="{0D108BD9-81ED-4DB2-BD59-A6C34878D82A}">
-                    <a16:rowId xmlns:a16="http://schemas.microsoft.com/office/drawing/2014/main" val="2746681180"/>
+                    <a16:rowId xmlns:a16="http://schemas.microsoft.com/office/drawing/2014/main" val="3745406694"/>
                   </a:ext>
                 </a:extLst>
               </a:tr>
@@ -9652,7 +9740,7 @@
           <p:cNvPr id="5" name="TextBox 4">
             <a:extLst>
               <a:ext uri="{FF2B5EF4-FFF2-40B4-BE49-F238E27FC236}">
-                <a16:creationId xmlns:a16="http://schemas.microsoft.com/office/drawing/2014/main" id="{F8194C5B-EBB3-22A9-39D2-917CE1618173}"/>
+                <a16:creationId xmlns:a16="http://schemas.microsoft.com/office/drawing/2014/main" id="{A4392967-6890-B9F0-EE02-292B149FA1D1}"/>
               </a:ext>
             </a:extLst>
           </p:cNvPr>
@@ -9692,7 +9780,7 @@
           <p:cNvPr id="6" name="TextBox 5">
             <a:extLst>
               <a:ext uri="{FF2B5EF4-FFF2-40B4-BE49-F238E27FC236}">
-                <a16:creationId xmlns:a16="http://schemas.microsoft.com/office/drawing/2014/main" id="{C7426AD9-64A1-7C97-21A5-1B20EE875709}"/>
+                <a16:creationId xmlns:a16="http://schemas.microsoft.com/office/drawing/2014/main" id="{75B7FF77-EC12-0A37-318F-509A964A5250}"/>
               </a:ext>
             </a:extLst>
           </p:cNvPr>
@@ -9731,7 +9819,7 @@
     </p:spTree>
     <p:extLst>
       <p:ext uri="{BB962C8B-B14F-4D97-AF65-F5344CB8AC3E}">
-        <p14:creationId xmlns:p14="http://schemas.microsoft.com/office/powerpoint/2010/main" val="2482187101"/>
+        <p14:creationId xmlns:p14="http://schemas.microsoft.com/office/powerpoint/2010/main" val="2317900498"/>
       </p:ext>
     </p:extLst>
   </p:cSld>
@@ -9771,7 +9859,7 @@
           <p:cNvPr id="2" name="Title 1">
             <a:extLst>
               <a:ext uri="{FF2B5EF4-FFF2-40B4-BE49-F238E27FC236}">
-                <a16:creationId xmlns:a16="http://schemas.microsoft.com/office/drawing/2014/main" id="{FCF7FFF2-EDFC-705A-174D-8552C17C7906}"/>
+                <a16:creationId xmlns:a16="http://schemas.microsoft.com/office/drawing/2014/main" id="{44F24BEE-CD6C-9401-8A7C-E99411EA933B}"/>
               </a:ext>
             </a:extLst>
           </p:cNvPr>
@@ -9811,7 +9899,7 @@
           <p:cNvPr id="3" name="TextBox 2">
             <a:extLst>
               <a:ext uri="{FF2B5EF4-FFF2-40B4-BE49-F238E27FC236}">
-                <a16:creationId xmlns:a16="http://schemas.microsoft.com/office/drawing/2014/main" id="{FC0B89C4-D607-A15C-E875-6E721935B3CD}"/>
+                <a16:creationId xmlns:a16="http://schemas.microsoft.com/office/drawing/2014/main" id="{7718DB97-08ED-C2BA-7971-3523855B6E2B}"/>
               </a:ext>
             </a:extLst>
           </p:cNvPr>
@@ -9851,7 +9939,7 @@
           <p:cNvPr id="4" name="Rectangle: Rounded Corners 3">
             <a:extLst>
               <a:ext uri="{FF2B5EF4-FFF2-40B4-BE49-F238E27FC236}">
-                <a16:creationId xmlns:a16="http://schemas.microsoft.com/office/drawing/2014/main" id="{CF0677F3-4327-5D90-C50D-6A0ADFB37090}"/>
+                <a16:creationId xmlns:a16="http://schemas.microsoft.com/office/drawing/2014/main" id="{4C9E395E-34AB-690F-046F-8A8668F3F75C}"/>
               </a:ext>
             </a:extLst>
           </p:cNvPr>
@@ -9907,7 +9995,7 @@
           <p:cNvPr id="5" name="TextBox 4">
             <a:extLst>
               <a:ext uri="{FF2B5EF4-FFF2-40B4-BE49-F238E27FC236}">
-                <a16:creationId xmlns:a16="http://schemas.microsoft.com/office/drawing/2014/main" id="{BBA97009-653F-79CE-D526-B352EECB4C83}"/>
+                <a16:creationId xmlns:a16="http://schemas.microsoft.com/office/drawing/2014/main" id="{7351C1E4-7A47-81CD-A88B-95E9AF352791}"/>
               </a:ext>
             </a:extLst>
           </p:cNvPr>
@@ -9947,7 +10035,7 @@
           <p:cNvPr id="6" name="TextBox 5">
             <a:extLst>
               <a:ext uri="{FF2B5EF4-FFF2-40B4-BE49-F238E27FC236}">
-                <a16:creationId xmlns:a16="http://schemas.microsoft.com/office/drawing/2014/main" id="{7C09FD73-BE1D-9D96-8448-F511F1790343}"/>
+                <a16:creationId xmlns:a16="http://schemas.microsoft.com/office/drawing/2014/main" id="{CAA22932-07FD-BFC1-E319-EF2C84AC13EB}"/>
               </a:ext>
             </a:extLst>
           </p:cNvPr>
@@ -10084,7 +10172,7 @@
           <p:cNvPr id="7" name="Rectangle: Rounded Corners 6">
             <a:extLst>
               <a:ext uri="{FF2B5EF4-FFF2-40B4-BE49-F238E27FC236}">
-                <a16:creationId xmlns:a16="http://schemas.microsoft.com/office/drawing/2014/main" id="{14B88F2E-588C-25BC-644E-2C033690FE16}"/>
+                <a16:creationId xmlns:a16="http://schemas.microsoft.com/office/drawing/2014/main" id="{A7806272-49AC-C902-53E1-18EFD73AD76A}"/>
               </a:ext>
             </a:extLst>
           </p:cNvPr>
@@ -10140,7 +10228,7 @@
           <p:cNvPr id="8" name="TextBox 7">
             <a:extLst>
               <a:ext uri="{FF2B5EF4-FFF2-40B4-BE49-F238E27FC236}">
-                <a16:creationId xmlns:a16="http://schemas.microsoft.com/office/drawing/2014/main" id="{2D9AC555-4A61-A14A-7902-38E5B73C6B6C}"/>
+                <a16:creationId xmlns:a16="http://schemas.microsoft.com/office/drawing/2014/main" id="{C847E8FB-8E4E-F856-764A-31ADC6729CFF}"/>
               </a:ext>
             </a:extLst>
           </p:cNvPr>
@@ -10180,7 +10268,7 @@
           <p:cNvPr id="9" name="TextBox 8">
             <a:extLst>
               <a:ext uri="{FF2B5EF4-FFF2-40B4-BE49-F238E27FC236}">
-                <a16:creationId xmlns:a16="http://schemas.microsoft.com/office/drawing/2014/main" id="{28461643-B8D4-4CAA-E818-43330A54A39D}"/>
+                <a16:creationId xmlns:a16="http://schemas.microsoft.com/office/drawing/2014/main" id="{B945FD4A-FA30-0508-E04F-CD194E051617}"/>
               </a:ext>
             </a:extLst>
           </p:cNvPr>
@@ -10317,7 +10405,7 @@
           <p:cNvPr id="10" name="TextBox 9">
             <a:extLst>
               <a:ext uri="{FF2B5EF4-FFF2-40B4-BE49-F238E27FC236}">
-                <a16:creationId xmlns:a16="http://schemas.microsoft.com/office/drawing/2014/main" id="{4E57B3BF-0FCD-9352-B96F-6C51CD0DBAD5}"/>
+                <a16:creationId xmlns:a16="http://schemas.microsoft.com/office/drawing/2014/main" id="{AC5B55F3-5A37-E6E1-2803-672757395749}"/>
               </a:ext>
             </a:extLst>
           </p:cNvPr>
@@ -10357,7 +10445,7 @@
           <p:cNvPr id="11" name="TextBox 10">
             <a:extLst>
               <a:ext uri="{FF2B5EF4-FFF2-40B4-BE49-F238E27FC236}">
-                <a16:creationId xmlns:a16="http://schemas.microsoft.com/office/drawing/2014/main" id="{50BB7C73-9A35-C0D9-DA68-DF6E48B42A73}"/>
+                <a16:creationId xmlns:a16="http://schemas.microsoft.com/office/drawing/2014/main" id="{D92EE9BE-2A52-C45C-215B-6E11844C49A5}"/>
               </a:ext>
             </a:extLst>
           </p:cNvPr>
@@ -10396,7 +10484,7 @@
     </p:spTree>
     <p:extLst>
       <p:ext uri="{BB962C8B-B14F-4D97-AF65-F5344CB8AC3E}">
-        <p14:creationId xmlns:p14="http://schemas.microsoft.com/office/powerpoint/2010/main" val="880126046"/>
+        <p14:creationId xmlns:p14="http://schemas.microsoft.com/office/powerpoint/2010/main" val="790897364"/>
       </p:ext>
     </p:extLst>
   </p:cSld>
@@ -10436,7 +10524,7 @@
           <p:cNvPr id="2" name="Title 1">
             <a:extLst>
               <a:ext uri="{FF2B5EF4-FFF2-40B4-BE49-F238E27FC236}">
-                <a16:creationId xmlns:a16="http://schemas.microsoft.com/office/drawing/2014/main" id="{94C0EEC6-1A48-3846-A41C-6CCE0C80AFBA}"/>
+                <a16:creationId xmlns:a16="http://schemas.microsoft.com/office/drawing/2014/main" id="{C8F2731E-6783-78C8-A5A6-E33451E4A2E8}"/>
               </a:ext>
             </a:extLst>
           </p:cNvPr>
@@ -10466,7 +10554,7 @@
                 </a:solidFill>
                 <a:latin typeface="Segoe UI" panose="020B0502040204020203" pitchFamily="34" charset="0"/>
               </a:rPr>
-              <a:t>What fewer sessions to proficiency are worth in S$</a:t>
+              <a:t>What fewer sessions to proficiency could be worth</a:t>
             </a:r>
           </a:p>
         </p:txBody>
@@ -10476,7 +10564,7 @@
           <p:cNvPr id="3" name="TextBox 2">
             <a:extLst>
               <a:ext uri="{FF2B5EF4-FFF2-40B4-BE49-F238E27FC236}">
-                <a16:creationId xmlns:a16="http://schemas.microsoft.com/office/drawing/2014/main" id="{EA0887B2-34E0-665D-7232-2CEDE1D3DBAB}"/>
+                <a16:creationId xmlns:a16="http://schemas.microsoft.com/office/drawing/2014/main" id="{2F7B9AA9-09FB-58E0-6BBD-B24376D9A6C5}"/>
               </a:ext>
             </a:extLst>
           </p:cNvPr>
@@ -10506,7 +10594,7 @@
                 </a:solidFill>
                 <a:latin typeface="Consolas" panose="020B0609020204030204" pitchFamily="49" charset="0"/>
               </a:rPr>
-              <a:t>BUSINESS CASE</a:t>
+              <a:t>BUSINESS CASE · SAVINGS</a:t>
             </a:r>
           </a:p>
         </p:txBody>
@@ -10516,7 +10604,7 @@
           <p:cNvPr id="4" name="Rectangle: Rounded Corners 3">
             <a:extLst>
               <a:ext uri="{FF2B5EF4-FFF2-40B4-BE49-F238E27FC236}">
-                <a16:creationId xmlns:a16="http://schemas.microsoft.com/office/drawing/2014/main" id="{41B85A4F-AF51-2249-04EA-1176E9D53752}"/>
+                <a16:creationId xmlns:a16="http://schemas.microsoft.com/office/drawing/2014/main" id="{51ED15F7-AD95-B2AF-9494-3521547552C1}"/>
               </a:ext>
             </a:extLst>
           </p:cNvPr>
@@ -10525,8 +10613,8 @@
         </p:nvSpPr>
         <p:spPr>
           <a:xfrm>
-            <a:off x="609600" y="1778000"/>
-            <a:ext cx="4191000" cy="4191000"/>
+            <a:off x="609600" y="1651000"/>
+            <a:ext cx="4572000" cy="4368800"/>
           </a:xfrm>
           <a:prstGeom prst="roundRect">
             <a:avLst>
@@ -10572,7 +10660,7 @@
           <p:cNvPr id="5" name="TextBox 4">
             <a:extLst>
               <a:ext uri="{FF2B5EF4-FFF2-40B4-BE49-F238E27FC236}">
-                <a16:creationId xmlns:a16="http://schemas.microsoft.com/office/drawing/2014/main" id="{9B473216-5798-095E-5603-08DCF03382C6}"/>
+                <a16:creationId xmlns:a16="http://schemas.microsoft.com/office/drawing/2014/main" id="{DC503405-61BB-CA2F-C283-C10CE634D7C1}"/>
               </a:ext>
             </a:extLst>
           </p:cNvPr>
@@ -10581,8 +10669,8 @@
         </p:nvSpPr>
         <p:spPr>
           <a:xfrm>
-            <a:off x="838200" y="1981200"/>
-            <a:ext cx="3759200" cy="254000"/>
+            <a:off x="838200" y="1828800"/>
+            <a:ext cx="4191000" cy="228600"/>
           </a:xfrm>
           <a:prstGeom prst="rect">
             <a:avLst/>
@@ -10596,13 +10684,13 @@
           <a:lstStyle/>
           <a:p>
             <a:r>
-              <a:rPr lang="en-SG" sz="1200" b="1">
+              <a:rPr lang="en-SG" sz="1100" b="1">
                 <a:solidFill>
                   <a:srgbClr val="FFE4C7"/>
                 </a:solidFill>
                 <a:latin typeface="Consolas" panose="020B0609020204030204" pitchFamily="49" charset="0"/>
               </a:rPr>
-              <a:t>ASSUMED System.__ComObject REPLACE WITH DIVISION FIGURES</a:t>
+              <a:t>PLACEHOLDERS · REPLACE WITH DIVISION FIGURES</a:t>
             </a:r>
           </a:p>
         </p:txBody>
@@ -10612,7 +10700,7 @@
           <p:cNvPr id="6" name="TextBox 5">
             <a:extLst>
               <a:ext uri="{FF2B5EF4-FFF2-40B4-BE49-F238E27FC236}">
-                <a16:creationId xmlns:a16="http://schemas.microsoft.com/office/drawing/2014/main" id="{87CA8C2D-EC01-4394-F40C-CF8D3360B6ED}"/>
+                <a16:creationId xmlns:a16="http://schemas.microsoft.com/office/drawing/2014/main" id="{54519246-569D-E09C-C47C-02FAB1EB900A}"/>
               </a:ext>
             </a:extLst>
           </p:cNvPr>
@@ -10621,8 +10709,8 @@
         </p:nvSpPr>
         <p:spPr>
           <a:xfrm>
-            <a:off x="838200" y="2336800"/>
-            <a:ext cx="3759200" cy="3429000"/>
+            <a:off x="838200" y="2133600"/>
+            <a:ext cx="4140200" cy="1905000"/>
           </a:xfrm>
           <a:prstGeom prst="rect">
             <a:avLst/>
@@ -10637,117 +10725,199 @@
           <a:p>
             <a:pPr>
               <a:spcAft>
-                <a:spcPts val="400"/>
+                <a:spcPts val="300"/>
               </a:spcAft>
             </a:pPr>
             <a:r>
-              <a:rPr lang="en-SG" sz="1500">
+              <a:rPr lang="en-SG" sz="1400">
                 <a:solidFill>
                   <a:srgbClr val="E1EAF4"/>
                 </a:solidFill>
-                <a:latin typeface="Segoe UI" panose="020B0502040204020203" pitchFamily="34" charset="0"/>
-              </a:rPr>
-              <a:t>200 trainees a year</a:t>
+                <a:latin typeface="Consolas" panose="020B0609020204030204" pitchFamily="49" charset="0"/>
+              </a:rPr>
+              <a:t>N  200 trainees a year</a:t>
             </a:r>
           </a:p>
           <a:p>
             <a:pPr>
               <a:spcAft>
-                <a:spcPts val="400"/>
+                <a:spcPts val="300"/>
               </a:spcAft>
             </a:pPr>
             <a:r>
-              <a:rPr lang="en-SG" sz="1500">
+              <a:rPr lang="en-SG" sz="1400">
                 <a:solidFill>
                   <a:srgbClr val="E1EAF4"/>
                 </a:solidFill>
-                <a:latin typeface="Segoe UI" panose="020B0502040204020203" pitchFamily="34" charset="0"/>
-              </a:rPr>
-              <a:t>30 sessions to proficiency</a:t>
+                <a:latin typeface="Consolas" panose="020B0609020204030204" pitchFamily="49" charset="0"/>
+              </a:rPr>
+              <a:t>S0  30 sessions to proficiency</a:t>
             </a:r>
           </a:p>
           <a:p>
             <a:pPr>
               <a:spcAft>
-                <a:spcPts val="400"/>
+                <a:spcPts val="300"/>
               </a:spcAft>
             </a:pPr>
             <a:r>
-              <a:rPr lang="en-SG" sz="1500">
+              <a:rPr lang="en-SG" sz="1400">
                 <a:solidFill>
                   <a:srgbClr val="E1EAF4"/>
                 </a:solidFill>
-                <a:latin typeface="Segoe UI" panose="020B0502040204020203" pitchFamily="34" charset="0"/>
-              </a:rPr>
-              <a:t>= 6,000 sessions a year</a:t>
+                <a:latin typeface="Consolas" panose="020B0609020204030204" pitchFamily="49" charset="0"/>
+              </a:rPr>
+              <a:t>C_session  S$1,500 per session</a:t>
             </a:r>
           </a:p>
           <a:p>
             <a:pPr>
               <a:spcAft>
-                <a:spcPts val="400"/>
+                <a:spcPts val="300"/>
               </a:spcAft>
             </a:pPr>
-            <a:endParaRPr lang="en-SG" sz="1500">
+            <a:r>
+              <a:rPr lang="en-SG" sz="1400">
+                <a:solidFill>
+                  <a:srgbClr val="E1EAF4"/>
+                </a:solidFill>
+                <a:latin typeface="Consolas" panose="020B0609020204030204" pitchFamily="49" charset="0"/>
+              </a:rPr>
+              <a:t>h  2 instructor hours per session</a:t>
+            </a:r>
+          </a:p>
+          <a:p>
+            <a:pPr>
+              <a:spcAft>
+                <a:spcPts val="300"/>
+              </a:spcAft>
+            </a:pPr>
+            <a:r>
+              <a:rPr lang="en-SG" sz="1400">
+                <a:solidFill>
+                  <a:srgbClr val="E1EAF4"/>
+                </a:solidFill>
+                <a:latin typeface="Consolas" panose="020B0609020204030204" pitchFamily="49" charset="0"/>
+              </a:rPr>
+              <a:t>C_instr  S$250 per hour</a:t>
+            </a:r>
+          </a:p>
+          <a:p>
+            <a:pPr>
+              <a:spcAft>
+                <a:spcPts val="300"/>
+              </a:spcAft>
+            </a:pPr>
+            <a:r>
+              <a:rPr lang="en-SG" sz="1400">
+                <a:solidFill>
+                  <a:srgbClr val="E1EAF4"/>
+                </a:solidFill>
+                <a:latin typeface="Consolas" panose="020B0609020204030204" pitchFamily="49" charset="0"/>
+              </a:rPr>
+              <a:t>r  5 / 10 / 15%  (ASSUMED, never measured)</a:t>
+            </a:r>
+          </a:p>
+        </p:txBody>
+      </p:sp>
+      <p:sp>
+        <p:nvSpPr>
+          <p:cNvPr id="7" name="TextBox 6">
+            <a:extLst>
+              <a:ext uri="{FF2B5EF4-FFF2-40B4-BE49-F238E27FC236}">
+                <a16:creationId xmlns:a16="http://schemas.microsoft.com/office/drawing/2014/main" id="{28D0BDDE-15F8-C6C1-9169-EFCAFEE56026}"/>
+              </a:ext>
+            </a:extLst>
+          </p:cNvPr>
+          <p:cNvSpPr txBox="1"/>
+          <p:nvPr/>
+        </p:nvSpPr>
+        <p:spPr>
+          <a:xfrm>
+            <a:off x="838200" y="4140200"/>
+            <a:ext cx="4140200" cy="1778000"/>
+          </a:xfrm>
+          <a:prstGeom prst="rect">
+            <a:avLst/>
+          </a:prstGeom>
+          <a:noFill/>
+        </p:spPr>
+        <p:txBody>
+          <a:bodyPr vert="horz" wrap="square" lIns="0" tIns="0" rIns="0" bIns="0" rtlCol="0">
+            <a:noAutofit/>
+          </a:bodyPr>
+          <a:lstStyle/>
+          <a:p>
+            <a:r>
+              <a:rPr lang="en-SG" sz="1400" b="1">
+                <a:solidFill>
+                  <a:srgbClr val="F7FAFD"/>
+                </a:solidFill>
+                <a:latin typeface="Segoe UI" panose="020B0502040204020203" pitchFamily="34" charset="0"/>
+              </a:rPr>
+              <a:t>Value of an avoided session</a:t>
+            </a:r>
+          </a:p>
+          <a:p>
+            <a:r>
+              <a:rPr lang="en-SG" sz="1400">
+                <a:solidFill>
+                  <a:srgbClr val="93ABC6"/>
+                </a:solidFill>
+                <a:latin typeface="Segoe UI" panose="020B0502040204020203" pitchFamily="34" charset="0"/>
+              </a:rPr>
+              <a:t>= 1,500 + 2 × 250 = S$2,000 (mid)</a:t>
+            </a:r>
+          </a:p>
+          <a:p>
+            <a:endParaRPr lang="en-SG" sz="1400">
               <a:solidFill>
-                <a:srgbClr val="E1EAF4"/>
+                <a:srgbClr val="93ABC6"/>
               </a:solidFill>
               <a:latin typeface="Segoe UI" panose="020B0502040204020203" pitchFamily="34" charset="0"/>
             </a:endParaRPr>
           </a:p>
           <a:p>
-            <a:pPr>
-              <a:spcAft>
-                <a:spcPts val="400"/>
-              </a:spcAft>
-            </a:pPr>
-            <a:r>
-              <a:rPr lang="en-SG" sz="1500">
-                <a:solidFill>
-                  <a:srgbClr val="E1EAF4"/>
+            <a:r>
+              <a:rPr lang="en-SG" sz="1400">
+                <a:solidFill>
+                  <a:srgbClr val="93ABC6"/>
                 </a:solidFill>
                 <a:latin typeface="Segoe UI" panose="020B0502040204020203" pitchFamily="34" charset="0"/>
               </a:rPr>
-              <a:t>Value of an avoided session = simulator running cost + instructor time</a:t>
-            </a:r>
-          </a:p>
-          <a:p>
-            <a:pPr>
-              <a:spcAft>
-                <a:spcPts val="400"/>
-              </a:spcAft>
-            </a:pPr>
-            <a:endParaRPr lang="en-SG" sz="1500">
-              <a:solidFill>
-                <a:srgbClr val="E1EAF4"/>
-              </a:solidFill>
-              <a:latin typeface="Segoe UI" panose="020B0502040204020203" pitchFamily="34" charset="0"/>
-            </a:endParaRPr>
-          </a:p>
-          <a:p>
-            <a:pPr>
-              <a:spcAft>
-                <a:spcPts val="400"/>
-              </a:spcAft>
-            </a:pPr>
-            <a:r>
-              <a:rPr lang="en-SG" sz="1500">
-                <a:solidFill>
-                  <a:srgbClr val="E1EAF4"/>
+              <a:t>Annual saving = N × S0 × r × value</a:t>
+            </a:r>
+          </a:p>
+          <a:p>
+            <a:r>
+              <a:rPr lang="en-SG" sz="1400">
+                <a:solidFill>
+                  <a:srgbClr val="93ABC6"/>
                 </a:solidFill>
                 <a:latin typeface="Segoe UI" panose="020B0502040204020203" pitchFamily="34" charset="0"/>
               </a:rPr>
-              <a:t>r = share of sessions avoided by targeted practice, never yet measured</a:t>
+              <a:t>At r = 10%: 200 × 30 × 0.10 = 600 sessions avoided</a:t>
+            </a:r>
+          </a:p>
+          <a:p>
+            <a:r>
+              <a:rPr lang="en-SG" sz="1400">
+                <a:solidFill>
+                  <a:srgbClr val="93ABC6"/>
+                </a:solidFill>
+                <a:latin typeface="Segoe UI" panose="020B0502040204020203" pitchFamily="34" charset="0"/>
+              </a:rPr>
+              <a:t>= 1,200 instructor hours; time to proficiency 30 → 27 sessions</a:t>
             </a:r>
           </a:p>
         </p:txBody>
       </p:sp>
       <p:graphicFrame>
         <p:nvGraphicFramePr>
-          <p:cNvPr id="7" name="Savings sensitivity table" descr="Annual saving in Singapore dollars for three avoided-session shares and three session values">
-            <a:extLst>
-              <a:ext uri="{FF2B5EF4-FFF2-40B4-BE49-F238E27FC236}">
-                <a16:creationId xmlns:a16="http://schemas.microsoft.com/office/drawing/2014/main" id="{3915CFA7-C6B1-ABA7-81D0-FC5DFC559F1D}"/>
+          <p:cNvPr id="8" name="Savings sensitivity table" descr="Illustrative annual saving in Singapore dollars for three avoided-session shares and three session values">
+            <a:extLst>
+              <a:ext uri="{FF2B5EF4-FFF2-40B4-BE49-F238E27FC236}">
+                <a16:creationId xmlns:a16="http://schemas.microsoft.com/office/drawing/2014/main" id="{FF961EC2-9D56-F4D1-D9FD-1F4B0BC12344}"/>
               </a:ext>
             </a:extLst>
           </p:cNvPr>
@@ -10757,14 +10927,14 @@
           <p:nvPr>
             <p:extLst>
               <p:ext uri="{D42A27DB-BD31-4B8C-83A1-F6EECF244321}">
-                <p14:modId xmlns:p14="http://schemas.microsoft.com/office/powerpoint/2010/main" val="2105265500"/>
+                <p14:modId xmlns:p14="http://schemas.microsoft.com/office/powerpoint/2010/main" val="2563394942"/>
               </p:ext>
             </p:extLst>
           </p:nvPr>
         </p:nvGraphicFramePr>
         <p:xfrm>
-          <a:off x="5105400" y="1778000"/>
-          <a:ext cx="6477000" cy="3048000"/>
+          <a:off x="5486400" y="1651000"/>
+          <a:ext cx="6096000" cy="2921000"/>
         </p:xfrm>
         <a:graphic>
           <a:graphicData uri="http://schemas.openxmlformats.org/drawingml/2006/table">
@@ -10773,43 +10943,43 @@
                 <a:tableStyleId>{2D5ABB26-0587-4C30-8999-92F81FD0307C}</a:tableStyleId>
               </a:tblPr>
               <a:tblGrid>
-                <a:gridCol w="2133600">
+                <a:gridCol w="1905000">
                   <a:extLst>
                     <a:ext uri="{9D8B030D-6E8A-4147-A177-3AD203B41FA5}">
-                      <a16:colId xmlns:a16="http://schemas.microsoft.com/office/drawing/2014/main" val="2025934597"/>
+                      <a16:colId xmlns:a16="http://schemas.microsoft.com/office/drawing/2014/main" val="3061742321"/>
                     </a:ext>
                   </a:extLst>
                 </a:gridCol>
-                <a:gridCol w="1447800">
+                <a:gridCol w="1397000">
                   <a:extLst>
                     <a:ext uri="{9D8B030D-6E8A-4147-A177-3AD203B41FA5}">
-                      <a16:colId xmlns:a16="http://schemas.microsoft.com/office/drawing/2014/main" val="3447733064"/>
+                      <a16:colId xmlns:a16="http://schemas.microsoft.com/office/drawing/2014/main" val="585036025"/>
                     </a:ext>
                   </a:extLst>
                 </a:gridCol>
-                <a:gridCol w="1447800">
+                <a:gridCol w="1397000">
                   <a:extLst>
                     <a:ext uri="{9D8B030D-6E8A-4147-A177-3AD203B41FA5}">
-                      <a16:colId xmlns:a16="http://schemas.microsoft.com/office/drawing/2014/main" val="2989590639"/>
+                      <a16:colId xmlns:a16="http://schemas.microsoft.com/office/drawing/2014/main" val="2301041623"/>
                     </a:ext>
                   </a:extLst>
                 </a:gridCol>
-                <a:gridCol w="1447800">
+                <a:gridCol w="1397000">
                   <a:extLst>
                     <a:ext uri="{9D8B030D-6E8A-4147-A177-3AD203B41FA5}">
-                      <a16:colId xmlns:a16="http://schemas.microsoft.com/office/drawing/2014/main" val="911462886"/>
+                      <a16:colId xmlns:a16="http://schemas.microsoft.com/office/drawing/2014/main" val="2069394996"/>
                     </a:ext>
                   </a:extLst>
                 </a:gridCol>
               </a:tblGrid>
-              <a:tr h="558800">
+              <a:tr h="533400">
                 <a:tc>
                   <a:txBody>
                     <a:bodyPr/>
                     <a:lstStyle/>
                     <a:p>
                       <a:r>
-                        <a:rPr lang="en-SG" sz="1300" b="1">
+                        <a:rPr lang="en-SG" sz="1200" b="1">
                           <a:solidFill>
                             <a:srgbClr val="F7FAFD"/>
                           </a:solidFill>
@@ -10831,7 +11001,7 @@
                     <a:lstStyle/>
                     <a:p>
                       <a:r>
-                        <a:rPr lang="en-SG" sz="1300" b="1">
+                        <a:rPr lang="en-SG" sz="1200" b="1">
                           <a:solidFill>
                             <a:srgbClr val="F7FAFD"/>
                           </a:solidFill>
@@ -10853,7 +11023,7 @@
                     <a:lstStyle/>
                     <a:p>
                       <a:r>
-                        <a:rPr lang="en-SG" sz="1300" b="1">
+                        <a:rPr lang="en-SG" sz="1200" b="1">
                           <a:solidFill>
                             <a:srgbClr val="F7FAFD"/>
                           </a:solidFill>
@@ -10875,7 +11045,7 @@
                     <a:lstStyle/>
                     <a:p>
                       <a:r>
-                        <a:rPr lang="en-SG" sz="1300" b="1">
+                        <a:rPr lang="en-SG" sz="1200" b="1">
                           <a:solidFill>
                             <a:srgbClr val="F7FAFD"/>
                           </a:solidFill>
@@ -10893,18 +11063,18 @@
                 </a:tc>
                 <a:extLst>
                   <a:ext uri="{0D108BD9-81ED-4DB2-BD59-A6C34878D82A}">
-                    <a16:rowId xmlns:a16="http://schemas.microsoft.com/office/drawing/2014/main" val="2031802943"/>
+                    <a16:rowId xmlns:a16="http://schemas.microsoft.com/office/drawing/2014/main" val="426735146"/>
                   </a:ext>
                 </a:extLst>
               </a:tr>
-              <a:tr h="787400">
+              <a:tr h="711200">
                 <a:tc>
                   <a:txBody>
                     <a:bodyPr/>
                     <a:lstStyle/>
                     <a:p>
                       <a:r>
-                        <a:rPr lang="en-SG" sz="1500" b="1">
+                        <a:rPr lang="en-SG" sz="1400" b="1">
                           <a:solidFill>
                             <a:srgbClr val="F7FAFD"/>
                           </a:solidFill>
@@ -10926,7 +11096,7 @@
                     <a:lstStyle/>
                     <a:p>
                       <a:r>
-                        <a:rPr lang="en-SG" sz="2000" b="1">
+                        <a:rPr lang="en-SG" sz="1900" b="1">
                           <a:solidFill>
                             <a:srgbClr val="EBDFFF"/>
                           </a:solidFill>
@@ -10948,7 +11118,7 @@
                     <a:lstStyle/>
                     <a:p>
                       <a:r>
-                        <a:rPr lang="en-SG" sz="2000" b="1">
+                        <a:rPr lang="en-SG" sz="1900" b="1">
                           <a:solidFill>
                             <a:srgbClr val="EBDFFF"/>
                           </a:solidFill>
@@ -10970,7 +11140,7 @@
                     <a:lstStyle/>
                     <a:p>
                       <a:r>
-                        <a:rPr lang="en-SG" sz="2000" b="1">
+                        <a:rPr lang="en-SG" sz="1900" b="1">
                           <a:solidFill>
                             <a:srgbClr val="EBDFFF"/>
                           </a:solidFill>
@@ -10988,18 +11158,18 @@
                 </a:tc>
                 <a:extLst>
                   <a:ext uri="{0D108BD9-81ED-4DB2-BD59-A6C34878D82A}">
-                    <a16:rowId xmlns:a16="http://schemas.microsoft.com/office/drawing/2014/main" val="2646835934"/>
+                    <a16:rowId xmlns:a16="http://schemas.microsoft.com/office/drawing/2014/main" val="1037451220"/>
                   </a:ext>
                 </a:extLst>
               </a:tr>
-              <a:tr h="787400">
+              <a:tr h="711200">
                 <a:tc>
                   <a:txBody>
                     <a:bodyPr/>
                     <a:lstStyle/>
                     <a:p>
                       <a:r>
-                        <a:rPr lang="en-SG" sz="1500" b="1">
+                        <a:rPr lang="en-SG" sz="1400" b="1">
                           <a:solidFill>
                             <a:srgbClr val="F7FAFD"/>
                           </a:solidFill>
@@ -11021,7 +11191,7 @@
                     <a:lstStyle/>
                     <a:p>
                       <a:r>
-                        <a:rPr lang="en-SG" sz="2000" b="1">
+                        <a:rPr lang="en-SG" sz="1900" b="1">
                           <a:solidFill>
                             <a:srgbClr val="EBDFFF"/>
                           </a:solidFill>
@@ -11043,7 +11213,7 @@
                     <a:lstStyle/>
                     <a:p>
                       <a:r>
-                        <a:rPr lang="en-SG" sz="2000" b="1">
+                        <a:rPr lang="en-SG" sz="1900" b="1">
                           <a:solidFill>
                             <a:srgbClr val="EBDFFF"/>
                           </a:solidFill>
@@ -11065,7 +11235,7 @@
                     <a:lstStyle/>
                     <a:p>
                       <a:r>
-                        <a:rPr lang="en-SG" sz="2000" b="1">
+                        <a:rPr lang="en-SG" sz="1900" b="1">
                           <a:solidFill>
                             <a:srgbClr val="EBDFFF"/>
                           </a:solidFill>
@@ -11083,18 +11253,18 @@
                 </a:tc>
                 <a:extLst>
                   <a:ext uri="{0D108BD9-81ED-4DB2-BD59-A6C34878D82A}">
-                    <a16:rowId xmlns:a16="http://schemas.microsoft.com/office/drawing/2014/main" val="3329346680"/>
+                    <a16:rowId xmlns:a16="http://schemas.microsoft.com/office/drawing/2014/main" val="3285610279"/>
                   </a:ext>
                 </a:extLst>
               </a:tr>
-              <a:tr h="787400">
+              <a:tr h="711200">
                 <a:tc>
                   <a:txBody>
                     <a:bodyPr/>
                     <a:lstStyle/>
                     <a:p>
                       <a:r>
-                        <a:rPr lang="en-SG" sz="1500" b="1">
+                        <a:rPr lang="en-SG" sz="1400" b="1">
                           <a:solidFill>
                             <a:srgbClr val="F7FAFD"/>
                           </a:solidFill>
@@ -11116,7 +11286,7 @@
                     <a:lstStyle/>
                     <a:p>
                       <a:r>
-                        <a:rPr lang="en-SG" sz="2000" b="1">
+                        <a:rPr lang="en-SG" sz="1900" b="1">
                           <a:solidFill>
                             <a:srgbClr val="EBDFFF"/>
                           </a:solidFill>
@@ -11138,7 +11308,7 @@
                     <a:lstStyle/>
                     <a:p>
                       <a:r>
-                        <a:rPr lang="en-SG" sz="2000" b="1">
+                        <a:rPr lang="en-SG" sz="1900" b="1">
                           <a:solidFill>
                             <a:srgbClr val="EBDFFF"/>
                           </a:solidFill>
@@ -11160,7 +11330,7 @@
                     <a:lstStyle/>
                     <a:p>
                       <a:r>
-                        <a:rPr lang="en-SG" sz="2000" b="1">
+                        <a:rPr lang="en-SG" sz="1900" b="1">
                           <a:solidFill>
                             <a:srgbClr val="EBDFFF"/>
                           </a:solidFill>
@@ -11178,7 +11348,7 @@
                 </a:tc>
                 <a:extLst>
                   <a:ext uri="{0D108BD9-81ED-4DB2-BD59-A6C34878D82A}">
-                    <a16:rowId xmlns:a16="http://schemas.microsoft.com/office/drawing/2014/main" val="430456887"/>
+                    <a16:rowId xmlns:a16="http://schemas.microsoft.com/office/drawing/2014/main" val="1949463533"/>
                   </a:ext>
                 </a:extLst>
               </a:tr>
@@ -11188,10 +11358,10 @@
       </p:graphicFrame>
       <p:sp>
         <p:nvSpPr>
-          <p:cNvPr id="8" name="TextBox 7">
-            <a:extLst>
-              <a:ext uri="{FF2B5EF4-FFF2-40B4-BE49-F238E27FC236}">
-                <a16:creationId xmlns:a16="http://schemas.microsoft.com/office/drawing/2014/main" id="{7DEA0E35-E4D9-DAD2-586B-931BAF077903}"/>
+          <p:cNvPr id="9" name="TextBox 8">
+            <a:extLst>
+              <a:ext uri="{FF2B5EF4-FFF2-40B4-BE49-F238E27FC236}">
+                <a16:creationId xmlns:a16="http://schemas.microsoft.com/office/drawing/2014/main" id="{7E9BB3C0-9F92-30E1-75E8-5998987892EE}"/>
               </a:ext>
             </a:extLst>
           </p:cNvPr>
@@ -11200,8 +11370,8 @@
         </p:nvSpPr>
         <p:spPr>
           <a:xfrm>
-            <a:off x="5105400" y="5080000"/>
-            <a:ext cx="6477000" cy="889000"/>
+            <a:off x="5486400" y="4775200"/>
+            <a:ext cx="6096000" cy="1219200"/>
           </a:xfrm>
           <a:prstGeom prst="rect">
             <a:avLst/>
@@ -11215,23 +11385,23 @@
           <a:lstStyle/>
           <a:p>
             <a:r>
-              <a:rPr lang="en-SG" sz="1500">
+              <a:rPr lang="en-SG" sz="1400">
                 <a:solidFill>
                   <a:srgbClr val="93ABC6"/>
                 </a:solidFill>
                 <a:latin typeface="Segoe UI" panose="020B0502040204020203" pitchFamily="34" charset="0"/>
               </a:rPr>
-              <a:t>Read as: if targeted practice avoids 10% of sessions and each avoided session is worth S$2,000, the saving is S$1.2M a year. Saving = sessions a year × r × value per session.</a:t>
-            </a:r>
-          </a:p>
-        </p:txBody>
-      </p:sp>
-      <p:sp>
-        <p:nvSpPr>
-          <p:cNvPr id="9" name="TextBox 8">
-            <a:extLst>
-              <a:ext uri="{FF2B5EF4-FFF2-40B4-BE49-F238E27FC236}">
-                <a16:creationId xmlns:a16="http://schemas.microsoft.com/office/drawing/2014/main" id="{130E88D7-8825-1971-B4AB-E99193CA975E}"/>
+              <a:t>The saving comes from three drivers: fewer simulator sessions (S$1,500 each), fewer instructor hours (2 per session), and a shorter time to proficiency. Remedial retraining is not modelled, so it is upside. Every figure here is illustrative: the division’s numbers replace the placeholders and the grid follows.</a:t>
+            </a:r>
+          </a:p>
+        </p:txBody>
+      </p:sp>
+      <p:sp>
+        <p:nvSpPr>
+          <p:cNvPr id="10" name="TextBox 9">
+            <a:extLst>
+              <a:ext uri="{FF2B5EF4-FFF2-40B4-BE49-F238E27FC236}">
+                <a16:creationId xmlns:a16="http://schemas.microsoft.com/office/drawing/2014/main" id="{F9F16DCA-C9CB-0015-8292-40BA097AABA2}"/>
               </a:ext>
             </a:extLst>
           </p:cNvPr>
@@ -11261,17 +11431,17 @@
                 </a:solidFill>
                 <a:latin typeface="Consolas" panose="020B0609020204030204" pitchFamily="49" charset="0"/>
               </a:rPr>
-              <a:t>ILLUSTRATIVE ESTIMATE  System.__ComObject  r IS A HYPOTHESIS, NOT A RESULT</a:t>
-            </a:r>
-          </a:p>
-        </p:txBody>
-      </p:sp>
-      <p:sp>
-        <p:nvSpPr>
-          <p:cNvPr id="10" name="TextBox 9">
-            <a:extLst>
-              <a:ext uri="{FF2B5EF4-FFF2-40B4-BE49-F238E27FC236}">
-                <a16:creationId xmlns:a16="http://schemas.microsoft.com/office/drawing/2014/main" id="{77001268-4C01-C1D6-B693-0921E6F22A9D}"/>
+              <a:t>ILLUSTRATIVE ESTIMATE  ·  r IS A HYPOTHESIS, NOT A RESULT</a:t>
+            </a:r>
+          </a:p>
+        </p:txBody>
+      </p:sp>
+      <p:sp>
+        <p:nvSpPr>
+          <p:cNvPr id="11" name="TextBox 10">
+            <a:extLst>
+              <a:ext uri="{FF2B5EF4-FFF2-40B4-BE49-F238E27FC236}">
+                <a16:creationId xmlns:a16="http://schemas.microsoft.com/office/drawing/2014/main" id="{BA6E348B-4BDF-7728-23A5-9AF978676AAC}"/>
               </a:ext>
             </a:extLst>
           </p:cNvPr>
@@ -11310,7 +11480,7 @@
     </p:spTree>
     <p:extLst>
       <p:ext uri="{BB962C8B-B14F-4D97-AF65-F5344CB8AC3E}">
-        <p14:creationId xmlns:p14="http://schemas.microsoft.com/office/powerpoint/2010/main" val="1984066846"/>
+        <p14:creationId xmlns:p14="http://schemas.microsoft.com/office/powerpoint/2010/main" val="102170747"/>
       </p:ext>
     </p:extLst>
   </p:cSld>
@@ -11321,6 +11491,1041 @@
 </file>
 
 <file path=ppt/slides/slide17.xml><?xml version="1.0" encoding="utf-8"?>
+<p:sld xmlns:a="http://schemas.openxmlformats.org/drawingml/2006/main" xmlns:r="http://schemas.openxmlformats.org/officeDocument/2006/relationships" xmlns:p="http://schemas.openxmlformats.org/presentationml/2006/main">
+  <p:cSld>
+    <p:bg>
+      <p:bgPr>
+        <a:solidFill>
+          <a:srgbClr val="081421"/>
+        </a:solidFill>
+        <a:effectLst/>
+      </p:bgPr>
+    </p:bg>
+    <p:spTree>
+      <p:nvGrpSpPr>
+        <p:cNvPr id="1" name=""/>
+        <p:cNvGrpSpPr/>
+        <p:nvPr/>
+      </p:nvGrpSpPr>
+      <p:grpSpPr>
+        <a:xfrm>
+          <a:off x="0" y="0"/>
+          <a:ext cx="0" cy="0"/>
+          <a:chOff x="0" y="0"/>
+          <a:chExt cx="0" cy="0"/>
+        </a:xfrm>
+      </p:grpSpPr>
+      <p:sp>
+        <p:nvSpPr>
+          <p:cNvPr id="2" name="Title 1">
+            <a:extLst>
+              <a:ext uri="{FF2B5EF4-FFF2-40B4-BE49-F238E27FC236}">
+                <a16:creationId xmlns:a16="http://schemas.microsoft.com/office/drawing/2014/main" id="{2296CB4E-632E-F63A-FB90-457A39C65963}"/>
+              </a:ext>
+            </a:extLst>
+          </p:cNvPr>
+          <p:cNvSpPr>
+            <a:spLocks noGrp="1"/>
+          </p:cNvSpPr>
+          <p:nvPr>
+            <p:ph type="title"/>
+          </p:nvPr>
+        </p:nvSpPr>
+        <p:spPr>
+          <a:xfrm>
+            <a:off x="609600" y="787400"/>
+            <a:ext cx="10972800" cy="762000"/>
+          </a:xfrm>
+        </p:spPr>
+        <p:txBody>
+          <a:bodyPr wrap="square" lIns="0" tIns="0" rIns="0" bIns="0" anchor="t">
+            <a:noAutofit/>
+          </a:bodyPr>
+          <a:lstStyle/>
+          <a:p>
+            <a:r>
+              <a:rPr lang="en-SG" sz="3600" b="1">
+                <a:solidFill>
+                  <a:srgbClr val="F7FAFD"/>
+                </a:solidFill>
+                <a:latin typeface="Segoe UI" panose="020B0502040204020203" pitchFamily="34" charset="0"/>
+              </a:rPr>
+              <a:t>What it took to build, and the payback</a:t>
+            </a:r>
+          </a:p>
+        </p:txBody>
+      </p:sp>
+      <p:sp>
+        <p:nvSpPr>
+          <p:cNvPr id="3" name="TextBox 2">
+            <a:extLst>
+              <a:ext uri="{FF2B5EF4-FFF2-40B4-BE49-F238E27FC236}">
+                <a16:creationId xmlns:a16="http://schemas.microsoft.com/office/drawing/2014/main" id="{C6078563-08DA-985A-E22C-D495D9A5A15D}"/>
+              </a:ext>
+            </a:extLst>
+          </p:cNvPr>
+          <p:cNvSpPr txBox="1"/>
+          <p:nvPr/>
+        </p:nvSpPr>
+        <p:spPr>
+          <a:xfrm>
+            <a:off x="609600" y="457200"/>
+            <a:ext cx="5969000" cy="254000"/>
+          </a:xfrm>
+          <a:prstGeom prst="rect">
+            <a:avLst/>
+          </a:prstGeom>
+          <a:noFill/>
+        </p:spPr>
+        <p:txBody>
+          <a:bodyPr vert="horz" wrap="square" lIns="0" tIns="0" rIns="0" bIns="0" rtlCol="0">
+            <a:noAutofit/>
+          </a:bodyPr>
+          <a:lstStyle/>
+          <a:p>
+            <a:r>
+              <a:rPr lang="en-SG" sz="1400">
+                <a:solidFill>
+                  <a:srgbClr val="2F9DFF"/>
+                </a:solidFill>
+                <a:latin typeface="Consolas" panose="020B0609020204030204" pitchFamily="49" charset="0"/>
+              </a:rPr>
+              <a:t>BUSINESS CASE · DEVELOPMENT EFFORT</a:t>
+            </a:r>
+          </a:p>
+        </p:txBody>
+      </p:sp>
+      <p:sp>
+        <p:nvSpPr>
+          <p:cNvPr id="4" name="Rectangle: Rounded Corners 3">
+            <a:extLst>
+              <a:ext uri="{FF2B5EF4-FFF2-40B4-BE49-F238E27FC236}">
+                <a16:creationId xmlns:a16="http://schemas.microsoft.com/office/drawing/2014/main" id="{79444ADA-814A-ABD5-7F7D-84B488234865}"/>
+              </a:ext>
+            </a:extLst>
+          </p:cNvPr>
+          <p:cNvSpPr/>
+          <p:nvPr/>
+        </p:nvSpPr>
+        <p:spPr>
+          <a:xfrm>
+            <a:off x="609600" y="1651000"/>
+            <a:ext cx="5334000" cy="1905000"/>
+          </a:xfrm>
+          <a:prstGeom prst="roundRect">
+            <a:avLst>
+              <a:gd name="adj" fmla="val 6000"/>
+            </a:avLst>
+          </a:prstGeom>
+          <a:solidFill>
+            <a:srgbClr val="12243C"/>
+          </a:solidFill>
+          <a:ln w="9525">
+            <a:solidFill>
+              <a:srgbClr val="1E3653"/>
+            </a:solidFill>
+          </a:ln>
+        </p:spPr>
+        <p:style>
+          <a:lnRef idx="2">
+            <a:schemeClr val="accent1">
+              <a:shade val="15000"/>
+            </a:schemeClr>
+          </a:lnRef>
+          <a:fillRef idx="1">
+            <a:schemeClr val="accent1"/>
+          </a:fillRef>
+          <a:effectRef idx="0">
+            <a:schemeClr val="accent1"/>
+          </a:effectRef>
+          <a:fontRef idx="minor">
+            <a:schemeClr val="lt1"/>
+          </a:fontRef>
+        </p:style>
+        <p:txBody>
+          <a:bodyPr rtlCol="0" anchor="ctr"/>
+          <a:lstStyle/>
+          <a:p>
+            <a:pPr algn="ctr"/>
+            <a:endParaRPr lang="en-SG"/>
+          </a:p>
+        </p:txBody>
+      </p:sp>
+      <p:sp>
+        <p:nvSpPr>
+          <p:cNvPr id="5" name="TextBox 4">
+            <a:extLst>
+              <a:ext uri="{FF2B5EF4-FFF2-40B4-BE49-F238E27FC236}">
+                <a16:creationId xmlns:a16="http://schemas.microsoft.com/office/drawing/2014/main" id="{CE3D5A54-45F4-81B3-7B91-72199BB51B82}"/>
+              </a:ext>
+            </a:extLst>
+          </p:cNvPr>
+          <p:cNvSpPr txBox="1"/>
+          <p:nvPr/>
+        </p:nvSpPr>
+        <p:spPr>
+          <a:xfrm>
+            <a:off x="838200" y="1803400"/>
+            <a:ext cx="4876800" cy="228600"/>
+          </a:xfrm>
+          <a:prstGeom prst="rect">
+            <a:avLst/>
+          </a:prstGeom>
+          <a:noFill/>
+        </p:spPr>
+        <p:txBody>
+          <a:bodyPr vert="horz" wrap="square" lIns="0" tIns="0" rIns="0" bIns="0" rtlCol="0">
+            <a:noAutofit/>
+          </a:bodyPr>
+          <a:lstStyle/>
+          <a:p>
+            <a:r>
+              <a:rPr lang="en-SG" sz="1100">
+                <a:solidFill>
+                  <a:srgbClr val="93ABC6"/>
+                </a:solidFill>
+                <a:latin typeface="Consolas" panose="020B0609020204030204" pitchFamily="49" charset="0"/>
+              </a:rPr>
+              <a:t>MEASURED FROM GIT HISTORY</a:t>
+            </a:r>
+          </a:p>
+        </p:txBody>
+      </p:sp>
+      <p:sp>
+        <p:nvSpPr>
+          <p:cNvPr id="6" name="TextBox 5">
+            <a:extLst>
+              <a:ext uri="{FF2B5EF4-FFF2-40B4-BE49-F238E27FC236}">
+                <a16:creationId xmlns:a16="http://schemas.microsoft.com/office/drawing/2014/main" id="{C533569E-1BB9-A47F-EBF5-0933562E35C8}"/>
+              </a:ext>
+            </a:extLst>
+          </p:cNvPr>
+          <p:cNvSpPr txBox="1"/>
+          <p:nvPr/>
+        </p:nvSpPr>
+        <p:spPr>
+          <a:xfrm>
+            <a:off x="838200" y="2057400"/>
+            <a:ext cx="4876800" cy="355600"/>
+          </a:xfrm>
+          <a:prstGeom prst="rect">
+            <a:avLst/>
+          </a:prstGeom>
+          <a:noFill/>
+        </p:spPr>
+        <p:txBody>
+          <a:bodyPr vert="horz" wrap="square" lIns="0" tIns="0" rIns="0" bIns="0" rtlCol="0">
+            <a:noAutofit/>
+          </a:bodyPr>
+          <a:lstStyle/>
+          <a:p>
+            <a:r>
+              <a:rPr lang="en-SG" sz="2400" b="1">
+                <a:solidFill>
+                  <a:srgbClr val="F7FAFD"/>
+                </a:solidFill>
+                <a:latin typeface="Segoe UI" panose="020B0502040204020203" pitchFamily="34" charset="0"/>
+              </a:rPr>
+              <a:t>2.1 to 4 person-days</a:t>
+            </a:r>
+          </a:p>
+        </p:txBody>
+      </p:sp>
+      <p:sp>
+        <p:nvSpPr>
+          <p:cNvPr id="7" name="TextBox 6">
+            <a:extLst>
+              <a:ext uri="{FF2B5EF4-FFF2-40B4-BE49-F238E27FC236}">
+                <a16:creationId xmlns:a16="http://schemas.microsoft.com/office/drawing/2014/main" id="{D9BB03F0-EF01-CBC6-C823-5987190091CB}"/>
+              </a:ext>
+            </a:extLst>
+          </p:cNvPr>
+          <p:cNvSpPr txBox="1"/>
+          <p:nvPr/>
+        </p:nvSpPr>
+        <p:spPr>
+          <a:xfrm>
+            <a:off x="838200" y="2489200"/>
+            <a:ext cx="4876800" cy="1016000"/>
+          </a:xfrm>
+          <a:prstGeom prst="rect">
+            <a:avLst/>
+          </a:prstGeom>
+          <a:noFill/>
+        </p:spPr>
+        <p:txBody>
+          <a:bodyPr vert="horz" wrap="square" lIns="0" tIns="0" rIns="0" bIns="0" rtlCol="0">
+            <a:noAutofit/>
+          </a:bodyPr>
+          <a:lstStyle/>
+          <a:p>
+            <a:r>
+              <a:rPr lang="en-SG" sz="1300">
+                <a:solidFill>
+                  <a:srgbClr val="E1EAF4"/>
+                </a:solidFill>
+                <a:latin typeface="Segoe UI" panose="020B0502040204020203" pitchFamily="34" charset="0"/>
+              </a:rPr>
+              <a:t>123 commits, 4 contributors, one day (6.2 h from first to last commit), 17,059 net lines (20,514 added, 3,455 deleted). AI-assisted, on a hackathon timeline.</a:t>
+            </a:r>
+          </a:p>
+        </p:txBody>
+      </p:sp>
+      <p:sp>
+        <p:nvSpPr>
+          <p:cNvPr id="8" name="Rectangle: Rounded Corners 7">
+            <a:extLst>
+              <a:ext uri="{FF2B5EF4-FFF2-40B4-BE49-F238E27FC236}">
+                <a16:creationId xmlns:a16="http://schemas.microsoft.com/office/drawing/2014/main" id="{16F61253-43E8-8C20-4EAE-4D00BC3CA8C1}"/>
+              </a:ext>
+            </a:extLst>
+          </p:cNvPr>
+          <p:cNvSpPr/>
+          <p:nvPr/>
+        </p:nvSpPr>
+        <p:spPr>
+          <a:xfrm>
+            <a:off x="6248400" y="1651000"/>
+            <a:ext cx="5334000" cy="1905000"/>
+          </a:xfrm>
+          <a:prstGeom prst="roundRect">
+            <a:avLst>
+              <a:gd name="adj" fmla="val 6000"/>
+            </a:avLst>
+          </a:prstGeom>
+          <a:solidFill>
+            <a:srgbClr val="160F2B"/>
+          </a:solidFill>
+          <a:ln w="9525">
+            <a:solidFill>
+              <a:srgbClr val="6B4FB5"/>
+            </a:solidFill>
+          </a:ln>
+        </p:spPr>
+        <p:style>
+          <a:lnRef idx="2">
+            <a:schemeClr val="accent1">
+              <a:shade val="15000"/>
+            </a:schemeClr>
+          </a:lnRef>
+          <a:fillRef idx="1">
+            <a:schemeClr val="accent1"/>
+          </a:fillRef>
+          <a:effectRef idx="0">
+            <a:schemeClr val="accent1"/>
+          </a:effectRef>
+          <a:fontRef idx="minor">
+            <a:schemeClr val="lt1"/>
+          </a:fontRef>
+        </p:style>
+        <p:txBody>
+          <a:bodyPr rtlCol="0" anchor="ctr"/>
+          <a:lstStyle/>
+          <a:p>
+            <a:pPr algn="ctr"/>
+            <a:endParaRPr lang="en-SG"/>
+          </a:p>
+        </p:txBody>
+      </p:sp>
+      <p:sp>
+        <p:nvSpPr>
+          <p:cNvPr id="9" name="TextBox 8">
+            <a:extLst>
+              <a:ext uri="{FF2B5EF4-FFF2-40B4-BE49-F238E27FC236}">
+                <a16:creationId xmlns:a16="http://schemas.microsoft.com/office/drawing/2014/main" id="{42D217D3-AAFC-3275-1867-731A4AD932F8}"/>
+              </a:ext>
+            </a:extLst>
+          </p:cNvPr>
+          <p:cNvSpPr txBox="1"/>
+          <p:nvPr/>
+        </p:nvSpPr>
+        <p:spPr>
+          <a:xfrm>
+            <a:off x="6477000" y="1803400"/>
+            <a:ext cx="4876800" cy="228600"/>
+          </a:xfrm>
+          <a:prstGeom prst="rect">
+            <a:avLst/>
+          </a:prstGeom>
+          <a:noFill/>
+        </p:spPr>
+        <p:txBody>
+          <a:bodyPr vert="horz" wrap="square" lIns="0" tIns="0" rIns="0" bIns="0" rtlCol="0">
+            <a:noAutofit/>
+          </a:bodyPr>
+          <a:lstStyle/>
+          <a:p>
+            <a:r>
+              <a:rPr lang="en-SG" sz="1100" b="1">
+                <a:solidFill>
+                  <a:srgbClr val="FFE4C7"/>
+                </a:solidFill>
+                <a:latin typeface="Consolas" panose="020B0609020204030204" pitchFamily="49" charset="0"/>
+              </a:rPr>
+              <a:t>ASSUMPTION · CONVENTIONAL BUILD</a:t>
+            </a:r>
+          </a:p>
+        </p:txBody>
+      </p:sp>
+      <p:sp>
+        <p:nvSpPr>
+          <p:cNvPr id="10" name="TextBox 9">
+            <a:extLst>
+              <a:ext uri="{FF2B5EF4-FFF2-40B4-BE49-F238E27FC236}">
+                <a16:creationId xmlns:a16="http://schemas.microsoft.com/office/drawing/2014/main" id="{40A7AD89-C331-DBCD-5280-FC7BA73FF9D8}"/>
+              </a:ext>
+            </a:extLst>
+          </p:cNvPr>
+          <p:cNvSpPr txBox="1"/>
+          <p:nvPr/>
+        </p:nvSpPr>
+        <p:spPr>
+          <a:xfrm>
+            <a:off x="6477000" y="2057400"/>
+            <a:ext cx="4876800" cy="355600"/>
+          </a:xfrm>
+          <a:prstGeom prst="rect">
+            <a:avLst/>
+          </a:prstGeom>
+          <a:noFill/>
+        </p:spPr>
+        <p:txBody>
+          <a:bodyPr vert="horz" wrap="square" lIns="0" tIns="0" rIns="0" bIns="0" rtlCol="0">
+            <a:noAutofit/>
+          </a:bodyPr>
+          <a:lstStyle/>
+          <a:p>
+            <a:r>
+              <a:rPr lang="en-SG" sz="2400" b="1">
+                <a:solidFill>
+                  <a:srgbClr val="F3ECFF"/>
+                </a:solidFill>
+                <a:latin typeface="Segoe UI" panose="020B0502040204020203" pitchFamily="34" charset="0"/>
+              </a:rPr>
+              <a:t>252 to 629 person-days</a:t>
+            </a:r>
+          </a:p>
+        </p:txBody>
+      </p:sp>
+      <p:sp>
+        <p:nvSpPr>
+          <p:cNvPr id="11" name="TextBox 10">
+            <a:extLst>
+              <a:ext uri="{FF2B5EF4-FFF2-40B4-BE49-F238E27FC236}">
+                <a16:creationId xmlns:a16="http://schemas.microsoft.com/office/drawing/2014/main" id="{379A3A14-2CD2-1AF5-686A-F49034B02F13}"/>
+              </a:ext>
+            </a:extLst>
+          </p:cNvPr>
+          <p:cNvSpPr txBox="1"/>
+          <p:nvPr/>
+        </p:nvSpPr>
+        <p:spPr>
+          <a:xfrm>
+            <a:off x="6477000" y="2489200"/>
+            <a:ext cx="4876800" cy="1016000"/>
+          </a:xfrm>
+          <a:prstGeom prst="rect">
+            <a:avLst/>
+          </a:prstGeom>
+          <a:noFill/>
+        </p:spPr>
+        <p:txBody>
+          <a:bodyPr vert="horz" wrap="square" lIns="0" tIns="0" rIns="0" bIns="0" rtlCol="0">
+            <a:noAutofit/>
+          </a:bodyPr>
+          <a:lstStyle/>
+          <a:p>
+            <a:r>
+              <a:rPr lang="en-SG" sz="1300">
+                <a:solidFill>
+                  <a:srgbClr val="EBDFFF"/>
+                </a:solidFill>
+                <a:latin typeface="Segoe UI" panose="020B0502040204020203" pitchFamily="34" charset="0"/>
+              </a:rPr>
+              <a:t>12,577 code and test lines at 50 to 20 lines per person-day (assumed, crude), at S$800 a day (placeholder) = S$0.20M to S$0.50M.</a:t>
+            </a:r>
+          </a:p>
+        </p:txBody>
+      </p:sp>
+      <p:graphicFrame>
+        <p:nvGraphicFramePr>
+          <p:cNvPr id="12" name="Payback table" descr="Illustrative payback in months for the prototype and two conventional-build estimates at three avoided-session shares">
+            <a:extLst>
+              <a:ext uri="{FF2B5EF4-FFF2-40B4-BE49-F238E27FC236}">
+                <a16:creationId xmlns:a16="http://schemas.microsoft.com/office/drawing/2014/main" id="{2B093148-D9F4-04BC-F86C-F756EE76C009}"/>
+              </a:ext>
+            </a:extLst>
+          </p:cNvPr>
+          <p:cNvGraphicFramePr>
+            <a:graphicFrameLocks noGrp="1"/>
+          </p:cNvGraphicFramePr>
+          <p:nvPr>
+            <p:extLst>
+              <p:ext uri="{D42A27DB-BD31-4B8C-83A1-F6EECF244321}">
+                <p14:modId xmlns:p14="http://schemas.microsoft.com/office/powerpoint/2010/main" val="414170054"/>
+              </p:ext>
+            </p:extLst>
+          </p:nvPr>
+        </p:nvGraphicFramePr>
+        <p:xfrm>
+          <a:off x="609600" y="3759200"/>
+          <a:ext cx="10972800" cy="1905000"/>
+        </p:xfrm>
+        <a:graphic>
+          <a:graphicData uri="http://schemas.openxmlformats.org/drawingml/2006/table">
+            <a:tbl>
+              <a:tblPr firstRow="1" bandRow="1">
+                <a:tableStyleId>{2D5ABB26-0587-4C30-8999-92F81FD0307C}</a:tableStyleId>
+              </a:tblPr>
+              <a:tblGrid>
+                <a:gridCol w="5080000">
+                  <a:extLst>
+                    <a:ext uri="{9D8B030D-6E8A-4147-A177-3AD203B41FA5}">
+                      <a16:colId xmlns:a16="http://schemas.microsoft.com/office/drawing/2014/main" val="643298105"/>
+                    </a:ext>
+                  </a:extLst>
+                </a:gridCol>
+                <a:gridCol w="1964309">
+                  <a:extLst>
+                    <a:ext uri="{9D8B030D-6E8A-4147-A177-3AD203B41FA5}">
+                      <a16:colId xmlns:a16="http://schemas.microsoft.com/office/drawing/2014/main" val="2555375277"/>
+                    </a:ext>
+                  </a:extLst>
+                </a:gridCol>
+                <a:gridCol w="1964309">
+                  <a:extLst>
+                    <a:ext uri="{9D8B030D-6E8A-4147-A177-3AD203B41FA5}">
+                      <a16:colId xmlns:a16="http://schemas.microsoft.com/office/drawing/2014/main" val="233300301"/>
+                    </a:ext>
+                  </a:extLst>
+                </a:gridCol>
+                <a:gridCol w="1964309">
+                  <a:extLst>
+                    <a:ext uri="{9D8B030D-6E8A-4147-A177-3AD203B41FA5}">
+                      <a16:colId xmlns:a16="http://schemas.microsoft.com/office/drawing/2014/main" val="929635242"/>
+                    </a:ext>
+                  </a:extLst>
+                </a:gridCol>
+              </a:tblGrid>
+              <a:tr h="431800">
+                <a:tc>
+                  <a:txBody>
+                    <a:bodyPr/>
+                    <a:lstStyle/>
+                    <a:p>
+                      <a:r>
+                        <a:rPr lang="en-SG" sz="1200" b="1">
+                          <a:solidFill>
+                            <a:srgbClr val="F7FAFD"/>
+                          </a:solidFill>
+                          <a:latin typeface="Segoe UI" panose="020B0502040204020203" pitchFamily="34" charset="0"/>
+                        </a:rPr>
+                        <a:t>Payback, mid value S$2,000</a:t>
+                      </a:r>
+                    </a:p>
+                  </a:txBody>
+                  <a:tcPr marL="177800" marR="127000" anchor="ctr">
+                    <a:solidFill>
+                      <a:srgbClr val="1A2D47"/>
+                    </a:solidFill>
+                  </a:tcPr>
+                </a:tc>
+                <a:tc>
+                  <a:txBody>
+                    <a:bodyPr/>
+                    <a:lstStyle/>
+                    <a:p>
+                      <a:r>
+                        <a:rPr lang="en-SG" sz="1200" b="1">
+                          <a:solidFill>
+                            <a:srgbClr val="F7FAFD"/>
+                          </a:solidFill>
+                          <a:latin typeface="Segoe UI" panose="020B0502040204020203" pitchFamily="34" charset="0"/>
+                        </a:rPr>
+                        <a:t>r = 5%</a:t>
+                      </a:r>
+                    </a:p>
+                  </a:txBody>
+                  <a:tcPr marL="177800" marR="127000" anchor="ctr">
+                    <a:solidFill>
+                      <a:srgbClr val="1A2D47"/>
+                    </a:solidFill>
+                  </a:tcPr>
+                </a:tc>
+                <a:tc>
+                  <a:txBody>
+                    <a:bodyPr/>
+                    <a:lstStyle/>
+                    <a:p>
+                      <a:r>
+                        <a:rPr lang="en-SG" sz="1200" b="1">
+                          <a:solidFill>
+                            <a:srgbClr val="F7FAFD"/>
+                          </a:solidFill>
+                          <a:latin typeface="Segoe UI" panose="020B0502040204020203" pitchFamily="34" charset="0"/>
+                        </a:rPr>
+                        <a:t>r = 10%</a:t>
+                      </a:r>
+                    </a:p>
+                  </a:txBody>
+                  <a:tcPr marL="177800" marR="127000" anchor="ctr">
+                    <a:solidFill>
+                      <a:srgbClr val="1A2D47"/>
+                    </a:solidFill>
+                  </a:tcPr>
+                </a:tc>
+                <a:tc>
+                  <a:txBody>
+                    <a:bodyPr/>
+                    <a:lstStyle/>
+                    <a:p>
+                      <a:r>
+                        <a:rPr lang="en-SG" sz="1200" b="1">
+                          <a:solidFill>
+                            <a:srgbClr val="F7FAFD"/>
+                          </a:solidFill>
+                          <a:latin typeface="Segoe UI" panose="020B0502040204020203" pitchFamily="34" charset="0"/>
+                        </a:rPr>
+                        <a:t>r = 15%</a:t>
+                      </a:r>
+                    </a:p>
+                  </a:txBody>
+                  <a:tcPr marL="177800" marR="127000" anchor="ctr">
+                    <a:solidFill>
+                      <a:srgbClr val="1A2D47"/>
+                    </a:solidFill>
+                  </a:tcPr>
+                </a:tc>
+                <a:extLst>
+                  <a:ext uri="{0D108BD9-81ED-4DB2-BD59-A6C34878D82A}">
+                    <a16:rowId xmlns:a16="http://schemas.microsoft.com/office/drawing/2014/main" val="1143652860"/>
+                  </a:ext>
+                </a:extLst>
+              </a:tr>
+              <a:tr h="482600">
+                <a:tc>
+                  <a:txBody>
+                    <a:bodyPr/>
+                    <a:lstStyle/>
+                    <a:p>
+                      <a:r>
+                        <a:rPr lang="en-SG" sz="1400" b="1">
+                          <a:solidFill>
+                            <a:srgbClr val="F7FAFD"/>
+                          </a:solidFill>
+                          <a:latin typeface="Segoe UI" panose="020B0502040204020203" pitchFamily="34" charset="0"/>
+                        </a:rPr>
+                        <a:t>Prototype as built (4 pd, S$3,200)</a:t>
+                      </a:r>
+                    </a:p>
+                  </a:txBody>
+                  <a:tcPr marL="177800" marR="127000" anchor="ctr">
+                    <a:solidFill>
+                      <a:srgbClr val="12243C"/>
+                    </a:solidFill>
+                  </a:tcPr>
+                </a:tc>
+                <a:tc>
+                  <a:txBody>
+                    <a:bodyPr/>
+                    <a:lstStyle/>
+                    <a:p>
+                      <a:r>
+                        <a:rPr lang="en-SG" sz="1600" b="1">
+                          <a:solidFill>
+                            <a:srgbClr val="EBDFFF"/>
+                          </a:solidFill>
+                          <a:latin typeface="Segoe UI" panose="020B0502040204020203" pitchFamily="34" charset="0"/>
+                        </a:rPr>
+                        <a:t>&lt; 1 month</a:t>
+                      </a:r>
+                    </a:p>
+                  </a:txBody>
+                  <a:tcPr marL="177800" marR="127000" anchor="ctr">
+                    <a:solidFill>
+                      <a:srgbClr val="12243C"/>
+                    </a:solidFill>
+                  </a:tcPr>
+                </a:tc>
+                <a:tc>
+                  <a:txBody>
+                    <a:bodyPr/>
+                    <a:lstStyle/>
+                    <a:p>
+                      <a:r>
+                        <a:rPr lang="en-SG" sz="1600" b="1">
+                          <a:solidFill>
+                            <a:srgbClr val="EBDFFF"/>
+                          </a:solidFill>
+                          <a:latin typeface="Segoe UI" panose="020B0502040204020203" pitchFamily="34" charset="0"/>
+                        </a:rPr>
+                        <a:t>&lt; 1 month</a:t>
+                      </a:r>
+                    </a:p>
+                  </a:txBody>
+                  <a:tcPr marL="177800" marR="127000" anchor="ctr">
+                    <a:solidFill>
+                      <a:srgbClr val="12243C"/>
+                    </a:solidFill>
+                  </a:tcPr>
+                </a:tc>
+                <a:tc>
+                  <a:txBody>
+                    <a:bodyPr/>
+                    <a:lstStyle/>
+                    <a:p>
+                      <a:r>
+                        <a:rPr lang="en-SG" sz="1600" b="1">
+                          <a:solidFill>
+                            <a:srgbClr val="EBDFFF"/>
+                          </a:solidFill>
+                          <a:latin typeface="Segoe UI" panose="020B0502040204020203" pitchFamily="34" charset="0"/>
+                        </a:rPr>
+                        <a:t>&lt; 1 month</a:t>
+                      </a:r>
+                    </a:p>
+                  </a:txBody>
+                  <a:tcPr marL="177800" marR="127000" anchor="ctr">
+                    <a:solidFill>
+                      <a:srgbClr val="12243C"/>
+                    </a:solidFill>
+                  </a:tcPr>
+                </a:tc>
+                <a:extLst>
+                  <a:ext uri="{0D108BD9-81ED-4DB2-BD59-A6C34878D82A}">
+                    <a16:rowId xmlns:a16="http://schemas.microsoft.com/office/drawing/2014/main" val="366800230"/>
+                  </a:ext>
+                </a:extLst>
+              </a:tr>
+              <a:tr h="482600">
+                <a:tc>
+                  <a:txBody>
+                    <a:bodyPr/>
+                    <a:lstStyle/>
+                    <a:p>
+                      <a:r>
+                        <a:rPr lang="en-SG" sz="1400" b="1">
+                          <a:solidFill>
+                            <a:srgbClr val="F7FAFD"/>
+                          </a:solidFill>
+                          <a:latin typeface="Segoe UI" panose="020B0502040204020203" pitchFamily="34" charset="0"/>
+                        </a:rPr>
+                        <a:t>Conventional, fast (252 pd, S$0.20M)</a:t>
+                      </a:r>
+                    </a:p>
+                  </a:txBody>
+                  <a:tcPr marL="177800" marR="127000" anchor="ctr">
+                    <a:solidFill>
+                      <a:srgbClr val="0D1C30"/>
+                    </a:solidFill>
+                  </a:tcPr>
+                </a:tc>
+                <a:tc>
+                  <a:txBody>
+                    <a:bodyPr/>
+                    <a:lstStyle/>
+                    <a:p>
+                      <a:r>
+                        <a:rPr lang="en-SG" sz="1600" b="1">
+                          <a:solidFill>
+                            <a:srgbClr val="EBDFFF"/>
+                          </a:solidFill>
+                          <a:latin typeface="Segoe UI" panose="020B0502040204020203" pitchFamily="34" charset="0"/>
+                        </a:rPr>
+                        <a:t>4.0 months</a:t>
+                      </a:r>
+                    </a:p>
+                  </a:txBody>
+                  <a:tcPr marL="177800" marR="127000" anchor="ctr">
+                    <a:solidFill>
+                      <a:srgbClr val="0D1C30"/>
+                    </a:solidFill>
+                  </a:tcPr>
+                </a:tc>
+                <a:tc>
+                  <a:txBody>
+                    <a:bodyPr/>
+                    <a:lstStyle/>
+                    <a:p>
+                      <a:r>
+                        <a:rPr lang="en-SG" sz="1600" b="1">
+                          <a:solidFill>
+                            <a:srgbClr val="EBDFFF"/>
+                          </a:solidFill>
+                          <a:latin typeface="Segoe UI" panose="020B0502040204020203" pitchFamily="34" charset="0"/>
+                        </a:rPr>
+                        <a:t>2.0 months</a:t>
+                      </a:r>
+                    </a:p>
+                  </a:txBody>
+                  <a:tcPr marL="177800" marR="127000" anchor="ctr">
+                    <a:solidFill>
+                      <a:srgbClr val="0D1C30"/>
+                    </a:solidFill>
+                  </a:tcPr>
+                </a:tc>
+                <a:tc>
+                  <a:txBody>
+                    <a:bodyPr/>
+                    <a:lstStyle/>
+                    <a:p>
+                      <a:r>
+                        <a:rPr lang="en-SG" sz="1600" b="1">
+                          <a:solidFill>
+                            <a:srgbClr val="EBDFFF"/>
+                          </a:solidFill>
+                          <a:latin typeface="Segoe UI" panose="020B0502040204020203" pitchFamily="34" charset="0"/>
+                        </a:rPr>
+                        <a:t>1.3 months</a:t>
+                      </a:r>
+                    </a:p>
+                  </a:txBody>
+                  <a:tcPr marL="177800" marR="127000" anchor="ctr">
+                    <a:solidFill>
+                      <a:srgbClr val="0D1C30"/>
+                    </a:solidFill>
+                  </a:tcPr>
+                </a:tc>
+                <a:extLst>
+                  <a:ext uri="{0D108BD9-81ED-4DB2-BD59-A6C34878D82A}">
+                    <a16:rowId xmlns:a16="http://schemas.microsoft.com/office/drawing/2014/main" val="2202140270"/>
+                  </a:ext>
+                </a:extLst>
+              </a:tr>
+              <a:tr h="482600">
+                <a:tc>
+                  <a:txBody>
+                    <a:bodyPr/>
+                    <a:lstStyle/>
+                    <a:p>
+                      <a:r>
+                        <a:rPr lang="en-SG" sz="1400" b="1">
+                          <a:solidFill>
+                            <a:srgbClr val="F7FAFD"/>
+                          </a:solidFill>
+                          <a:latin typeface="Segoe UI" panose="020B0502040204020203" pitchFamily="34" charset="0"/>
+                        </a:rPr>
+                        <a:t>Conventional, slow (629 pd, S$0.50M)</a:t>
+                      </a:r>
+                    </a:p>
+                  </a:txBody>
+                  <a:tcPr marL="177800" marR="127000" anchor="ctr">
+                    <a:solidFill>
+                      <a:srgbClr val="12243C"/>
+                    </a:solidFill>
+                  </a:tcPr>
+                </a:tc>
+                <a:tc>
+                  <a:txBody>
+                    <a:bodyPr/>
+                    <a:lstStyle/>
+                    <a:p>
+                      <a:r>
+                        <a:rPr lang="en-SG" sz="1600" b="1">
+                          <a:solidFill>
+                            <a:srgbClr val="EBDFFF"/>
+                          </a:solidFill>
+                          <a:latin typeface="Segoe UI" panose="020B0502040204020203" pitchFamily="34" charset="0"/>
+                        </a:rPr>
+                        <a:t>10.1 months</a:t>
+                      </a:r>
+                    </a:p>
+                  </a:txBody>
+                  <a:tcPr marL="177800" marR="127000" anchor="ctr">
+                    <a:solidFill>
+                      <a:srgbClr val="12243C"/>
+                    </a:solidFill>
+                  </a:tcPr>
+                </a:tc>
+                <a:tc>
+                  <a:txBody>
+                    <a:bodyPr/>
+                    <a:lstStyle/>
+                    <a:p>
+                      <a:r>
+                        <a:rPr lang="en-SG" sz="1600" b="1">
+                          <a:solidFill>
+                            <a:srgbClr val="EBDFFF"/>
+                          </a:solidFill>
+                          <a:latin typeface="Segoe UI" panose="020B0502040204020203" pitchFamily="34" charset="0"/>
+                        </a:rPr>
+                        <a:t>5.0 months</a:t>
+                      </a:r>
+                    </a:p>
+                  </a:txBody>
+                  <a:tcPr marL="177800" marR="127000" anchor="ctr">
+                    <a:solidFill>
+                      <a:srgbClr val="12243C"/>
+                    </a:solidFill>
+                  </a:tcPr>
+                </a:tc>
+                <a:tc>
+                  <a:txBody>
+                    <a:bodyPr/>
+                    <a:lstStyle/>
+                    <a:p>
+                      <a:r>
+                        <a:rPr lang="en-SG" sz="1600" b="1">
+                          <a:solidFill>
+                            <a:srgbClr val="EBDFFF"/>
+                          </a:solidFill>
+                          <a:latin typeface="Segoe UI" panose="020B0502040204020203" pitchFamily="34" charset="0"/>
+                        </a:rPr>
+                        <a:t>3.4 months</a:t>
+                      </a:r>
+                    </a:p>
+                  </a:txBody>
+                  <a:tcPr marL="177800" marR="127000" anchor="ctr">
+                    <a:solidFill>
+                      <a:srgbClr val="12243C"/>
+                    </a:solidFill>
+                  </a:tcPr>
+                </a:tc>
+                <a:extLst>
+                  <a:ext uri="{0D108BD9-81ED-4DB2-BD59-A6C34878D82A}">
+                    <a16:rowId xmlns:a16="http://schemas.microsoft.com/office/drawing/2014/main" val="627932796"/>
+                  </a:ext>
+                </a:extLst>
+              </a:tr>
+            </a:tbl>
+          </a:graphicData>
+        </a:graphic>
+      </p:graphicFrame>
+      <p:sp>
+        <p:nvSpPr>
+          <p:cNvPr id="13" name="TextBox 12">
+            <a:extLst>
+              <a:ext uri="{FF2B5EF4-FFF2-40B4-BE49-F238E27FC236}">
+                <a16:creationId xmlns:a16="http://schemas.microsoft.com/office/drawing/2014/main" id="{A8D2EC27-E486-DDE1-30D4-1F7564B36780}"/>
+              </a:ext>
+            </a:extLst>
+          </p:cNvPr>
+          <p:cNvSpPr txBox="1"/>
+          <p:nvPr/>
+        </p:nvSpPr>
+        <p:spPr>
+          <a:xfrm>
+            <a:off x="609600" y="5791200"/>
+            <a:ext cx="10972800" cy="508000"/>
+          </a:xfrm>
+          <a:prstGeom prst="rect">
+            <a:avLst/>
+          </a:prstGeom>
+          <a:noFill/>
+        </p:spPr>
+        <p:txBody>
+          <a:bodyPr vert="horz" wrap="square" lIns="0" tIns="0" rIns="0" bIns="0" rtlCol="0">
+            <a:noAutofit/>
+          </a:bodyPr>
+          <a:lstStyle/>
+          <a:p>
+            <a:r>
+              <a:rPr lang="en-SG" sz="1300">
+                <a:solidFill>
+                  <a:srgbClr val="93ABC6"/>
+                </a:solidFill>
+                <a:latin typeface="Segoe UI" panose="020B0502040204020203" pitchFamily="34" charset="0"/>
+              </a:rPr>
+              <a:t>Payback = 12 × development cost ÷ annual saving. It excludes the HLA/DIS adapter, a trial with real cohorts and approvals, and starts only once a trial has shown r.</a:t>
+            </a:r>
+          </a:p>
+        </p:txBody>
+      </p:sp>
+      <p:sp>
+        <p:nvSpPr>
+          <p:cNvPr id="14" name="TextBox 13">
+            <a:extLst>
+              <a:ext uri="{FF2B5EF4-FFF2-40B4-BE49-F238E27FC236}">
+                <a16:creationId xmlns:a16="http://schemas.microsoft.com/office/drawing/2014/main" id="{1215CCA8-D67F-21A4-4F04-32375FFE3D9C}"/>
+              </a:ext>
+            </a:extLst>
+          </p:cNvPr>
+          <p:cNvSpPr txBox="1"/>
+          <p:nvPr/>
+        </p:nvSpPr>
+        <p:spPr>
+          <a:xfrm>
+            <a:off x="609600" y="6400800"/>
+            <a:ext cx="8890000" cy="228600"/>
+          </a:xfrm>
+          <a:prstGeom prst="rect">
+            <a:avLst/>
+          </a:prstGeom>
+          <a:noFill/>
+        </p:spPr>
+        <p:txBody>
+          <a:bodyPr vert="horz" wrap="square" lIns="0" tIns="0" rIns="0" bIns="0" rtlCol="0">
+            <a:noAutofit/>
+          </a:bodyPr>
+          <a:lstStyle/>
+          <a:p>
+            <a:r>
+              <a:rPr lang="en-SG" sz="1200">
+                <a:solidFill>
+                  <a:srgbClr val="93ABC6"/>
+                </a:solidFill>
+                <a:latin typeface="Consolas" panose="020B0609020204030204" pitchFamily="49" charset="0"/>
+              </a:rPr>
+              <a:t>EFFORT FROM GIT · COMPARISON AND RATES ARE ASSUMPTIONS · ILLUSTRATIVE</a:t>
+            </a:r>
+          </a:p>
+        </p:txBody>
+      </p:sp>
+      <p:sp>
+        <p:nvSpPr>
+          <p:cNvPr id="15" name="TextBox 14">
+            <a:extLst>
+              <a:ext uri="{FF2B5EF4-FFF2-40B4-BE49-F238E27FC236}">
+                <a16:creationId xmlns:a16="http://schemas.microsoft.com/office/drawing/2014/main" id="{725B2E23-1A52-D359-0D57-CACB59F0274E}"/>
+              </a:ext>
+            </a:extLst>
+          </p:cNvPr>
+          <p:cNvSpPr txBox="1"/>
+          <p:nvPr/>
+        </p:nvSpPr>
+        <p:spPr>
+          <a:xfrm>
+            <a:off x="10312400" y="6400800"/>
+            <a:ext cx="1270000" cy="228600"/>
+          </a:xfrm>
+          <a:prstGeom prst="rect">
+            <a:avLst/>
+          </a:prstGeom>
+          <a:noFill/>
+        </p:spPr>
+        <p:txBody>
+          <a:bodyPr vert="horz" wrap="square" lIns="0" tIns="0" rIns="0" bIns="0" rtlCol="0">
+            <a:noAutofit/>
+          </a:bodyPr>
+          <a:lstStyle/>
+          <a:p>
+            <a:pPr algn="r"/>
+            <a:r>
+              <a:rPr lang="en-SG" sz="1200">
+                <a:solidFill>
+                  <a:srgbClr val="93ABC6"/>
+                </a:solidFill>
+                <a:latin typeface="Consolas" panose="020B0609020204030204" pitchFamily="49" charset="0"/>
+              </a:rPr>
+              <a:t>17</a:t>
+            </a:r>
+          </a:p>
+        </p:txBody>
+      </p:sp>
+    </p:spTree>
+    <p:extLst>
+      <p:ext uri="{BB962C8B-B14F-4D97-AF65-F5344CB8AC3E}">
+        <p14:creationId xmlns:p14="http://schemas.microsoft.com/office/powerpoint/2010/main" val="857917038"/>
+      </p:ext>
+    </p:extLst>
+  </p:cSld>
+  <p:clrMapOvr>
+    <a:masterClrMapping/>
+  </p:clrMapOvr>
+</p:sld>
+</file>
+
+<file path=ppt/slides/slide18.xml><?xml version="1.0" encoding="utf-8"?>
 <p:sld xmlns:a="http://schemas.openxmlformats.org/drawingml/2006/main" xmlns:r="http://schemas.openxmlformats.org/officeDocument/2006/relationships" xmlns:p="http://schemas.openxmlformats.org/presentationml/2006/main">
   <p:cSld>
     <p:bg>
@@ -11350,7 +12555,7 @@
           <p:cNvPr id="2" name="Title 1">
             <a:extLst>
               <a:ext uri="{FF2B5EF4-FFF2-40B4-BE49-F238E27FC236}">
-                <a16:creationId xmlns:a16="http://schemas.microsoft.com/office/drawing/2014/main" id="{591F786F-AC80-C77C-AD1D-3B537C348075}"/>
+                <a16:creationId xmlns:a16="http://schemas.microsoft.com/office/drawing/2014/main" id="{D6F947C7-8571-552E-E6A8-001EB666B596}"/>
               </a:ext>
             </a:extLst>
           </p:cNvPr>
@@ -11390,7 +12595,7 @@
           <p:cNvPr id="3" name="TextBox 2">
             <a:extLst>
               <a:ext uri="{FF2B5EF4-FFF2-40B4-BE49-F238E27FC236}">
-                <a16:creationId xmlns:a16="http://schemas.microsoft.com/office/drawing/2014/main" id="{26232A37-33FE-B201-8BB9-68BA1B7382D4}"/>
+                <a16:creationId xmlns:a16="http://schemas.microsoft.com/office/drawing/2014/main" id="{AA81DD3B-FF89-26E7-09D2-0BBA2A713B1A}"/>
               </a:ext>
             </a:extLst>
           </p:cNvPr>
@@ -11430,7 +12635,7 @@
           <p:cNvPr id="4" name="TextBox 3">
             <a:extLst>
               <a:ext uri="{FF2B5EF4-FFF2-40B4-BE49-F238E27FC236}">
-                <a16:creationId xmlns:a16="http://schemas.microsoft.com/office/drawing/2014/main" id="{E25A79D3-D685-E31B-42F7-7D6DE072939D}"/>
+                <a16:creationId xmlns:a16="http://schemas.microsoft.com/office/drawing/2014/main" id="{2376F111-3BE0-E119-46EF-9623EB09EF0D}"/>
               </a:ext>
             </a:extLst>
           </p:cNvPr>
@@ -11468,7 +12673,7 @@
     </p:spTree>
     <p:extLst>
       <p:ext uri="{BB962C8B-B14F-4D97-AF65-F5344CB8AC3E}">
-        <p14:creationId xmlns:p14="http://schemas.microsoft.com/office/powerpoint/2010/main" val="3774863418"/>
+        <p14:creationId xmlns:p14="http://schemas.microsoft.com/office/powerpoint/2010/main" val="820186215"/>
       </p:ext>
     </p:extLst>
   </p:cSld>
@@ -11508,7 +12713,7 @@
           <p:cNvPr id="2" name="Title 1">
             <a:extLst>
               <a:ext uri="{FF2B5EF4-FFF2-40B4-BE49-F238E27FC236}">
-                <a16:creationId xmlns:a16="http://schemas.microsoft.com/office/drawing/2014/main" id="{017A5D0C-BCBA-62DF-6073-FCBC8C8301CE}"/>
+                <a16:creationId xmlns:a16="http://schemas.microsoft.com/office/drawing/2014/main" id="{A6EE6552-608B-91C3-16E2-B0954A99F77C}"/>
               </a:ext>
             </a:extLst>
           </p:cNvPr>
@@ -11548,7 +12753,7 @@
           <p:cNvPr id="3" name="TextBox 2">
             <a:extLst>
               <a:ext uri="{FF2B5EF4-FFF2-40B4-BE49-F238E27FC236}">
-                <a16:creationId xmlns:a16="http://schemas.microsoft.com/office/drawing/2014/main" id="{C0007FA1-436A-E76F-4807-5148D2DDF505}"/>
+                <a16:creationId xmlns:a16="http://schemas.microsoft.com/office/drawing/2014/main" id="{D9FF9F5E-D54B-7BC0-EB8E-CE3103766315}"/>
               </a:ext>
             </a:extLst>
           </p:cNvPr>
@@ -11588,7 +12793,7 @@
           <p:cNvPr id="4" name="Rectangle: Rounded Corners 3">
             <a:extLst>
               <a:ext uri="{FF2B5EF4-FFF2-40B4-BE49-F238E27FC236}">
-                <a16:creationId xmlns:a16="http://schemas.microsoft.com/office/drawing/2014/main" id="{6DA695A0-DEB0-EAFA-C767-EAE0881B28F2}"/>
+                <a16:creationId xmlns:a16="http://schemas.microsoft.com/office/drawing/2014/main" id="{180FF8D4-5858-DBF0-554E-83B39FD1A2A3}"/>
               </a:ext>
             </a:extLst>
           </p:cNvPr>
@@ -11644,7 +12849,7 @@
           <p:cNvPr id="5" name="TextBox 4">
             <a:extLst>
               <a:ext uri="{FF2B5EF4-FFF2-40B4-BE49-F238E27FC236}">
-                <a16:creationId xmlns:a16="http://schemas.microsoft.com/office/drawing/2014/main" id="{100FA246-A8A4-FDC0-A073-D0D95EB878DA}"/>
+                <a16:creationId xmlns:a16="http://schemas.microsoft.com/office/drawing/2014/main" id="{089515DC-A1D8-71C3-94CE-9DE83D3EAE53}"/>
               </a:ext>
             </a:extLst>
           </p:cNvPr>
@@ -11684,7 +12889,7 @@
           <p:cNvPr id="6" name="TextBox 5">
             <a:extLst>
               <a:ext uri="{FF2B5EF4-FFF2-40B4-BE49-F238E27FC236}">
-                <a16:creationId xmlns:a16="http://schemas.microsoft.com/office/drawing/2014/main" id="{E7B18B18-5AF9-E7E5-0C81-F6FE3CE7ED00}"/>
+                <a16:creationId xmlns:a16="http://schemas.microsoft.com/office/drawing/2014/main" id="{73C9A459-4899-F47F-3B54-D58B79031B9E}"/>
               </a:ext>
             </a:extLst>
           </p:cNvPr>
@@ -11724,7 +12929,7 @@
           <p:cNvPr id="7" name="TextBox 6">
             <a:extLst>
               <a:ext uri="{FF2B5EF4-FFF2-40B4-BE49-F238E27FC236}">
-                <a16:creationId xmlns:a16="http://schemas.microsoft.com/office/drawing/2014/main" id="{AD66A581-7F49-A8C1-8B5F-8A5E078EA8D8}"/>
+                <a16:creationId xmlns:a16="http://schemas.microsoft.com/office/drawing/2014/main" id="{CC3BFE13-DC81-909E-EB80-B361CC7F6892}"/>
               </a:ext>
             </a:extLst>
           </p:cNvPr>
@@ -11764,7 +12969,7 @@
           <p:cNvPr id="8" name="Rectangle: Rounded Corners 7">
             <a:extLst>
               <a:ext uri="{FF2B5EF4-FFF2-40B4-BE49-F238E27FC236}">
-                <a16:creationId xmlns:a16="http://schemas.microsoft.com/office/drawing/2014/main" id="{76002211-F07A-20FA-037D-149640809462}"/>
+                <a16:creationId xmlns:a16="http://schemas.microsoft.com/office/drawing/2014/main" id="{0477D732-0DF8-B1D1-A9FE-51FA9CE7FE1D}"/>
               </a:ext>
             </a:extLst>
           </p:cNvPr>
@@ -11820,7 +13025,7 @@
           <p:cNvPr id="9" name="TextBox 8">
             <a:extLst>
               <a:ext uri="{FF2B5EF4-FFF2-40B4-BE49-F238E27FC236}">
-                <a16:creationId xmlns:a16="http://schemas.microsoft.com/office/drawing/2014/main" id="{2A3E3B30-1547-4617-C7A0-C3DA28286C1E}"/>
+                <a16:creationId xmlns:a16="http://schemas.microsoft.com/office/drawing/2014/main" id="{72D5A5B6-C0C4-2D7A-D004-52ACB6F73ED4}"/>
               </a:ext>
             </a:extLst>
           </p:cNvPr>
@@ -11860,7 +13065,7 @@
           <p:cNvPr id="10" name="TextBox 9">
             <a:extLst>
               <a:ext uri="{FF2B5EF4-FFF2-40B4-BE49-F238E27FC236}">
-                <a16:creationId xmlns:a16="http://schemas.microsoft.com/office/drawing/2014/main" id="{FDEE3D2E-FA05-2E00-3B9E-EDBAD6931757}"/>
+                <a16:creationId xmlns:a16="http://schemas.microsoft.com/office/drawing/2014/main" id="{210744D3-ECF1-904F-BF24-950EF18654D1}"/>
               </a:ext>
             </a:extLst>
           </p:cNvPr>
@@ -11900,7 +13105,7 @@
           <p:cNvPr id="11" name="TextBox 10">
             <a:extLst>
               <a:ext uri="{FF2B5EF4-FFF2-40B4-BE49-F238E27FC236}">
-                <a16:creationId xmlns:a16="http://schemas.microsoft.com/office/drawing/2014/main" id="{4DEBA159-1A76-EEF1-4979-6F8346C058A8}"/>
+                <a16:creationId xmlns:a16="http://schemas.microsoft.com/office/drawing/2014/main" id="{54B6A810-631E-580F-7A45-6E506819EA40}"/>
               </a:ext>
             </a:extLst>
           </p:cNvPr>
@@ -11940,7 +13145,7 @@
           <p:cNvPr id="12" name="Rectangle: Rounded Corners 11">
             <a:extLst>
               <a:ext uri="{FF2B5EF4-FFF2-40B4-BE49-F238E27FC236}">
-                <a16:creationId xmlns:a16="http://schemas.microsoft.com/office/drawing/2014/main" id="{F53C7A53-3308-8C8D-5927-72A707128C65}"/>
+                <a16:creationId xmlns:a16="http://schemas.microsoft.com/office/drawing/2014/main" id="{5FDB3706-D695-406B-E7FA-2370EDE8F07B}"/>
               </a:ext>
             </a:extLst>
           </p:cNvPr>
@@ -11996,7 +13201,7 @@
           <p:cNvPr id="13" name="TextBox 12">
             <a:extLst>
               <a:ext uri="{FF2B5EF4-FFF2-40B4-BE49-F238E27FC236}">
-                <a16:creationId xmlns:a16="http://schemas.microsoft.com/office/drawing/2014/main" id="{5F9F56B0-4EC0-E5FD-47C9-C8AA0450012D}"/>
+                <a16:creationId xmlns:a16="http://schemas.microsoft.com/office/drawing/2014/main" id="{7B50460D-828A-763B-CC1E-0A37AC459BE1}"/>
               </a:ext>
             </a:extLst>
           </p:cNvPr>
@@ -12036,7 +13241,7 @@
           <p:cNvPr id="14" name="TextBox 13">
             <a:extLst>
               <a:ext uri="{FF2B5EF4-FFF2-40B4-BE49-F238E27FC236}">
-                <a16:creationId xmlns:a16="http://schemas.microsoft.com/office/drawing/2014/main" id="{55C8FAA2-8B48-1B74-99F5-E8ADF92D2DF2}"/>
+                <a16:creationId xmlns:a16="http://schemas.microsoft.com/office/drawing/2014/main" id="{110E84A9-F26D-BC01-8110-B137CC57A882}"/>
               </a:ext>
             </a:extLst>
           </p:cNvPr>
@@ -12076,7 +13281,7 @@
           <p:cNvPr id="15" name="TextBox 14">
             <a:extLst>
               <a:ext uri="{FF2B5EF4-FFF2-40B4-BE49-F238E27FC236}">
-                <a16:creationId xmlns:a16="http://schemas.microsoft.com/office/drawing/2014/main" id="{D36CEE99-1854-B87C-83B8-5A6AF2E473BF}"/>
+                <a16:creationId xmlns:a16="http://schemas.microsoft.com/office/drawing/2014/main" id="{4ED1187C-DADC-A70B-C1C4-51AF619A03D5}"/>
               </a:ext>
             </a:extLst>
           </p:cNvPr>
@@ -12116,7 +13321,7 @@
           <p:cNvPr id="16" name="TextBox 15">
             <a:extLst>
               <a:ext uri="{FF2B5EF4-FFF2-40B4-BE49-F238E27FC236}">
-                <a16:creationId xmlns:a16="http://schemas.microsoft.com/office/drawing/2014/main" id="{65D488BC-7654-C9CF-306C-7D36508D9791}"/>
+                <a16:creationId xmlns:a16="http://schemas.microsoft.com/office/drawing/2014/main" id="{173FD208-B49F-031B-DFCC-B4D238C536F6}"/>
               </a:ext>
             </a:extLst>
           </p:cNvPr>
@@ -12156,7 +13361,7 @@
           <p:cNvPr id="17" name="TextBox 16">
             <a:extLst>
               <a:ext uri="{FF2B5EF4-FFF2-40B4-BE49-F238E27FC236}">
-                <a16:creationId xmlns:a16="http://schemas.microsoft.com/office/drawing/2014/main" id="{A557A484-5A56-A6F9-1DE9-918B6E6F20C8}"/>
+                <a16:creationId xmlns:a16="http://schemas.microsoft.com/office/drawing/2014/main" id="{083E4A1D-9861-EA82-7CFF-B15ECB0947F6}"/>
               </a:ext>
             </a:extLst>
           </p:cNvPr>
@@ -12195,7 +13400,7 @@
     </p:spTree>
     <p:extLst>
       <p:ext uri="{BB962C8B-B14F-4D97-AF65-F5344CB8AC3E}">
-        <p14:creationId xmlns:p14="http://schemas.microsoft.com/office/powerpoint/2010/main" val="3245636840"/>
+        <p14:creationId xmlns:p14="http://schemas.microsoft.com/office/powerpoint/2010/main" val="751286083"/>
       </p:ext>
     </p:extLst>
   </p:cSld>
@@ -12235,7 +13440,7 @@
           <p:cNvPr id="2" name="Title 1">
             <a:extLst>
               <a:ext uri="{FF2B5EF4-FFF2-40B4-BE49-F238E27FC236}">
-                <a16:creationId xmlns:a16="http://schemas.microsoft.com/office/drawing/2014/main" id="{D5CB2E46-941A-8427-633A-3E1A7BC181A7}"/>
+                <a16:creationId xmlns:a16="http://schemas.microsoft.com/office/drawing/2014/main" id="{CEEDA224-9D84-A085-8DFE-D0F9715B719C}"/>
               </a:ext>
             </a:extLst>
           </p:cNvPr>
@@ -12275,7 +13480,7 @@
           <p:cNvPr id="3" name="TextBox 2">
             <a:extLst>
               <a:ext uri="{FF2B5EF4-FFF2-40B4-BE49-F238E27FC236}">
-                <a16:creationId xmlns:a16="http://schemas.microsoft.com/office/drawing/2014/main" id="{0CB686DF-3087-7AF5-435B-4601DE42DCFB}"/>
+                <a16:creationId xmlns:a16="http://schemas.microsoft.com/office/drawing/2014/main" id="{794DA53F-31E1-19BA-5CBC-8F7E107F661A}"/>
               </a:ext>
             </a:extLst>
           </p:cNvPr>
@@ -12315,7 +13520,7 @@
           <p:cNvPr id="4" name="Rectangle: Rounded Corners 3">
             <a:extLst>
               <a:ext uri="{FF2B5EF4-FFF2-40B4-BE49-F238E27FC236}">
-                <a16:creationId xmlns:a16="http://schemas.microsoft.com/office/drawing/2014/main" id="{E623169B-53AD-F1DE-BFA5-761E10E7AE4F}"/>
+                <a16:creationId xmlns:a16="http://schemas.microsoft.com/office/drawing/2014/main" id="{36FEF459-5A8A-E135-E113-64B28E6F1D8E}"/>
               </a:ext>
             </a:extLst>
           </p:cNvPr>
@@ -12371,7 +13576,7 @@
           <p:cNvPr id="5" name="TextBox 4">
             <a:extLst>
               <a:ext uri="{FF2B5EF4-FFF2-40B4-BE49-F238E27FC236}">
-                <a16:creationId xmlns:a16="http://schemas.microsoft.com/office/drawing/2014/main" id="{CFD5143D-DD85-90AF-A06F-7436F940E1A3}"/>
+                <a16:creationId xmlns:a16="http://schemas.microsoft.com/office/drawing/2014/main" id="{F63C742F-AB9E-B343-BA44-F23E8A9A7B77}"/>
               </a:ext>
             </a:extLst>
           </p:cNvPr>
@@ -12411,7 +13616,7 @@
           <p:cNvPr id="6" name="TextBox 5">
             <a:extLst>
               <a:ext uri="{FF2B5EF4-FFF2-40B4-BE49-F238E27FC236}">
-                <a16:creationId xmlns:a16="http://schemas.microsoft.com/office/drawing/2014/main" id="{EAFF3B1C-1A5A-5E0B-A448-F973D99DCCE6}"/>
+                <a16:creationId xmlns:a16="http://schemas.microsoft.com/office/drawing/2014/main" id="{FBA26F43-233E-E6AC-CD3C-C5D654FBEE77}"/>
               </a:ext>
             </a:extLst>
           </p:cNvPr>
@@ -12451,7 +13656,7 @@
           <p:cNvPr id="7" name="Rectangle: Rounded Corners 6">
             <a:extLst>
               <a:ext uri="{FF2B5EF4-FFF2-40B4-BE49-F238E27FC236}">
-                <a16:creationId xmlns:a16="http://schemas.microsoft.com/office/drawing/2014/main" id="{F0849FB6-BC2E-93D1-B516-2DF4F33EA507}"/>
+                <a16:creationId xmlns:a16="http://schemas.microsoft.com/office/drawing/2014/main" id="{BFA72E9B-B013-317E-10F1-B6D3642EC3A8}"/>
               </a:ext>
             </a:extLst>
           </p:cNvPr>
@@ -12507,7 +13712,7 @@
           <p:cNvPr id="8" name="TextBox 7">
             <a:extLst>
               <a:ext uri="{FF2B5EF4-FFF2-40B4-BE49-F238E27FC236}">
-                <a16:creationId xmlns:a16="http://schemas.microsoft.com/office/drawing/2014/main" id="{C8249763-E752-1D56-91A3-148B510510DF}"/>
+                <a16:creationId xmlns:a16="http://schemas.microsoft.com/office/drawing/2014/main" id="{23A46645-4D3C-1408-2D42-9669BD0533D1}"/>
               </a:ext>
             </a:extLst>
           </p:cNvPr>
@@ -12547,7 +13752,7 @@
           <p:cNvPr id="9" name="TextBox 8">
             <a:extLst>
               <a:ext uri="{FF2B5EF4-FFF2-40B4-BE49-F238E27FC236}">
-                <a16:creationId xmlns:a16="http://schemas.microsoft.com/office/drawing/2014/main" id="{1C6E0858-89BD-6241-687A-CBEC04E28B29}"/>
+                <a16:creationId xmlns:a16="http://schemas.microsoft.com/office/drawing/2014/main" id="{51192082-3714-CA23-03BE-48EDDF9CABB9}"/>
               </a:ext>
             </a:extLst>
           </p:cNvPr>
@@ -12587,7 +13792,7 @@
           <p:cNvPr id="10" name="Rectangle: Rounded Corners 9">
             <a:extLst>
               <a:ext uri="{FF2B5EF4-FFF2-40B4-BE49-F238E27FC236}">
-                <a16:creationId xmlns:a16="http://schemas.microsoft.com/office/drawing/2014/main" id="{18A2D553-9CA9-BC24-7BD4-731A11E495FC}"/>
+                <a16:creationId xmlns:a16="http://schemas.microsoft.com/office/drawing/2014/main" id="{472CA73E-3CB8-C0D0-EA62-51D5A18CC88B}"/>
               </a:ext>
             </a:extLst>
           </p:cNvPr>
@@ -12643,7 +13848,7 @@
           <p:cNvPr id="11" name="TextBox 10">
             <a:extLst>
               <a:ext uri="{FF2B5EF4-FFF2-40B4-BE49-F238E27FC236}">
-                <a16:creationId xmlns:a16="http://schemas.microsoft.com/office/drawing/2014/main" id="{3E26FD7D-AFAB-0FF6-BDBE-B468B9521362}"/>
+                <a16:creationId xmlns:a16="http://schemas.microsoft.com/office/drawing/2014/main" id="{3A017B9A-9953-A777-4B68-C51DE44D745D}"/>
               </a:ext>
             </a:extLst>
           </p:cNvPr>
@@ -12683,7 +13888,7 @@
           <p:cNvPr id="12" name="TextBox 11">
             <a:extLst>
               <a:ext uri="{FF2B5EF4-FFF2-40B4-BE49-F238E27FC236}">
-                <a16:creationId xmlns:a16="http://schemas.microsoft.com/office/drawing/2014/main" id="{1ACC72AC-7987-D0C4-B2C1-0655A82E995C}"/>
+                <a16:creationId xmlns:a16="http://schemas.microsoft.com/office/drawing/2014/main" id="{7A9BBA96-3030-1737-EEBF-1E45EC55B607}"/>
               </a:ext>
             </a:extLst>
           </p:cNvPr>
@@ -12784,7 +13989,7 @@
           <p:cNvPr id="13" name="TextBox 12">
             <a:extLst>
               <a:ext uri="{FF2B5EF4-FFF2-40B4-BE49-F238E27FC236}">
-                <a16:creationId xmlns:a16="http://schemas.microsoft.com/office/drawing/2014/main" id="{2AA9A366-B6C4-C7C9-4474-FE4B594619A9}"/>
+                <a16:creationId xmlns:a16="http://schemas.microsoft.com/office/drawing/2014/main" id="{F9BD24CD-6290-00EB-A7DD-065B5B62A99F}"/>
               </a:ext>
             </a:extLst>
           </p:cNvPr>
@@ -12824,7 +14029,7 @@
           <p:cNvPr id="14" name="TextBox 13">
             <a:extLst>
               <a:ext uri="{FF2B5EF4-FFF2-40B4-BE49-F238E27FC236}">
-                <a16:creationId xmlns:a16="http://schemas.microsoft.com/office/drawing/2014/main" id="{F3CF7F8F-37D4-3F3B-8E5F-DC3173A76DDD}"/>
+                <a16:creationId xmlns:a16="http://schemas.microsoft.com/office/drawing/2014/main" id="{4B9F5220-27CB-8D60-4234-A5A1D1F223E4}"/>
               </a:ext>
             </a:extLst>
           </p:cNvPr>
@@ -12863,7 +14068,7 @@
     </p:spTree>
     <p:extLst>
       <p:ext uri="{BB962C8B-B14F-4D97-AF65-F5344CB8AC3E}">
-        <p14:creationId xmlns:p14="http://schemas.microsoft.com/office/powerpoint/2010/main" val="2513266624"/>
+        <p14:creationId xmlns:p14="http://schemas.microsoft.com/office/powerpoint/2010/main" val="2070628678"/>
       </p:ext>
     </p:extLst>
   </p:cSld>
@@ -12903,7 +14108,7 @@
           <p:cNvPr id="2" name="Title 1">
             <a:extLst>
               <a:ext uri="{FF2B5EF4-FFF2-40B4-BE49-F238E27FC236}">
-                <a16:creationId xmlns:a16="http://schemas.microsoft.com/office/drawing/2014/main" id="{5D5C2CAF-FB57-24A6-E43F-57CD62E62998}"/>
+                <a16:creationId xmlns:a16="http://schemas.microsoft.com/office/drawing/2014/main" id="{EC3A786C-38E1-2593-A871-32B3267B97AF}"/>
               </a:ext>
             </a:extLst>
           </p:cNvPr>
@@ -12943,7 +14148,7 @@
           <p:cNvPr id="3" name="TextBox 2">
             <a:extLst>
               <a:ext uri="{FF2B5EF4-FFF2-40B4-BE49-F238E27FC236}">
-                <a16:creationId xmlns:a16="http://schemas.microsoft.com/office/drawing/2014/main" id="{16BAF52C-9298-2B6D-BF30-8C025C3D1CD7}"/>
+                <a16:creationId xmlns:a16="http://schemas.microsoft.com/office/drawing/2014/main" id="{932775BA-C13D-FA8E-1968-DD426484FB4B}"/>
               </a:ext>
             </a:extLst>
           </p:cNvPr>
@@ -12983,7 +14188,7 @@
           <p:cNvPr id="4" name="Rectangle: Rounded Corners 3">
             <a:extLst>
               <a:ext uri="{FF2B5EF4-FFF2-40B4-BE49-F238E27FC236}">
-                <a16:creationId xmlns:a16="http://schemas.microsoft.com/office/drawing/2014/main" id="{3B975D57-DF46-A456-FD1A-2DADF89FCA3B}"/>
+                <a16:creationId xmlns:a16="http://schemas.microsoft.com/office/drawing/2014/main" id="{C9048C2E-C814-0906-32A6-D9768A5F3F90}"/>
               </a:ext>
             </a:extLst>
           </p:cNvPr>
@@ -13039,7 +14244,7 @@
           <p:cNvPr id="5" name="TextBox 4">
             <a:extLst>
               <a:ext uri="{FF2B5EF4-FFF2-40B4-BE49-F238E27FC236}">
-                <a16:creationId xmlns:a16="http://schemas.microsoft.com/office/drawing/2014/main" id="{E6A6DA1F-8451-1BD1-6F92-9205F7B8CED6}"/>
+                <a16:creationId xmlns:a16="http://schemas.microsoft.com/office/drawing/2014/main" id="{76C22BC4-7211-0D5D-2551-0926F89FFAB1}"/>
               </a:ext>
             </a:extLst>
           </p:cNvPr>
@@ -13079,7 +14284,7 @@
           <p:cNvPr id="6" name="TextBox 5">
             <a:extLst>
               <a:ext uri="{FF2B5EF4-FFF2-40B4-BE49-F238E27FC236}">
-                <a16:creationId xmlns:a16="http://schemas.microsoft.com/office/drawing/2014/main" id="{059C073E-A6E8-1825-7F6F-7F076A464860}"/>
+                <a16:creationId xmlns:a16="http://schemas.microsoft.com/office/drawing/2014/main" id="{6BA88DF7-1B39-372B-8CD6-7D1E2ABCA3E5}"/>
               </a:ext>
             </a:extLst>
           </p:cNvPr>
@@ -13119,7 +14324,7 @@
           <p:cNvPr id="7" name="TextBox 6">
             <a:extLst>
               <a:ext uri="{FF2B5EF4-FFF2-40B4-BE49-F238E27FC236}">
-                <a16:creationId xmlns:a16="http://schemas.microsoft.com/office/drawing/2014/main" id="{2AF70CC1-4DB1-8FEF-FAC8-910303741AEF}"/>
+                <a16:creationId xmlns:a16="http://schemas.microsoft.com/office/drawing/2014/main" id="{158BCE40-BE0E-B6FD-5279-5BF03C0A6287}"/>
               </a:ext>
             </a:extLst>
           </p:cNvPr>
@@ -13159,7 +14364,7 @@
           <p:cNvPr id="8" name="Rectangle: Rounded Corners 7">
             <a:extLst>
               <a:ext uri="{FF2B5EF4-FFF2-40B4-BE49-F238E27FC236}">
-                <a16:creationId xmlns:a16="http://schemas.microsoft.com/office/drawing/2014/main" id="{01B010AA-DE7B-AFAF-A40A-D00E1A0E9F2E}"/>
+                <a16:creationId xmlns:a16="http://schemas.microsoft.com/office/drawing/2014/main" id="{336E3ED9-82CB-17C4-08CF-C4A89213B653}"/>
               </a:ext>
             </a:extLst>
           </p:cNvPr>
@@ -13215,7 +14420,7 @@
           <p:cNvPr id="9" name="TextBox 8">
             <a:extLst>
               <a:ext uri="{FF2B5EF4-FFF2-40B4-BE49-F238E27FC236}">
-                <a16:creationId xmlns:a16="http://schemas.microsoft.com/office/drawing/2014/main" id="{7E448A20-D544-3643-1685-C7B4EAB4C58A}"/>
+                <a16:creationId xmlns:a16="http://schemas.microsoft.com/office/drawing/2014/main" id="{B25024D6-064B-2331-ED19-41253CF329E2}"/>
               </a:ext>
             </a:extLst>
           </p:cNvPr>
@@ -13255,7 +14460,7 @@
           <p:cNvPr id="10" name="TextBox 9">
             <a:extLst>
               <a:ext uri="{FF2B5EF4-FFF2-40B4-BE49-F238E27FC236}">
-                <a16:creationId xmlns:a16="http://schemas.microsoft.com/office/drawing/2014/main" id="{436E0BEB-13FE-DED6-7493-DE60C13F03C3}"/>
+                <a16:creationId xmlns:a16="http://schemas.microsoft.com/office/drawing/2014/main" id="{AF7FAD90-EC00-F660-A3BA-4DD082FD983A}"/>
               </a:ext>
             </a:extLst>
           </p:cNvPr>
@@ -13295,7 +14500,7 @@
           <p:cNvPr id="11" name="TextBox 10">
             <a:extLst>
               <a:ext uri="{FF2B5EF4-FFF2-40B4-BE49-F238E27FC236}">
-                <a16:creationId xmlns:a16="http://schemas.microsoft.com/office/drawing/2014/main" id="{B93F565C-0D30-E103-05B8-E7DDDF7D44F4}"/>
+                <a16:creationId xmlns:a16="http://schemas.microsoft.com/office/drawing/2014/main" id="{C5FDC2DD-D4C7-70F7-0054-3C3F49C05CF8}"/>
               </a:ext>
             </a:extLst>
           </p:cNvPr>
@@ -13335,7 +14540,7 @@
           <p:cNvPr id="12" name="TextBox 11">
             <a:extLst>
               <a:ext uri="{FF2B5EF4-FFF2-40B4-BE49-F238E27FC236}">
-                <a16:creationId xmlns:a16="http://schemas.microsoft.com/office/drawing/2014/main" id="{10F49B4D-73A5-7FFA-7B00-D3D84291116C}"/>
+                <a16:creationId xmlns:a16="http://schemas.microsoft.com/office/drawing/2014/main" id="{A0AE615C-4669-E1F0-9FCF-B3C8E3C080B8}"/>
               </a:ext>
             </a:extLst>
           </p:cNvPr>
@@ -13375,7 +14580,7 @@
           <p:cNvPr id="13" name="TextBox 12">
             <a:extLst>
               <a:ext uri="{FF2B5EF4-FFF2-40B4-BE49-F238E27FC236}">
-                <a16:creationId xmlns:a16="http://schemas.microsoft.com/office/drawing/2014/main" id="{14FB665B-023E-94BA-250E-E9E60843DAE6}"/>
+                <a16:creationId xmlns:a16="http://schemas.microsoft.com/office/drawing/2014/main" id="{40CF831D-48E7-031B-1774-321D686D5469}"/>
               </a:ext>
             </a:extLst>
           </p:cNvPr>
@@ -13415,7 +14620,7 @@
           <p:cNvPr id="14" name="TextBox 13">
             <a:extLst>
               <a:ext uri="{FF2B5EF4-FFF2-40B4-BE49-F238E27FC236}">
-                <a16:creationId xmlns:a16="http://schemas.microsoft.com/office/drawing/2014/main" id="{FC22D942-0BD0-A536-6242-392175FC49C1}"/>
+                <a16:creationId xmlns:a16="http://schemas.microsoft.com/office/drawing/2014/main" id="{D16CFE36-09C3-E793-0311-7F57B455F83E}"/>
               </a:ext>
             </a:extLst>
           </p:cNvPr>
@@ -13454,7 +14659,7 @@
     </p:spTree>
     <p:extLst>
       <p:ext uri="{BB962C8B-B14F-4D97-AF65-F5344CB8AC3E}">
-        <p14:creationId xmlns:p14="http://schemas.microsoft.com/office/powerpoint/2010/main" val="1187237358"/>
+        <p14:creationId xmlns:p14="http://schemas.microsoft.com/office/powerpoint/2010/main" val="305856651"/>
       </p:ext>
     </p:extLst>
   </p:cSld>
@@ -13494,7 +14699,7 @@
           <p:cNvPr id="2" name="Title 1">
             <a:extLst>
               <a:ext uri="{FF2B5EF4-FFF2-40B4-BE49-F238E27FC236}">
-                <a16:creationId xmlns:a16="http://schemas.microsoft.com/office/drawing/2014/main" id="{77E6D193-5B9D-B123-7D47-B12D8594649C}"/>
+                <a16:creationId xmlns:a16="http://schemas.microsoft.com/office/drawing/2014/main" id="{BD85CBB1-CD13-CF6A-0B38-F534F058283E}"/>
               </a:ext>
             </a:extLst>
           </p:cNvPr>
@@ -13534,7 +14739,7 @@
           <p:cNvPr id="3" name="TextBox 2">
             <a:extLst>
               <a:ext uri="{FF2B5EF4-FFF2-40B4-BE49-F238E27FC236}">
-                <a16:creationId xmlns:a16="http://schemas.microsoft.com/office/drawing/2014/main" id="{9C557613-AF52-070E-AD4E-E2EC8680D6E3}"/>
+                <a16:creationId xmlns:a16="http://schemas.microsoft.com/office/drawing/2014/main" id="{18EA4806-CF12-E059-9D74-E01167CCA998}"/>
               </a:ext>
             </a:extLst>
           </p:cNvPr>
@@ -13574,7 +14779,7 @@
           <p:cNvPr id="4" name="Rectangle: Rounded Corners 3">
             <a:extLst>
               <a:ext uri="{FF2B5EF4-FFF2-40B4-BE49-F238E27FC236}">
-                <a16:creationId xmlns:a16="http://schemas.microsoft.com/office/drawing/2014/main" id="{B283FAE8-8356-A4AB-D34A-D720387678F4}"/>
+                <a16:creationId xmlns:a16="http://schemas.microsoft.com/office/drawing/2014/main" id="{73FCC3C5-8415-4542-C35E-5417788FD6D4}"/>
               </a:ext>
             </a:extLst>
           </p:cNvPr>
@@ -13630,7 +14835,7 @@
           <p:cNvPr id="5" name="TextBox 4">
             <a:extLst>
               <a:ext uri="{FF2B5EF4-FFF2-40B4-BE49-F238E27FC236}">
-                <a16:creationId xmlns:a16="http://schemas.microsoft.com/office/drawing/2014/main" id="{828CFB08-0DE7-4B3C-2BE4-4A773453018B}"/>
+                <a16:creationId xmlns:a16="http://schemas.microsoft.com/office/drawing/2014/main" id="{A3DE50D2-5B99-4813-8E17-600AEEA94B2B}"/>
               </a:ext>
             </a:extLst>
           </p:cNvPr>
@@ -13670,7 +14875,7 @@
           <p:cNvPr id="6" name="TextBox 5">
             <a:extLst>
               <a:ext uri="{FF2B5EF4-FFF2-40B4-BE49-F238E27FC236}">
-                <a16:creationId xmlns:a16="http://schemas.microsoft.com/office/drawing/2014/main" id="{4CAFC2E7-2868-019F-FC75-4102ABF52B43}"/>
+                <a16:creationId xmlns:a16="http://schemas.microsoft.com/office/drawing/2014/main" id="{1246A6A6-ACF7-45FD-901F-27FE8203E6B8}"/>
               </a:ext>
             </a:extLst>
           </p:cNvPr>
@@ -13710,7 +14915,7 @@
           <p:cNvPr id="7" name="TextBox 6">
             <a:extLst>
               <a:ext uri="{FF2B5EF4-FFF2-40B4-BE49-F238E27FC236}">
-                <a16:creationId xmlns:a16="http://schemas.microsoft.com/office/drawing/2014/main" id="{49D6B49E-CC0B-FEB1-EC39-BD0521575E76}"/>
+                <a16:creationId xmlns:a16="http://schemas.microsoft.com/office/drawing/2014/main" id="{AB47E673-7D33-D349-6E52-DE8836892F38}"/>
               </a:ext>
             </a:extLst>
           </p:cNvPr>
@@ -13750,7 +14955,7 @@
           <p:cNvPr id="8" name="Arrow: Right 7">
             <a:extLst>
               <a:ext uri="{FF2B5EF4-FFF2-40B4-BE49-F238E27FC236}">
-                <a16:creationId xmlns:a16="http://schemas.microsoft.com/office/drawing/2014/main" id="{693B486E-50D3-2132-D84C-158C2F20B1D6}"/>
+                <a16:creationId xmlns:a16="http://schemas.microsoft.com/office/drawing/2014/main" id="{43F41BF3-2B23-02A0-8B60-D21D189027AF}"/>
               </a:ext>
             </a:extLst>
           </p:cNvPr>
@@ -13818,7 +15023,7 @@
           <p:cNvPr id="9" name="Rectangle: Rounded Corners 8">
             <a:extLst>
               <a:ext uri="{FF2B5EF4-FFF2-40B4-BE49-F238E27FC236}">
-                <a16:creationId xmlns:a16="http://schemas.microsoft.com/office/drawing/2014/main" id="{7047841C-E29E-0A65-F06D-E7194077303C}"/>
+                <a16:creationId xmlns:a16="http://schemas.microsoft.com/office/drawing/2014/main" id="{B66299BE-18E2-1A28-9F18-466CDD7814BB}"/>
               </a:ext>
             </a:extLst>
           </p:cNvPr>
@@ -13874,7 +15079,7 @@
           <p:cNvPr id="10" name="TextBox 9">
             <a:extLst>
               <a:ext uri="{FF2B5EF4-FFF2-40B4-BE49-F238E27FC236}">
-                <a16:creationId xmlns:a16="http://schemas.microsoft.com/office/drawing/2014/main" id="{D073F37C-5FDD-3DAA-728C-5823C30967A5}"/>
+                <a16:creationId xmlns:a16="http://schemas.microsoft.com/office/drawing/2014/main" id="{64D59B7F-D400-7E5A-0173-F0B449B82FB6}"/>
               </a:ext>
             </a:extLst>
           </p:cNvPr>
@@ -13914,7 +15119,7 @@
           <p:cNvPr id="11" name="TextBox 10">
             <a:extLst>
               <a:ext uri="{FF2B5EF4-FFF2-40B4-BE49-F238E27FC236}">
-                <a16:creationId xmlns:a16="http://schemas.microsoft.com/office/drawing/2014/main" id="{EFB4425A-D460-2110-DD47-451C24B72317}"/>
+                <a16:creationId xmlns:a16="http://schemas.microsoft.com/office/drawing/2014/main" id="{21316001-5402-7337-EF11-701625353220}"/>
               </a:ext>
             </a:extLst>
           </p:cNvPr>
@@ -13954,7 +15159,7 @@
           <p:cNvPr id="12" name="TextBox 11">
             <a:extLst>
               <a:ext uri="{FF2B5EF4-FFF2-40B4-BE49-F238E27FC236}">
-                <a16:creationId xmlns:a16="http://schemas.microsoft.com/office/drawing/2014/main" id="{5A34E7B5-A4AB-7227-62D2-98D7E98B82AA}"/>
+                <a16:creationId xmlns:a16="http://schemas.microsoft.com/office/drawing/2014/main" id="{6AAAAD46-9EF1-78C5-47C5-414C413030C6}"/>
               </a:ext>
             </a:extLst>
           </p:cNvPr>
@@ -13994,7 +15199,7 @@
           <p:cNvPr id="13" name="Arrow: Right 12">
             <a:extLst>
               <a:ext uri="{FF2B5EF4-FFF2-40B4-BE49-F238E27FC236}">
-                <a16:creationId xmlns:a16="http://schemas.microsoft.com/office/drawing/2014/main" id="{298E800A-CD3C-1F7B-F9E6-8A5855FA0458}"/>
+                <a16:creationId xmlns:a16="http://schemas.microsoft.com/office/drawing/2014/main" id="{5DF51928-774D-8CA5-A18F-A0DE34CE859C}"/>
               </a:ext>
             </a:extLst>
           </p:cNvPr>
@@ -14062,7 +15267,7 @@
           <p:cNvPr id="14" name="Rectangle: Rounded Corners 13">
             <a:extLst>
               <a:ext uri="{FF2B5EF4-FFF2-40B4-BE49-F238E27FC236}">
-                <a16:creationId xmlns:a16="http://schemas.microsoft.com/office/drawing/2014/main" id="{D487B79A-35AE-E39E-0832-9AD0CF100F56}"/>
+                <a16:creationId xmlns:a16="http://schemas.microsoft.com/office/drawing/2014/main" id="{A61B1F64-8A1B-7561-A7E8-3E981165E22E}"/>
               </a:ext>
             </a:extLst>
           </p:cNvPr>
@@ -14118,7 +15323,7 @@
           <p:cNvPr id="15" name="TextBox 14">
             <a:extLst>
               <a:ext uri="{FF2B5EF4-FFF2-40B4-BE49-F238E27FC236}">
-                <a16:creationId xmlns:a16="http://schemas.microsoft.com/office/drawing/2014/main" id="{ACCF3532-D884-808A-6B41-6FB9B4A83D8E}"/>
+                <a16:creationId xmlns:a16="http://schemas.microsoft.com/office/drawing/2014/main" id="{00F98933-9338-C680-3EEE-A518D52FD5A6}"/>
               </a:ext>
             </a:extLst>
           </p:cNvPr>
@@ -14158,7 +15363,7 @@
           <p:cNvPr id="16" name="TextBox 15">
             <a:extLst>
               <a:ext uri="{FF2B5EF4-FFF2-40B4-BE49-F238E27FC236}">
-                <a16:creationId xmlns:a16="http://schemas.microsoft.com/office/drawing/2014/main" id="{13888E85-E15B-5E71-51FD-CB5697D846B4}"/>
+                <a16:creationId xmlns:a16="http://schemas.microsoft.com/office/drawing/2014/main" id="{2BCAFEF1-5A1E-9414-01AB-0BFA823652B5}"/>
               </a:ext>
             </a:extLst>
           </p:cNvPr>
@@ -14198,7 +15403,7 @@
           <p:cNvPr id="17" name="TextBox 16">
             <a:extLst>
               <a:ext uri="{FF2B5EF4-FFF2-40B4-BE49-F238E27FC236}">
-                <a16:creationId xmlns:a16="http://schemas.microsoft.com/office/drawing/2014/main" id="{9EC76761-45C6-17D5-AB6D-F4068B65547B}"/>
+                <a16:creationId xmlns:a16="http://schemas.microsoft.com/office/drawing/2014/main" id="{10132A70-ED35-AC67-2F55-510B2F62B3D7}"/>
               </a:ext>
             </a:extLst>
           </p:cNvPr>
@@ -14238,7 +15443,7 @@
           <p:cNvPr id="18" name="Arrow: Right 17">
             <a:extLst>
               <a:ext uri="{FF2B5EF4-FFF2-40B4-BE49-F238E27FC236}">
-                <a16:creationId xmlns:a16="http://schemas.microsoft.com/office/drawing/2014/main" id="{2D8469D4-A5E4-C24E-3A83-8311B9CC1C0C}"/>
+                <a16:creationId xmlns:a16="http://schemas.microsoft.com/office/drawing/2014/main" id="{4258E727-4FB4-6F85-C525-D23DA585167F}"/>
               </a:ext>
             </a:extLst>
           </p:cNvPr>
@@ -14306,7 +15511,7 @@
           <p:cNvPr id="19" name="Rectangle: Rounded Corners 18">
             <a:extLst>
               <a:ext uri="{FF2B5EF4-FFF2-40B4-BE49-F238E27FC236}">
-                <a16:creationId xmlns:a16="http://schemas.microsoft.com/office/drawing/2014/main" id="{84923AD5-746C-AC7A-9CED-637E3D720A31}"/>
+                <a16:creationId xmlns:a16="http://schemas.microsoft.com/office/drawing/2014/main" id="{74D55D29-C034-6493-0DD3-66A35DF96163}"/>
               </a:ext>
             </a:extLst>
           </p:cNvPr>
@@ -14362,7 +15567,7 @@
           <p:cNvPr id="20" name="TextBox 19">
             <a:extLst>
               <a:ext uri="{FF2B5EF4-FFF2-40B4-BE49-F238E27FC236}">
-                <a16:creationId xmlns:a16="http://schemas.microsoft.com/office/drawing/2014/main" id="{625DD4BD-D42F-8C3C-BF42-79570E42428B}"/>
+                <a16:creationId xmlns:a16="http://schemas.microsoft.com/office/drawing/2014/main" id="{E4047065-4F91-E004-9FB7-4EFF9C9E91F7}"/>
               </a:ext>
             </a:extLst>
           </p:cNvPr>
@@ -14402,7 +15607,7 @@
           <p:cNvPr id="21" name="TextBox 20">
             <a:extLst>
               <a:ext uri="{FF2B5EF4-FFF2-40B4-BE49-F238E27FC236}">
-                <a16:creationId xmlns:a16="http://schemas.microsoft.com/office/drawing/2014/main" id="{914D7AAA-5220-120B-F71B-D98B7F6A5CE0}"/>
+                <a16:creationId xmlns:a16="http://schemas.microsoft.com/office/drawing/2014/main" id="{DC100FE8-2662-74F8-FDF8-D47AC1561EEC}"/>
               </a:ext>
             </a:extLst>
           </p:cNvPr>
@@ -14442,7 +15647,7 @@
           <p:cNvPr id="22" name="TextBox 21">
             <a:extLst>
               <a:ext uri="{FF2B5EF4-FFF2-40B4-BE49-F238E27FC236}">
-                <a16:creationId xmlns:a16="http://schemas.microsoft.com/office/drawing/2014/main" id="{BD11F757-322B-C8A4-5E82-69585434A5F4}"/>
+                <a16:creationId xmlns:a16="http://schemas.microsoft.com/office/drawing/2014/main" id="{08824210-A948-B02B-7D72-E4691399E4ED}"/>
               </a:ext>
             </a:extLst>
           </p:cNvPr>
@@ -14482,7 +15687,7 @@
           <p:cNvPr id="23" name="Straight Connector 22">
             <a:extLst>
               <a:ext uri="{FF2B5EF4-FFF2-40B4-BE49-F238E27FC236}">
-                <a16:creationId xmlns:a16="http://schemas.microsoft.com/office/drawing/2014/main" id="{2B491EAF-29FC-D948-6803-74B2DC2B97E1}"/>
+                <a16:creationId xmlns:a16="http://schemas.microsoft.com/office/drawing/2014/main" id="{CBF5EE41-9B2E-6CF5-90B2-026E3FDA3774}"/>
               </a:ext>
             </a:extLst>
           </p:cNvPr>
@@ -14523,7 +15728,7 @@
           <p:cNvPr id="24" name="Straight Connector 23">
             <a:extLst>
               <a:ext uri="{FF2B5EF4-FFF2-40B4-BE49-F238E27FC236}">
-                <a16:creationId xmlns:a16="http://schemas.microsoft.com/office/drawing/2014/main" id="{EF06059E-8697-88C4-342A-84F918DFCA98}"/>
+                <a16:creationId xmlns:a16="http://schemas.microsoft.com/office/drawing/2014/main" id="{751BE396-D4D3-3E60-31AF-2C882D340E4A}"/>
               </a:ext>
             </a:extLst>
           </p:cNvPr>
@@ -14564,7 +15769,7 @@
           <p:cNvPr id="25" name="Straight Connector 24">
             <a:extLst>
               <a:ext uri="{FF2B5EF4-FFF2-40B4-BE49-F238E27FC236}">
-                <a16:creationId xmlns:a16="http://schemas.microsoft.com/office/drawing/2014/main" id="{B939F406-C6FC-E639-BE66-C9EF81757A15}"/>
+                <a16:creationId xmlns:a16="http://schemas.microsoft.com/office/drawing/2014/main" id="{680682BC-5EE5-14C8-3D6E-F1C6830FB3BA}"/>
               </a:ext>
             </a:extLst>
           </p:cNvPr>
@@ -14606,7 +15811,7 @@
           <p:cNvPr id="26" name="TextBox 25">
             <a:extLst>
               <a:ext uri="{FF2B5EF4-FFF2-40B4-BE49-F238E27FC236}">
-                <a16:creationId xmlns:a16="http://schemas.microsoft.com/office/drawing/2014/main" id="{23E0D8E5-9D23-5D43-DEFF-4B54CBAB4470}"/>
+                <a16:creationId xmlns:a16="http://schemas.microsoft.com/office/drawing/2014/main" id="{8BD87D2E-27B9-5E1B-0078-C4CCDBCC7D97}"/>
               </a:ext>
             </a:extLst>
           </p:cNvPr>
@@ -14647,7 +15852,7 @@
           <p:cNvPr id="27" name="Rectangle: Rounded Corners 26">
             <a:extLst>
               <a:ext uri="{FF2B5EF4-FFF2-40B4-BE49-F238E27FC236}">
-                <a16:creationId xmlns:a16="http://schemas.microsoft.com/office/drawing/2014/main" id="{8FD1AB46-A7C7-413F-5F66-C20F4742B7C2}"/>
+                <a16:creationId xmlns:a16="http://schemas.microsoft.com/office/drawing/2014/main" id="{90E681EC-00AA-9F15-7EF8-1D6EE60534C8}"/>
               </a:ext>
             </a:extLst>
           </p:cNvPr>
@@ -14703,7 +15908,7 @@
           <p:cNvPr id="28" name="TextBox 27">
             <a:extLst>
               <a:ext uri="{FF2B5EF4-FFF2-40B4-BE49-F238E27FC236}">
-                <a16:creationId xmlns:a16="http://schemas.microsoft.com/office/drawing/2014/main" id="{1060900B-716E-B6F3-B652-25CF99098B01}"/>
+                <a16:creationId xmlns:a16="http://schemas.microsoft.com/office/drawing/2014/main" id="{BDBB6E05-7A27-FFEE-46EA-836D0BF627B6}"/>
               </a:ext>
             </a:extLst>
           </p:cNvPr>
@@ -14744,7 +15949,7 @@
           <p:cNvPr id="29" name="TextBox 28">
             <a:extLst>
               <a:ext uri="{FF2B5EF4-FFF2-40B4-BE49-F238E27FC236}">
-                <a16:creationId xmlns:a16="http://schemas.microsoft.com/office/drawing/2014/main" id="{1E2CCE47-26C2-FEEF-D8F0-ECF037E6D6CA}"/>
+                <a16:creationId xmlns:a16="http://schemas.microsoft.com/office/drawing/2014/main" id="{EAEC5A15-737F-2F6F-4128-6DAF7595370B}"/>
               </a:ext>
             </a:extLst>
           </p:cNvPr>
@@ -14784,7 +15989,7 @@
           <p:cNvPr id="30" name="TextBox 29">
             <a:extLst>
               <a:ext uri="{FF2B5EF4-FFF2-40B4-BE49-F238E27FC236}">
-                <a16:creationId xmlns:a16="http://schemas.microsoft.com/office/drawing/2014/main" id="{315C10A2-849E-7837-9E45-D6F98B7EC72D}"/>
+                <a16:creationId xmlns:a16="http://schemas.microsoft.com/office/drawing/2014/main" id="{661B5058-7CCD-9528-809F-F3533C47DB26}"/>
               </a:ext>
             </a:extLst>
           </p:cNvPr>
@@ -14823,7 +16028,7 @@
     </p:spTree>
     <p:extLst>
       <p:ext uri="{BB962C8B-B14F-4D97-AF65-F5344CB8AC3E}">
-        <p14:creationId xmlns:p14="http://schemas.microsoft.com/office/powerpoint/2010/main" val="3116812084"/>
+        <p14:creationId xmlns:p14="http://schemas.microsoft.com/office/powerpoint/2010/main" val="2069874671"/>
       </p:ext>
     </p:extLst>
   </p:cSld>
@@ -14863,7 +16068,7 @@
           <p:cNvPr id="2" name="Title 1">
             <a:extLst>
               <a:ext uri="{FF2B5EF4-FFF2-40B4-BE49-F238E27FC236}">
-                <a16:creationId xmlns:a16="http://schemas.microsoft.com/office/drawing/2014/main" id="{198938C0-94A5-236C-6EC2-B6E030538258}"/>
+                <a16:creationId xmlns:a16="http://schemas.microsoft.com/office/drawing/2014/main" id="{E3AC50C4-FEB6-EF91-27A6-013F19CA0105}"/>
               </a:ext>
             </a:extLst>
           </p:cNvPr>
@@ -14903,7 +16108,7 @@
           <p:cNvPr id="3" name="TextBox 2">
             <a:extLst>
               <a:ext uri="{FF2B5EF4-FFF2-40B4-BE49-F238E27FC236}">
-                <a16:creationId xmlns:a16="http://schemas.microsoft.com/office/drawing/2014/main" id="{5836C788-3FBB-8B3A-7310-3D16E2B267AF}"/>
+                <a16:creationId xmlns:a16="http://schemas.microsoft.com/office/drawing/2014/main" id="{07299FB1-3BB9-B699-BA3C-5DCF1B4EEACC}"/>
               </a:ext>
             </a:extLst>
           </p:cNvPr>
@@ -14943,7 +16148,7 @@
           <p:cNvPr id="4" name="TextBox 3">
             <a:extLst>
               <a:ext uri="{FF2B5EF4-FFF2-40B4-BE49-F238E27FC236}">
-                <a16:creationId xmlns:a16="http://schemas.microsoft.com/office/drawing/2014/main" id="{733C1F1C-B965-C704-6D3E-516862040C70}"/>
+                <a16:creationId xmlns:a16="http://schemas.microsoft.com/office/drawing/2014/main" id="{238EE7F1-2229-457D-F9E5-F1D3A7E33415}"/>
               </a:ext>
             </a:extLst>
           </p:cNvPr>
@@ -14983,7 +16188,7 @@
           <p:cNvPr id="5" name="Straight Connector 4">
             <a:extLst>
               <a:ext uri="{FF2B5EF4-FFF2-40B4-BE49-F238E27FC236}">
-                <a16:creationId xmlns:a16="http://schemas.microsoft.com/office/drawing/2014/main" id="{46F9B4F8-4E9A-AC0D-1BAB-53D3475D7E9E}"/>
+                <a16:creationId xmlns:a16="http://schemas.microsoft.com/office/drawing/2014/main" id="{2885D3D1-CBF6-FF3C-4B61-F7C082B14883}"/>
               </a:ext>
             </a:extLst>
           </p:cNvPr>
@@ -15024,7 +16229,7 @@
           <p:cNvPr id="6" name="TextBox 5">
             <a:extLst>
               <a:ext uri="{FF2B5EF4-FFF2-40B4-BE49-F238E27FC236}">
-                <a16:creationId xmlns:a16="http://schemas.microsoft.com/office/drawing/2014/main" id="{848E6BD1-C17F-D942-0D79-7EF8F33A9638}"/>
+                <a16:creationId xmlns:a16="http://schemas.microsoft.com/office/drawing/2014/main" id="{26F96F6D-1570-3C5E-1C16-1BA99181677B}"/>
               </a:ext>
             </a:extLst>
           </p:cNvPr>
@@ -15065,7 +16270,7 @@
           <p:cNvPr id="7" name="Straight Connector 6">
             <a:extLst>
               <a:ext uri="{FF2B5EF4-FFF2-40B4-BE49-F238E27FC236}">
-                <a16:creationId xmlns:a16="http://schemas.microsoft.com/office/drawing/2014/main" id="{90DC6046-269C-5BBC-6548-39F72F75E06D}"/>
+                <a16:creationId xmlns:a16="http://schemas.microsoft.com/office/drawing/2014/main" id="{A06BD926-E4C9-806B-1994-1975BC1293B7}"/>
               </a:ext>
             </a:extLst>
           </p:cNvPr>
@@ -15106,7 +16311,7 @@
           <p:cNvPr id="8" name="TextBox 7">
             <a:extLst>
               <a:ext uri="{FF2B5EF4-FFF2-40B4-BE49-F238E27FC236}">
-                <a16:creationId xmlns:a16="http://schemas.microsoft.com/office/drawing/2014/main" id="{335155BF-D311-69AE-6AC1-17A4B5584185}"/>
+                <a16:creationId xmlns:a16="http://schemas.microsoft.com/office/drawing/2014/main" id="{37AB5AA7-F536-2EC7-7779-30D3A23020BF}"/>
               </a:ext>
             </a:extLst>
           </p:cNvPr>
@@ -15147,7 +16352,7 @@
           <p:cNvPr id="9" name="Straight Connector 8">
             <a:extLst>
               <a:ext uri="{FF2B5EF4-FFF2-40B4-BE49-F238E27FC236}">
-                <a16:creationId xmlns:a16="http://schemas.microsoft.com/office/drawing/2014/main" id="{3A5092C2-26C4-4464-FA08-28AC017F0D2F}"/>
+                <a16:creationId xmlns:a16="http://schemas.microsoft.com/office/drawing/2014/main" id="{661CD0F4-CB39-B2DF-AA6C-1107BB56236F}"/>
               </a:ext>
             </a:extLst>
           </p:cNvPr>
@@ -15188,7 +16393,7 @@
           <p:cNvPr id="10" name="TextBox 9">
             <a:extLst>
               <a:ext uri="{FF2B5EF4-FFF2-40B4-BE49-F238E27FC236}">
-                <a16:creationId xmlns:a16="http://schemas.microsoft.com/office/drawing/2014/main" id="{81A01DEE-C4BA-BD8B-F4F3-234472A2ECCA}"/>
+                <a16:creationId xmlns:a16="http://schemas.microsoft.com/office/drawing/2014/main" id="{BF73E3E5-E67F-E1E9-3EF1-B1CBD8950031}"/>
               </a:ext>
             </a:extLst>
           </p:cNvPr>
@@ -15229,7 +16434,7 @@
           <p:cNvPr id="11" name="Straight Connector 10">
             <a:extLst>
               <a:ext uri="{FF2B5EF4-FFF2-40B4-BE49-F238E27FC236}">
-                <a16:creationId xmlns:a16="http://schemas.microsoft.com/office/drawing/2014/main" id="{A81C72C1-7186-1D1F-1307-2463A0BD7EEC}"/>
+                <a16:creationId xmlns:a16="http://schemas.microsoft.com/office/drawing/2014/main" id="{DDCA29C3-88A9-9F48-BC38-550638458F0A}"/>
               </a:ext>
             </a:extLst>
           </p:cNvPr>
@@ -15270,7 +16475,7 @@
           <p:cNvPr id="12" name="TextBox 11">
             <a:extLst>
               <a:ext uri="{FF2B5EF4-FFF2-40B4-BE49-F238E27FC236}">
-                <a16:creationId xmlns:a16="http://schemas.microsoft.com/office/drawing/2014/main" id="{CEF24875-72E3-6C57-4324-05FAB176C2C5}"/>
+                <a16:creationId xmlns:a16="http://schemas.microsoft.com/office/drawing/2014/main" id="{173EE807-A948-1531-E6FF-BBD22CA1E8CE}"/>
               </a:ext>
             </a:extLst>
           </p:cNvPr>
@@ -15311,7 +16516,7 @@
           <p:cNvPr id="13" name="Straight Connector 12">
             <a:extLst>
               <a:ext uri="{FF2B5EF4-FFF2-40B4-BE49-F238E27FC236}">
-                <a16:creationId xmlns:a16="http://schemas.microsoft.com/office/drawing/2014/main" id="{2B1A1D95-9CDF-43DB-AB71-748DFAF9779F}"/>
+                <a16:creationId xmlns:a16="http://schemas.microsoft.com/office/drawing/2014/main" id="{5F67CC0D-DA25-A24D-70DD-A8DFBCFAAA25}"/>
               </a:ext>
             </a:extLst>
           </p:cNvPr>
@@ -15352,7 +16557,7 @@
           <p:cNvPr id="14" name="TextBox 13">
             <a:extLst>
               <a:ext uri="{FF2B5EF4-FFF2-40B4-BE49-F238E27FC236}">
-                <a16:creationId xmlns:a16="http://schemas.microsoft.com/office/drawing/2014/main" id="{189B58FB-3598-0FB6-A588-975EE33B5B9D}"/>
+                <a16:creationId xmlns:a16="http://schemas.microsoft.com/office/drawing/2014/main" id="{0E02E8DA-D340-DC42-F514-A4A4B1C3731B}"/>
               </a:ext>
             </a:extLst>
           </p:cNvPr>
@@ -15393,7 +16598,7 @@
           <p:cNvPr id="15" name="Straight Connector 14">
             <a:extLst>
               <a:ext uri="{FF2B5EF4-FFF2-40B4-BE49-F238E27FC236}">
-                <a16:creationId xmlns:a16="http://schemas.microsoft.com/office/drawing/2014/main" id="{5C3BBF21-4906-7295-C294-A0D682020EBF}"/>
+                <a16:creationId xmlns:a16="http://schemas.microsoft.com/office/drawing/2014/main" id="{94581D7C-C2D8-6ABC-9907-D794129A84F3}"/>
               </a:ext>
             </a:extLst>
           </p:cNvPr>
@@ -15434,7 +16639,7 @@
           <p:cNvPr id="16" name="TextBox 15">
             <a:extLst>
               <a:ext uri="{FF2B5EF4-FFF2-40B4-BE49-F238E27FC236}">
-                <a16:creationId xmlns:a16="http://schemas.microsoft.com/office/drawing/2014/main" id="{B7F24244-441E-F3AD-0327-C27F28048C6B}"/>
+                <a16:creationId xmlns:a16="http://schemas.microsoft.com/office/drawing/2014/main" id="{AAA0E849-04E9-A21B-08C9-89B0F004AFD9}"/>
               </a:ext>
             </a:extLst>
           </p:cNvPr>
@@ -15475,7 +16680,7 @@
           <p:cNvPr id="17" name="Range band" descr="Range of one standard deviation around Ben Ong's hail discipline estimate; it narrows over five points">
             <a:extLst>
               <a:ext uri="{FF2B5EF4-FFF2-40B4-BE49-F238E27FC236}">
-                <a16:creationId xmlns:a16="http://schemas.microsoft.com/office/drawing/2014/main" id="{AFB575D9-EB09-E322-9F65-3ADFEE1D365C}"/>
+                <a16:creationId xmlns:a16="http://schemas.microsoft.com/office/drawing/2014/main" id="{FF1714DC-2C5F-4D71-1002-BC465767A7EF}"/>
               </a:ext>
             </a:extLst>
           </p:cNvPr>
@@ -15584,7 +16789,7 @@
           <p:cNvPr id="18" name="Straight Connector 17">
             <a:extLst>
               <a:ext uri="{FF2B5EF4-FFF2-40B4-BE49-F238E27FC236}">
-                <a16:creationId xmlns:a16="http://schemas.microsoft.com/office/drawing/2014/main" id="{325DC4C4-DA7B-101A-1168-3270BE6DD8A6}"/>
+                <a16:creationId xmlns:a16="http://schemas.microsoft.com/office/drawing/2014/main" id="{9E4EA9B2-BDAB-4FE2-20E5-69CE489C8DB5}"/>
               </a:ext>
             </a:extLst>
           </p:cNvPr>
@@ -15625,7 +16830,7 @@
           <p:cNvPr id="19" name="Straight Connector 18">
             <a:extLst>
               <a:ext uri="{FF2B5EF4-FFF2-40B4-BE49-F238E27FC236}">
-                <a16:creationId xmlns:a16="http://schemas.microsoft.com/office/drawing/2014/main" id="{ECD15F81-07E6-821A-5A5B-09E6C8BD2715}"/>
+                <a16:creationId xmlns:a16="http://schemas.microsoft.com/office/drawing/2014/main" id="{6385F399-5277-A83B-D2B1-10D54C35142B}"/>
               </a:ext>
             </a:extLst>
           </p:cNvPr>
@@ -15666,7 +16871,7 @@
           <p:cNvPr id="20" name="Straight Connector 19">
             <a:extLst>
               <a:ext uri="{FF2B5EF4-FFF2-40B4-BE49-F238E27FC236}">
-                <a16:creationId xmlns:a16="http://schemas.microsoft.com/office/drawing/2014/main" id="{C560B698-CAA1-9EFE-024A-E96DAADE215D}"/>
+                <a16:creationId xmlns:a16="http://schemas.microsoft.com/office/drawing/2014/main" id="{5107C9FB-E798-7798-4911-DEB53433DA7B}"/>
               </a:ext>
             </a:extLst>
           </p:cNvPr>
@@ -15707,7 +16912,7 @@
           <p:cNvPr id="21" name="Straight Connector 20">
             <a:extLst>
               <a:ext uri="{FF2B5EF4-FFF2-40B4-BE49-F238E27FC236}">
-                <a16:creationId xmlns:a16="http://schemas.microsoft.com/office/drawing/2014/main" id="{E8DA4B6A-ADF5-900E-A092-A3A6AC03F6C5}"/>
+                <a16:creationId xmlns:a16="http://schemas.microsoft.com/office/drawing/2014/main" id="{BB1FBD52-1B76-FA26-45A8-4E01FAC1787F}"/>
               </a:ext>
             </a:extLst>
           </p:cNvPr>
@@ -15748,7 +16953,7 @@
           <p:cNvPr id="22" name="Oval 21">
             <a:extLst>
               <a:ext uri="{FF2B5EF4-FFF2-40B4-BE49-F238E27FC236}">
-                <a16:creationId xmlns:a16="http://schemas.microsoft.com/office/drawing/2014/main" id="{CFA0138F-FA41-7BD6-5C65-1CB37F82B8ED}"/>
+                <a16:creationId xmlns:a16="http://schemas.microsoft.com/office/drawing/2014/main" id="{8443FC2A-20C6-62B3-DBA6-E301510C5D1F}"/>
               </a:ext>
             </a:extLst>
           </p:cNvPr>
@@ -15802,7 +17007,7 @@
           <p:cNvPr id="23" name="Oval 22">
             <a:extLst>
               <a:ext uri="{FF2B5EF4-FFF2-40B4-BE49-F238E27FC236}">
-                <a16:creationId xmlns:a16="http://schemas.microsoft.com/office/drawing/2014/main" id="{932B62BA-CB2D-3FC9-F398-4927AD6A61E6}"/>
+                <a16:creationId xmlns:a16="http://schemas.microsoft.com/office/drawing/2014/main" id="{1A2237E0-99EC-2121-B79D-AA75A298E594}"/>
               </a:ext>
             </a:extLst>
           </p:cNvPr>
@@ -15856,7 +17061,7 @@
           <p:cNvPr id="24" name="Oval 23">
             <a:extLst>
               <a:ext uri="{FF2B5EF4-FFF2-40B4-BE49-F238E27FC236}">
-                <a16:creationId xmlns:a16="http://schemas.microsoft.com/office/drawing/2014/main" id="{275C6045-C15E-65D9-1DF5-A16BEF6F7F5C}"/>
+                <a16:creationId xmlns:a16="http://schemas.microsoft.com/office/drawing/2014/main" id="{30BE73C9-E8DA-F7EE-376E-D30DC74EF35F}"/>
               </a:ext>
             </a:extLst>
           </p:cNvPr>
@@ -15910,7 +17115,7 @@
           <p:cNvPr id="25" name="Oval 24">
             <a:extLst>
               <a:ext uri="{FF2B5EF4-FFF2-40B4-BE49-F238E27FC236}">
-                <a16:creationId xmlns:a16="http://schemas.microsoft.com/office/drawing/2014/main" id="{AEC34E8E-9EF5-9CB0-5D88-A798738D1EA7}"/>
+                <a16:creationId xmlns:a16="http://schemas.microsoft.com/office/drawing/2014/main" id="{56C7EBAE-B50A-AC4F-0519-70EF21789BA1}"/>
               </a:ext>
             </a:extLst>
           </p:cNvPr>
@@ -15964,7 +17169,7 @@
           <p:cNvPr id="26" name="Oval 25">
             <a:extLst>
               <a:ext uri="{FF2B5EF4-FFF2-40B4-BE49-F238E27FC236}">
-                <a16:creationId xmlns:a16="http://schemas.microsoft.com/office/drawing/2014/main" id="{3CD8B31B-627B-0EA6-81E0-7739AF14BEAF}"/>
+                <a16:creationId xmlns:a16="http://schemas.microsoft.com/office/drawing/2014/main" id="{4C7CB599-AB30-CC4A-298B-88E0B1258C7F}"/>
               </a:ext>
             </a:extLst>
           </p:cNvPr>
@@ -16018,7 +17223,7 @@
           <p:cNvPr id="27" name="TextBox 26">
             <a:extLst>
               <a:ext uri="{FF2B5EF4-FFF2-40B4-BE49-F238E27FC236}">
-                <a16:creationId xmlns:a16="http://schemas.microsoft.com/office/drawing/2014/main" id="{D4AD9DB0-5657-877A-1BD4-6490499969BC}"/>
+                <a16:creationId xmlns:a16="http://schemas.microsoft.com/office/drawing/2014/main" id="{CD6DB960-2479-F8D4-7866-DC53D73E44A3}"/>
               </a:ext>
             </a:extLst>
           </p:cNvPr>
@@ -16059,7 +17264,7 @@
           <p:cNvPr id="28" name="TextBox 27">
             <a:extLst>
               <a:ext uri="{FF2B5EF4-FFF2-40B4-BE49-F238E27FC236}">
-                <a16:creationId xmlns:a16="http://schemas.microsoft.com/office/drawing/2014/main" id="{37B77BC5-2863-C39D-05AD-58450DCE9C84}"/>
+                <a16:creationId xmlns:a16="http://schemas.microsoft.com/office/drawing/2014/main" id="{96C43ABB-4911-C29D-7264-0194B092F144}"/>
               </a:ext>
             </a:extLst>
           </p:cNvPr>
@@ -16100,7 +17305,7 @@
           <p:cNvPr id="29" name="TextBox 28">
             <a:extLst>
               <a:ext uri="{FF2B5EF4-FFF2-40B4-BE49-F238E27FC236}">
-                <a16:creationId xmlns:a16="http://schemas.microsoft.com/office/drawing/2014/main" id="{7B2E41F9-C779-93B6-29CB-AF8F5945A3E8}"/>
+                <a16:creationId xmlns:a16="http://schemas.microsoft.com/office/drawing/2014/main" id="{CE869C4A-5458-DA7F-B5BD-6F72391713DA}"/>
               </a:ext>
             </a:extLst>
           </p:cNvPr>
@@ -16141,7 +17346,7 @@
           <p:cNvPr id="30" name="TextBox 29">
             <a:extLst>
               <a:ext uri="{FF2B5EF4-FFF2-40B4-BE49-F238E27FC236}">
-                <a16:creationId xmlns:a16="http://schemas.microsoft.com/office/drawing/2014/main" id="{5A6B116B-FD93-9E84-2994-5384AF2B8B49}"/>
+                <a16:creationId xmlns:a16="http://schemas.microsoft.com/office/drawing/2014/main" id="{6B9988FA-2B67-8F02-4B01-4F070B9CF59B}"/>
               </a:ext>
             </a:extLst>
           </p:cNvPr>
@@ -16182,7 +17387,7 @@
           <p:cNvPr id="31" name="TextBox 30">
             <a:extLst>
               <a:ext uri="{FF2B5EF4-FFF2-40B4-BE49-F238E27FC236}">
-                <a16:creationId xmlns:a16="http://schemas.microsoft.com/office/drawing/2014/main" id="{72B38BEC-DFB7-906B-EA45-554B787F9C6F}"/>
+                <a16:creationId xmlns:a16="http://schemas.microsoft.com/office/drawing/2014/main" id="{FB6D0A8F-8B76-3B82-01AA-5BE86E39C0F1}"/>
               </a:ext>
             </a:extLst>
           </p:cNvPr>
@@ -16223,7 +17428,7 @@
           <p:cNvPr id="32" name="TextBox 31">
             <a:extLst>
               <a:ext uri="{FF2B5EF4-FFF2-40B4-BE49-F238E27FC236}">
-                <a16:creationId xmlns:a16="http://schemas.microsoft.com/office/drawing/2014/main" id="{7E855DF7-A303-EB91-BAE2-C70541969FFA}"/>
+                <a16:creationId xmlns:a16="http://schemas.microsoft.com/office/drawing/2014/main" id="{AB9D9AD1-0C03-AD5E-2812-CF6F8E9B3C82}"/>
               </a:ext>
             </a:extLst>
           </p:cNvPr>
@@ -16264,7 +17469,7 @@
           <p:cNvPr id="33" name="TextBox 32">
             <a:extLst>
               <a:ext uri="{FF2B5EF4-FFF2-40B4-BE49-F238E27FC236}">
-                <a16:creationId xmlns:a16="http://schemas.microsoft.com/office/drawing/2014/main" id="{576E58B0-1EA3-53AD-9C8C-32EEA0B8D2A4}"/>
+                <a16:creationId xmlns:a16="http://schemas.microsoft.com/office/drawing/2014/main" id="{ACEA7F0F-ACB6-23BA-2194-1506A1DB83CF}"/>
               </a:ext>
             </a:extLst>
           </p:cNvPr>
@@ -16305,7 +17510,7 @@
           <p:cNvPr id="34" name="TextBox 33">
             <a:extLst>
               <a:ext uri="{FF2B5EF4-FFF2-40B4-BE49-F238E27FC236}">
-                <a16:creationId xmlns:a16="http://schemas.microsoft.com/office/drawing/2014/main" id="{F4719E3A-2032-C4E5-64E8-82D894128FEE}"/>
+                <a16:creationId xmlns:a16="http://schemas.microsoft.com/office/drawing/2014/main" id="{ECF1AF15-DC2D-B365-B475-DADF0F1F3F08}"/>
               </a:ext>
             </a:extLst>
           </p:cNvPr>
@@ -16346,7 +17551,7 @@
           <p:cNvPr id="35" name="TextBox 34">
             <a:extLst>
               <a:ext uri="{FF2B5EF4-FFF2-40B4-BE49-F238E27FC236}">
-                <a16:creationId xmlns:a16="http://schemas.microsoft.com/office/drawing/2014/main" id="{8ED777E8-7EB2-F7AA-77E1-46F13CCD222B}"/>
+                <a16:creationId xmlns:a16="http://schemas.microsoft.com/office/drawing/2014/main" id="{415D3795-FDDE-F237-30A9-FE0B271E38BE}"/>
               </a:ext>
             </a:extLst>
           </p:cNvPr>
@@ -16387,7 +17592,7 @@
           <p:cNvPr id="36" name="TextBox 35">
             <a:extLst>
               <a:ext uri="{FF2B5EF4-FFF2-40B4-BE49-F238E27FC236}">
-                <a16:creationId xmlns:a16="http://schemas.microsoft.com/office/drawing/2014/main" id="{FF43755C-FB6A-19A7-5BAF-BC41BE46D241}"/>
+                <a16:creationId xmlns:a16="http://schemas.microsoft.com/office/drawing/2014/main" id="{19C75DDB-96DF-69F9-09C9-09D72D9A5D7D}"/>
               </a:ext>
             </a:extLst>
           </p:cNvPr>
@@ -16428,7 +17633,7 @@
           <p:cNvPr id="37" name="Straight Connector 36">
             <a:extLst>
               <a:ext uri="{FF2B5EF4-FFF2-40B4-BE49-F238E27FC236}">
-                <a16:creationId xmlns:a16="http://schemas.microsoft.com/office/drawing/2014/main" id="{F0EA40E5-711F-DE64-C200-164C70997094}"/>
+                <a16:creationId xmlns:a16="http://schemas.microsoft.com/office/drawing/2014/main" id="{E9C0A021-8FB5-8F71-DB27-E22B08A97A21}"/>
               </a:ext>
             </a:extLst>
           </p:cNvPr>
@@ -16469,7 +17674,7 @@
           <p:cNvPr id="38" name="TextBox 37">
             <a:extLst>
               <a:ext uri="{FF2B5EF4-FFF2-40B4-BE49-F238E27FC236}">
-                <a16:creationId xmlns:a16="http://schemas.microsoft.com/office/drawing/2014/main" id="{D3806B23-EFBD-99E5-B567-98A013458A11}"/>
+                <a16:creationId xmlns:a16="http://schemas.microsoft.com/office/drawing/2014/main" id="{A9BF2FE3-29F6-C3A0-6EC5-DA8C91DB2998}"/>
               </a:ext>
             </a:extLst>
           </p:cNvPr>
@@ -16509,7 +17714,7 @@
           <p:cNvPr id="39" name="Rectangle 38">
             <a:extLst>
               <a:ext uri="{FF2B5EF4-FFF2-40B4-BE49-F238E27FC236}">
-                <a16:creationId xmlns:a16="http://schemas.microsoft.com/office/drawing/2014/main" id="{8D57915F-3D32-5011-314F-6958EE54EE5B}"/>
+                <a16:creationId xmlns:a16="http://schemas.microsoft.com/office/drawing/2014/main" id="{F3147CDC-B380-B485-998F-2AE07AA30EA1}"/>
               </a:ext>
             </a:extLst>
           </p:cNvPr>
@@ -16577,7 +17782,7 @@
           <p:cNvPr id="40" name="TextBox 39">
             <a:extLst>
               <a:ext uri="{FF2B5EF4-FFF2-40B4-BE49-F238E27FC236}">
-                <a16:creationId xmlns:a16="http://schemas.microsoft.com/office/drawing/2014/main" id="{2BCFFEB0-9F58-10C1-5A70-E1CC0904457A}"/>
+                <a16:creationId xmlns:a16="http://schemas.microsoft.com/office/drawing/2014/main" id="{CBBD2006-273D-06F6-4813-D7818791A4CB}"/>
               </a:ext>
             </a:extLst>
           </p:cNvPr>
@@ -16617,7 +17822,7 @@
           <p:cNvPr id="41" name="TextBox 40">
             <a:extLst>
               <a:ext uri="{FF2B5EF4-FFF2-40B4-BE49-F238E27FC236}">
-                <a16:creationId xmlns:a16="http://schemas.microsoft.com/office/drawing/2014/main" id="{1C7FC6B9-B192-7A60-3884-4435661ABF59}"/>
+                <a16:creationId xmlns:a16="http://schemas.microsoft.com/office/drawing/2014/main" id="{0924F790-80E2-C70B-7AFC-BC7FF79E99FF}"/>
               </a:ext>
             </a:extLst>
           </p:cNvPr>
@@ -16657,7 +17862,7 @@
           <p:cNvPr id="42" name="TextBox 41">
             <a:extLst>
               <a:ext uri="{FF2B5EF4-FFF2-40B4-BE49-F238E27FC236}">
-                <a16:creationId xmlns:a16="http://schemas.microsoft.com/office/drawing/2014/main" id="{120F2C0F-9675-4D01-C09D-1E117913A873}"/>
+                <a16:creationId xmlns:a16="http://schemas.microsoft.com/office/drawing/2014/main" id="{D7929A67-5E38-4288-5260-4C932C1FA362}"/>
               </a:ext>
             </a:extLst>
           </p:cNvPr>
@@ -16697,7 +17902,7 @@
           <p:cNvPr id="43" name="TextBox 42">
             <a:extLst>
               <a:ext uri="{FF2B5EF4-FFF2-40B4-BE49-F238E27FC236}">
-                <a16:creationId xmlns:a16="http://schemas.microsoft.com/office/drawing/2014/main" id="{CA3F7C8F-FB31-382C-F413-902E8E394839}"/>
+                <a16:creationId xmlns:a16="http://schemas.microsoft.com/office/drawing/2014/main" id="{ECC66407-F5DF-6200-3C14-9575F5F64C30}"/>
               </a:ext>
             </a:extLst>
           </p:cNvPr>
@@ -16737,7 +17942,7 @@
           <p:cNvPr id="44" name="TextBox 43">
             <a:extLst>
               <a:ext uri="{FF2B5EF4-FFF2-40B4-BE49-F238E27FC236}">
-                <a16:creationId xmlns:a16="http://schemas.microsoft.com/office/drawing/2014/main" id="{E968D6C9-6B24-21D9-66F9-791CA9451F35}"/>
+                <a16:creationId xmlns:a16="http://schemas.microsoft.com/office/drawing/2014/main" id="{777E50D7-3D30-C17D-EC22-7908E43AFDB9}"/>
               </a:ext>
             </a:extLst>
           </p:cNvPr>
@@ -16777,7 +17982,7 @@
           <p:cNvPr id="45" name="TextBox 44">
             <a:extLst>
               <a:ext uri="{FF2B5EF4-FFF2-40B4-BE49-F238E27FC236}">
-                <a16:creationId xmlns:a16="http://schemas.microsoft.com/office/drawing/2014/main" id="{D6B100CA-E5F2-D8B5-8B7C-A95DD67FD50D}"/>
+                <a16:creationId xmlns:a16="http://schemas.microsoft.com/office/drawing/2014/main" id="{BC46226B-A4C1-CF1F-5381-CA611A43EE69}"/>
               </a:ext>
             </a:extLst>
           </p:cNvPr>
@@ -16817,7 +18022,7 @@
           <p:cNvPr id="46" name="TextBox 45">
             <a:extLst>
               <a:ext uri="{FF2B5EF4-FFF2-40B4-BE49-F238E27FC236}">
-                <a16:creationId xmlns:a16="http://schemas.microsoft.com/office/drawing/2014/main" id="{3B8AD1BB-059F-3BE2-8213-0A34B070D960}"/>
+                <a16:creationId xmlns:a16="http://schemas.microsoft.com/office/drawing/2014/main" id="{72AB3A5B-9641-D814-B50D-7169EB17B043}"/>
               </a:ext>
             </a:extLst>
           </p:cNvPr>
@@ -16857,7 +18062,7 @@
           <p:cNvPr id="47" name="TextBox 46">
             <a:extLst>
               <a:ext uri="{FF2B5EF4-FFF2-40B4-BE49-F238E27FC236}">
-                <a16:creationId xmlns:a16="http://schemas.microsoft.com/office/drawing/2014/main" id="{B126AFE6-EE70-0E5E-9CBC-CC78CDFDC5A9}"/>
+                <a16:creationId xmlns:a16="http://schemas.microsoft.com/office/drawing/2014/main" id="{17FE1EB0-747F-4F75-EED0-290B05EA3053}"/>
               </a:ext>
             </a:extLst>
           </p:cNvPr>
@@ -16897,7 +18102,7 @@
           <p:cNvPr id="48" name="TextBox 47">
             <a:extLst>
               <a:ext uri="{FF2B5EF4-FFF2-40B4-BE49-F238E27FC236}">
-                <a16:creationId xmlns:a16="http://schemas.microsoft.com/office/drawing/2014/main" id="{741068C6-727E-7B57-833B-021530A76C52}"/>
+                <a16:creationId xmlns:a16="http://schemas.microsoft.com/office/drawing/2014/main" id="{E8450761-09D3-1F7B-7B20-35846D85DA81}"/>
               </a:ext>
             </a:extLst>
           </p:cNvPr>
@@ -16937,7 +18142,7 @@
           <p:cNvPr id="49" name="TextBox 48">
             <a:extLst>
               <a:ext uri="{FF2B5EF4-FFF2-40B4-BE49-F238E27FC236}">
-                <a16:creationId xmlns:a16="http://schemas.microsoft.com/office/drawing/2014/main" id="{D0D8E76C-7862-5220-F5E6-E46D6B737079}"/>
+                <a16:creationId xmlns:a16="http://schemas.microsoft.com/office/drawing/2014/main" id="{1A0AB580-5A4B-F239-FF09-2D7187000FC4}"/>
               </a:ext>
             </a:extLst>
           </p:cNvPr>
@@ -16976,7 +18181,7 @@
     </p:spTree>
     <p:extLst>
       <p:ext uri="{BB962C8B-B14F-4D97-AF65-F5344CB8AC3E}">
-        <p14:creationId xmlns:p14="http://schemas.microsoft.com/office/powerpoint/2010/main" val="3385916892"/>
+        <p14:creationId xmlns:p14="http://schemas.microsoft.com/office/powerpoint/2010/main" val="3243083248"/>
       </p:ext>
     </p:extLst>
   </p:cSld>
@@ -17016,7 +18221,7 @@
           <p:cNvPr id="2" name="Title 1">
             <a:extLst>
               <a:ext uri="{FF2B5EF4-FFF2-40B4-BE49-F238E27FC236}">
-                <a16:creationId xmlns:a16="http://schemas.microsoft.com/office/drawing/2014/main" id="{A8E38D5A-7B7D-04D4-BD42-8B03B45CF451}"/>
+                <a16:creationId xmlns:a16="http://schemas.microsoft.com/office/drawing/2014/main" id="{BFFB98F8-1895-9D16-1BBD-7D357ABFDE85}"/>
               </a:ext>
             </a:extLst>
           </p:cNvPr>
@@ -17056,7 +18261,7 @@
           <p:cNvPr id="3" name="TextBox 2">
             <a:extLst>
               <a:ext uri="{FF2B5EF4-FFF2-40B4-BE49-F238E27FC236}">
-                <a16:creationId xmlns:a16="http://schemas.microsoft.com/office/drawing/2014/main" id="{AAB0FA5D-F96A-66F7-D00F-F5FD54074035}"/>
+                <a16:creationId xmlns:a16="http://schemas.microsoft.com/office/drawing/2014/main" id="{F256FBD9-0B68-FE66-54CF-FCA42A82357D}"/>
               </a:ext>
             </a:extLst>
           </p:cNvPr>
@@ -17096,7 +18301,7 @@
           <p:cNvPr id="4" name="TextBox 3">
             <a:extLst>
               <a:ext uri="{FF2B5EF4-FFF2-40B4-BE49-F238E27FC236}">
-                <a16:creationId xmlns:a16="http://schemas.microsoft.com/office/drawing/2014/main" id="{D8CB509C-33E7-04D3-48ED-72E60AF7BA5D}"/>
+                <a16:creationId xmlns:a16="http://schemas.microsoft.com/office/drawing/2014/main" id="{08461669-AD0E-89E3-FB30-1E75CFAA5353}"/>
               </a:ext>
             </a:extLst>
           </p:cNvPr>
@@ -17136,7 +18341,7 @@
           <p:cNvPr id="5" name="TextBox 4">
             <a:extLst>
               <a:ext uri="{FF2B5EF4-FFF2-40B4-BE49-F238E27FC236}">
-                <a16:creationId xmlns:a16="http://schemas.microsoft.com/office/drawing/2014/main" id="{12F29104-E007-8504-AA3D-CC94BA4BF219}"/>
+                <a16:creationId xmlns:a16="http://schemas.microsoft.com/office/drawing/2014/main" id="{8849FE18-E563-AF1D-0014-392B2A159DD6}"/>
               </a:ext>
             </a:extLst>
           </p:cNvPr>
@@ -17176,7 +18381,7 @@
           <p:cNvPr id="6" name="TextBox 5">
             <a:extLst>
               <a:ext uri="{FF2B5EF4-FFF2-40B4-BE49-F238E27FC236}">
-                <a16:creationId xmlns:a16="http://schemas.microsoft.com/office/drawing/2014/main" id="{EC6E40C1-2898-7A04-6F4F-39197BA87EC9}"/>
+                <a16:creationId xmlns:a16="http://schemas.microsoft.com/office/drawing/2014/main" id="{6BCB5948-980C-1518-CC94-85168220A363}"/>
               </a:ext>
             </a:extLst>
           </p:cNvPr>
@@ -17216,7 +18421,7 @@
           <p:cNvPr id="7" name="TextBox 6">
             <a:extLst>
               <a:ext uri="{FF2B5EF4-FFF2-40B4-BE49-F238E27FC236}">
-                <a16:creationId xmlns:a16="http://schemas.microsoft.com/office/drawing/2014/main" id="{CF41CE0F-D1F5-F69C-BA26-13E76DCB7B84}"/>
+                <a16:creationId xmlns:a16="http://schemas.microsoft.com/office/drawing/2014/main" id="{09660EE1-C5B4-D870-4FA6-B8F49798A29A}"/>
               </a:ext>
             </a:extLst>
           </p:cNvPr>
@@ -17256,7 +18461,7 @@
           <p:cNvPr id="8" name="TextBox 7">
             <a:extLst>
               <a:ext uri="{FF2B5EF4-FFF2-40B4-BE49-F238E27FC236}">
-                <a16:creationId xmlns:a16="http://schemas.microsoft.com/office/drawing/2014/main" id="{F3AF10E9-A7FF-21C0-CB0F-656B6D057B21}"/>
+                <a16:creationId xmlns:a16="http://schemas.microsoft.com/office/drawing/2014/main" id="{418C6ABA-9071-6B84-A644-786F327BE454}"/>
               </a:ext>
             </a:extLst>
           </p:cNvPr>
@@ -17296,7 +18501,7 @@
           <p:cNvPr id="9" name="TextBox 8">
             <a:extLst>
               <a:ext uri="{FF2B5EF4-FFF2-40B4-BE49-F238E27FC236}">
-                <a16:creationId xmlns:a16="http://schemas.microsoft.com/office/drawing/2014/main" id="{9C5C061F-D0D3-2105-3D7F-0C08BF3DDCE3}"/>
+                <a16:creationId xmlns:a16="http://schemas.microsoft.com/office/drawing/2014/main" id="{0DC6BA19-7E15-2890-E33D-80D19B0F939E}"/>
               </a:ext>
             </a:extLst>
           </p:cNvPr>
@@ -17336,7 +18541,7 @@
           <p:cNvPr id="11" name="Picture 10" descr="The trainee allocation page: warship crew seats on the left, trainee pool with competency bars on the right">
             <a:extLst>
               <a:ext uri="{FF2B5EF4-FFF2-40B4-BE49-F238E27FC236}">
-                <a16:creationId xmlns:a16="http://schemas.microsoft.com/office/drawing/2014/main" id="{46FE89EB-22FD-3511-52A4-569888CADBA0}"/>
+                <a16:creationId xmlns:a16="http://schemas.microsoft.com/office/drawing/2014/main" id="{808C26E1-E5BB-5CFF-E827-73EF0D3CF715}"/>
               </a:ext>
             </a:extLst>
           </p:cNvPr>
@@ -17377,7 +18582,7 @@
           <p:cNvPr id="12" name="TextBox 11">
             <a:extLst>
               <a:ext uri="{FF2B5EF4-FFF2-40B4-BE49-F238E27FC236}">
-                <a16:creationId xmlns:a16="http://schemas.microsoft.com/office/drawing/2014/main" id="{2A40DEE6-46F1-03AA-5644-77652D63639D}"/>
+                <a16:creationId xmlns:a16="http://schemas.microsoft.com/office/drawing/2014/main" id="{B7142C5C-1F2D-92D5-19EA-53BF4B3938E3}"/>
               </a:ext>
             </a:extLst>
           </p:cNvPr>
@@ -17417,7 +18622,7 @@
           <p:cNvPr id="13" name="TextBox 12">
             <a:extLst>
               <a:ext uri="{FF2B5EF4-FFF2-40B4-BE49-F238E27FC236}">
-                <a16:creationId xmlns:a16="http://schemas.microsoft.com/office/drawing/2014/main" id="{3225E686-C9C5-9B7B-C248-0675C05FC675}"/>
+                <a16:creationId xmlns:a16="http://schemas.microsoft.com/office/drawing/2014/main" id="{777B472A-E42D-1887-2BC4-7867F7A72A22}"/>
               </a:ext>
             </a:extLst>
           </p:cNvPr>
@@ -17456,7 +18661,7 @@
     </p:spTree>
     <p:extLst>
       <p:ext uri="{BB962C8B-B14F-4D97-AF65-F5344CB8AC3E}">
-        <p14:creationId xmlns:p14="http://schemas.microsoft.com/office/powerpoint/2010/main" val="3300804720"/>
+        <p14:creationId xmlns:p14="http://schemas.microsoft.com/office/powerpoint/2010/main" val="2314289126"/>
       </p:ext>
     </p:extLst>
   </p:cSld>
@@ -17496,7 +18701,7 @@
           <p:cNvPr id="2" name="Title 1">
             <a:extLst>
               <a:ext uri="{FF2B5EF4-FFF2-40B4-BE49-F238E27FC236}">
-                <a16:creationId xmlns:a16="http://schemas.microsoft.com/office/drawing/2014/main" id="{7118DAAB-9747-BDDA-FF00-A60502A7B8A5}"/>
+                <a16:creationId xmlns:a16="http://schemas.microsoft.com/office/drawing/2014/main" id="{65C27C56-1C5F-9D54-02D9-21690CBB670F}"/>
               </a:ext>
             </a:extLst>
           </p:cNvPr>
@@ -17536,7 +18741,7 @@
           <p:cNvPr id="3" name="TextBox 2">
             <a:extLst>
               <a:ext uri="{FF2B5EF4-FFF2-40B4-BE49-F238E27FC236}">
-                <a16:creationId xmlns:a16="http://schemas.microsoft.com/office/drawing/2014/main" id="{FCACC1A4-7156-1837-550B-F33C3D4ABABB}"/>
+                <a16:creationId xmlns:a16="http://schemas.microsoft.com/office/drawing/2014/main" id="{D012E924-8CD8-02D6-CD42-D172204E0034}"/>
               </a:ext>
             </a:extLst>
           </p:cNvPr>
@@ -17576,7 +18781,7 @@
           <p:cNvPr id="5" name="Picture 4" descr="The runtime: a strait transit map with red, black, pirate and neutral contacts, and the contact list beside it">
             <a:extLst>
               <a:ext uri="{FF2B5EF4-FFF2-40B4-BE49-F238E27FC236}">
-                <a16:creationId xmlns:a16="http://schemas.microsoft.com/office/drawing/2014/main" id="{9A56ED90-2A6E-CEE9-0393-684E0F920F3D}"/>
+                <a16:creationId xmlns:a16="http://schemas.microsoft.com/office/drawing/2014/main" id="{1F70B05B-D135-1BFB-F52A-8299FCE36C04}"/>
               </a:ext>
             </a:extLst>
           </p:cNvPr>
@@ -17617,7 +18822,7 @@
           <p:cNvPr id="6" name="TextBox 5">
             <a:extLst>
               <a:ext uri="{FF2B5EF4-FFF2-40B4-BE49-F238E27FC236}">
-                <a16:creationId xmlns:a16="http://schemas.microsoft.com/office/drawing/2014/main" id="{3F6DCA43-2057-8A17-3C67-BD1358E2FD5E}"/>
+                <a16:creationId xmlns:a16="http://schemas.microsoft.com/office/drawing/2014/main" id="{E1365570-DCE4-EAD7-4FEA-202D70347701}"/>
               </a:ext>
             </a:extLst>
           </p:cNvPr>
@@ -17657,7 +18862,7 @@
           <p:cNvPr id="7" name="TextBox 6">
             <a:extLst>
               <a:ext uri="{FF2B5EF4-FFF2-40B4-BE49-F238E27FC236}">
-                <a16:creationId xmlns:a16="http://schemas.microsoft.com/office/drawing/2014/main" id="{4C0DD05B-A895-58B5-623F-C67D5B252575}"/>
+                <a16:creationId xmlns:a16="http://schemas.microsoft.com/office/drawing/2014/main" id="{54C1526E-B753-B79C-AA21-9B88F269E16F}"/>
               </a:ext>
             </a:extLst>
           </p:cNvPr>
@@ -17697,7 +18902,7 @@
           <p:cNvPr id="8" name="TextBox 7">
             <a:extLst>
               <a:ext uri="{FF2B5EF4-FFF2-40B4-BE49-F238E27FC236}">
-                <a16:creationId xmlns:a16="http://schemas.microsoft.com/office/drawing/2014/main" id="{E070DD24-1951-3CBC-7078-DDB320CEDAD2}"/>
+                <a16:creationId xmlns:a16="http://schemas.microsoft.com/office/drawing/2014/main" id="{5C9C758C-14F3-F6DF-30F4-58CB6DA51A0E}"/>
               </a:ext>
             </a:extLst>
           </p:cNvPr>
@@ -17737,7 +18942,7 @@
           <p:cNvPr id="9" name="TextBox 8">
             <a:extLst>
               <a:ext uri="{FF2B5EF4-FFF2-40B4-BE49-F238E27FC236}">
-                <a16:creationId xmlns:a16="http://schemas.microsoft.com/office/drawing/2014/main" id="{0E3E9DB0-83D4-100D-2CA5-BBF110796071}"/>
+                <a16:creationId xmlns:a16="http://schemas.microsoft.com/office/drawing/2014/main" id="{B7FF7C8F-A736-5B03-3854-56D0270375EC}"/>
               </a:ext>
             </a:extLst>
           </p:cNvPr>
@@ -17777,7 +18982,7 @@
           <p:cNvPr id="10" name="TextBox 9">
             <a:extLst>
               <a:ext uri="{FF2B5EF4-FFF2-40B4-BE49-F238E27FC236}">
-                <a16:creationId xmlns:a16="http://schemas.microsoft.com/office/drawing/2014/main" id="{55A3E8F0-F241-5CFD-744C-51361D3AE02E}"/>
+                <a16:creationId xmlns:a16="http://schemas.microsoft.com/office/drawing/2014/main" id="{25CD6E48-DA85-02EE-B5C0-E4711373DED7}"/>
               </a:ext>
             </a:extLst>
           </p:cNvPr>
@@ -17817,7 +19022,7 @@
           <p:cNvPr id="11" name="TextBox 10">
             <a:extLst>
               <a:ext uri="{FF2B5EF4-FFF2-40B4-BE49-F238E27FC236}">
-                <a16:creationId xmlns:a16="http://schemas.microsoft.com/office/drawing/2014/main" id="{B2D1A342-0C2D-905E-9F82-6741D48A2F02}"/>
+                <a16:creationId xmlns:a16="http://schemas.microsoft.com/office/drawing/2014/main" id="{848F2634-1637-E998-CCE1-9A713D0B3A0D}"/>
               </a:ext>
             </a:extLst>
           </p:cNvPr>
@@ -17857,7 +19062,7 @@
           <p:cNvPr id="12" name="TextBox 11">
             <a:extLst>
               <a:ext uri="{FF2B5EF4-FFF2-40B4-BE49-F238E27FC236}">
-                <a16:creationId xmlns:a16="http://schemas.microsoft.com/office/drawing/2014/main" id="{80C704B2-B332-52F5-E22C-08125CBFFA1D}"/>
+                <a16:creationId xmlns:a16="http://schemas.microsoft.com/office/drawing/2014/main" id="{78CB1E2D-4C08-2F55-BCFC-801A6D6E23CA}"/>
               </a:ext>
             </a:extLst>
           </p:cNvPr>
@@ -17897,7 +19102,7 @@
           <p:cNvPr id="13" name="TextBox 12">
             <a:extLst>
               <a:ext uri="{FF2B5EF4-FFF2-40B4-BE49-F238E27FC236}">
-                <a16:creationId xmlns:a16="http://schemas.microsoft.com/office/drawing/2014/main" id="{5BF695D6-DC65-0B8F-BBE0-4FF48D4335D6}"/>
+                <a16:creationId xmlns:a16="http://schemas.microsoft.com/office/drawing/2014/main" id="{4BF266BD-5F6B-51C9-DE57-F7006A0F3DD2}"/>
               </a:ext>
             </a:extLst>
           </p:cNvPr>
@@ -17936,7 +19141,7 @@
     </p:spTree>
     <p:extLst>
       <p:ext uri="{BB962C8B-B14F-4D97-AF65-F5344CB8AC3E}">
-        <p14:creationId xmlns:p14="http://schemas.microsoft.com/office/powerpoint/2010/main" val="2704193734"/>
+        <p14:creationId xmlns:p14="http://schemas.microsoft.com/office/powerpoint/2010/main" val="1751531465"/>
       </p:ext>
     </p:extLst>
   </p:cSld>
@@ -17976,7 +19181,7 @@
           <p:cNvPr id="2" name="Title 1">
             <a:extLst>
               <a:ext uri="{FF2B5EF4-FFF2-40B4-BE49-F238E27FC236}">
-                <a16:creationId xmlns:a16="http://schemas.microsoft.com/office/drawing/2014/main" id="{4C6781F0-1591-6913-9763-1CAE0C6BBB70}"/>
+                <a16:creationId xmlns:a16="http://schemas.microsoft.com/office/drawing/2014/main" id="{2774D029-1B33-4F02-5E31-43A0FA717E2F}"/>
               </a:ext>
             </a:extLst>
           </p:cNvPr>
@@ -18016,7 +19221,7 @@
           <p:cNvPr id="3" name="TextBox 2">
             <a:extLst>
               <a:ext uri="{FF2B5EF4-FFF2-40B4-BE49-F238E27FC236}">
-                <a16:creationId xmlns:a16="http://schemas.microsoft.com/office/drawing/2014/main" id="{87B79E2E-0D6D-EF06-496D-C57342965C49}"/>
+                <a16:creationId xmlns:a16="http://schemas.microsoft.com/office/drawing/2014/main" id="{9C312DCB-F0C8-AA9D-8A21-296DF95C528A}"/>
               </a:ext>
             </a:extLst>
           </p:cNvPr>
@@ -18056,7 +19261,7 @@
           <p:cNvPr id="5" name="Picture 4" descr="The reasoning panel during a run: a live raise of the ignored-warning weight from 2.2 to 2.5, with the evidence events and the reason">
             <a:extLst>
               <a:ext uri="{FF2B5EF4-FFF2-40B4-BE49-F238E27FC236}">
-                <a16:creationId xmlns:a16="http://schemas.microsoft.com/office/drawing/2014/main" id="{8B7393A8-D92A-FE95-E327-41A54BFADD65}"/>
+                <a16:creationId xmlns:a16="http://schemas.microsoft.com/office/drawing/2014/main" id="{7778A783-4CBB-E0FE-6E9D-63012E2B5A3D}"/>
               </a:ext>
             </a:extLst>
           </p:cNvPr>
@@ -18097,7 +19302,7 @@
           <p:cNvPr id="6" name="TextBox 5">
             <a:extLst>
               <a:ext uri="{FF2B5EF4-FFF2-40B4-BE49-F238E27FC236}">
-                <a16:creationId xmlns:a16="http://schemas.microsoft.com/office/drawing/2014/main" id="{9129C602-4C61-2774-C178-8812FA8181AD}"/>
+                <a16:creationId xmlns:a16="http://schemas.microsoft.com/office/drawing/2014/main" id="{7FE3615A-E22B-2C87-10CE-0FE35CF09D5E}"/>
               </a:ext>
             </a:extLst>
           </p:cNvPr>
@@ -18137,7 +19342,7 @@
           <p:cNvPr id="7" name="Rectangle: Rounded Corners 6">
             <a:extLst>
               <a:ext uri="{FF2B5EF4-FFF2-40B4-BE49-F238E27FC236}">
-                <a16:creationId xmlns:a16="http://schemas.microsoft.com/office/drawing/2014/main" id="{C897BC90-81F0-9093-EC7B-013B9A690B10}"/>
+                <a16:creationId xmlns:a16="http://schemas.microsoft.com/office/drawing/2014/main" id="{07B8684D-5D33-4A39-6FCE-15CBFB2491AD}"/>
               </a:ext>
             </a:extLst>
           </p:cNvPr>
@@ -18193,7 +19398,7 @@
           <p:cNvPr id="8" name="TextBox 7">
             <a:extLst>
               <a:ext uri="{FF2B5EF4-FFF2-40B4-BE49-F238E27FC236}">
-                <a16:creationId xmlns:a16="http://schemas.microsoft.com/office/drawing/2014/main" id="{A37A86B1-C122-CEB1-0F8E-D77D92437AF7}"/>
+                <a16:creationId xmlns:a16="http://schemas.microsoft.com/office/drawing/2014/main" id="{61BFF4E6-0DED-60EF-2836-628395C54223}"/>
               </a:ext>
             </a:extLst>
           </p:cNvPr>
@@ -18233,7 +19438,7 @@
           <p:cNvPr id="9" name="TextBox 8">
             <a:extLst>
               <a:ext uri="{FF2B5EF4-FFF2-40B4-BE49-F238E27FC236}">
-                <a16:creationId xmlns:a16="http://schemas.microsoft.com/office/drawing/2014/main" id="{C88B44E4-01A5-B833-1B71-450045008609}"/>
+                <a16:creationId xmlns:a16="http://schemas.microsoft.com/office/drawing/2014/main" id="{C25ADEAD-F761-3A22-BA02-7B7CBCADFF84}"/>
               </a:ext>
             </a:extLst>
           </p:cNvPr>
@@ -18273,7 +19478,7 @@
           <p:cNvPr id="10" name="Rectangle: Rounded Corners 9">
             <a:extLst>
               <a:ext uri="{FF2B5EF4-FFF2-40B4-BE49-F238E27FC236}">
-                <a16:creationId xmlns:a16="http://schemas.microsoft.com/office/drawing/2014/main" id="{63125051-96E8-F35D-6F8C-3CE9913F56E6}"/>
+                <a16:creationId xmlns:a16="http://schemas.microsoft.com/office/drawing/2014/main" id="{3A7EBDA7-847D-3452-6719-FFB79B6936E5}"/>
               </a:ext>
             </a:extLst>
           </p:cNvPr>
@@ -18329,7 +19534,7 @@
           <p:cNvPr id="11" name="TextBox 10">
             <a:extLst>
               <a:ext uri="{FF2B5EF4-FFF2-40B4-BE49-F238E27FC236}">
-                <a16:creationId xmlns:a16="http://schemas.microsoft.com/office/drawing/2014/main" id="{E6F35DB0-B882-F887-C655-2ADF24157CA4}"/>
+                <a16:creationId xmlns:a16="http://schemas.microsoft.com/office/drawing/2014/main" id="{5779B930-BC77-B7F4-F450-C8A67AF5CE0E}"/>
               </a:ext>
             </a:extLst>
           </p:cNvPr>
@@ -18369,7 +19574,7 @@
           <p:cNvPr id="12" name="TextBox 11">
             <a:extLst>
               <a:ext uri="{FF2B5EF4-FFF2-40B4-BE49-F238E27FC236}">
-                <a16:creationId xmlns:a16="http://schemas.microsoft.com/office/drawing/2014/main" id="{EC623D41-03FF-5366-CE12-99E6C395302A}"/>
+                <a16:creationId xmlns:a16="http://schemas.microsoft.com/office/drawing/2014/main" id="{7DD282FA-603A-970C-78AD-19E0A2E35B9A}"/>
               </a:ext>
             </a:extLst>
           </p:cNvPr>
@@ -18409,7 +19614,7 @@
           <p:cNvPr id="13" name="Rectangle: Rounded Corners 12">
             <a:extLst>
               <a:ext uri="{FF2B5EF4-FFF2-40B4-BE49-F238E27FC236}">
-                <a16:creationId xmlns:a16="http://schemas.microsoft.com/office/drawing/2014/main" id="{1EB8D6C8-E833-A3D2-1C78-65F81CDE36A7}"/>
+                <a16:creationId xmlns:a16="http://schemas.microsoft.com/office/drawing/2014/main" id="{C991A52F-A871-3DE7-D9D5-DE0E7F594605}"/>
               </a:ext>
             </a:extLst>
           </p:cNvPr>
@@ -18465,7 +19670,7 @@
           <p:cNvPr id="14" name="TextBox 13">
             <a:extLst>
               <a:ext uri="{FF2B5EF4-FFF2-40B4-BE49-F238E27FC236}">
-                <a16:creationId xmlns:a16="http://schemas.microsoft.com/office/drawing/2014/main" id="{2D10843D-DD96-3133-B9DD-5B002C7CAB5B}"/>
+                <a16:creationId xmlns:a16="http://schemas.microsoft.com/office/drawing/2014/main" id="{4B50AB42-985F-2B6A-B178-6278AEF1D3A7}"/>
               </a:ext>
             </a:extLst>
           </p:cNvPr>
@@ -18505,7 +19710,7 @@
           <p:cNvPr id="15" name="TextBox 14">
             <a:extLst>
               <a:ext uri="{FF2B5EF4-FFF2-40B4-BE49-F238E27FC236}">
-                <a16:creationId xmlns:a16="http://schemas.microsoft.com/office/drawing/2014/main" id="{35D6C599-A532-3490-889F-86292385AE97}"/>
+                <a16:creationId xmlns:a16="http://schemas.microsoft.com/office/drawing/2014/main" id="{CEEC0E27-490C-49D1-E5B7-7B275F3CE36E}"/>
               </a:ext>
             </a:extLst>
           </p:cNvPr>
@@ -18545,7 +19750,7 @@
           <p:cNvPr id="16" name="TextBox 15">
             <a:extLst>
               <a:ext uri="{FF2B5EF4-FFF2-40B4-BE49-F238E27FC236}">
-                <a16:creationId xmlns:a16="http://schemas.microsoft.com/office/drawing/2014/main" id="{4392888C-8695-F9CB-3948-08A5B7265164}"/>
+                <a16:creationId xmlns:a16="http://schemas.microsoft.com/office/drawing/2014/main" id="{C7373ADC-C49C-2D7C-9EBD-B1B751C280F8}"/>
               </a:ext>
             </a:extLst>
           </p:cNvPr>
@@ -18646,7 +19851,7 @@
           <p:cNvPr id="17" name="TextBox 16">
             <a:extLst>
               <a:ext uri="{FF2B5EF4-FFF2-40B4-BE49-F238E27FC236}">
-                <a16:creationId xmlns:a16="http://schemas.microsoft.com/office/drawing/2014/main" id="{29721858-4819-1D96-DB62-F9307DAE8602}"/>
+                <a16:creationId xmlns:a16="http://schemas.microsoft.com/office/drawing/2014/main" id="{A297E306-F1DE-88E3-E6CD-7335770532AD}"/>
               </a:ext>
             </a:extLst>
           </p:cNvPr>
@@ -18686,7 +19891,7 @@
           <p:cNvPr id="18" name="TextBox 17">
             <a:extLst>
               <a:ext uri="{FF2B5EF4-FFF2-40B4-BE49-F238E27FC236}">
-                <a16:creationId xmlns:a16="http://schemas.microsoft.com/office/drawing/2014/main" id="{B2DB2F56-AB33-32B5-816E-24F2F3921152}"/>
+                <a16:creationId xmlns:a16="http://schemas.microsoft.com/office/drawing/2014/main" id="{0E2ED371-252D-6ACF-215F-8578D2E2EB2A}"/>
               </a:ext>
             </a:extLst>
           </p:cNvPr>
@@ -18725,7 +19930,7 @@
     </p:spTree>
     <p:extLst>
       <p:ext uri="{BB962C8B-B14F-4D97-AF65-F5344CB8AC3E}">
-        <p14:creationId xmlns:p14="http://schemas.microsoft.com/office/powerpoint/2010/main" val="2656982467"/>
+        <p14:creationId xmlns:p14="http://schemas.microsoft.com/office/powerpoint/2010/main" val="1769571610"/>
       </p:ext>
     </p:extLst>
   </p:cSld>

--- a/cgf-demo/docs/pitch/Adaptive-CGF-Trainer.pptx
+++ b/cgf-demo/docs/pitch/Adaptive-CGF-Trainer.pptx
@@ -124,6 +124,11 @@
       </a:defRPr>
     </a:lvl9pPr>
   </p:defaultTextStyle>
+  <p:extLst>
+    <p:ext uri="{EFAFB233-063F-42B5-8137-9DF3F51BA10A}">
+      <p15:sldGuideLst xmlns:p15="http://schemas.microsoft.com/office/powerpoint/2012/main"/>
+    </p:ext>
+  </p:extLst>
 </p:presentation>
 </file>
 
@@ -10934,7 +10939,7 @@
         </p:nvGraphicFramePr>
         <p:xfrm>
           <a:off x="5486400" y="1651000"/>
-          <a:ext cx="6096000" cy="2921000"/>
+          <a:ext cx="6096000" cy="2667000"/>
         </p:xfrm>
         <a:graphic>
           <a:graphicData uri="http://schemas.openxmlformats.org/drawingml/2006/table">
@@ -11213,7 +11218,7 @@
                     <a:lstStyle/>
                     <a:p>
                       <a:r>
-                        <a:rPr lang="en-SG" sz="1900" b="1">
+                        <a:rPr lang="en-SG" sz="1900" b="1" dirty="0">
                           <a:solidFill>
                             <a:srgbClr val="EBDFFF"/>
                           </a:solidFill>
@@ -11308,7 +11313,7 @@
                     <a:lstStyle/>
                     <a:p>
                       <a:r>
-                        <a:rPr lang="en-SG" sz="1900" b="1">
+                        <a:rPr lang="en-SG" sz="1900" b="1" dirty="0">
                           <a:solidFill>
                             <a:srgbClr val="EBDFFF"/>
                           </a:solidFill>
@@ -11330,7 +11335,7 @@
                     <a:lstStyle/>
                     <a:p>
                       <a:r>
-                        <a:rPr lang="en-SG" sz="1900" b="1">
+                        <a:rPr lang="en-SG" sz="1900" b="1" dirty="0">
                           <a:solidFill>
                             <a:srgbClr val="EBDFFF"/>
                           </a:solidFill>
@@ -11385,13 +11390,33 @@
           <a:lstStyle/>
           <a:p>
             <a:r>
-              <a:rPr lang="en-SG" sz="1400">
-                <a:solidFill>
-                  <a:srgbClr val="93ABC6"/>
+              <a:rPr lang="en-SG" sz="2400" b="1" dirty="0">
+                <a:solidFill>
+                  <a:srgbClr val="EBDFFF"/>
                 </a:solidFill>
                 <a:latin typeface="Segoe UI" panose="020B0502040204020203" pitchFamily="34" charset="0"/>
               </a:rPr>
-              <a:t>The saving comes from three drivers: fewer simulator sessions (S$1,500 each), fewer instructor hours (2 per session), and a shorter time to proficiency. Remedial retraining is not modelled, so it is upside. Every figure here is illustrative: the division’s numbers replace the placeholders and the grid follows.</a:t>
+              <a:t>savings</a:t>
+            </a:r>
+          </a:p>
+          <a:p>
+            <a:pPr algn="ctr"/>
+            <a:br>
+              <a:rPr lang="en-SG" sz="900" b="1" dirty="0">
+                <a:solidFill>
+                  <a:srgbClr val="EBDFFF"/>
+                </a:solidFill>
+                <a:latin typeface="Segoe UI" panose="020B0502040204020203" pitchFamily="34" charset="0"/>
+              </a:rPr>
+            </a:br>
+            <a:r>
+              <a:rPr lang="en-SG" sz="4400" b="1" dirty="0">
+                <a:solidFill>
+                  <a:srgbClr val="92D050"/>
+                </a:solidFill>
+                <a:latin typeface="Segoe UI" panose="020B0502040204020203" pitchFamily="34" charset="0"/>
+              </a:rPr>
+              <a:t>S$1.8M / trainer / year</a:t>
             </a:r>
           </a:p>
         </p:txBody>
@@ -11962,14 +11987,14 @@
           <p:nvPr>
             <p:extLst>
               <p:ext uri="{D42A27DB-BD31-4B8C-83A1-F6EECF244321}">
-                <p14:modId xmlns:p14="http://schemas.microsoft.com/office/powerpoint/2010/main" val="414170054"/>
+                <p14:modId xmlns:p14="http://schemas.microsoft.com/office/powerpoint/2010/main" val="494563075"/>
               </p:ext>
             </p:extLst>
           </p:nvPr>
         </p:nvGraphicFramePr>
         <p:xfrm>
           <a:off x="609600" y="3759200"/>
-          <a:ext cx="10972800" cy="1905000"/>
+          <a:ext cx="10972927" cy="1879600"/>
         </p:xfrm>
         <a:graphic>
           <a:graphicData uri="http://schemas.openxmlformats.org/drawingml/2006/table">
@@ -12153,7 +12178,7 @@
                     <a:lstStyle/>
                     <a:p>
                       <a:r>
-                        <a:rPr lang="en-SG" sz="1600" b="1">
+                        <a:rPr lang="en-SG" sz="1600" b="1" dirty="0">
                           <a:solidFill>
                             <a:srgbClr val="EBDFFF"/>
                           </a:solidFill>
@@ -12321,7 +12346,7 @@
                     <a:lstStyle/>
                     <a:p>
                       <a:r>
-                        <a:rPr lang="en-SG" sz="1600" b="1">
+                        <a:rPr lang="en-SG" sz="1600" b="1" dirty="0">
                           <a:solidFill>
                             <a:srgbClr val="EBDFFF"/>
                           </a:solidFill>
@@ -12365,7 +12390,7 @@
                     <a:lstStyle/>
                     <a:p>
                       <a:r>
-                        <a:rPr lang="en-SG" sz="1600" b="1">
+                        <a:rPr lang="en-SG" sz="1600" b="1" dirty="0">
                           <a:solidFill>
                             <a:srgbClr val="EBDFFF"/>
                           </a:solidFill>
@@ -12737,13 +12762,47 @@
           <a:lstStyle/>
           <a:p>
             <a:r>
-              <a:rPr lang="en-SG" sz="4000" b="1">
+              <a:rPr lang="en-SG" sz="4000" b="1" dirty="0">
                 <a:solidFill>
                   <a:srgbClr val="F7FAFD"/>
                 </a:solidFill>
                 <a:latin typeface="Segoe UI" panose="020B0502040204020203" pitchFamily="34" charset="0"/>
               </a:rPr>
-              <a:t>One instructor, many trainees, one scripted enemy</a:t>
+              <a:t>One instructor</a:t>
+            </a:r>
+            <a:br>
+              <a:rPr lang="en-SG" sz="4000" b="1" dirty="0">
+                <a:solidFill>
+                  <a:srgbClr val="F7FAFD"/>
+                </a:solidFill>
+                <a:latin typeface="Segoe UI" panose="020B0502040204020203" pitchFamily="34" charset="0"/>
+              </a:rPr>
+            </a:br>
+            <a:r>
+              <a:rPr lang="en-SG" sz="4000" b="1" dirty="0">
+                <a:solidFill>
+                  <a:srgbClr val="F7FAFD"/>
+                </a:solidFill>
+                <a:latin typeface="Segoe UI" panose="020B0502040204020203" pitchFamily="34" charset="0"/>
+              </a:rPr>
+              <a:t>many trainees</a:t>
+            </a:r>
+            <a:br>
+              <a:rPr lang="en-SG" sz="4000" b="1" dirty="0">
+                <a:solidFill>
+                  <a:srgbClr val="F7FAFD"/>
+                </a:solidFill>
+                <a:latin typeface="Segoe UI" panose="020B0502040204020203" pitchFamily="34" charset="0"/>
+              </a:rPr>
+            </a:br>
+            <a:r>
+              <a:rPr lang="en-SG" sz="4000" b="1" dirty="0">
+                <a:solidFill>
+                  <a:srgbClr val="F7FAFD"/>
+                </a:solidFill>
+                <a:latin typeface="Segoe UI" panose="020B0502040204020203" pitchFamily="34" charset="0"/>
+              </a:rPr>
+              <a:t>one scripted enemy</a:t>
             </a:r>
           </a:p>
         </p:txBody>
@@ -12802,7 +12861,7 @@
         </p:nvSpPr>
         <p:spPr>
           <a:xfrm>
-            <a:off x="609600" y="2413000"/>
+            <a:off x="609600" y="2865285"/>
             <a:ext cx="3454400" cy="3175000"/>
           </a:xfrm>
           <a:prstGeom prst="roundRect">
@@ -12858,7 +12917,7 @@
         </p:nvSpPr>
         <p:spPr>
           <a:xfrm>
-            <a:off x="863600" y="2641600"/>
+            <a:off x="863600" y="3093885"/>
             <a:ext cx="2946400" cy="254000"/>
           </a:xfrm>
           <a:prstGeom prst="rect">
@@ -12898,7 +12957,7 @@
         </p:nvSpPr>
         <p:spPr>
           <a:xfrm>
-            <a:off x="863600" y="2971800"/>
+            <a:off x="863600" y="3424085"/>
             <a:ext cx="2946400" cy="762000"/>
           </a:xfrm>
           <a:prstGeom prst="rect">
@@ -12938,7 +12997,7 @@
         </p:nvSpPr>
         <p:spPr>
           <a:xfrm>
-            <a:off x="863600" y="3733800"/>
+            <a:off x="863600" y="4186085"/>
             <a:ext cx="2946400" cy="1701800"/>
           </a:xfrm>
           <a:prstGeom prst="rect">
@@ -12978,7 +13037,7 @@
         </p:nvSpPr>
         <p:spPr>
           <a:xfrm>
-            <a:off x="4368800" y="2413000"/>
+            <a:off x="4368800" y="2865285"/>
             <a:ext cx="3454400" cy="3175000"/>
           </a:xfrm>
           <a:prstGeom prst="roundRect">
@@ -13034,7 +13093,7 @@
         </p:nvSpPr>
         <p:spPr>
           <a:xfrm>
-            <a:off x="4622800" y="2641600"/>
+            <a:off x="4622800" y="3093885"/>
             <a:ext cx="2946400" cy="254000"/>
           </a:xfrm>
           <a:prstGeom prst="rect">
@@ -13074,7 +13133,7 @@
         </p:nvSpPr>
         <p:spPr>
           <a:xfrm>
-            <a:off x="4622800" y="2971800"/>
+            <a:off x="4622800" y="3424085"/>
             <a:ext cx="2946400" cy="762000"/>
           </a:xfrm>
           <a:prstGeom prst="rect">
@@ -13114,7 +13173,7 @@
         </p:nvSpPr>
         <p:spPr>
           <a:xfrm>
-            <a:off x="4622800" y="3733800"/>
+            <a:off x="4622800" y="4186085"/>
             <a:ext cx="2946400" cy="1701800"/>
           </a:xfrm>
           <a:prstGeom prst="rect">
@@ -13154,7 +13213,7 @@
         </p:nvSpPr>
         <p:spPr>
           <a:xfrm>
-            <a:off x="8128000" y="2413000"/>
+            <a:off x="8128000" y="2865285"/>
             <a:ext cx="3454400" cy="3175000"/>
           </a:xfrm>
           <a:prstGeom prst="roundRect">
@@ -13210,7 +13269,7 @@
         </p:nvSpPr>
         <p:spPr>
           <a:xfrm>
-            <a:off x="8382000" y="2641600"/>
+            <a:off x="8382000" y="3093885"/>
             <a:ext cx="2946400" cy="254000"/>
           </a:xfrm>
           <a:prstGeom prst="rect">
@@ -13250,7 +13309,7 @@
         </p:nvSpPr>
         <p:spPr>
           <a:xfrm>
-            <a:off x="8382000" y="2971800"/>
+            <a:off x="8382000" y="3424085"/>
             <a:ext cx="2946400" cy="762000"/>
           </a:xfrm>
           <a:prstGeom prst="rect">
@@ -13290,7 +13349,7 @@
         </p:nvSpPr>
         <p:spPr>
           <a:xfrm>
-            <a:off x="8382000" y="3733800"/>
+            <a:off x="8382000" y="4186085"/>
             <a:ext cx="2946400" cy="1701800"/>
           </a:xfrm>
           <a:prstGeom prst="rect">
@@ -14132,13 +14191,30 @@
           <a:lstStyle/>
           <a:p>
             <a:r>
-              <a:rPr lang="en-SG" sz="3600" b="1">
+              <a:rPr lang="en-SG" sz="3600" b="1" dirty="0">
                 <a:solidFill>
                   <a:srgbClr val="F3ECFF"/>
                 </a:solidFill>
                 <a:latin typeface="Segoe UI" panose="020B0502040204020203" pitchFamily="34" charset="0"/>
               </a:rPr>
-              <a:t>History picks what to exercise. Live behaviour sets how hard.</a:t>
+              <a:t>History picks what to exercise. </a:t>
+            </a:r>
+            <a:br>
+              <a:rPr lang="en-SG" sz="3600" b="1" dirty="0">
+                <a:solidFill>
+                  <a:srgbClr val="F3ECFF"/>
+                </a:solidFill>
+                <a:latin typeface="Segoe UI" panose="020B0502040204020203" pitchFamily="34" charset="0"/>
+              </a:rPr>
+            </a:br>
+            <a:r>
+              <a:rPr lang="en-SG" sz="3600" b="1" dirty="0">
+                <a:solidFill>
+                  <a:srgbClr val="F3ECFF"/>
+                </a:solidFill>
+                <a:latin typeface="Segoe UI" panose="020B0502040204020203" pitchFamily="34" charset="0"/>
+              </a:rPr>
+              <a:t>Live behaviour sets how hard.</a:t>
             </a:r>
           </a:p>
         </p:txBody>

--- a/cgf-demo/docs/pitch/Adaptive-CGF-Trainer.pptx
+++ b/cgf-demo/docs/pitch/Adaptive-CGF-Trainer.pptx
@@ -13529,7 +13529,16 @@
                 </a:solidFill>
                 <a:latin typeface="Segoe UI" panose="020B0502040204020203" pitchFamily="34" charset="0"/>
               </a:rPr>
-              <a:t>The key challenge: train each person’s weak spot, without losing control</a:t>
+              <a:t>Train </a:t>
+            </a:r>
+            <a:r>
+              <a:rPr lang="en-SG" sz="3600" b="1" dirty="0">
+                <a:solidFill>
+                  <a:srgbClr val="F7FAFD"/>
+                </a:solidFill>
+                <a:latin typeface="Segoe UI" panose="020B0502040204020203" pitchFamily="34" charset="0"/>
+              </a:rPr>
+              <a:t>each person’s weak spot, without losing control</a:t>
             </a:r>
           </a:p>
         </p:txBody>

--- a/cgf-demo/docs/pitch/Adaptive-CGF-Trainer.pptx
+++ b/cgf-demo/docs/pitch/Adaptive-CGF-Trainer.pptx
@@ -6170,7 +6170,7 @@
           <a:lstStyle/>
           <a:p>
             <a:r>
-              <a:rPr lang="en-SG" sz="2000">
+              <a:rPr lang="en-SG" sz="2000" dirty="0">
                 <a:solidFill>
                   <a:srgbClr val="E1EAF4"/>
                 </a:solidFill>
@@ -6210,13 +6210,13 @@
           <a:lstStyle/>
           <a:p>
             <a:r>
-              <a:rPr lang="en-SG" sz="1600">
+              <a:rPr lang="en-SG" sz="1600" dirty="0">
                 <a:solidFill>
                   <a:srgbClr val="93ABC6"/>
                 </a:solidFill>
                 <a:latin typeface="Segoe UI" panose="020B0502040204020203" pitchFamily="34" charset="0"/>
               </a:rPr>
-              <a:t>Air, sea and land platforms. Runs offline from a file.</a:t>
+              <a:t>Air, sea and land platforms. </a:t>
             </a:r>
           </a:p>
         </p:txBody>
@@ -12785,7 +12785,7 @@
                 </a:solidFill>
                 <a:latin typeface="Segoe UI" panose="020B0502040204020203" pitchFamily="34" charset="0"/>
               </a:rPr>
-              <a:t>many trainees</a:t>
+              <a:t>Many trainees</a:t>
             </a:r>
             <a:br>
               <a:rPr lang="en-SG" sz="4000" b="1" dirty="0">
@@ -12802,7 +12802,7 @@
                 </a:solidFill>
                 <a:latin typeface="Segoe UI" panose="020B0502040204020203" pitchFamily="34" charset="0"/>
               </a:rPr>
-              <a:t>one scripted enemy</a:t>
+              <a:t>One scripted enemy</a:t>
             </a:r>
           </a:p>
         </p:txBody>
@@ -13707,14 +13707,33 @@
           </a:bodyPr>
           <a:lstStyle/>
           <a:p>
-            <a:r>
-              <a:rPr lang="en-SG" sz="1600">
+            <a:pPr marL="285750" indent="-285750">
+              <a:buFont typeface="Arial" panose="020B0604020202020204" pitchFamily="34" charset="0"/>
+              <a:buChar char="•"/>
+            </a:pPr>
+            <a:r>
+              <a:rPr lang="en-SG" sz="1600" dirty="0">
                 <a:solidFill>
                   <a:srgbClr val="E1EAF4"/>
                 </a:solidFill>
                 <a:latin typeface="Segoe UI" panose="020B0502040204020203" pitchFamily="34" charset="0"/>
               </a:rPr>
-              <a:t>A scripted enemy cannot target one trainee’s weak spot, ease off when they struggle or push when they excel. An instructor cannot retune it by hand for every seat.</a:t>
+              <a:t>A scripted enemy cannot target one trainee’s weak spot, ease off when they struggle or push when they excel. </a:t>
+            </a:r>
+          </a:p>
+          <a:p>
+            <a:pPr marL="285750" indent="-285750">
+              <a:buFont typeface="Arial" panose="020B0604020202020204" pitchFamily="34" charset="0"/>
+              <a:buChar char="•"/>
+            </a:pPr>
+            <a:r>
+              <a:rPr lang="en-SG" sz="1600" dirty="0">
+                <a:solidFill>
+                  <a:srgbClr val="E1EAF4"/>
+                </a:solidFill>
+                <a:latin typeface="Segoe UI" panose="020B0502040204020203" pitchFamily="34" charset="0"/>
+              </a:rPr>
+              <a:t>An instructor cannot retune it by hand for every seat.</a:t>
             </a:r>
           </a:p>
         </p:txBody>
@@ -13843,14 +13862,48 @@
           </a:bodyPr>
           <a:lstStyle/>
           <a:p>
-            <a:r>
-              <a:rPr lang="en-SG" sz="1600">
+            <a:pPr marL="285750" indent="-285750">
+              <a:buFont typeface="Arial" panose="020B0604020202020204" pitchFamily="34" charset="0"/>
+              <a:buChar char="•"/>
+            </a:pPr>
+            <a:r>
+              <a:rPr lang="en-SG" sz="1600" dirty="0">
                 <a:solidFill>
                   <a:srgbClr val="EBDFFF"/>
                 </a:solidFill>
                 <a:latin typeface="Segoe UI" panose="020B0502040204020203" pitchFamily="34" charset="0"/>
               </a:rPr>
-              <a:t>History picks the competency to exercise. The last 10 events set how hard to push. Every change stays inside the instructor’s limits and is explained.</a:t>
+              <a:t>History picks the competency to exercise. </a:t>
+            </a:r>
+          </a:p>
+          <a:p>
+            <a:pPr marL="285750" indent="-285750">
+              <a:buFont typeface="Arial" panose="020B0604020202020204" pitchFamily="34" charset="0"/>
+              <a:buChar char="•"/>
+            </a:pPr>
+            <a:r>
+              <a:rPr lang="en-SG" sz="1600" dirty="0">
+                <a:solidFill>
+                  <a:srgbClr val="EBDFFF"/>
+                </a:solidFill>
+                <a:latin typeface="Segoe UI" panose="020B0502040204020203" pitchFamily="34" charset="0"/>
+              </a:rPr>
+              <a:t>The last 10 events set how hard to push. </a:t>
+            </a:r>
+          </a:p>
+          <a:p>
+            <a:pPr marL="285750" indent="-285750">
+              <a:buFont typeface="Arial" panose="020B0604020202020204" pitchFamily="34" charset="0"/>
+              <a:buChar char="•"/>
+            </a:pPr>
+            <a:r>
+              <a:rPr lang="en-SG" sz="1600" dirty="0">
+                <a:solidFill>
+                  <a:srgbClr val="EBDFFF"/>
+                </a:solidFill>
+                <a:latin typeface="Segoe UI" panose="020B0502040204020203" pitchFamily="34" charset="0"/>
+              </a:rPr>
+              <a:t>Every change stays inside the instructor’s limits and is explained.</a:t>
             </a:r>
           </a:p>
         </p:txBody>

--- a/cgf-demo/docs/pitch/Adaptive-CGF-Trainer.pptx
+++ b/cgf-demo/docs/pitch/Adaptive-CGF-Trainer.pptx
@@ -11921,13 +11921,13 @@
           <a:lstStyle/>
           <a:p>
             <a:r>
-              <a:rPr lang="en-SG" sz="2400" b="1">
+              <a:rPr lang="en-SG" sz="2400" b="1" dirty="0">
                 <a:solidFill>
                   <a:srgbClr val="F3ECFF"/>
                 </a:solidFill>
                 <a:latin typeface="Segoe UI" panose="020B0502040204020203" pitchFamily="34" charset="0"/>
               </a:rPr>
-              <a:t>252 to 629 person-days</a:t>
+              <a:t>252 to 629 man-days</a:t>
             </a:r>
           </a:p>
         </p:txBody>
